--- a/docs/산출물_20260909/06_ECS_화면설계서.pptx
+++ b/docs/산출물_20260909/06_ECS_화면설계서.pptx
@@ -5,34 +5,30 @@
     <p:sldMasterId id="2147483648" r:id="rId1"/>
   </p:sldMasterIdLst>
   <p:sldIdLst>
-    <p:sldId id="256" r:id="rId7"/>
-    <p:sldId id="257" r:id="rId8"/>
-    <p:sldId id="258" r:id="rId9"/>
-    <p:sldId id="259" r:id="rId10"/>
-    <p:sldId id="260" r:id="rId11"/>
-    <p:sldId id="261" r:id="rId12"/>
-    <p:sldId id="262" r:id="rId13"/>
-    <p:sldId id="263" r:id="rId14"/>
-    <p:sldId id="264" r:id="rId15"/>
-    <p:sldId id="265" r:id="rId16"/>
-    <p:sldId id="266" r:id="rId17"/>
-    <p:sldId id="267" r:id="rId18"/>
-    <p:sldId id="268" r:id="rId19"/>
-    <p:sldId id="269" r:id="rId20"/>
-    <p:sldId id="270" r:id="rId21"/>
-    <p:sldId id="271" r:id="rId22"/>
-    <p:sldId id="272" r:id="rId23"/>
-    <p:sldId id="273" r:id="rId24"/>
-    <p:sldId id="274" r:id="rId25"/>
-    <p:sldId id="275" r:id="rId26"/>
-    <p:sldId id="276" r:id="rId27"/>
-    <p:sldId id="277" r:id="rId28"/>
-    <p:sldId id="278" r:id="rId29"/>
-    <p:sldId id="279" r:id="rId30"/>
-    <p:sldId id="280" r:id="rId31"/>
-    <p:sldId id="281" r:id="rId32"/>
+    <p:sldId id="256" r:id="rId2"/>
+    <p:sldId id="257" r:id="rId3"/>
+    <p:sldId id="258" r:id="rId4"/>
+    <p:sldId id="259" r:id="rId5"/>
+    <p:sldId id="260" r:id="rId6"/>
+    <p:sldId id="261" r:id="rId7"/>
+    <p:sldId id="262" r:id="rId8"/>
+    <p:sldId id="263" r:id="rId9"/>
+    <p:sldId id="264" r:id="rId10"/>
+    <p:sldId id="265" r:id="rId11"/>
+    <p:sldId id="266" r:id="rId12"/>
+    <p:sldId id="267" r:id="rId13"/>
+    <p:sldId id="268" r:id="rId14"/>
+    <p:sldId id="269" r:id="rId15"/>
+    <p:sldId id="270" r:id="rId16"/>
+    <p:sldId id="271" r:id="rId17"/>
+    <p:sldId id="272" r:id="rId18"/>
+    <p:sldId id="273" r:id="rId19"/>
+    <p:sldId id="274" r:id="rId20"/>
+    <p:sldId id="275" r:id="rId21"/>
+    <p:sldId id="276" r:id="rId22"/>
+    <p:sldId id="277" r:id="rId23"/>
   </p:sldIdLst>
-  <p:sldSz cx="12191695" cy="6858000" type="screen4x3"/>
+  <p:sldSz cx="12192000" cy="6858000"/>
   <p:notesSz cx="6858000" cy="9144000"/>
   <p:defaultTextStyle>
     <a:defPPr>
@@ -129,6 +125,22 @@
       </a:defRPr>
     </a:lvl9pPr>
   </p:defaultTextStyle>
+  <p:extLst>
+    <p:ext uri="{EFAFB233-063F-42B5-8137-9DF3F51BA10A}">
+      <p15:sldGuideLst xmlns:p15="http://schemas.microsoft.com/office/powerpoint/2012/main">
+        <p15:guide id="1" orient="horz" pos="2160">
+          <p15:clr>
+            <a:srgbClr val="A4A3A4"/>
+          </p15:clr>
+        </p15:guide>
+        <p15:guide id="2" pos="2880">
+          <p15:clr>
+            <a:srgbClr val="A4A3A4"/>
+          </p15:clr>
+        </p15:guide>
+      </p15:sldGuideLst>
+    </p:ext>
+  </p:extLst>
 </p:presentation>
 </file>
 
@@ -170,10 +182,9 @@
           <a:lstStyle/>
           <a:p>
             <a:r>
-              <a:rPr lang="en-US" smtClean="0"/>
+              <a:rPr lang="en-US"/>
               <a:t>Click to edit Master title style</a:t>
             </a:r>
-            <a:endParaRPr lang="en-US"/>
           </a:p>
         </p:txBody>
       </p:sp>
@@ -289,10 +300,9 @@
           </a:lstStyle>
           <a:p>
             <a:r>
-              <a:rPr lang="en-US" smtClean="0"/>
+              <a:rPr lang="en-US"/>
               <a:t>Click to edit Master subtitle style</a:t>
             </a:r>
-            <a:endParaRPr lang="en-US"/>
           </a:p>
         </p:txBody>
       </p:sp>
@@ -313,7 +323,7 @@
           <a:p>
             <a:fld id="{5BCAD085-E8A6-8845-BD4E-CB4CCA059FC4}" type="datetimeFigureOut">
               <a:rPr lang="en-US" smtClean="0"/>
-              <a:t>1/27/13</a:t>
+              <a:t>9/9/2026</a:t>
             </a:fld>
             <a:endParaRPr lang="en-US"/>
           </a:p>
@@ -407,10 +417,9 @@
           <a:lstStyle/>
           <a:p>
             <a:r>
-              <a:rPr lang="en-US" smtClean="0"/>
+              <a:rPr lang="en-US"/>
               <a:t>Click to edit Master title style</a:t>
             </a:r>
-            <a:endParaRPr lang="en-US"/>
           </a:p>
         </p:txBody>
       </p:sp>
@@ -431,38 +440,37 @@
           <a:p>
             <a:pPr lvl="0"/>
             <a:r>
-              <a:rPr lang="en-US" smtClean="0"/>
+              <a:rPr lang="en-US"/>
               <a:t>Click to edit Master text styles</a:t>
             </a:r>
           </a:p>
           <a:p>
             <a:pPr lvl="1"/>
             <a:r>
-              <a:rPr lang="en-US" smtClean="0"/>
+              <a:rPr lang="en-US"/>
               <a:t>Second level</a:t>
             </a:r>
           </a:p>
           <a:p>
             <a:pPr lvl="2"/>
             <a:r>
-              <a:rPr lang="en-US" smtClean="0"/>
+              <a:rPr lang="en-US"/>
               <a:t>Third level</a:t>
             </a:r>
           </a:p>
           <a:p>
             <a:pPr lvl="3"/>
             <a:r>
-              <a:rPr lang="en-US" smtClean="0"/>
+              <a:rPr lang="en-US"/>
               <a:t>Fourth level</a:t>
             </a:r>
           </a:p>
           <a:p>
             <a:pPr lvl="4"/>
             <a:r>
-              <a:rPr lang="en-US" smtClean="0"/>
+              <a:rPr lang="en-US"/>
               <a:t>Fifth level</a:t>
             </a:r>
-            <a:endParaRPr lang="en-US"/>
           </a:p>
         </p:txBody>
       </p:sp>
@@ -483,7 +491,7 @@
           <a:p>
             <a:fld id="{5BCAD085-E8A6-8845-BD4E-CB4CCA059FC4}" type="datetimeFigureOut">
               <a:rPr lang="en-US" smtClean="0"/>
-              <a:t>1/27/13</a:t>
+              <a:t>9/9/2026</a:t>
             </a:fld>
             <a:endParaRPr lang="en-US"/>
           </a:p>
@@ -582,10 +590,9 @@
           <a:lstStyle/>
           <a:p>
             <a:r>
-              <a:rPr lang="en-US" smtClean="0"/>
+              <a:rPr lang="en-US"/>
               <a:t>Click to edit Master title style</a:t>
             </a:r>
-            <a:endParaRPr lang="en-US"/>
           </a:p>
         </p:txBody>
       </p:sp>
@@ -611,38 +618,37 @@
           <a:p>
             <a:pPr lvl="0"/>
             <a:r>
-              <a:rPr lang="en-US" smtClean="0"/>
+              <a:rPr lang="en-US"/>
               <a:t>Click to edit Master text styles</a:t>
             </a:r>
           </a:p>
           <a:p>
             <a:pPr lvl="1"/>
             <a:r>
-              <a:rPr lang="en-US" smtClean="0"/>
+              <a:rPr lang="en-US"/>
               <a:t>Second level</a:t>
             </a:r>
           </a:p>
           <a:p>
             <a:pPr lvl="2"/>
             <a:r>
-              <a:rPr lang="en-US" smtClean="0"/>
+              <a:rPr lang="en-US"/>
               <a:t>Third level</a:t>
             </a:r>
           </a:p>
           <a:p>
             <a:pPr lvl="3"/>
             <a:r>
-              <a:rPr lang="en-US" smtClean="0"/>
+              <a:rPr lang="en-US"/>
               <a:t>Fourth level</a:t>
             </a:r>
           </a:p>
           <a:p>
             <a:pPr lvl="4"/>
             <a:r>
-              <a:rPr lang="en-US" smtClean="0"/>
+              <a:rPr lang="en-US"/>
               <a:t>Fifth level</a:t>
             </a:r>
-            <a:endParaRPr lang="en-US"/>
           </a:p>
         </p:txBody>
       </p:sp>
@@ -663,7 +669,7 @@
           <a:p>
             <a:fld id="{5BCAD085-E8A6-8845-BD4E-CB4CCA059FC4}" type="datetimeFigureOut">
               <a:rPr lang="en-US" smtClean="0"/>
-              <a:t>1/27/13</a:t>
+              <a:t>9/9/2026</a:t>
             </a:fld>
             <a:endParaRPr lang="en-US"/>
           </a:p>
@@ -757,10 +763,9 @@
           <a:lstStyle/>
           <a:p>
             <a:r>
-              <a:rPr lang="en-US" smtClean="0"/>
+              <a:rPr lang="en-US"/>
               <a:t>Click to edit Master title style</a:t>
             </a:r>
-            <a:endParaRPr lang="en-US"/>
           </a:p>
         </p:txBody>
       </p:sp>
@@ -781,38 +786,37 @@
           <a:p>
             <a:pPr lvl="0"/>
             <a:r>
-              <a:rPr lang="en-US" smtClean="0"/>
+              <a:rPr lang="en-US"/>
               <a:t>Click to edit Master text styles</a:t>
             </a:r>
           </a:p>
           <a:p>
             <a:pPr lvl="1"/>
             <a:r>
-              <a:rPr lang="en-US" smtClean="0"/>
+              <a:rPr lang="en-US"/>
               <a:t>Second level</a:t>
             </a:r>
           </a:p>
           <a:p>
             <a:pPr lvl="2"/>
             <a:r>
-              <a:rPr lang="en-US" smtClean="0"/>
+              <a:rPr lang="en-US"/>
               <a:t>Third level</a:t>
             </a:r>
           </a:p>
           <a:p>
             <a:pPr lvl="3"/>
             <a:r>
-              <a:rPr lang="en-US" smtClean="0"/>
+              <a:rPr lang="en-US"/>
               <a:t>Fourth level</a:t>
             </a:r>
           </a:p>
           <a:p>
             <a:pPr lvl="4"/>
             <a:r>
-              <a:rPr lang="en-US" smtClean="0"/>
+              <a:rPr lang="en-US"/>
               <a:t>Fifth level</a:t>
             </a:r>
-            <a:endParaRPr lang="en-US"/>
           </a:p>
         </p:txBody>
       </p:sp>
@@ -833,7 +837,7 @@
           <a:p>
             <a:fld id="{5BCAD085-E8A6-8845-BD4E-CB4CCA059FC4}" type="datetimeFigureOut">
               <a:rPr lang="en-US" smtClean="0"/>
-              <a:t>1/27/13</a:t>
+              <a:t>9/9/2026</a:t>
             </a:fld>
             <a:endParaRPr lang="en-US"/>
           </a:p>
@@ -936,10 +940,9 @@
           </a:lstStyle>
           <a:p>
             <a:r>
-              <a:rPr lang="en-US" smtClean="0"/>
+              <a:rPr lang="en-US"/>
               <a:t>Click to edit Master title style</a:t>
             </a:r>
-            <a:endParaRPr lang="en-US"/>
           </a:p>
         </p:txBody>
       </p:sp>
@@ -1056,7 +1059,7 @@
           <a:p>
             <a:pPr lvl="0"/>
             <a:r>
-              <a:rPr lang="en-US" smtClean="0"/>
+              <a:rPr lang="en-US"/>
               <a:t>Click to edit Master text styles</a:t>
             </a:r>
           </a:p>
@@ -1079,7 +1082,7 @@
           <a:p>
             <a:fld id="{5BCAD085-E8A6-8845-BD4E-CB4CCA059FC4}" type="datetimeFigureOut">
               <a:rPr lang="en-US" smtClean="0"/>
-              <a:t>1/27/13</a:t>
+              <a:t>9/9/2026</a:t>
             </a:fld>
             <a:endParaRPr lang="en-US"/>
           </a:p>
@@ -1173,10 +1176,9 @@
           <a:lstStyle/>
           <a:p>
             <a:r>
-              <a:rPr lang="en-US" smtClean="0"/>
+              <a:rPr lang="en-US"/>
               <a:t>Click to edit Master title style</a:t>
             </a:r>
-            <a:endParaRPr lang="en-US"/>
           </a:p>
         </p:txBody>
       </p:sp>
@@ -1230,38 +1232,37 @@
           <a:p>
             <a:pPr lvl="0"/>
             <a:r>
-              <a:rPr lang="en-US" smtClean="0"/>
+              <a:rPr lang="en-US"/>
               <a:t>Click to edit Master text styles</a:t>
             </a:r>
           </a:p>
           <a:p>
             <a:pPr lvl="1"/>
             <a:r>
-              <a:rPr lang="en-US" smtClean="0"/>
+              <a:rPr lang="en-US"/>
               <a:t>Second level</a:t>
             </a:r>
           </a:p>
           <a:p>
             <a:pPr lvl="2"/>
             <a:r>
-              <a:rPr lang="en-US" smtClean="0"/>
+              <a:rPr lang="en-US"/>
               <a:t>Third level</a:t>
             </a:r>
           </a:p>
           <a:p>
             <a:pPr lvl="3"/>
             <a:r>
-              <a:rPr lang="en-US" smtClean="0"/>
+              <a:rPr lang="en-US"/>
               <a:t>Fourth level</a:t>
             </a:r>
           </a:p>
           <a:p>
             <a:pPr lvl="4"/>
             <a:r>
-              <a:rPr lang="en-US" smtClean="0"/>
+              <a:rPr lang="en-US"/>
               <a:t>Fifth level</a:t>
             </a:r>
-            <a:endParaRPr lang="en-US"/>
           </a:p>
         </p:txBody>
       </p:sp>
@@ -1315,38 +1316,37 @@
           <a:p>
             <a:pPr lvl="0"/>
             <a:r>
-              <a:rPr lang="en-US" smtClean="0"/>
+              <a:rPr lang="en-US"/>
               <a:t>Click to edit Master text styles</a:t>
             </a:r>
           </a:p>
           <a:p>
             <a:pPr lvl="1"/>
             <a:r>
-              <a:rPr lang="en-US" smtClean="0"/>
+              <a:rPr lang="en-US"/>
               <a:t>Second level</a:t>
             </a:r>
           </a:p>
           <a:p>
             <a:pPr lvl="2"/>
             <a:r>
-              <a:rPr lang="en-US" smtClean="0"/>
+              <a:rPr lang="en-US"/>
               <a:t>Third level</a:t>
             </a:r>
           </a:p>
           <a:p>
             <a:pPr lvl="3"/>
             <a:r>
-              <a:rPr lang="en-US" smtClean="0"/>
+              <a:rPr lang="en-US"/>
               <a:t>Fourth level</a:t>
             </a:r>
           </a:p>
           <a:p>
             <a:pPr lvl="4"/>
             <a:r>
-              <a:rPr lang="en-US" smtClean="0"/>
+              <a:rPr lang="en-US"/>
               <a:t>Fifth level</a:t>
             </a:r>
-            <a:endParaRPr lang="en-US"/>
           </a:p>
         </p:txBody>
       </p:sp>
@@ -1367,7 +1367,7 @@
           <a:p>
             <a:fld id="{5BCAD085-E8A6-8845-BD4E-CB4CCA059FC4}" type="datetimeFigureOut">
               <a:rPr lang="en-US" smtClean="0"/>
-              <a:t>1/27/13</a:t>
+              <a:t>9/9/2026</a:t>
             </a:fld>
             <a:endParaRPr lang="en-US"/>
           </a:p>
@@ -1465,10 +1465,9 @@
           </a:lstStyle>
           <a:p>
             <a:r>
-              <a:rPr lang="en-US" smtClean="0"/>
+              <a:rPr lang="en-US"/>
               <a:t>Click to edit Master title style</a:t>
             </a:r>
-            <a:endParaRPr lang="en-US"/>
           </a:p>
         </p:txBody>
       </p:sp>
@@ -1531,7 +1530,7 @@
           <a:p>
             <a:pPr lvl="0"/>
             <a:r>
-              <a:rPr lang="en-US" smtClean="0"/>
+              <a:rPr lang="en-US"/>
               <a:t>Click to edit Master text styles</a:t>
             </a:r>
           </a:p>
@@ -1587,38 +1586,37 @@
           <a:p>
             <a:pPr lvl="0"/>
             <a:r>
-              <a:rPr lang="en-US" smtClean="0"/>
+              <a:rPr lang="en-US"/>
               <a:t>Click to edit Master text styles</a:t>
             </a:r>
           </a:p>
           <a:p>
             <a:pPr lvl="1"/>
             <a:r>
-              <a:rPr lang="en-US" smtClean="0"/>
+              <a:rPr lang="en-US"/>
               <a:t>Second level</a:t>
             </a:r>
           </a:p>
           <a:p>
             <a:pPr lvl="2"/>
             <a:r>
-              <a:rPr lang="en-US" smtClean="0"/>
+              <a:rPr lang="en-US"/>
               <a:t>Third level</a:t>
             </a:r>
           </a:p>
           <a:p>
             <a:pPr lvl="3"/>
             <a:r>
-              <a:rPr lang="en-US" smtClean="0"/>
+              <a:rPr lang="en-US"/>
               <a:t>Fourth level</a:t>
             </a:r>
           </a:p>
           <a:p>
             <a:pPr lvl="4"/>
             <a:r>
-              <a:rPr lang="en-US" smtClean="0"/>
+              <a:rPr lang="en-US"/>
               <a:t>Fifth level</a:t>
             </a:r>
-            <a:endParaRPr lang="en-US"/>
           </a:p>
         </p:txBody>
       </p:sp>
@@ -1681,7 +1679,7 @@
           <a:p>
             <a:pPr lvl="0"/>
             <a:r>
-              <a:rPr lang="en-US" smtClean="0"/>
+              <a:rPr lang="en-US"/>
               <a:t>Click to edit Master text styles</a:t>
             </a:r>
           </a:p>
@@ -1737,38 +1735,37 @@
           <a:p>
             <a:pPr lvl="0"/>
             <a:r>
-              <a:rPr lang="en-US" smtClean="0"/>
+              <a:rPr lang="en-US"/>
               <a:t>Click to edit Master text styles</a:t>
             </a:r>
           </a:p>
           <a:p>
             <a:pPr lvl="1"/>
             <a:r>
-              <a:rPr lang="en-US" smtClean="0"/>
+              <a:rPr lang="en-US"/>
               <a:t>Second level</a:t>
             </a:r>
           </a:p>
           <a:p>
             <a:pPr lvl="2"/>
             <a:r>
-              <a:rPr lang="en-US" smtClean="0"/>
+              <a:rPr lang="en-US"/>
               <a:t>Third level</a:t>
             </a:r>
           </a:p>
           <a:p>
             <a:pPr lvl="3"/>
             <a:r>
-              <a:rPr lang="en-US" smtClean="0"/>
+              <a:rPr lang="en-US"/>
               <a:t>Fourth level</a:t>
             </a:r>
           </a:p>
           <a:p>
             <a:pPr lvl="4"/>
             <a:r>
-              <a:rPr lang="en-US" smtClean="0"/>
+              <a:rPr lang="en-US"/>
               <a:t>Fifth level</a:t>
             </a:r>
-            <a:endParaRPr lang="en-US"/>
           </a:p>
         </p:txBody>
       </p:sp>
@@ -1789,7 +1786,7 @@
           <a:p>
             <a:fld id="{5BCAD085-E8A6-8845-BD4E-CB4CCA059FC4}" type="datetimeFigureOut">
               <a:rPr lang="en-US" smtClean="0"/>
-              <a:t>1/27/13</a:t>
+              <a:t>9/9/2026</a:t>
             </a:fld>
             <a:endParaRPr lang="en-US"/>
           </a:p>
@@ -1883,10 +1880,9 @@
           <a:lstStyle/>
           <a:p>
             <a:r>
-              <a:rPr lang="en-US" smtClean="0"/>
+              <a:rPr lang="en-US"/>
               <a:t>Click to edit Master title style</a:t>
             </a:r>
-            <a:endParaRPr lang="en-US"/>
           </a:p>
         </p:txBody>
       </p:sp>
@@ -1907,7 +1903,7 @@
           <a:p>
             <a:fld id="{5BCAD085-E8A6-8845-BD4E-CB4CCA059FC4}" type="datetimeFigureOut">
               <a:rPr lang="en-US" smtClean="0"/>
-              <a:t>1/27/13</a:t>
+              <a:t>9/9/2026</a:t>
             </a:fld>
             <a:endParaRPr lang="en-US"/>
           </a:p>
@@ -2002,7 +1998,7 @@
           <a:p>
             <a:fld id="{5BCAD085-E8A6-8845-BD4E-CB4CCA059FC4}" type="datetimeFigureOut">
               <a:rPr lang="en-US" smtClean="0"/>
-              <a:t>1/27/13</a:t>
+              <a:t>9/9/2026</a:t>
             </a:fld>
             <a:endParaRPr lang="en-US"/>
           </a:p>
@@ -2105,10 +2101,9 @@
           </a:lstStyle>
           <a:p>
             <a:r>
-              <a:rPr lang="en-US" smtClean="0"/>
+              <a:rPr lang="en-US"/>
               <a:t>Click to edit Master title style</a:t>
             </a:r>
-            <a:endParaRPr lang="en-US"/>
           </a:p>
         </p:txBody>
       </p:sp>
@@ -2162,38 +2157,37 @@
           <a:p>
             <a:pPr lvl="0"/>
             <a:r>
-              <a:rPr lang="en-US" smtClean="0"/>
+              <a:rPr lang="en-US"/>
               <a:t>Click to edit Master text styles</a:t>
             </a:r>
           </a:p>
           <a:p>
             <a:pPr lvl="1"/>
             <a:r>
-              <a:rPr lang="en-US" smtClean="0"/>
+              <a:rPr lang="en-US"/>
               <a:t>Second level</a:t>
             </a:r>
           </a:p>
           <a:p>
             <a:pPr lvl="2"/>
             <a:r>
-              <a:rPr lang="en-US" smtClean="0"/>
+              <a:rPr lang="en-US"/>
               <a:t>Third level</a:t>
             </a:r>
           </a:p>
           <a:p>
             <a:pPr lvl="3"/>
             <a:r>
-              <a:rPr lang="en-US" smtClean="0"/>
+              <a:rPr lang="en-US"/>
               <a:t>Fourth level</a:t>
             </a:r>
           </a:p>
           <a:p>
             <a:pPr lvl="4"/>
             <a:r>
-              <a:rPr lang="en-US" smtClean="0"/>
+              <a:rPr lang="en-US"/>
               <a:t>Fifth level</a:t>
             </a:r>
-            <a:endParaRPr lang="en-US"/>
           </a:p>
         </p:txBody>
       </p:sp>
@@ -2256,7 +2250,7 @@
           <a:p>
             <a:pPr lvl="0"/>
             <a:r>
-              <a:rPr lang="en-US" smtClean="0"/>
+              <a:rPr lang="en-US"/>
               <a:t>Click to edit Master text styles</a:t>
             </a:r>
           </a:p>
@@ -2279,7 +2273,7 @@
           <a:p>
             <a:fld id="{5BCAD085-E8A6-8845-BD4E-CB4CCA059FC4}" type="datetimeFigureOut">
               <a:rPr lang="en-US" smtClean="0"/>
-              <a:t>1/27/13</a:t>
+              <a:t>9/9/2026</a:t>
             </a:fld>
             <a:endParaRPr lang="en-US"/>
           </a:p>
@@ -2382,10 +2376,9 @@
           </a:lstStyle>
           <a:p>
             <a:r>
-              <a:rPr lang="en-US" smtClean="0"/>
+              <a:rPr lang="en-US"/>
               <a:t>Click to edit Master title style</a:t>
             </a:r>
-            <a:endParaRPr lang="en-US"/>
           </a:p>
         </p:txBody>
       </p:sp>
@@ -2509,7 +2502,7 @@
           <a:p>
             <a:pPr lvl="0"/>
             <a:r>
-              <a:rPr lang="en-US" smtClean="0"/>
+              <a:rPr lang="en-US"/>
               <a:t>Click to edit Master text styles</a:t>
             </a:r>
           </a:p>
@@ -2532,7 +2525,7 @@
           <a:p>
             <a:fld id="{5BCAD085-E8A6-8845-BD4E-CB4CCA059FC4}" type="datetimeFigureOut">
               <a:rPr lang="en-US" smtClean="0"/>
-              <a:t>1/27/13</a:t>
+              <a:t>9/9/2026</a:t>
             </a:fld>
             <a:endParaRPr lang="en-US"/>
           </a:p>
@@ -2641,10 +2634,9 @@
           <a:lstStyle/>
           <a:p>
             <a:r>
-              <a:rPr lang="en-US" smtClean="0"/>
+              <a:rPr lang="en-US"/>
               <a:t>Click to edit Master title style</a:t>
             </a:r>
-            <a:endParaRPr lang="en-US"/>
           </a:p>
         </p:txBody>
       </p:sp>
@@ -2675,38 +2667,37 @@
           <a:p>
             <a:pPr lvl="0"/>
             <a:r>
-              <a:rPr lang="en-US" smtClean="0"/>
+              <a:rPr lang="en-US"/>
               <a:t>Click to edit Master text styles</a:t>
             </a:r>
           </a:p>
           <a:p>
             <a:pPr lvl="1"/>
             <a:r>
-              <a:rPr lang="en-US" smtClean="0"/>
+              <a:rPr lang="en-US"/>
               <a:t>Second level</a:t>
             </a:r>
           </a:p>
           <a:p>
             <a:pPr lvl="2"/>
             <a:r>
-              <a:rPr lang="en-US" smtClean="0"/>
+              <a:rPr lang="en-US"/>
               <a:t>Third level</a:t>
             </a:r>
           </a:p>
           <a:p>
             <a:pPr lvl="3"/>
             <a:r>
-              <a:rPr lang="en-US" smtClean="0"/>
+              <a:rPr lang="en-US"/>
               <a:t>Fourth level</a:t>
             </a:r>
           </a:p>
           <a:p>
             <a:pPr lvl="4"/>
             <a:r>
-              <a:rPr lang="en-US" smtClean="0"/>
+              <a:rPr lang="en-US"/>
               <a:t>Fifth level</a:t>
             </a:r>
-            <a:endParaRPr lang="en-US"/>
           </a:p>
         </p:txBody>
       </p:sp>
@@ -2745,7 +2736,7 @@
           <a:p>
             <a:fld id="{5BCAD085-E8A6-8845-BD4E-CB4CCA059FC4}" type="datetimeFigureOut">
               <a:rPr lang="en-US" smtClean="0"/>
-              <a:t>1/27/13</a:t>
+              <a:t>9/9/2026</a:t>
             </a:fld>
             <a:endParaRPr lang="en-US"/>
           </a:p>
@@ -3104,7 +3095,7 @@
 </file>
 
 <file path=ppt/slides/slide1.xml><?xml version="1.0" encoding="utf-8"?>
-<p:sld xmlns:a="http://schemas.openxmlformats.org/drawingml/2006/main" xmlns:p="http://schemas.openxmlformats.org/presentationml/2006/main" xmlns:r="http://schemas.openxmlformats.org/officeDocument/2006/relationships">
+<p:sld xmlns:a="http://schemas.openxmlformats.org/drawingml/2006/main" xmlns:r="http://schemas.openxmlformats.org/officeDocument/2006/relationships" xmlns:p="http://schemas.openxmlformats.org/presentationml/2006/main">
   <p:cSld>
     <p:spTree>
       <p:nvGrpSpPr>
@@ -3112,7 +3103,14 @@
         <p:cNvGrpSpPr/>
         <p:nvPr/>
       </p:nvGrpSpPr>
-      <p:grpSpPr/>
+      <p:grpSpPr>
+        <a:xfrm>
+          <a:off x="0" y="0"/>
+          <a:ext cx="0" cy="0"/>
+          <a:chOff x="0" y="0"/>
+          <a:chExt cx="0" cy="0"/>
+        </a:xfrm>
+      </p:grpSpPr>
       <p:sp>
         <p:nvSpPr>
           <p:cNvPr id="2" name="Rectangle 1"/>
@@ -3153,6 +3151,7 @@
           <a:lstStyle/>
           <a:p>
             <a:pPr algn="ctr"/>
+            <a:endParaRPr/>
           </a:p>
         </p:txBody>
       </p:sp>
@@ -3173,7 +3172,7 @@
           <a:noFill/>
         </p:spPr>
         <p:txBody>
-          <a:bodyPr wrap="square" anchor="t" lIns="45720" rIns="45720">
+          <a:bodyPr wrap="square" lIns="45720" rIns="45720" anchor="t">
             <a:spAutoFit/>
           </a:bodyPr>
           <a:lstStyle/>
@@ -3208,7 +3207,7 @@
           <a:noFill/>
         </p:spPr>
         <p:txBody>
-          <a:bodyPr wrap="square" anchor="t" lIns="45720" rIns="45720">
+          <a:bodyPr wrap="square" lIns="45720" rIns="45720" anchor="t">
             <a:spAutoFit/>
           </a:bodyPr>
           <a:lstStyle/>
@@ -3243,7 +3242,7 @@
           <a:noFill/>
         </p:spPr>
         <p:txBody>
-          <a:bodyPr wrap="square" anchor="t" lIns="45720" rIns="45720">
+          <a:bodyPr wrap="square" lIns="45720" rIns="45720" anchor="t">
             <a:spAutoFit/>
           </a:bodyPr>
           <a:lstStyle/>
@@ -3270,7 +3269,7 @@
 </file>
 
 <file path=ppt/slides/slide10.xml><?xml version="1.0" encoding="utf-8"?>
-<p:sld xmlns:a="http://schemas.openxmlformats.org/drawingml/2006/main" xmlns:p="http://schemas.openxmlformats.org/presentationml/2006/main" xmlns:r="http://schemas.openxmlformats.org/officeDocument/2006/relationships">
+<p:sld xmlns:a="http://schemas.openxmlformats.org/drawingml/2006/main" xmlns:r="http://schemas.openxmlformats.org/officeDocument/2006/relationships" xmlns:p="http://schemas.openxmlformats.org/presentationml/2006/main">
   <p:cSld>
     <p:spTree>
       <p:nvGrpSpPr>
@@ -3278,7 +3277,14 @@
         <p:cNvGrpSpPr/>
         <p:nvPr/>
       </p:nvGrpSpPr>
-      <p:grpSpPr/>
+      <p:grpSpPr>
+        <a:xfrm>
+          <a:off x="0" y="0"/>
+          <a:ext cx="0" cy="0"/>
+          <a:chOff x="0" y="0"/>
+          <a:chExt cx="0" cy="0"/>
+        </a:xfrm>
+      </p:grpSpPr>
       <p:sp>
         <p:nvSpPr>
           <p:cNvPr id="2" name="TextBox 1"/>
@@ -3296,7 +3302,7 @@
           <a:noFill/>
         </p:spPr>
         <p:txBody>
-          <a:bodyPr wrap="square" anchor="ctr" lIns="45720" rIns="45720">
+          <a:bodyPr wrap="square" lIns="45720" rIns="45720" anchor="ctr">
             <a:spAutoFit/>
           </a:bodyPr>
           <a:lstStyle/>
@@ -3356,12 +3362,226 @@
           <a:lstStyle/>
           <a:p>
             <a:pPr algn="ctr"/>
+            <a:endParaRPr/>
+          </a:p>
+        </p:txBody>
+      </p:sp>
+      <p:sp>
+        <p:nvSpPr>
+          <p:cNvPr id="5" name="TextBox 4"/>
+          <p:cNvSpPr txBox="1"/>
+          <p:nvPr/>
+        </p:nvSpPr>
+        <p:spPr>
+          <a:xfrm>
+            <a:off x="8503920" y="1188720"/>
+            <a:ext cx="3291840" cy="5029200"/>
+          </a:xfrm>
+          <a:prstGeom prst="rect">
+            <a:avLst/>
+          </a:prstGeom>
+          <a:noFill/>
+        </p:spPr>
+        <p:txBody>
+          <a:bodyPr wrap="square" lIns="45720" rIns="45720" anchor="t">
+            <a:spAutoFit/>
+          </a:bodyPr>
+          <a:lstStyle/>
+          <a:p>
+            <a:pPr algn="l"/>
+            <a:r>
+              <a:rPr sz="1300" b="1">
+                <a:solidFill>
+                  <a:srgbClr val="1E2761"/>
+                </a:solidFill>
+                <a:latin typeface="맑은 고딕"/>
+              </a:rPr>
+              <a:t>■ 메뉴 Path</a:t>
+            </a:r>
+          </a:p>
+          <a:p>
+            <a:pPr algn="l"/>
+            <a:r>
+              <a:rPr sz="1100" b="0">
+                <a:solidFill>
+                  <a:srgbClr val="595959"/>
+                </a:solidFill>
+                <a:latin typeface="맑은 고딕"/>
+              </a:rPr>
+              <a:t>ECS ▷ 판넬 보기</a:t>
+            </a:r>
+          </a:p>
+          <a:p>
+            <a:pPr algn="l"/>
+            <a:endParaRPr sz="1100" b="0">
+              <a:solidFill>
+                <a:srgbClr val="595959"/>
+              </a:solidFill>
+              <a:latin typeface="맑은 고딕"/>
+            </a:endParaRPr>
+          </a:p>
+          <a:p>
+            <a:pPr algn="l"/>
+            <a:r>
+              <a:rPr sz="1300" b="1">
+                <a:solidFill>
+                  <a:srgbClr val="1E2761"/>
+                </a:solidFill>
+                <a:latin typeface="맑은 고딕"/>
+              </a:rPr>
+              <a:t>■ 프로그램 개요</a:t>
+            </a:r>
+          </a:p>
+          <a:p>
+            <a:pPr algn="l"/>
+            <a:r>
+              <a:rPr sz="1100" b="0">
+                <a:solidFill>
+                  <a:srgbClr val="595959"/>
+                </a:solidFill>
+                <a:latin typeface="맑은 고딕"/>
+              </a:rPr>
+              <a:t>작업 목록·설비 상세·크레인 반송 현황을 팝업 대화상자 대신 화면에 붙는 판넬로 본다. 버튼 3개를 각각 켜고 끈다.</a:t>
+            </a:r>
+          </a:p>
+          <a:p>
+            <a:pPr algn="l"/>
+            <a:endParaRPr sz="1100" b="0">
+              <a:solidFill>
+                <a:srgbClr val="595959"/>
+              </a:solidFill>
+              <a:latin typeface="맑은 고딕"/>
+            </a:endParaRPr>
+          </a:p>
+          <a:p>
+            <a:pPr algn="l"/>
+            <a:r>
+              <a:rPr sz="1300" b="1">
+                <a:solidFill>
+                  <a:srgbClr val="1E2761"/>
+                </a:solidFill>
+                <a:latin typeface="맑은 고딕"/>
+              </a:rPr>
+              <a:t>■ 특기사항</a:t>
+            </a:r>
+          </a:p>
+          <a:p>
+            <a:pPr algn="l"/>
+            <a:r>
+              <a:rPr sz="1000" b="0">
+                <a:solidFill>
+                  <a:srgbClr val="595959"/>
+                </a:solidFill>
+                <a:latin typeface="맑은 고딕"/>
+              </a:rPr>
+              <a:t>· 작업정보 판넬은 화면 상단에 가로로 넓게 붙는다(작업 목록은 열이 많아 가로가 필요하다).</a:t>
+            </a:r>
+          </a:p>
+          <a:p>
+            <a:pPr algn="l"/>
+            <a:r>
+              <a:rPr sz="1000" b="0">
+                <a:solidFill>
+                  <a:srgbClr val="595959"/>
+                </a:solidFill>
+                <a:latin typeface="맑은 고딕"/>
+              </a:rPr>
+              <a:t>· 상세정보·설비반송 판넬은 오른쪽에 위아래로 붙는다.</a:t>
+            </a:r>
+          </a:p>
+          <a:p>
+            <a:pPr algn="l"/>
+            <a:r>
+              <a:rPr sz="1000" b="0">
+                <a:solidFill>
+                  <a:srgbClr val="595959"/>
+                </a:solidFill>
+                <a:latin typeface="맑은 고딕"/>
+              </a:rPr>
+              <a:t>· 상세정보 판넬이 켜져 있으면 메인 화면에서 설비를 클릭했을 때 팝업 대신 이 판넬의 해당 탭으로 바뀐다.</a:t>
+            </a:r>
+          </a:p>
+        </p:txBody>
+      </p:sp>
+      <p:sp>
+        <p:nvSpPr>
+          <p:cNvPr id="6" name="TextBox 5"/>
+          <p:cNvSpPr txBox="1"/>
+          <p:nvPr/>
+        </p:nvSpPr>
+        <p:spPr>
+          <a:xfrm>
+            <a:off x="457200" y="6400800"/>
+            <a:ext cx="3657600" cy="320040"/>
+          </a:xfrm>
+          <a:prstGeom prst="rect">
+            <a:avLst/>
+          </a:prstGeom>
+          <a:noFill/>
+        </p:spPr>
+        <p:txBody>
+          <a:bodyPr wrap="square" lIns="45720" rIns="45720" anchor="t">
+            <a:spAutoFit/>
+          </a:bodyPr>
+          <a:lstStyle/>
+          <a:p>
+            <a:pPr algn="l"/>
+            <a:r>
+              <a:rPr sz="1000" b="0">
+                <a:solidFill>
+                  <a:srgbClr val="595959"/>
+                </a:solidFill>
+                <a:latin typeface="맑은 고딕"/>
+              </a:rPr>
+              <a:t>LG 화학 1동 ECS  |  화면설계서</a:t>
+            </a:r>
+          </a:p>
+        </p:txBody>
+      </p:sp>
+      <p:sp>
+        <p:nvSpPr>
+          <p:cNvPr id="7" name="TextBox 6"/>
+          <p:cNvSpPr txBox="1"/>
+          <p:nvPr/>
+        </p:nvSpPr>
+        <p:spPr>
+          <a:xfrm>
+            <a:off x="11155680" y="6400800"/>
+            <a:ext cx="731520" cy="320040"/>
+          </a:xfrm>
+          <a:prstGeom prst="rect">
+            <a:avLst/>
+          </a:prstGeom>
+          <a:noFill/>
+        </p:spPr>
+        <p:txBody>
+          <a:bodyPr wrap="square" lIns="45720" rIns="45720" anchor="t">
+            <a:spAutoFit/>
+          </a:bodyPr>
+          <a:lstStyle/>
+          <a:p>
+            <a:pPr algn="r"/>
+            <a:r>
+              <a:rPr sz="1000" b="0">
+                <a:solidFill>
+                  <a:srgbClr val="595959"/>
+                </a:solidFill>
+                <a:latin typeface="맑은 고딕"/>
+              </a:rPr>
+              <a:t>10</a:t>
+            </a:r>
           </a:p>
         </p:txBody>
       </p:sp>
       <p:pic>
         <p:nvPicPr>
-          <p:cNvPr id="4" name="Picture 3" descr="alltask_ctrl.png"/>
+          <p:cNvPr id="9" name="그림 8">
+            <a:extLst>
+              <a:ext uri="{FF2B5EF4-FFF2-40B4-BE49-F238E27FC236}">
+                <a16:creationId xmlns:a16="http://schemas.microsoft.com/office/drawing/2014/main" id="{D639867E-39DB-F908-3AE1-218E6AE568B9}"/>
+              </a:ext>
+            </a:extLst>
+          </p:cNvPr>
           <p:cNvPicPr>
             <a:picLocks noChangeAspect="1"/>
           </p:cNvPicPr>
@@ -3375,227 +3595,14 @@
         </p:blipFill>
         <p:spPr>
           <a:xfrm>
-            <a:off x="877126" y="1280160"/>
-            <a:ext cx="7023987" cy="4846320"/>
+            <a:off x="3622250" y="3000315"/>
+            <a:ext cx="1533739" cy="857370"/>
           </a:xfrm>
           <a:prstGeom prst="rect">
             <a:avLst/>
           </a:prstGeom>
         </p:spPr>
       </p:pic>
-      <p:sp>
-        <p:nvSpPr>
-          <p:cNvPr id="5" name="TextBox 4"/>
-          <p:cNvSpPr txBox="1"/>
-          <p:nvPr/>
-        </p:nvSpPr>
-        <p:spPr>
-          <a:xfrm>
-            <a:off x="8503920" y="1188720"/>
-            <a:ext cx="3291840" cy="5029200"/>
-          </a:xfrm>
-          <a:prstGeom prst="rect">
-            <a:avLst/>
-          </a:prstGeom>
-          <a:noFill/>
-        </p:spPr>
-        <p:txBody>
-          <a:bodyPr wrap="square" anchor="t" lIns="45720" rIns="45720">
-            <a:spAutoFit/>
-          </a:bodyPr>
-          <a:lstStyle/>
-          <a:p>
-            <a:pPr algn="l"/>
-            <a:r>
-              <a:rPr sz="1300" b="1">
-                <a:solidFill>
-                  <a:srgbClr val="1E2761"/>
-                </a:solidFill>
-                <a:latin typeface="맑은 고딕"/>
-              </a:rPr>
-              <a:t>■ 메뉴 Path</a:t>
-            </a:r>
-          </a:p>
-          <a:p>
-            <a:pPr algn="l"/>
-            <a:r>
-              <a:rPr sz="1100" b="0">
-                <a:solidFill>
-                  <a:srgbClr val="595959"/>
-                </a:solidFill>
-                <a:latin typeface="맑은 고딕"/>
-              </a:rPr>
-              <a:t>ECS ▷ 판넬 보기</a:t>
-            </a:r>
-          </a:p>
-          <a:p>
-            <a:pPr algn="l"/>
-            <a:r>
-              <a:rPr sz="600" b="0">
-                <a:solidFill>
-                  <a:srgbClr val="595959"/>
-                </a:solidFill>
-                <a:latin typeface="맑은 고딕"/>
-              </a:rPr>
-              <a:t/>
-            </a:r>
-          </a:p>
-          <a:p>
-            <a:pPr algn="l"/>
-            <a:r>
-              <a:rPr sz="1300" b="1">
-                <a:solidFill>
-                  <a:srgbClr val="1E2761"/>
-                </a:solidFill>
-                <a:latin typeface="맑은 고딕"/>
-              </a:rPr>
-              <a:t>■ 프로그램 개요</a:t>
-            </a:r>
-          </a:p>
-          <a:p>
-            <a:pPr algn="l"/>
-            <a:r>
-              <a:rPr sz="1100" b="0">
-                <a:solidFill>
-                  <a:srgbClr val="595959"/>
-                </a:solidFill>
-                <a:latin typeface="맑은 고딕"/>
-              </a:rPr>
-              <a:t>작업 목록·설비 상세·크레인 반송 현황을 팝업 대화상자 대신 화면에 붙는 판넬로 본다. 버튼 3개를 각각 켜고 끈다.</a:t>
-            </a:r>
-          </a:p>
-          <a:p>
-            <a:pPr algn="l"/>
-            <a:r>
-              <a:rPr sz="600" b="0">
-                <a:solidFill>
-                  <a:srgbClr val="595959"/>
-                </a:solidFill>
-                <a:latin typeface="맑은 고딕"/>
-              </a:rPr>
-              <a:t/>
-            </a:r>
-          </a:p>
-          <a:p>
-            <a:pPr algn="l"/>
-            <a:r>
-              <a:rPr sz="1300" b="1">
-                <a:solidFill>
-                  <a:srgbClr val="1E2761"/>
-                </a:solidFill>
-                <a:latin typeface="맑은 고딕"/>
-              </a:rPr>
-              <a:t>■ 특기사항</a:t>
-            </a:r>
-          </a:p>
-          <a:p>
-            <a:pPr algn="l"/>
-            <a:r>
-              <a:rPr sz="1000" b="0">
-                <a:solidFill>
-                  <a:srgbClr val="595959"/>
-                </a:solidFill>
-                <a:latin typeface="맑은 고딕"/>
-              </a:rPr>
-              <a:t>· 작업정보 판넬은 화면 상단에 가로로 넓게 붙는다(작업 목록은 열이 많아 가로가 필요하다).</a:t>
-            </a:r>
-          </a:p>
-          <a:p>
-            <a:pPr algn="l"/>
-            <a:r>
-              <a:rPr sz="1000" b="0">
-                <a:solidFill>
-                  <a:srgbClr val="595959"/>
-                </a:solidFill>
-                <a:latin typeface="맑은 고딕"/>
-              </a:rPr>
-              <a:t>· 상세정보·설비반송 판넬은 오른쪽에 위아래로 붙는다.</a:t>
-            </a:r>
-          </a:p>
-          <a:p>
-            <a:pPr algn="l"/>
-            <a:r>
-              <a:rPr sz="1000" b="0">
-                <a:solidFill>
-                  <a:srgbClr val="595959"/>
-                </a:solidFill>
-                <a:latin typeface="맑은 고딕"/>
-              </a:rPr>
-              <a:t>· 상세정보 판넬이 켜져 있으면 메인 화면에서 설비를 클릭했을 때 팝업 대신 이 판넬의 해당 탭으로 바뀐다.</a:t>
-            </a:r>
-          </a:p>
-        </p:txBody>
-      </p:sp>
-      <p:sp>
-        <p:nvSpPr>
-          <p:cNvPr id="6" name="TextBox 5"/>
-          <p:cNvSpPr txBox="1"/>
-          <p:nvPr/>
-        </p:nvSpPr>
-        <p:spPr>
-          <a:xfrm>
-            <a:off x="457200" y="6400800"/>
-            <a:ext cx="3657600" cy="320040"/>
-          </a:xfrm>
-          <a:prstGeom prst="rect">
-            <a:avLst/>
-          </a:prstGeom>
-          <a:noFill/>
-        </p:spPr>
-        <p:txBody>
-          <a:bodyPr wrap="square" anchor="t" lIns="45720" rIns="45720">
-            <a:spAutoFit/>
-          </a:bodyPr>
-          <a:lstStyle/>
-          <a:p>
-            <a:pPr algn="l"/>
-            <a:r>
-              <a:rPr sz="1000" b="0">
-                <a:solidFill>
-                  <a:srgbClr val="595959"/>
-                </a:solidFill>
-                <a:latin typeface="맑은 고딕"/>
-              </a:rPr>
-              <a:t>LG 화학 1동 ECS  |  화면설계서</a:t>
-            </a:r>
-          </a:p>
-        </p:txBody>
-      </p:sp>
-      <p:sp>
-        <p:nvSpPr>
-          <p:cNvPr id="7" name="TextBox 6"/>
-          <p:cNvSpPr txBox="1"/>
-          <p:nvPr/>
-        </p:nvSpPr>
-        <p:spPr>
-          <a:xfrm>
-            <a:off x="11155680" y="6400800"/>
-            <a:ext cx="731520" cy="320040"/>
-          </a:xfrm>
-          <a:prstGeom prst="rect">
-            <a:avLst/>
-          </a:prstGeom>
-          <a:noFill/>
-        </p:spPr>
-        <p:txBody>
-          <a:bodyPr wrap="square" anchor="t" lIns="45720" rIns="45720">
-            <a:spAutoFit/>
-          </a:bodyPr>
-          <a:lstStyle/>
-          <a:p>
-            <a:pPr algn="r"/>
-            <a:r>
-              <a:rPr sz="1000" b="0">
-                <a:solidFill>
-                  <a:srgbClr val="595959"/>
-                </a:solidFill>
-                <a:latin typeface="맑은 고딕"/>
-              </a:rPr>
-              <a:t>10</a:t>
-            </a:r>
-          </a:p>
-        </p:txBody>
-      </p:sp>
     </p:spTree>
   </p:cSld>
   <p:clrMapOvr>
@@ -3605,7 +3612,7 @@
 </file>
 
 <file path=ppt/slides/slide11.xml><?xml version="1.0" encoding="utf-8"?>
-<p:sld xmlns:a="http://schemas.openxmlformats.org/drawingml/2006/main" xmlns:p="http://schemas.openxmlformats.org/presentationml/2006/main" xmlns:r="http://schemas.openxmlformats.org/officeDocument/2006/relationships">
+<p:sld xmlns:a="http://schemas.openxmlformats.org/drawingml/2006/main" xmlns:r="http://schemas.openxmlformats.org/officeDocument/2006/relationships" xmlns:p="http://schemas.openxmlformats.org/presentationml/2006/main">
   <p:cSld>
     <p:spTree>
       <p:nvGrpSpPr>
@@ -3613,7 +3620,14 @@
         <p:cNvGrpSpPr/>
         <p:nvPr/>
       </p:nvGrpSpPr>
-      <p:grpSpPr/>
+      <p:grpSpPr>
+        <a:xfrm>
+          <a:off x="0" y="0"/>
+          <a:ext cx="0" cy="0"/>
+          <a:chOff x="0" y="0"/>
+          <a:chExt cx="0" cy="0"/>
+        </a:xfrm>
+      </p:grpSpPr>
       <p:sp>
         <p:nvSpPr>
           <p:cNvPr id="2" name="TextBox 1"/>
@@ -3631,7 +3645,7 @@
           <a:noFill/>
         </p:spPr>
         <p:txBody>
-          <a:bodyPr wrap="square" anchor="ctr" lIns="45720" rIns="45720">
+          <a:bodyPr wrap="square" lIns="45720" rIns="45720" anchor="ctr">
             <a:spAutoFit/>
           </a:bodyPr>
           <a:lstStyle/>
@@ -3691,6 +3705,7 @@
           <a:lstStyle/>
           <a:p>
             <a:pPr algn="ctr"/>
+            <a:endParaRPr/>
           </a:p>
         </p:txBody>
       </p:sp>
@@ -3711,7 +3726,7 @@
           <a:noFill/>
         </p:spPr>
         <p:txBody>
-          <a:bodyPr wrap="square" anchor="t" lIns="45720" rIns="45720">
+          <a:bodyPr wrap="square" lIns="45720" rIns="45720" anchor="t">
             <a:spAutoFit/>
           </a:bodyPr>
           <a:lstStyle/>
@@ -3741,15 +3756,12 @@
           </a:p>
           <a:p>
             <a:pPr algn="l"/>
-            <a:r>
-              <a:rPr sz="600" b="0">
-                <a:solidFill>
-                  <a:srgbClr val="595959"/>
-                </a:solidFill>
-                <a:latin typeface="맑은 고딕"/>
-              </a:rPr>
-              <a:t/>
-            </a:r>
+            <a:endParaRPr sz="1100" b="0">
+              <a:solidFill>
+                <a:srgbClr val="595959"/>
+              </a:solidFill>
+              <a:latin typeface="맑은 고딕"/>
+            </a:endParaRPr>
           </a:p>
           <a:p>
             <a:pPr algn="l"/>
@@ -3794,7 +3806,7 @@
           <a:noFill/>
         </p:spPr>
         <p:txBody>
-          <a:bodyPr wrap="square" anchor="t" lIns="45720" rIns="45720">
+          <a:bodyPr wrap="square" lIns="45720" rIns="45720" anchor="t">
             <a:spAutoFit/>
           </a:bodyPr>
           <a:lstStyle/>
@@ -3829,7 +3841,7 @@
           <a:noFill/>
         </p:spPr>
         <p:txBody>
-          <a:bodyPr wrap="square" anchor="t" lIns="45720" rIns="45720">
+          <a:bodyPr wrap="square" lIns="45720" rIns="45720" anchor="t">
             <a:spAutoFit/>
           </a:bodyPr>
           <a:lstStyle/>
@@ -3856,7 +3868,7 @@
 </file>
 
 <file path=ppt/slides/slide12.xml><?xml version="1.0" encoding="utf-8"?>
-<p:sld xmlns:a="http://schemas.openxmlformats.org/drawingml/2006/main" xmlns:p="http://schemas.openxmlformats.org/presentationml/2006/main" xmlns:r="http://schemas.openxmlformats.org/officeDocument/2006/relationships">
+<p:sld xmlns:a="http://schemas.openxmlformats.org/drawingml/2006/main" xmlns:r="http://schemas.openxmlformats.org/officeDocument/2006/relationships" xmlns:p="http://schemas.openxmlformats.org/presentationml/2006/main">
   <p:cSld>
     <p:spTree>
       <p:nvGrpSpPr>
@@ -3864,7 +3876,14 @@
         <p:cNvGrpSpPr/>
         <p:nvPr/>
       </p:nvGrpSpPr>
-      <p:grpSpPr/>
+      <p:grpSpPr>
+        <a:xfrm>
+          <a:off x="0" y="0"/>
+          <a:ext cx="0" cy="0"/>
+          <a:chOff x="0" y="0"/>
+          <a:chExt cx="0" cy="0"/>
+        </a:xfrm>
+      </p:grpSpPr>
       <p:sp>
         <p:nvSpPr>
           <p:cNvPr id="2" name="TextBox 1"/>
@@ -3882,7 +3901,7 @@
           <a:noFill/>
         </p:spPr>
         <p:txBody>
-          <a:bodyPr wrap="square" anchor="ctr" lIns="45720" rIns="45720">
+          <a:bodyPr wrap="square" lIns="45720" rIns="45720" anchor="ctr">
             <a:spAutoFit/>
           </a:bodyPr>
           <a:lstStyle/>
@@ -3942,6 +3961,7 @@
           <a:lstStyle/>
           <a:p>
             <a:pPr algn="ctr"/>
+            <a:endParaRPr/>
           </a:p>
         </p:txBody>
       </p:sp>
@@ -3986,7 +4006,7 @@
           <a:noFill/>
         </p:spPr>
         <p:txBody>
-          <a:bodyPr wrap="square" anchor="t" lIns="45720" rIns="45720">
+          <a:bodyPr wrap="square" lIns="45720" rIns="45720" anchor="t">
             <a:spAutoFit/>
           </a:bodyPr>
           <a:lstStyle/>
@@ -4011,20 +4031,17 @@
                 </a:solidFill>
                 <a:latin typeface="맑은 고딕"/>
               </a:rPr>
-              <a:t>MANUAL ▷ JOB</a:t>
-            </a:r>
-          </a:p>
-          <a:p>
-            <a:pPr algn="l"/>
-            <a:r>
-              <a:rPr sz="600" b="0">
-                <a:solidFill>
-                  <a:srgbClr val="595959"/>
-                </a:solidFill>
-                <a:latin typeface="맑은 고딕"/>
-              </a:rPr>
-              <a:t/>
-            </a:r>
+              <a:t>수동조작 ▷ 작업</a:t>
+            </a:r>
+          </a:p>
+          <a:p>
+            <a:pPr algn="l"/>
+            <a:endParaRPr sz="1100" b="0">
+              <a:solidFill>
+                <a:srgbClr val="595959"/>
+              </a:solidFill>
+              <a:latin typeface="맑은 고딕"/>
+            </a:endParaRPr>
           </a:p>
           <a:p>
             <a:pPr algn="l"/>
@@ -4052,15 +4069,12 @@
           </a:p>
           <a:p>
             <a:pPr algn="l"/>
-            <a:r>
-              <a:rPr sz="600" b="0">
-                <a:solidFill>
-                  <a:srgbClr val="595959"/>
-                </a:solidFill>
-                <a:latin typeface="맑은 고딕"/>
-              </a:rPr>
-              <a:t/>
-            </a:r>
+            <a:endParaRPr sz="1100" b="0">
+              <a:solidFill>
+                <a:srgbClr val="595959"/>
+              </a:solidFill>
+              <a:latin typeface="맑은 고딕"/>
+            </a:endParaRPr>
           </a:p>
           <a:p>
             <a:pPr algn="l"/>
@@ -4117,7 +4131,7 @@
           <a:noFill/>
         </p:spPr>
         <p:txBody>
-          <a:bodyPr wrap="square" anchor="t" lIns="45720" rIns="45720">
+          <a:bodyPr wrap="square" lIns="45720" rIns="45720" anchor="t">
             <a:spAutoFit/>
           </a:bodyPr>
           <a:lstStyle/>
@@ -4152,7 +4166,7 @@
           <a:noFill/>
         </p:spPr>
         <p:txBody>
-          <a:bodyPr wrap="square" anchor="t" lIns="45720" rIns="45720">
+          <a:bodyPr wrap="square" lIns="45720" rIns="45720" anchor="t">
             <a:spAutoFit/>
           </a:bodyPr>
           <a:lstStyle/>
@@ -4179,7 +4193,7 @@
 </file>
 
 <file path=ppt/slides/slide13.xml><?xml version="1.0" encoding="utf-8"?>
-<p:sld xmlns:a="http://schemas.openxmlformats.org/drawingml/2006/main" xmlns:p="http://schemas.openxmlformats.org/presentationml/2006/main" xmlns:r="http://schemas.openxmlformats.org/officeDocument/2006/relationships">
+<p:sld xmlns:a="http://schemas.openxmlformats.org/drawingml/2006/main" xmlns:r="http://schemas.openxmlformats.org/officeDocument/2006/relationships" xmlns:p="http://schemas.openxmlformats.org/presentationml/2006/main">
   <p:cSld>
     <p:spTree>
       <p:nvGrpSpPr>
@@ -4187,7 +4201,14 @@
         <p:cNvGrpSpPr/>
         <p:nvPr/>
       </p:nvGrpSpPr>
-      <p:grpSpPr/>
+      <p:grpSpPr>
+        <a:xfrm>
+          <a:off x="0" y="0"/>
+          <a:ext cx="0" cy="0"/>
+          <a:chOff x="0" y="0"/>
+          <a:chExt cx="0" cy="0"/>
+        </a:xfrm>
+      </p:grpSpPr>
       <p:sp>
         <p:nvSpPr>
           <p:cNvPr id="2" name="TextBox 1"/>
@@ -4205,7 +4226,7 @@
           <a:noFill/>
         </p:spPr>
         <p:txBody>
-          <a:bodyPr wrap="square" anchor="ctr" lIns="45720" rIns="45720">
+          <a:bodyPr wrap="square" lIns="45720" rIns="45720" anchor="ctr">
             <a:spAutoFit/>
           </a:bodyPr>
           <a:lstStyle/>
@@ -4265,6 +4286,7 @@
           <a:lstStyle/>
           <a:p>
             <a:pPr algn="ctr"/>
+            <a:endParaRPr/>
           </a:p>
         </p:txBody>
       </p:sp>
@@ -4309,7 +4331,7 @@
           <a:noFill/>
         </p:spPr>
         <p:txBody>
-          <a:bodyPr wrap="square" anchor="t" lIns="45720" rIns="45720">
+          <a:bodyPr wrap="square" lIns="45720" rIns="45720" anchor="t">
             <a:spAutoFit/>
           </a:bodyPr>
           <a:lstStyle/>
@@ -4334,20 +4356,17 @@
                 </a:solidFill>
                 <a:latin typeface="맑은 고딕"/>
               </a:rPr>
-              <a:t>MANUAL ▷ 크레인</a:t>
-            </a:r>
-          </a:p>
-          <a:p>
-            <a:pPr algn="l"/>
-            <a:r>
-              <a:rPr sz="600" b="0">
-                <a:solidFill>
-                  <a:srgbClr val="595959"/>
-                </a:solidFill>
-                <a:latin typeface="맑은 고딕"/>
-              </a:rPr>
-              <a:t/>
-            </a:r>
+              <a:t>수동조작 ▷ 크레인</a:t>
+            </a:r>
+          </a:p>
+          <a:p>
+            <a:pPr algn="l"/>
+            <a:endParaRPr sz="1100" b="0">
+              <a:solidFill>
+                <a:srgbClr val="595959"/>
+              </a:solidFill>
+              <a:latin typeface="맑은 고딕"/>
+            </a:endParaRPr>
           </a:p>
           <a:p>
             <a:pPr algn="l"/>
@@ -4375,15 +4394,12 @@
           </a:p>
           <a:p>
             <a:pPr algn="l"/>
-            <a:r>
-              <a:rPr sz="600" b="0">
-                <a:solidFill>
-                  <a:srgbClr val="595959"/>
-                </a:solidFill>
-                <a:latin typeface="맑은 고딕"/>
-              </a:rPr>
-              <a:t/>
-            </a:r>
+            <a:endParaRPr sz="1100" b="0">
+              <a:solidFill>
+                <a:srgbClr val="595959"/>
+              </a:solidFill>
+              <a:latin typeface="맑은 고딕"/>
+            </a:endParaRPr>
           </a:p>
           <a:p>
             <a:pPr algn="l"/>
@@ -4440,7 +4456,7 @@
           <a:noFill/>
         </p:spPr>
         <p:txBody>
-          <a:bodyPr wrap="square" anchor="t" lIns="45720" rIns="45720">
+          <a:bodyPr wrap="square" lIns="45720" rIns="45720" anchor="t">
             <a:spAutoFit/>
           </a:bodyPr>
           <a:lstStyle/>
@@ -4475,7 +4491,7 @@
           <a:noFill/>
         </p:spPr>
         <p:txBody>
-          <a:bodyPr wrap="square" anchor="t" lIns="45720" rIns="45720">
+          <a:bodyPr wrap="square" lIns="45720" rIns="45720" anchor="t">
             <a:spAutoFit/>
           </a:bodyPr>
           <a:lstStyle/>
@@ -4502,7 +4518,7 @@
 </file>
 
 <file path=ppt/slides/slide14.xml><?xml version="1.0" encoding="utf-8"?>
-<p:sld xmlns:a="http://schemas.openxmlformats.org/drawingml/2006/main" xmlns:p="http://schemas.openxmlformats.org/presentationml/2006/main" xmlns:r="http://schemas.openxmlformats.org/officeDocument/2006/relationships">
+<p:sld xmlns:a="http://schemas.openxmlformats.org/drawingml/2006/main" xmlns:r="http://schemas.openxmlformats.org/officeDocument/2006/relationships" xmlns:p="http://schemas.openxmlformats.org/presentationml/2006/main">
   <p:cSld>
     <p:spTree>
       <p:nvGrpSpPr>
@@ -4510,7 +4526,14 @@
         <p:cNvGrpSpPr/>
         <p:nvPr/>
       </p:nvGrpSpPr>
-      <p:grpSpPr/>
+      <p:grpSpPr>
+        <a:xfrm>
+          <a:off x="0" y="0"/>
+          <a:ext cx="0" cy="0"/>
+          <a:chOff x="0" y="0"/>
+          <a:chExt cx="0" cy="0"/>
+        </a:xfrm>
+      </p:grpSpPr>
       <p:sp>
         <p:nvSpPr>
           <p:cNvPr id="2" name="TextBox 1"/>
@@ -4528,7 +4551,7 @@
           <a:noFill/>
         </p:spPr>
         <p:txBody>
-          <a:bodyPr wrap="square" anchor="ctr" lIns="45720" rIns="45720">
+          <a:bodyPr wrap="square" lIns="45720" rIns="45720" anchor="ctr">
             <a:spAutoFit/>
           </a:bodyPr>
           <a:lstStyle/>
@@ -4588,6 +4611,7 @@
           <a:lstStyle/>
           <a:p>
             <a:pPr algn="ctr"/>
+            <a:endParaRPr/>
           </a:p>
         </p:txBody>
       </p:sp>
@@ -4632,7 +4656,7 @@
           <a:noFill/>
         </p:spPr>
         <p:txBody>
-          <a:bodyPr wrap="square" anchor="t" lIns="45720" rIns="45720">
+          <a:bodyPr wrap="square" lIns="45720" rIns="45720" anchor="t">
             <a:spAutoFit/>
           </a:bodyPr>
           <a:lstStyle/>
@@ -4657,20 +4681,17 @@
                 </a:solidFill>
                 <a:latin typeface="맑은 고딕"/>
               </a:rPr>
-              <a:t>MANUAL ▷ RTV</a:t>
-            </a:r>
-          </a:p>
-          <a:p>
-            <a:pPr algn="l"/>
-            <a:r>
-              <a:rPr sz="600" b="0">
-                <a:solidFill>
-                  <a:srgbClr val="595959"/>
-                </a:solidFill>
-                <a:latin typeface="맑은 고딕"/>
-              </a:rPr>
-              <a:t/>
-            </a:r>
+              <a:t>수동조작 ▷ RTV</a:t>
+            </a:r>
+          </a:p>
+          <a:p>
+            <a:pPr algn="l"/>
+            <a:endParaRPr sz="1100" b="0">
+              <a:solidFill>
+                <a:srgbClr val="595959"/>
+              </a:solidFill>
+              <a:latin typeface="맑은 고딕"/>
+            </a:endParaRPr>
           </a:p>
           <a:p>
             <a:pPr algn="l"/>
@@ -4698,15 +4719,12 @@
           </a:p>
           <a:p>
             <a:pPr algn="l"/>
-            <a:r>
-              <a:rPr sz="600" b="0">
-                <a:solidFill>
-                  <a:srgbClr val="595959"/>
-                </a:solidFill>
-                <a:latin typeface="맑은 고딕"/>
-              </a:rPr>
-              <a:t/>
-            </a:r>
+            <a:endParaRPr sz="1100" b="0">
+              <a:solidFill>
+                <a:srgbClr val="595959"/>
+              </a:solidFill>
+              <a:latin typeface="맑은 고딕"/>
+            </a:endParaRPr>
           </a:p>
           <a:p>
             <a:pPr algn="l"/>
@@ -4763,7 +4781,7 @@
           <a:noFill/>
         </p:spPr>
         <p:txBody>
-          <a:bodyPr wrap="square" anchor="t" lIns="45720" rIns="45720">
+          <a:bodyPr wrap="square" lIns="45720" rIns="45720" anchor="t">
             <a:spAutoFit/>
           </a:bodyPr>
           <a:lstStyle/>
@@ -4798,7 +4816,7 @@
           <a:noFill/>
         </p:spPr>
         <p:txBody>
-          <a:bodyPr wrap="square" anchor="t" lIns="45720" rIns="45720">
+          <a:bodyPr wrap="square" lIns="45720" rIns="45720" anchor="t">
             <a:spAutoFit/>
           </a:bodyPr>
           <a:lstStyle/>
@@ -4825,7 +4843,7 @@
 </file>
 
 <file path=ppt/slides/slide15.xml><?xml version="1.0" encoding="utf-8"?>
-<p:sld xmlns:a="http://schemas.openxmlformats.org/drawingml/2006/main" xmlns:p="http://schemas.openxmlformats.org/presentationml/2006/main" xmlns:r="http://schemas.openxmlformats.org/officeDocument/2006/relationships">
+<p:sld xmlns:a="http://schemas.openxmlformats.org/drawingml/2006/main" xmlns:r="http://schemas.openxmlformats.org/officeDocument/2006/relationships" xmlns:p="http://schemas.openxmlformats.org/presentationml/2006/main">
   <p:cSld>
     <p:spTree>
       <p:nvGrpSpPr>
@@ -4833,7 +4851,14 @@
         <p:cNvGrpSpPr/>
         <p:nvPr/>
       </p:nvGrpSpPr>
-      <p:grpSpPr/>
+      <p:grpSpPr>
+        <a:xfrm>
+          <a:off x="0" y="0"/>
+          <a:ext cx="0" cy="0"/>
+          <a:chOff x="0" y="0"/>
+          <a:chExt cx="0" cy="0"/>
+        </a:xfrm>
+      </p:grpSpPr>
       <p:sp>
         <p:nvSpPr>
           <p:cNvPr id="2" name="TextBox 1"/>
@@ -4851,7 +4876,7 @@
           <a:noFill/>
         </p:spPr>
         <p:txBody>
-          <a:bodyPr wrap="square" anchor="ctr" lIns="45720" rIns="45720">
+          <a:bodyPr wrap="square" lIns="45720" rIns="45720" anchor="ctr">
             <a:spAutoFit/>
           </a:bodyPr>
           <a:lstStyle/>
@@ -4911,6 +4936,7 @@
           <a:lstStyle/>
           <a:p>
             <a:pPr algn="ctr"/>
+            <a:endParaRPr/>
           </a:p>
         </p:txBody>
       </p:sp>
@@ -4955,7 +4981,7 @@
           <a:noFill/>
         </p:spPr>
         <p:txBody>
-          <a:bodyPr wrap="square" anchor="t" lIns="45720" rIns="45720">
+          <a:bodyPr wrap="square" lIns="45720" rIns="45720" anchor="t">
             <a:spAutoFit/>
           </a:bodyPr>
           <a:lstStyle/>
@@ -4980,20 +5006,17 @@
                 </a:solidFill>
                 <a:latin typeface="맑은 고딕"/>
               </a:rPr>
-              <a:t>LOG ▷ IO_LOG</a:t>
-            </a:r>
-          </a:p>
-          <a:p>
-            <a:pPr algn="l"/>
-            <a:r>
-              <a:rPr sz="600" b="0">
-                <a:solidFill>
-                  <a:srgbClr val="595959"/>
-                </a:solidFill>
-                <a:latin typeface="맑은 고딕"/>
-              </a:rPr>
-              <a:t/>
-            </a:r>
+              <a:t>로그 ▷ 작업로그</a:t>
+            </a:r>
+          </a:p>
+          <a:p>
+            <a:pPr algn="l"/>
+            <a:endParaRPr sz="1100" b="0">
+              <a:solidFill>
+                <a:srgbClr val="595959"/>
+              </a:solidFill>
+              <a:latin typeface="맑은 고딕"/>
+            </a:endParaRPr>
           </a:p>
           <a:p>
             <a:pPr algn="l"/>
@@ -5038,7 +5061,7 @@
           <a:noFill/>
         </p:spPr>
         <p:txBody>
-          <a:bodyPr wrap="square" anchor="t" lIns="45720" rIns="45720">
+          <a:bodyPr wrap="square" lIns="45720" rIns="45720" anchor="t">
             <a:spAutoFit/>
           </a:bodyPr>
           <a:lstStyle/>
@@ -5073,7 +5096,7 @@
           <a:noFill/>
         </p:spPr>
         <p:txBody>
-          <a:bodyPr wrap="square" anchor="t" lIns="45720" rIns="45720">
+          <a:bodyPr wrap="square" lIns="45720" rIns="45720" anchor="t">
             <a:spAutoFit/>
           </a:bodyPr>
           <a:lstStyle/>
@@ -5100,7 +5123,7 @@
 </file>
 
 <file path=ppt/slides/slide16.xml><?xml version="1.0" encoding="utf-8"?>
-<p:sld xmlns:a="http://schemas.openxmlformats.org/drawingml/2006/main" xmlns:p="http://schemas.openxmlformats.org/presentationml/2006/main" xmlns:r="http://schemas.openxmlformats.org/officeDocument/2006/relationships">
+<p:sld xmlns:a="http://schemas.openxmlformats.org/drawingml/2006/main" xmlns:r="http://schemas.openxmlformats.org/officeDocument/2006/relationships" xmlns:p="http://schemas.openxmlformats.org/presentationml/2006/main">
   <p:cSld>
     <p:spTree>
       <p:nvGrpSpPr>
@@ -5108,7 +5131,14 @@
         <p:cNvGrpSpPr/>
         <p:nvPr/>
       </p:nvGrpSpPr>
-      <p:grpSpPr/>
+      <p:grpSpPr>
+        <a:xfrm>
+          <a:off x="0" y="0"/>
+          <a:ext cx="0" cy="0"/>
+          <a:chOff x="0" y="0"/>
+          <a:chExt cx="0" cy="0"/>
+        </a:xfrm>
+      </p:grpSpPr>
       <p:sp>
         <p:nvSpPr>
           <p:cNvPr id="2" name="TextBox 1"/>
@@ -5126,7 +5156,7 @@
           <a:noFill/>
         </p:spPr>
         <p:txBody>
-          <a:bodyPr wrap="square" anchor="ctr" lIns="45720" rIns="45720">
+          <a:bodyPr wrap="square" lIns="45720" rIns="45720" anchor="ctr">
             <a:spAutoFit/>
           </a:bodyPr>
           <a:lstStyle/>
@@ -5186,6 +5216,7 @@
           <a:lstStyle/>
           <a:p>
             <a:pPr algn="ctr"/>
+            <a:endParaRPr/>
           </a:p>
         </p:txBody>
       </p:sp>
@@ -5230,7 +5261,7 @@
           <a:noFill/>
         </p:spPr>
         <p:txBody>
-          <a:bodyPr wrap="square" anchor="t" lIns="45720" rIns="45720">
+          <a:bodyPr wrap="square" lIns="45720" rIns="45720" anchor="t">
             <a:spAutoFit/>
           </a:bodyPr>
           <a:lstStyle/>
@@ -5255,20 +5286,17 @@
                 </a:solidFill>
                 <a:latin typeface="맑은 고딕"/>
               </a:rPr>
-              <a:t>LOG ▷ MES_LOG</a:t>
-            </a:r>
-          </a:p>
-          <a:p>
-            <a:pPr algn="l"/>
-            <a:r>
-              <a:rPr sz="600" b="0">
-                <a:solidFill>
-                  <a:srgbClr val="595959"/>
-                </a:solidFill>
-                <a:latin typeface="맑은 고딕"/>
-              </a:rPr>
-              <a:t/>
-            </a:r>
+              <a:t>로그 ▷ HOST로그</a:t>
+            </a:r>
+          </a:p>
+          <a:p>
+            <a:pPr algn="l"/>
+            <a:endParaRPr sz="1100" b="0">
+              <a:solidFill>
+                <a:srgbClr val="595959"/>
+              </a:solidFill>
+              <a:latin typeface="맑은 고딕"/>
+            </a:endParaRPr>
           </a:p>
           <a:p>
             <a:pPr algn="l"/>
@@ -5296,15 +5324,12 @@
           </a:p>
           <a:p>
             <a:pPr algn="l"/>
-            <a:r>
-              <a:rPr sz="600" b="0">
-                <a:solidFill>
-                  <a:srgbClr val="595959"/>
-                </a:solidFill>
-                <a:latin typeface="맑은 고딕"/>
-              </a:rPr>
-              <a:t/>
-            </a:r>
+            <a:endParaRPr sz="1100" b="0">
+              <a:solidFill>
+                <a:srgbClr val="595959"/>
+              </a:solidFill>
+              <a:latin typeface="맑은 고딕"/>
+            </a:endParaRPr>
           </a:p>
           <a:p>
             <a:pPr algn="l"/>
@@ -5349,7 +5374,7 @@
           <a:noFill/>
         </p:spPr>
         <p:txBody>
-          <a:bodyPr wrap="square" anchor="t" lIns="45720" rIns="45720">
+          <a:bodyPr wrap="square" lIns="45720" rIns="45720" anchor="t">
             <a:spAutoFit/>
           </a:bodyPr>
           <a:lstStyle/>
@@ -5384,7 +5409,7 @@
           <a:noFill/>
         </p:spPr>
         <p:txBody>
-          <a:bodyPr wrap="square" anchor="t" lIns="45720" rIns="45720">
+          <a:bodyPr wrap="square" lIns="45720" rIns="45720" anchor="t">
             <a:spAutoFit/>
           </a:bodyPr>
           <a:lstStyle/>
@@ -5411,7 +5436,7 @@
 </file>
 
 <file path=ppt/slides/slide17.xml><?xml version="1.0" encoding="utf-8"?>
-<p:sld xmlns:a="http://schemas.openxmlformats.org/drawingml/2006/main" xmlns:p="http://schemas.openxmlformats.org/presentationml/2006/main" xmlns:r="http://schemas.openxmlformats.org/officeDocument/2006/relationships">
+<p:sld xmlns:a="http://schemas.openxmlformats.org/drawingml/2006/main" xmlns:r="http://schemas.openxmlformats.org/officeDocument/2006/relationships" xmlns:p="http://schemas.openxmlformats.org/presentationml/2006/main">
   <p:cSld>
     <p:spTree>
       <p:nvGrpSpPr>
@@ -5419,7 +5444,14 @@
         <p:cNvGrpSpPr/>
         <p:nvPr/>
       </p:nvGrpSpPr>
-      <p:grpSpPr/>
+      <p:grpSpPr>
+        <a:xfrm>
+          <a:off x="0" y="0"/>
+          <a:ext cx="0" cy="0"/>
+          <a:chOff x="0" y="0"/>
+          <a:chExt cx="0" cy="0"/>
+        </a:xfrm>
+      </p:grpSpPr>
       <p:sp>
         <p:nvSpPr>
           <p:cNvPr id="2" name="TextBox 1"/>
@@ -5437,7 +5469,7 @@
           <a:noFill/>
         </p:spPr>
         <p:txBody>
-          <a:bodyPr wrap="square" anchor="ctr" lIns="45720" rIns="45720">
+          <a:bodyPr wrap="square" lIns="45720" rIns="45720" anchor="ctr">
             <a:spAutoFit/>
           </a:bodyPr>
           <a:lstStyle/>
@@ -5497,6 +5529,7 @@
           <a:lstStyle/>
           <a:p>
             <a:pPr algn="ctr"/>
+            <a:endParaRPr/>
           </a:p>
         </p:txBody>
       </p:sp>
@@ -5541,7 +5574,7 @@
           <a:noFill/>
         </p:spPr>
         <p:txBody>
-          <a:bodyPr wrap="square" anchor="t" lIns="45720" rIns="45720">
+          <a:bodyPr wrap="square" lIns="45720" rIns="45720" anchor="t">
             <a:spAutoFit/>
           </a:bodyPr>
           <a:lstStyle/>
@@ -5566,20 +5599,17 @@
                 </a:solidFill>
                 <a:latin typeface="맑은 고딕"/>
               </a:rPr>
-              <a:t>LOG ▷ EQP_HIS_LOG</a:t>
-            </a:r>
-          </a:p>
-          <a:p>
-            <a:pPr algn="l"/>
-            <a:r>
-              <a:rPr sz="600" b="0">
-                <a:solidFill>
-                  <a:srgbClr val="595959"/>
-                </a:solidFill>
-                <a:latin typeface="맑은 고딕"/>
-              </a:rPr>
-              <a:t/>
-            </a:r>
+              <a:t>로그 ▷ 설비에러이력</a:t>
+            </a:r>
+          </a:p>
+          <a:p>
+            <a:pPr algn="l"/>
+            <a:endParaRPr sz="1100" b="0">
+              <a:solidFill>
+                <a:srgbClr val="595959"/>
+              </a:solidFill>
+              <a:latin typeface="맑은 고딕"/>
+            </a:endParaRPr>
           </a:p>
           <a:p>
             <a:pPr algn="l"/>
@@ -5624,7 +5654,7 @@
           <a:noFill/>
         </p:spPr>
         <p:txBody>
-          <a:bodyPr wrap="square" anchor="t" lIns="45720" rIns="45720">
+          <a:bodyPr wrap="square" lIns="45720" rIns="45720" anchor="t">
             <a:spAutoFit/>
           </a:bodyPr>
           <a:lstStyle/>
@@ -5659,7 +5689,7 @@
           <a:noFill/>
         </p:spPr>
         <p:txBody>
-          <a:bodyPr wrap="square" anchor="t" lIns="45720" rIns="45720">
+          <a:bodyPr wrap="square" lIns="45720" rIns="45720" anchor="t">
             <a:spAutoFit/>
           </a:bodyPr>
           <a:lstStyle/>
@@ -5686,7 +5716,7 @@
 </file>
 
 <file path=ppt/slides/slide18.xml><?xml version="1.0" encoding="utf-8"?>
-<p:sld xmlns:a="http://schemas.openxmlformats.org/drawingml/2006/main" xmlns:p="http://schemas.openxmlformats.org/presentationml/2006/main" xmlns:r="http://schemas.openxmlformats.org/officeDocument/2006/relationships">
+<p:sld xmlns:a="http://schemas.openxmlformats.org/drawingml/2006/main" xmlns:r="http://schemas.openxmlformats.org/officeDocument/2006/relationships" xmlns:p="http://schemas.openxmlformats.org/presentationml/2006/main">
   <p:cSld>
     <p:spTree>
       <p:nvGrpSpPr>
@@ -5694,7 +5724,14 @@
         <p:cNvGrpSpPr/>
         <p:nvPr/>
       </p:nvGrpSpPr>
-      <p:grpSpPr/>
+      <p:grpSpPr>
+        <a:xfrm>
+          <a:off x="0" y="0"/>
+          <a:ext cx="0" cy="0"/>
+          <a:chOff x="0" y="0"/>
+          <a:chExt cx="0" cy="0"/>
+        </a:xfrm>
+      </p:grpSpPr>
       <p:sp>
         <p:nvSpPr>
           <p:cNvPr id="2" name="TextBox 1"/>
@@ -5712,7 +5749,7 @@
           <a:noFill/>
         </p:spPr>
         <p:txBody>
-          <a:bodyPr wrap="square" anchor="ctr" lIns="45720" rIns="45720">
+          <a:bodyPr wrap="square" lIns="45720" rIns="45720" anchor="ctr">
             <a:spAutoFit/>
           </a:bodyPr>
           <a:lstStyle/>
@@ -5772,6 +5809,7 @@
           <a:lstStyle/>
           <a:p>
             <a:pPr algn="ctr"/>
+            <a:endParaRPr/>
           </a:p>
         </p:txBody>
       </p:sp>
@@ -5816,7 +5854,7 @@
           <a:noFill/>
         </p:spPr>
         <p:txBody>
-          <a:bodyPr wrap="square" anchor="t" lIns="45720" rIns="45720">
+          <a:bodyPr wrap="square" lIns="45720" rIns="45720" anchor="t">
             <a:spAutoFit/>
           </a:bodyPr>
           <a:lstStyle/>
@@ -5841,20 +5879,17 @@
                 </a:solidFill>
                 <a:latin typeface="맑은 고딕"/>
               </a:rPr>
-              <a:t>LOG ▷ CLIENT_LOG</a:t>
-            </a:r>
-          </a:p>
-          <a:p>
-            <a:pPr algn="l"/>
-            <a:r>
-              <a:rPr sz="600" b="0">
-                <a:solidFill>
-                  <a:srgbClr val="595959"/>
-                </a:solidFill>
-                <a:latin typeface="맑은 고딕"/>
-              </a:rPr>
-              <a:t/>
-            </a:r>
+              <a:t>로그 ▷ 유저사용로그</a:t>
+            </a:r>
+          </a:p>
+          <a:p>
+            <a:pPr algn="l"/>
+            <a:endParaRPr sz="1100" b="0">
+              <a:solidFill>
+                <a:srgbClr val="595959"/>
+              </a:solidFill>
+              <a:latin typeface="맑은 고딕"/>
+            </a:endParaRPr>
           </a:p>
           <a:p>
             <a:pPr algn="l"/>
@@ -5899,7 +5934,7 @@
           <a:noFill/>
         </p:spPr>
         <p:txBody>
-          <a:bodyPr wrap="square" anchor="t" lIns="45720" rIns="45720">
+          <a:bodyPr wrap="square" lIns="45720" rIns="45720" anchor="t">
             <a:spAutoFit/>
           </a:bodyPr>
           <a:lstStyle/>
@@ -5934,7 +5969,7 @@
           <a:noFill/>
         </p:spPr>
         <p:txBody>
-          <a:bodyPr wrap="square" anchor="t" lIns="45720" rIns="45720">
+          <a:bodyPr wrap="square" lIns="45720" rIns="45720" anchor="t">
             <a:spAutoFit/>
           </a:bodyPr>
           <a:lstStyle/>
@@ -5961,7 +5996,7 @@
 </file>
 
 <file path=ppt/slides/slide19.xml><?xml version="1.0" encoding="utf-8"?>
-<p:sld xmlns:a="http://schemas.openxmlformats.org/drawingml/2006/main" xmlns:p="http://schemas.openxmlformats.org/presentationml/2006/main" xmlns:r="http://schemas.openxmlformats.org/officeDocument/2006/relationships">
+<p:sld xmlns:a="http://schemas.openxmlformats.org/drawingml/2006/main" xmlns:r="http://schemas.openxmlformats.org/officeDocument/2006/relationships" xmlns:p="http://schemas.openxmlformats.org/presentationml/2006/main">
   <p:cSld>
     <p:spTree>
       <p:nvGrpSpPr>
@@ -5969,7 +6004,14 @@
         <p:cNvGrpSpPr/>
         <p:nvPr/>
       </p:nvGrpSpPr>
-      <p:grpSpPr/>
+      <p:grpSpPr>
+        <a:xfrm>
+          <a:off x="0" y="0"/>
+          <a:ext cx="0" cy="0"/>
+          <a:chOff x="0" y="0"/>
+          <a:chExt cx="0" cy="0"/>
+        </a:xfrm>
+      </p:grpSpPr>
       <p:sp>
         <p:nvSpPr>
           <p:cNvPr id="2" name="TextBox 1"/>
@@ -5987,7 +6029,7 @@
           <a:noFill/>
         </p:spPr>
         <p:txBody>
-          <a:bodyPr wrap="square" anchor="ctr" lIns="45720" rIns="45720">
+          <a:bodyPr wrap="square" lIns="45720" rIns="45720" anchor="ctr">
             <a:spAutoFit/>
           </a:bodyPr>
           <a:lstStyle/>
@@ -6047,6 +6089,7 @@
           <a:lstStyle/>
           <a:p>
             <a:pPr algn="ctr"/>
+            <a:endParaRPr/>
           </a:p>
         </p:txBody>
       </p:sp>
@@ -6091,7 +6134,7 @@
           <a:noFill/>
         </p:spPr>
         <p:txBody>
-          <a:bodyPr wrap="square" anchor="t" lIns="45720" rIns="45720">
+          <a:bodyPr wrap="square" lIns="45720" rIns="45720" anchor="t">
             <a:spAutoFit/>
           </a:bodyPr>
           <a:lstStyle/>
@@ -6116,20 +6159,17 @@
                 </a:solidFill>
                 <a:latin typeface="맑은 고딕"/>
               </a:rPr>
-              <a:t>LOG ▷ 알람</a:t>
-            </a:r>
-          </a:p>
-          <a:p>
-            <a:pPr algn="l"/>
-            <a:r>
-              <a:rPr sz="600" b="0">
-                <a:solidFill>
-                  <a:srgbClr val="595959"/>
-                </a:solidFill>
-                <a:latin typeface="맑은 고딕"/>
-              </a:rPr>
-              <a:t/>
-            </a:r>
+              <a:t>로그 ▷ 알람</a:t>
+            </a:r>
+          </a:p>
+          <a:p>
+            <a:pPr algn="l"/>
+            <a:endParaRPr sz="1100" b="0">
+              <a:solidFill>
+                <a:srgbClr val="595959"/>
+              </a:solidFill>
+              <a:latin typeface="맑은 고딕"/>
+            </a:endParaRPr>
           </a:p>
           <a:p>
             <a:pPr algn="l"/>
@@ -6157,15 +6197,12 @@
           </a:p>
           <a:p>
             <a:pPr algn="l"/>
-            <a:r>
-              <a:rPr sz="600" b="0">
-                <a:solidFill>
-                  <a:srgbClr val="595959"/>
-                </a:solidFill>
-                <a:latin typeface="맑은 고딕"/>
-              </a:rPr>
-              <a:t/>
-            </a:r>
+            <a:endParaRPr sz="1100" b="0">
+              <a:solidFill>
+                <a:srgbClr val="595959"/>
+              </a:solidFill>
+              <a:latin typeface="맑은 고딕"/>
+            </a:endParaRPr>
           </a:p>
           <a:p>
             <a:pPr algn="l"/>
@@ -6210,7 +6247,7 @@
           <a:noFill/>
         </p:spPr>
         <p:txBody>
-          <a:bodyPr wrap="square" anchor="t" lIns="45720" rIns="45720">
+          <a:bodyPr wrap="square" lIns="45720" rIns="45720" anchor="t">
             <a:spAutoFit/>
           </a:bodyPr>
           <a:lstStyle/>
@@ -6245,7 +6282,7 @@
           <a:noFill/>
         </p:spPr>
         <p:txBody>
-          <a:bodyPr wrap="square" anchor="t" lIns="45720" rIns="45720">
+          <a:bodyPr wrap="square" lIns="45720" rIns="45720" anchor="t">
             <a:spAutoFit/>
           </a:bodyPr>
           <a:lstStyle/>
@@ -6272,7 +6309,7 @@
 </file>
 
 <file path=ppt/slides/slide2.xml><?xml version="1.0" encoding="utf-8"?>
-<p:sld xmlns:a="http://schemas.openxmlformats.org/drawingml/2006/main" xmlns:p="http://schemas.openxmlformats.org/presentationml/2006/main" xmlns:r="http://schemas.openxmlformats.org/officeDocument/2006/relationships">
+<p:sld xmlns:a="http://schemas.openxmlformats.org/drawingml/2006/main" xmlns:r="http://schemas.openxmlformats.org/officeDocument/2006/relationships" xmlns:p="http://schemas.openxmlformats.org/presentationml/2006/main">
   <p:cSld>
     <p:spTree>
       <p:nvGrpSpPr>
@@ -6280,7 +6317,14 @@
         <p:cNvGrpSpPr/>
         <p:nvPr/>
       </p:nvGrpSpPr>
-      <p:grpSpPr/>
+      <p:grpSpPr>
+        <a:xfrm>
+          <a:off x="0" y="0"/>
+          <a:ext cx="0" cy="0"/>
+          <a:chOff x="0" y="0"/>
+          <a:chExt cx="0" cy="0"/>
+        </a:xfrm>
+      </p:grpSpPr>
       <p:sp>
         <p:nvSpPr>
           <p:cNvPr id="2" name="TextBox 1"/>
@@ -6298,7 +6342,7 @@
           <a:noFill/>
         </p:spPr>
         <p:txBody>
-          <a:bodyPr wrap="square" anchor="ctr" lIns="45720" rIns="45720">
+          <a:bodyPr wrap="square" lIns="45720" rIns="45720" anchor="ctr">
             <a:spAutoFit/>
           </a:bodyPr>
           <a:lstStyle/>
@@ -6335,11 +6379,41 @@
                 <a:tableStyleId>{5C22544A-7EE6-4342-B048-85BDC9FD1C3A}</a:tableStyleId>
               </a:tblPr>
               <a:tblGrid>
-                <a:gridCol w="1097280"/>
-                <a:gridCol w="1645920"/>
-                <a:gridCol w="2377440"/>
-                <a:gridCol w="1645920"/>
-                <a:gridCol w="4114800"/>
+                <a:gridCol w="1097280">
+                  <a:extLst>
+                    <a:ext uri="{9D8B030D-6E8A-4147-A177-3AD203B41FA5}">
+                      <a16:colId xmlns:a16="http://schemas.microsoft.com/office/drawing/2014/main" val="20000"/>
+                    </a:ext>
+                  </a:extLst>
+                </a:gridCol>
+                <a:gridCol w="1645920">
+                  <a:extLst>
+                    <a:ext uri="{9D8B030D-6E8A-4147-A177-3AD203B41FA5}">
+                      <a16:colId xmlns:a16="http://schemas.microsoft.com/office/drawing/2014/main" val="20001"/>
+                    </a:ext>
+                  </a:extLst>
+                </a:gridCol>
+                <a:gridCol w="2377440">
+                  <a:extLst>
+                    <a:ext uri="{9D8B030D-6E8A-4147-A177-3AD203B41FA5}">
+                      <a16:colId xmlns:a16="http://schemas.microsoft.com/office/drawing/2014/main" val="20002"/>
+                    </a:ext>
+                  </a:extLst>
+                </a:gridCol>
+                <a:gridCol w="1645920">
+                  <a:extLst>
+                    <a:ext uri="{9D8B030D-6E8A-4147-A177-3AD203B41FA5}">
+                      <a16:colId xmlns:a16="http://schemas.microsoft.com/office/drawing/2014/main" val="20003"/>
+                    </a:ext>
+                  </a:extLst>
+                </a:gridCol>
+                <a:gridCol w="4114800">
+                  <a:extLst>
+                    <a:ext uri="{9D8B030D-6E8A-4147-A177-3AD203B41FA5}">
+                      <a16:colId xmlns:a16="http://schemas.microsoft.com/office/drawing/2014/main" val="20004"/>
+                    </a:ext>
+                  </a:extLst>
+                </a:gridCol>
               </a:tblGrid>
               <a:tr h="365760">
                 <a:tc>
@@ -6452,6 +6526,11 @@
                     </a:solidFill>
                   </a:tcPr>
                 </a:tc>
+                <a:extLst>
+                  <a:ext uri="{0D108BD9-81ED-4DB2-BD59-A6C34878D82A}">
+                    <a16:rowId xmlns:a16="http://schemas.microsoft.com/office/drawing/2014/main" val="10000"/>
+                  </a:ext>
+                </a:extLst>
               </a:tr>
               <a:tr h="365760">
                 <a:tc>
@@ -6525,15 +6604,7 @@
                     <a:bodyPr/>
                     <a:lstStyle/>
                     <a:p>
-                      <a:r>
-                        <a:rPr sz="1100">
-                          <a:solidFill>
-                            <a:srgbClr val="222222"/>
-                          </a:solidFill>
-                          <a:latin typeface="맑은 고딕"/>
-                        </a:rPr>
-                        <a:t/>
-                      </a:r>
+                      <a:endParaRPr/>
                     </a:p>
                   </a:txBody>
                   <a:tcPr>
@@ -6564,6 +6635,11 @@
                     </a:solidFill>
                   </a:tcPr>
                 </a:tc>
+                <a:extLst>
+                  <a:ext uri="{0D108BD9-81ED-4DB2-BD59-A6C34878D82A}">
+                    <a16:rowId xmlns:a16="http://schemas.microsoft.com/office/drawing/2014/main" val="10001"/>
+                  </a:ext>
+                </a:extLst>
               </a:tr>
               <a:tr h="365760">
                 <a:tc>
@@ -6637,15 +6713,7 @@
                     <a:bodyPr/>
                     <a:lstStyle/>
                     <a:p>
-                      <a:r>
-                        <a:rPr sz="1100">
-                          <a:solidFill>
-                            <a:srgbClr val="222222"/>
-                          </a:solidFill>
-                          <a:latin typeface="맑은 고딕"/>
-                        </a:rPr>
-                        <a:t/>
-                      </a:r>
+                      <a:endParaRPr/>
                     </a:p>
                   </a:txBody>
                   <a:tcPr>
@@ -6676,6 +6744,11 @@
                     </a:solidFill>
                   </a:tcPr>
                 </a:tc>
+                <a:extLst>
+                  <a:ext uri="{0D108BD9-81ED-4DB2-BD59-A6C34878D82A}">
+                    <a16:rowId xmlns:a16="http://schemas.microsoft.com/office/drawing/2014/main" val="10002"/>
+                  </a:ext>
+                </a:extLst>
               </a:tr>
             </a:tbl>
           </a:graphicData>
@@ -6698,7 +6771,7 @@
           <a:noFill/>
         </p:spPr>
         <p:txBody>
-          <a:bodyPr wrap="square" anchor="t" lIns="45720" rIns="45720">
+          <a:bodyPr wrap="square" lIns="45720" rIns="45720" anchor="t">
             <a:spAutoFit/>
           </a:bodyPr>
           <a:lstStyle/>
@@ -6733,7 +6806,7 @@
           <a:noFill/>
         </p:spPr>
         <p:txBody>
-          <a:bodyPr wrap="square" anchor="t" lIns="45720" rIns="45720">
+          <a:bodyPr wrap="square" lIns="45720" rIns="45720" anchor="t">
             <a:spAutoFit/>
           </a:bodyPr>
           <a:lstStyle/>
@@ -6760,7 +6833,7 @@
 </file>
 
 <file path=ppt/slides/slide20.xml><?xml version="1.0" encoding="utf-8"?>
-<p:sld xmlns:a="http://schemas.openxmlformats.org/drawingml/2006/main" xmlns:p="http://schemas.openxmlformats.org/presentationml/2006/main" xmlns:r="http://schemas.openxmlformats.org/officeDocument/2006/relationships">
+<p:sld xmlns:a="http://schemas.openxmlformats.org/drawingml/2006/main" xmlns:r="http://schemas.openxmlformats.org/officeDocument/2006/relationships" xmlns:p="http://schemas.openxmlformats.org/presentationml/2006/main">
   <p:cSld>
     <p:spTree>
       <p:nvGrpSpPr>
@@ -6768,7 +6841,14 @@
         <p:cNvGrpSpPr/>
         <p:nvPr/>
       </p:nvGrpSpPr>
-      <p:grpSpPr/>
+      <p:grpSpPr>
+        <a:xfrm>
+          <a:off x="0" y="0"/>
+          <a:ext cx="0" cy="0"/>
+          <a:chOff x="0" y="0"/>
+          <a:chExt cx="0" cy="0"/>
+        </a:xfrm>
+      </p:grpSpPr>
       <p:sp>
         <p:nvSpPr>
           <p:cNvPr id="2" name="TextBox 1"/>
@@ -6786,7 +6866,7 @@
           <a:noFill/>
         </p:spPr>
         <p:txBody>
-          <a:bodyPr wrap="square" anchor="ctr" lIns="45720" rIns="45720">
+          <a:bodyPr wrap="square" lIns="45720" rIns="45720" anchor="ctr">
             <a:spAutoFit/>
           </a:bodyPr>
           <a:lstStyle/>
@@ -6846,6 +6926,7 @@
           <a:lstStyle/>
           <a:p>
             <a:pPr algn="ctr"/>
+            <a:endParaRPr/>
           </a:p>
         </p:txBody>
       </p:sp>
@@ -6890,7 +6971,7 @@
           <a:noFill/>
         </p:spPr>
         <p:txBody>
-          <a:bodyPr wrap="square" anchor="t" lIns="45720" rIns="45720">
+          <a:bodyPr wrap="square" lIns="45720" rIns="45720" anchor="t">
             <a:spAutoFit/>
           </a:bodyPr>
           <a:lstStyle/>
@@ -6920,15 +7001,12 @@
           </a:p>
           <a:p>
             <a:pPr algn="l"/>
-            <a:r>
-              <a:rPr sz="600" b="0">
-                <a:solidFill>
-                  <a:srgbClr val="595959"/>
-                </a:solidFill>
-                <a:latin typeface="맑은 고딕"/>
-              </a:rPr>
-              <a:t/>
-            </a:r>
+            <a:endParaRPr sz="1100" b="0">
+              <a:solidFill>
+                <a:srgbClr val="595959"/>
+              </a:solidFill>
+              <a:latin typeface="맑은 고딕"/>
+            </a:endParaRPr>
           </a:p>
           <a:p>
             <a:pPr algn="l"/>
@@ -6956,15 +7034,12 @@
           </a:p>
           <a:p>
             <a:pPr algn="l"/>
-            <a:r>
-              <a:rPr sz="600" b="0">
-                <a:solidFill>
-                  <a:srgbClr val="595959"/>
-                </a:solidFill>
-                <a:latin typeface="맑은 고딕"/>
-              </a:rPr>
-              <a:t/>
-            </a:r>
+            <a:endParaRPr sz="1100" b="0">
+              <a:solidFill>
+                <a:srgbClr val="595959"/>
+              </a:solidFill>
+              <a:latin typeface="맑은 고딕"/>
+            </a:endParaRPr>
           </a:p>
           <a:p>
             <a:pPr algn="l"/>
@@ -7021,7 +7096,7 @@
           <a:noFill/>
         </p:spPr>
         <p:txBody>
-          <a:bodyPr wrap="square" anchor="t" lIns="45720" rIns="45720">
+          <a:bodyPr wrap="square" lIns="45720" rIns="45720" anchor="t">
             <a:spAutoFit/>
           </a:bodyPr>
           <a:lstStyle/>
@@ -7056,7 +7131,7 @@
           <a:noFill/>
         </p:spPr>
         <p:txBody>
-          <a:bodyPr wrap="square" anchor="t" lIns="45720" rIns="45720">
+          <a:bodyPr wrap="square" lIns="45720" rIns="45720" anchor="t">
             <a:spAutoFit/>
           </a:bodyPr>
           <a:lstStyle/>
@@ -7083,7 +7158,7 @@
 </file>
 
 <file path=ppt/slides/slide21.xml><?xml version="1.0" encoding="utf-8"?>
-<p:sld xmlns:a="http://schemas.openxmlformats.org/drawingml/2006/main" xmlns:p="http://schemas.openxmlformats.org/presentationml/2006/main" xmlns:r="http://schemas.openxmlformats.org/officeDocument/2006/relationships">
+<p:sld xmlns:a="http://schemas.openxmlformats.org/drawingml/2006/main" xmlns:r="http://schemas.openxmlformats.org/officeDocument/2006/relationships" xmlns:p="http://schemas.openxmlformats.org/presentationml/2006/main">
   <p:cSld>
     <p:spTree>
       <p:nvGrpSpPr>
@@ -7091,7 +7166,14 @@
         <p:cNvGrpSpPr/>
         <p:nvPr/>
       </p:nvGrpSpPr>
-      <p:grpSpPr/>
+      <p:grpSpPr>
+        <a:xfrm>
+          <a:off x="0" y="0"/>
+          <a:ext cx="0" cy="0"/>
+          <a:chOff x="0" y="0"/>
+          <a:chExt cx="0" cy="0"/>
+        </a:xfrm>
+      </p:grpSpPr>
       <p:sp>
         <p:nvSpPr>
           <p:cNvPr id="2" name="TextBox 1"/>
@@ -7109,7 +7191,7 @@
           <a:noFill/>
         </p:spPr>
         <p:txBody>
-          <a:bodyPr wrap="square" anchor="ctr" lIns="45720" rIns="45720">
+          <a:bodyPr wrap="square" lIns="45720" rIns="45720" anchor="ctr">
             <a:spAutoFit/>
           </a:bodyPr>
           <a:lstStyle/>
@@ -7169,6 +7251,7 @@
           <a:lstStyle/>
           <a:p>
             <a:pPr algn="ctr"/>
+            <a:endParaRPr/>
           </a:p>
         </p:txBody>
       </p:sp>
@@ -7213,7 +7296,7 @@
           <a:noFill/>
         </p:spPr>
         <p:txBody>
-          <a:bodyPr wrap="square" anchor="t" lIns="45720" rIns="45720">
+          <a:bodyPr wrap="square" lIns="45720" rIns="45720" anchor="t">
             <a:spAutoFit/>
           </a:bodyPr>
           <a:lstStyle/>
@@ -7243,15 +7326,12 @@
           </a:p>
           <a:p>
             <a:pPr algn="l"/>
-            <a:r>
-              <a:rPr sz="600" b="0">
-                <a:solidFill>
-                  <a:srgbClr val="595959"/>
-                </a:solidFill>
-                <a:latin typeface="맑은 고딕"/>
-              </a:rPr>
-              <a:t/>
-            </a:r>
+            <a:endParaRPr sz="1100" b="0">
+              <a:solidFill>
+                <a:srgbClr val="595959"/>
+              </a:solidFill>
+              <a:latin typeface="맑은 고딕"/>
+            </a:endParaRPr>
           </a:p>
           <a:p>
             <a:pPr algn="l"/>
@@ -7279,15 +7359,12 @@
           </a:p>
           <a:p>
             <a:pPr algn="l"/>
-            <a:r>
-              <a:rPr sz="600" b="0">
-                <a:solidFill>
-                  <a:srgbClr val="595959"/>
-                </a:solidFill>
-                <a:latin typeface="맑은 고딕"/>
-              </a:rPr>
-              <a:t/>
-            </a:r>
+            <a:endParaRPr sz="1100" b="0">
+              <a:solidFill>
+                <a:srgbClr val="595959"/>
+              </a:solidFill>
+              <a:latin typeface="맑은 고딕"/>
+            </a:endParaRPr>
           </a:p>
           <a:p>
             <a:pPr algn="l"/>
@@ -7356,7 +7433,7 @@
           <a:noFill/>
         </p:spPr>
         <p:txBody>
-          <a:bodyPr wrap="square" anchor="t" lIns="45720" rIns="45720">
+          <a:bodyPr wrap="square" lIns="45720" rIns="45720" anchor="t">
             <a:spAutoFit/>
           </a:bodyPr>
           <a:lstStyle/>
@@ -7391,7 +7468,7 @@
           <a:noFill/>
         </p:spPr>
         <p:txBody>
-          <a:bodyPr wrap="square" anchor="t" lIns="45720" rIns="45720">
+          <a:bodyPr wrap="square" lIns="45720" rIns="45720" anchor="t">
             <a:spAutoFit/>
           </a:bodyPr>
           <a:lstStyle/>
@@ -7418,7 +7495,7 @@
 </file>
 
 <file path=ppt/slides/slide22.xml><?xml version="1.0" encoding="utf-8"?>
-<p:sld xmlns:a="http://schemas.openxmlformats.org/drawingml/2006/main" xmlns:p="http://schemas.openxmlformats.org/presentationml/2006/main" xmlns:r="http://schemas.openxmlformats.org/officeDocument/2006/relationships">
+<p:sld xmlns:a="http://schemas.openxmlformats.org/drawingml/2006/main" xmlns:r="http://schemas.openxmlformats.org/officeDocument/2006/relationships" xmlns:p="http://schemas.openxmlformats.org/presentationml/2006/main">
   <p:cSld>
     <p:spTree>
       <p:nvGrpSpPr>
@@ -7426,7 +7503,14 @@
         <p:cNvGrpSpPr/>
         <p:nvPr/>
       </p:nvGrpSpPr>
-      <p:grpSpPr/>
+      <p:grpSpPr>
+        <a:xfrm>
+          <a:off x="0" y="0"/>
+          <a:ext cx="0" cy="0"/>
+          <a:chOff x="0" y="0"/>
+          <a:chExt cx="0" cy="0"/>
+        </a:xfrm>
+      </p:grpSpPr>
       <p:sp>
         <p:nvSpPr>
           <p:cNvPr id="2" name="TextBox 1"/>
@@ -7444,7 +7528,7 @@
           <a:noFill/>
         </p:spPr>
         <p:txBody>
-          <a:bodyPr wrap="square" anchor="ctr" lIns="45720" rIns="45720">
+          <a:bodyPr wrap="square" lIns="45720" rIns="45720" anchor="ctr">
             <a:spAutoFit/>
           </a:bodyPr>
           <a:lstStyle/>
@@ -7504,6 +7588,7 @@
           <a:lstStyle/>
           <a:p>
             <a:pPr algn="ctr"/>
+            <a:endParaRPr/>
           </a:p>
         </p:txBody>
       </p:sp>
@@ -7548,7 +7633,7 @@
           <a:noFill/>
         </p:spPr>
         <p:txBody>
-          <a:bodyPr wrap="square" anchor="t" lIns="45720" rIns="45720">
+          <a:bodyPr wrap="square" lIns="45720" rIns="45720" anchor="t">
             <a:spAutoFit/>
           </a:bodyPr>
           <a:lstStyle/>
@@ -7578,15 +7663,12 @@
           </a:p>
           <a:p>
             <a:pPr algn="l"/>
-            <a:r>
-              <a:rPr sz="600" b="0">
-                <a:solidFill>
-                  <a:srgbClr val="595959"/>
-                </a:solidFill>
-                <a:latin typeface="맑은 고딕"/>
-              </a:rPr>
-              <a:t/>
-            </a:r>
+            <a:endParaRPr sz="1100" b="0">
+              <a:solidFill>
+                <a:srgbClr val="595959"/>
+              </a:solidFill>
+              <a:latin typeface="맑은 고딕"/>
+            </a:endParaRPr>
           </a:p>
           <a:p>
             <a:pPr algn="l"/>
@@ -7614,15 +7696,12 @@
           </a:p>
           <a:p>
             <a:pPr algn="l"/>
-            <a:r>
-              <a:rPr sz="600" b="0">
-                <a:solidFill>
-                  <a:srgbClr val="595959"/>
-                </a:solidFill>
-                <a:latin typeface="맑은 고딕"/>
-              </a:rPr>
-              <a:t/>
-            </a:r>
+            <a:endParaRPr sz="1100" b="0">
+              <a:solidFill>
+                <a:srgbClr val="595959"/>
+              </a:solidFill>
+              <a:latin typeface="맑은 고딕"/>
+            </a:endParaRPr>
           </a:p>
           <a:p>
             <a:pPr algn="l"/>
@@ -7667,7 +7746,7 @@
           <a:noFill/>
         </p:spPr>
         <p:txBody>
-          <a:bodyPr wrap="square" anchor="t" lIns="45720" rIns="45720">
+          <a:bodyPr wrap="square" lIns="45720" rIns="45720" anchor="t">
             <a:spAutoFit/>
           </a:bodyPr>
           <a:lstStyle/>
@@ -7702,7 +7781,7 @@
           <a:noFill/>
         </p:spPr>
         <p:txBody>
-          <a:bodyPr wrap="square" anchor="t" lIns="45720" rIns="45720">
+          <a:bodyPr wrap="square" lIns="45720" rIns="45720" anchor="t">
             <a:spAutoFit/>
           </a:bodyPr>
           <a:lstStyle/>
@@ -7728,8 +7807,8 @@
 </p:sld>
 </file>
 
-<file path=ppt/slides/slide23.xml><?xml version="1.0" encoding="utf-8"?>
-<p:sld xmlns:a="http://schemas.openxmlformats.org/drawingml/2006/main" xmlns:p="http://schemas.openxmlformats.org/presentationml/2006/main" xmlns:r="http://schemas.openxmlformats.org/officeDocument/2006/relationships">
+<file path=ppt/slides/slide3.xml><?xml version="1.0" encoding="utf-8"?>
+<p:sld xmlns:a="http://schemas.openxmlformats.org/drawingml/2006/main" xmlns:r="http://schemas.openxmlformats.org/officeDocument/2006/relationships" xmlns:p="http://schemas.openxmlformats.org/presentationml/2006/main">
   <p:cSld>
     <p:spTree>
       <p:nvGrpSpPr>
@@ -7737,7 +7816,14 @@
         <p:cNvGrpSpPr/>
         <p:nvPr/>
       </p:nvGrpSpPr>
-      <p:grpSpPr/>
+      <p:grpSpPr>
+        <a:xfrm>
+          <a:off x="0" y="0"/>
+          <a:ext cx="0" cy="0"/>
+          <a:chOff x="0" y="0"/>
+          <a:chExt cx="0" cy="0"/>
+        </a:xfrm>
+      </p:grpSpPr>
       <p:sp>
         <p:nvSpPr>
           <p:cNvPr id="2" name="TextBox 1"/>
@@ -7755,7 +7841,7 @@
           <a:noFill/>
         </p:spPr>
         <p:txBody>
-          <a:bodyPr wrap="square" anchor="ctr" lIns="45720" rIns="45720">
+          <a:bodyPr wrap="square" lIns="45720" rIns="45720" anchor="ctr">
             <a:spAutoFit/>
           </a:bodyPr>
           <a:lstStyle/>
@@ -7768,7 +7854,671 @@
                 </a:solidFill>
                 <a:latin typeface="맑은 고딕"/>
               </a:rPr>
-              <a:t>서버 프로그램 - 통합 태스크 (ALL_TASK)</a:t>
+              <a:t>Contents</a:t>
+            </a:r>
+          </a:p>
+        </p:txBody>
+      </p:sp>
+      <p:sp>
+        <p:nvSpPr>
+          <p:cNvPr id="3" name="TextBox 2"/>
+          <p:cNvSpPr txBox="1"/>
+          <p:nvPr/>
+        </p:nvSpPr>
+        <p:spPr>
+          <a:xfrm>
+            <a:off x="548640" y="1188720"/>
+            <a:ext cx="3657600" cy="5029200"/>
+          </a:xfrm>
+          <a:prstGeom prst="rect">
+            <a:avLst/>
+          </a:prstGeom>
+          <a:noFill/>
+        </p:spPr>
+        <p:txBody>
+          <a:bodyPr wrap="square" lIns="45720" rIns="45720" anchor="t">
+            <a:spAutoFit/>
+          </a:bodyPr>
+          <a:lstStyle/>
+          <a:p>
+            <a:pPr algn="l"/>
+            <a:r>
+              <a:rPr sz="1400" b="1">
+                <a:solidFill>
+                  <a:srgbClr val="1E2761"/>
+                </a:solidFill>
+                <a:latin typeface="맑은 고딕"/>
+              </a:rPr>
+              <a:t>메인</a:t>
+            </a:r>
+          </a:p>
+          <a:p>
+            <a:pPr algn="l"/>
+            <a:r>
+              <a:rPr sz="1100" b="0">
+                <a:solidFill>
+                  <a:srgbClr val="595959"/>
+                </a:solidFill>
+                <a:latin typeface="맑은 고딕"/>
+              </a:rPr>
+              <a:t>   메인 화면(창고 모니터링)</a:t>
+            </a:r>
+          </a:p>
+          <a:p>
+            <a:pPr algn="l"/>
+            <a:endParaRPr sz="1100" b="0">
+              <a:solidFill>
+                <a:srgbClr val="595959"/>
+              </a:solidFill>
+              <a:latin typeface="맑은 고딕"/>
+            </a:endParaRPr>
+          </a:p>
+          <a:p>
+            <a:pPr algn="l"/>
+            <a:r>
+              <a:rPr sz="1400" b="1">
+                <a:solidFill>
+                  <a:srgbClr val="1E2761"/>
+                </a:solidFill>
+                <a:latin typeface="맑은 고딕"/>
+              </a:rPr>
+              <a:t>ECS&gt;환경설정</a:t>
+            </a:r>
+          </a:p>
+          <a:p>
+            <a:pPr algn="l"/>
+            <a:r>
+              <a:rPr sz="1100" b="0">
+                <a:solidFill>
+                  <a:srgbClr val="595959"/>
+                </a:solidFill>
+                <a:latin typeface="맑은 고딕"/>
+              </a:rPr>
+              <a:t>   통신 연결 정의 (EQP 정보)</a:t>
+            </a:r>
+          </a:p>
+          <a:p>
+            <a:pPr algn="l"/>
+            <a:r>
+              <a:rPr sz="1100" b="0">
+                <a:solidFill>
+                  <a:srgbClr val="595959"/>
+                </a:solidFill>
+                <a:latin typeface="맑은 고딕"/>
+              </a:rPr>
+              <a:t>   로그 삭제 설정 (이력 삭제 주기 변경)</a:t>
+            </a:r>
+          </a:p>
+          <a:p>
+            <a:pPr algn="l"/>
+            <a:r>
+              <a:rPr sz="1100" b="0">
+                <a:solidFill>
+                  <a:srgbClr val="595959"/>
+                </a:solidFill>
+                <a:latin typeface="맑은 고딕"/>
+              </a:rPr>
+              <a:t>   범례 (색상정보)</a:t>
+            </a:r>
+          </a:p>
+          <a:p>
+            <a:pPr algn="l"/>
+            <a:endParaRPr sz="1100" b="0">
+              <a:solidFill>
+                <a:srgbClr val="595959"/>
+              </a:solidFill>
+              <a:latin typeface="맑은 고딕"/>
+            </a:endParaRPr>
+          </a:p>
+          <a:p>
+            <a:pPr algn="l"/>
+            <a:r>
+              <a:rPr sz="1400" b="1">
+                <a:solidFill>
+                  <a:srgbClr val="1E2761"/>
+                </a:solidFill>
+                <a:latin typeface="맑은 고딕"/>
+              </a:rPr>
+              <a:t>ECS&gt;뷰</a:t>
+            </a:r>
+          </a:p>
+          <a:p>
+            <a:pPr algn="l"/>
+            <a:r>
+              <a:rPr sz="1100" b="0">
+                <a:solidFill>
+                  <a:srgbClr val="595959"/>
+                </a:solidFill>
+                <a:latin typeface="맑은 고딕"/>
+              </a:rPr>
+              <a:t>   작업정보</a:t>
+            </a:r>
+          </a:p>
+          <a:p>
+            <a:pPr algn="l"/>
+            <a:r>
+              <a:rPr sz="1100" b="0">
+                <a:solidFill>
+                  <a:srgbClr val="595959"/>
+                </a:solidFill>
+                <a:latin typeface="맑은 고딕"/>
+              </a:rPr>
+              <a:t>   찾기</a:t>
+            </a:r>
+          </a:p>
+          <a:p>
+            <a:pPr algn="l"/>
+            <a:endParaRPr sz="1100" b="0">
+              <a:solidFill>
+                <a:srgbClr val="595959"/>
+              </a:solidFill>
+              <a:latin typeface="맑은 고딕"/>
+            </a:endParaRPr>
+          </a:p>
+        </p:txBody>
+      </p:sp>
+      <p:sp>
+        <p:nvSpPr>
+          <p:cNvPr id="4" name="TextBox 3"/>
+          <p:cNvSpPr txBox="1"/>
+          <p:nvPr/>
+        </p:nvSpPr>
+        <p:spPr>
+          <a:xfrm>
+            <a:off x="4343400" y="1188720"/>
+            <a:ext cx="3657600" cy="5029200"/>
+          </a:xfrm>
+          <a:prstGeom prst="rect">
+            <a:avLst/>
+          </a:prstGeom>
+          <a:noFill/>
+        </p:spPr>
+        <p:txBody>
+          <a:bodyPr wrap="square" lIns="45720" rIns="45720" anchor="t">
+            <a:spAutoFit/>
+          </a:bodyPr>
+          <a:lstStyle/>
+          <a:p>
+            <a:pPr algn="l"/>
+            <a:r>
+              <a:rPr sz="1400" b="1">
+                <a:solidFill>
+                  <a:srgbClr val="1E2761"/>
+                </a:solidFill>
+                <a:latin typeface="맑은 고딕"/>
+              </a:rPr>
+              <a:t>ECS&gt;판넬 보기</a:t>
+            </a:r>
+          </a:p>
+          <a:p>
+            <a:pPr algn="l"/>
+            <a:r>
+              <a:rPr sz="1100" b="0">
+                <a:solidFill>
+                  <a:srgbClr val="595959"/>
+                </a:solidFill>
+                <a:latin typeface="맑은 고딕"/>
+              </a:rPr>
+              <a:t>   판넬 보기 (작업정보/상세정보/설비반송)</a:t>
+            </a:r>
+          </a:p>
+          <a:p>
+            <a:pPr algn="l"/>
+            <a:endParaRPr sz="1100" b="0">
+              <a:solidFill>
+                <a:srgbClr val="595959"/>
+              </a:solidFill>
+              <a:latin typeface="맑은 고딕"/>
+            </a:endParaRPr>
+          </a:p>
+          <a:p>
+            <a:pPr algn="l"/>
+            <a:r>
+              <a:rPr sz="1400" b="1">
+                <a:solidFill>
+                  <a:srgbClr val="1E2761"/>
+                </a:solidFill>
+                <a:latin typeface="맑은 고딕"/>
+              </a:rPr>
+              <a:t>ECS&gt;창고 모니터링</a:t>
+            </a:r>
+          </a:p>
+          <a:p>
+            <a:pPr algn="l"/>
+            <a:r>
+              <a:rPr sz="1100" b="0">
+                <a:solidFill>
+                  <a:srgbClr val="595959"/>
+                </a:solidFill>
+                <a:latin typeface="맑은 고딕"/>
+              </a:rPr>
+              <a:t>   작업번호 / 트랙번호 표시 전환</a:t>
+            </a:r>
+          </a:p>
+          <a:p>
+            <a:pPr algn="l"/>
+            <a:endParaRPr sz="1100" b="0">
+              <a:solidFill>
+                <a:srgbClr val="595959"/>
+              </a:solidFill>
+              <a:latin typeface="맑은 고딕"/>
+            </a:endParaRPr>
+          </a:p>
+          <a:p>
+            <a:pPr algn="l"/>
+            <a:r>
+              <a:rPr sz="1400" b="1">
+                <a:solidFill>
+                  <a:srgbClr val="1E2761"/>
+                </a:solidFill>
+                <a:latin typeface="맑은 고딕"/>
+              </a:rPr>
+              <a:t>MANUAL</a:t>
+            </a:r>
+          </a:p>
+          <a:p>
+            <a:pPr algn="l"/>
+            <a:r>
+              <a:rPr sz="1100" b="0">
+                <a:solidFill>
+                  <a:srgbClr val="595959"/>
+                </a:solidFill>
+                <a:latin typeface="맑은 고딕"/>
+              </a:rPr>
+              <a:t>   JOB 수동지시</a:t>
+            </a:r>
+          </a:p>
+          <a:p>
+            <a:pPr algn="l"/>
+            <a:r>
+              <a:rPr sz="1100" b="0">
+                <a:solidFill>
+                  <a:srgbClr val="595959"/>
+                </a:solidFill>
+                <a:latin typeface="맑은 고딕"/>
+              </a:rPr>
+              <a:t>   크레인 수동작업</a:t>
+            </a:r>
+          </a:p>
+          <a:p>
+            <a:pPr algn="l"/>
+            <a:r>
+              <a:rPr sz="1100" b="0">
+                <a:solidFill>
+                  <a:srgbClr val="595959"/>
+                </a:solidFill>
+                <a:latin typeface="맑은 고딕"/>
+              </a:rPr>
+              <a:t>   RTV(RGV) 수동작업</a:t>
+            </a:r>
+          </a:p>
+          <a:p>
+            <a:pPr algn="l"/>
+            <a:endParaRPr sz="1100" b="0">
+              <a:solidFill>
+                <a:srgbClr val="595959"/>
+              </a:solidFill>
+              <a:latin typeface="맑은 고딕"/>
+            </a:endParaRPr>
+          </a:p>
+        </p:txBody>
+      </p:sp>
+      <p:sp>
+        <p:nvSpPr>
+          <p:cNvPr id="5" name="TextBox 4"/>
+          <p:cNvSpPr txBox="1"/>
+          <p:nvPr/>
+        </p:nvSpPr>
+        <p:spPr>
+          <a:xfrm>
+            <a:off x="8138160" y="1188720"/>
+            <a:ext cx="3657600" cy="5029200"/>
+          </a:xfrm>
+          <a:prstGeom prst="rect">
+            <a:avLst/>
+          </a:prstGeom>
+          <a:noFill/>
+        </p:spPr>
+        <p:txBody>
+          <a:bodyPr wrap="square" lIns="45720" rIns="45720" anchor="t">
+            <a:spAutoFit/>
+          </a:bodyPr>
+          <a:lstStyle/>
+          <a:p>
+            <a:pPr algn="l"/>
+            <a:r>
+              <a:rPr sz="1400" b="1">
+                <a:solidFill>
+                  <a:srgbClr val="1E2761"/>
+                </a:solidFill>
+                <a:latin typeface="맑은 고딕"/>
+              </a:rPr>
+              <a:t>LOG</a:t>
+            </a:r>
+          </a:p>
+          <a:p>
+            <a:pPr algn="l"/>
+            <a:r>
+              <a:rPr sz="1100" b="0">
+                <a:solidFill>
+                  <a:srgbClr val="595959"/>
+                </a:solidFill>
+                <a:latin typeface="맑은 고딕"/>
+              </a:rPr>
+              <a:t>   작업 로그</a:t>
+            </a:r>
+          </a:p>
+          <a:p>
+            <a:pPr algn="l"/>
+            <a:r>
+              <a:rPr sz="1100" b="0">
+                <a:solidFill>
+                  <a:srgbClr val="595959"/>
+                </a:solidFill>
+                <a:latin typeface="맑은 고딕"/>
+              </a:rPr>
+              <a:t>   HOST 로그</a:t>
+            </a:r>
+          </a:p>
+          <a:p>
+            <a:pPr algn="l"/>
+            <a:r>
+              <a:rPr sz="1100" b="0">
+                <a:solidFill>
+                  <a:srgbClr val="595959"/>
+                </a:solidFill>
+                <a:latin typeface="맑은 고딕"/>
+              </a:rPr>
+              <a:t>   설비에러이력</a:t>
+            </a:r>
+          </a:p>
+          <a:p>
+            <a:pPr algn="l"/>
+            <a:r>
+              <a:rPr sz="1100" b="0">
+                <a:solidFill>
+                  <a:srgbClr val="595959"/>
+                </a:solidFill>
+                <a:latin typeface="맑은 고딕"/>
+              </a:rPr>
+              <a:t>   유저사용 로그</a:t>
+            </a:r>
+          </a:p>
+          <a:p>
+            <a:pPr algn="l"/>
+            <a:r>
+              <a:rPr sz="1100" b="0">
+                <a:solidFill>
+                  <a:srgbClr val="595959"/>
+                </a:solidFill>
+                <a:latin typeface="맑은 고딕"/>
+              </a:rPr>
+              <a:t>   알람 (ECS 프로그램 이력)</a:t>
+            </a:r>
+          </a:p>
+          <a:p>
+            <a:pPr algn="l"/>
+            <a:endParaRPr sz="1100" b="0">
+              <a:solidFill>
+                <a:srgbClr val="595959"/>
+              </a:solidFill>
+              <a:latin typeface="맑은 고딕"/>
+            </a:endParaRPr>
+          </a:p>
+          <a:p>
+            <a:pPr algn="l"/>
+            <a:r>
+              <a:rPr sz="1400" b="1">
+                <a:solidFill>
+                  <a:srgbClr val="1E2761"/>
+                </a:solidFill>
+                <a:latin typeface="맑은 고딕"/>
+              </a:rPr>
+              <a:t>설비 대화상자</a:t>
+            </a:r>
+          </a:p>
+          <a:p>
+            <a:pPr algn="l"/>
+            <a:r>
+              <a:rPr sz="1100" b="0">
+                <a:solidFill>
+                  <a:srgbClr val="595959"/>
+                </a:solidFill>
+                <a:latin typeface="맑은 고딕"/>
+              </a:rPr>
+              <a:t>   CV 상태</a:t>
+            </a:r>
+          </a:p>
+          <a:p>
+            <a:pPr algn="l"/>
+            <a:r>
+              <a:rPr sz="1100" b="0">
+                <a:solidFill>
+                  <a:srgbClr val="595959"/>
+                </a:solidFill>
+                <a:latin typeface="맑은 고딕"/>
+              </a:rPr>
+              <a:t>   SC 상태</a:t>
+            </a:r>
+          </a:p>
+          <a:p>
+            <a:pPr algn="l"/>
+            <a:r>
+              <a:rPr sz="1100" b="0">
+                <a:solidFill>
+                  <a:srgbClr val="595959"/>
+                </a:solidFill>
+                <a:latin typeface="맑은 고딕"/>
+              </a:rPr>
+              <a:t>   RTV(RGV) 상태</a:t>
+            </a:r>
+          </a:p>
+          <a:p>
+            <a:pPr algn="l"/>
+            <a:endParaRPr sz="1100" b="0">
+              <a:solidFill>
+                <a:srgbClr val="595959"/>
+              </a:solidFill>
+              <a:latin typeface="맑은 고딕"/>
+            </a:endParaRPr>
+          </a:p>
+          <a:p>
+            <a:pPr algn="l"/>
+            <a:r>
+              <a:rPr sz="1400" b="1">
+                <a:solidFill>
+                  <a:srgbClr val="1E2761"/>
+                </a:solidFill>
+                <a:latin typeface="맑은 고딕"/>
+              </a:rPr>
+              <a:t>서버 프로그램</a:t>
+            </a:r>
+          </a:p>
+          <a:p>
+            <a:pPr algn="l"/>
+            <a:r>
+              <a:rPr sz="1100" b="0">
+                <a:solidFill>
+                  <a:srgbClr val="595959"/>
+                </a:solidFill>
+                <a:latin typeface="맑은 고딕"/>
+              </a:rPr>
+              <a:t>   통합 태스크 (ALL_TASK)</a:t>
+            </a:r>
+          </a:p>
+          <a:p>
+            <a:pPr algn="l"/>
+            <a:r>
+              <a:rPr sz="1100" b="0">
+                <a:solidFill>
+                  <a:srgbClr val="595959"/>
+                </a:solidFill>
+                <a:latin typeface="맑은 고딕"/>
+              </a:rPr>
+              <a:t>   설비 통신 (WCS_TASK_CV)</a:t>
+            </a:r>
+          </a:p>
+          <a:p>
+            <a:pPr algn="l"/>
+            <a:r>
+              <a:rPr sz="1100" b="0">
+                <a:solidFill>
+                  <a:srgbClr val="595959"/>
+                </a:solidFill>
+                <a:latin typeface="맑은 고딕"/>
+              </a:rPr>
+              <a:t>   스케줄러 (IO_TASK)</a:t>
+            </a:r>
+          </a:p>
+          <a:p>
+            <a:pPr algn="l"/>
+            <a:r>
+              <a:rPr sz="1100" b="0">
+                <a:solidFill>
+                  <a:srgbClr val="595959"/>
+                </a:solidFill>
+                <a:latin typeface="맑은 고딕"/>
+              </a:rPr>
+              <a:t>   상위 통신 (WCS_TASK_HOST)</a:t>
+            </a:r>
+          </a:p>
+          <a:p>
+            <a:pPr algn="l"/>
+            <a:endParaRPr sz="1100" b="0">
+              <a:solidFill>
+                <a:srgbClr val="595959"/>
+              </a:solidFill>
+              <a:latin typeface="맑은 고딕"/>
+            </a:endParaRPr>
+          </a:p>
+        </p:txBody>
+      </p:sp>
+      <p:sp>
+        <p:nvSpPr>
+          <p:cNvPr id="6" name="TextBox 5"/>
+          <p:cNvSpPr txBox="1"/>
+          <p:nvPr/>
+        </p:nvSpPr>
+        <p:spPr>
+          <a:xfrm>
+            <a:off x="457200" y="6400800"/>
+            <a:ext cx="3657600" cy="320040"/>
+          </a:xfrm>
+          <a:prstGeom prst="rect">
+            <a:avLst/>
+          </a:prstGeom>
+          <a:noFill/>
+        </p:spPr>
+        <p:txBody>
+          <a:bodyPr wrap="square" lIns="45720" rIns="45720" anchor="t">
+            <a:spAutoFit/>
+          </a:bodyPr>
+          <a:lstStyle/>
+          <a:p>
+            <a:pPr algn="l"/>
+            <a:r>
+              <a:rPr sz="1000" b="0">
+                <a:solidFill>
+                  <a:srgbClr val="595959"/>
+                </a:solidFill>
+                <a:latin typeface="맑은 고딕"/>
+              </a:rPr>
+              <a:t>LG 화학 1동 ECS  |  화면설계서</a:t>
+            </a:r>
+          </a:p>
+        </p:txBody>
+      </p:sp>
+      <p:sp>
+        <p:nvSpPr>
+          <p:cNvPr id="7" name="TextBox 6"/>
+          <p:cNvSpPr txBox="1"/>
+          <p:nvPr/>
+        </p:nvSpPr>
+        <p:spPr>
+          <a:xfrm>
+            <a:off x="11155680" y="6400800"/>
+            <a:ext cx="731520" cy="320040"/>
+          </a:xfrm>
+          <a:prstGeom prst="rect">
+            <a:avLst/>
+          </a:prstGeom>
+          <a:noFill/>
+        </p:spPr>
+        <p:txBody>
+          <a:bodyPr wrap="square" lIns="45720" rIns="45720" anchor="t">
+            <a:spAutoFit/>
+          </a:bodyPr>
+          <a:lstStyle/>
+          <a:p>
+            <a:pPr algn="r"/>
+            <a:r>
+              <a:rPr sz="1000" b="0">
+                <a:solidFill>
+                  <a:srgbClr val="595959"/>
+                </a:solidFill>
+                <a:latin typeface="맑은 고딕"/>
+              </a:rPr>
+              <a:t>3</a:t>
+            </a:r>
+          </a:p>
+        </p:txBody>
+      </p:sp>
+    </p:spTree>
+  </p:cSld>
+  <p:clrMapOvr>
+    <a:masterClrMapping/>
+  </p:clrMapOvr>
+</p:sld>
+</file>
+
+<file path=ppt/slides/slide4.xml><?xml version="1.0" encoding="utf-8"?>
+<p:sld xmlns:a="http://schemas.openxmlformats.org/drawingml/2006/main" xmlns:r="http://schemas.openxmlformats.org/officeDocument/2006/relationships" xmlns:p="http://schemas.openxmlformats.org/presentationml/2006/main">
+  <p:cSld>
+    <p:spTree>
+      <p:nvGrpSpPr>
+        <p:cNvPr id="1" name=""/>
+        <p:cNvGrpSpPr/>
+        <p:nvPr/>
+      </p:nvGrpSpPr>
+      <p:grpSpPr>
+        <a:xfrm>
+          <a:off x="0" y="0"/>
+          <a:ext cx="0" cy="0"/>
+          <a:chOff x="0" y="0"/>
+          <a:chExt cx="0" cy="0"/>
+        </a:xfrm>
+      </p:grpSpPr>
+      <p:sp>
+        <p:nvSpPr>
+          <p:cNvPr id="2" name="TextBox 1"/>
+          <p:cNvSpPr txBox="1"/>
+          <p:nvPr/>
+        </p:nvSpPr>
+        <p:spPr>
+          <a:xfrm>
+            <a:off x="457200" y="320040"/>
+            <a:ext cx="11247120" cy="640080"/>
+          </a:xfrm>
+          <a:prstGeom prst="rect">
+            <a:avLst/>
+          </a:prstGeom>
+          <a:noFill/>
+        </p:spPr>
+        <p:txBody>
+          <a:bodyPr wrap="square" lIns="45720" rIns="45720" anchor="ctr">
+            <a:spAutoFit/>
+          </a:bodyPr>
+          <a:lstStyle/>
+          <a:p>
+            <a:pPr algn="l"/>
+            <a:r>
+              <a:rPr sz="2600" b="1">
+                <a:solidFill>
+                  <a:srgbClr val="1E2761"/>
+                </a:solidFill>
+                <a:latin typeface="맑은 고딕"/>
+              </a:rPr>
+              <a:t>메인 화면(창고 모니터링)</a:t>
             </a:r>
           </a:p>
         </p:txBody>
@@ -7815,12 +8565,13 @@
           <a:lstStyle/>
           <a:p>
             <a:pPr algn="ctr"/>
+            <a:endParaRPr/>
           </a:p>
         </p:txBody>
       </p:sp>
       <p:pic>
         <p:nvPicPr>
-          <p:cNvPr id="4" name="Picture 3" descr="alltask_ctrl.png"/>
+          <p:cNvPr id="4" name="Picture 3" descr="main_0.png"/>
           <p:cNvPicPr>
             <a:picLocks noChangeAspect="1"/>
           </p:cNvPicPr>
@@ -7834,8 +8585,8 @@
         </p:blipFill>
         <p:spPr>
           <a:xfrm>
-            <a:off x="877126" y="1280160"/>
-            <a:ext cx="7023987" cy="4846320"/>
+            <a:off x="640080" y="1673880"/>
+            <a:ext cx="7498079" cy="4058878"/>
           </a:xfrm>
           <a:prstGeom prst="rect">
             <a:avLst/>
@@ -7851,7 +8602,7 @@
         <p:spPr>
           <a:xfrm>
             <a:off x="8503920" y="1188720"/>
-            <a:ext cx="3291840" cy="5029200"/>
+            <a:ext cx="3291840" cy="4016484"/>
           </a:xfrm>
           <a:prstGeom prst="rect">
             <a:avLst/>
@@ -7859,141 +8610,1803 @@
           <a:noFill/>
         </p:spPr>
         <p:txBody>
-          <a:bodyPr wrap="square" anchor="t" lIns="45720" rIns="45720">
+          <a:bodyPr wrap="square" lIns="45720" rIns="45720" anchor="t">
             <a:spAutoFit/>
           </a:bodyPr>
           <a:lstStyle/>
           <a:p>
             <a:pPr algn="l"/>
             <a:r>
-              <a:rPr sz="1300" b="1">
+              <a:rPr sz="1300" b="1" dirty="0">
                 <a:solidFill>
                   <a:srgbClr val="1E2761"/>
                 </a:solidFill>
                 <a:latin typeface="맑은 고딕"/>
               </a:rPr>
-              <a:t>■ 메뉴 Path</a:t>
-            </a:r>
-          </a:p>
-          <a:p>
-            <a:pPr algn="l"/>
-            <a:r>
-              <a:rPr sz="1100" b="0">
-                <a:solidFill>
-                  <a:srgbClr val="595959"/>
-                </a:solidFill>
-                <a:latin typeface="맑은 고딕"/>
-              </a:rPr>
-              <a:t>TASK\ALL_TASK\ALL_TASK.exe</a:t>
-            </a:r>
-          </a:p>
-          <a:p>
-            <a:pPr algn="l"/>
-            <a:r>
-              <a:rPr sz="600" b="0">
-                <a:solidFill>
-                  <a:srgbClr val="595959"/>
-                </a:solidFill>
-                <a:latin typeface="맑은 고딕"/>
-              </a:rPr>
-              <a:t/>
-            </a:r>
-          </a:p>
-          <a:p>
-            <a:pPr algn="l"/>
-            <a:r>
-              <a:rPr sz="1300" b="1">
+              <a:t>■ </a:t>
+            </a:r>
+            <a:r>
+              <a:rPr sz="1300" b="1" dirty="0" err="1">
                 <a:solidFill>
                   <a:srgbClr val="1E2761"/>
                 </a:solidFill>
                 <a:latin typeface="맑은 고딕"/>
               </a:rPr>
-              <a:t>■ 프로그램 개요</a:t>
-            </a:r>
-          </a:p>
-          <a:p>
-            <a:pPr algn="l"/>
-            <a:r>
-              <a:rPr sz="1100" b="0">
-                <a:solidFill>
-                  <a:srgbClr val="595959"/>
-                </a:solidFill>
-                <a:latin typeface="맑은 고딕"/>
-              </a:rPr>
-              <a:t>설비 통신(EQP)·스케줄러(IO)·상위 통신(HOST) 세 프로그램을 한 창에 합친 것. 탭으로 각 화면을 보고, [제어판] 에서 태스크별로 기동·정지한다.</a:t>
-            </a:r>
-          </a:p>
-          <a:p>
-            <a:pPr algn="l"/>
-            <a:r>
-              <a:rPr sz="600" b="0">
-                <a:solidFill>
-                  <a:srgbClr val="595959"/>
-                </a:solidFill>
-                <a:latin typeface="맑은 고딕"/>
-              </a:rPr>
-              <a:t/>
-            </a:r>
-          </a:p>
-          <a:p>
-            <a:pPr algn="l"/>
-            <a:r>
-              <a:rPr sz="1300" b="1">
+              <a:t>메뉴</a:t>
+            </a:r>
+            <a:r>
+              <a:rPr sz="1300" b="1" dirty="0">
                 <a:solidFill>
                   <a:srgbClr val="1E2761"/>
                 </a:solidFill>
                 <a:latin typeface="맑은 고딕"/>
               </a:rPr>
-              <a:t>■ 특기사항</a:t>
-            </a:r>
-          </a:p>
-          <a:p>
-            <a:pPr algn="l"/>
-            <a:r>
-              <a:rPr sz="1000" b="0">
-                <a:solidFill>
-                  <a:srgbClr val="595959"/>
-                </a:solidFill>
-                <a:latin typeface="맑은 고딕"/>
-              </a:rPr>
-              <a:t>· 정지하면 그 태스크의 스레드가 끝나고 PLC 소켓·DB 연결까지 반납된다. 다시 켜면 처음부터 재기동된다.</a:t>
-            </a:r>
-          </a:p>
-          <a:p>
-            <a:pPr algn="l"/>
-            <a:r>
-              <a:rPr sz="1000" b="0">
-                <a:solidFill>
-                  <a:srgbClr val="595959"/>
-                </a:solidFill>
-                <a:latin typeface="맑은 고딕"/>
-              </a:rPr>
-              <a:t>· 제어판 표에 살아 있는 워커 스레드(설비통신/SC·RGV 관측/스케줄러/상위 리슨·송수신·로그)를 모두 보여 준다.</a:t>
-            </a:r>
-          </a:p>
-          <a:p>
-            <a:pPr algn="l"/>
-            <a:r>
-              <a:rPr sz="1000" b="0">
-                <a:solidFill>
-                  <a:srgbClr val="595959"/>
-                </a:solidFill>
-                <a:latin typeface="맑은 고딕"/>
-              </a:rPr>
-              <a:t>· 로그는 스레드별 파일로 남는다 : LOG\&lt;스레드&gt;\&lt;스레드&gt;_yyyyMMdd.log (기본 365일 보관).
-    운전 이력은 종전대로 WCS_LOG_PGR 에 쌓인다.</a:t>
-            </a:r>
-          </a:p>
-          <a:p>
-            <a:pPr algn="l"/>
-            <a:r>
-              <a:rPr sz="1000" b="0">
-                <a:solidFill>
-                  <a:srgbClr val="595959"/>
-                </a:solidFill>
-                <a:latin typeface="맑은 고딕"/>
-              </a:rPr>
-              <a:t>· ALL_TASK.INI [AUTOSTART] 로 켤 때 자동 기동할 태스크를 정한다(기본 수동).</a:t>
+              <a:t> Path</a:t>
+            </a:r>
+          </a:p>
+          <a:p>
+            <a:pPr algn="l"/>
+            <a:r>
+              <a:rPr sz="1100" b="0" dirty="0" err="1">
+                <a:solidFill>
+                  <a:srgbClr val="595959"/>
+                </a:solidFill>
+                <a:latin typeface="맑은 고딕"/>
+              </a:rPr>
+              <a:t>운전</a:t>
+            </a:r>
+            <a:r>
+              <a:rPr sz="1100" b="0" dirty="0">
+                <a:solidFill>
+                  <a:srgbClr val="595959"/>
+                </a:solidFill>
+                <a:latin typeface="맑은 고딕"/>
+              </a:rPr>
+              <a:t> </a:t>
+            </a:r>
+            <a:r>
+              <a:rPr sz="1100" b="0" dirty="0" err="1">
+                <a:solidFill>
+                  <a:srgbClr val="595959"/>
+                </a:solidFill>
+                <a:latin typeface="맑은 고딕"/>
+              </a:rPr>
+              <a:t>화면</a:t>
+            </a:r>
+            <a:r>
+              <a:rPr sz="1100" b="0" dirty="0">
+                <a:solidFill>
+                  <a:srgbClr val="595959"/>
+                </a:solidFill>
+                <a:latin typeface="맑은 고딕"/>
+              </a:rPr>
+              <a:t>(Ecs.exe) </a:t>
+            </a:r>
+            <a:r>
+              <a:rPr sz="1100" b="0" dirty="0" err="1">
+                <a:solidFill>
+                  <a:srgbClr val="595959"/>
+                </a:solidFill>
+                <a:latin typeface="맑은 고딕"/>
+              </a:rPr>
+              <a:t>실행</a:t>
+            </a:r>
+            <a:r>
+              <a:rPr sz="1100" b="0" dirty="0">
+                <a:solidFill>
+                  <a:srgbClr val="595959"/>
+                </a:solidFill>
+                <a:latin typeface="맑은 고딕"/>
+              </a:rPr>
+              <a:t> 시 첫 </a:t>
+            </a:r>
+            <a:r>
+              <a:rPr sz="1100" b="0" dirty="0" err="1">
+                <a:solidFill>
+                  <a:srgbClr val="595959"/>
+                </a:solidFill>
+                <a:latin typeface="맑은 고딕"/>
+              </a:rPr>
+              <a:t>화면</a:t>
+            </a:r>
+            <a:endParaRPr sz="1100" b="0" dirty="0">
+              <a:solidFill>
+                <a:srgbClr val="595959"/>
+              </a:solidFill>
+              <a:latin typeface="맑은 고딕"/>
+            </a:endParaRPr>
+          </a:p>
+          <a:p>
+            <a:pPr algn="l"/>
+            <a:endParaRPr sz="1100" b="0" dirty="0">
+              <a:solidFill>
+                <a:srgbClr val="595959"/>
+              </a:solidFill>
+              <a:latin typeface="맑은 고딕"/>
+            </a:endParaRPr>
+          </a:p>
+          <a:p>
+            <a:pPr algn="l"/>
+            <a:r>
+              <a:rPr sz="1300" b="1" dirty="0">
+                <a:solidFill>
+                  <a:srgbClr val="1E2761"/>
+                </a:solidFill>
+                <a:latin typeface="맑은 고딕"/>
+              </a:rPr>
+              <a:t>■ </a:t>
+            </a:r>
+            <a:r>
+              <a:rPr sz="1300" b="1" dirty="0" err="1">
+                <a:solidFill>
+                  <a:srgbClr val="1E2761"/>
+                </a:solidFill>
+                <a:latin typeface="맑은 고딕"/>
+              </a:rPr>
+              <a:t>프로그램</a:t>
+            </a:r>
+            <a:r>
+              <a:rPr sz="1300" b="1" dirty="0">
+                <a:solidFill>
+                  <a:srgbClr val="1E2761"/>
+                </a:solidFill>
+                <a:latin typeface="맑은 고딕"/>
+              </a:rPr>
+              <a:t> </a:t>
+            </a:r>
+            <a:r>
+              <a:rPr sz="1300" b="1" dirty="0" err="1">
+                <a:solidFill>
+                  <a:srgbClr val="1E2761"/>
+                </a:solidFill>
+                <a:latin typeface="맑은 고딕"/>
+              </a:rPr>
+              <a:t>개요</a:t>
+            </a:r>
+            <a:endParaRPr sz="1300" b="1" dirty="0">
+              <a:solidFill>
+                <a:srgbClr val="1E2761"/>
+              </a:solidFill>
+              <a:latin typeface="맑은 고딕"/>
+            </a:endParaRPr>
+          </a:p>
+          <a:p>
+            <a:pPr algn="l"/>
+            <a:r>
+              <a:rPr sz="1100" b="0" dirty="0">
+                <a:solidFill>
+                  <a:srgbClr val="595959"/>
+                </a:solidFill>
+                <a:latin typeface="맑은 고딕"/>
+              </a:rPr>
+              <a:t>1동 </a:t>
+            </a:r>
+            <a:r>
+              <a:rPr sz="1100" b="0" dirty="0" err="1">
+                <a:solidFill>
+                  <a:srgbClr val="595959"/>
+                </a:solidFill>
+                <a:latin typeface="맑은 고딕"/>
+              </a:rPr>
+              <a:t>자동창고</a:t>
+            </a:r>
+            <a:r>
+              <a:rPr sz="1100" b="0" dirty="0">
+                <a:solidFill>
+                  <a:srgbClr val="595959"/>
+                </a:solidFill>
+                <a:latin typeface="맑은 고딕"/>
+              </a:rPr>
+              <a:t> </a:t>
+            </a:r>
+            <a:r>
+              <a:rPr sz="1100" b="0" dirty="0" err="1">
+                <a:solidFill>
+                  <a:srgbClr val="595959"/>
+                </a:solidFill>
+                <a:latin typeface="맑은 고딕"/>
+              </a:rPr>
+              <a:t>전체</a:t>
+            </a:r>
+            <a:r>
+              <a:rPr sz="1100" b="0" dirty="0">
+                <a:solidFill>
+                  <a:srgbClr val="595959"/>
+                </a:solidFill>
+                <a:latin typeface="맑은 고딕"/>
+              </a:rPr>
+              <a:t> </a:t>
+            </a:r>
+            <a:r>
+              <a:rPr sz="1100" b="0" dirty="0" err="1">
+                <a:solidFill>
+                  <a:srgbClr val="595959"/>
+                </a:solidFill>
+                <a:latin typeface="맑은 고딕"/>
+              </a:rPr>
+              <a:t>배치</a:t>
+            </a:r>
+            <a:r>
+              <a:rPr sz="1100" b="0" dirty="0">
+                <a:solidFill>
+                  <a:srgbClr val="595959"/>
+                </a:solidFill>
+                <a:latin typeface="맑은 고딕"/>
+              </a:rPr>
+              <a:t>(랙 10열, </a:t>
+            </a:r>
+            <a:r>
+              <a:rPr sz="1100" b="0" dirty="0" err="1">
+                <a:solidFill>
+                  <a:srgbClr val="595959"/>
+                </a:solidFill>
+                <a:latin typeface="맑은 고딕"/>
+              </a:rPr>
+              <a:t>크레인</a:t>
+            </a:r>
+            <a:r>
+              <a:rPr sz="1100" b="0" dirty="0">
+                <a:solidFill>
+                  <a:srgbClr val="595959"/>
+                </a:solidFill>
+                <a:latin typeface="맑은 고딕"/>
+              </a:rPr>
+              <a:t> 5대, RGV 1대, </a:t>
+            </a:r>
+            <a:r>
+              <a:rPr sz="1100" b="0" dirty="0" err="1">
+                <a:solidFill>
+                  <a:srgbClr val="595959"/>
+                </a:solidFill>
+                <a:latin typeface="맑은 고딕"/>
+              </a:rPr>
+              <a:t>컨베이어</a:t>
+            </a:r>
+            <a:r>
+              <a:rPr sz="1100" b="0" dirty="0">
+                <a:solidFill>
+                  <a:srgbClr val="595959"/>
+                </a:solidFill>
+                <a:latin typeface="맑은 고딕"/>
+              </a:rPr>
+              <a:t> C/V#2~#15, </a:t>
+            </a:r>
+            <a:r>
+              <a:rPr sz="1100" b="0" dirty="0" err="1">
+                <a:solidFill>
+                  <a:srgbClr val="595959"/>
+                </a:solidFill>
+                <a:latin typeface="맑은 고딕"/>
+              </a:rPr>
+              <a:t>작업대</a:t>
+            </a:r>
+            <a:r>
+              <a:rPr sz="1100" b="0" dirty="0">
+                <a:solidFill>
+                  <a:srgbClr val="595959"/>
+                </a:solidFill>
+                <a:latin typeface="맑은 고딕"/>
+              </a:rPr>
+              <a:t>)와 </a:t>
+            </a:r>
+            <a:r>
+              <a:rPr sz="1100" b="0" dirty="0" err="1">
+                <a:solidFill>
+                  <a:srgbClr val="595959"/>
+                </a:solidFill>
+                <a:latin typeface="맑은 고딕"/>
+              </a:rPr>
+              <a:t>작업</a:t>
+            </a:r>
+            <a:r>
+              <a:rPr sz="1100" b="0" dirty="0">
+                <a:solidFill>
+                  <a:srgbClr val="595959"/>
+                </a:solidFill>
+                <a:latin typeface="맑은 고딕"/>
+              </a:rPr>
+              <a:t> </a:t>
+            </a:r>
+            <a:r>
+              <a:rPr sz="1100" b="0" dirty="0" err="1">
+                <a:solidFill>
+                  <a:srgbClr val="595959"/>
+                </a:solidFill>
+                <a:latin typeface="맑은 고딕"/>
+              </a:rPr>
+              <a:t>진행</a:t>
+            </a:r>
+            <a:r>
+              <a:rPr sz="1100" b="0" dirty="0">
+                <a:solidFill>
+                  <a:srgbClr val="595959"/>
+                </a:solidFill>
+                <a:latin typeface="맑은 고딕"/>
+              </a:rPr>
+              <a:t> </a:t>
+            </a:r>
+            <a:r>
+              <a:rPr sz="1100" b="0" dirty="0" err="1">
+                <a:solidFill>
+                  <a:srgbClr val="595959"/>
+                </a:solidFill>
+                <a:latin typeface="맑은 고딕"/>
+              </a:rPr>
+              <a:t>상황을</a:t>
+            </a:r>
+            <a:r>
+              <a:rPr sz="1100" b="0" dirty="0">
+                <a:solidFill>
+                  <a:srgbClr val="595959"/>
+                </a:solidFill>
+                <a:latin typeface="맑은 고딕"/>
+              </a:rPr>
+              <a:t> </a:t>
+            </a:r>
+            <a:r>
+              <a:rPr sz="1100" b="0" dirty="0" err="1">
+                <a:solidFill>
+                  <a:srgbClr val="595959"/>
+                </a:solidFill>
+                <a:latin typeface="맑은 고딕"/>
+              </a:rPr>
+              <a:t>실시간</a:t>
+            </a:r>
+            <a:r>
+              <a:rPr sz="1100" b="0" dirty="0">
+                <a:solidFill>
+                  <a:srgbClr val="595959"/>
+                </a:solidFill>
+                <a:latin typeface="맑은 고딕"/>
+              </a:rPr>
+              <a:t> </a:t>
+            </a:r>
+            <a:r>
+              <a:rPr sz="1100" b="0" dirty="0" err="1">
+                <a:solidFill>
+                  <a:srgbClr val="595959"/>
+                </a:solidFill>
+                <a:latin typeface="맑은 고딕"/>
+              </a:rPr>
+              <a:t>표시한다</a:t>
+            </a:r>
+            <a:r>
+              <a:rPr sz="1100" b="0" dirty="0">
+                <a:solidFill>
+                  <a:srgbClr val="595959"/>
+                </a:solidFill>
+                <a:latin typeface="맑은 고딕"/>
+              </a:rPr>
+              <a:t>.</a:t>
+            </a:r>
+          </a:p>
+          <a:p>
+            <a:pPr algn="l"/>
+            <a:endParaRPr sz="1100" b="0" dirty="0">
+              <a:solidFill>
+                <a:srgbClr val="595959"/>
+              </a:solidFill>
+              <a:latin typeface="맑은 고딕"/>
+            </a:endParaRPr>
+          </a:p>
+          <a:p>
+            <a:pPr algn="l"/>
+            <a:r>
+              <a:rPr sz="1300" b="1" dirty="0">
+                <a:solidFill>
+                  <a:srgbClr val="1E2761"/>
+                </a:solidFill>
+                <a:latin typeface="맑은 고딕"/>
+              </a:rPr>
+              <a:t>■ </a:t>
+            </a:r>
+            <a:r>
+              <a:rPr sz="1300" b="1" dirty="0" err="1">
+                <a:solidFill>
+                  <a:srgbClr val="1E2761"/>
+                </a:solidFill>
+                <a:latin typeface="맑은 고딕"/>
+              </a:rPr>
+              <a:t>특기사항</a:t>
+            </a:r>
+            <a:endParaRPr sz="1300" b="1" dirty="0">
+              <a:solidFill>
+                <a:srgbClr val="1E2761"/>
+              </a:solidFill>
+              <a:latin typeface="맑은 고딕"/>
+            </a:endParaRPr>
+          </a:p>
+          <a:p>
+            <a:pPr algn="l"/>
+            <a:r>
+              <a:rPr sz="1000" b="0" dirty="0">
+                <a:solidFill>
+                  <a:srgbClr val="595959"/>
+                </a:solidFill>
+                <a:latin typeface="맑은 고딕"/>
+              </a:rPr>
+              <a:t>· </a:t>
+            </a:r>
+            <a:r>
+              <a:rPr sz="1000" b="0" dirty="0" err="1">
+                <a:solidFill>
+                  <a:srgbClr val="595959"/>
+                </a:solidFill>
+                <a:latin typeface="맑은 고딕"/>
+              </a:rPr>
+              <a:t>화물이</a:t>
+            </a:r>
+            <a:r>
+              <a:rPr sz="1000" b="0" dirty="0">
+                <a:solidFill>
+                  <a:srgbClr val="595959"/>
+                </a:solidFill>
+                <a:latin typeface="맑은 고딕"/>
+              </a:rPr>
+              <a:t> </a:t>
+            </a:r>
+            <a:r>
+              <a:rPr sz="1000" b="0" dirty="0" err="1">
+                <a:solidFill>
+                  <a:srgbClr val="595959"/>
+                </a:solidFill>
+                <a:latin typeface="맑은 고딕"/>
+              </a:rPr>
+              <a:t>있는</a:t>
+            </a:r>
+            <a:r>
+              <a:rPr sz="1000" b="0" dirty="0">
+                <a:solidFill>
+                  <a:srgbClr val="595959"/>
+                </a:solidFill>
+                <a:latin typeface="맑은 고딕"/>
+              </a:rPr>
+              <a:t> </a:t>
+            </a:r>
+            <a:r>
+              <a:rPr sz="1000" b="0" dirty="0" err="1">
+                <a:solidFill>
+                  <a:srgbClr val="595959"/>
+                </a:solidFill>
+                <a:latin typeface="맑은 고딕"/>
+              </a:rPr>
+              <a:t>위치는</a:t>
+            </a:r>
+            <a:r>
+              <a:rPr sz="1000" b="0" dirty="0">
+                <a:solidFill>
+                  <a:srgbClr val="595959"/>
+                </a:solidFill>
+                <a:latin typeface="맑은 고딕"/>
+              </a:rPr>
+              <a:t> </a:t>
+            </a:r>
+            <a:r>
+              <a:rPr sz="1000" b="0" dirty="0" err="1">
+                <a:solidFill>
+                  <a:srgbClr val="595959"/>
+                </a:solidFill>
+                <a:latin typeface="맑은 고딕"/>
+              </a:rPr>
+              <a:t>작업번호와</a:t>
+            </a:r>
+            <a:r>
+              <a:rPr sz="1000" b="0" dirty="0">
+                <a:solidFill>
+                  <a:srgbClr val="595959"/>
+                </a:solidFill>
+                <a:latin typeface="맑은 고딕"/>
+              </a:rPr>
+              <a:t> </a:t>
+            </a:r>
+            <a:r>
+              <a:rPr sz="1000" b="0" dirty="0" err="1">
+                <a:solidFill>
+                  <a:srgbClr val="595959"/>
+                </a:solidFill>
+                <a:latin typeface="맑은 고딕"/>
+              </a:rPr>
+              <a:t>작업구분</a:t>
+            </a:r>
+            <a:r>
+              <a:rPr sz="1000" b="0" dirty="0">
+                <a:solidFill>
+                  <a:srgbClr val="595959"/>
+                </a:solidFill>
+                <a:latin typeface="맑은 고딕"/>
+              </a:rPr>
+              <a:t> 색(</a:t>
+            </a:r>
+            <a:r>
+              <a:rPr sz="1000" b="0" dirty="0" err="1">
+                <a:solidFill>
+                  <a:srgbClr val="595959"/>
+                </a:solidFill>
+                <a:latin typeface="맑은 고딕"/>
+              </a:rPr>
+              <a:t>입고</a:t>
+            </a:r>
+            <a:r>
+              <a:rPr sz="1000" b="0" dirty="0">
+                <a:solidFill>
+                  <a:srgbClr val="595959"/>
+                </a:solidFill>
+                <a:latin typeface="맑은 고딕"/>
+              </a:rPr>
+              <a:t>/</a:t>
+            </a:r>
+            <a:r>
+              <a:rPr sz="1000" b="0" dirty="0" err="1">
+                <a:solidFill>
+                  <a:srgbClr val="595959"/>
+                </a:solidFill>
+                <a:latin typeface="맑은 고딕"/>
+              </a:rPr>
+              <a:t>출고</a:t>
+            </a:r>
+            <a:r>
+              <a:rPr sz="1000" b="0" dirty="0">
+                <a:solidFill>
+                  <a:srgbClr val="595959"/>
+                </a:solidFill>
+                <a:latin typeface="맑은 고딕"/>
+              </a:rPr>
+              <a:t>/</a:t>
+            </a:r>
+            <a:r>
+              <a:rPr sz="1000" b="0" dirty="0" err="1">
+                <a:solidFill>
+                  <a:srgbClr val="595959"/>
+                </a:solidFill>
+                <a:latin typeface="맑은 고딕"/>
+              </a:rPr>
+              <a:t>피킹</a:t>
+            </a:r>
+            <a:r>
+              <a:rPr sz="1000" b="0" dirty="0">
+                <a:solidFill>
+                  <a:srgbClr val="595959"/>
+                </a:solidFill>
+                <a:latin typeface="맑은 고딕"/>
+              </a:rPr>
+              <a:t>/</a:t>
+            </a:r>
+            <a:r>
+              <a:rPr sz="1000" b="0" dirty="0" err="1">
+                <a:solidFill>
+                  <a:srgbClr val="595959"/>
+                </a:solidFill>
+                <a:latin typeface="맑은 고딕"/>
+              </a:rPr>
+              <a:t>랙투랙</a:t>
+            </a:r>
+            <a:r>
+              <a:rPr sz="1000" b="0" dirty="0">
+                <a:solidFill>
+                  <a:srgbClr val="595959"/>
+                </a:solidFill>
+                <a:latin typeface="맑은 고딕"/>
+              </a:rPr>
+              <a:t>/</a:t>
+            </a:r>
+            <a:r>
+              <a:rPr sz="1000" b="0" dirty="0" err="1">
+                <a:solidFill>
+                  <a:srgbClr val="595959"/>
+                </a:solidFill>
+                <a:latin typeface="맑은 고딕"/>
+              </a:rPr>
+              <a:t>이동</a:t>
+            </a:r>
+            <a:r>
+              <a:rPr sz="1000" b="0" dirty="0">
+                <a:solidFill>
+                  <a:srgbClr val="595959"/>
+                </a:solidFill>
+                <a:latin typeface="맑은 고딕"/>
+              </a:rPr>
+              <a:t>)</a:t>
+            </a:r>
+            <a:r>
+              <a:rPr sz="1000" b="0" dirty="0" err="1">
+                <a:solidFill>
+                  <a:srgbClr val="595959"/>
+                </a:solidFill>
+                <a:latin typeface="맑은 고딕"/>
+              </a:rPr>
+              <a:t>으로</a:t>
+            </a:r>
+            <a:r>
+              <a:rPr sz="1000" b="0" dirty="0">
+                <a:solidFill>
+                  <a:srgbClr val="595959"/>
+                </a:solidFill>
+                <a:latin typeface="맑은 고딕"/>
+              </a:rPr>
+              <a:t> </a:t>
+            </a:r>
+            <a:r>
+              <a:rPr sz="1000" b="0" dirty="0" err="1">
+                <a:solidFill>
+                  <a:srgbClr val="595959"/>
+                </a:solidFill>
+                <a:latin typeface="맑은 고딕"/>
+              </a:rPr>
+              <a:t>표시된다</a:t>
+            </a:r>
+            <a:r>
+              <a:rPr sz="1000" b="0" dirty="0">
+                <a:solidFill>
+                  <a:srgbClr val="595959"/>
+                </a:solidFill>
+                <a:latin typeface="맑은 고딕"/>
+              </a:rPr>
+              <a:t>.</a:t>
+            </a:r>
+          </a:p>
+          <a:p>
+            <a:pPr algn="l"/>
+            <a:r>
+              <a:rPr sz="1000" b="0" dirty="0">
+                <a:solidFill>
+                  <a:srgbClr val="595959"/>
+                </a:solidFill>
+                <a:latin typeface="맑은 고딕"/>
+              </a:rPr>
+              <a:t>· </a:t>
+            </a:r>
+            <a:r>
+              <a:rPr sz="1000" b="0" dirty="0" err="1">
+                <a:solidFill>
+                  <a:srgbClr val="595959"/>
+                </a:solidFill>
+                <a:latin typeface="맑은 고딕"/>
+              </a:rPr>
+              <a:t>화면</a:t>
+            </a:r>
+            <a:r>
+              <a:rPr sz="1000" b="0" dirty="0">
+                <a:solidFill>
+                  <a:srgbClr val="595959"/>
+                </a:solidFill>
+                <a:latin typeface="맑은 고딕"/>
+              </a:rPr>
+              <a:t> </a:t>
+            </a:r>
+            <a:r>
+              <a:rPr sz="1000" b="0" dirty="0" err="1">
+                <a:solidFill>
+                  <a:srgbClr val="595959"/>
+                </a:solidFill>
+                <a:latin typeface="맑은 고딕"/>
+              </a:rPr>
+              <a:t>왼쪽에</a:t>
+            </a:r>
+            <a:r>
+              <a:rPr sz="1000" b="0" dirty="0">
+                <a:solidFill>
+                  <a:srgbClr val="595959"/>
+                </a:solidFill>
+                <a:latin typeface="맑은 고딕"/>
+              </a:rPr>
+              <a:t> </a:t>
+            </a:r>
+            <a:r>
+              <a:rPr sz="1000" b="0" dirty="0" err="1">
+                <a:solidFill>
+                  <a:srgbClr val="595959"/>
+                </a:solidFill>
+                <a:latin typeface="맑은 고딕"/>
+              </a:rPr>
+              <a:t>범례표가</a:t>
+            </a:r>
+            <a:r>
+              <a:rPr sz="1000" b="0" dirty="0">
+                <a:solidFill>
+                  <a:srgbClr val="595959"/>
+                </a:solidFill>
+                <a:latin typeface="맑은 고딕"/>
+              </a:rPr>
+              <a:t> </a:t>
+            </a:r>
+            <a:r>
+              <a:rPr sz="1000" b="0" dirty="0" err="1">
+                <a:solidFill>
+                  <a:srgbClr val="595959"/>
+                </a:solidFill>
+                <a:latin typeface="맑은 고딕"/>
+              </a:rPr>
+              <a:t>함께</a:t>
+            </a:r>
+            <a:r>
+              <a:rPr sz="1000" b="0" dirty="0">
+                <a:solidFill>
+                  <a:srgbClr val="595959"/>
+                </a:solidFill>
+                <a:latin typeface="맑은 고딕"/>
+              </a:rPr>
+              <a:t> </a:t>
+            </a:r>
+            <a:r>
+              <a:rPr sz="1000" b="0" dirty="0" err="1">
+                <a:solidFill>
+                  <a:srgbClr val="595959"/>
+                </a:solidFill>
+                <a:latin typeface="맑은 고딕"/>
+              </a:rPr>
+              <a:t>그려진다</a:t>
+            </a:r>
+            <a:r>
+              <a:rPr sz="1000" b="0" dirty="0">
+                <a:solidFill>
+                  <a:srgbClr val="595959"/>
+                </a:solidFill>
+                <a:latin typeface="맑은 고딕"/>
+              </a:rPr>
+              <a:t> - </a:t>
+            </a:r>
+            <a:r>
+              <a:rPr sz="1000" b="0" dirty="0" err="1">
+                <a:solidFill>
+                  <a:srgbClr val="595959"/>
+                </a:solidFill>
+                <a:latin typeface="맑은 고딕"/>
+              </a:rPr>
+              <a:t>작업</a:t>
+            </a:r>
+            <a:r>
+              <a:rPr sz="1000" b="0" dirty="0">
+                <a:solidFill>
+                  <a:srgbClr val="595959"/>
+                </a:solidFill>
+                <a:latin typeface="맑은 고딕"/>
+              </a:rPr>
+              <a:t> </a:t>
+            </a:r>
+            <a:r>
+              <a:rPr sz="1000" b="0" dirty="0" err="1">
+                <a:solidFill>
+                  <a:srgbClr val="595959"/>
+                </a:solidFill>
+                <a:latin typeface="맑은 고딕"/>
+              </a:rPr>
+              <a:t>색상</a:t>
+            </a:r>
+            <a:r>
+              <a:rPr sz="1000" b="0" dirty="0">
+                <a:solidFill>
+                  <a:srgbClr val="595959"/>
+                </a:solidFill>
+                <a:latin typeface="맑은 고딕"/>
+              </a:rPr>
+              <a:t> / C/V </a:t>
+            </a:r>
+            <a:r>
+              <a:rPr sz="1000" b="0" dirty="0" err="1">
+                <a:solidFill>
+                  <a:srgbClr val="595959"/>
+                </a:solidFill>
+                <a:latin typeface="맑은 고딕"/>
+              </a:rPr>
+              <a:t>상태</a:t>
+            </a:r>
+            <a:r>
+              <a:rPr sz="1000" b="0" dirty="0">
+                <a:solidFill>
+                  <a:srgbClr val="595959"/>
+                </a:solidFill>
+                <a:latin typeface="맑은 고딕"/>
+              </a:rPr>
+              <a:t> / S/C·RTV </a:t>
+            </a:r>
+            <a:r>
+              <a:rPr sz="1000" b="0" dirty="0" err="1">
+                <a:solidFill>
+                  <a:srgbClr val="595959"/>
+                </a:solidFill>
+                <a:latin typeface="맑은 고딕"/>
+              </a:rPr>
+              <a:t>상태</a:t>
+            </a:r>
+            <a:r>
+              <a:rPr sz="1000" b="0" dirty="0">
+                <a:solidFill>
+                  <a:srgbClr val="595959"/>
+                </a:solidFill>
+                <a:latin typeface="맑은 고딕"/>
+              </a:rPr>
+              <a:t> / S/C·RTV </a:t>
+            </a:r>
+            <a:r>
+              <a:rPr sz="1000" b="0" dirty="0" err="1">
+                <a:solidFill>
+                  <a:srgbClr val="595959"/>
+                </a:solidFill>
+                <a:latin typeface="맑은 고딕"/>
+              </a:rPr>
+              <a:t>레일</a:t>
+            </a:r>
+            <a:r>
+              <a:rPr sz="1000" b="0" dirty="0">
+                <a:solidFill>
+                  <a:srgbClr val="595959"/>
+                </a:solidFill>
+                <a:latin typeface="맑은 고딕"/>
+              </a:rPr>
+              <a:t> 4개 </a:t>
+            </a:r>
+            <a:r>
+              <a:rPr sz="1000" b="0" dirty="0" err="1">
+                <a:solidFill>
+                  <a:srgbClr val="595959"/>
+                </a:solidFill>
+                <a:latin typeface="맑은 고딕"/>
+              </a:rPr>
+              <a:t>그룹이며</a:t>
+            </a:r>
+            <a:r>
+              <a:rPr sz="1000" b="0" dirty="0">
+                <a:solidFill>
+                  <a:srgbClr val="595959"/>
+                </a:solidFill>
+                <a:latin typeface="맑은 고딕"/>
+              </a:rPr>
+              <a:t>,
+    </a:t>
+            </a:r>
+            <a:r>
+              <a:rPr sz="1000" b="0" dirty="0" err="1">
+                <a:solidFill>
+                  <a:srgbClr val="595959"/>
+                </a:solidFill>
+                <a:latin typeface="맑은 고딕"/>
+              </a:rPr>
+              <a:t>색은</a:t>
+            </a:r>
+            <a:r>
+              <a:rPr sz="1000" b="0" dirty="0">
+                <a:solidFill>
+                  <a:srgbClr val="595959"/>
+                </a:solidFill>
+                <a:latin typeface="맑은 고딕"/>
+              </a:rPr>
+              <a:t> [</a:t>
+            </a:r>
+            <a:r>
+              <a:rPr sz="1000" b="0" dirty="0" err="1">
+                <a:solidFill>
+                  <a:srgbClr val="595959"/>
+                </a:solidFill>
+                <a:latin typeface="맑은 고딕"/>
+              </a:rPr>
+              <a:t>범례</a:t>
+            </a:r>
+            <a:r>
+              <a:rPr sz="1000" b="0" dirty="0">
+                <a:solidFill>
+                  <a:srgbClr val="595959"/>
+                </a:solidFill>
+                <a:latin typeface="맑은 고딕"/>
+              </a:rPr>
+              <a:t>] </a:t>
+            </a:r>
+            <a:r>
+              <a:rPr sz="1000" b="0" dirty="0" err="1">
+                <a:solidFill>
+                  <a:srgbClr val="595959"/>
+                </a:solidFill>
+                <a:latin typeface="맑은 고딕"/>
+              </a:rPr>
+              <a:t>창에서</a:t>
+            </a:r>
+            <a:r>
+              <a:rPr sz="1000" b="0" dirty="0">
+                <a:solidFill>
+                  <a:srgbClr val="595959"/>
+                </a:solidFill>
+                <a:latin typeface="맑은 고딕"/>
+              </a:rPr>
+              <a:t> </a:t>
+            </a:r>
+            <a:r>
+              <a:rPr sz="1000" b="0" dirty="0" err="1">
+                <a:solidFill>
+                  <a:srgbClr val="595959"/>
+                </a:solidFill>
+                <a:latin typeface="맑은 고딕"/>
+              </a:rPr>
+              <a:t>바꾸면</a:t>
+            </a:r>
+            <a:r>
+              <a:rPr sz="1000" b="0" dirty="0">
+                <a:solidFill>
+                  <a:srgbClr val="595959"/>
+                </a:solidFill>
+                <a:latin typeface="맑은 고딕"/>
+              </a:rPr>
+              <a:t> 이 </a:t>
+            </a:r>
+            <a:r>
+              <a:rPr sz="1000" b="0" dirty="0" err="1">
+                <a:solidFill>
+                  <a:srgbClr val="595959"/>
+                </a:solidFill>
+                <a:latin typeface="맑은 고딕"/>
+              </a:rPr>
+              <a:t>표에도</a:t>
+            </a:r>
+            <a:r>
+              <a:rPr sz="1000" b="0" dirty="0">
+                <a:solidFill>
+                  <a:srgbClr val="595959"/>
+                </a:solidFill>
+                <a:latin typeface="맑은 고딕"/>
+              </a:rPr>
+              <a:t> </a:t>
+            </a:r>
+            <a:r>
+              <a:rPr sz="1000" b="0" dirty="0" err="1">
+                <a:solidFill>
+                  <a:srgbClr val="595959"/>
+                </a:solidFill>
+                <a:latin typeface="맑은 고딕"/>
+              </a:rPr>
+              <a:t>곧바로</a:t>
+            </a:r>
+            <a:r>
+              <a:rPr sz="1000" b="0" dirty="0">
+                <a:solidFill>
+                  <a:srgbClr val="595959"/>
+                </a:solidFill>
+                <a:latin typeface="맑은 고딕"/>
+              </a:rPr>
+              <a:t> </a:t>
+            </a:r>
+            <a:r>
+              <a:rPr sz="1000" b="0" dirty="0" err="1">
+                <a:solidFill>
+                  <a:srgbClr val="595959"/>
+                </a:solidFill>
+                <a:latin typeface="맑은 고딕"/>
+              </a:rPr>
+              <a:t>반영된다</a:t>
+            </a:r>
+            <a:r>
+              <a:rPr sz="1000" b="0" dirty="0">
+                <a:solidFill>
+                  <a:srgbClr val="595959"/>
+                </a:solidFill>
+                <a:latin typeface="맑은 고딕"/>
+              </a:rPr>
+              <a:t>.</a:t>
+            </a:r>
+          </a:p>
+          <a:p>
+            <a:pPr algn="l"/>
+            <a:r>
+              <a:rPr sz="1000" b="0" dirty="0">
+                <a:solidFill>
+                  <a:srgbClr val="595959"/>
+                </a:solidFill>
+                <a:latin typeface="맑은 고딕"/>
+              </a:rPr>
+              <a:t>· C/V#2(S/C#1 </a:t>
+            </a:r>
+            <a:r>
+              <a:rPr sz="1000" b="0" dirty="0" err="1">
+                <a:solidFill>
+                  <a:srgbClr val="595959"/>
+                </a:solidFill>
+                <a:latin typeface="맑은 고딕"/>
+              </a:rPr>
+              <a:t>통로</a:t>
+            </a:r>
+            <a:r>
+              <a:rPr sz="1000" b="0" dirty="0">
+                <a:solidFill>
+                  <a:srgbClr val="595959"/>
+                </a:solidFill>
+                <a:latin typeface="맑은 고딕"/>
+              </a:rPr>
+              <a:t>)와 C/V#11(</a:t>
+            </a:r>
+            <a:r>
+              <a:rPr sz="1000" b="0" dirty="0" err="1">
+                <a:solidFill>
+                  <a:srgbClr val="595959"/>
+                </a:solidFill>
+                <a:latin typeface="맑은 고딕"/>
+              </a:rPr>
+              <a:t>입출고</a:t>
+            </a:r>
+            <a:r>
+              <a:rPr sz="1000" b="0" dirty="0">
+                <a:solidFill>
+                  <a:srgbClr val="595959"/>
+                </a:solidFill>
+                <a:latin typeface="맑은 고딕"/>
+              </a:rPr>
+              <a:t> </a:t>
+            </a:r>
+            <a:r>
+              <a:rPr sz="1000" b="0" dirty="0" err="1">
+                <a:solidFill>
+                  <a:srgbClr val="595959"/>
+                </a:solidFill>
+                <a:latin typeface="맑은 고딕"/>
+              </a:rPr>
+              <a:t>겸용대</a:t>
+            </a:r>
+            <a:r>
+              <a:rPr sz="1000" b="0" dirty="0">
+                <a:solidFill>
+                  <a:srgbClr val="595959"/>
+                </a:solidFill>
+                <a:latin typeface="맑은 고딕"/>
+              </a:rPr>
+              <a:t>)의 </a:t>
+            </a:r>
+            <a:r>
+              <a:rPr sz="1000" b="0" dirty="0" err="1">
+                <a:solidFill>
+                  <a:srgbClr val="595959"/>
+                </a:solidFill>
+                <a:latin typeface="맑은 고딕"/>
+              </a:rPr>
+              <a:t>현재</a:t>
+            </a:r>
+            <a:r>
+              <a:rPr sz="1000" b="0" dirty="0">
+                <a:solidFill>
+                  <a:srgbClr val="595959"/>
+                </a:solidFill>
+                <a:latin typeface="맑은 고딕"/>
+              </a:rPr>
+              <a:t> </a:t>
+            </a:r>
+            <a:r>
+              <a:rPr sz="1000" b="0" dirty="0" err="1">
+                <a:solidFill>
+                  <a:srgbClr val="595959"/>
+                </a:solidFill>
+                <a:latin typeface="맑은 고딕"/>
+              </a:rPr>
+              <a:t>입출고</a:t>
+            </a:r>
+            <a:r>
+              <a:rPr sz="1000" b="0" dirty="0">
+                <a:solidFill>
+                  <a:srgbClr val="595959"/>
+                </a:solidFill>
+                <a:latin typeface="맑은 고딕"/>
+              </a:rPr>
+              <a:t> </a:t>
+            </a:r>
+            <a:r>
+              <a:rPr sz="1000" b="0" dirty="0" err="1">
+                <a:solidFill>
+                  <a:srgbClr val="595959"/>
+                </a:solidFill>
+                <a:latin typeface="맑은 고딕"/>
+              </a:rPr>
+              <a:t>모드를</a:t>
+            </a:r>
+            <a:r>
+              <a:rPr sz="1000" b="0" dirty="0">
+                <a:solidFill>
+                  <a:srgbClr val="595959"/>
+                </a:solidFill>
+                <a:latin typeface="맑은 고딕"/>
+              </a:rPr>
+              <a:t> "</a:t>
+            </a:r>
+            <a:r>
+              <a:rPr sz="1000" b="0" dirty="0" err="1">
+                <a:solidFill>
+                  <a:srgbClr val="595959"/>
+                </a:solidFill>
+                <a:latin typeface="맑은 고딕"/>
+              </a:rPr>
+              <a:t>입고</a:t>
+            </a:r>
+            <a:r>
+              <a:rPr sz="1000" b="0" dirty="0">
+                <a:solidFill>
+                  <a:srgbClr val="595959"/>
+                </a:solidFill>
+                <a:latin typeface="맑은 고딕"/>
+              </a:rPr>
+              <a:t> </a:t>
+            </a:r>
+            <a:r>
+              <a:rPr sz="1000" b="0" dirty="0" err="1">
+                <a:solidFill>
+                  <a:srgbClr val="595959"/>
+                </a:solidFill>
+                <a:latin typeface="맑은 고딕"/>
+              </a:rPr>
+              <a:t>모드</a:t>
+            </a:r>
+            <a:r>
+              <a:rPr sz="1000" b="0" dirty="0">
+                <a:solidFill>
+                  <a:srgbClr val="595959"/>
+                </a:solidFill>
+                <a:latin typeface="맑은 고딕"/>
+              </a:rPr>
+              <a:t>/</a:t>
+            </a:r>
+            <a:r>
+              <a:rPr sz="1000" b="0" dirty="0" err="1">
+                <a:solidFill>
+                  <a:srgbClr val="595959"/>
+                </a:solidFill>
+                <a:latin typeface="맑은 고딕"/>
+              </a:rPr>
+              <a:t>출고</a:t>
+            </a:r>
+            <a:r>
+              <a:rPr sz="1000" b="0" dirty="0">
+                <a:solidFill>
+                  <a:srgbClr val="595959"/>
+                </a:solidFill>
+                <a:latin typeface="맑은 고딕"/>
+              </a:rPr>
+              <a:t> </a:t>
+            </a:r>
+            <a:r>
+              <a:rPr sz="1000" b="0" dirty="0" err="1">
+                <a:solidFill>
+                  <a:srgbClr val="595959"/>
+                </a:solidFill>
+                <a:latin typeface="맑은 고딕"/>
+              </a:rPr>
+              <a:t>모드"로</a:t>
+            </a:r>
+            <a:r>
+              <a:rPr sz="1000" b="0" dirty="0">
+                <a:solidFill>
+                  <a:srgbClr val="595959"/>
+                </a:solidFill>
+                <a:latin typeface="맑은 고딕"/>
+              </a:rPr>
+              <a:t> </a:t>
+            </a:r>
+            <a:r>
+              <a:rPr sz="1000" b="0" dirty="0" err="1">
+                <a:solidFill>
+                  <a:srgbClr val="595959"/>
+                </a:solidFill>
+                <a:latin typeface="맑은 고딕"/>
+              </a:rPr>
+              <a:t>표시한다</a:t>
+            </a:r>
+            <a:r>
+              <a:rPr sz="1000" b="0" dirty="0">
+                <a:solidFill>
+                  <a:srgbClr val="595959"/>
+                </a:solidFill>
+                <a:latin typeface="맑은 고딕"/>
+              </a:rPr>
+              <a:t>.</a:t>
+            </a:r>
+          </a:p>
+          <a:p>
+            <a:pPr algn="l"/>
+            <a:r>
+              <a:rPr sz="1000" b="0" dirty="0">
+                <a:solidFill>
+                  <a:srgbClr val="595959"/>
+                </a:solidFill>
+                <a:latin typeface="맑은 고딕"/>
+              </a:rPr>
+              <a:t>· </a:t>
+            </a:r>
+            <a:r>
+              <a:rPr sz="1000" b="0" dirty="0" err="1">
+                <a:solidFill>
+                  <a:srgbClr val="595959"/>
+                </a:solidFill>
+                <a:latin typeface="맑은 고딕"/>
+              </a:rPr>
+              <a:t>작업대</a:t>
+            </a:r>
+            <a:r>
+              <a:rPr sz="1000" b="0" dirty="0">
+                <a:solidFill>
+                  <a:srgbClr val="595959"/>
+                </a:solidFill>
+                <a:latin typeface="맑은 고딕"/>
+              </a:rPr>
+              <a:t> </a:t>
+            </a:r>
+            <a:r>
+              <a:rPr sz="1000" b="0" dirty="0" err="1">
+                <a:solidFill>
+                  <a:srgbClr val="595959"/>
+                </a:solidFill>
+                <a:latin typeface="맑은 고딕"/>
+              </a:rPr>
+              <a:t>라벨은</a:t>
+            </a:r>
+            <a:r>
+              <a:rPr sz="1000" b="0" dirty="0">
+                <a:solidFill>
+                  <a:srgbClr val="595959"/>
+                </a:solidFill>
+                <a:latin typeface="맑은 고딕"/>
+              </a:rPr>
+              <a:t> IMS </a:t>
+            </a:r>
+            <a:r>
+              <a:rPr sz="1000" b="0" dirty="0" err="1">
+                <a:solidFill>
+                  <a:srgbClr val="595959"/>
+                </a:solidFill>
+                <a:latin typeface="맑은 고딕"/>
+              </a:rPr>
+              <a:t>스테이션</a:t>
+            </a:r>
+            <a:r>
+              <a:rPr sz="1000" b="0" dirty="0">
+                <a:solidFill>
+                  <a:srgbClr val="595959"/>
+                </a:solidFill>
+                <a:latin typeface="맑은 고딕"/>
+              </a:rPr>
+              <a:t> </a:t>
+            </a:r>
+            <a:r>
+              <a:rPr sz="1000" b="0" dirty="0" err="1">
+                <a:solidFill>
+                  <a:srgbClr val="595959"/>
+                </a:solidFill>
+                <a:latin typeface="맑은 고딕"/>
+              </a:rPr>
+              <a:t>코드와</a:t>
+            </a:r>
+            <a:r>
+              <a:rPr sz="1000" b="0" dirty="0">
+                <a:solidFill>
+                  <a:srgbClr val="595959"/>
+                </a:solidFill>
+                <a:latin typeface="맑은 고딕"/>
+              </a:rPr>
+              <a:t> </a:t>
+            </a:r>
+            <a:r>
+              <a:rPr sz="1000" b="0" dirty="0" err="1">
+                <a:solidFill>
+                  <a:srgbClr val="595959"/>
+                </a:solidFill>
+                <a:latin typeface="맑은 고딕"/>
+              </a:rPr>
+              <a:t>명칭을</a:t>
+            </a:r>
+            <a:r>
+              <a:rPr sz="1000" b="0" dirty="0">
+                <a:solidFill>
+                  <a:srgbClr val="595959"/>
+                </a:solidFill>
+                <a:latin typeface="맑은 고딕"/>
+              </a:rPr>
+              <a:t> </a:t>
+            </a:r>
+            <a:r>
+              <a:rPr sz="1000" b="0" dirty="0" err="1">
+                <a:solidFill>
+                  <a:srgbClr val="595959"/>
+                </a:solidFill>
+                <a:latin typeface="맑은 고딕"/>
+              </a:rPr>
+              <a:t>함께</a:t>
+            </a:r>
+            <a:r>
+              <a:rPr sz="1000" b="0" dirty="0">
+                <a:solidFill>
+                  <a:srgbClr val="595959"/>
+                </a:solidFill>
+                <a:latin typeface="맑은 고딕"/>
+              </a:rPr>
+              <a:t> </a:t>
+            </a:r>
+            <a:r>
+              <a:rPr sz="1000" b="0" dirty="0" err="1">
+                <a:solidFill>
+                  <a:srgbClr val="595959"/>
+                </a:solidFill>
+                <a:latin typeface="맑은 고딕"/>
+              </a:rPr>
+              <a:t>표기한다</a:t>
+            </a:r>
+            <a:r>
+              <a:rPr sz="1000" b="0" dirty="0">
+                <a:solidFill>
+                  <a:srgbClr val="595959"/>
+                </a:solidFill>
+                <a:latin typeface="맑은 고딕"/>
+              </a:rPr>
+              <a:t> : [101] </a:t>
+            </a:r>
+            <a:r>
+              <a:rPr sz="1000" b="0" dirty="0" err="1">
+                <a:solidFill>
+                  <a:srgbClr val="595959"/>
+                </a:solidFill>
+                <a:latin typeface="맑은 고딕"/>
+              </a:rPr>
+              <a:t>외부</a:t>
+            </a:r>
+            <a:r>
+              <a:rPr sz="1000" b="0" dirty="0">
+                <a:solidFill>
+                  <a:srgbClr val="595959"/>
+                </a:solidFill>
+                <a:latin typeface="맑은 고딕"/>
+              </a:rPr>
+              <a:t> </a:t>
+            </a:r>
+            <a:r>
+              <a:rPr sz="1000" b="0" dirty="0" err="1">
+                <a:solidFill>
+                  <a:srgbClr val="595959"/>
+                </a:solidFill>
+                <a:latin typeface="맑은 고딕"/>
+              </a:rPr>
+              <a:t>입고</a:t>
+            </a:r>
+            <a:r>
+              <a:rPr sz="1000" b="0" dirty="0">
+                <a:solidFill>
+                  <a:srgbClr val="595959"/>
+                </a:solidFill>
+                <a:latin typeface="맑은 고딕"/>
+              </a:rPr>
+              <a:t> </a:t>
+            </a:r>
+            <a:r>
+              <a:rPr sz="1000" b="0" dirty="0" err="1">
+                <a:solidFill>
+                  <a:srgbClr val="595959"/>
+                </a:solidFill>
+                <a:latin typeface="맑은 고딕"/>
+              </a:rPr>
+              <a:t>전용</a:t>
+            </a:r>
+            <a:r>
+              <a:rPr sz="1000" b="0" dirty="0">
+                <a:solidFill>
+                  <a:srgbClr val="595959"/>
+                </a:solidFill>
+                <a:latin typeface="맑은 고딕"/>
+              </a:rPr>
+              <a:t> </a:t>
+            </a:r>
+            <a:r>
+              <a:rPr sz="1000" b="0" dirty="0" err="1">
+                <a:solidFill>
+                  <a:srgbClr val="595959"/>
+                </a:solidFill>
+                <a:latin typeface="맑은 고딕"/>
+              </a:rPr>
+              <a:t>입출고대</a:t>
+            </a:r>
+            <a:r>
+              <a:rPr sz="1000" b="0" dirty="0">
+                <a:solidFill>
+                  <a:srgbClr val="595959"/>
+                </a:solidFill>
+                <a:latin typeface="맑은 고딕"/>
+              </a:rPr>
+              <a:t>, 103 </a:t>
+            </a:r>
+            <a:r>
+              <a:rPr sz="1000" b="0" dirty="0" err="1">
+                <a:solidFill>
+                  <a:srgbClr val="595959"/>
+                </a:solidFill>
+                <a:latin typeface="맑은 고딕"/>
+              </a:rPr>
+              <a:t>제품</a:t>
+            </a:r>
+            <a:r>
+              <a:rPr sz="1000" b="0" dirty="0">
+                <a:solidFill>
+                  <a:srgbClr val="595959"/>
+                </a:solidFill>
+                <a:latin typeface="맑은 고딕"/>
+              </a:rPr>
+              <a:t> </a:t>
+            </a:r>
+            <a:r>
+              <a:rPr sz="1000" b="0" dirty="0" err="1">
+                <a:solidFill>
+                  <a:srgbClr val="595959"/>
+                </a:solidFill>
+                <a:latin typeface="맑은 고딕"/>
+              </a:rPr>
+              <a:t>입고대</a:t>
+            </a:r>
+            <a:r>
+              <a:rPr sz="1000" b="0" dirty="0">
+                <a:solidFill>
+                  <a:srgbClr val="595959"/>
+                </a:solidFill>
+                <a:latin typeface="맑은 고딕"/>
+              </a:rPr>
+              <a:t>(TR#24), 104 </a:t>
+            </a:r>
+            <a:r>
+              <a:rPr sz="1000" b="0" dirty="0" err="1">
+                <a:solidFill>
+                  <a:srgbClr val="595959"/>
+                </a:solidFill>
+                <a:latin typeface="맑은 고딕"/>
+              </a:rPr>
+              <a:t>원부자재</a:t>
+            </a:r>
+            <a:r>
+              <a:rPr sz="1000" b="0" dirty="0">
+                <a:solidFill>
+                  <a:srgbClr val="595959"/>
+                </a:solidFill>
+                <a:latin typeface="맑은 고딕"/>
+              </a:rPr>
+              <a:t> </a:t>
+            </a:r>
+            <a:r>
+              <a:rPr sz="1000" b="0" dirty="0" err="1">
+                <a:solidFill>
+                  <a:srgbClr val="595959"/>
+                </a:solidFill>
+                <a:latin typeface="맑은 고딕"/>
+              </a:rPr>
+              <a:t>불출대</a:t>
+            </a:r>
+            <a:r>
+              <a:rPr sz="1000" b="0" dirty="0">
+                <a:solidFill>
+                  <a:srgbClr val="595959"/>
+                </a:solidFill>
+                <a:latin typeface="맑은 고딕"/>
+              </a:rPr>
+              <a:t>(TR#26), 102 </a:t>
+            </a:r>
+            <a:r>
+              <a:rPr sz="1000" b="0" dirty="0" err="1">
+                <a:solidFill>
+                  <a:srgbClr val="595959"/>
+                </a:solidFill>
+                <a:latin typeface="맑은 고딕"/>
+              </a:rPr>
+              <a:t>피킹</a:t>
+            </a:r>
+            <a:r>
+              <a:rPr sz="1000" b="0" dirty="0">
+                <a:solidFill>
+                  <a:srgbClr val="595959"/>
+                </a:solidFill>
+                <a:latin typeface="맑은 고딕"/>
+              </a:rPr>
+              <a:t> </a:t>
+            </a:r>
+            <a:r>
+              <a:rPr sz="1000" b="0" dirty="0" err="1">
+                <a:solidFill>
+                  <a:srgbClr val="595959"/>
+                </a:solidFill>
+                <a:latin typeface="맑은 고딕"/>
+              </a:rPr>
+              <a:t>작업대</a:t>
+            </a:r>
+            <a:r>
+              <a:rPr sz="1000" b="0" dirty="0">
+                <a:solidFill>
+                  <a:srgbClr val="595959"/>
+                </a:solidFill>
+                <a:latin typeface="맑은 고딕"/>
+              </a:rPr>
+              <a:t>(TR#29/30).</a:t>
+            </a:r>
+          </a:p>
+          <a:p>
+            <a:pPr algn="l"/>
+            <a:r>
+              <a:rPr sz="1000" b="0" dirty="0">
+                <a:solidFill>
+                  <a:srgbClr val="595959"/>
+                </a:solidFill>
+                <a:latin typeface="맑은 고딕"/>
+              </a:rPr>
+              <a:t>· </a:t>
+            </a:r>
+            <a:r>
+              <a:rPr lang="ko-KR" altLang="en-US" sz="1000" dirty="0">
+                <a:solidFill>
+                  <a:srgbClr val="595959"/>
+                </a:solidFill>
+                <a:latin typeface="맑은 고딕"/>
+              </a:rPr>
+              <a:t>상단</a:t>
+            </a:r>
+            <a:r>
+              <a:rPr sz="1000" b="0" dirty="0">
+                <a:solidFill>
+                  <a:srgbClr val="595959"/>
+                </a:solidFill>
+                <a:latin typeface="맑은 고딕"/>
+              </a:rPr>
+              <a:t> </a:t>
+            </a:r>
+            <a:r>
+              <a:rPr sz="1000" b="0" dirty="0" err="1">
+                <a:solidFill>
+                  <a:srgbClr val="595959"/>
+                </a:solidFill>
+                <a:latin typeface="맑은 고딕"/>
+              </a:rPr>
+              <a:t>상태바</a:t>
+            </a:r>
+            <a:r>
+              <a:rPr sz="1000" b="0" dirty="0">
+                <a:solidFill>
+                  <a:srgbClr val="595959"/>
+                </a:solidFill>
+                <a:latin typeface="맑은 고딕"/>
+              </a:rPr>
+              <a:t> EQUIP / HOST / SCH 는 각 </a:t>
+            </a:r>
+            <a:r>
+              <a:rPr sz="1000" b="0" dirty="0" err="1">
+                <a:solidFill>
+                  <a:srgbClr val="595959"/>
+                </a:solidFill>
+                <a:latin typeface="맑은 고딕"/>
+              </a:rPr>
+              <a:t>서버</a:t>
+            </a:r>
+            <a:r>
+              <a:rPr sz="1000" b="0" dirty="0">
+                <a:solidFill>
+                  <a:srgbClr val="595959"/>
+                </a:solidFill>
+                <a:latin typeface="맑은 고딕"/>
+              </a:rPr>
+              <a:t> </a:t>
+            </a:r>
+            <a:r>
+              <a:rPr sz="1000" b="0" dirty="0" err="1">
+                <a:solidFill>
+                  <a:srgbClr val="595959"/>
+                </a:solidFill>
+                <a:latin typeface="맑은 고딕"/>
+              </a:rPr>
+              <a:t>프로그램</a:t>
+            </a:r>
+            <a:r>
+              <a:rPr sz="1000" b="0" dirty="0">
+                <a:solidFill>
+                  <a:srgbClr val="595959"/>
+                </a:solidFill>
+                <a:latin typeface="맑은 고딕"/>
+              </a:rPr>
+              <a:t>(</a:t>
+            </a:r>
+            <a:r>
+              <a:rPr sz="1000" b="0" dirty="0" err="1">
+                <a:solidFill>
+                  <a:srgbClr val="595959"/>
+                </a:solidFill>
+                <a:latin typeface="맑은 고딕"/>
+              </a:rPr>
+              <a:t>설비</a:t>
+            </a:r>
+            <a:r>
+              <a:rPr sz="1000" b="0" dirty="0">
+                <a:solidFill>
+                  <a:srgbClr val="595959"/>
+                </a:solidFill>
+                <a:latin typeface="맑은 고딕"/>
+              </a:rPr>
+              <a:t> </a:t>
+            </a:r>
+            <a:r>
+              <a:rPr sz="1000" b="0" dirty="0" err="1">
+                <a:solidFill>
+                  <a:srgbClr val="595959"/>
+                </a:solidFill>
+                <a:latin typeface="맑은 고딕"/>
+              </a:rPr>
+              <a:t>통신</a:t>
+            </a:r>
+            <a:r>
+              <a:rPr sz="1000" b="0" dirty="0">
+                <a:solidFill>
+                  <a:srgbClr val="595959"/>
+                </a:solidFill>
+                <a:latin typeface="맑은 고딕"/>
+              </a:rPr>
+              <a:t>/</a:t>
+            </a:r>
+            <a:r>
+              <a:rPr sz="1000" b="0" dirty="0" err="1">
+                <a:solidFill>
+                  <a:srgbClr val="595959"/>
+                </a:solidFill>
+                <a:latin typeface="맑은 고딕"/>
+              </a:rPr>
+              <a:t>상위</a:t>
+            </a:r>
+            <a:r>
+              <a:rPr sz="1000" b="0" dirty="0">
+                <a:solidFill>
+                  <a:srgbClr val="595959"/>
+                </a:solidFill>
+                <a:latin typeface="맑은 고딕"/>
+              </a:rPr>
+              <a:t> </a:t>
+            </a:r>
+            <a:r>
+              <a:rPr sz="1000" b="0" dirty="0" err="1">
+                <a:solidFill>
+                  <a:srgbClr val="595959"/>
+                </a:solidFill>
+                <a:latin typeface="맑은 고딕"/>
+              </a:rPr>
+              <a:t>통신</a:t>
+            </a:r>
+            <a:r>
+              <a:rPr sz="1000" b="0" dirty="0">
+                <a:solidFill>
+                  <a:srgbClr val="595959"/>
+                </a:solidFill>
+                <a:latin typeface="맑은 고딕"/>
+              </a:rPr>
+              <a:t>/</a:t>
+            </a:r>
+            <a:r>
+              <a:rPr sz="1000" b="0" dirty="0" err="1">
+                <a:solidFill>
+                  <a:srgbClr val="595959"/>
+                </a:solidFill>
+                <a:latin typeface="맑은 고딕"/>
+              </a:rPr>
+              <a:t>스케줄러</a:t>
+            </a:r>
+            <a:r>
+              <a:rPr sz="1000" b="0" dirty="0">
+                <a:solidFill>
+                  <a:srgbClr val="595959"/>
+                </a:solidFill>
+                <a:latin typeface="맑은 고딕"/>
+              </a:rPr>
+              <a:t>)의 </a:t>
+            </a:r>
+            <a:r>
+              <a:rPr sz="1000" b="0" dirty="0" err="1">
+                <a:solidFill>
+                  <a:srgbClr val="595959"/>
+                </a:solidFill>
+                <a:latin typeface="맑은 고딕"/>
+              </a:rPr>
+              <a:t>생존</a:t>
+            </a:r>
+            <a:r>
+              <a:rPr sz="1000" b="0" dirty="0">
+                <a:solidFill>
+                  <a:srgbClr val="595959"/>
+                </a:solidFill>
+                <a:latin typeface="맑은 고딕"/>
+              </a:rPr>
+              <a:t> </a:t>
+            </a:r>
+            <a:r>
+              <a:rPr sz="1000" b="0" dirty="0" err="1">
+                <a:solidFill>
+                  <a:srgbClr val="595959"/>
+                </a:solidFill>
+                <a:latin typeface="맑은 고딕"/>
+              </a:rPr>
+              <a:t>상태</a:t>
+            </a:r>
+            <a:r>
+              <a:rPr sz="1000" b="0" dirty="0">
+                <a:solidFill>
+                  <a:srgbClr val="595959"/>
+                </a:solidFill>
+                <a:latin typeface="맑은 고딕"/>
+              </a:rPr>
+              <a:t>(</a:t>
+            </a:r>
+            <a:r>
+              <a:rPr sz="1000" b="0" dirty="0" err="1">
+                <a:solidFill>
+                  <a:srgbClr val="595959"/>
+                </a:solidFill>
+                <a:latin typeface="맑은 고딕"/>
+              </a:rPr>
+              <a:t>초록</a:t>
+            </a:r>
+            <a:r>
+              <a:rPr sz="1000" b="0" dirty="0">
+                <a:solidFill>
+                  <a:srgbClr val="595959"/>
+                </a:solidFill>
+                <a:latin typeface="맑은 고딕"/>
+              </a:rPr>
+              <a:t>=</a:t>
+            </a:r>
+            <a:r>
+              <a:rPr sz="1000" b="0" dirty="0" err="1">
+                <a:solidFill>
+                  <a:srgbClr val="595959"/>
+                </a:solidFill>
+                <a:latin typeface="맑은 고딕"/>
+              </a:rPr>
+              <a:t>정상</a:t>
+            </a:r>
+            <a:r>
+              <a:rPr sz="1000" b="0" dirty="0">
+                <a:solidFill>
+                  <a:srgbClr val="595959"/>
+                </a:solidFill>
+                <a:latin typeface="맑은 고딕"/>
+              </a:rPr>
+              <a:t>, </a:t>
+            </a:r>
+            <a:r>
+              <a:rPr sz="1000" b="0" dirty="0" err="1">
+                <a:solidFill>
+                  <a:srgbClr val="595959"/>
+                </a:solidFill>
+                <a:latin typeface="맑은 고딕"/>
+              </a:rPr>
+              <a:t>빨강</a:t>
+            </a:r>
+            <a:r>
+              <a:rPr sz="1000" b="0" dirty="0">
+                <a:solidFill>
+                  <a:srgbClr val="595959"/>
+                </a:solidFill>
+                <a:latin typeface="맑은 고딕"/>
+              </a:rPr>
+              <a:t>=</a:t>
+            </a:r>
+            <a:r>
+              <a:rPr sz="1000" b="0" dirty="0" err="1">
+                <a:solidFill>
+                  <a:srgbClr val="595959"/>
+                </a:solidFill>
+                <a:latin typeface="맑은 고딕"/>
+              </a:rPr>
+              <a:t>끊김</a:t>
+            </a:r>
+            <a:r>
+              <a:rPr sz="1000" b="0" dirty="0">
+                <a:solidFill>
+                  <a:srgbClr val="595959"/>
+                </a:solidFill>
+                <a:latin typeface="맑은 고딕"/>
+              </a:rPr>
+              <a:t>)</a:t>
+            </a:r>
+            <a:r>
+              <a:rPr sz="1000" b="0" dirty="0" err="1">
+                <a:solidFill>
+                  <a:srgbClr val="595959"/>
+                </a:solidFill>
+                <a:latin typeface="맑은 고딕"/>
+              </a:rPr>
+              <a:t>이다</a:t>
+            </a:r>
+            <a:r>
+              <a:rPr sz="1000" b="0" dirty="0">
+                <a:solidFill>
+                  <a:srgbClr val="595959"/>
+                </a:solidFill>
+                <a:latin typeface="맑은 고딕"/>
+              </a:rPr>
+              <a:t>.</a:t>
             </a:r>
           </a:p>
         </p:txBody>
@@ -8015,7 +10428,7 @@
           <a:noFill/>
         </p:spPr>
         <p:txBody>
-          <a:bodyPr wrap="square" anchor="t" lIns="45720" rIns="45720">
+          <a:bodyPr wrap="square" lIns="45720" rIns="45720" anchor="t">
             <a:spAutoFit/>
           </a:bodyPr>
           <a:lstStyle/>
@@ -8050,7 +10463,7 @@
           <a:noFill/>
         </p:spPr>
         <p:txBody>
-          <a:bodyPr wrap="square" anchor="t" lIns="45720" rIns="45720">
+          <a:bodyPr wrap="square" lIns="45720" rIns="45720" anchor="t">
             <a:spAutoFit/>
           </a:bodyPr>
           <a:lstStyle/>
@@ -8063,7 +10476,7 @@
                 </a:solidFill>
                 <a:latin typeface="맑은 고딕"/>
               </a:rPr>
-              <a:t>23</a:t>
+              <a:t>4</a:t>
             </a:r>
           </a:p>
         </p:txBody>
@@ -8076,8 +10489,8 @@
 </p:sld>
 </file>
 
-<file path=ppt/slides/slide24.xml><?xml version="1.0" encoding="utf-8"?>
-<p:sld xmlns:a="http://schemas.openxmlformats.org/drawingml/2006/main" xmlns:p="http://schemas.openxmlformats.org/presentationml/2006/main" xmlns:r="http://schemas.openxmlformats.org/officeDocument/2006/relationships">
+<file path=ppt/slides/slide5.xml><?xml version="1.0" encoding="utf-8"?>
+<p:sld xmlns:a="http://schemas.openxmlformats.org/drawingml/2006/main" xmlns:r="http://schemas.openxmlformats.org/officeDocument/2006/relationships" xmlns:p="http://schemas.openxmlformats.org/presentationml/2006/main">
   <p:cSld>
     <p:spTree>
       <p:nvGrpSpPr>
@@ -8085,7 +10498,14 @@
         <p:cNvGrpSpPr/>
         <p:nvPr/>
       </p:nvGrpSpPr>
-      <p:grpSpPr/>
+      <p:grpSpPr>
+        <a:xfrm>
+          <a:off x="0" y="0"/>
+          <a:ext cx="0" cy="0"/>
+          <a:chOff x="0" y="0"/>
+          <a:chExt cx="0" cy="0"/>
+        </a:xfrm>
+      </p:grpSpPr>
       <p:sp>
         <p:nvSpPr>
           <p:cNvPr id="2" name="TextBox 1"/>
@@ -8103,7 +10523,7 @@
           <a:noFill/>
         </p:spPr>
         <p:txBody>
-          <a:bodyPr wrap="square" anchor="ctr" lIns="45720" rIns="45720">
+          <a:bodyPr wrap="square" lIns="45720" rIns="45720" anchor="ctr">
             <a:spAutoFit/>
           </a:bodyPr>
           <a:lstStyle/>
@@ -8116,7 +10536,7 @@
                 </a:solidFill>
                 <a:latin typeface="맑은 고딕"/>
               </a:rPr>
-              <a:t>서버 프로그램 - 설비 통신 (WCS_TASK_CV)</a:t>
+              <a:t>ECS&gt;환경설정 - 통신 연결 정의 (EQP 정보)</a:t>
             </a:r>
           </a:p>
         </p:txBody>
@@ -8163,12 +10583,13 @@
           <a:lstStyle/>
           <a:p>
             <a:pPr algn="ctr"/>
+            <a:endParaRPr/>
           </a:p>
         </p:txBody>
       </p:sp>
       <p:pic>
         <p:nvPicPr>
-          <p:cNvPr id="4" name="Picture 3" descr="cvtask_main.png"/>
+          <p:cNvPr id="4" name="Picture 3" descr="eqpinfo_0.png"/>
           <p:cNvPicPr>
             <a:picLocks noChangeAspect="1"/>
           </p:cNvPicPr>
@@ -8182,8 +10603,8 @@
         </p:blipFill>
         <p:spPr>
           <a:xfrm>
-            <a:off x="877126" y="1280160"/>
-            <a:ext cx="7023987" cy="4846320"/>
+            <a:off x="746226" y="1280160"/>
+            <a:ext cx="7285786" cy="4846320"/>
           </a:xfrm>
           <a:prstGeom prst="rect">
             <a:avLst/>
@@ -8207,7 +10628,7 @@
           <a:noFill/>
         </p:spPr>
         <p:txBody>
-          <a:bodyPr wrap="square" anchor="t" lIns="45720" rIns="45720">
+          <a:bodyPr wrap="square" lIns="45720" rIns="45720" anchor="t">
             <a:spAutoFit/>
           </a:bodyPr>
           <a:lstStyle/>
@@ -8232,20 +10653,17 @@
                 </a:solidFill>
                 <a:latin typeface="맑은 고딕"/>
               </a:rPr>
-              <a:t>ALL_TASK ▷ EQP 탭 (단독 실행 : TASK\WCS_TASK_CV\WCS_TASK_CV.exe)</a:t>
-            </a:r>
-          </a:p>
-          <a:p>
-            <a:pPr algn="l"/>
-            <a:r>
-              <a:rPr sz="600" b="0">
-                <a:solidFill>
-                  <a:srgbClr val="595959"/>
-                </a:solidFill>
-                <a:latin typeface="맑은 고딕"/>
-              </a:rPr>
-              <a:t/>
-            </a:r>
+              <a:t>ECS ▷ 환경설정 ▷ 통신 연결 정의</a:t>
+            </a:r>
+          </a:p>
+          <a:p>
+            <a:pPr algn="l"/>
+            <a:endParaRPr sz="1100" b="0">
+              <a:solidFill>
+                <a:srgbClr val="595959"/>
+              </a:solidFill>
+              <a:latin typeface="맑은 고딕"/>
+            </a:endParaRPr>
           </a:p>
           <a:p>
             <a:pPr algn="l"/>
@@ -8268,20 +10686,17 @@
                 </a:solidFill>
                 <a:latin typeface="맑은 고딕"/>
               </a:rPr>
-              <a:t>마스터 PLC(XGT) 와 1소켓으로 통신하며 CV_DATA/SC_DATA_LGLS/RTV_DATA_LGLS 의 읽기값을 갱신하고 지시를 PLC 에 쓴다.</a:t>
-            </a:r>
-          </a:p>
-          <a:p>
-            <a:pPr algn="l"/>
-            <a:r>
-              <a:rPr sz="600" b="0">
-                <a:solidFill>
-                  <a:srgbClr val="595959"/>
-                </a:solidFill>
-                <a:latin typeface="맑은 고딕"/>
-              </a:rPr>
-              <a:t/>
-            </a:r>
+              <a:t>서버 프로그램(EQP=설비 통신, HOST/HOST2=상위 통신, SCH=스케줄러)의 접속 정보와 생존 상태를 조회한다. (EQP_MST)</a:t>
+            </a:r>
+          </a:p>
+          <a:p>
+            <a:pPr algn="l"/>
+            <a:endParaRPr sz="1100" b="0">
+              <a:solidFill>
+                <a:srgbClr val="595959"/>
+              </a:solidFill>
+              <a:latin typeface="맑은 고딕"/>
+            </a:endParaRPr>
           </a:p>
           <a:p>
             <a:pPr algn="l"/>
@@ -8304,7 +10719,7 @@
                 </a:solidFill>
                 <a:latin typeface="맑은 고딕"/>
               </a:rPr>
-              <a:t>· 로그 창에 "주소" 열이 있어 PLC 읽기/쓰기 주소가 남는다.</a:t>
+              <a:t>· 설비 구분 콤보 : ALL / EQP / HOST / SCH. HOST 를 고르면 HOST2 까지 함께 조회된다.</a:t>
             </a:r>
           </a:p>
           <a:p>
@@ -8316,7 +10731,7 @@
                 </a:solidFill>
                 <a:latin typeface="맑은 고딕"/>
               </a:rPr>
-              <a:t>· [PLC 메모리 맵] 은 구 ECS 표기(W/B/R)와 실주소 변환기.</a:t>
+              <a:t>· EQP 대표 행은 마스터 PLC 소켓(IP/PORT) 정의를 나타낸다.</a:t>
             </a:r>
           </a:p>
         </p:txBody>
@@ -8338,7 +10753,7 @@
           <a:noFill/>
         </p:spPr>
         <p:txBody>
-          <a:bodyPr wrap="square" anchor="t" lIns="45720" rIns="45720">
+          <a:bodyPr wrap="square" lIns="45720" rIns="45720" anchor="t">
             <a:spAutoFit/>
           </a:bodyPr>
           <a:lstStyle/>
@@ -8373,7 +10788,7 @@
           <a:noFill/>
         </p:spPr>
         <p:txBody>
-          <a:bodyPr wrap="square" anchor="t" lIns="45720" rIns="45720">
+          <a:bodyPr wrap="square" lIns="45720" rIns="45720" anchor="t">
             <a:spAutoFit/>
           </a:bodyPr>
           <a:lstStyle/>
@@ -8386,7 +10801,7 @@
                 </a:solidFill>
                 <a:latin typeface="맑은 고딕"/>
               </a:rPr>
-              <a:t>24</a:t>
+              <a:t>5</a:t>
             </a:r>
           </a:p>
         </p:txBody>
@@ -8399,8 +10814,8 @@
 </p:sld>
 </file>
 
-<file path=ppt/slides/slide25.xml><?xml version="1.0" encoding="utf-8"?>
-<p:sld xmlns:a="http://schemas.openxmlformats.org/drawingml/2006/main" xmlns:p="http://schemas.openxmlformats.org/presentationml/2006/main" xmlns:r="http://schemas.openxmlformats.org/officeDocument/2006/relationships">
+<file path=ppt/slides/slide6.xml><?xml version="1.0" encoding="utf-8"?>
+<p:sld xmlns:a="http://schemas.openxmlformats.org/drawingml/2006/main" xmlns:r="http://schemas.openxmlformats.org/officeDocument/2006/relationships" xmlns:p="http://schemas.openxmlformats.org/presentationml/2006/main">
   <p:cSld>
     <p:spTree>
       <p:nvGrpSpPr>
@@ -8408,7 +10823,14 @@
         <p:cNvGrpSpPr/>
         <p:nvPr/>
       </p:nvGrpSpPr>
-      <p:grpSpPr/>
+      <p:grpSpPr>
+        <a:xfrm>
+          <a:off x="0" y="0"/>
+          <a:ext cx="0" cy="0"/>
+          <a:chOff x="0" y="0"/>
+          <a:chExt cx="0" cy="0"/>
+        </a:xfrm>
+      </p:grpSpPr>
       <p:sp>
         <p:nvSpPr>
           <p:cNvPr id="2" name="TextBox 1"/>
@@ -8426,7 +10848,7 @@
           <a:noFill/>
         </p:spPr>
         <p:txBody>
-          <a:bodyPr wrap="square" anchor="ctr" lIns="45720" rIns="45720">
+          <a:bodyPr wrap="square" lIns="45720" rIns="45720" anchor="ctr">
             <a:spAutoFit/>
           </a:bodyPr>
           <a:lstStyle/>
@@ -8439,7 +10861,7 @@
                 </a:solidFill>
                 <a:latin typeface="맑은 고딕"/>
               </a:rPr>
-              <a:t>서버 프로그램 - 스케줄러 (IO_TASK)</a:t>
+              <a:t>ECS&gt;환경설정 - 로그 삭제 설정 (이력 삭제 주기 변경)</a:t>
             </a:r>
           </a:p>
         </p:txBody>
@@ -8486,12 +10908,13 @@
           <a:lstStyle/>
           <a:p>
             <a:pPr algn="ctr"/>
+            <a:endParaRPr/>
           </a:p>
         </p:txBody>
       </p:sp>
       <p:pic>
         <p:nvPicPr>
-          <p:cNvPr id="4" name="Picture 3" descr="task_IO_TASK_SEMI_FINISH.png"/>
+          <p:cNvPr id="4" name="Picture 3" descr="logdel_0.png"/>
           <p:cNvPicPr>
             <a:picLocks noChangeAspect="1"/>
           </p:cNvPicPr>
@@ -8505,8 +10928,8 @@
         </p:blipFill>
         <p:spPr>
           <a:xfrm>
-            <a:off x="877126" y="1280160"/>
-            <a:ext cx="7023987" cy="4846320"/>
+            <a:off x="1190548" y="1280160"/>
+            <a:ext cx="6397142" cy="4846320"/>
           </a:xfrm>
           <a:prstGeom prst="rect">
             <a:avLst/>
@@ -8530,7 +10953,7 @@
           <a:noFill/>
         </p:spPr>
         <p:txBody>
-          <a:bodyPr wrap="square" anchor="t" lIns="45720" rIns="45720">
+          <a:bodyPr wrap="square" lIns="45720" rIns="45720" anchor="t">
             <a:spAutoFit/>
           </a:bodyPr>
           <a:lstStyle/>
@@ -8555,20 +10978,17 @@
                 </a:solidFill>
                 <a:latin typeface="맑은 고딕"/>
               </a:rPr>
-              <a:t>ALL_TASK ▷ IO 탭 (단독 실행 : TASK\IO_TASK\IO_TASK_SEMI_FINISH.exe)</a:t>
-            </a:r>
-          </a:p>
-          <a:p>
-            <a:pPr algn="l"/>
-            <a:r>
-              <a:rPr sz="600" b="0">
-                <a:solidFill>
-                  <a:srgbClr val="595959"/>
-                </a:solidFill>
-                <a:latin typeface="맑은 고딕"/>
-              </a:rPr>
-              <a:t/>
-            </a:r>
+              <a:t>ECS ▷ 환경설정 ▷ 로그 삭제 설정</a:t>
+            </a:r>
+          </a:p>
+          <a:p>
+            <a:pPr algn="l"/>
+            <a:endParaRPr sz="1100" b="0">
+              <a:solidFill>
+                <a:srgbClr val="595959"/>
+              </a:solidFill>
+              <a:latin typeface="맑은 고딕"/>
+            </a:endParaRPr>
           </a:p>
           <a:p>
             <a:pPr algn="l"/>
@@ -8591,7 +11011,52 @@
                 </a:solidFill>
                 <a:latin typeface="맑은 고딕"/>
               </a:rPr>
-              <a:t>작업 상태 기계. JOB_MST 를 읽어 CV/RGV/SC 지시를 내리고 완료를 판정하며 상위 보고용 상태를 만든다.</a:t>
+              <a:t>로그 테이블별 보존 주기(일)를 조회·변경한다. (DEL_HIS_SETTING)</a:t>
+            </a:r>
+          </a:p>
+          <a:p>
+            <a:pPr algn="l"/>
+            <a:endParaRPr sz="1100" b="0">
+              <a:solidFill>
+                <a:srgbClr val="595959"/>
+              </a:solidFill>
+              <a:latin typeface="맑은 고딕"/>
+            </a:endParaRPr>
+          </a:p>
+          <a:p>
+            <a:pPr algn="l"/>
+            <a:r>
+              <a:rPr sz="1300" b="1">
+                <a:solidFill>
+                  <a:srgbClr val="1E2761"/>
+                </a:solidFill>
+                <a:latin typeface="맑은 고딕"/>
+              </a:rPr>
+              <a:t>■ 특기사항</a:t>
+            </a:r>
+          </a:p>
+          <a:p>
+            <a:pPr algn="l"/>
+            <a:r>
+              <a:rPr sz="1000" b="0">
+                <a:solidFill>
+                  <a:srgbClr val="595959"/>
+                </a:solidFill>
+                <a:latin typeface="맑은 고딕"/>
+              </a:rPr>
+              <a:t>· 그리드에서 행을 클릭하면 그 행의 주기가 (일) 칸에 채워지고 그룹 제목에 선택한 로그명과 현재 주기가 표시된다.</a:t>
+            </a:r>
+          </a:p>
+          <a:p>
+            <a:pPr algn="l"/>
+            <a:r>
+              <a:rPr sz="1000" b="0">
+                <a:solidFill>
+                  <a:srgbClr val="595959"/>
+                </a:solidFill>
+                <a:latin typeface="맑은 고딕"/>
+              </a:rPr>
+              <a:t>· 값을 고쳐 [설정] 을 누르면 변경되고 유저사용 로그에 기록된다. 공백/0 은 설정할 수 없다.</a:t>
             </a:r>
           </a:p>
         </p:txBody>
@@ -8613,7 +11078,7 @@
           <a:noFill/>
         </p:spPr>
         <p:txBody>
-          <a:bodyPr wrap="square" anchor="t" lIns="45720" rIns="45720">
+          <a:bodyPr wrap="square" lIns="45720" rIns="45720" anchor="t">
             <a:spAutoFit/>
           </a:bodyPr>
           <a:lstStyle/>
@@ -8648,7 +11113,7 @@
           <a:noFill/>
         </p:spPr>
         <p:txBody>
-          <a:bodyPr wrap="square" anchor="t" lIns="45720" rIns="45720">
+          <a:bodyPr wrap="square" lIns="45720" rIns="45720" anchor="t">
             <a:spAutoFit/>
           </a:bodyPr>
           <a:lstStyle/>
@@ -8661,7 +11126,7 @@
                 </a:solidFill>
                 <a:latin typeface="맑은 고딕"/>
               </a:rPr>
-              <a:t>25</a:t>
+              <a:t>6</a:t>
             </a:r>
           </a:p>
         </p:txBody>
@@ -8674,8 +11139,8 @@
 </p:sld>
 </file>
 
-<file path=ppt/slides/slide26.xml><?xml version="1.0" encoding="utf-8"?>
-<p:sld xmlns:a="http://schemas.openxmlformats.org/drawingml/2006/main" xmlns:p="http://schemas.openxmlformats.org/presentationml/2006/main" xmlns:r="http://schemas.openxmlformats.org/officeDocument/2006/relationships">
+<file path=ppt/slides/slide7.xml><?xml version="1.0" encoding="utf-8"?>
+<p:sld xmlns:a="http://schemas.openxmlformats.org/drawingml/2006/main" xmlns:r="http://schemas.openxmlformats.org/officeDocument/2006/relationships" xmlns:p="http://schemas.openxmlformats.org/presentationml/2006/main">
   <p:cSld>
     <p:spTree>
       <p:nvGrpSpPr>
@@ -8683,7 +11148,14 @@
         <p:cNvGrpSpPr/>
         <p:nvPr/>
       </p:nvGrpSpPr>
-      <p:grpSpPr/>
+      <p:grpSpPr>
+        <a:xfrm>
+          <a:off x="0" y="0"/>
+          <a:ext cx="0" cy="0"/>
+          <a:chOff x="0" y="0"/>
+          <a:chExt cx="0" cy="0"/>
+        </a:xfrm>
+      </p:grpSpPr>
       <p:sp>
         <p:nvSpPr>
           <p:cNvPr id="2" name="TextBox 1"/>
@@ -8701,7 +11173,7 @@
           <a:noFill/>
         </p:spPr>
         <p:txBody>
-          <a:bodyPr wrap="square" anchor="ctr" lIns="45720" rIns="45720">
+          <a:bodyPr wrap="square" lIns="45720" rIns="45720" anchor="ctr">
             <a:spAutoFit/>
           </a:bodyPr>
           <a:lstStyle/>
@@ -8714,7 +11186,7 @@
                 </a:solidFill>
                 <a:latin typeface="맑은 고딕"/>
               </a:rPr>
-              <a:t>서버 프로그램 - 상위 통신 (WCS_TASK_HOST)</a:t>
+              <a:t>ECS&gt;환경설정 - 범례 (색상정보)</a:t>
             </a:r>
           </a:p>
         </p:txBody>
@@ -8761,12 +11233,13 @@
           <a:lstStyle/>
           <a:p>
             <a:pPr algn="ctr"/>
+            <a:endParaRPr/>
           </a:p>
         </p:txBody>
       </p:sp>
       <p:pic>
         <p:nvPicPr>
-          <p:cNvPr id="4" name="Picture 3" descr="chk_TASK_LFC10_G1_ECSCOM.png"/>
+          <p:cNvPr id="4" name="Picture 3" descr="legend_0.png"/>
           <p:cNvPicPr>
             <a:picLocks noChangeAspect="1"/>
           </p:cNvPicPr>
@@ -8780,8 +11253,8 @@
         </p:blipFill>
         <p:spPr>
           <a:xfrm>
-            <a:off x="877126" y="1280160"/>
-            <a:ext cx="7023987" cy="4846320"/>
+            <a:off x="640080" y="2390524"/>
+            <a:ext cx="7498079" cy="2625590"/>
           </a:xfrm>
           <a:prstGeom prst="rect">
             <a:avLst/>
@@ -8805,7 +11278,7 @@
           <a:noFill/>
         </p:spPr>
         <p:txBody>
-          <a:bodyPr wrap="square" anchor="t" lIns="45720" rIns="45720">
+          <a:bodyPr wrap="square" lIns="45720" rIns="45720" anchor="t">
             <a:spAutoFit/>
           </a:bodyPr>
           <a:lstStyle/>
@@ -8830,20 +11303,17 @@
                 </a:solidFill>
                 <a:latin typeface="맑은 고딕"/>
               </a:rPr>
-              <a:t>ALL_TASK ▷ HOST 탭 (단독 실행 : TASK\WCS_TASK_HOST\TASK_LFC10_G1_ECSCOM.exe)</a:t>
-            </a:r>
-          </a:p>
-          <a:p>
-            <a:pPr algn="l"/>
-            <a:r>
-              <a:rPr sz="600" b="0">
-                <a:solidFill>
-                  <a:srgbClr val="595959"/>
-                </a:solidFill>
-                <a:latin typeface="맑은 고딕"/>
-              </a:rPr>
-              <a:t/>
-            </a:r>
+              <a:t>ECS ▷ 환경설정 ▷ 범례</a:t>
+            </a:r>
+          </a:p>
+          <a:p>
+            <a:pPr algn="l"/>
+            <a:endParaRPr sz="1100" b="0">
+              <a:solidFill>
+                <a:srgbClr val="595959"/>
+              </a:solidFill>
+              <a:latin typeface="맑은 고딕"/>
+            </a:endParaRPr>
           </a:p>
           <a:p>
             <a:pPr algn="l"/>
@@ -8866,20 +11336,17 @@
                 </a:solidFill>
                 <a:latin typeface="맑은 고딕"/>
               </a:rPr>
-              <a:t>WMS/IMS 와 소켓(명령 수신/보고 송신)으로 전문을 교환한다. 스테이션 코드 변환(122→101, 124→104, 126→103, 129·130→102)을 담당한다.</a:t>
-            </a:r>
-          </a:p>
-          <a:p>
-            <a:pPr algn="l"/>
-            <a:r>
-              <a:rPr sz="600" b="0">
-                <a:solidFill>
-                  <a:srgbClr val="595959"/>
-                </a:solidFill>
-                <a:latin typeface="맑은 고딕"/>
-              </a:rPr>
-              <a:t/>
-            </a:r>
+              <a:t>메인 화면에서 쓰는 색상(작업상태·CV 신호·CV,SC 상태·RAIL·반자동)을 확인·변경한다.</a:t>
+            </a:r>
+          </a:p>
+          <a:p>
+            <a:pPr algn="l"/>
+            <a:endParaRPr sz="1100" b="0">
+              <a:solidFill>
+                <a:srgbClr val="595959"/>
+              </a:solidFill>
+              <a:latin typeface="맑은 고딕"/>
+            </a:endParaRPr>
           </a:p>
           <a:p>
             <a:pPr algn="l"/>
@@ -8902,7 +11369,21 @@
                 </a:solidFill>
                 <a:latin typeface="맑은 고딕"/>
               </a:rPr>
-              <a:t>· 에러 보고(E)는 SC/CV/RTV 모두 대상이다.</a:t>
+              <a:t>· CV, SC 상태의 "WC 패스모드" 는 이 현장에 없는 기능이라 비활성이다.</a:t>
+            </a:r>
+          </a:p>
+          <a:p>
+            <a:pPr algn="l"/>
+            <a:r>
+              <a:rPr sz="1000" b="0">
+                <a:solidFill>
+                  <a:srgbClr val="595959"/>
+                </a:solidFill>
+                <a:latin typeface="맑은 고딕"/>
+              </a:rPr>
+              <a:t>· S/C·RTV 레일 색은 정지 사유별로 나뉜다 : 입고 금지(주황빨강) / 출고 금지(자홍빨강) /
+    입출고 정지(진빨강) / 에러(보라) / 작업중(파랑). 붉은 계열은 모두 "정지" 를 뜻하고,
+    설비 에러만 보라로 빼 사람이 건 정지와 구분한다(크레인 포크는 에러 시 빨강).</a:t>
             </a:r>
           </a:p>
         </p:txBody>
@@ -8924,7 +11405,7 @@
           <a:noFill/>
         </p:spPr>
         <p:txBody>
-          <a:bodyPr wrap="square" anchor="t" lIns="45720" rIns="45720">
+          <a:bodyPr wrap="square" lIns="45720" rIns="45720" anchor="t">
             <a:spAutoFit/>
           </a:bodyPr>
           <a:lstStyle/>
@@ -8959,7 +11440,7 @@
           <a:noFill/>
         </p:spPr>
         <p:txBody>
-          <a:bodyPr wrap="square" anchor="t" lIns="45720" rIns="45720">
+          <a:bodyPr wrap="square" lIns="45720" rIns="45720" anchor="t">
             <a:spAutoFit/>
           </a:bodyPr>
           <a:lstStyle/>
@@ -8972,7 +11453,7 @@
                 </a:solidFill>
                 <a:latin typeface="맑은 고딕"/>
               </a:rPr>
-              <a:t>26</a:t>
+              <a:t>7</a:t>
             </a:r>
           </a:p>
         </p:txBody>
@@ -8985,8 +11466,8 @@
 </p:sld>
 </file>
 
-<file path=ppt/slides/slide3.xml><?xml version="1.0" encoding="utf-8"?>
-<p:sld xmlns:a="http://schemas.openxmlformats.org/drawingml/2006/main" xmlns:p="http://schemas.openxmlformats.org/presentationml/2006/main" xmlns:r="http://schemas.openxmlformats.org/officeDocument/2006/relationships">
+<file path=ppt/slides/slide8.xml><?xml version="1.0" encoding="utf-8"?>
+<p:sld xmlns:a="http://schemas.openxmlformats.org/drawingml/2006/main" xmlns:r="http://schemas.openxmlformats.org/officeDocument/2006/relationships" xmlns:p="http://schemas.openxmlformats.org/presentationml/2006/main">
   <p:cSld>
     <p:spTree>
       <p:nvGrpSpPr>
@@ -8994,7 +11475,14 @@
         <p:cNvGrpSpPr/>
         <p:nvPr/>
       </p:nvGrpSpPr>
-      <p:grpSpPr/>
+      <p:grpSpPr>
+        <a:xfrm>
+          <a:off x="0" y="0"/>
+          <a:ext cx="0" cy="0"/>
+          <a:chOff x="0" y="0"/>
+          <a:chExt cx="0" cy="0"/>
+        </a:xfrm>
+      </p:grpSpPr>
       <p:sp>
         <p:nvSpPr>
           <p:cNvPr id="2" name="TextBox 1"/>
@@ -9012,7 +11500,7 @@
           <a:noFill/>
         </p:spPr>
         <p:txBody>
-          <a:bodyPr wrap="square" anchor="ctr" lIns="45720" rIns="45720">
+          <a:bodyPr wrap="square" lIns="45720" rIns="45720" anchor="ctr">
             <a:spAutoFit/>
           </a:bodyPr>
           <a:lstStyle/>
@@ -9025,691 +11513,7 @@
                 </a:solidFill>
                 <a:latin typeface="맑은 고딕"/>
               </a:rPr>
-              <a:t>Contents</a:t>
-            </a:r>
-          </a:p>
-        </p:txBody>
-      </p:sp>
-      <p:sp>
-        <p:nvSpPr>
-          <p:cNvPr id="3" name="TextBox 2"/>
-          <p:cNvSpPr txBox="1"/>
-          <p:nvPr/>
-        </p:nvSpPr>
-        <p:spPr>
-          <a:xfrm>
-            <a:off x="548640" y="1188720"/>
-            <a:ext cx="3657600" cy="5029200"/>
-          </a:xfrm>
-          <a:prstGeom prst="rect">
-            <a:avLst/>
-          </a:prstGeom>
-          <a:noFill/>
-        </p:spPr>
-        <p:txBody>
-          <a:bodyPr wrap="square" anchor="t" lIns="45720" rIns="45720">
-            <a:spAutoFit/>
-          </a:bodyPr>
-          <a:lstStyle/>
-          <a:p>
-            <a:pPr algn="l"/>
-            <a:r>
-              <a:rPr sz="1400" b="1">
-                <a:solidFill>
-                  <a:srgbClr val="1E2761"/>
-                </a:solidFill>
-                <a:latin typeface="맑은 고딕"/>
-              </a:rPr>
-              <a:t>메인</a:t>
-            </a:r>
-          </a:p>
-          <a:p>
-            <a:pPr algn="l"/>
-            <a:r>
-              <a:rPr sz="1100" b="0">
-                <a:solidFill>
-                  <a:srgbClr val="595959"/>
-                </a:solidFill>
-                <a:latin typeface="맑은 고딕"/>
-              </a:rPr>
-              <a:t>   메인 화면(창고 모니터링)</a:t>
-            </a:r>
-          </a:p>
-          <a:p>
-            <a:pPr algn="l"/>
-            <a:r>
-              <a:rPr sz="600" b="0">
-                <a:solidFill>
-                  <a:srgbClr val="595959"/>
-                </a:solidFill>
-                <a:latin typeface="맑은 고딕"/>
-              </a:rPr>
-              <a:t/>
-            </a:r>
-          </a:p>
-          <a:p>
-            <a:pPr algn="l"/>
-            <a:r>
-              <a:rPr sz="1400" b="1">
-                <a:solidFill>
-                  <a:srgbClr val="1E2761"/>
-                </a:solidFill>
-                <a:latin typeface="맑은 고딕"/>
-              </a:rPr>
-              <a:t>ECS&gt;환경설정</a:t>
-            </a:r>
-          </a:p>
-          <a:p>
-            <a:pPr algn="l"/>
-            <a:r>
-              <a:rPr sz="1100" b="0">
-                <a:solidFill>
-                  <a:srgbClr val="595959"/>
-                </a:solidFill>
-                <a:latin typeface="맑은 고딕"/>
-              </a:rPr>
-              <a:t>   통신 연결 정의 (EQP 정보)</a:t>
-            </a:r>
-          </a:p>
-          <a:p>
-            <a:pPr algn="l"/>
-            <a:r>
-              <a:rPr sz="1100" b="0">
-                <a:solidFill>
-                  <a:srgbClr val="595959"/>
-                </a:solidFill>
-                <a:latin typeface="맑은 고딕"/>
-              </a:rPr>
-              <a:t>   로그 삭제 설정 (이력 삭제 주기 변경)</a:t>
-            </a:r>
-          </a:p>
-          <a:p>
-            <a:pPr algn="l"/>
-            <a:r>
-              <a:rPr sz="1100" b="0">
-                <a:solidFill>
-                  <a:srgbClr val="595959"/>
-                </a:solidFill>
-                <a:latin typeface="맑은 고딕"/>
-              </a:rPr>
-              <a:t>   범례 (색상정보)</a:t>
-            </a:r>
-          </a:p>
-          <a:p>
-            <a:pPr algn="l"/>
-            <a:r>
-              <a:rPr sz="600" b="0">
-                <a:solidFill>
-                  <a:srgbClr val="595959"/>
-                </a:solidFill>
-                <a:latin typeface="맑은 고딕"/>
-              </a:rPr>
-              <a:t/>
-            </a:r>
-          </a:p>
-          <a:p>
-            <a:pPr algn="l"/>
-            <a:r>
-              <a:rPr sz="1400" b="1">
-                <a:solidFill>
-                  <a:srgbClr val="1E2761"/>
-                </a:solidFill>
-                <a:latin typeface="맑은 고딕"/>
-              </a:rPr>
-              <a:t>ECS&gt;뷰</a:t>
-            </a:r>
-          </a:p>
-          <a:p>
-            <a:pPr algn="l"/>
-            <a:r>
-              <a:rPr sz="1100" b="0">
-                <a:solidFill>
-                  <a:srgbClr val="595959"/>
-                </a:solidFill>
-                <a:latin typeface="맑은 고딕"/>
-              </a:rPr>
-              <a:t>   작업정보</a:t>
-            </a:r>
-          </a:p>
-          <a:p>
-            <a:pPr algn="l"/>
-            <a:r>
-              <a:rPr sz="1100" b="0">
-                <a:solidFill>
-                  <a:srgbClr val="595959"/>
-                </a:solidFill>
-                <a:latin typeface="맑은 고딕"/>
-              </a:rPr>
-              <a:t>   찾기</a:t>
-            </a:r>
-          </a:p>
-          <a:p>
-            <a:pPr algn="l"/>
-            <a:r>
-              <a:rPr sz="600" b="0">
-                <a:solidFill>
-                  <a:srgbClr val="595959"/>
-                </a:solidFill>
-                <a:latin typeface="맑은 고딕"/>
-              </a:rPr>
-              <a:t/>
-            </a:r>
-          </a:p>
-        </p:txBody>
-      </p:sp>
-      <p:sp>
-        <p:nvSpPr>
-          <p:cNvPr id="4" name="TextBox 3"/>
-          <p:cNvSpPr txBox="1"/>
-          <p:nvPr/>
-        </p:nvSpPr>
-        <p:spPr>
-          <a:xfrm>
-            <a:off x="4343400" y="1188720"/>
-            <a:ext cx="3657600" cy="5029200"/>
-          </a:xfrm>
-          <a:prstGeom prst="rect">
-            <a:avLst/>
-          </a:prstGeom>
-          <a:noFill/>
-        </p:spPr>
-        <p:txBody>
-          <a:bodyPr wrap="square" anchor="t" lIns="45720" rIns="45720">
-            <a:spAutoFit/>
-          </a:bodyPr>
-          <a:lstStyle/>
-          <a:p>
-            <a:pPr algn="l"/>
-            <a:r>
-              <a:rPr sz="1400" b="1">
-                <a:solidFill>
-                  <a:srgbClr val="1E2761"/>
-                </a:solidFill>
-                <a:latin typeface="맑은 고딕"/>
-              </a:rPr>
-              <a:t>ECS&gt;판넬 보기</a:t>
-            </a:r>
-          </a:p>
-          <a:p>
-            <a:pPr algn="l"/>
-            <a:r>
-              <a:rPr sz="1100" b="0">
-                <a:solidFill>
-                  <a:srgbClr val="595959"/>
-                </a:solidFill>
-                <a:latin typeface="맑은 고딕"/>
-              </a:rPr>
-              <a:t>   판넬 보기 (작업정보/상세정보/설비반송)</a:t>
-            </a:r>
-          </a:p>
-          <a:p>
-            <a:pPr algn="l"/>
-            <a:r>
-              <a:rPr sz="600" b="0">
-                <a:solidFill>
-                  <a:srgbClr val="595959"/>
-                </a:solidFill>
-                <a:latin typeface="맑은 고딕"/>
-              </a:rPr>
-              <a:t/>
-            </a:r>
-          </a:p>
-          <a:p>
-            <a:pPr algn="l"/>
-            <a:r>
-              <a:rPr sz="1400" b="1">
-                <a:solidFill>
-                  <a:srgbClr val="1E2761"/>
-                </a:solidFill>
-                <a:latin typeface="맑은 고딕"/>
-              </a:rPr>
-              <a:t>ECS&gt;창고 모니터링</a:t>
-            </a:r>
-          </a:p>
-          <a:p>
-            <a:pPr algn="l"/>
-            <a:r>
-              <a:rPr sz="1100" b="0">
-                <a:solidFill>
-                  <a:srgbClr val="595959"/>
-                </a:solidFill>
-                <a:latin typeface="맑은 고딕"/>
-              </a:rPr>
-              <a:t>   작업번호 / 트랙번호 표시 전환</a:t>
-            </a:r>
-          </a:p>
-          <a:p>
-            <a:pPr algn="l"/>
-            <a:r>
-              <a:rPr sz="600" b="0">
-                <a:solidFill>
-                  <a:srgbClr val="595959"/>
-                </a:solidFill>
-                <a:latin typeface="맑은 고딕"/>
-              </a:rPr>
-              <a:t/>
-            </a:r>
-          </a:p>
-          <a:p>
-            <a:pPr algn="l"/>
-            <a:r>
-              <a:rPr sz="1400" b="1">
-                <a:solidFill>
-                  <a:srgbClr val="1E2761"/>
-                </a:solidFill>
-                <a:latin typeface="맑은 고딕"/>
-              </a:rPr>
-              <a:t>MANUAL</a:t>
-            </a:r>
-          </a:p>
-          <a:p>
-            <a:pPr algn="l"/>
-            <a:r>
-              <a:rPr sz="1100" b="0">
-                <a:solidFill>
-                  <a:srgbClr val="595959"/>
-                </a:solidFill>
-                <a:latin typeface="맑은 고딕"/>
-              </a:rPr>
-              <a:t>   JOB 수동지시</a:t>
-            </a:r>
-          </a:p>
-          <a:p>
-            <a:pPr algn="l"/>
-            <a:r>
-              <a:rPr sz="1100" b="0">
-                <a:solidFill>
-                  <a:srgbClr val="595959"/>
-                </a:solidFill>
-                <a:latin typeface="맑은 고딕"/>
-              </a:rPr>
-              <a:t>   크레인 수동작업</a:t>
-            </a:r>
-          </a:p>
-          <a:p>
-            <a:pPr algn="l"/>
-            <a:r>
-              <a:rPr sz="1100" b="0">
-                <a:solidFill>
-                  <a:srgbClr val="595959"/>
-                </a:solidFill>
-                <a:latin typeface="맑은 고딕"/>
-              </a:rPr>
-              <a:t>   RTV(RGV) 수동작업</a:t>
-            </a:r>
-          </a:p>
-          <a:p>
-            <a:pPr algn="l"/>
-            <a:r>
-              <a:rPr sz="600" b="0">
-                <a:solidFill>
-                  <a:srgbClr val="595959"/>
-                </a:solidFill>
-                <a:latin typeface="맑은 고딕"/>
-              </a:rPr>
-              <a:t/>
-            </a:r>
-          </a:p>
-        </p:txBody>
-      </p:sp>
-      <p:sp>
-        <p:nvSpPr>
-          <p:cNvPr id="5" name="TextBox 4"/>
-          <p:cNvSpPr txBox="1"/>
-          <p:nvPr/>
-        </p:nvSpPr>
-        <p:spPr>
-          <a:xfrm>
-            <a:off x="8138160" y="1188720"/>
-            <a:ext cx="3657600" cy="5029200"/>
-          </a:xfrm>
-          <a:prstGeom prst="rect">
-            <a:avLst/>
-          </a:prstGeom>
-          <a:noFill/>
-        </p:spPr>
-        <p:txBody>
-          <a:bodyPr wrap="square" anchor="t" lIns="45720" rIns="45720">
-            <a:spAutoFit/>
-          </a:bodyPr>
-          <a:lstStyle/>
-          <a:p>
-            <a:pPr algn="l"/>
-            <a:r>
-              <a:rPr sz="1400" b="1">
-                <a:solidFill>
-                  <a:srgbClr val="1E2761"/>
-                </a:solidFill>
-                <a:latin typeface="맑은 고딕"/>
-              </a:rPr>
-              <a:t>LOG</a:t>
-            </a:r>
-          </a:p>
-          <a:p>
-            <a:pPr algn="l"/>
-            <a:r>
-              <a:rPr sz="1100" b="0">
-                <a:solidFill>
-                  <a:srgbClr val="595959"/>
-                </a:solidFill>
-                <a:latin typeface="맑은 고딕"/>
-              </a:rPr>
-              <a:t>   작업 로그</a:t>
-            </a:r>
-          </a:p>
-          <a:p>
-            <a:pPr algn="l"/>
-            <a:r>
-              <a:rPr sz="1100" b="0">
-                <a:solidFill>
-                  <a:srgbClr val="595959"/>
-                </a:solidFill>
-                <a:latin typeface="맑은 고딕"/>
-              </a:rPr>
-              <a:t>   HOST 로그</a:t>
-            </a:r>
-          </a:p>
-          <a:p>
-            <a:pPr algn="l"/>
-            <a:r>
-              <a:rPr sz="1100" b="0">
-                <a:solidFill>
-                  <a:srgbClr val="595959"/>
-                </a:solidFill>
-                <a:latin typeface="맑은 고딕"/>
-              </a:rPr>
-              <a:t>   설비에러이력</a:t>
-            </a:r>
-          </a:p>
-          <a:p>
-            <a:pPr algn="l"/>
-            <a:r>
-              <a:rPr sz="1100" b="0">
-                <a:solidFill>
-                  <a:srgbClr val="595959"/>
-                </a:solidFill>
-                <a:latin typeface="맑은 고딕"/>
-              </a:rPr>
-              <a:t>   유저사용 로그</a:t>
-            </a:r>
-          </a:p>
-          <a:p>
-            <a:pPr algn="l"/>
-            <a:r>
-              <a:rPr sz="1100" b="0">
-                <a:solidFill>
-                  <a:srgbClr val="595959"/>
-                </a:solidFill>
-                <a:latin typeface="맑은 고딕"/>
-              </a:rPr>
-              <a:t>   알람 (ECS 프로그램 이력)</a:t>
-            </a:r>
-          </a:p>
-          <a:p>
-            <a:pPr algn="l"/>
-            <a:r>
-              <a:rPr sz="600" b="0">
-                <a:solidFill>
-                  <a:srgbClr val="595959"/>
-                </a:solidFill>
-                <a:latin typeface="맑은 고딕"/>
-              </a:rPr>
-              <a:t/>
-            </a:r>
-          </a:p>
-          <a:p>
-            <a:pPr algn="l"/>
-            <a:r>
-              <a:rPr sz="1400" b="1">
-                <a:solidFill>
-                  <a:srgbClr val="1E2761"/>
-                </a:solidFill>
-                <a:latin typeface="맑은 고딕"/>
-              </a:rPr>
-              <a:t>설비 대화상자</a:t>
-            </a:r>
-          </a:p>
-          <a:p>
-            <a:pPr algn="l"/>
-            <a:r>
-              <a:rPr sz="1100" b="0">
-                <a:solidFill>
-                  <a:srgbClr val="595959"/>
-                </a:solidFill>
-                <a:latin typeface="맑은 고딕"/>
-              </a:rPr>
-              <a:t>   CV 상태</a:t>
-            </a:r>
-          </a:p>
-          <a:p>
-            <a:pPr algn="l"/>
-            <a:r>
-              <a:rPr sz="1100" b="0">
-                <a:solidFill>
-                  <a:srgbClr val="595959"/>
-                </a:solidFill>
-                <a:latin typeface="맑은 고딕"/>
-              </a:rPr>
-              <a:t>   SC 상태</a:t>
-            </a:r>
-          </a:p>
-          <a:p>
-            <a:pPr algn="l"/>
-            <a:r>
-              <a:rPr sz="1100" b="0">
-                <a:solidFill>
-                  <a:srgbClr val="595959"/>
-                </a:solidFill>
-                <a:latin typeface="맑은 고딕"/>
-              </a:rPr>
-              <a:t>   RTV(RGV) 상태</a:t>
-            </a:r>
-          </a:p>
-          <a:p>
-            <a:pPr algn="l"/>
-            <a:r>
-              <a:rPr sz="600" b="0">
-                <a:solidFill>
-                  <a:srgbClr val="595959"/>
-                </a:solidFill>
-                <a:latin typeface="맑은 고딕"/>
-              </a:rPr>
-              <a:t/>
-            </a:r>
-          </a:p>
-          <a:p>
-            <a:pPr algn="l"/>
-            <a:r>
-              <a:rPr sz="1400" b="1">
-                <a:solidFill>
-                  <a:srgbClr val="1E2761"/>
-                </a:solidFill>
-                <a:latin typeface="맑은 고딕"/>
-              </a:rPr>
-              <a:t>서버 프로그램</a:t>
-            </a:r>
-          </a:p>
-          <a:p>
-            <a:pPr algn="l"/>
-            <a:r>
-              <a:rPr sz="1100" b="0">
-                <a:solidFill>
-                  <a:srgbClr val="595959"/>
-                </a:solidFill>
-                <a:latin typeface="맑은 고딕"/>
-              </a:rPr>
-              <a:t>   통합 태스크 (ALL_TASK)</a:t>
-            </a:r>
-          </a:p>
-          <a:p>
-            <a:pPr algn="l"/>
-            <a:r>
-              <a:rPr sz="1100" b="0">
-                <a:solidFill>
-                  <a:srgbClr val="595959"/>
-                </a:solidFill>
-                <a:latin typeface="맑은 고딕"/>
-              </a:rPr>
-              <a:t>   설비 통신 (WCS_TASK_CV)</a:t>
-            </a:r>
-          </a:p>
-          <a:p>
-            <a:pPr algn="l"/>
-            <a:r>
-              <a:rPr sz="1100" b="0">
-                <a:solidFill>
-                  <a:srgbClr val="595959"/>
-                </a:solidFill>
-                <a:latin typeface="맑은 고딕"/>
-              </a:rPr>
-              <a:t>   스케줄러 (IO_TASK)</a:t>
-            </a:r>
-          </a:p>
-          <a:p>
-            <a:pPr algn="l"/>
-            <a:r>
-              <a:rPr sz="1100" b="0">
-                <a:solidFill>
-                  <a:srgbClr val="595959"/>
-                </a:solidFill>
-                <a:latin typeface="맑은 고딕"/>
-              </a:rPr>
-              <a:t>   상위 통신 (WCS_TASK_HOST)</a:t>
-            </a:r>
-          </a:p>
-          <a:p>
-            <a:pPr algn="l"/>
-            <a:r>
-              <a:rPr sz="600" b="0">
-                <a:solidFill>
-                  <a:srgbClr val="595959"/>
-                </a:solidFill>
-                <a:latin typeface="맑은 고딕"/>
-              </a:rPr>
-              <a:t/>
-            </a:r>
-          </a:p>
-        </p:txBody>
-      </p:sp>
-      <p:sp>
-        <p:nvSpPr>
-          <p:cNvPr id="6" name="TextBox 5"/>
-          <p:cNvSpPr txBox="1"/>
-          <p:nvPr/>
-        </p:nvSpPr>
-        <p:spPr>
-          <a:xfrm>
-            <a:off x="457200" y="6400800"/>
-            <a:ext cx="3657600" cy="320040"/>
-          </a:xfrm>
-          <a:prstGeom prst="rect">
-            <a:avLst/>
-          </a:prstGeom>
-          <a:noFill/>
-        </p:spPr>
-        <p:txBody>
-          <a:bodyPr wrap="square" anchor="t" lIns="45720" rIns="45720">
-            <a:spAutoFit/>
-          </a:bodyPr>
-          <a:lstStyle/>
-          <a:p>
-            <a:pPr algn="l"/>
-            <a:r>
-              <a:rPr sz="1000" b="0">
-                <a:solidFill>
-                  <a:srgbClr val="595959"/>
-                </a:solidFill>
-                <a:latin typeface="맑은 고딕"/>
-              </a:rPr>
-              <a:t>LG 화학 1동 ECS  |  화면설계서</a:t>
-            </a:r>
-          </a:p>
-        </p:txBody>
-      </p:sp>
-      <p:sp>
-        <p:nvSpPr>
-          <p:cNvPr id="7" name="TextBox 6"/>
-          <p:cNvSpPr txBox="1"/>
-          <p:nvPr/>
-        </p:nvSpPr>
-        <p:spPr>
-          <a:xfrm>
-            <a:off x="11155680" y="6400800"/>
-            <a:ext cx="731520" cy="320040"/>
-          </a:xfrm>
-          <a:prstGeom prst="rect">
-            <a:avLst/>
-          </a:prstGeom>
-          <a:noFill/>
-        </p:spPr>
-        <p:txBody>
-          <a:bodyPr wrap="square" anchor="t" lIns="45720" rIns="45720">
-            <a:spAutoFit/>
-          </a:bodyPr>
-          <a:lstStyle/>
-          <a:p>
-            <a:pPr algn="r"/>
-            <a:r>
-              <a:rPr sz="1000" b="0">
-                <a:solidFill>
-                  <a:srgbClr val="595959"/>
-                </a:solidFill>
-                <a:latin typeface="맑은 고딕"/>
-              </a:rPr>
-              <a:t>3</a:t>
-            </a:r>
-          </a:p>
-        </p:txBody>
-      </p:sp>
-    </p:spTree>
-  </p:cSld>
-  <p:clrMapOvr>
-    <a:masterClrMapping/>
-  </p:clrMapOvr>
-</p:sld>
-</file>
-
-<file path=ppt/slides/slide4.xml><?xml version="1.0" encoding="utf-8"?>
-<p:sld xmlns:a="http://schemas.openxmlformats.org/drawingml/2006/main" xmlns:p="http://schemas.openxmlformats.org/presentationml/2006/main" xmlns:r="http://schemas.openxmlformats.org/officeDocument/2006/relationships">
-  <p:cSld>
-    <p:spTree>
-      <p:nvGrpSpPr>
-        <p:cNvPr id="1" name=""/>
-        <p:cNvGrpSpPr/>
-        <p:nvPr/>
-      </p:nvGrpSpPr>
-      <p:grpSpPr/>
-      <p:sp>
-        <p:nvSpPr>
-          <p:cNvPr id="2" name="TextBox 1"/>
-          <p:cNvSpPr txBox="1"/>
-          <p:nvPr/>
-        </p:nvSpPr>
-        <p:spPr>
-          <a:xfrm>
-            <a:off x="457200" y="320040"/>
-            <a:ext cx="11247120" cy="640080"/>
-          </a:xfrm>
-          <a:prstGeom prst="rect">
-            <a:avLst/>
-          </a:prstGeom>
-          <a:noFill/>
-        </p:spPr>
-        <p:txBody>
-          <a:bodyPr wrap="square" anchor="ctr" lIns="45720" rIns="45720">
-            <a:spAutoFit/>
-          </a:bodyPr>
-          <a:lstStyle/>
-          <a:p>
-            <a:pPr algn="l"/>
-            <a:r>
-              <a:rPr sz="2600" b="1">
-                <a:solidFill>
-                  <a:srgbClr val="1E2761"/>
-                </a:solidFill>
-                <a:latin typeface="맑은 고딕"/>
-              </a:rPr>
-              <a:t>메인 화면(창고 모니터링)</a:t>
+              <a:t>ECS&gt;뷰 - 작업정보</a:t>
             </a:r>
           </a:p>
         </p:txBody>
@@ -9756,12 +11560,13 @@
           <a:lstStyle/>
           <a:p>
             <a:pPr algn="ctr"/>
+            <a:endParaRPr/>
           </a:p>
         </p:txBody>
       </p:sp>
       <p:pic>
         <p:nvPicPr>
-          <p:cNvPr id="4" name="Picture 3" descr="main_0.png"/>
+          <p:cNvPr id="4" name="Picture 3" descr="joblist_0.png"/>
           <p:cNvPicPr>
             <a:picLocks noChangeAspect="1"/>
           </p:cNvPicPr>
@@ -9775,8 +11580,8 @@
         </p:blipFill>
         <p:spPr>
           <a:xfrm>
-            <a:off x="640080" y="1673880"/>
-            <a:ext cx="7498079" cy="4058878"/>
+            <a:off x="640080" y="1332515"/>
+            <a:ext cx="7498079" cy="4741608"/>
           </a:xfrm>
           <a:prstGeom prst="rect">
             <a:avLst/>
@@ -9800,7 +11605,7 @@
           <a:noFill/>
         </p:spPr>
         <p:txBody>
-          <a:bodyPr wrap="square" anchor="t" lIns="45720" rIns="45720">
+          <a:bodyPr wrap="square" lIns="45720" rIns="45720" anchor="t">
             <a:spAutoFit/>
           </a:bodyPr>
           <a:lstStyle/>
@@ -9825,20 +11630,17 @@
                 </a:solidFill>
                 <a:latin typeface="맑은 고딕"/>
               </a:rPr>
-              <a:t>운전 화면(Ecs.exe) 실행 시 첫 화면</a:t>
-            </a:r>
-          </a:p>
-          <a:p>
-            <a:pPr algn="l"/>
-            <a:r>
-              <a:rPr sz="600" b="0">
-                <a:solidFill>
-                  <a:srgbClr val="595959"/>
-                </a:solidFill>
-                <a:latin typeface="맑은 고딕"/>
-              </a:rPr>
-              <a:t/>
-            </a:r>
+              <a:t>ECS ▷ 뷰 ▷ 작업정보</a:t>
+            </a:r>
+          </a:p>
+          <a:p>
+            <a:pPr algn="l"/>
+            <a:endParaRPr sz="1100" b="0">
+              <a:solidFill>
+                <a:srgbClr val="595959"/>
+              </a:solidFill>
+              <a:latin typeface="맑은 고딕"/>
+            </a:endParaRPr>
           </a:p>
           <a:p>
             <a:pPr algn="l"/>
@@ -9861,20 +11663,17 @@
                 </a:solidFill>
                 <a:latin typeface="맑은 고딕"/>
               </a:rPr>
-              <a:t>1동 자동창고 전체 배치(랙 10열, 크레인 5대, RGV 1대, 컨베이어 C/V#2~#15, 작업대)와 작업 진행 상황을 실시간 표시한다.</a:t>
-            </a:r>
-          </a:p>
-          <a:p>
-            <a:pPr algn="l"/>
-            <a:r>
-              <a:rPr sz="600" b="0">
-                <a:solidFill>
-                  <a:srgbClr val="595959"/>
-                </a:solidFill>
-                <a:latin typeface="맑은 고딕"/>
-              </a:rPr>
-              <a:t/>
-            </a:r>
+              <a:t>진행 중 작업(JOB_MST)을 조회하고 작업상태/우선순위를 수정하거나 삭제·복사·완료 보고를 수행한다.</a:t>
+            </a:r>
+          </a:p>
+          <a:p>
+            <a:pPr algn="l"/>
+            <a:endParaRPr sz="1100" b="0">
+              <a:solidFill>
+                <a:srgbClr val="595959"/>
+              </a:solidFill>
+              <a:latin typeface="맑은 고딕"/>
+            </a:endParaRPr>
           </a:p>
           <a:p>
             <a:pPr algn="l"/>
@@ -9897,7 +11696,7 @@
                 </a:solidFill>
                 <a:latin typeface="맑은 고딕"/>
               </a:rPr>
-              <a:t>· 화물이 있는 위치는 작업번호와 작업구분 색(입고/출고/피킹/랙투랙/이동)으로 표시된다.</a:t>
+              <a:t>· [자동 갱신] 을 켜면 주기적으로 목록을 다시 읽는다.</a:t>
             </a:r>
           </a:p>
           <a:p>
@@ -9909,8 +11708,7 @@
                 </a:solidFill>
                 <a:latin typeface="맑은 고딕"/>
               </a:rPr>
-              <a:t>· 화면 왼쪽에 범례표가 함께 그려진다 - 작업 색상 / C/V 상태 / S/C·RTV 상태 / S/C·RTV 레일 4개 그룹이며,
-    색은 [범례] 창에서 바꾸면 이 표에도 곧바로 반영된다.</a:t>
+              <a:t>· [CV 도착보고]/[SC 완료보고] 는 설비 신호가 유실됐을 때 사람이 대신 보고하는 기능이다.</a:t>
             </a:r>
           </a:p>
           <a:p>
@@ -9922,44 +11720,7 @@
                 </a:solidFill>
                 <a:latin typeface="맑은 고딕"/>
               </a:rPr>
-              <a:t>· 크레인 행마다 "출고대기 N" 으로 그 크레인의 출고 대기 건수([20] SC 구동대기)를 상시 표시한다.
-    Ecs.ini [MENU] SCWAIT_VIEW=0 으로 이 표시를 끌 수 있다.</a:t>
-            </a:r>
-          </a:p>
-          <a:p>
-            <a:pPr algn="l"/>
-            <a:r>
-              <a:rPr sz="1000" b="0">
-                <a:solidFill>
-                  <a:srgbClr val="595959"/>
-                </a:solidFill>
-                <a:latin typeface="맑은 고딕"/>
-              </a:rPr>
-              <a:t>· C/V#2(S/C#1 통로)와 C/V#11(입출고 겸용대)의 현재 입출고 모드를 "입고 모드/출고 모드"로 표시한다.</a:t>
-            </a:r>
-          </a:p>
-          <a:p>
-            <a:pPr algn="l"/>
-            <a:r>
-              <a:rPr sz="1000" b="0">
-                <a:solidFill>
-                  <a:srgbClr val="595959"/>
-                </a:solidFill>
-                <a:latin typeface="맑은 고딕"/>
-              </a:rPr>
-              <a:t>· 작업대 라벨은 IMS 스테이션 코드와 명칭을 함께 표기한다 : [101] 외부 입고 전용 입출고대, 103 제품 입고대(TR#24), 104 원부자재 불출대(TR#26), 102 피킹 작업대(TR#29/30).</a:t>
-            </a:r>
-          </a:p>
-          <a:p>
-            <a:pPr algn="l"/>
-            <a:r>
-              <a:rPr sz="1000" b="0">
-                <a:solidFill>
-                  <a:srgbClr val="595959"/>
-                </a:solidFill>
-                <a:latin typeface="맑은 고딕"/>
-              </a:rPr>
-              <a:t>· 하단 상태바 EQUIP / HOST / SCH 는 각 서버 프로그램(설비 통신/상위 통신/스케줄러)의 생존 상태(초록=정상, 빨강=끊김)이다.</a:t>
+              <a:t>· [삭제] 는 작업을 지우고, 설비에 남은 지시는 설비 대화상자의 [지시 삭제] 로 정리한다.</a:t>
             </a:r>
           </a:p>
         </p:txBody>
@@ -9981,7 +11742,7 @@
           <a:noFill/>
         </p:spPr>
         <p:txBody>
-          <a:bodyPr wrap="square" anchor="t" lIns="45720" rIns="45720">
+          <a:bodyPr wrap="square" lIns="45720" rIns="45720" anchor="t">
             <a:spAutoFit/>
           </a:bodyPr>
           <a:lstStyle/>
@@ -10016,7 +11777,7 @@
           <a:noFill/>
         </p:spPr>
         <p:txBody>
-          <a:bodyPr wrap="square" anchor="t" lIns="45720" rIns="45720">
+          <a:bodyPr wrap="square" lIns="45720" rIns="45720" anchor="t">
             <a:spAutoFit/>
           </a:bodyPr>
           <a:lstStyle/>
@@ -10029,7 +11790,7 @@
                 </a:solidFill>
                 <a:latin typeface="맑은 고딕"/>
               </a:rPr>
-              <a:t>4</a:t>
+              <a:t>8</a:t>
             </a:r>
           </a:p>
         </p:txBody>
@@ -10042,8 +11803,8 @@
 </p:sld>
 </file>
 
-<file path=ppt/slides/slide5.xml><?xml version="1.0" encoding="utf-8"?>
-<p:sld xmlns:a="http://schemas.openxmlformats.org/drawingml/2006/main" xmlns:p="http://schemas.openxmlformats.org/presentationml/2006/main" xmlns:r="http://schemas.openxmlformats.org/officeDocument/2006/relationships">
+<file path=ppt/slides/slide9.xml><?xml version="1.0" encoding="utf-8"?>
+<p:sld xmlns:a="http://schemas.openxmlformats.org/drawingml/2006/main" xmlns:r="http://schemas.openxmlformats.org/officeDocument/2006/relationships" xmlns:p="http://schemas.openxmlformats.org/presentationml/2006/main">
   <p:cSld>
     <p:spTree>
       <p:nvGrpSpPr>
@@ -10051,7 +11812,14 @@
         <p:cNvGrpSpPr/>
         <p:nvPr/>
       </p:nvGrpSpPr>
-      <p:grpSpPr/>
+      <p:grpSpPr>
+        <a:xfrm>
+          <a:off x="0" y="0"/>
+          <a:ext cx="0" cy="0"/>
+          <a:chOff x="0" y="0"/>
+          <a:chExt cx="0" cy="0"/>
+        </a:xfrm>
+      </p:grpSpPr>
       <p:sp>
         <p:nvSpPr>
           <p:cNvPr id="2" name="TextBox 1"/>
@@ -10069,7 +11837,7 @@
           <a:noFill/>
         </p:spPr>
         <p:txBody>
-          <a:bodyPr wrap="square" anchor="ctr" lIns="45720" rIns="45720">
+          <a:bodyPr wrap="square" lIns="45720" rIns="45720" anchor="ctr">
             <a:spAutoFit/>
           </a:bodyPr>
           <a:lstStyle/>
@@ -10082,7 +11850,7 @@
                 </a:solidFill>
                 <a:latin typeface="맑은 고딕"/>
               </a:rPr>
-              <a:t>ECS&gt;환경설정 - 통신 연결 정의 (EQP 정보)</a:t>
+              <a:t>ECS&gt;뷰 - 찾기</a:t>
             </a:r>
           </a:p>
         </p:txBody>
@@ -10129,12 +11897,13 @@
           <a:lstStyle/>
           <a:p>
             <a:pPr algn="ctr"/>
+            <a:endParaRPr/>
           </a:p>
         </p:txBody>
       </p:sp>
       <p:pic>
         <p:nvPicPr>
-          <p:cNvPr id="4" name="Picture 3" descr="eqpinfo_0.png"/>
+          <p:cNvPr id="4" name="Picture 3" descr="search_0.png"/>
           <p:cNvPicPr>
             <a:picLocks noChangeAspect="1"/>
           </p:cNvPicPr>
@@ -10148,8 +11917,8 @@
         </p:blipFill>
         <p:spPr>
           <a:xfrm>
-            <a:off x="746226" y="1280160"/>
-            <a:ext cx="7285786" cy="4846320"/>
+            <a:off x="640080" y="2937670"/>
+            <a:ext cx="7498079" cy="1531298"/>
           </a:xfrm>
           <a:prstGeom prst="rect">
             <a:avLst/>
@@ -10173,7 +11942,7 @@
           <a:noFill/>
         </p:spPr>
         <p:txBody>
-          <a:bodyPr wrap="square" anchor="t" lIns="45720" rIns="45720">
+          <a:bodyPr wrap="square" lIns="45720" rIns="45720" anchor="t">
             <a:spAutoFit/>
           </a:bodyPr>
           <a:lstStyle/>
@@ -10198,20 +11967,17 @@
                 </a:solidFill>
                 <a:latin typeface="맑은 고딕"/>
               </a:rPr>
-              <a:t>ECS ▷ 환경설정 ▷ 통신 연결 정의</a:t>
-            </a:r>
-          </a:p>
-          <a:p>
-            <a:pPr algn="l"/>
-            <a:r>
-              <a:rPr sz="600" b="0">
-                <a:solidFill>
-                  <a:srgbClr val="595959"/>
-                </a:solidFill>
-                <a:latin typeface="맑은 고딕"/>
-              </a:rPr>
-              <a:t/>
-            </a:r>
+              <a:t>ECS ▷ 뷰 ▷ 찾기</a:t>
+            </a:r>
+          </a:p>
+          <a:p>
+            <a:pPr algn="l"/>
+            <a:endParaRPr sz="1100" b="0">
+              <a:solidFill>
+                <a:srgbClr val="595959"/>
+              </a:solidFill>
+              <a:latin typeface="맑은 고딕"/>
+            </a:endParaRPr>
           </a:p>
           <a:p>
             <a:pPr algn="l"/>
@@ -10234,55 +12000,7 @@
                 </a:solidFill>
                 <a:latin typeface="맑은 고딕"/>
               </a:rPr>
-              <a:t>서버 프로그램(EQP=설비 통신, HOST/HOST2=상위 통신, SCH=스케줄러)의 접속 정보와 생존 상태를 조회한다. (EQP_MST)</a:t>
-            </a:r>
-          </a:p>
-          <a:p>
-            <a:pPr algn="l"/>
-            <a:r>
-              <a:rPr sz="600" b="0">
-                <a:solidFill>
-                  <a:srgbClr val="595959"/>
-                </a:solidFill>
-                <a:latin typeface="맑은 고딕"/>
-              </a:rPr>
-              <a:t/>
-            </a:r>
-          </a:p>
-          <a:p>
-            <a:pPr algn="l"/>
-            <a:r>
-              <a:rPr sz="1300" b="1">
-                <a:solidFill>
-                  <a:srgbClr val="1E2761"/>
-                </a:solidFill>
-                <a:latin typeface="맑은 고딕"/>
-              </a:rPr>
-              <a:t>■ 특기사항</a:t>
-            </a:r>
-          </a:p>
-          <a:p>
-            <a:pPr algn="l"/>
-            <a:r>
-              <a:rPr sz="1000" b="0">
-                <a:solidFill>
-                  <a:srgbClr val="595959"/>
-                </a:solidFill>
-                <a:latin typeface="맑은 고딕"/>
-              </a:rPr>
-              <a:t>· 설비 구분 콤보 : ALL / EQP / HOST / SCH. HOST 를 고르면 HOST2 까지 함께 조회된다.</a:t>
-            </a:r>
-          </a:p>
-          <a:p>
-            <a:pPr algn="l"/>
-            <a:r>
-              <a:rPr sz="1000" b="0">
-                <a:solidFill>
-                  <a:srgbClr val="595959"/>
-                </a:solidFill>
-                <a:latin typeface="맑은 고딕"/>
-              </a:rPr>
-              <a:t>· EQP 대표 행은 마스터 PLC 소켓(IP/PORT) 정의를 나타낸다.</a:t>
+              <a:t>작업번호를 입력하면 그 화물이 있는 트랙/설비를 메인 화면에서 깜빡여 보여 준다(5초).</a:t>
             </a:r>
           </a:p>
         </p:txBody>
@@ -10304,7 +12022,7 @@
           <a:noFill/>
         </p:spPr>
         <p:txBody>
-          <a:bodyPr wrap="square" anchor="t" lIns="45720" rIns="45720">
+          <a:bodyPr wrap="square" lIns="45720" rIns="45720" anchor="t">
             <a:spAutoFit/>
           </a:bodyPr>
           <a:lstStyle/>
@@ -10339,1265 +12057,7 @@
           <a:noFill/>
         </p:spPr>
         <p:txBody>
-          <a:bodyPr wrap="square" anchor="t" lIns="45720" rIns="45720">
-            <a:spAutoFit/>
-          </a:bodyPr>
-          <a:lstStyle/>
-          <a:p>
-            <a:pPr algn="r"/>
-            <a:r>
-              <a:rPr sz="1000" b="0">
-                <a:solidFill>
-                  <a:srgbClr val="595959"/>
-                </a:solidFill>
-                <a:latin typeface="맑은 고딕"/>
-              </a:rPr>
-              <a:t>5</a:t>
-            </a:r>
-          </a:p>
-        </p:txBody>
-      </p:sp>
-    </p:spTree>
-  </p:cSld>
-  <p:clrMapOvr>
-    <a:masterClrMapping/>
-  </p:clrMapOvr>
-</p:sld>
-</file>
-
-<file path=ppt/slides/slide6.xml><?xml version="1.0" encoding="utf-8"?>
-<p:sld xmlns:a="http://schemas.openxmlformats.org/drawingml/2006/main" xmlns:p="http://schemas.openxmlformats.org/presentationml/2006/main" xmlns:r="http://schemas.openxmlformats.org/officeDocument/2006/relationships">
-  <p:cSld>
-    <p:spTree>
-      <p:nvGrpSpPr>
-        <p:cNvPr id="1" name=""/>
-        <p:cNvGrpSpPr/>
-        <p:nvPr/>
-      </p:nvGrpSpPr>
-      <p:grpSpPr/>
-      <p:sp>
-        <p:nvSpPr>
-          <p:cNvPr id="2" name="TextBox 1"/>
-          <p:cNvSpPr txBox="1"/>
-          <p:nvPr/>
-        </p:nvSpPr>
-        <p:spPr>
-          <a:xfrm>
-            <a:off x="457200" y="320040"/>
-            <a:ext cx="11247120" cy="640080"/>
-          </a:xfrm>
-          <a:prstGeom prst="rect">
-            <a:avLst/>
-          </a:prstGeom>
-          <a:noFill/>
-        </p:spPr>
-        <p:txBody>
-          <a:bodyPr wrap="square" anchor="ctr" lIns="45720" rIns="45720">
-            <a:spAutoFit/>
-          </a:bodyPr>
-          <a:lstStyle/>
-          <a:p>
-            <a:pPr algn="l"/>
-            <a:r>
-              <a:rPr sz="2600" b="1">
-                <a:solidFill>
-                  <a:srgbClr val="1E2761"/>
-                </a:solidFill>
-                <a:latin typeface="맑은 고딕"/>
-              </a:rPr>
-              <a:t>ECS&gt;환경설정 - 로그 삭제 설정 (이력 삭제 주기 변경)</a:t>
-            </a:r>
-          </a:p>
-        </p:txBody>
-      </p:sp>
-      <p:sp>
-        <p:nvSpPr>
-          <p:cNvPr id="3" name="Rectangle 2"/>
-          <p:cNvSpPr/>
-          <p:nvPr/>
-        </p:nvSpPr>
-        <p:spPr>
-          <a:xfrm>
-            <a:off x="548640" y="1188720"/>
-            <a:ext cx="7680960" cy="5029200"/>
-          </a:xfrm>
-          <a:prstGeom prst="rect">
-            <a:avLst/>
-          </a:prstGeom>
-          <a:solidFill>
-            <a:srgbClr val="F7F8FA"/>
-          </a:solidFill>
-          <a:ln>
-            <a:solidFill>
-              <a:srgbClr val="C8CEDA"/>
-            </a:solidFill>
-          </a:ln>
-        </p:spPr>
-        <p:style>
-          <a:lnRef idx="1">
-            <a:schemeClr val="accent1"/>
-          </a:lnRef>
-          <a:fillRef idx="3">
-            <a:schemeClr val="accent1"/>
-          </a:fillRef>
-          <a:effectRef idx="2">
-            <a:schemeClr val="accent1"/>
-          </a:effectRef>
-          <a:fontRef idx="minor">
-            <a:schemeClr val="lt1"/>
-          </a:fontRef>
-        </p:style>
-        <p:txBody>
-          <a:bodyPr rtlCol="0" anchor="ctr"/>
-          <a:lstStyle/>
-          <a:p>
-            <a:pPr algn="ctr"/>
-          </a:p>
-        </p:txBody>
-      </p:sp>
-      <p:pic>
-        <p:nvPicPr>
-          <p:cNvPr id="4" name="Picture 3" descr="logdel_0.png"/>
-          <p:cNvPicPr>
-            <a:picLocks noChangeAspect="1"/>
-          </p:cNvPicPr>
-          <p:nvPr/>
-        </p:nvPicPr>
-        <p:blipFill>
-          <a:blip r:embed="rId2"/>
-          <a:stretch>
-            <a:fillRect/>
-          </a:stretch>
-        </p:blipFill>
-        <p:spPr>
-          <a:xfrm>
-            <a:off x="1190548" y="1280160"/>
-            <a:ext cx="6397142" cy="4846320"/>
-          </a:xfrm>
-          <a:prstGeom prst="rect">
-            <a:avLst/>
-          </a:prstGeom>
-        </p:spPr>
-      </p:pic>
-      <p:sp>
-        <p:nvSpPr>
-          <p:cNvPr id="5" name="TextBox 4"/>
-          <p:cNvSpPr txBox="1"/>
-          <p:nvPr/>
-        </p:nvSpPr>
-        <p:spPr>
-          <a:xfrm>
-            <a:off x="8503920" y="1188720"/>
-            <a:ext cx="3291840" cy="5029200"/>
-          </a:xfrm>
-          <a:prstGeom prst="rect">
-            <a:avLst/>
-          </a:prstGeom>
-          <a:noFill/>
-        </p:spPr>
-        <p:txBody>
-          <a:bodyPr wrap="square" anchor="t" lIns="45720" rIns="45720">
-            <a:spAutoFit/>
-          </a:bodyPr>
-          <a:lstStyle/>
-          <a:p>
-            <a:pPr algn="l"/>
-            <a:r>
-              <a:rPr sz="1300" b="1">
-                <a:solidFill>
-                  <a:srgbClr val="1E2761"/>
-                </a:solidFill>
-                <a:latin typeface="맑은 고딕"/>
-              </a:rPr>
-              <a:t>■ 메뉴 Path</a:t>
-            </a:r>
-          </a:p>
-          <a:p>
-            <a:pPr algn="l"/>
-            <a:r>
-              <a:rPr sz="1100" b="0">
-                <a:solidFill>
-                  <a:srgbClr val="595959"/>
-                </a:solidFill>
-                <a:latin typeface="맑은 고딕"/>
-              </a:rPr>
-              <a:t>ECS ▷ 환경설정 ▷ 로그 삭제 설정</a:t>
-            </a:r>
-          </a:p>
-          <a:p>
-            <a:pPr algn="l"/>
-            <a:r>
-              <a:rPr sz="600" b="0">
-                <a:solidFill>
-                  <a:srgbClr val="595959"/>
-                </a:solidFill>
-                <a:latin typeface="맑은 고딕"/>
-              </a:rPr>
-              <a:t/>
-            </a:r>
-          </a:p>
-          <a:p>
-            <a:pPr algn="l"/>
-            <a:r>
-              <a:rPr sz="1300" b="1">
-                <a:solidFill>
-                  <a:srgbClr val="1E2761"/>
-                </a:solidFill>
-                <a:latin typeface="맑은 고딕"/>
-              </a:rPr>
-              <a:t>■ 프로그램 개요</a:t>
-            </a:r>
-          </a:p>
-          <a:p>
-            <a:pPr algn="l"/>
-            <a:r>
-              <a:rPr sz="1100" b="0">
-                <a:solidFill>
-                  <a:srgbClr val="595959"/>
-                </a:solidFill>
-                <a:latin typeface="맑은 고딕"/>
-              </a:rPr>
-              <a:t>로그 테이블별 보존 주기(일)를 조회·변경한다. (DEL_HIS_SETTING)</a:t>
-            </a:r>
-          </a:p>
-          <a:p>
-            <a:pPr algn="l"/>
-            <a:r>
-              <a:rPr sz="600" b="0">
-                <a:solidFill>
-                  <a:srgbClr val="595959"/>
-                </a:solidFill>
-                <a:latin typeface="맑은 고딕"/>
-              </a:rPr>
-              <a:t/>
-            </a:r>
-          </a:p>
-          <a:p>
-            <a:pPr algn="l"/>
-            <a:r>
-              <a:rPr sz="1300" b="1">
-                <a:solidFill>
-                  <a:srgbClr val="1E2761"/>
-                </a:solidFill>
-                <a:latin typeface="맑은 고딕"/>
-              </a:rPr>
-              <a:t>■ 특기사항</a:t>
-            </a:r>
-          </a:p>
-          <a:p>
-            <a:pPr algn="l"/>
-            <a:r>
-              <a:rPr sz="1000" b="0">
-                <a:solidFill>
-                  <a:srgbClr val="595959"/>
-                </a:solidFill>
-                <a:latin typeface="맑은 고딕"/>
-              </a:rPr>
-              <a:t>· 그리드에서 행을 클릭하면 그 행의 주기가 (일) 칸에 채워지고 그룹 제목에 선택한 로그명과 현재 주기가 표시된다.</a:t>
-            </a:r>
-          </a:p>
-          <a:p>
-            <a:pPr algn="l"/>
-            <a:r>
-              <a:rPr sz="1000" b="0">
-                <a:solidFill>
-                  <a:srgbClr val="595959"/>
-                </a:solidFill>
-                <a:latin typeface="맑은 고딕"/>
-              </a:rPr>
-              <a:t>· 값을 고쳐 [설정] 을 누르면 변경되고 유저사용 로그에 기록된다. 공백/0 은 설정할 수 없다.</a:t>
-            </a:r>
-          </a:p>
-        </p:txBody>
-      </p:sp>
-      <p:sp>
-        <p:nvSpPr>
-          <p:cNvPr id="6" name="TextBox 5"/>
-          <p:cNvSpPr txBox="1"/>
-          <p:nvPr/>
-        </p:nvSpPr>
-        <p:spPr>
-          <a:xfrm>
-            <a:off x="457200" y="6400800"/>
-            <a:ext cx="3657600" cy="320040"/>
-          </a:xfrm>
-          <a:prstGeom prst="rect">
-            <a:avLst/>
-          </a:prstGeom>
-          <a:noFill/>
-        </p:spPr>
-        <p:txBody>
-          <a:bodyPr wrap="square" anchor="t" lIns="45720" rIns="45720">
-            <a:spAutoFit/>
-          </a:bodyPr>
-          <a:lstStyle/>
-          <a:p>
-            <a:pPr algn="l"/>
-            <a:r>
-              <a:rPr sz="1000" b="0">
-                <a:solidFill>
-                  <a:srgbClr val="595959"/>
-                </a:solidFill>
-                <a:latin typeface="맑은 고딕"/>
-              </a:rPr>
-              <a:t>LG 화학 1동 ECS  |  화면설계서</a:t>
-            </a:r>
-          </a:p>
-        </p:txBody>
-      </p:sp>
-      <p:sp>
-        <p:nvSpPr>
-          <p:cNvPr id="7" name="TextBox 6"/>
-          <p:cNvSpPr txBox="1"/>
-          <p:nvPr/>
-        </p:nvSpPr>
-        <p:spPr>
-          <a:xfrm>
-            <a:off x="11155680" y="6400800"/>
-            <a:ext cx="731520" cy="320040"/>
-          </a:xfrm>
-          <a:prstGeom prst="rect">
-            <a:avLst/>
-          </a:prstGeom>
-          <a:noFill/>
-        </p:spPr>
-        <p:txBody>
-          <a:bodyPr wrap="square" anchor="t" lIns="45720" rIns="45720">
-            <a:spAutoFit/>
-          </a:bodyPr>
-          <a:lstStyle/>
-          <a:p>
-            <a:pPr algn="r"/>
-            <a:r>
-              <a:rPr sz="1000" b="0">
-                <a:solidFill>
-                  <a:srgbClr val="595959"/>
-                </a:solidFill>
-                <a:latin typeface="맑은 고딕"/>
-              </a:rPr>
-              <a:t>6</a:t>
-            </a:r>
-          </a:p>
-        </p:txBody>
-      </p:sp>
-    </p:spTree>
-  </p:cSld>
-  <p:clrMapOvr>
-    <a:masterClrMapping/>
-  </p:clrMapOvr>
-</p:sld>
-</file>
-
-<file path=ppt/slides/slide7.xml><?xml version="1.0" encoding="utf-8"?>
-<p:sld xmlns:a="http://schemas.openxmlformats.org/drawingml/2006/main" xmlns:p="http://schemas.openxmlformats.org/presentationml/2006/main" xmlns:r="http://schemas.openxmlformats.org/officeDocument/2006/relationships">
-  <p:cSld>
-    <p:spTree>
-      <p:nvGrpSpPr>
-        <p:cNvPr id="1" name=""/>
-        <p:cNvGrpSpPr/>
-        <p:nvPr/>
-      </p:nvGrpSpPr>
-      <p:grpSpPr/>
-      <p:sp>
-        <p:nvSpPr>
-          <p:cNvPr id="2" name="TextBox 1"/>
-          <p:cNvSpPr txBox="1"/>
-          <p:nvPr/>
-        </p:nvSpPr>
-        <p:spPr>
-          <a:xfrm>
-            <a:off x="457200" y="320040"/>
-            <a:ext cx="11247120" cy="640080"/>
-          </a:xfrm>
-          <a:prstGeom prst="rect">
-            <a:avLst/>
-          </a:prstGeom>
-          <a:noFill/>
-        </p:spPr>
-        <p:txBody>
-          <a:bodyPr wrap="square" anchor="ctr" lIns="45720" rIns="45720">
-            <a:spAutoFit/>
-          </a:bodyPr>
-          <a:lstStyle/>
-          <a:p>
-            <a:pPr algn="l"/>
-            <a:r>
-              <a:rPr sz="2600" b="1">
-                <a:solidFill>
-                  <a:srgbClr val="1E2761"/>
-                </a:solidFill>
-                <a:latin typeface="맑은 고딕"/>
-              </a:rPr>
-              <a:t>ECS&gt;환경설정 - 범례 (색상정보)</a:t>
-            </a:r>
-          </a:p>
-        </p:txBody>
-      </p:sp>
-      <p:sp>
-        <p:nvSpPr>
-          <p:cNvPr id="3" name="Rectangle 2"/>
-          <p:cNvSpPr/>
-          <p:nvPr/>
-        </p:nvSpPr>
-        <p:spPr>
-          <a:xfrm>
-            <a:off x="548640" y="1188720"/>
-            <a:ext cx="7680960" cy="5029200"/>
-          </a:xfrm>
-          <a:prstGeom prst="rect">
-            <a:avLst/>
-          </a:prstGeom>
-          <a:solidFill>
-            <a:srgbClr val="F7F8FA"/>
-          </a:solidFill>
-          <a:ln>
-            <a:solidFill>
-              <a:srgbClr val="C8CEDA"/>
-            </a:solidFill>
-          </a:ln>
-        </p:spPr>
-        <p:style>
-          <a:lnRef idx="1">
-            <a:schemeClr val="accent1"/>
-          </a:lnRef>
-          <a:fillRef idx="3">
-            <a:schemeClr val="accent1"/>
-          </a:fillRef>
-          <a:effectRef idx="2">
-            <a:schemeClr val="accent1"/>
-          </a:effectRef>
-          <a:fontRef idx="minor">
-            <a:schemeClr val="lt1"/>
-          </a:fontRef>
-        </p:style>
-        <p:txBody>
-          <a:bodyPr rtlCol="0" anchor="ctr"/>
-          <a:lstStyle/>
-          <a:p>
-            <a:pPr algn="ctr"/>
-          </a:p>
-        </p:txBody>
-      </p:sp>
-      <p:pic>
-        <p:nvPicPr>
-          <p:cNvPr id="4" name="Picture 3" descr="legend_0.png"/>
-          <p:cNvPicPr>
-            <a:picLocks noChangeAspect="1"/>
-          </p:cNvPicPr>
-          <p:nvPr/>
-        </p:nvPicPr>
-        <p:blipFill>
-          <a:blip r:embed="rId2"/>
-          <a:stretch>
-            <a:fillRect/>
-          </a:stretch>
-        </p:blipFill>
-        <p:spPr>
-          <a:xfrm>
-            <a:off x="640080" y="2390524"/>
-            <a:ext cx="7498079" cy="2625590"/>
-          </a:xfrm>
-          <a:prstGeom prst="rect">
-            <a:avLst/>
-          </a:prstGeom>
-        </p:spPr>
-      </p:pic>
-      <p:sp>
-        <p:nvSpPr>
-          <p:cNvPr id="5" name="TextBox 4"/>
-          <p:cNvSpPr txBox="1"/>
-          <p:nvPr/>
-        </p:nvSpPr>
-        <p:spPr>
-          <a:xfrm>
-            <a:off x="8503920" y="1188720"/>
-            <a:ext cx="3291840" cy="5029200"/>
-          </a:xfrm>
-          <a:prstGeom prst="rect">
-            <a:avLst/>
-          </a:prstGeom>
-          <a:noFill/>
-        </p:spPr>
-        <p:txBody>
-          <a:bodyPr wrap="square" anchor="t" lIns="45720" rIns="45720">
-            <a:spAutoFit/>
-          </a:bodyPr>
-          <a:lstStyle/>
-          <a:p>
-            <a:pPr algn="l"/>
-            <a:r>
-              <a:rPr sz="1300" b="1">
-                <a:solidFill>
-                  <a:srgbClr val="1E2761"/>
-                </a:solidFill>
-                <a:latin typeface="맑은 고딕"/>
-              </a:rPr>
-              <a:t>■ 메뉴 Path</a:t>
-            </a:r>
-          </a:p>
-          <a:p>
-            <a:pPr algn="l"/>
-            <a:r>
-              <a:rPr sz="1100" b="0">
-                <a:solidFill>
-                  <a:srgbClr val="595959"/>
-                </a:solidFill>
-                <a:latin typeface="맑은 고딕"/>
-              </a:rPr>
-              <a:t>ECS ▷ 환경설정 ▷ 범례</a:t>
-            </a:r>
-          </a:p>
-          <a:p>
-            <a:pPr algn="l"/>
-            <a:r>
-              <a:rPr sz="600" b="0">
-                <a:solidFill>
-                  <a:srgbClr val="595959"/>
-                </a:solidFill>
-                <a:latin typeface="맑은 고딕"/>
-              </a:rPr>
-              <a:t/>
-            </a:r>
-          </a:p>
-          <a:p>
-            <a:pPr algn="l"/>
-            <a:r>
-              <a:rPr sz="1300" b="1">
-                <a:solidFill>
-                  <a:srgbClr val="1E2761"/>
-                </a:solidFill>
-                <a:latin typeface="맑은 고딕"/>
-              </a:rPr>
-              <a:t>■ 프로그램 개요</a:t>
-            </a:r>
-          </a:p>
-          <a:p>
-            <a:pPr algn="l"/>
-            <a:r>
-              <a:rPr sz="1100" b="0">
-                <a:solidFill>
-                  <a:srgbClr val="595959"/>
-                </a:solidFill>
-                <a:latin typeface="맑은 고딕"/>
-              </a:rPr>
-              <a:t>메인 화면에서 쓰는 색상(작업상태·CV 신호·CV,SC 상태·RAIL·반자동)을 확인·변경한다.</a:t>
-            </a:r>
-          </a:p>
-          <a:p>
-            <a:pPr algn="l"/>
-            <a:r>
-              <a:rPr sz="600" b="0">
-                <a:solidFill>
-                  <a:srgbClr val="595959"/>
-                </a:solidFill>
-                <a:latin typeface="맑은 고딕"/>
-              </a:rPr>
-              <a:t/>
-            </a:r>
-          </a:p>
-          <a:p>
-            <a:pPr algn="l"/>
-            <a:r>
-              <a:rPr sz="1300" b="1">
-                <a:solidFill>
-                  <a:srgbClr val="1E2761"/>
-                </a:solidFill>
-                <a:latin typeface="맑은 고딕"/>
-              </a:rPr>
-              <a:t>■ 특기사항</a:t>
-            </a:r>
-          </a:p>
-          <a:p>
-            <a:pPr algn="l"/>
-            <a:r>
-              <a:rPr sz="1000" b="0">
-                <a:solidFill>
-                  <a:srgbClr val="595959"/>
-                </a:solidFill>
-                <a:latin typeface="맑은 고딕"/>
-              </a:rPr>
-              <a:t>· CV, SC 상태의 "WC 패스모드" 는 이 현장에 없는 기능이라 비활성이다.</a:t>
-            </a:r>
-          </a:p>
-          <a:p>
-            <a:pPr algn="l"/>
-            <a:r>
-              <a:rPr sz="1000" b="0">
-                <a:solidFill>
-                  <a:srgbClr val="595959"/>
-                </a:solidFill>
-                <a:latin typeface="맑은 고딕"/>
-              </a:rPr>
-              <a:t>· S/C·RTV 레일 색은 정지 사유별로 나뉜다 : 입고 금지(주황빨강) / 출고 금지(자홍빨강) /
-    입출고 정지(진빨강) / 에러(보라) / 작업중(파랑). 붉은 계열은 모두 "정지" 를 뜻하고,
-    설비 에러만 보라로 빼 사람이 건 정지와 구분한다(크레인 포크는 에러 시 빨강).</a:t>
-            </a:r>
-          </a:p>
-        </p:txBody>
-      </p:sp>
-      <p:sp>
-        <p:nvSpPr>
-          <p:cNvPr id="6" name="TextBox 5"/>
-          <p:cNvSpPr txBox="1"/>
-          <p:nvPr/>
-        </p:nvSpPr>
-        <p:spPr>
-          <a:xfrm>
-            <a:off x="457200" y="6400800"/>
-            <a:ext cx="3657600" cy="320040"/>
-          </a:xfrm>
-          <a:prstGeom prst="rect">
-            <a:avLst/>
-          </a:prstGeom>
-          <a:noFill/>
-        </p:spPr>
-        <p:txBody>
-          <a:bodyPr wrap="square" anchor="t" lIns="45720" rIns="45720">
-            <a:spAutoFit/>
-          </a:bodyPr>
-          <a:lstStyle/>
-          <a:p>
-            <a:pPr algn="l"/>
-            <a:r>
-              <a:rPr sz="1000" b="0">
-                <a:solidFill>
-                  <a:srgbClr val="595959"/>
-                </a:solidFill>
-                <a:latin typeface="맑은 고딕"/>
-              </a:rPr>
-              <a:t>LG 화학 1동 ECS  |  화면설계서</a:t>
-            </a:r>
-          </a:p>
-        </p:txBody>
-      </p:sp>
-      <p:sp>
-        <p:nvSpPr>
-          <p:cNvPr id="7" name="TextBox 6"/>
-          <p:cNvSpPr txBox="1"/>
-          <p:nvPr/>
-        </p:nvSpPr>
-        <p:spPr>
-          <a:xfrm>
-            <a:off x="11155680" y="6400800"/>
-            <a:ext cx="731520" cy="320040"/>
-          </a:xfrm>
-          <a:prstGeom prst="rect">
-            <a:avLst/>
-          </a:prstGeom>
-          <a:noFill/>
-        </p:spPr>
-        <p:txBody>
-          <a:bodyPr wrap="square" anchor="t" lIns="45720" rIns="45720">
-            <a:spAutoFit/>
-          </a:bodyPr>
-          <a:lstStyle/>
-          <a:p>
-            <a:pPr algn="r"/>
-            <a:r>
-              <a:rPr sz="1000" b="0">
-                <a:solidFill>
-                  <a:srgbClr val="595959"/>
-                </a:solidFill>
-                <a:latin typeface="맑은 고딕"/>
-              </a:rPr>
-              <a:t>7</a:t>
-            </a:r>
-          </a:p>
-        </p:txBody>
-      </p:sp>
-    </p:spTree>
-  </p:cSld>
-  <p:clrMapOvr>
-    <a:masterClrMapping/>
-  </p:clrMapOvr>
-</p:sld>
-</file>
-
-<file path=ppt/slides/slide8.xml><?xml version="1.0" encoding="utf-8"?>
-<p:sld xmlns:a="http://schemas.openxmlformats.org/drawingml/2006/main" xmlns:p="http://schemas.openxmlformats.org/presentationml/2006/main" xmlns:r="http://schemas.openxmlformats.org/officeDocument/2006/relationships">
-  <p:cSld>
-    <p:spTree>
-      <p:nvGrpSpPr>
-        <p:cNvPr id="1" name=""/>
-        <p:cNvGrpSpPr/>
-        <p:nvPr/>
-      </p:nvGrpSpPr>
-      <p:grpSpPr/>
-      <p:sp>
-        <p:nvSpPr>
-          <p:cNvPr id="2" name="TextBox 1"/>
-          <p:cNvSpPr txBox="1"/>
-          <p:nvPr/>
-        </p:nvSpPr>
-        <p:spPr>
-          <a:xfrm>
-            <a:off x="457200" y="320040"/>
-            <a:ext cx="11247120" cy="640080"/>
-          </a:xfrm>
-          <a:prstGeom prst="rect">
-            <a:avLst/>
-          </a:prstGeom>
-          <a:noFill/>
-        </p:spPr>
-        <p:txBody>
-          <a:bodyPr wrap="square" anchor="ctr" lIns="45720" rIns="45720">
-            <a:spAutoFit/>
-          </a:bodyPr>
-          <a:lstStyle/>
-          <a:p>
-            <a:pPr algn="l"/>
-            <a:r>
-              <a:rPr sz="2600" b="1">
-                <a:solidFill>
-                  <a:srgbClr val="1E2761"/>
-                </a:solidFill>
-                <a:latin typeface="맑은 고딕"/>
-              </a:rPr>
-              <a:t>ECS&gt;뷰 - 작업정보</a:t>
-            </a:r>
-          </a:p>
-        </p:txBody>
-      </p:sp>
-      <p:sp>
-        <p:nvSpPr>
-          <p:cNvPr id="3" name="Rectangle 2"/>
-          <p:cNvSpPr/>
-          <p:nvPr/>
-        </p:nvSpPr>
-        <p:spPr>
-          <a:xfrm>
-            <a:off x="548640" y="1188720"/>
-            <a:ext cx="7680960" cy="5029200"/>
-          </a:xfrm>
-          <a:prstGeom prst="rect">
-            <a:avLst/>
-          </a:prstGeom>
-          <a:solidFill>
-            <a:srgbClr val="F7F8FA"/>
-          </a:solidFill>
-          <a:ln>
-            <a:solidFill>
-              <a:srgbClr val="C8CEDA"/>
-            </a:solidFill>
-          </a:ln>
-        </p:spPr>
-        <p:style>
-          <a:lnRef idx="1">
-            <a:schemeClr val="accent1"/>
-          </a:lnRef>
-          <a:fillRef idx="3">
-            <a:schemeClr val="accent1"/>
-          </a:fillRef>
-          <a:effectRef idx="2">
-            <a:schemeClr val="accent1"/>
-          </a:effectRef>
-          <a:fontRef idx="minor">
-            <a:schemeClr val="lt1"/>
-          </a:fontRef>
-        </p:style>
-        <p:txBody>
-          <a:bodyPr rtlCol="0" anchor="ctr"/>
-          <a:lstStyle/>
-          <a:p>
-            <a:pPr algn="ctr"/>
-          </a:p>
-        </p:txBody>
-      </p:sp>
-      <p:pic>
-        <p:nvPicPr>
-          <p:cNvPr id="4" name="Picture 3" descr="joblist_0.png"/>
-          <p:cNvPicPr>
-            <a:picLocks noChangeAspect="1"/>
-          </p:cNvPicPr>
-          <p:nvPr/>
-        </p:nvPicPr>
-        <p:blipFill>
-          <a:blip r:embed="rId2"/>
-          <a:stretch>
-            <a:fillRect/>
-          </a:stretch>
-        </p:blipFill>
-        <p:spPr>
-          <a:xfrm>
-            <a:off x="640080" y="1332515"/>
-            <a:ext cx="7498079" cy="4741608"/>
-          </a:xfrm>
-          <a:prstGeom prst="rect">
-            <a:avLst/>
-          </a:prstGeom>
-        </p:spPr>
-      </p:pic>
-      <p:sp>
-        <p:nvSpPr>
-          <p:cNvPr id="5" name="TextBox 4"/>
-          <p:cNvSpPr txBox="1"/>
-          <p:nvPr/>
-        </p:nvSpPr>
-        <p:spPr>
-          <a:xfrm>
-            <a:off x="8503920" y="1188720"/>
-            <a:ext cx="3291840" cy="5029200"/>
-          </a:xfrm>
-          <a:prstGeom prst="rect">
-            <a:avLst/>
-          </a:prstGeom>
-          <a:noFill/>
-        </p:spPr>
-        <p:txBody>
-          <a:bodyPr wrap="square" anchor="t" lIns="45720" rIns="45720">
-            <a:spAutoFit/>
-          </a:bodyPr>
-          <a:lstStyle/>
-          <a:p>
-            <a:pPr algn="l"/>
-            <a:r>
-              <a:rPr sz="1300" b="1">
-                <a:solidFill>
-                  <a:srgbClr val="1E2761"/>
-                </a:solidFill>
-                <a:latin typeface="맑은 고딕"/>
-              </a:rPr>
-              <a:t>■ 메뉴 Path</a:t>
-            </a:r>
-          </a:p>
-          <a:p>
-            <a:pPr algn="l"/>
-            <a:r>
-              <a:rPr sz="1100" b="0">
-                <a:solidFill>
-                  <a:srgbClr val="595959"/>
-                </a:solidFill>
-                <a:latin typeface="맑은 고딕"/>
-              </a:rPr>
-              <a:t>ECS ▷ 뷰 ▷ 작업정보</a:t>
-            </a:r>
-          </a:p>
-          <a:p>
-            <a:pPr algn="l"/>
-            <a:r>
-              <a:rPr sz="600" b="0">
-                <a:solidFill>
-                  <a:srgbClr val="595959"/>
-                </a:solidFill>
-                <a:latin typeface="맑은 고딕"/>
-              </a:rPr>
-              <a:t/>
-            </a:r>
-          </a:p>
-          <a:p>
-            <a:pPr algn="l"/>
-            <a:r>
-              <a:rPr sz="1300" b="1">
-                <a:solidFill>
-                  <a:srgbClr val="1E2761"/>
-                </a:solidFill>
-                <a:latin typeface="맑은 고딕"/>
-              </a:rPr>
-              <a:t>■ 프로그램 개요</a:t>
-            </a:r>
-          </a:p>
-          <a:p>
-            <a:pPr algn="l"/>
-            <a:r>
-              <a:rPr sz="1100" b="0">
-                <a:solidFill>
-                  <a:srgbClr val="595959"/>
-                </a:solidFill>
-                <a:latin typeface="맑은 고딕"/>
-              </a:rPr>
-              <a:t>진행 중 작업(JOB_MST)을 조회하고 작업상태/우선순위를 수정하거나 삭제·복사·완료 보고를 수행한다.</a:t>
-            </a:r>
-          </a:p>
-          <a:p>
-            <a:pPr algn="l"/>
-            <a:r>
-              <a:rPr sz="600" b="0">
-                <a:solidFill>
-                  <a:srgbClr val="595959"/>
-                </a:solidFill>
-                <a:latin typeface="맑은 고딕"/>
-              </a:rPr>
-              <a:t/>
-            </a:r>
-          </a:p>
-          <a:p>
-            <a:pPr algn="l"/>
-            <a:r>
-              <a:rPr sz="1300" b="1">
-                <a:solidFill>
-                  <a:srgbClr val="1E2761"/>
-                </a:solidFill>
-                <a:latin typeface="맑은 고딕"/>
-              </a:rPr>
-              <a:t>■ 특기사항</a:t>
-            </a:r>
-          </a:p>
-          <a:p>
-            <a:pPr algn="l"/>
-            <a:r>
-              <a:rPr sz="1000" b="0">
-                <a:solidFill>
-                  <a:srgbClr val="595959"/>
-                </a:solidFill>
-                <a:latin typeface="맑은 고딕"/>
-              </a:rPr>
-              <a:t>· [자동 갱신] 을 켜면 주기적으로 목록을 다시 읽는다.</a:t>
-            </a:r>
-          </a:p>
-          <a:p>
-            <a:pPr algn="l"/>
-            <a:r>
-              <a:rPr sz="1000" b="0">
-                <a:solidFill>
-                  <a:srgbClr val="595959"/>
-                </a:solidFill>
-                <a:latin typeface="맑은 고딕"/>
-              </a:rPr>
-              <a:t>· [CV 도착보고]/[SC 완료보고] 는 설비 신호가 유실됐을 때 사람이 대신 보고하는 기능이다.</a:t>
-            </a:r>
-          </a:p>
-          <a:p>
-            <a:pPr algn="l"/>
-            <a:r>
-              <a:rPr sz="1000" b="0">
-                <a:solidFill>
-                  <a:srgbClr val="595959"/>
-                </a:solidFill>
-                <a:latin typeface="맑은 고딕"/>
-              </a:rPr>
-              <a:t>· [삭제] 는 작업을 지우고, 설비에 남은 지시는 설비 대화상자의 [지시 삭제] 로 정리한다.</a:t>
-            </a:r>
-          </a:p>
-        </p:txBody>
-      </p:sp>
-      <p:sp>
-        <p:nvSpPr>
-          <p:cNvPr id="6" name="TextBox 5"/>
-          <p:cNvSpPr txBox="1"/>
-          <p:nvPr/>
-        </p:nvSpPr>
-        <p:spPr>
-          <a:xfrm>
-            <a:off x="457200" y="6400800"/>
-            <a:ext cx="3657600" cy="320040"/>
-          </a:xfrm>
-          <a:prstGeom prst="rect">
-            <a:avLst/>
-          </a:prstGeom>
-          <a:noFill/>
-        </p:spPr>
-        <p:txBody>
-          <a:bodyPr wrap="square" anchor="t" lIns="45720" rIns="45720">
-            <a:spAutoFit/>
-          </a:bodyPr>
-          <a:lstStyle/>
-          <a:p>
-            <a:pPr algn="l"/>
-            <a:r>
-              <a:rPr sz="1000" b="0">
-                <a:solidFill>
-                  <a:srgbClr val="595959"/>
-                </a:solidFill>
-                <a:latin typeface="맑은 고딕"/>
-              </a:rPr>
-              <a:t>LG 화학 1동 ECS  |  화면설계서</a:t>
-            </a:r>
-          </a:p>
-        </p:txBody>
-      </p:sp>
-      <p:sp>
-        <p:nvSpPr>
-          <p:cNvPr id="7" name="TextBox 6"/>
-          <p:cNvSpPr txBox="1"/>
-          <p:nvPr/>
-        </p:nvSpPr>
-        <p:spPr>
-          <a:xfrm>
-            <a:off x="11155680" y="6400800"/>
-            <a:ext cx="731520" cy="320040"/>
-          </a:xfrm>
-          <a:prstGeom prst="rect">
-            <a:avLst/>
-          </a:prstGeom>
-          <a:noFill/>
-        </p:spPr>
-        <p:txBody>
-          <a:bodyPr wrap="square" anchor="t" lIns="45720" rIns="45720">
-            <a:spAutoFit/>
-          </a:bodyPr>
-          <a:lstStyle/>
-          <a:p>
-            <a:pPr algn="r"/>
-            <a:r>
-              <a:rPr sz="1000" b="0">
-                <a:solidFill>
-                  <a:srgbClr val="595959"/>
-                </a:solidFill>
-                <a:latin typeface="맑은 고딕"/>
-              </a:rPr>
-              <a:t>8</a:t>
-            </a:r>
-          </a:p>
-        </p:txBody>
-      </p:sp>
-    </p:spTree>
-  </p:cSld>
-  <p:clrMapOvr>
-    <a:masterClrMapping/>
-  </p:clrMapOvr>
-</p:sld>
-</file>
-
-<file path=ppt/slides/slide9.xml><?xml version="1.0" encoding="utf-8"?>
-<p:sld xmlns:a="http://schemas.openxmlformats.org/drawingml/2006/main" xmlns:p="http://schemas.openxmlformats.org/presentationml/2006/main" xmlns:r="http://schemas.openxmlformats.org/officeDocument/2006/relationships">
-  <p:cSld>
-    <p:spTree>
-      <p:nvGrpSpPr>
-        <p:cNvPr id="1" name=""/>
-        <p:cNvGrpSpPr/>
-        <p:nvPr/>
-      </p:nvGrpSpPr>
-      <p:grpSpPr/>
-      <p:sp>
-        <p:nvSpPr>
-          <p:cNvPr id="2" name="TextBox 1"/>
-          <p:cNvSpPr txBox="1"/>
-          <p:nvPr/>
-        </p:nvSpPr>
-        <p:spPr>
-          <a:xfrm>
-            <a:off x="457200" y="320040"/>
-            <a:ext cx="11247120" cy="640080"/>
-          </a:xfrm>
-          <a:prstGeom prst="rect">
-            <a:avLst/>
-          </a:prstGeom>
-          <a:noFill/>
-        </p:spPr>
-        <p:txBody>
-          <a:bodyPr wrap="square" anchor="ctr" lIns="45720" rIns="45720">
-            <a:spAutoFit/>
-          </a:bodyPr>
-          <a:lstStyle/>
-          <a:p>
-            <a:pPr algn="l"/>
-            <a:r>
-              <a:rPr sz="2600" b="1">
-                <a:solidFill>
-                  <a:srgbClr val="1E2761"/>
-                </a:solidFill>
-                <a:latin typeface="맑은 고딕"/>
-              </a:rPr>
-              <a:t>ECS&gt;뷰 - 찾기</a:t>
-            </a:r>
-          </a:p>
-        </p:txBody>
-      </p:sp>
-      <p:sp>
-        <p:nvSpPr>
-          <p:cNvPr id="3" name="Rectangle 2"/>
-          <p:cNvSpPr/>
-          <p:nvPr/>
-        </p:nvSpPr>
-        <p:spPr>
-          <a:xfrm>
-            <a:off x="548640" y="1188720"/>
-            <a:ext cx="7680960" cy="5029200"/>
-          </a:xfrm>
-          <a:prstGeom prst="rect">
-            <a:avLst/>
-          </a:prstGeom>
-          <a:solidFill>
-            <a:srgbClr val="F7F8FA"/>
-          </a:solidFill>
-          <a:ln>
-            <a:solidFill>
-              <a:srgbClr val="C8CEDA"/>
-            </a:solidFill>
-          </a:ln>
-        </p:spPr>
-        <p:style>
-          <a:lnRef idx="1">
-            <a:schemeClr val="accent1"/>
-          </a:lnRef>
-          <a:fillRef idx="3">
-            <a:schemeClr val="accent1"/>
-          </a:fillRef>
-          <a:effectRef idx="2">
-            <a:schemeClr val="accent1"/>
-          </a:effectRef>
-          <a:fontRef idx="minor">
-            <a:schemeClr val="lt1"/>
-          </a:fontRef>
-        </p:style>
-        <p:txBody>
-          <a:bodyPr rtlCol="0" anchor="ctr"/>
-          <a:lstStyle/>
-          <a:p>
-            <a:pPr algn="ctr"/>
-          </a:p>
-        </p:txBody>
-      </p:sp>
-      <p:pic>
-        <p:nvPicPr>
-          <p:cNvPr id="4" name="Picture 3" descr="search_0.png"/>
-          <p:cNvPicPr>
-            <a:picLocks noChangeAspect="1"/>
-          </p:cNvPicPr>
-          <p:nvPr/>
-        </p:nvPicPr>
-        <p:blipFill>
-          <a:blip r:embed="rId2"/>
-          <a:stretch>
-            <a:fillRect/>
-          </a:stretch>
-        </p:blipFill>
-        <p:spPr>
-          <a:xfrm>
-            <a:off x="640080" y="2937670"/>
-            <a:ext cx="7498079" cy="1531298"/>
-          </a:xfrm>
-          <a:prstGeom prst="rect">
-            <a:avLst/>
-          </a:prstGeom>
-        </p:spPr>
-      </p:pic>
-      <p:sp>
-        <p:nvSpPr>
-          <p:cNvPr id="5" name="TextBox 4"/>
-          <p:cNvSpPr txBox="1"/>
-          <p:nvPr/>
-        </p:nvSpPr>
-        <p:spPr>
-          <a:xfrm>
-            <a:off x="8503920" y="1188720"/>
-            <a:ext cx="3291840" cy="5029200"/>
-          </a:xfrm>
-          <a:prstGeom prst="rect">
-            <a:avLst/>
-          </a:prstGeom>
-          <a:noFill/>
-        </p:spPr>
-        <p:txBody>
-          <a:bodyPr wrap="square" anchor="t" lIns="45720" rIns="45720">
-            <a:spAutoFit/>
-          </a:bodyPr>
-          <a:lstStyle/>
-          <a:p>
-            <a:pPr algn="l"/>
-            <a:r>
-              <a:rPr sz="1300" b="1">
-                <a:solidFill>
-                  <a:srgbClr val="1E2761"/>
-                </a:solidFill>
-                <a:latin typeface="맑은 고딕"/>
-              </a:rPr>
-              <a:t>■ 메뉴 Path</a:t>
-            </a:r>
-          </a:p>
-          <a:p>
-            <a:pPr algn="l"/>
-            <a:r>
-              <a:rPr sz="1100" b="0">
-                <a:solidFill>
-                  <a:srgbClr val="595959"/>
-                </a:solidFill>
-                <a:latin typeface="맑은 고딕"/>
-              </a:rPr>
-              <a:t>ECS ▷ 뷰 ▷ 찾기</a:t>
-            </a:r>
-          </a:p>
-          <a:p>
-            <a:pPr algn="l"/>
-            <a:r>
-              <a:rPr sz="600" b="0">
-                <a:solidFill>
-                  <a:srgbClr val="595959"/>
-                </a:solidFill>
-                <a:latin typeface="맑은 고딕"/>
-              </a:rPr>
-              <a:t/>
-            </a:r>
-          </a:p>
-          <a:p>
-            <a:pPr algn="l"/>
-            <a:r>
-              <a:rPr sz="1300" b="1">
-                <a:solidFill>
-                  <a:srgbClr val="1E2761"/>
-                </a:solidFill>
-                <a:latin typeface="맑은 고딕"/>
-              </a:rPr>
-              <a:t>■ 프로그램 개요</a:t>
-            </a:r>
-          </a:p>
-          <a:p>
-            <a:pPr algn="l"/>
-            <a:r>
-              <a:rPr sz="1100" b="0">
-                <a:solidFill>
-                  <a:srgbClr val="595959"/>
-                </a:solidFill>
-                <a:latin typeface="맑은 고딕"/>
-              </a:rPr>
-              <a:t>작업번호를 입력하면 그 화물이 있는 트랙/설비를 메인 화면에서 깜빡여 보여 준다(5초).</a:t>
-            </a:r>
-          </a:p>
-        </p:txBody>
-      </p:sp>
-      <p:sp>
-        <p:nvSpPr>
-          <p:cNvPr id="6" name="TextBox 5"/>
-          <p:cNvSpPr txBox="1"/>
-          <p:nvPr/>
-        </p:nvSpPr>
-        <p:spPr>
-          <a:xfrm>
-            <a:off x="457200" y="6400800"/>
-            <a:ext cx="3657600" cy="320040"/>
-          </a:xfrm>
-          <a:prstGeom prst="rect">
-            <a:avLst/>
-          </a:prstGeom>
-          <a:noFill/>
-        </p:spPr>
-        <p:txBody>
-          <a:bodyPr wrap="square" anchor="t" lIns="45720" rIns="45720">
-            <a:spAutoFit/>
-          </a:bodyPr>
-          <a:lstStyle/>
-          <a:p>
-            <a:pPr algn="l"/>
-            <a:r>
-              <a:rPr sz="1000" b="0">
-                <a:solidFill>
-                  <a:srgbClr val="595959"/>
-                </a:solidFill>
-                <a:latin typeface="맑은 고딕"/>
-              </a:rPr>
-              <a:t>LG 화학 1동 ECS  |  화면설계서</a:t>
-            </a:r>
-          </a:p>
-        </p:txBody>
-      </p:sp>
-      <p:sp>
-        <p:nvSpPr>
-          <p:cNvPr id="7" name="TextBox 6"/>
-          <p:cNvSpPr txBox="1"/>
-          <p:nvPr/>
-        </p:nvSpPr>
-        <p:spPr>
-          <a:xfrm>
-            <a:off x="11155680" y="6400800"/>
-            <a:ext cx="731520" cy="320040"/>
-          </a:xfrm>
-          <a:prstGeom prst="rect">
-            <a:avLst/>
-          </a:prstGeom>
-          <a:noFill/>
-        </p:spPr>
-        <p:txBody>
-          <a:bodyPr wrap="square" anchor="t" lIns="45720" rIns="45720">
+          <a:bodyPr wrap="square" lIns="45720" rIns="45720" anchor="t">
             <a:spAutoFit/>
           </a:bodyPr>
           <a:lstStyle/>

--- a/docs/산출물_20260909/06_ECS_화면설계서.pptx
+++ b/docs/산출물_20260909/06_ECS_화면설계서.pptx
@@ -323,7 +323,7 @@
           <a:p>
             <a:fld id="{5BCAD085-E8A6-8845-BD4E-CB4CCA059FC4}" type="datetimeFigureOut">
               <a:rPr lang="en-US" smtClean="0"/>
-              <a:t>9/9/2026</a:t>
+              <a:t>9/10/2026</a:t>
             </a:fld>
             <a:endParaRPr lang="en-US"/>
           </a:p>
@@ -491,7 +491,7 @@
           <a:p>
             <a:fld id="{5BCAD085-E8A6-8845-BD4E-CB4CCA059FC4}" type="datetimeFigureOut">
               <a:rPr lang="en-US" smtClean="0"/>
-              <a:t>9/9/2026</a:t>
+              <a:t>9/10/2026</a:t>
             </a:fld>
             <a:endParaRPr lang="en-US"/>
           </a:p>
@@ -669,7 +669,7 @@
           <a:p>
             <a:fld id="{5BCAD085-E8A6-8845-BD4E-CB4CCA059FC4}" type="datetimeFigureOut">
               <a:rPr lang="en-US" smtClean="0"/>
-              <a:t>9/9/2026</a:t>
+              <a:t>9/10/2026</a:t>
             </a:fld>
             <a:endParaRPr lang="en-US"/>
           </a:p>
@@ -837,7 +837,7 @@
           <a:p>
             <a:fld id="{5BCAD085-E8A6-8845-BD4E-CB4CCA059FC4}" type="datetimeFigureOut">
               <a:rPr lang="en-US" smtClean="0"/>
-              <a:t>9/9/2026</a:t>
+              <a:t>9/10/2026</a:t>
             </a:fld>
             <a:endParaRPr lang="en-US"/>
           </a:p>
@@ -1082,7 +1082,7 @@
           <a:p>
             <a:fld id="{5BCAD085-E8A6-8845-BD4E-CB4CCA059FC4}" type="datetimeFigureOut">
               <a:rPr lang="en-US" smtClean="0"/>
-              <a:t>9/9/2026</a:t>
+              <a:t>9/10/2026</a:t>
             </a:fld>
             <a:endParaRPr lang="en-US"/>
           </a:p>
@@ -1367,7 +1367,7 @@
           <a:p>
             <a:fld id="{5BCAD085-E8A6-8845-BD4E-CB4CCA059FC4}" type="datetimeFigureOut">
               <a:rPr lang="en-US" smtClean="0"/>
-              <a:t>9/9/2026</a:t>
+              <a:t>9/10/2026</a:t>
             </a:fld>
             <a:endParaRPr lang="en-US"/>
           </a:p>
@@ -1786,7 +1786,7 @@
           <a:p>
             <a:fld id="{5BCAD085-E8A6-8845-BD4E-CB4CCA059FC4}" type="datetimeFigureOut">
               <a:rPr lang="en-US" smtClean="0"/>
-              <a:t>9/9/2026</a:t>
+              <a:t>9/10/2026</a:t>
             </a:fld>
             <a:endParaRPr lang="en-US"/>
           </a:p>
@@ -1903,7 +1903,7 @@
           <a:p>
             <a:fld id="{5BCAD085-E8A6-8845-BD4E-CB4CCA059FC4}" type="datetimeFigureOut">
               <a:rPr lang="en-US" smtClean="0"/>
-              <a:t>9/9/2026</a:t>
+              <a:t>9/10/2026</a:t>
             </a:fld>
             <a:endParaRPr lang="en-US"/>
           </a:p>
@@ -1998,7 +1998,7 @@
           <a:p>
             <a:fld id="{5BCAD085-E8A6-8845-BD4E-CB4CCA059FC4}" type="datetimeFigureOut">
               <a:rPr lang="en-US" smtClean="0"/>
-              <a:t>9/9/2026</a:t>
+              <a:t>9/10/2026</a:t>
             </a:fld>
             <a:endParaRPr lang="en-US"/>
           </a:p>
@@ -2273,7 +2273,7 @@
           <a:p>
             <a:fld id="{5BCAD085-E8A6-8845-BD4E-CB4CCA059FC4}" type="datetimeFigureOut">
               <a:rPr lang="en-US" smtClean="0"/>
-              <a:t>9/9/2026</a:t>
+              <a:t>9/10/2026</a:t>
             </a:fld>
             <a:endParaRPr lang="en-US"/>
           </a:p>
@@ -2525,7 +2525,7 @@
           <a:p>
             <a:fld id="{5BCAD085-E8A6-8845-BD4E-CB4CCA059FC4}" type="datetimeFigureOut">
               <a:rPr lang="en-US" smtClean="0"/>
-              <a:t>9/9/2026</a:t>
+              <a:t>9/10/2026</a:t>
             </a:fld>
             <a:endParaRPr lang="en-US"/>
           </a:p>
@@ -2736,7 +2736,7 @@
           <a:p>
             <a:fld id="{5BCAD085-E8A6-8845-BD4E-CB4CCA059FC4}" type="datetimeFigureOut">
               <a:rPr lang="en-US" smtClean="0"/>
-              <a:t>9/9/2026</a:t>
+              <a:t>9/10/2026</a:t>
             </a:fld>
             <a:endParaRPr lang="en-US"/>
           </a:p>
@@ -3498,7 +3498,7 @@
                 </a:solidFill>
                 <a:latin typeface="맑은 고딕"/>
               </a:rPr>
-              <a:t>· 상세정보 판넬이 켜져 있으면 메인 화면에서 설비를 클릭했을 때 팝업 대신 이 판넬의 해당 탭으로 바뀐다.</a:t>
+              <a:t>· 메인 화면에서 설비를 클릭하면 상세정보 판넬의 해당 탭이 그 설비로 바뀌고, 설비 대화상자도 함께 뜬다. (2026-09-10 변경 - 종전에는 판넬만 바뀌고 대화상자가 뜨지 않았다)</a:t>
             </a:r>
           </a:p>
         </p:txBody>
@@ -3859,6 +3859,36 @@
           </a:p>
         </p:txBody>
       </p:sp>
+      <p:pic>
+        <p:nvPicPr>
+          <p:cNvPr id="8" name="그림 7">
+            <a:extLst>
+              <a:ext uri="{FF2B5EF4-FFF2-40B4-BE49-F238E27FC236}">
+                <a16:creationId xmlns:a16="http://schemas.microsoft.com/office/drawing/2014/main" id="{566B90D6-1C18-5244-4956-7D7B6D78FB5B}"/>
+              </a:ext>
+            </a:extLst>
+          </p:cNvPr>
+          <p:cNvPicPr>
+            <a:picLocks noChangeAspect="1"/>
+          </p:cNvPicPr>
+          <p:nvPr/>
+        </p:nvPicPr>
+        <p:blipFill>
+          <a:blip r:embed="rId2"/>
+          <a:stretch>
+            <a:fillRect/>
+          </a:stretch>
+        </p:blipFill>
+        <p:spPr>
+          <a:xfrm>
+            <a:off x="3865172" y="3000315"/>
+            <a:ext cx="1047896" cy="857370"/>
+          </a:xfrm>
+          <a:prstGeom prst="rect">
+            <a:avLst/>
+          </a:prstGeom>
+        </p:spPr>
+      </p:pic>
     </p:spTree>
   </p:cSld>
   <p:clrMapOvr>
@@ -6963,7 +6993,7 @@
         <p:spPr>
           <a:xfrm>
             <a:off x="8503920" y="1188720"/>
-            <a:ext cx="3291840" cy="5029200"/>
+            <a:ext cx="3291840" cy="2785378"/>
           </a:xfrm>
           <a:prstGeom prst="rect">
             <a:avLst/>
@@ -6978,30 +7008,99 @@
           <a:p>
             <a:pPr algn="l"/>
             <a:r>
-              <a:rPr sz="1300" b="1">
+              <a:rPr sz="1300" b="1" dirty="0">
                 <a:solidFill>
                   <a:srgbClr val="1E2761"/>
                 </a:solidFill>
                 <a:latin typeface="맑은 고딕"/>
               </a:rPr>
-              <a:t>■ 메뉴 Path</a:t>
-            </a:r>
-          </a:p>
-          <a:p>
-            <a:pPr algn="l"/>
-            <a:r>
-              <a:rPr sz="1100" b="0">
-                <a:solidFill>
-                  <a:srgbClr val="595959"/>
-                </a:solidFill>
-                <a:latin typeface="맑은 고딕"/>
-              </a:rPr>
-              <a:t>메인 화면에서 컨베이어 클릭</a:t>
-            </a:r>
-          </a:p>
-          <a:p>
-            <a:pPr algn="l"/>
-            <a:endParaRPr sz="1100" b="0">
+              <a:t>■ </a:t>
+            </a:r>
+            <a:r>
+              <a:rPr sz="1300" b="1" dirty="0" err="1">
+                <a:solidFill>
+                  <a:srgbClr val="1E2761"/>
+                </a:solidFill>
+                <a:latin typeface="맑은 고딕"/>
+              </a:rPr>
+              <a:t>메뉴</a:t>
+            </a:r>
+            <a:r>
+              <a:rPr sz="1300" b="1" dirty="0">
+                <a:solidFill>
+                  <a:srgbClr val="1E2761"/>
+                </a:solidFill>
+                <a:latin typeface="맑은 고딕"/>
+              </a:rPr>
+              <a:t> Path</a:t>
+            </a:r>
+          </a:p>
+          <a:p>
+            <a:pPr algn="l"/>
+            <a:r>
+              <a:rPr sz="1100" b="0" dirty="0" err="1">
+                <a:solidFill>
+                  <a:srgbClr val="595959"/>
+                </a:solidFill>
+                <a:latin typeface="맑은 고딕"/>
+              </a:rPr>
+              <a:t>메인</a:t>
+            </a:r>
+            <a:r>
+              <a:rPr sz="1100" b="0" dirty="0">
+                <a:solidFill>
+                  <a:srgbClr val="595959"/>
+                </a:solidFill>
+                <a:latin typeface="맑은 고딕"/>
+              </a:rPr>
+              <a:t> </a:t>
+            </a:r>
+            <a:r>
+              <a:rPr sz="1100" b="0" dirty="0" err="1">
+                <a:solidFill>
+                  <a:srgbClr val="595959"/>
+                </a:solidFill>
+                <a:latin typeface="맑은 고딕"/>
+              </a:rPr>
+              <a:t>화면에서</a:t>
+            </a:r>
+            <a:r>
+              <a:rPr sz="1100" b="0" dirty="0">
+                <a:solidFill>
+                  <a:srgbClr val="595959"/>
+                </a:solidFill>
+                <a:latin typeface="맑은 고딕"/>
+              </a:rPr>
+              <a:t> </a:t>
+            </a:r>
+            <a:r>
+              <a:rPr sz="1100" b="0" dirty="0" err="1">
+                <a:solidFill>
+                  <a:srgbClr val="595959"/>
+                </a:solidFill>
+                <a:latin typeface="맑은 고딕"/>
+              </a:rPr>
+              <a:t>컨베이어</a:t>
+            </a:r>
+            <a:r>
+              <a:rPr sz="1100" b="0" dirty="0">
+                <a:solidFill>
+                  <a:srgbClr val="595959"/>
+                </a:solidFill>
+                <a:latin typeface="맑은 고딕"/>
+              </a:rPr>
+              <a:t> </a:t>
+            </a:r>
+            <a:r>
+              <a:rPr sz="1100" b="0" dirty="0" err="1">
+                <a:solidFill>
+                  <a:srgbClr val="595959"/>
+                </a:solidFill>
+                <a:latin typeface="맑은 고딕"/>
+              </a:rPr>
+              <a:t>클릭</a:t>
+            </a:r>
+            <a:endParaRPr sz="1100" b="0" dirty="0">
               <a:solidFill>
                 <a:srgbClr val="595959"/>
               </a:solidFill>
@@ -7010,31 +7109,7 @@
           </a:p>
           <a:p>
             <a:pPr algn="l"/>
-            <a:r>
-              <a:rPr sz="1300" b="1">
-                <a:solidFill>
-                  <a:srgbClr val="1E2761"/>
-                </a:solidFill>
-                <a:latin typeface="맑은 고딕"/>
-              </a:rPr>
-              <a:t>■ 프로그램 개요</a:t>
-            </a:r>
-          </a:p>
-          <a:p>
-            <a:pPr algn="l"/>
-            <a:r>
-              <a:rPr sz="1100" b="0">
-                <a:solidFill>
-                  <a:srgbClr val="595959"/>
-                </a:solidFill>
-                <a:latin typeface="맑은 고딕"/>
-              </a:rPr>
-              <a:t>컨베이어(트랙 2개)의 PLC 신호와 작업 정보를 보고, 작업번호 쓰기/삭제/복사/잘라내기/붙여넣기/MZ 이동 등을 수행한다.</a:t>
-            </a:r>
-          </a:p>
-          <a:p>
-            <a:pPr algn="l"/>
-            <a:endParaRPr sz="1100" b="0">
+            <a:endParaRPr sz="1100" b="0" dirty="0">
               <a:solidFill>
                 <a:srgbClr val="595959"/>
               </a:solidFill>
@@ -7044,37 +7119,1171 @@
           <a:p>
             <a:pPr algn="l"/>
             <a:r>
-              <a:rPr sz="1300" b="1">
+              <a:rPr sz="1300" b="1" dirty="0">
                 <a:solidFill>
                   <a:srgbClr val="1E2761"/>
                 </a:solidFill>
                 <a:latin typeface="맑은 고딕"/>
               </a:rPr>
-              <a:t>■ 특기사항</a:t>
-            </a:r>
-          </a:p>
-          <a:p>
-            <a:pPr algn="l"/>
-            <a:r>
-              <a:rPr sz="1000" b="0">
-                <a:solidFill>
-                  <a:srgbClr val="595959"/>
-                </a:solidFill>
-                <a:latin typeface="맑은 고딕"/>
-              </a:rPr>
-              <a:t>· [작업 적기] 는 그 트랙에 작업번호·도착지를 써 넣는다. 설비의 PLC 트래킹(R영역)에도 함께 기록되므로, 설비에 놓여 있는데 시스템이 모르는 화물을 인수시킬 때 쓴다.</a:t>
-            </a:r>
-          </a:p>
-          <a:p>
-            <a:pPr algn="l"/>
-            <a:r>
-              <a:rPr sz="1000" b="0">
-                <a:solidFill>
-                  <a:srgbClr val="595959"/>
-                </a:solidFill>
-                <a:latin typeface="맑은 고딕"/>
-              </a:rPr>
-              <a:t>· 예외 처리 그룹의 [H/S 배출] 은 출고 H/S 에 놓인 작업 없는 화물을 출고대로 내보낸다. 비상 확인창이 뜨며, 반자동 출고 작업을 만들어 상위 보고 없이 처리한다(아래 예외 처리 참조).</a:t>
+              <a:t>■ </a:t>
+            </a:r>
+            <a:r>
+              <a:rPr sz="1300" b="1" dirty="0" err="1">
+                <a:solidFill>
+                  <a:srgbClr val="1E2761"/>
+                </a:solidFill>
+                <a:latin typeface="맑은 고딕"/>
+              </a:rPr>
+              <a:t>프로그램</a:t>
+            </a:r>
+            <a:r>
+              <a:rPr sz="1300" b="1" dirty="0">
+                <a:solidFill>
+                  <a:srgbClr val="1E2761"/>
+                </a:solidFill>
+                <a:latin typeface="맑은 고딕"/>
+              </a:rPr>
+              <a:t> </a:t>
+            </a:r>
+            <a:r>
+              <a:rPr sz="1300" b="1" dirty="0" err="1">
+                <a:solidFill>
+                  <a:srgbClr val="1E2761"/>
+                </a:solidFill>
+                <a:latin typeface="맑은 고딕"/>
+              </a:rPr>
+              <a:t>개요</a:t>
+            </a:r>
+            <a:endParaRPr sz="1300" b="1" dirty="0">
+              <a:solidFill>
+                <a:srgbClr val="1E2761"/>
+              </a:solidFill>
+              <a:latin typeface="맑은 고딕"/>
+            </a:endParaRPr>
+          </a:p>
+          <a:p>
+            <a:pPr algn="l"/>
+            <a:r>
+              <a:rPr sz="1100" b="0" dirty="0" err="1">
+                <a:solidFill>
+                  <a:srgbClr val="595959"/>
+                </a:solidFill>
+                <a:latin typeface="맑은 고딕"/>
+              </a:rPr>
+              <a:t>컨베이어</a:t>
+            </a:r>
+            <a:r>
+              <a:rPr sz="1100" b="0" dirty="0">
+                <a:solidFill>
+                  <a:srgbClr val="595959"/>
+                </a:solidFill>
+                <a:latin typeface="맑은 고딕"/>
+              </a:rPr>
+              <a:t>(</a:t>
+            </a:r>
+            <a:r>
+              <a:rPr sz="1100" b="0" dirty="0" err="1">
+                <a:solidFill>
+                  <a:srgbClr val="595959"/>
+                </a:solidFill>
+                <a:latin typeface="맑은 고딕"/>
+              </a:rPr>
+              <a:t>트랙</a:t>
+            </a:r>
+            <a:r>
+              <a:rPr sz="1100" b="0" dirty="0">
+                <a:solidFill>
+                  <a:srgbClr val="595959"/>
+                </a:solidFill>
+                <a:latin typeface="맑은 고딕"/>
+              </a:rPr>
+              <a:t> 2개)의 PLC </a:t>
+            </a:r>
+            <a:r>
+              <a:rPr sz="1100" b="0" dirty="0" err="1">
+                <a:solidFill>
+                  <a:srgbClr val="595959"/>
+                </a:solidFill>
+                <a:latin typeface="맑은 고딕"/>
+              </a:rPr>
+              <a:t>신호와</a:t>
+            </a:r>
+            <a:r>
+              <a:rPr sz="1100" b="0" dirty="0">
+                <a:solidFill>
+                  <a:srgbClr val="595959"/>
+                </a:solidFill>
+                <a:latin typeface="맑은 고딕"/>
+              </a:rPr>
+              <a:t> </a:t>
+            </a:r>
+            <a:r>
+              <a:rPr sz="1100" b="0" dirty="0" err="1">
+                <a:solidFill>
+                  <a:srgbClr val="595959"/>
+                </a:solidFill>
+                <a:latin typeface="맑은 고딕"/>
+              </a:rPr>
+              <a:t>작업</a:t>
+            </a:r>
+            <a:r>
+              <a:rPr sz="1100" b="0" dirty="0">
+                <a:solidFill>
+                  <a:srgbClr val="595959"/>
+                </a:solidFill>
+                <a:latin typeface="맑은 고딕"/>
+              </a:rPr>
+              <a:t> </a:t>
+            </a:r>
+            <a:r>
+              <a:rPr sz="1100" b="0" dirty="0" err="1">
+                <a:solidFill>
+                  <a:srgbClr val="595959"/>
+                </a:solidFill>
+                <a:latin typeface="맑은 고딕"/>
+              </a:rPr>
+              <a:t>정보를</a:t>
+            </a:r>
+            <a:r>
+              <a:rPr sz="1100" b="0" dirty="0">
+                <a:solidFill>
+                  <a:srgbClr val="595959"/>
+                </a:solidFill>
+                <a:latin typeface="맑은 고딕"/>
+              </a:rPr>
+              <a:t> </a:t>
+            </a:r>
+            <a:r>
+              <a:rPr sz="1100" b="0" dirty="0" err="1">
+                <a:solidFill>
+                  <a:srgbClr val="595959"/>
+                </a:solidFill>
+                <a:latin typeface="맑은 고딕"/>
+              </a:rPr>
+              <a:t>보고</a:t>
+            </a:r>
+            <a:r>
+              <a:rPr sz="1100" b="0" dirty="0">
+                <a:solidFill>
+                  <a:srgbClr val="595959"/>
+                </a:solidFill>
+                <a:latin typeface="맑은 고딕"/>
+              </a:rPr>
+              <a:t>, </a:t>
+            </a:r>
+            <a:r>
+              <a:rPr sz="1100" b="0" dirty="0" err="1">
+                <a:solidFill>
+                  <a:srgbClr val="595959"/>
+                </a:solidFill>
+                <a:latin typeface="맑은 고딕"/>
+              </a:rPr>
+              <a:t>작업번호</a:t>
+            </a:r>
+            <a:r>
+              <a:rPr sz="1100" b="0" dirty="0">
+                <a:solidFill>
+                  <a:srgbClr val="595959"/>
+                </a:solidFill>
+                <a:latin typeface="맑은 고딕"/>
+              </a:rPr>
+              <a:t> </a:t>
+            </a:r>
+            <a:r>
+              <a:rPr sz="1100" b="0" dirty="0" err="1">
+                <a:solidFill>
+                  <a:srgbClr val="595959"/>
+                </a:solidFill>
+                <a:latin typeface="맑은 고딕"/>
+              </a:rPr>
+              <a:t>쓰기</a:t>
+            </a:r>
+            <a:r>
+              <a:rPr sz="1100" b="0" dirty="0">
+                <a:solidFill>
+                  <a:srgbClr val="595959"/>
+                </a:solidFill>
+                <a:latin typeface="맑은 고딕"/>
+              </a:rPr>
+              <a:t>/</a:t>
+            </a:r>
+            <a:r>
+              <a:rPr sz="1100" b="0" dirty="0" err="1">
+                <a:solidFill>
+                  <a:srgbClr val="595959"/>
+                </a:solidFill>
+                <a:latin typeface="맑은 고딕"/>
+              </a:rPr>
+              <a:t>삭제</a:t>
+            </a:r>
+            <a:r>
+              <a:rPr sz="1100" b="0" dirty="0">
+                <a:solidFill>
+                  <a:srgbClr val="595959"/>
+                </a:solidFill>
+                <a:latin typeface="맑은 고딕"/>
+              </a:rPr>
+              <a:t>/</a:t>
+            </a:r>
+            <a:r>
+              <a:rPr sz="1100" b="0" dirty="0" err="1">
+                <a:solidFill>
+                  <a:srgbClr val="595959"/>
+                </a:solidFill>
+                <a:latin typeface="맑은 고딕"/>
+              </a:rPr>
+              <a:t>복사</a:t>
+            </a:r>
+            <a:r>
+              <a:rPr sz="1100" b="0" dirty="0">
+                <a:solidFill>
+                  <a:srgbClr val="595959"/>
+                </a:solidFill>
+                <a:latin typeface="맑은 고딕"/>
+              </a:rPr>
+              <a:t>/</a:t>
+            </a:r>
+            <a:r>
+              <a:rPr sz="1100" b="0" dirty="0" err="1">
+                <a:solidFill>
+                  <a:srgbClr val="595959"/>
+                </a:solidFill>
+                <a:latin typeface="맑은 고딕"/>
+              </a:rPr>
+              <a:t>잘라내기</a:t>
+            </a:r>
+            <a:r>
+              <a:rPr sz="1100" b="0" dirty="0">
+                <a:solidFill>
+                  <a:srgbClr val="595959"/>
+                </a:solidFill>
+                <a:latin typeface="맑은 고딕"/>
+              </a:rPr>
+              <a:t>/</a:t>
+            </a:r>
+            <a:r>
+              <a:rPr sz="1100" b="0" dirty="0" err="1">
+                <a:solidFill>
+                  <a:srgbClr val="595959"/>
+                </a:solidFill>
+                <a:latin typeface="맑은 고딕"/>
+              </a:rPr>
+              <a:t>붙여넣기</a:t>
+            </a:r>
+            <a:r>
+              <a:rPr sz="1100" b="0" dirty="0">
+                <a:solidFill>
+                  <a:srgbClr val="595959"/>
+                </a:solidFill>
+                <a:latin typeface="맑은 고딕"/>
+              </a:rPr>
+              <a:t>/MZ </a:t>
+            </a:r>
+            <a:r>
+              <a:rPr sz="1100" b="0" dirty="0" err="1">
+                <a:solidFill>
+                  <a:srgbClr val="595959"/>
+                </a:solidFill>
+                <a:latin typeface="맑은 고딕"/>
+              </a:rPr>
+              <a:t>이동</a:t>
+            </a:r>
+            <a:r>
+              <a:rPr sz="1100" b="0" dirty="0">
+                <a:solidFill>
+                  <a:srgbClr val="595959"/>
+                </a:solidFill>
+                <a:latin typeface="맑은 고딕"/>
+              </a:rPr>
+              <a:t> </a:t>
+            </a:r>
+            <a:r>
+              <a:rPr sz="1100" b="0" dirty="0" err="1">
+                <a:solidFill>
+                  <a:srgbClr val="595959"/>
+                </a:solidFill>
+                <a:latin typeface="맑은 고딕"/>
+              </a:rPr>
+              <a:t>등을</a:t>
+            </a:r>
+            <a:r>
+              <a:rPr sz="1100" b="0" dirty="0">
+                <a:solidFill>
+                  <a:srgbClr val="595959"/>
+                </a:solidFill>
+                <a:latin typeface="맑은 고딕"/>
+              </a:rPr>
+              <a:t> </a:t>
+            </a:r>
+            <a:r>
+              <a:rPr sz="1100" b="0" dirty="0" err="1">
+                <a:solidFill>
+                  <a:srgbClr val="595959"/>
+                </a:solidFill>
+                <a:latin typeface="맑은 고딕"/>
+              </a:rPr>
+              <a:t>수행한다</a:t>
+            </a:r>
+            <a:r>
+              <a:rPr sz="1100" b="0" dirty="0">
+                <a:solidFill>
+                  <a:srgbClr val="595959"/>
+                </a:solidFill>
+                <a:latin typeface="맑은 고딕"/>
+              </a:rPr>
+              <a:t>.</a:t>
+            </a:r>
+          </a:p>
+          <a:p>
+            <a:pPr algn="l"/>
+            <a:endParaRPr sz="1100" b="0" dirty="0">
+              <a:solidFill>
+                <a:srgbClr val="595959"/>
+              </a:solidFill>
+              <a:latin typeface="맑은 고딕"/>
+            </a:endParaRPr>
+          </a:p>
+          <a:p>
+            <a:pPr algn="l"/>
+            <a:r>
+              <a:rPr sz="1300" b="1" dirty="0">
+                <a:solidFill>
+                  <a:srgbClr val="1E2761"/>
+                </a:solidFill>
+                <a:latin typeface="맑은 고딕"/>
+              </a:rPr>
+              <a:t>■ </a:t>
+            </a:r>
+            <a:r>
+              <a:rPr sz="1300" b="1" dirty="0" err="1">
+                <a:solidFill>
+                  <a:srgbClr val="1E2761"/>
+                </a:solidFill>
+                <a:latin typeface="맑은 고딕"/>
+              </a:rPr>
+              <a:t>특기사항</a:t>
+            </a:r>
+            <a:endParaRPr sz="1300" b="1" dirty="0">
+              <a:solidFill>
+                <a:srgbClr val="1E2761"/>
+              </a:solidFill>
+              <a:latin typeface="맑은 고딕"/>
+            </a:endParaRPr>
+          </a:p>
+          <a:p>
+            <a:pPr algn="l"/>
+            <a:r>
+              <a:rPr sz="1000" b="0" dirty="0">
+                <a:solidFill>
+                  <a:srgbClr val="595959"/>
+                </a:solidFill>
+                <a:latin typeface="맑은 고딕"/>
+              </a:rPr>
+              <a:t>· [</a:t>
+            </a:r>
+            <a:r>
+              <a:rPr lang="ko-KR" altLang="en-US" sz="1000" b="0" dirty="0">
+                <a:solidFill>
+                  <a:srgbClr val="595959"/>
+                </a:solidFill>
+                <a:latin typeface="맑은 고딕"/>
+              </a:rPr>
+              <a:t>쓰기</a:t>
+            </a:r>
+            <a:r>
+              <a:rPr sz="1000" b="0" dirty="0">
+                <a:solidFill>
+                  <a:srgbClr val="595959"/>
+                </a:solidFill>
+                <a:latin typeface="맑은 고딕"/>
+              </a:rPr>
+              <a:t>] 는 그 </a:t>
+            </a:r>
+            <a:r>
+              <a:rPr sz="1000" b="0" dirty="0" err="1">
+                <a:solidFill>
+                  <a:srgbClr val="595959"/>
+                </a:solidFill>
+                <a:latin typeface="맑은 고딕"/>
+              </a:rPr>
+              <a:t>트랙에</a:t>
+            </a:r>
+            <a:r>
+              <a:rPr sz="1000" b="0" dirty="0">
+                <a:solidFill>
+                  <a:srgbClr val="595959"/>
+                </a:solidFill>
+                <a:latin typeface="맑은 고딕"/>
+              </a:rPr>
+              <a:t> </a:t>
+            </a:r>
+            <a:r>
+              <a:rPr sz="1000" b="0" dirty="0" err="1">
+                <a:solidFill>
+                  <a:srgbClr val="595959"/>
+                </a:solidFill>
+                <a:latin typeface="맑은 고딕"/>
+              </a:rPr>
+              <a:t>작업번호·도착지를</a:t>
+            </a:r>
+            <a:r>
+              <a:rPr sz="1000" b="0" dirty="0">
+                <a:solidFill>
+                  <a:srgbClr val="595959"/>
+                </a:solidFill>
+                <a:latin typeface="맑은 고딕"/>
+              </a:rPr>
+              <a:t> 써 </a:t>
+            </a:r>
+            <a:r>
+              <a:rPr sz="1000" b="0" dirty="0" err="1">
+                <a:solidFill>
+                  <a:srgbClr val="595959"/>
+                </a:solidFill>
+                <a:latin typeface="맑은 고딕"/>
+              </a:rPr>
+              <a:t>넣는다</a:t>
+            </a:r>
+            <a:r>
+              <a:rPr sz="1000" b="0" dirty="0">
+                <a:solidFill>
+                  <a:srgbClr val="595959"/>
+                </a:solidFill>
+                <a:latin typeface="맑은 고딕"/>
+              </a:rPr>
+              <a:t>. </a:t>
+            </a:r>
+            <a:r>
+              <a:rPr sz="1000" b="0" dirty="0" err="1">
+                <a:solidFill>
+                  <a:srgbClr val="595959"/>
+                </a:solidFill>
+                <a:latin typeface="맑은 고딕"/>
+              </a:rPr>
+              <a:t>설비의</a:t>
+            </a:r>
+            <a:r>
+              <a:rPr sz="1000" b="0" dirty="0">
+                <a:solidFill>
+                  <a:srgbClr val="595959"/>
+                </a:solidFill>
+                <a:latin typeface="맑은 고딕"/>
+              </a:rPr>
+              <a:t> PLC </a:t>
+            </a:r>
+            <a:r>
+              <a:rPr sz="1000" b="0" dirty="0" err="1">
+                <a:solidFill>
+                  <a:srgbClr val="595959"/>
+                </a:solidFill>
+                <a:latin typeface="맑은 고딕"/>
+              </a:rPr>
+              <a:t>트래킹</a:t>
+            </a:r>
+            <a:r>
+              <a:rPr sz="1000" b="0" dirty="0">
+                <a:solidFill>
+                  <a:srgbClr val="595959"/>
+                </a:solidFill>
+                <a:latin typeface="맑은 고딕"/>
+              </a:rPr>
+              <a:t>(</a:t>
+            </a:r>
+            <a:r>
+              <a:rPr sz="1000" b="0" dirty="0" err="1">
+                <a:solidFill>
+                  <a:srgbClr val="595959"/>
+                </a:solidFill>
+                <a:latin typeface="맑은 고딕"/>
+              </a:rPr>
+              <a:t>R영역</a:t>
+            </a:r>
+            <a:r>
+              <a:rPr sz="1000" b="0" dirty="0">
+                <a:solidFill>
+                  <a:srgbClr val="595959"/>
+                </a:solidFill>
+                <a:latin typeface="맑은 고딕"/>
+              </a:rPr>
+              <a:t>)</a:t>
+            </a:r>
+            <a:r>
+              <a:rPr sz="1000" b="0" dirty="0" err="1">
+                <a:solidFill>
+                  <a:srgbClr val="595959"/>
+                </a:solidFill>
+                <a:latin typeface="맑은 고딕"/>
+              </a:rPr>
+              <a:t>에도</a:t>
+            </a:r>
+            <a:r>
+              <a:rPr sz="1000" b="0" dirty="0">
+                <a:solidFill>
+                  <a:srgbClr val="595959"/>
+                </a:solidFill>
+                <a:latin typeface="맑은 고딕"/>
+              </a:rPr>
+              <a:t> </a:t>
+            </a:r>
+            <a:r>
+              <a:rPr sz="1000" b="0" dirty="0" err="1">
+                <a:solidFill>
+                  <a:srgbClr val="595959"/>
+                </a:solidFill>
+                <a:latin typeface="맑은 고딕"/>
+              </a:rPr>
+              <a:t>함께</a:t>
+            </a:r>
+            <a:r>
+              <a:rPr sz="1000" b="0" dirty="0">
+                <a:solidFill>
+                  <a:srgbClr val="595959"/>
+                </a:solidFill>
+                <a:latin typeface="맑은 고딕"/>
+              </a:rPr>
+              <a:t> </a:t>
+            </a:r>
+            <a:r>
+              <a:rPr sz="1000" b="0" dirty="0" err="1">
+                <a:solidFill>
+                  <a:srgbClr val="595959"/>
+                </a:solidFill>
+                <a:latin typeface="맑은 고딕"/>
+              </a:rPr>
+              <a:t>기록되므로</a:t>
+            </a:r>
+            <a:r>
+              <a:rPr sz="1000" b="0" dirty="0">
+                <a:solidFill>
+                  <a:srgbClr val="595959"/>
+                </a:solidFill>
+                <a:latin typeface="맑은 고딕"/>
+              </a:rPr>
+              <a:t>, </a:t>
+            </a:r>
+            <a:r>
+              <a:rPr sz="1000" b="0" dirty="0" err="1">
+                <a:solidFill>
+                  <a:srgbClr val="595959"/>
+                </a:solidFill>
+                <a:latin typeface="맑은 고딕"/>
+              </a:rPr>
+              <a:t>설비에</a:t>
+            </a:r>
+            <a:r>
+              <a:rPr sz="1000" b="0" dirty="0">
+                <a:solidFill>
+                  <a:srgbClr val="595959"/>
+                </a:solidFill>
+                <a:latin typeface="맑은 고딕"/>
+              </a:rPr>
+              <a:t> </a:t>
+            </a:r>
+            <a:r>
+              <a:rPr sz="1000" b="0" dirty="0" err="1">
+                <a:solidFill>
+                  <a:srgbClr val="595959"/>
+                </a:solidFill>
+                <a:latin typeface="맑은 고딕"/>
+              </a:rPr>
+              <a:t>놓여</a:t>
+            </a:r>
+            <a:r>
+              <a:rPr sz="1000" b="0" dirty="0">
+                <a:solidFill>
+                  <a:srgbClr val="595959"/>
+                </a:solidFill>
+                <a:latin typeface="맑은 고딕"/>
+              </a:rPr>
+              <a:t> </a:t>
+            </a:r>
+            <a:r>
+              <a:rPr sz="1000" b="0" dirty="0" err="1">
+                <a:solidFill>
+                  <a:srgbClr val="595959"/>
+                </a:solidFill>
+                <a:latin typeface="맑은 고딕"/>
+              </a:rPr>
+              <a:t>있는데</a:t>
+            </a:r>
+            <a:r>
+              <a:rPr sz="1000" b="0" dirty="0">
+                <a:solidFill>
+                  <a:srgbClr val="595959"/>
+                </a:solidFill>
+                <a:latin typeface="맑은 고딕"/>
+              </a:rPr>
+              <a:t> </a:t>
+            </a:r>
+            <a:r>
+              <a:rPr sz="1000" b="0" dirty="0" err="1">
+                <a:solidFill>
+                  <a:srgbClr val="595959"/>
+                </a:solidFill>
+                <a:latin typeface="맑은 고딕"/>
+              </a:rPr>
+              <a:t>시스템이</a:t>
+            </a:r>
+            <a:r>
+              <a:rPr sz="1000" b="0" dirty="0">
+                <a:solidFill>
+                  <a:srgbClr val="595959"/>
+                </a:solidFill>
+                <a:latin typeface="맑은 고딕"/>
+              </a:rPr>
+              <a:t> </a:t>
+            </a:r>
+            <a:r>
+              <a:rPr sz="1000" b="0" dirty="0" err="1">
+                <a:solidFill>
+                  <a:srgbClr val="595959"/>
+                </a:solidFill>
+                <a:latin typeface="맑은 고딕"/>
+              </a:rPr>
+              <a:t>모르는</a:t>
+            </a:r>
+            <a:r>
+              <a:rPr sz="1000" b="0" dirty="0">
+                <a:solidFill>
+                  <a:srgbClr val="595959"/>
+                </a:solidFill>
+                <a:latin typeface="맑은 고딕"/>
+              </a:rPr>
+              <a:t> </a:t>
+            </a:r>
+            <a:r>
+              <a:rPr sz="1000" b="0" dirty="0" err="1">
+                <a:solidFill>
+                  <a:srgbClr val="595959"/>
+                </a:solidFill>
+                <a:latin typeface="맑은 고딕"/>
+              </a:rPr>
+              <a:t>화물을</a:t>
+            </a:r>
+            <a:r>
+              <a:rPr sz="1000" b="0" dirty="0">
+                <a:solidFill>
+                  <a:srgbClr val="595959"/>
+                </a:solidFill>
+                <a:latin typeface="맑은 고딕"/>
+              </a:rPr>
+              <a:t> </a:t>
+            </a:r>
+            <a:r>
+              <a:rPr sz="1000" b="0" dirty="0" err="1">
+                <a:solidFill>
+                  <a:srgbClr val="595959"/>
+                </a:solidFill>
+                <a:latin typeface="맑은 고딕"/>
+              </a:rPr>
+              <a:t>인수시킬</a:t>
+            </a:r>
+            <a:r>
+              <a:rPr sz="1000" b="0" dirty="0">
+                <a:solidFill>
+                  <a:srgbClr val="595959"/>
+                </a:solidFill>
+                <a:latin typeface="맑은 고딕"/>
+              </a:rPr>
+              <a:t> 때 </a:t>
+            </a:r>
+            <a:r>
+              <a:rPr sz="1000" b="0" dirty="0" err="1">
+                <a:solidFill>
+                  <a:srgbClr val="595959"/>
+                </a:solidFill>
+                <a:latin typeface="맑은 고딕"/>
+              </a:rPr>
+              <a:t>쓴다</a:t>
+            </a:r>
+            <a:r>
+              <a:rPr sz="1000" b="0" dirty="0">
+                <a:solidFill>
+                  <a:srgbClr val="595959"/>
+                </a:solidFill>
+                <a:latin typeface="맑은 고딕"/>
+              </a:rPr>
+              <a:t>.</a:t>
+            </a:r>
+          </a:p>
+          <a:p>
+            <a:pPr algn="l"/>
+            <a:r>
+              <a:rPr sz="1000" b="0" dirty="0">
+                <a:solidFill>
+                  <a:srgbClr val="595959"/>
+                </a:solidFill>
+                <a:latin typeface="맑은 고딕"/>
+              </a:rPr>
+              <a:t>· </a:t>
+            </a:r>
+            <a:r>
+              <a:rPr sz="1000" b="0" dirty="0" err="1">
+                <a:solidFill>
+                  <a:srgbClr val="595959"/>
+                </a:solidFill>
+                <a:latin typeface="맑은 고딕"/>
+              </a:rPr>
+              <a:t>예외</a:t>
+            </a:r>
+            <a:r>
+              <a:rPr sz="1000" b="0" dirty="0">
+                <a:solidFill>
+                  <a:srgbClr val="595959"/>
+                </a:solidFill>
+                <a:latin typeface="맑은 고딕"/>
+              </a:rPr>
+              <a:t> </a:t>
+            </a:r>
+            <a:r>
+              <a:rPr sz="1000" b="0" dirty="0" err="1">
+                <a:solidFill>
+                  <a:srgbClr val="595959"/>
+                </a:solidFill>
+                <a:latin typeface="맑은 고딕"/>
+              </a:rPr>
+              <a:t>처리</a:t>
+            </a:r>
+            <a:r>
+              <a:rPr sz="1000" b="0" dirty="0">
+                <a:solidFill>
+                  <a:srgbClr val="595959"/>
+                </a:solidFill>
+                <a:latin typeface="맑은 고딕"/>
+              </a:rPr>
+              <a:t> </a:t>
+            </a:r>
+            <a:r>
+              <a:rPr sz="1000" b="0" dirty="0" err="1">
+                <a:solidFill>
+                  <a:srgbClr val="595959"/>
+                </a:solidFill>
+                <a:latin typeface="맑은 고딕"/>
+              </a:rPr>
+              <a:t>그룹의</a:t>
+            </a:r>
+            <a:r>
+              <a:rPr sz="1000" b="0" dirty="0">
+                <a:solidFill>
+                  <a:srgbClr val="595959"/>
+                </a:solidFill>
+                <a:latin typeface="맑은 고딕"/>
+              </a:rPr>
+              <a:t> [H/S </a:t>
+            </a:r>
+            <a:r>
+              <a:rPr sz="1000" b="0" dirty="0" err="1">
+                <a:solidFill>
+                  <a:srgbClr val="595959"/>
+                </a:solidFill>
+                <a:latin typeface="맑은 고딕"/>
+              </a:rPr>
+              <a:t>배출</a:t>
+            </a:r>
+            <a:r>
+              <a:rPr sz="1000" b="0" dirty="0">
+                <a:solidFill>
+                  <a:srgbClr val="595959"/>
+                </a:solidFill>
+                <a:latin typeface="맑은 고딕"/>
+              </a:rPr>
+              <a:t>] 은 </a:t>
+            </a:r>
+            <a:r>
+              <a:rPr sz="1000" b="0" dirty="0" err="1">
+                <a:solidFill>
+                  <a:srgbClr val="595959"/>
+                </a:solidFill>
+                <a:latin typeface="맑은 고딕"/>
+              </a:rPr>
+              <a:t>출고</a:t>
+            </a:r>
+            <a:r>
+              <a:rPr sz="1000" b="0" dirty="0">
+                <a:solidFill>
+                  <a:srgbClr val="595959"/>
+                </a:solidFill>
+                <a:latin typeface="맑은 고딕"/>
+              </a:rPr>
+              <a:t> H/S 에 </a:t>
+            </a:r>
+            <a:r>
+              <a:rPr sz="1000" b="0" dirty="0" err="1">
+                <a:solidFill>
+                  <a:srgbClr val="595959"/>
+                </a:solidFill>
+                <a:latin typeface="맑은 고딕"/>
+              </a:rPr>
+              <a:t>놓인</a:t>
+            </a:r>
+            <a:r>
+              <a:rPr sz="1000" b="0" dirty="0">
+                <a:solidFill>
+                  <a:srgbClr val="595959"/>
+                </a:solidFill>
+                <a:latin typeface="맑은 고딕"/>
+              </a:rPr>
+              <a:t> </a:t>
+            </a:r>
+            <a:r>
+              <a:rPr sz="1000" b="0" dirty="0" err="1">
+                <a:solidFill>
+                  <a:srgbClr val="595959"/>
+                </a:solidFill>
+                <a:latin typeface="맑은 고딕"/>
+              </a:rPr>
+              <a:t>작업</a:t>
+            </a:r>
+            <a:r>
+              <a:rPr sz="1000" b="0" dirty="0">
+                <a:solidFill>
+                  <a:srgbClr val="595959"/>
+                </a:solidFill>
+                <a:latin typeface="맑은 고딕"/>
+              </a:rPr>
+              <a:t> </a:t>
+            </a:r>
+            <a:r>
+              <a:rPr sz="1000" b="0" dirty="0" err="1">
+                <a:solidFill>
+                  <a:srgbClr val="595959"/>
+                </a:solidFill>
+                <a:latin typeface="맑은 고딕"/>
+              </a:rPr>
+              <a:t>없는</a:t>
+            </a:r>
+            <a:r>
+              <a:rPr sz="1000" b="0" dirty="0">
+                <a:solidFill>
+                  <a:srgbClr val="595959"/>
+                </a:solidFill>
+                <a:latin typeface="맑은 고딕"/>
+              </a:rPr>
+              <a:t> </a:t>
+            </a:r>
+            <a:r>
+              <a:rPr sz="1000" b="0" dirty="0" err="1">
+                <a:solidFill>
+                  <a:srgbClr val="595959"/>
+                </a:solidFill>
+                <a:latin typeface="맑은 고딕"/>
+              </a:rPr>
+              <a:t>화물을</a:t>
+            </a:r>
+            <a:r>
+              <a:rPr sz="1000" b="0" dirty="0">
+                <a:solidFill>
+                  <a:srgbClr val="595959"/>
+                </a:solidFill>
+                <a:latin typeface="맑은 고딕"/>
+              </a:rPr>
+              <a:t> </a:t>
+            </a:r>
+            <a:r>
+              <a:rPr sz="1000" b="0" dirty="0" err="1">
+                <a:solidFill>
+                  <a:srgbClr val="595959"/>
+                </a:solidFill>
+                <a:latin typeface="맑은 고딕"/>
+              </a:rPr>
+              <a:t>출고대로</a:t>
+            </a:r>
+            <a:r>
+              <a:rPr sz="1000" b="0" dirty="0">
+                <a:solidFill>
+                  <a:srgbClr val="595959"/>
+                </a:solidFill>
+                <a:latin typeface="맑은 고딕"/>
+              </a:rPr>
+              <a:t> </a:t>
+            </a:r>
+            <a:r>
+              <a:rPr sz="1000" b="0" dirty="0" err="1">
+                <a:solidFill>
+                  <a:srgbClr val="595959"/>
+                </a:solidFill>
+                <a:latin typeface="맑은 고딕"/>
+              </a:rPr>
+              <a:t>내보낸다</a:t>
+            </a:r>
+            <a:r>
+              <a:rPr sz="1000" b="0" dirty="0">
+                <a:solidFill>
+                  <a:srgbClr val="595959"/>
+                </a:solidFill>
+                <a:latin typeface="맑은 고딕"/>
+              </a:rPr>
+              <a:t>. </a:t>
+            </a:r>
+            <a:r>
+              <a:rPr sz="1000" b="0" dirty="0" err="1">
+                <a:solidFill>
+                  <a:srgbClr val="595959"/>
+                </a:solidFill>
+                <a:latin typeface="맑은 고딕"/>
+              </a:rPr>
+              <a:t>비상</a:t>
+            </a:r>
+            <a:r>
+              <a:rPr sz="1000" b="0" dirty="0">
+                <a:solidFill>
+                  <a:srgbClr val="595959"/>
+                </a:solidFill>
+                <a:latin typeface="맑은 고딕"/>
+              </a:rPr>
+              <a:t> </a:t>
+            </a:r>
+            <a:r>
+              <a:rPr sz="1000" b="0" dirty="0" err="1">
+                <a:solidFill>
+                  <a:srgbClr val="595959"/>
+                </a:solidFill>
+                <a:latin typeface="맑은 고딕"/>
+              </a:rPr>
+              <a:t>확인창이</a:t>
+            </a:r>
+            <a:r>
+              <a:rPr sz="1000" b="0" dirty="0">
+                <a:solidFill>
+                  <a:srgbClr val="595959"/>
+                </a:solidFill>
+                <a:latin typeface="맑은 고딕"/>
+              </a:rPr>
+              <a:t> </a:t>
+            </a:r>
+            <a:r>
+              <a:rPr sz="1000" b="0" dirty="0" err="1">
+                <a:solidFill>
+                  <a:srgbClr val="595959"/>
+                </a:solidFill>
+                <a:latin typeface="맑은 고딕"/>
+              </a:rPr>
+              <a:t>뜨며</a:t>
+            </a:r>
+            <a:r>
+              <a:rPr sz="1000" b="0" dirty="0">
+                <a:solidFill>
+                  <a:srgbClr val="595959"/>
+                </a:solidFill>
+                <a:latin typeface="맑은 고딕"/>
+              </a:rPr>
+              <a:t>, </a:t>
+            </a:r>
+            <a:r>
+              <a:rPr sz="1000" b="0" dirty="0" err="1">
+                <a:solidFill>
+                  <a:srgbClr val="595959"/>
+                </a:solidFill>
+                <a:latin typeface="맑은 고딕"/>
+              </a:rPr>
+              <a:t>반자동</a:t>
+            </a:r>
+            <a:r>
+              <a:rPr sz="1000" b="0" dirty="0">
+                <a:solidFill>
+                  <a:srgbClr val="595959"/>
+                </a:solidFill>
+                <a:latin typeface="맑은 고딕"/>
+              </a:rPr>
+              <a:t> </a:t>
+            </a:r>
+            <a:r>
+              <a:rPr sz="1000" b="0" dirty="0" err="1">
+                <a:solidFill>
+                  <a:srgbClr val="595959"/>
+                </a:solidFill>
+                <a:latin typeface="맑은 고딕"/>
+              </a:rPr>
+              <a:t>출고</a:t>
+            </a:r>
+            <a:r>
+              <a:rPr sz="1000" b="0" dirty="0">
+                <a:solidFill>
+                  <a:srgbClr val="595959"/>
+                </a:solidFill>
+                <a:latin typeface="맑은 고딕"/>
+              </a:rPr>
+              <a:t> </a:t>
+            </a:r>
+            <a:r>
+              <a:rPr sz="1000" b="0" dirty="0" err="1">
+                <a:solidFill>
+                  <a:srgbClr val="595959"/>
+                </a:solidFill>
+                <a:latin typeface="맑은 고딕"/>
+              </a:rPr>
+              <a:t>작업을</a:t>
+            </a:r>
+            <a:r>
+              <a:rPr sz="1000" b="0" dirty="0">
+                <a:solidFill>
+                  <a:srgbClr val="595959"/>
+                </a:solidFill>
+                <a:latin typeface="맑은 고딕"/>
+              </a:rPr>
+              <a:t> </a:t>
+            </a:r>
+            <a:r>
+              <a:rPr sz="1000" b="0" dirty="0" err="1">
+                <a:solidFill>
+                  <a:srgbClr val="595959"/>
+                </a:solidFill>
+                <a:latin typeface="맑은 고딕"/>
+              </a:rPr>
+              <a:t>만들어</a:t>
+            </a:r>
+            <a:r>
+              <a:rPr sz="1000" b="0" dirty="0">
+                <a:solidFill>
+                  <a:srgbClr val="595959"/>
+                </a:solidFill>
+                <a:latin typeface="맑은 고딕"/>
+              </a:rPr>
+              <a:t> </a:t>
+            </a:r>
+            <a:r>
+              <a:rPr sz="1000" b="0" dirty="0" err="1">
+                <a:solidFill>
+                  <a:srgbClr val="595959"/>
+                </a:solidFill>
+                <a:latin typeface="맑은 고딕"/>
+              </a:rPr>
+              <a:t>상위</a:t>
+            </a:r>
+            <a:r>
+              <a:rPr sz="1000" b="0" dirty="0">
+                <a:solidFill>
+                  <a:srgbClr val="595959"/>
+                </a:solidFill>
+                <a:latin typeface="맑은 고딕"/>
+              </a:rPr>
+              <a:t> </a:t>
+            </a:r>
+            <a:r>
+              <a:rPr sz="1000" b="0" dirty="0" err="1">
+                <a:solidFill>
+                  <a:srgbClr val="595959"/>
+                </a:solidFill>
+                <a:latin typeface="맑은 고딕"/>
+              </a:rPr>
+              <a:t>보고</a:t>
+            </a:r>
+            <a:r>
+              <a:rPr sz="1000" b="0" dirty="0">
+                <a:solidFill>
+                  <a:srgbClr val="595959"/>
+                </a:solidFill>
+                <a:latin typeface="맑은 고딕"/>
+              </a:rPr>
+              <a:t> </a:t>
+            </a:r>
+            <a:r>
+              <a:rPr sz="1000" b="0" dirty="0" err="1">
+                <a:solidFill>
+                  <a:srgbClr val="595959"/>
+                </a:solidFill>
+                <a:latin typeface="맑은 고딕"/>
+              </a:rPr>
+              <a:t>없이</a:t>
+            </a:r>
+            <a:r>
+              <a:rPr sz="1000" b="0" dirty="0">
+                <a:solidFill>
+                  <a:srgbClr val="595959"/>
+                </a:solidFill>
+                <a:latin typeface="맑은 고딕"/>
+              </a:rPr>
+              <a:t> </a:t>
+            </a:r>
+            <a:r>
+              <a:rPr sz="1000" b="0" dirty="0" err="1">
+                <a:solidFill>
+                  <a:srgbClr val="595959"/>
+                </a:solidFill>
+                <a:latin typeface="맑은 고딕"/>
+              </a:rPr>
+              <a:t>처리한다</a:t>
+            </a:r>
+            <a:r>
+              <a:rPr sz="1000" b="0" dirty="0">
+                <a:solidFill>
+                  <a:srgbClr val="595959"/>
+                </a:solidFill>
+                <a:latin typeface="맑은 고딕"/>
+              </a:rPr>
+              <a:t>(</a:t>
+            </a:r>
+            <a:r>
+              <a:rPr sz="1000" b="0" dirty="0" err="1">
+                <a:solidFill>
+                  <a:srgbClr val="595959"/>
+                </a:solidFill>
+                <a:latin typeface="맑은 고딕"/>
+              </a:rPr>
+              <a:t>아래</a:t>
+            </a:r>
+            <a:r>
+              <a:rPr sz="1000" b="0" dirty="0">
+                <a:solidFill>
+                  <a:srgbClr val="595959"/>
+                </a:solidFill>
+                <a:latin typeface="맑은 고딕"/>
+              </a:rPr>
+              <a:t> </a:t>
+            </a:r>
+            <a:r>
+              <a:rPr sz="1000" b="0" dirty="0" err="1">
+                <a:solidFill>
+                  <a:srgbClr val="595959"/>
+                </a:solidFill>
+                <a:latin typeface="맑은 고딕"/>
+              </a:rPr>
+              <a:t>예외</a:t>
+            </a:r>
+            <a:r>
+              <a:rPr sz="1000" b="0" dirty="0">
+                <a:solidFill>
+                  <a:srgbClr val="595959"/>
+                </a:solidFill>
+                <a:latin typeface="맑은 고딕"/>
+              </a:rPr>
+              <a:t> </a:t>
+            </a:r>
+            <a:r>
+              <a:rPr sz="1000" b="0" dirty="0" err="1">
+                <a:solidFill>
+                  <a:srgbClr val="595959"/>
+                </a:solidFill>
+                <a:latin typeface="맑은 고딕"/>
+              </a:rPr>
+              <a:t>처리</a:t>
+            </a:r>
+            <a:r>
+              <a:rPr sz="1000" b="0" dirty="0">
+                <a:solidFill>
+                  <a:srgbClr val="595959"/>
+                </a:solidFill>
+                <a:latin typeface="맑은 고딕"/>
+              </a:rPr>
+              <a:t> </a:t>
+            </a:r>
+            <a:r>
+              <a:rPr sz="1000" b="0" dirty="0" err="1">
+                <a:solidFill>
+                  <a:srgbClr val="595959"/>
+                </a:solidFill>
+                <a:latin typeface="맑은 고딕"/>
+              </a:rPr>
+              <a:t>참조</a:t>
+            </a:r>
+            <a:r>
+              <a:rPr sz="1000" b="0" dirty="0">
+                <a:solidFill>
+                  <a:srgbClr val="595959"/>
+                </a:solidFill>
+                <a:latin typeface="맑은 고딕"/>
+              </a:rPr>
+              <a:t>).</a:t>
             </a:r>
           </a:p>
         </p:txBody>
@@ -8113,7 +9322,7 @@
                 </a:solidFill>
                 <a:latin typeface="맑은 고딕"/>
               </a:rPr>
-              <a:t>MANUAL</a:t>
+              <a:t>수동조작</a:t>
             </a:r>
           </a:p>
           <a:p>
@@ -8569,9 +9778,1903 @@
           </a:p>
         </p:txBody>
       </p:sp>
+      <p:sp>
+        <p:nvSpPr>
+          <p:cNvPr id="5" name="TextBox 4"/>
+          <p:cNvSpPr txBox="1"/>
+          <p:nvPr/>
+        </p:nvSpPr>
+        <p:spPr>
+          <a:xfrm>
+            <a:off x="8503920" y="1188720"/>
+            <a:ext cx="3291840" cy="4016484"/>
+          </a:xfrm>
+          <a:prstGeom prst="rect">
+            <a:avLst/>
+          </a:prstGeom>
+          <a:noFill/>
+        </p:spPr>
+        <p:txBody>
+          <a:bodyPr wrap="square" lIns="45720" rIns="45720" anchor="t">
+            <a:spAutoFit/>
+          </a:bodyPr>
+          <a:lstStyle/>
+          <a:p>
+            <a:pPr algn="l"/>
+            <a:r>
+              <a:rPr sz="1300" b="1" dirty="0">
+                <a:solidFill>
+                  <a:srgbClr val="1E2761"/>
+                </a:solidFill>
+                <a:latin typeface="맑은 고딕"/>
+              </a:rPr>
+              <a:t>■ </a:t>
+            </a:r>
+            <a:r>
+              <a:rPr sz="1300" b="1" dirty="0" err="1">
+                <a:solidFill>
+                  <a:srgbClr val="1E2761"/>
+                </a:solidFill>
+                <a:latin typeface="맑은 고딕"/>
+              </a:rPr>
+              <a:t>메뉴</a:t>
+            </a:r>
+            <a:r>
+              <a:rPr sz="1300" b="1" dirty="0">
+                <a:solidFill>
+                  <a:srgbClr val="1E2761"/>
+                </a:solidFill>
+                <a:latin typeface="맑은 고딕"/>
+              </a:rPr>
+              <a:t> Path</a:t>
+            </a:r>
+          </a:p>
+          <a:p>
+            <a:pPr algn="l"/>
+            <a:r>
+              <a:rPr sz="1100" b="0" dirty="0" err="1">
+                <a:solidFill>
+                  <a:srgbClr val="595959"/>
+                </a:solidFill>
+                <a:latin typeface="맑은 고딕"/>
+              </a:rPr>
+              <a:t>운전</a:t>
+            </a:r>
+            <a:r>
+              <a:rPr sz="1100" b="0" dirty="0">
+                <a:solidFill>
+                  <a:srgbClr val="595959"/>
+                </a:solidFill>
+                <a:latin typeface="맑은 고딕"/>
+              </a:rPr>
+              <a:t> </a:t>
+            </a:r>
+            <a:r>
+              <a:rPr sz="1100" b="0" dirty="0" err="1">
+                <a:solidFill>
+                  <a:srgbClr val="595959"/>
+                </a:solidFill>
+                <a:latin typeface="맑은 고딕"/>
+              </a:rPr>
+              <a:t>화면</a:t>
+            </a:r>
+            <a:r>
+              <a:rPr sz="1100" b="0" dirty="0">
+                <a:solidFill>
+                  <a:srgbClr val="595959"/>
+                </a:solidFill>
+                <a:latin typeface="맑은 고딕"/>
+              </a:rPr>
+              <a:t>(Ecs.exe) </a:t>
+            </a:r>
+            <a:r>
+              <a:rPr sz="1100" b="0" dirty="0" err="1">
+                <a:solidFill>
+                  <a:srgbClr val="595959"/>
+                </a:solidFill>
+                <a:latin typeface="맑은 고딕"/>
+              </a:rPr>
+              <a:t>실행</a:t>
+            </a:r>
+            <a:r>
+              <a:rPr sz="1100" b="0" dirty="0">
+                <a:solidFill>
+                  <a:srgbClr val="595959"/>
+                </a:solidFill>
+                <a:latin typeface="맑은 고딕"/>
+              </a:rPr>
+              <a:t> 시 첫 </a:t>
+            </a:r>
+            <a:r>
+              <a:rPr sz="1100" b="0" dirty="0" err="1">
+                <a:solidFill>
+                  <a:srgbClr val="595959"/>
+                </a:solidFill>
+                <a:latin typeface="맑은 고딕"/>
+              </a:rPr>
+              <a:t>화면</a:t>
+            </a:r>
+            <a:endParaRPr sz="1100" b="0" dirty="0">
+              <a:solidFill>
+                <a:srgbClr val="595959"/>
+              </a:solidFill>
+              <a:latin typeface="맑은 고딕"/>
+            </a:endParaRPr>
+          </a:p>
+          <a:p>
+            <a:pPr algn="l"/>
+            <a:endParaRPr sz="1100" b="0" dirty="0">
+              <a:solidFill>
+                <a:srgbClr val="595959"/>
+              </a:solidFill>
+              <a:latin typeface="맑은 고딕"/>
+            </a:endParaRPr>
+          </a:p>
+          <a:p>
+            <a:pPr algn="l"/>
+            <a:r>
+              <a:rPr sz="1300" b="1" dirty="0">
+                <a:solidFill>
+                  <a:srgbClr val="1E2761"/>
+                </a:solidFill>
+                <a:latin typeface="맑은 고딕"/>
+              </a:rPr>
+              <a:t>■ </a:t>
+            </a:r>
+            <a:r>
+              <a:rPr sz="1300" b="1" dirty="0" err="1">
+                <a:solidFill>
+                  <a:srgbClr val="1E2761"/>
+                </a:solidFill>
+                <a:latin typeface="맑은 고딕"/>
+              </a:rPr>
+              <a:t>프로그램</a:t>
+            </a:r>
+            <a:r>
+              <a:rPr sz="1300" b="1" dirty="0">
+                <a:solidFill>
+                  <a:srgbClr val="1E2761"/>
+                </a:solidFill>
+                <a:latin typeface="맑은 고딕"/>
+              </a:rPr>
+              <a:t> </a:t>
+            </a:r>
+            <a:r>
+              <a:rPr sz="1300" b="1" dirty="0" err="1">
+                <a:solidFill>
+                  <a:srgbClr val="1E2761"/>
+                </a:solidFill>
+                <a:latin typeface="맑은 고딕"/>
+              </a:rPr>
+              <a:t>개요</a:t>
+            </a:r>
+            <a:endParaRPr sz="1300" b="1" dirty="0">
+              <a:solidFill>
+                <a:srgbClr val="1E2761"/>
+              </a:solidFill>
+              <a:latin typeface="맑은 고딕"/>
+            </a:endParaRPr>
+          </a:p>
+          <a:p>
+            <a:pPr algn="l"/>
+            <a:r>
+              <a:rPr sz="1100" b="0" dirty="0">
+                <a:solidFill>
+                  <a:srgbClr val="595959"/>
+                </a:solidFill>
+                <a:latin typeface="맑은 고딕"/>
+              </a:rPr>
+              <a:t>1동 </a:t>
+            </a:r>
+            <a:r>
+              <a:rPr sz="1100" b="0" dirty="0" err="1">
+                <a:solidFill>
+                  <a:srgbClr val="595959"/>
+                </a:solidFill>
+                <a:latin typeface="맑은 고딕"/>
+              </a:rPr>
+              <a:t>자동창고</a:t>
+            </a:r>
+            <a:r>
+              <a:rPr sz="1100" b="0" dirty="0">
+                <a:solidFill>
+                  <a:srgbClr val="595959"/>
+                </a:solidFill>
+                <a:latin typeface="맑은 고딕"/>
+              </a:rPr>
+              <a:t> </a:t>
+            </a:r>
+            <a:r>
+              <a:rPr sz="1100" b="0" dirty="0" err="1">
+                <a:solidFill>
+                  <a:srgbClr val="595959"/>
+                </a:solidFill>
+                <a:latin typeface="맑은 고딕"/>
+              </a:rPr>
+              <a:t>전체</a:t>
+            </a:r>
+            <a:r>
+              <a:rPr sz="1100" b="0" dirty="0">
+                <a:solidFill>
+                  <a:srgbClr val="595959"/>
+                </a:solidFill>
+                <a:latin typeface="맑은 고딕"/>
+              </a:rPr>
+              <a:t> </a:t>
+            </a:r>
+            <a:r>
+              <a:rPr sz="1100" b="0" dirty="0" err="1">
+                <a:solidFill>
+                  <a:srgbClr val="595959"/>
+                </a:solidFill>
+                <a:latin typeface="맑은 고딕"/>
+              </a:rPr>
+              <a:t>배치</a:t>
+            </a:r>
+            <a:r>
+              <a:rPr sz="1100" b="0" dirty="0">
+                <a:solidFill>
+                  <a:srgbClr val="595959"/>
+                </a:solidFill>
+                <a:latin typeface="맑은 고딕"/>
+              </a:rPr>
+              <a:t>(랙 10열, </a:t>
+            </a:r>
+            <a:r>
+              <a:rPr sz="1100" b="0" dirty="0" err="1">
+                <a:solidFill>
+                  <a:srgbClr val="595959"/>
+                </a:solidFill>
+                <a:latin typeface="맑은 고딕"/>
+              </a:rPr>
+              <a:t>크레인</a:t>
+            </a:r>
+            <a:r>
+              <a:rPr sz="1100" b="0" dirty="0">
+                <a:solidFill>
+                  <a:srgbClr val="595959"/>
+                </a:solidFill>
+                <a:latin typeface="맑은 고딕"/>
+              </a:rPr>
+              <a:t> 5대, RGV 1대, </a:t>
+            </a:r>
+            <a:r>
+              <a:rPr sz="1100" b="0" dirty="0" err="1">
+                <a:solidFill>
+                  <a:srgbClr val="595959"/>
+                </a:solidFill>
+                <a:latin typeface="맑은 고딕"/>
+              </a:rPr>
+              <a:t>컨베이어</a:t>
+            </a:r>
+            <a:r>
+              <a:rPr sz="1100" b="0" dirty="0">
+                <a:solidFill>
+                  <a:srgbClr val="595959"/>
+                </a:solidFill>
+                <a:latin typeface="맑은 고딕"/>
+              </a:rPr>
+              <a:t> C/V#2~#15, </a:t>
+            </a:r>
+            <a:r>
+              <a:rPr sz="1100" b="0" dirty="0" err="1">
+                <a:solidFill>
+                  <a:srgbClr val="595959"/>
+                </a:solidFill>
+                <a:latin typeface="맑은 고딕"/>
+              </a:rPr>
+              <a:t>작업대</a:t>
+            </a:r>
+            <a:r>
+              <a:rPr sz="1100" b="0" dirty="0">
+                <a:solidFill>
+                  <a:srgbClr val="595959"/>
+                </a:solidFill>
+                <a:latin typeface="맑은 고딕"/>
+              </a:rPr>
+              <a:t>)와 </a:t>
+            </a:r>
+            <a:r>
+              <a:rPr sz="1100" b="0" dirty="0" err="1">
+                <a:solidFill>
+                  <a:srgbClr val="595959"/>
+                </a:solidFill>
+                <a:latin typeface="맑은 고딕"/>
+              </a:rPr>
+              <a:t>작업</a:t>
+            </a:r>
+            <a:r>
+              <a:rPr sz="1100" b="0" dirty="0">
+                <a:solidFill>
+                  <a:srgbClr val="595959"/>
+                </a:solidFill>
+                <a:latin typeface="맑은 고딕"/>
+              </a:rPr>
+              <a:t> </a:t>
+            </a:r>
+            <a:r>
+              <a:rPr sz="1100" b="0" dirty="0" err="1">
+                <a:solidFill>
+                  <a:srgbClr val="595959"/>
+                </a:solidFill>
+                <a:latin typeface="맑은 고딕"/>
+              </a:rPr>
+              <a:t>진행</a:t>
+            </a:r>
+            <a:r>
+              <a:rPr sz="1100" b="0" dirty="0">
+                <a:solidFill>
+                  <a:srgbClr val="595959"/>
+                </a:solidFill>
+                <a:latin typeface="맑은 고딕"/>
+              </a:rPr>
+              <a:t> </a:t>
+            </a:r>
+            <a:r>
+              <a:rPr sz="1100" b="0" dirty="0" err="1">
+                <a:solidFill>
+                  <a:srgbClr val="595959"/>
+                </a:solidFill>
+                <a:latin typeface="맑은 고딕"/>
+              </a:rPr>
+              <a:t>상황을</a:t>
+            </a:r>
+            <a:r>
+              <a:rPr sz="1100" b="0" dirty="0">
+                <a:solidFill>
+                  <a:srgbClr val="595959"/>
+                </a:solidFill>
+                <a:latin typeface="맑은 고딕"/>
+              </a:rPr>
+              <a:t> </a:t>
+            </a:r>
+            <a:r>
+              <a:rPr sz="1100" b="0" dirty="0" err="1">
+                <a:solidFill>
+                  <a:srgbClr val="595959"/>
+                </a:solidFill>
+                <a:latin typeface="맑은 고딕"/>
+              </a:rPr>
+              <a:t>실시간</a:t>
+            </a:r>
+            <a:r>
+              <a:rPr sz="1100" b="0" dirty="0">
+                <a:solidFill>
+                  <a:srgbClr val="595959"/>
+                </a:solidFill>
+                <a:latin typeface="맑은 고딕"/>
+              </a:rPr>
+              <a:t> </a:t>
+            </a:r>
+            <a:r>
+              <a:rPr sz="1100" b="0" dirty="0" err="1">
+                <a:solidFill>
+                  <a:srgbClr val="595959"/>
+                </a:solidFill>
+                <a:latin typeface="맑은 고딕"/>
+              </a:rPr>
+              <a:t>표시한다</a:t>
+            </a:r>
+            <a:r>
+              <a:rPr sz="1100" b="0" dirty="0">
+                <a:solidFill>
+                  <a:srgbClr val="595959"/>
+                </a:solidFill>
+                <a:latin typeface="맑은 고딕"/>
+              </a:rPr>
+              <a:t>.</a:t>
+            </a:r>
+          </a:p>
+          <a:p>
+            <a:pPr algn="l"/>
+            <a:endParaRPr sz="1100" b="0" dirty="0">
+              <a:solidFill>
+                <a:srgbClr val="595959"/>
+              </a:solidFill>
+              <a:latin typeface="맑은 고딕"/>
+            </a:endParaRPr>
+          </a:p>
+          <a:p>
+            <a:pPr algn="l"/>
+            <a:r>
+              <a:rPr sz="1300" b="1" dirty="0">
+                <a:solidFill>
+                  <a:srgbClr val="1E2761"/>
+                </a:solidFill>
+                <a:latin typeface="맑은 고딕"/>
+              </a:rPr>
+              <a:t>■ </a:t>
+            </a:r>
+            <a:r>
+              <a:rPr sz="1300" b="1" dirty="0" err="1">
+                <a:solidFill>
+                  <a:srgbClr val="1E2761"/>
+                </a:solidFill>
+                <a:latin typeface="맑은 고딕"/>
+              </a:rPr>
+              <a:t>특기사항</a:t>
+            </a:r>
+            <a:endParaRPr sz="1300" b="1" dirty="0">
+              <a:solidFill>
+                <a:srgbClr val="1E2761"/>
+              </a:solidFill>
+              <a:latin typeface="맑은 고딕"/>
+            </a:endParaRPr>
+          </a:p>
+          <a:p>
+            <a:pPr algn="l"/>
+            <a:r>
+              <a:rPr sz="1000" b="0" dirty="0">
+                <a:solidFill>
+                  <a:srgbClr val="595959"/>
+                </a:solidFill>
+                <a:latin typeface="맑은 고딕"/>
+              </a:rPr>
+              <a:t>· </a:t>
+            </a:r>
+            <a:r>
+              <a:rPr sz="1000" b="0" dirty="0" err="1">
+                <a:solidFill>
+                  <a:srgbClr val="595959"/>
+                </a:solidFill>
+                <a:latin typeface="맑은 고딕"/>
+              </a:rPr>
+              <a:t>화물이</a:t>
+            </a:r>
+            <a:r>
+              <a:rPr sz="1000" b="0" dirty="0">
+                <a:solidFill>
+                  <a:srgbClr val="595959"/>
+                </a:solidFill>
+                <a:latin typeface="맑은 고딕"/>
+              </a:rPr>
+              <a:t> </a:t>
+            </a:r>
+            <a:r>
+              <a:rPr sz="1000" b="0" dirty="0" err="1">
+                <a:solidFill>
+                  <a:srgbClr val="595959"/>
+                </a:solidFill>
+                <a:latin typeface="맑은 고딕"/>
+              </a:rPr>
+              <a:t>있는</a:t>
+            </a:r>
+            <a:r>
+              <a:rPr sz="1000" b="0" dirty="0">
+                <a:solidFill>
+                  <a:srgbClr val="595959"/>
+                </a:solidFill>
+                <a:latin typeface="맑은 고딕"/>
+              </a:rPr>
+              <a:t> </a:t>
+            </a:r>
+            <a:r>
+              <a:rPr sz="1000" b="0" dirty="0" err="1">
+                <a:solidFill>
+                  <a:srgbClr val="595959"/>
+                </a:solidFill>
+                <a:latin typeface="맑은 고딕"/>
+              </a:rPr>
+              <a:t>위치는</a:t>
+            </a:r>
+            <a:r>
+              <a:rPr sz="1000" b="0" dirty="0">
+                <a:solidFill>
+                  <a:srgbClr val="595959"/>
+                </a:solidFill>
+                <a:latin typeface="맑은 고딕"/>
+              </a:rPr>
+              <a:t> </a:t>
+            </a:r>
+            <a:r>
+              <a:rPr sz="1000" b="0" dirty="0" err="1">
+                <a:solidFill>
+                  <a:srgbClr val="595959"/>
+                </a:solidFill>
+                <a:latin typeface="맑은 고딕"/>
+              </a:rPr>
+              <a:t>작업번호와</a:t>
+            </a:r>
+            <a:r>
+              <a:rPr sz="1000" b="0" dirty="0">
+                <a:solidFill>
+                  <a:srgbClr val="595959"/>
+                </a:solidFill>
+                <a:latin typeface="맑은 고딕"/>
+              </a:rPr>
+              <a:t> </a:t>
+            </a:r>
+            <a:r>
+              <a:rPr sz="1000" b="0" dirty="0" err="1">
+                <a:solidFill>
+                  <a:srgbClr val="595959"/>
+                </a:solidFill>
+                <a:latin typeface="맑은 고딕"/>
+              </a:rPr>
+              <a:t>작업구분</a:t>
+            </a:r>
+            <a:r>
+              <a:rPr sz="1000" b="0" dirty="0">
+                <a:solidFill>
+                  <a:srgbClr val="595959"/>
+                </a:solidFill>
+                <a:latin typeface="맑은 고딕"/>
+              </a:rPr>
+              <a:t> 색(</a:t>
+            </a:r>
+            <a:r>
+              <a:rPr sz="1000" b="0" dirty="0" err="1">
+                <a:solidFill>
+                  <a:srgbClr val="595959"/>
+                </a:solidFill>
+                <a:latin typeface="맑은 고딕"/>
+              </a:rPr>
+              <a:t>입고</a:t>
+            </a:r>
+            <a:r>
+              <a:rPr sz="1000" b="0" dirty="0">
+                <a:solidFill>
+                  <a:srgbClr val="595959"/>
+                </a:solidFill>
+                <a:latin typeface="맑은 고딕"/>
+              </a:rPr>
+              <a:t>/</a:t>
+            </a:r>
+            <a:r>
+              <a:rPr sz="1000" b="0" dirty="0" err="1">
+                <a:solidFill>
+                  <a:srgbClr val="595959"/>
+                </a:solidFill>
+                <a:latin typeface="맑은 고딕"/>
+              </a:rPr>
+              <a:t>출고</a:t>
+            </a:r>
+            <a:r>
+              <a:rPr sz="1000" b="0" dirty="0">
+                <a:solidFill>
+                  <a:srgbClr val="595959"/>
+                </a:solidFill>
+                <a:latin typeface="맑은 고딕"/>
+              </a:rPr>
+              <a:t>/</a:t>
+            </a:r>
+            <a:r>
+              <a:rPr sz="1000" b="0" dirty="0" err="1">
+                <a:solidFill>
+                  <a:srgbClr val="595959"/>
+                </a:solidFill>
+                <a:latin typeface="맑은 고딕"/>
+              </a:rPr>
+              <a:t>피킹</a:t>
+            </a:r>
+            <a:r>
+              <a:rPr sz="1000" b="0" dirty="0">
+                <a:solidFill>
+                  <a:srgbClr val="595959"/>
+                </a:solidFill>
+                <a:latin typeface="맑은 고딕"/>
+              </a:rPr>
+              <a:t>/</a:t>
+            </a:r>
+            <a:r>
+              <a:rPr sz="1000" b="0" dirty="0" err="1">
+                <a:solidFill>
+                  <a:srgbClr val="595959"/>
+                </a:solidFill>
+                <a:latin typeface="맑은 고딕"/>
+              </a:rPr>
+              <a:t>랙투랙</a:t>
+            </a:r>
+            <a:r>
+              <a:rPr sz="1000" b="0" dirty="0">
+                <a:solidFill>
+                  <a:srgbClr val="595959"/>
+                </a:solidFill>
+                <a:latin typeface="맑은 고딕"/>
+              </a:rPr>
+              <a:t>/</a:t>
+            </a:r>
+            <a:r>
+              <a:rPr sz="1000" b="0" dirty="0" err="1">
+                <a:solidFill>
+                  <a:srgbClr val="595959"/>
+                </a:solidFill>
+                <a:latin typeface="맑은 고딕"/>
+              </a:rPr>
+              <a:t>이동</a:t>
+            </a:r>
+            <a:r>
+              <a:rPr sz="1000" b="0" dirty="0">
+                <a:solidFill>
+                  <a:srgbClr val="595959"/>
+                </a:solidFill>
+                <a:latin typeface="맑은 고딕"/>
+              </a:rPr>
+              <a:t>)</a:t>
+            </a:r>
+            <a:r>
+              <a:rPr sz="1000" b="0" dirty="0" err="1">
+                <a:solidFill>
+                  <a:srgbClr val="595959"/>
+                </a:solidFill>
+                <a:latin typeface="맑은 고딕"/>
+              </a:rPr>
+              <a:t>으로</a:t>
+            </a:r>
+            <a:r>
+              <a:rPr sz="1000" b="0" dirty="0">
+                <a:solidFill>
+                  <a:srgbClr val="595959"/>
+                </a:solidFill>
+                <a:latin typeface="맑은 고딕"/>
+              </a:rPr>
+              <a:t> </a:t>
+            </a:r>
+            <a:r>
+              <a:rPr sz="1000" b="0" dirty="0" err="1">
+                <a:solidFill>
+                  <a:srgbClr val="595959"/>
+                </a:solidFill>
+                <a:latin typeface="맑은 고딕"/>
+              </a:rPr>
+              <a:t>표시된다</a:t>
+            </a:r>
+            <a:r>
+              <a:rPr sz="1000" b="0" dirty="0">
+                <a:solidFill>
+                  <a:srgbClr val="595959"/>
+                </a:solidFill>
+                <a:latin typeface="맑은 고딕"/>
+              </a:rPr>
+              <a:t>.</a:t>
+            </a:r>
+          </a:p>
+          <a:p>
+            <a:pPr algn="l"/>
+            <a:r>
+              <a:rPr sz="1000" b="0" dirty="0">
+                <a:solidFill>
+                  <a:srgbClr val="595959"/>
+                </a:solidFill>
+                <a:latin typeface="맑은 고딕"/>
+              </a:rPr>
+              <a:t>· </a:t>
+            </a:r>
+            <a:r>
+              <a:rPr sz="1000" b="0" dirty="0" err="1">
+                <a:solidFill>
+                  <a:srgbClr val="595959"/>
+                </a:solidFill>
+                <a:latin typeface="맑은 고딕"/>
+              </a:rPr>
+              <a:t>화면</a:t>
+            </a:r>
+            <a:r>
+              <a:rPr sz="1000" b="0" dirty="0">
+                <a:solidFill>
+                  <a:srgbClr val="595959"/>
+                </a:solidFill>
+                <a:latin typeface="맑은 고딕"/>
+              </a:rPr>
+              <a:t> </a:t>
+            </a:r>
+            <a:r>
+              <a:rPr sz="1000" b="0" dirty="0" err="1">
+                <a:solidFill>
+                  <a:srgbClr val="595959"/>
+                </a:solidFill>
+                <a:latin typeface="맑은 고딕"/>
+              </a:rPr>
+              <a:t>왼쪽에</a:t>
+            </a:r>
+            <a:r>
+              <a:rPr sz="1000" b="0" dirty="0">
+                <a:solidFill>
+                  <a:srgbClr val="595959"/>
+                </a:solidFill>
+                <a:latin typeface="맑은 고딕"/>
+              </a:rPr>
+              <a:t> </a:t>
+            </a:r>
+            <a:r>
+              <a:rPr sz="1000" b="0" dirty="0" err="1">
+                <a:solidFill>
+                  <a:srgbClr val="595959"/>
+                </a:solidFill>
+                <a:latin typeface="맑은 고딕"/>
+              </a:rPr>
+              <a:t>범례표가</a:t>
+            </a:r>
+            <a:r>
+              <a:rPr sz="1000" b="0" dirty="0">
+                <a:solidFill>
+                  <a:srgbClr val="595959"/>
+                </a:solidFill>
+                <a:latin typeface="맑은 고딕"/>
+              </a:rPr>
+              <a:t> </a:t>
+            </a:r>
+            <a:r>
+              <a:rPr sz="1000" b="0" dirty="0" err="1">
+                <a:solidFill>
+                  <a:srgbClr val="595959"/>
+                </a:solidFill>
+                <a:latin typeface="맑은 고딕"/>
+              </a:rPr>
+              <a:t>함께</a:t>
+            </a:r>
+            <a:r>
+              <a:rPr sz="1000" b="0" dirty="0">
+                <a:solidFill>
+                  <a:srgbClr val="595959"/>
+                </a:solidFill>
+                <a:latin typeface="맑은 고딕"/>
+              </a:rPr>
+              <a:t> </a:t>
+            </a:r>
+            <a:r>
+              <a:rPr sz="1000" b="0" dirty="0" err="1">
+                <a:solidFill>
+                  <a:srgbClr val="595959"/>
+                </a:solidFill>
+                <a:latin typeface="맑은 고딕"/>
+              </a:rPr>
+              <a:t>그려진다</a:t>
+            </a:r>
+            <a:r>
+              <a:rPr sz="1000" b="0" dirty="0">
+                <a:solidFill>
+                  <a:srgbClr val="595959"/>
+                </a:solidFill>
+                <a:latin typeface="맑은 고딕"/>
+              </a:rPr>
+              <a:t> - </a:t>
+            </a:r>
+            <a:r>
+              <a:rPr sz="1000" b="0" dirty="0" err="1">
+                <a:solidFill>
+                  <a:srgbClr val="595959"/>
+                </a:solidFill>
+                <a:latin typeface="맑은 고딕"/>
+              </a:rPr>
+              <a:t>작업</a:t>
+            </a:r>
+            <a:r>
+              <a:rPr sz="1000" b="0" dirty="0">
+                <a:solidFill>
+                  <a:srgbClr val="595959"/>
+                </a:solidFill>
+                <a:latin typeface="맑은 고딕"/>
+              </a:rPr>
+              <a:t> </a:t>
+            </a:r>
+            <a:r>
+              <a:rPr sz="1000" b="0" dirty="0" err="1">
+                <a:solidFill>
+                  <a:srgbClr val="595959"/>
+                </a:solidFill>
+                <a:latin typeface="맑은 고딕"/>
+              </a:rPr>
+              <a:t>색상</a:t>
+            </a:r>
+            <a:r>
+              <a:rPr sz="1000" b="0" dirty="0">
+                <a:solidFill>
+                  <a:srgbClr val="595959"/>
+                </a:solidFill>
+                <a:latin typeface="맑은 고딕"/>
+              </a:rPr>
+              <a:t> / C/V </a:t>
+            </a:r>
+            <a:r>
+              <a:rPr sz="1000" b="0" dirty="0" err="1">
+                <a:solidFill>
+                  <a:srgbClr val="595959"/>
+                </a:solidFill>
+                <a:latin typeface="맑은 고딕"/>
+              </a:rPr>
+              <a:t>상태</a:t>
+            </a:r>
+            <a:r>
+              <a:rPr sz="1000" b="0" dirty="0">
+                <a:solidFill>
+                  <a:srgbClr val="595959"/>
+                </a:solidFill>
+                <a:latin typeface="맑은 고딕"/>
+              </a:rPr>
+              <a:t> / S/C·RTV </a:t>
+            </a:r>
+            <a:r>
+              <a:rPr sz="1000" b="0" dirty="0" err="1">
+                <a:solidFill>
+                  <a:srgbClr val="595959"/>
+                </a:solidFill>
+                <a:latin typeface="맑은 고딕"/>
+              </a:rPr>
+              <a:t>상태</a:t>
+            </a:r>
+            <a:r>
+              <a:rPr sz="1000" b="0" dirty="0">
+                <a:solidFill>
+                  <a:srgbClr val="595959"/>
+                </a:solidFill>
+                <a:latin typeface="맑은 고딕"/>
+              </a:rPr>
+              <a:t> / S/C·RTV </a:t>
+            </a:r>
+            <a:r>
+              <a:rPr sz="1000" b="0" dirty="0" err="1">
+                <a:solidFill>
+                  <a:srgbClr val="595959"/>
+                </a:solidFill>
+                <a:latin typeface="맑은 고딕"/>
+              </a:rPr>
+              <a:t>레일</a:t>
+            </a:r>
+            <a:r>
+              <a:rPr sz="1000" b="0" dirty="0">
+                <a:solidFill>
+                  <a:srgbClr val="595959"/>
+                </a:solidFill>
+                <a:latin typeface="맑은 고딕"/>
+              </a:rPr>
+              <a:t> 4개 </a:t>
+            </a:r>
+            <a:r>
+              <a:rPr sz="1000" b="0" dirty="0" err="1">
+                <a:solidFill>
+                  <a:srgbClr val="595959"/>
+                </a:solidFill>
+                <a:latin typeface="맑은 고딕"/>
+              </a:rPr>
+              <a:t>그룹이며</a:t>
+            </a:r>
+            <a:r>
+              <a:rPr sz="1000" b="0" dirty="0">
+                <a:solidFill>
+                  <a:srgbClr val="595959"/>
+                </a:solidFill>
+                <a:latin typeface="맑은 고딕"/>
+              </a:rPr>
+              <a:t>,
+    </a:t>
+            </a:r>
+            <a:r>
+              <a:rPr sz="1000" b="0" dirty="0" err="1">
+                <a:solidFill>
+                  <a:srgbClr val="595959"/>
+                </a:solidFill>
+                <a:latin typeface="맑은 고딕"/>
+              </a:rPr>
+              <a:t>색은</a:t>
+            </a:r>
+            <a:r>
+              <a:rPr sz="1000" b="0" dirty="0">
+                <a:solidFill>
+                  <a:srgbClr val="595959"/>
+                </a:solidFill>
+                <a:latin typeface="맑은 고딕"/>
+              </a:rPr>
+              <a:t> [</a:t>
+            </a:r>
+            <a:r>
+              <a:rPr sz="1000" b="0" dirty="0" err="1">
+                <a:solidFill>
+                  <a:srgbClr val="595959"/>
+                </a:solidFill>
+                <a:latin typeface="맑은 고딕"/>
+              </a:rPr>
+              <a:t>범례</a:t>
+            </a:r>
+            <a:r>
+              <a:rPr sz="1000" b="0" dirty="0">
+                <a:solidFill>
+                  <a:srgbClr val="595959"/>
+                </a:solidFill>
+                <a:latin typeface="맑은 고딕"/>
+              </a:rPr>
+              <a:t>] </a:t>
+            </a:r>
+            <a:r>
+              <a:rPr sz="1000" b="0" dirty="0" err="1">
+                <a:solidFill>
+                  <a:srgbClr val="595959"/>
+                </a:solidFill>
+                <a:latin typeface="맑은 고딕"/>
+              </a:rPr>
+              <a:t>창에서</a:t>
+            </a:r>
+            <a:r>
+              <a:rPr sz="1000" b="0" dirty="0">
+                <a:solidFill>
+                  <a:srgbClr val="595959"/>
+                </a:solidFill>
+                <a:latin typeface="맑은 고딕"/>
+              </a:rPr>
+              <a:t> </a:t>
+            </a:r>
+            <a:r>
+              <a:rPr sz="1000" b="0" dirty="0" err="1">
+                <a:solidFill>
+                  <a:srgbClr val="595959"/>
+                </a:solidFill>
+                <a:latin typeface="맑은 고딕"/>
+              </a:rPr>
+              <a:t>바꾸면</a:t>
+            </a:r>
+            <a:r>
+              <a:rPr sz="1000" b="0" dirty="0">
+                <a:solidFill>
+                  <a:srgbClr val="595959"/>
+                </a:solidFill>
+                <a:latin typeface="맑은 고딕"/>
+              </a:rPr>
+              <a:t> 이 </a:t>
+            </a:r>
+            <a:r>
+              <a:rPr sz="1000" b="0" dirty="0" err="1">
+                <a:solidFill>
+                  <a:srgbClr val="595959"/>
+                </a:solidFill>
+                <a:latin typeface="맑은 고딕"/>
+              </a:rPr>
+              <a:t>표에도</a:t>
+            </a:r>
+            <a:r>
+              <a:rPr sz="1000" b="0" dirty="0">
+                <a:solidFill>
+                  <a:srgbClr val="595959"/>
+                </a:solidFill>
+                <a:latin typeface="맑은 고딕"/>
+              </a:rPr>
+              <a:t> </a:t>
+            </a:r>
+            <a:r>
+              <a:rPr sz="1000" b="0" dirty="0" err="1">
+                <a:solidFill>
+                  <a:srgbClr val="595959"/>
+                </a:solidFill>
+                <a:latin typeface="맑은 고딕"/>
+              </a:rPr>
+              <a:t>곧바로</a:t>
+            </a:r>
+            <a:r>
+              <a:rPr sz="1000" b="0" dirty="0">
+                <a:solidFill>
+                  <a:srgbClr val="595959"/>
+                </a:solidFill>
+                <a:latin typeface="맑은 고딕"/>
+              </a:rPr>
+              <a:t> </a:t>
+            </a:r>
+            <a:r>
+              <a:rPr sz="1000" b="0" dirty="0" err="1">
+                <a:solidFill>
+                  <a:srgbClr val="595959"/>
+                </a:solidFill>
+                <a:latin typeface="맑은 고딕"/>
+              </a:rPr>
+              <a:t>반영된다</a:t>
+            </a:r>
+            <a:r>
+              <a:rPr sz="1000" b="0" dirty="0">
+                <a:solidFill>
+                  <a:srgbClr val="595959"/>
+                </a:solidFill>
+                <a:latin typeface="맑은 고딕"/>
+              </a:rPr>
+              <a:t>.</a:t>
+            </a:r>
+          </a:p>
+          <a:p>
+            <a:pPr algn="l"/>
+            <a:r>
+              <a:rPr sz="1000" b="0" dirty="0">
+                <a:solidFill>
+                  <a:srgbClr val="595959"/>
+                </a:solidFill>
+                <a:latin typeface="맑은 고딕"/>
+              </a:rPr>
+              <a:t>· C/V#2(S/C#1 </a:t>
+            </a:r>
+            <a:r>
+              <a:rPr sz="1000" b="0" dirty="0" err="1">
+                <a:solidFill>
+                  <a:srgbClr val="595959"/>
+                </a:solidFill>
+                <a:latin typeface="맑은 고딕"/>
+              </a:rPr>
+              <a:t>통로</a:t>
+            </a:r>
+            <a:r>
+              <a:rPr sz="1000" b="0" dirty="0">
+                <a:solidFill>
+                  <a:srgbClr val="595959"/>
+                </a:solidFill>
+                <a:latin typeface="맑은 고딕"/>
+              </a:rPr>
+              <a:t>)와 C/V#11(</a:t>
+            </a:r>
+            <a:r>
+              <a:rPr sz="1000" b="0" dirty="0" err="1">
+                <a:solidFill>
+                  <a:srgbClr val="595959"/>
+                </a:solidFill>
+                <a:latin typeface="맑은 고딕"/>
+              </a:rPr>
+              <a:t>입출고</a:t>
+            </a:r>
+            <a:r>
+              <a:rPr sz="1000" b="0" dirty="0">
+                <a:solidFill>
+                  <a:srgbClr val="595959"/>
+                </a:solidFill>
+                <a:latin typeface="맑은 고딕"/>
+              </a:rPr>
+              <a:t> </a:t>
+            </a:r>
+            <a:r>
+              <a:rPr sz="1000" b="0" dirty="0" err="1">
+                <a:solidFill>
+                  <a:srgbClr val="595959"/>
+                </a:solidFill>
+                <a:latin typeface="맑은 고딕"/>
+              </a:rPr>
+              <a:t>겸용대</a:t>
+            </a:r>
+            <a:r>
+              <a:rPr sz="1000" b="0" dirty="0">
+                <a:solidFill>
+                  <a:srgbClr val="595959"/>
+                </a:solidFill>
+                <a:latin typeface="맑은 고딕"/>
+              </a:rPr>
+              <a:t>)의 </a:t>
+            </a:r>
+            <a:r>
+              <a:rPr sz="1000" b="0" dirty="0" err="1">
+                <a:solidFill>
+                  <a:srgbClr val="595959"/>
+                </a:solidFill>
+                <a:latin typeface="맑은 고딕"/>
+              </a:rPr>
+              <a:t>현재</a:t>
+            </a:r>
+            <a:r>
+              <a:rPr sz="1000" b="0" dirty="0">
+                <a:solidFill>
+                  <a:srgbClr val="595959"/>
+                </a:solidFill>
+                <a:latin typeface="맑은 고딕"/>
+              </a:rPr>
+              <a:t> </a:t>
+            </a:r>
+            <a:r>
+              <a:rPr sz="1000" b="0" dirty="0" err="1">
+                <a:solidFill>
+                  <a:srgbClr val="595959"/>
+                </a:solidFill>
+                <a:latin typeface="맑은 고딕"/>
+              </a:rPr>
+              <a:t>입출고</a:t>
+            </a:r>
+            <a:r>
+              <a:rPr sz="1000" b="0" dirty="0">
+                <a:solidFill>
+                  <a:srgbClr val="595959"/>
+                </a:solidFill>
+                <a:latin typeface="맑은 고딕"/>
+              </a:rPr>
+              <a:t> </a:t>
+            </a:r>
+            <a:r>
+              <a:rPr sz="1000" b="0" dirty="0" err="1">
+                <a:solidFill>
+                  <a:srgbClr val="595959"/>
+                </a:solidFill>
+                <a:latin typeface="맑은 고딕"/>
+              </a:rPr>
+              <a:t>모드를</a:t>
+            </a:r>
+            <a:r>
+              <a:rPr sz="1000" b="0" dirty="0">
+                <a:solidFill>
+                  <a:srgbClr val="595959"/>
+                </a:solidFill>
+                <a:latin typeface="맑은 고딕"/>
+              </a:rPr>
+              <a:t> "</a:t>
+            </a:r>
+            <a:r>
+              <a:rPr sz="1000" b="0" dirty="0" err="1">
+                <a:solidFill>
+                  <a:srgbClr val="595959"/>
+                </a:solidFill>
+                <a:latin typeface="맑은 고딕"/>
+              </a:rPr>
+              <a:t>입고</a:t>
+            </a:r>
+            <a:r>
+              <a:rPr sz="1000" b="0" dirty="0">
+                <a:solidFill>
+                  <a:srgbClr val="595959"/>
+                </a:solidFill>
+                <a:latin typeface="맑은 고딕"/>
+              </a:rPr>
+              <a:t> </a:t>
+            </a:r>
+            <a:r>
+              <a:rPr sz="1000" b="0" dirty="0" err="1">
+                <a:solidFill>
+                  <a:srgbClr val="595959"/>
+                </a:solidFill>
+                <a:latin typeface="맑은 고딕"/>
+              </a:rPr>
+              <a:t>모드</a:t>
+            </a:r>
+            <a:r>
+              <a:rPr sz="1000" b="0" dirty="0">
+                <a:solidFill>
+                  <a:srgbClr val="595959"/>
+                </a:solidFill>
+                <a:latin typeface="맑은 고딕"/>
+              </a:rPr>
+              <a:t>/</a:t>
+            </a:r>
+            <a:r>
+              <a:rPr sz="1000" b="0" dirty="0" err="1">
+                <a:solidFill>
+                  <a:srgbClr val="595959"/>
+                </a:solidFill>
+                <a:latin typeface="맑은 고딕"/>
+              </a:rPr>
+              <a:t>출고</a:t>
+            </a:r>
+            <a:r>
+              <a:rPr sz="1000" b="0" dirty="0">
+                <a:solidFill>
+                  <a:srgbClr val="595959"/>
+                </a:solidFill>
+                <a:latin typeface="맑은 고딕"/>
+              </a:rPr>
+              <a:t> </a:t>
+            </a:r>
+            <a:r>
+              <a:rPr sz="1000" b="0" dirty="0" err="1">
+                <a:solidFill>
+                  <a:srgbClr val="595959"/>
+                </a:solidFill>
+                <a:latin typeface="맑은 고딕"/>
+              </a:rPr>
+              <a:t>모드"로</a:t>
+            </a:r>
+            <a:r>
+              <a:rPr sz="1000" b="0" dirty="0">
+                <a:solidFill>
+                  <a:srgbClr val="595959"/>
+                </a:solidFill>
+                <a:latin typeface="맑은 고딕"/>
+              </a:rPr>
+              <a:t> </a:t>
+            </a:r>
+            <a:r>
+              <a:rPr sz="1000" b="0" dirty="0" err="1">
+                <a:solidFill>
+                  <a:srgbClr val="595959"/>
+                </a:solidFill>
+                <a:latin typeface="맑은 고딕"/>
+              </a:rPr>
+              <a:t>표시한다</a:t>
+            </a:r>
+            <a:r>
+              <a:rPr sz="1000" b="0" dirty="0">
+                <a:solidFill>
+                  <a:srgbClr val="595959"/>
+                </a:solidFill>
+                <a:latin typeface="맑은 고딕"/>
+              </a:rPr>
+              <a:t>.</a:t>
+            </a:r>
+          </a:p>
+          <a:p>
+            <a:pPr algn="l"/>
+            <a:r>
+              <a:rPr sz="1000" b="0" dirty="0">
+                <a:solidFill>
+                  <a:srgbClr val="595959"/>
+                </a:solidFill>
+                <a:latin typeface="맑은 고딕"/>
+              </a:rPr>
+              <a:t>· </a:t>
+            </a:r>
+            <a:r>
+              <a:rPr sz="1000" b="0" dirty="0" err="1">
+                <a:solidFill>
+                  <a:srgbClr val="595959"/>
+                </a:solidFill>
+                <a:latin typeface="맑은 고딕"/>
+              </a:rPr>
+              <a:t>작업대</a:t>
+            </a:r>
+            <a:r>
+              <a:rPr sz="1000" b="0" dirty="0">
+                <a:solidFill>
+                  <a:srgbClr val="595959"/>
+                </a:solidFill>
+                <a:latin typeface="맑은 고딕"/>
+              </a:rPr>
+              <a:t> </a:t>
+            </a:r>
+            <a:r>
+              <a:rPr sz="1000" b="0" dirty="0" err="1">
+                <a:solidFill>
+                  <a:srgbClr val="595959"/>
+                </a:solidFill>
+                <a:latin typeface="맑은 고딕"/>
+              </a:rPr>
+              <a:t>라벨은</a:t>
+            </a:r>
+            <a:r>
+              <a:rPr sz="1000" b="0" dirty="0">
+                <a:solidFill>
+                  <a:srgbClr val="595959"/>
+                </a:solidFill>
+                <a:latin typeface="맑은 고딕"/>
+              </a:rPr>
+              <a:t> IMS </a:t>
+            </a:r>
+            <a:r>
+              <a:rPr sz="1000" b="0" dirty="0" err="1">
+                <a:solidFill>
+                  <a:srgbClr val="595959"/>
+                </a:solidFill>
+                <a:latin typeface="맑은 고딕"/>
+              </a:rPr>
+              <a:t>스테이션</a:t>
+            </a:r>
+            <a:r>
+              <a:rPr sz="1000" b="0" dirty="0">
+                <a:solidFill>
+                  <a:srgbClr val="595959"/>
+                </a:solidFill>
+                <a:latin typeface="맑은 고딕"/>
+              </a:rPr>
+              <a:t> </a:t>
+            </a:r>
+            <a:r>
+              <a:rPr sz="1000" b="0" dirty="0" err="1">
+                <a:solidFill>
+                  <a:srgbClr val="595959"/>
+                </a:solidFill>
+                <a:latin typeface="맑은 고딕"/>
+              </a:rPr>
+              <a:t>코드와</a:t>
+            </a:r>
+            <a:r>
+              <a:rPr sz="1000" b="0" dirty="0">
+                <a:solidFill>
+                  <a:srgbClr val="595959"/>
+                </a:solidFill>
+                <a:latin typeface="맑은 고딕"/>
+              </a:rPr>
+              <a:t> </a:t>
+            </a:r>
+            <a:r>
+              <a:rPr sz="1000" b="0" dirty="0" err="1">
+                <a:solidFill>
+                  <a:srgbClr val="595959"/>
+                </a:solidFill>
+                <a:latin typeface="맑은 고딕"/>
+              </a:rPr>
+              <a:t>명칭을</a:t>
+            </a:r>
+            <a:r>
+              <a:rPr sz="1000" b="0" dirty="0">
+                <a:solidFill>
+                  <a:srgbClr val="595959"/>
+                </a:solidFill>
+                <a:latin typeface="맑은 고딕"/>
+              </a:rPr>
+              <a:t> </a:t>
+            </a:r>
+            <a:r>
+              <a:rPr sz="1000" b="0" dirty="0" err="1">
+                <a:solidFill>
+                  <a:srgbClr val="595959"/>
+                </a:solidFill>
+                <a:latin typeface="맑은 고딕"/>
+              </a:rPr>
+              <a:t>함께</a:t>
+            </a:r>
+            <a:r>
+              <a:rPr sz="1000" b="0" dirty="0">
+                <a:solidFill>
+                  <a:srgbClr val="595959"/>
+                </a:solidFill>
+                <a:latin typeface="맑은 고딕"/>
+              </a:rPr>
+              <a:t> </a:t>
+            </a:r>
+            <a:r>
+              <a:rPr sz="1000" b="0" dirty="0" err="1">
+                <a:solidFill>
+                  <a:srgbClr val="595959"/>
+                </a:solidFill>
+                <a:latin typeface="맑은 고딕"/>
+              </a:rPr>
+              <a:t>표기한다</a:t>
+            </a:r>
+            <a:r>
+              <a:rPr sz="1000" b="0" dirty="0">
+                <a:solidFill>
+                  <a:srgbClr val="595959"/>
+                </a:solidFill>
+                <a:latin typeface="맑은 고딕"/>
+              </a:rPr>
+              <a:t> : [101] </a:t>
+            </a:r>
+            <a:r>
+              <a:rPr sz="1000" b="0" dirty="0" err="1">
+                <a:solidFill>
+                  <a:srgbClr val="595959"/>
+                </a:solidFill>
+                <a:latin typeface="맑은 고딕"/>
+              </a:rPr>
+              <a:t>외부</a:t>
+            </a:r>
+            <a:r>
+              <a:rPr sz="1000" b="0" dirty="0">
+                <a:solidFill>
+                  <a:srgbClr val="595959"/>
+                </a:solidFill>
+                <a:latin typeface="맑은 고딕"/>
+              </a:rPr>
+              <a:t> </a:t>
+            </a:r>
+            <a:r>
+              <a:rPr sz="1000" b="0" dirty="0" err="1">
+                <a:solidFill>
+                  <a:srgbClr val="595959"/>
+                </a:solidFill>
+                <a:latin typeface="맑은 고딕"/>
+              </a:rPr>
+              <a:t>입고</a:t>
+            </a:r>
+            <a:r>
+              <a:rPr sz="1000" b="0" dirty="0">
+                <a:solidFill>
+                  <a:srgbClr val="595959"/>
+                </a:solidFill>
+                <a:latin typeface="맑은 고딕"/>
+              </a:rPr>
+              <a:t> </a:t>
+            </a:r>
+            <a:r>
+              <a:rPr sz="1000" b="0" dirty="0" err="1">
+                <a:solidFill>
+                  <a:srgbClr val="595959"/>
+                </a:solidFill>
+                <a:latin typeface="맑은 고딕"/>
+              </a:rPr>
+              <a:t>전용</a:t>
+            </a:r>
+            <a:r>
+              <a:rPr sz="1000" b="0" dirty="0">
+                <a:solidFill>
+                  <a:srgbClr val="595959"/>
+                </a:solidFill>
+                <a:latin typeface="맑은 고딕"/>
+              </a:rPr>
+              <a:t> </a:t>
+            </a:r>
+            <a:r>
+              <a:rPr sz="1000" b="0" dirty="0" err="1">
+                <a:solidFill>
+                  <a:srgbClr val="595959"/>
+                </a:solidFill>
+                <a:latin typeface="맑은 고딕"/>
+              </a:rPr>
+              <a:t>입출고대</a:t>
+            </a:r>
+            <a:r>
+              <a:rPr sz="1000" b="0" dirty="0">
+                <a:solidFill>
+                  <a:srgbClr val="595959"/>
+                </a:solidFill>
+                <a:latin typeface="맑은 고딕"/>
+              </a:rPr>
+              <a:t>, 103 </a:t>
+            </a:r>
+            <a:r>
+              <a:rPr sz="1000" b="0" dirty="0" err="1">
+                <a:solidFill>
+                  <a:srgbClr val="595959"/>
+                </a:solidFill>
+                <a:latin typeface="맑은 고딕"/>
+              </a:rPr>
+              <a:t>제품</a:t>
+            </a:r>
+            <a:r>
+              <a:rPr sz="1000" b="0" dirty="0">
+                <a:solidFill>
+                  <a:srgbClr val="595959"/>
+                </a:solidFill>
+                <a:latin typeface="맑은 고딕"/>
+              </a:rPr>
+              <a:t> </a:t>
+            </a:r>
+            <a:r>
+              <a:rPr sz="1000" b="0" dirty="0" err="1">
+                <a:solidFill>
+                  <a:srgbClr val="595959"/>
+                </a:solidFill>
+                <a:latin typeface="맑은 고딕"/>
+              </a:rPr>
+              <a:t>입고대</a:t>
+            </a:r>
+            <a:r>
+              <a:rPr sz="1000" b="0" dirty="0">
+                <a:solidFill>
+                  <a:srgbClr val="595959"/>
+                </a:solidFill>
+                <a:latin typeface="맑은 고딕"/>
+              </a:rPr>
+              <a:t>(TR#24), 104 </a:t>
+            </a:r>
+            <a:r>
+              <a:rPr sz="1000" b="0" dirty="0" err="1">
+                <a:solidFill>
+                  <a:srgbClr val="595959"/>
+                </a:solidFill>
+                <a:latin typeface="맑은 고딕"/>
+              </a:rPr>
+              <a:t>원부자재</a:t>
+            </a:r>
+            <a:r>
+              <a:rPr sz="1000" b="0" dirty="0">
+                <a:solidFill>
+                  <a:srgbClr val="595959"/>
+                </a:solidFill>
+                <a:latin typeface="맑은 고딕"/>
+              </a:rPr>
+              <a:t> </a:t>
+            </a:r>
+            <a:r>
+              <a:rPr sz="1000" b="0" dirty="0" err="1">
+                <a:solidFill>
+                  <a:srgbClr val="595959"/>
+                </a:solidFill>
+                <a:latin typeface="맑은 고딕"/>
+              </a:rPr>
+              <a:t>불출대</a:t>
+            </a:r>
+            <a:r>
+              <a:rPr sz="1000" b="0" dirty="0">
+                <a:solidFill>
+                  <a:srgbClr val="595959"/>
+                </a:solidFill>
+                <a:latin typeface="맑은 고딕"/>
+              </a:rPr>
+              <a:t>(TR#26), 102 </a:t>
+            </a:r>
+            <a:r>
+              <a:rPr sz="1000" b="0" dirty="0" err="1">
+                <a:solidFill>
+                  <a:srgbClr val="595959"/>
+                </a:solidFill>
+                <a:latin typeface="맑은 고딕"/>
+              </a:rPr>
+              <a:t>피킹</a:t>
+            </a:r>
+            <a:r>
+              <a:rPr sz="1000" b="0" dirty="0">
+                <a:solidFill>
+                  <a:srgbClr val="595959"/>
+                </a:solidFill>
+                <a:latin typeface="맑은 고딕"/>
+              </a:rPr>
+              <a:t> </a:t>
+            </a:r>
+            <a:r>
+              <a:rPr sz="1000" b="0" dirty="0" err="1">
+                <a:solidFill>
+                  <a:srgbClr val="595959"/>
+                </a:solidFill>
+                <a:latin typeface="맑은 고딕"/>
+              </a:rPr>
+              <a:t>작업대</a:t>
+            </a:r>
+            <a:r>
+              <a:rPr sz="1000" b="0" dirty="0">
+                <a:solidFill>
+                  <a:srgbClr val="595959"/>
+                </a:solidFill>
+                <a:latin typeface="맑은 고딕"/>
+              </a:rPr>
+              <a:t>(TR#29/30).</a:t>
+            </a:r>
+          </a:p>
+          <a:p>
+            <a:pPr algn="l"/>
+            <a:r>
+              <a:rPr sz="1000" b="0" dirty="0">
+                <a:solidFill>
+                  <a:srgbClr val="595959"/>
+                </a:solidFill>
+                <a:latin typeface="맑은 고딕"/>
+              </a:rPr>
+              <a:t>· </a:t>
+            </a:r>
+            <a:r>
+              <a:rPr lang="ko-KR" altLang="en-US" sz="1000" dirty="0">
+                <a:solidFill>
+                  <a:srgbClr val="595959"/>
+                </a:solidFill>
+                <a:latin typeface="맑은 고딕"/>
+              </a:rPr>
+              <a:t>상단</a:t>
+            </a:r>
+            <a:r>
+              <a:rPr sz="1000" b="0" dirty="0">
+                <a:solidFill>
+                  <a:srgbClr val="595959"/>
+                </a:solidFill>
+                <a:latin typeface="맑은 고딕"/>
+              </a:rPr>
+              <a:t> </a:t>
+            </a:r>
+            <a:r>
+              <a:rPr sz="1000" b="0" dirty="0" err="1">
+                <a:solidFill>
+                  <a:srgbClr val="595959"/>
+                </a:solidFill>
+                <a:latin typeface="맑은 고딕"/>
+              </a:rPr>
+              <a:t>상태바</a:t>
+            </a:r>
+            <a:r>
+              <a:rPr sz="1000" b="0" dirty="0">
+                <a:solidFill>
+                  <a:srgbClr val="595959"/>
+                </a:solidFill>
+                <a:latin typeface="맑은 고딕"/>
+              </a:rPr>
+              <a:t> EQUIP / HOST / SCH 는 각 </a:t>
+            </a:r>
+            <a:r>
+              <a:rPr sz="1000" b="0" dirty="0" err="1">
+                <a:solidFill>
+                  <a:srgbClr val="595959"/>
+                </a:solidFill>
+                <a:latin typeface="맑은 고딕"/>
+              </a:rPr>
+              <a:t>서버</a:t>
+            </a:r>
+            <a:r>
+              <a:rPr sz="1000" b="0" dirty="0">
+                <a:solidFill>
+                  <a:srgbClr val="595959"/>
+                </a:solidFill>
+                <a:latin typeface="맑은 고딕"/>
+              </a:rPr>
+              <a:t> </a:t>
+            </a:r>
+            <a:r>
+              <a:rPr sz="1000" b="0" dirty="0" err="1">
+                <a:solidFill>
+                  <a:srgbClr val="595959"/>
+                </a:solidFill>
+                <a:latin typeface="맑은 고딕"/>
+              </a:rPr>
+              <a:t>프로그램</a:t>
+            </a:r>
+            <a:r>
+              <a:rPr sz="1000" b="0" dirty="0">
+                <a:solidFill>
+                  <a:srgbClr val="595959"/>
+                </a:solidFill>
+                <a:latin typeface="맑은 고딕"/>
+              </a:rPr>
+              <a:t>(</a:t>
+            </a:r>
+            <a:r>
+              <a:rPr sz="1000" b="0" dirty="0" err="1">
+                <a:solidFill>
+                  <a:srgbClr val="595959"/>
+                </a:solidFill>
+                <a:latin typeface="맑은 고딕"/>
+              </a:rPr>
+              <a:t>설비</a:t>
+            </a:r>
+            <a:r>
+              <a:rPr sz="1000" b="0" dirty="0">
+                <a:solidFill>
+                  <a:srgbClr val="595959"/>
+                </a:solidFill>
+                <a:latin typeface="맑은 고딕"/>
+              </a:rPr>
+              <a:t> </a:t>
+            </a:r>
+            <a:r>
+              <a:rPr sz="1000" b="0" dirty="0" err="1">
+                <a:solidFill>
+                  <a:srgbClr val="595959"/>
+                </a:solidFill>
+                <a:latin typeface="맑은 고딕"/>
+              </a:rPr>
+              <a:t>통신</a:t>
+            </a:r>
+            <a:r>
+              <a:rPr sz="1000" b="0" dirty="0">
+                <a:solidFill>
+                  <a:srgbClr val="595959"/>
+                </a:solidFill>
+                <a:latin typeface="맑은 고딕"/>
+              </a:rPr>
+              <a:t>/</a:t>
+            </a:r>
+            <a:r>
+              <a:rPr sz="1000" b="0" dirty="0" err="1">
+                <a:solidFill>
+                  <a:srgbClr val="595959"/>
+                </a:solidFill>
+                <a:latin typeface="맑은 고딕"/>
+              </a:rPr>
+              <a:t>상위</a:t>
+            </a:r>
+            <a:r>
+              <a:rPr sz="1000" b="0" dirty="0">
+                <a:solidFill>
+                  <a:srgbClr val="595959"/>
+                </a:solidFill>
+                <a:latin typeface="맑은 고딕"/>
+              </a:rPr>
+              <a:t> </a:t>
+            </a:r>
+            <a:r>
+              <a:rPr sz="1000" b="0" dirty="0" err="1">
+                <a:solidFill>
+                  <a:srgbClr val="595959"/>
+                </a:solidFill>
+                <a:latin typeface="맑은 고딕"/>
+              </a:rPr>
+              <a:t>통신</a:t>
+            </a:r>
+            <a:r>
+              <a:rPr sz="1000" b="0" dirty="0">
+                <a:solidFill>
+                  <a:srgbClr val="595959"/>
+                </a:solidFill>
+                <a:latin typeface="맑은 고딕"/>
+              </a:rPr>
+              <a:t>/</a:t>
+            </a:r>
+            <a:r>
+              <a:rPr sz="1000" b="0" dirty="0" err="1">
+                <a:solidFill>
+                  <a:srgbClr val="595959"/>
+                </a:solidFill>
+                <a:latin typeface="맑은 고딕"/>
+              </a:rPr>
+              <a:t>스케줄러</a:t>
+            </a:r>
+            <a:r>
+              <a:rPr sz="1000" b="0" dirty="0">
+                <a:solidFill>
+                  <a:srgbClr val="595959"/>
+                </a:solidFill>
+                <a:latin typeface="맑은 고딕"/>
+              </a:rPr>
+              <a:t>)의 </a:t>
+            </a:r>
+            <a:r>
+              <a:rPr sz="1000" b="0" dirty="0" err="1">
+                <a:solidFill>
+                  <a:srgbClr val="595959"/>
+                </a:solidFill>
+                <a:latin typeface="맑은 고딕"/>
+              </a:rPr>
+              <a:t>생존</a:t>
+            </a:r>
+            <a:r>
+              <a:rPr sz="1000" b="0" dirty="0">
+                <a:solidFill>
+                  <a:srgbClr val="595959"/>
+                </a:solidFill>
+                <a:latin typeface="맑은 고딕"/>
+              </a:rPr>
+              <a:t> </a:t>
+            </a:r>
+            <a:r>
+              <a:rPr sz="1000" b="0" dirty="0" err="1">
+                <a:solidFill>
+                  <a:srgbClr val="595959"/>
+                </a:solidFill>
+                <a:latin typeface="맑은 고딕"/>
+              </a:rPr>
+              <a:t>상태</a:t>
+            </a:r>
+            <a:r>
+              <a:rPr sz="1000" b="0" dirty="0">
+                <a:solidFill>
+                  <a:srgbClr val="595959"/>
+                </a:solidFill>
+                <a:latin typeface="맑은 고딕"/>
+              </a:rPr>
+              <a:t>(</a:t>
+            </a:r>
+            <a:r>
+              <a:rPr sz="1000" b="0" dirty="0" err="1">
+                <a:solidFill>
+                  <a:srgbClr val="595959"/>
+                </a:solidFill>
+                <a:latin typeface="맑은 고딕"/>
+              </a:rPr>
+              <a:t>초록</a:t>
+            </a:r>
+            <a:r>
+              <a:rPr sz="1000" b="0" dirty="0">
+                <a:solidFill>
+                  <a:srgbClr val="595959"/>
+                </a:solidFill>
+                <a:latin typeface="맑은 고딕"/>
+              </a:rPr>
+              <a:t>=</a:t>
+            </a:r>
+            <a:r>
+              <a:rPr sz="1000" b="0" dirty="0" err="1">
+                <a:solidFill>
+                  <a:srgbClr val="595959"/>
+                </a:solidFill>
+                <a:latin typeface="맑은 고딕"/>
+              </a:rPr>
+              <a:t>정상</a:t>
+            </a:r>
+            <a:r>
+              <a:rPr sz="1000" b="0" dirty="0">
+                <a:solidFill>
+                  <a:srgbClr val="595959"/>
+                </a:solidFill>
+                <a:latin typeface="맑은 고딕"/>
+              </a:rPr>
+              <a:t>, </a:t>
+            </a:r>
+            <a:r>
+              <a:rPr sz="1000" b="0" dirty="0" err="1">
+                <a:solidFill>
+                  <a:srgbClr val="595959"/>
+                </a:solidFill>
+                <a:latin typeface="맑은 고딕"/>
+              </a:rPr>
+              <a:t>빨강</a:t>
+            </a:r>
+            <a:r>
+              <a:rPr sz="1000" b="0" dirty="0">
+                <a:solidFill>
+                  <a:srgbClr val="595959"/>
+                </a:solidFill>
+                <a:latin typeface="맑은 고딕"/>
+              </a:rPr>
+              <a:t>=</a:t>
+            </a:r>
+            <a:r>
+              <a:rPr sz="1000" b="0" dirty="0" err="1">
+                <a:solidFill>
+                  <a:srgbClr val="595959"/>
+                </a:solidFill>
+                <a:latin typeface="맑은 고딕"/>
+              </a:rPr>
+              <a:t>끊김</a:t>
+            </a:r>
+            <a:r>
+              <a:rPr sz="1000" b="0" dirty="0">
+                <a:solidFill>
+                  <a:srgbClr val="595959"/>
+                </a:solidFill>
+                <a:latin typeface="맑은 고딕"/>
+              </a:rPr>
+              <a:t>)</a:t>
+            </a:r>
+            <a:r>
+              <a:rPr sz="1000" b="0" dirty="0" err="1">
+                <a:solidFill>
+                  <a:srgbClr val="595959"/>
+                </a:solidFill>
+                <a:latin typeface="맑은 고딕"/>
+              </a:rPr>
+              <a:t>이다</a:t>
+            </a:r>
+            <a:r>
+              <a:rPr sz="1000" b="0" dirty="0">
+                <a:solidFill>
+                  <a:srgbClr val="595959"/>
+                </a:solidFill>
+                <a:latin typeface="맑은 고딕"/>
+              </a:rPr>
+              <a:t>.</a:t>
+            </a:r>
+          </a:p>
+        </p:txBody>
+      </p:sp>
+      <p:sp>
+        <p:nvSpPr>
+          <p:cNvPr id="6" name="TextBox 5"/>
+          <p:cNvSpPr txBox="1"/>
+          <p:nvPr/>
+        </p:nvSpPr>
+        <p:spPr>
+          <a:xfrm>
+            <a:off x="457200" y="6400800"/>
+            <a:ext cx="3657600" cy="320040"/>
+          </a:xfrm>
+          <a:prstGeom prst="rect">
+            <a:avLst/>
+          </a:prstGeom>
+          <a:noFill/>
+        </p:spPr>
+        <p:txBody>
+          <a:bodyPr wrap="square" lIns="45720" rIns="45720" anchor="t">
+            <a:spAutoFit/>
+          </a:bodyPr>
+          <a:lstStyle/>
+          <a:p>
+            <a:pPr algn="l"/>
+            <a:r>
+              <a:rPr sz="1000" b="0">
+                <a:solidFill>
+                  <a:srgbClr val="595959"/>
+                </a:solidFill>
+                <a:latin typeface="맑은 고딕"/>
+              </a:rPr>
+              <a:t>LG 화학 1동 ECS  |  화면설계서</a:t>
+            </a:r>
+          </a:p>
+        </p:txBody>
+      </p:sp>
+      <p:sp>
+        <p:nvSpPr>
+          <p:cNvPr id="7" name="TextBox 6"/>
+          <p:cNvSpPr txBox="1"/>
+          <p:nvPr/>
+        </p:nvSpPr>
+        <p:spPr>
+          <a:xfrm>
+            <a:off x="11155680" y="6400800"/>
+            <a:ext cx="731520" cy="320040"/>
+          </a:xfrm>
+          <a:prstGeom prst="rect">
+            <a:avLst/>
+          </a:prstGeom>
+          <a:noFill/>
+        </p:spPr>
+        <p:txBody>
+          <a:bodyPr wrap="square" lIns="45720" rIns="45720" anchor="t">
+            <a:spAutoFit/>
+          </a:bodyPr>
+          <a:lstStyle/>
+          <a:p>
+            <a:pPr algn="r"/>
+            <a:r>
+              <a:rPr sz="1000" b="0">
+                <a:solidFill>
+                  <a:srgbClr val="595959"/>
+                </a:solidFill>
+                <a:latin typeface="맑은 고딕"/>
+              </a:rPr>
+              <a:t>4</a:t>
+            </a:r>
+          </a:p>
+        </p:txBody>
+      </p:sp>
       <p:pic>
         <p:nvPicPr>
-          <p:cNvPr id="4" name="Picture 3" descr="main_0.png"/>
+          <p:cNvPr id="9" name="그림 8">
+            <a:extLst>
+              <a:ext uri="{FF2B5EF4-FFF2-40B4-BE49-F238E27FC236}">
+                <a16:creationId xmlns:a16="http://schemas.microsoft.com/office/drawing/2014/main" id="{DFB7B544-EF96-B7D2-5985-CB1EB489E097}"/>
+              </a:ext>
+            </a:extLst>
+          </p:cNvPr>
           <p:cNvPicPr>
             <a:picLocks noChangeAspect="1"/>
           </p:cNvPicPr>
@@ -8585,1902 +11688,14 @@
         </p:blipFill>
         <p:spPr>
           <a:xfrm>
-            <a:off x="640080" y="1673880"/>
-            <a:ext cx="7498079" cy="4058878"/>
+            <a:off x="536509" y="1353127"/>
+            <a:ext cx="7705222" cy="4151746"/>
           </a:xfrm>
           <a:prstGeom prst="rect">
             <a:avLst/>
           </a:prstGeom>
         </p:spPr>
       </p:pic>
-      <p:sp>
-        <p:nvSpPr>
-          <p:cNvPr id="5" name="TextBox 4"/>
-          <p:cNvSpPr txBox="1"/>
-          <p:nvPr/>
-        </p:nvSpPr>
-        <p:spPr>
-          <a:xfrm>
-            <a:off x="8503920" y="1188720"/>
-            <a:ext cx="3291840" cy="4016484"/>
-          </a:xfrm>
-          <a:prstGeom prst="rect">
-            <a:avLst/>
-          </a:prstGeom>
-          <a:noFill/>
-        </p:spPr>
-        <p:txBody>
-          <a:bodyPr wrap="square" lIns="45720" rIns="45720" anchor="t">
-            <a:spAutoFit/>
-          </a:bodyPr>
-          <a:lstStyle/>
-          <a:p>
-            <a:pPr algn="l"/>
-            <a:r>
-              <a:rPr sz="1300" b="1" dirty="0">
-                <a:solidFill>
-                  <a:srgbClr val="1E2761"/>
-                </a:solidFill>
-                <a:latin typeface="맑은 고딕"/>
-              </a:rPr>
-              <a:t>■ </a:t>
-            </a:r>
-            <a:r>
-              <a:rPr sz="1300" b="1" dirty="0" err="1">
-                <a:solidFill>
-                  <a:srgbClr val="1E2761"/>
-                </a:solidFill>
-                <a:latin typeface="맑은 고딕"/>
-              </a:rPr>
-              <a:t>메뉴</a:t>
-            </a:r>
-            <a:r>
-              <a:rPr sz="1300" b="1" dirty="0">
-                <a:solidFill>
-                  <a:srgbClr val="1E2761"/>
-                </a:solidFill>
-                <a:latin typeface="맑은 고딕"/>
-              </a:rPr>
-              <a:t> Path</a:t>
-            </a:r>
-          </a:p>
-          <a:p>
-            <a:pPr algn="l"/>
-            <a:r>
-              <a:rPr sz="1100" b="0" dirty="0" err="1">
-                <a:solidFill>
-                  <a:srgbClr val="595959"/>
-                </a:solidFill>
-                <a:latin typeface="맑은 고딕"/>
-              </a:rPr>
-              <a:t>운전</a:t>
-            </a:r>
-            <a:r>
-              <a:rPr sz="1100" b="0" dirty="0">
-                <a:solidFill>
-                  <a:srgbClr val="595959"/>
-                </a:solidFill>
-                <a:latin typeface="맑은 고딕"/>
-              </a:rPr>
-              <a:t> </a:t>
-            </a:r>
-            <a:r>
-              <a:rPr sz="1100" b="0" dirty="0" err="1">
-                <a:solidFill>
-                  <a:srgbClr val="595959"/>
-                </a:solidFill>
-                <a:latin typeface="맑은 고딕"/>
-              </a:rPr>
-              <a:t>화면</a:t>
-            </a:r>
-            <a:r>
-              <a:rPr sz="1100" b="0" dirty="0">
-                <a:solidFill>
-                  <a:srgbClr val="595959"/>
-                </a:solidFill>
-                <a:latin typeface="맑은 고딕"/>
-              </a:rPr>
-              <a:t>(Ecs.exe) </a:t>
-            </a:r>
-            <a:r>
-              <a:rPr sz="1100" b="0" dirty="0" err="1">
-                <a:solidFill>
-                  <a:srgbClr val="595959"/>
-                </a:solidFill>
-                <a:latin typeface="맑은 고딕"/>
-              </a:rPr>
-              <a:t>실행</a:t>
-            </a:r>
-            <a:r>
-              <a:rPr sz="1100" b="0" dirty="0">
-                <a:solidFill>
-                  <a:srgbClr val="595959"/>
-                </a:solidFill>
-                <a:latin typeface="맑은 고딕"/>
-              </a:rPr>
-              <a:t> 시 첫 </a:t>
-            </a:r>
-            <a:r>
-              <a:rPr sz="1100" b="0" dirty="0" err="1">
-                <a:solidFill>
-                  <a:srgbClr val="595959"/>
-                </a:solidFill>
-                <a:latin typeface="맑은 고딕"/>
-              </a:rPr>
-              <a:t>화면</a:t>
-            </a:r>
-            <a:endParaRPr sz="1100" b="0" dirty="0">
-              <a:solidFill>
-                <a:srgbClr val="595959"/>
-              </a:solidFill>
-              <a:latin typeface="맑은 고딕"/>
-            </a:endParaRPr>
-          </a:p>
-          <a:p>
-            <a:pPr algn="l"/>
-            <a:endParaRPr sz="1100" b="0" dirty="0">
-              <a:solidFill>
-                <a:srgbClr val="595959"/>
-              </a:solidFill>
-              <a:latin typeface="맑은 고딕"/>
-            </a:endParaRPr>
-          </a:p>
-          <a:p>
-            <a:pPr algn="l"/>
-            <a:r>
-              <a:rPr sz="1300" b="1" dirty="0">
-                <a:solidFill>
-                  <a:srgbClr val="1E2761"/>
-                </a:solidFill>
-                <a:latin typeface="맑은 고딕"/>
-              </a:rPr>
-              <a:t>■ </a:t>
-            </a:r>
-            <a:r>
-              <a:rPr sz="1300" b="1" dirty="0" err="1">
-                <a:solidFill>
-                  <a:srgbClr val="1E2761"/>
-                </a:solidFill>
-                <a:latin typeface="맑은 고딕"/>
-              </a:rPr>
-              <a:t>프로그램</a:t>
-            </a:r>
-            <a:r>
-              <a:rPr sz="1300" b="1" dirty="0">
-                <a:solidFill>
-                  <a:srgbClr val="1E2761"/>
-                </a:solidFill>
-                <a:latin typeface="맑은 고딕"/>
-              </a:rPr>
-              <a:t> </a:t>
-            </a:r>
-            <a:r>
-              <a:rPr sz="1300" b="1" dirty="0" err="1">
-                <a:solidFill>
-                  <a:srgbClr val="1E2761"/>
-                </a:solidFill>
-                <a:latin typeface="맑은 고딕"/>
-              </a:rPr>
-              <a:t>개요</a:t>
-            </a:r>
-            <a:endParaRPr sz="1300" b="1" dirty="0">
-              <a:solidFill>
-                <a:srgbClr val="1E2761"/>
-              </a:solidFill>
-              <a:latin typeface="맑은 고딕"/>
-            </a:endParaRPr>
-          </a:p>
-          <a:p>
-            <a:pPr algn="l"/>
-            <a:r>
-              <a:rPr sz="1100" b="0" dirty="0">
-                <a:solidFill>
-                  <a:srgbClr val="595959"/>
-                </a:solidFill>
-                <a:latin typeface="맑은 고딕"/>
-              </a:rPr>
-              <a:t>1동 </a:t>
-            </a:r>
-            <a:r>
-              <a:rPr sz="1100" b="0" dirty="0" err="1">
-                <a:solidFill>
-                  <a:srgbClr val="595959"/>
-                </a:solidFill>
-                <a:latin typeface="맑은 고딕"/>
-              </a:rPr>
-              <a:t>자동창고</a:t>
-            </a:r>
-            <a:r>
-              <a:rPr sz="1100" b="0" dirty="0">
-                <a:solidFill>
-                  <a:srgbClr val="595959"/>
-                </a:solidFill>
-                <a:latin typeface="맑은 고딕"/>
-              </a:rPr>
-              <a:t> </a:t>
-            </a:r>
-            <a:r>
-              <a:rPr sz="1100" b="0" dirty="0" err="1">
-                <a:solidFill>
-                  <a:srgbClr val="595959"/>
-                </a:solidFill>
-                <a:latin typeface="맑은 고딕"/>
-              </a:rPr>
-              <a:t>전체</a:t>
-            </a:r>
-            <a:r>
-              <a:rPr sz="1100" b="0" dirty="0">
-                <a:solidFill>
-                  <a:srgbClr val="595959"/>
-                </a:solidFill>
-                <a:latin typeface="맑은 고딕"/>
-              </a:rPr>
-              <a:t> </a:t>
-            </a:r>
-            <a:r>
-              <a:rPr sz="1100" b="0" dirty="0" err="1">
-                <a:solidFill>
-                  <a:srgbClr val="595959"/>
-                </a:solidFill>
-                <a:latin typeface="맑은 고딕"/>
-              </a:rPr>
-              <a:t>배치</a:t>
-            </a:r>
-            <a:r>
-              <a:rPr sz="1100" b="0" dirty="0">
-                <a:solidFill>
-                  <a:srgbClr val="595959"/>
-                </a:solidFill>
-                <a:latin typeface="맑은 고딕"/>
-              </a:rPr>
-              <a:t>(랙 10열, </a:t>
-            </a:r>
-            <a:r>
-              <a:rPr sz="1100" b="0" dirty="0" err="1">
-                <a:solidFill>
-                  <a:srgbClr val="595959"/>
-                </a:solidFill>
-                <a:latin typeface="맑은 고딕"/>
-              </a:rPr>
-              <a:t>크레인</a:t>
-            </a:r>
-            <a:r>
-              <a:rPr sz="1100" b="0" dirty="0">
-                <a:solidFill>
-                  <a:srgbClr val="595959"/>
-                </a:solidFill>
-                <a:latin typeface="맑은 고딕"/>
-              </a:rPr>
-              <a:t> 5대, RGV 1대, </a:t>
-            </a:r>
-            <a:r>
-              <a:rPr sz="1100" b="0" dirty="0" err="1">
-                <a:solidFill>
-                  <a:srgbClr val="595959"/>
-                </a:solidFill>
-                <a:latin typeface="맑은 고딕"/>
-              </a:rPr>
-              <a:t>컨베이어</a:t>
-            </a:r>
-            <a:r>
-              <a:rPr sz="1100" b="0" dirty="0">
-                <a:solidFill>
-                  <a:srgbClr val="595959"/>
-                </a:solidFill>
-                <a:latin typeface="맑은 고딕"/>
-              </a:rPr>
-              <a:t> C/V#2~#15, </a:t>
-            </a:r>
-            <a:r>
-              <a:rPr sz="1100" b="0" dirty="0" err="1">
-                <a:solidFill>
-                  <a:srgbClr val="595959"/>
-                </a:solidFill>
-                <a:latin typeface="맑은 고딕"/>
-              </a:rPr>
-              <a:t>작업대</a:t>
-            </a:r>
-            <a:r>
-              <a:rPr sz="1100" b="0" dirty="0">
-                <a:solidFill>
-                  <a:srgbClr val="595959"/>
-                </a:solidFill>
-                <a:latin typeface="맑은 고딕"/>
-              </a:rPr>
-              <a:t>)와 </a:t>
-            </a:r>
-            <a:r>
-              <a:rPr sz="1100" b="0" dirty="0" err="1">
-                <a:solidFill>
-                  <a:srgbClr val="595959"/>
-                </a:solidFill>
-                <a:latin typeface="맑은 고딕"/>
-              </a:rPr>
-              <a:t>작업</a:t>
-            </a:r>
-            <a:r>
-              <a:rPr sz="1100" b="0" dirty="0">
-                <a:solidFill>
-                  <a:srgbClr val="595959"/>
-                </a:solidFill>
-                <a:latin typeface="맑은 고딕"/>
-              </a:rPr>
-              <a:t> </a:t>
-            </a:r>
-            <a:r>
-              <a:rPr sz="1100" b="0" dirty="0" err="1">
-                <a:solidFill>
-                  <a:srgbClr val="595959"/>
-                </a:solidFill>
-                <a:latin typeface="맑은 고딕"/>
-              </a:rPr>
-              <a:t>진행</a:t>
-            </a:r>
-            <a:r>
-              <a:rPr sz="1100" b="0" dirty="0">
-                <a:solidFill>
-                  <a:srgbClr val="595959"/>
-                </a:solidFill>
-                <a:latin typeface="맑은 고딕"/>
-              </a:rPr>
-              <a:t> </a:t>
-            </a:r>
-            <a:r>
-              <a:rPr sz="1100" b="0" dirty="0" err="1">
-                <a:solidFill>
-                  <a:srgbClr val="595959"/>
-                </a:solidFill>
-                <a:latin typeface="맑은 고딕"/>
-              </a:rPr>
-              <a:t>상황을</a:t>
-            </a:r>
-            <a:r>
-              <a:rPr sz="1100" b="0" dirty="0">
-                <a:solidFill>
-                  <a:srgbClr val="595959"/>
-                </a:solidFill>
-                <a:latin typeface="맑은 고딕"/>
-              </a:rPr>
-              <a:t> </a:t>
-            </a:r>
-            <a:r>
-              <a:rPr sz="1100" b="0" dirty="0" err="1">
-                <a:solidFill>
-                  <a:srgbClr val="595959"/>
-                </a:solidFill>
-                <a:latin typeface="맑은 고딕"/>
-              </a:rPr>
-              <a:t>실시간</a:t>
-            </a:r>
-            <a:r>
-              <a:rPr sz="1100" b="0" dirty="0">
-                <a:solidFill>
-                  <a:srgbClr val="595959"/>
-                </a:solidFill>
-                <a:latin typeface="맑은 고딕"/>
-              </a:rPr>
-              <a:t> </a:t>
-            </a:r>
-            <a:r>
-              <a:rPr sz="1100" b="0" dirty="0" err="1">
-                <a:solidFill>
-                  <a:srgbClr val="595959"/>
-                </a:solidFill>
-                <a:latin typeface="맑은 고딕"/>
-              </a:rPr>
-              <a:t>표시한다</a:t>
-            </a:r>
-            <a:r>
-              <a:rPr sz="1100" b="0" dirty="0">
-                <a:solidFill>
-                  <a:srgbClr val="595959"/>
-                </a:solidFill>
-                <a:latin typeface="맑은 고딕"/>
-              </a:rPr>
-              <a:t>.</a:t>
-            </a:r>
-          </a:p>
-          <a:p>
-            <a:pPr algn="l"/>
-            <a:endParaRPr sz="1100" b="0" dirty="0">
-              <a:solidFill>
-                <a:srgbClr val="595959"/>
-              </a:solidFill>
-              <a:latin typeface="맑은 고딕"/>
-            </a:endParaRPr>
-          </a:p>
-          <a:p>
-            <a:pPr algn="l"/>
-            <a:r>
-              <a:rPr sz="1300" b="1" dirty="0">
-                <a:solidFill>
-                  <a:srgbClr val="1E2761"/>
-                </a:solidFill>
-                <a:latin typeface="맑은 고딕"/>
-              </a:rPr>
-              <a:t>■ </a:t>
-            </a:r>
-            <a:r>
-              <a:rPr sz="1300" b="1" dirty="0" err="1">
-                <a:solidFill>
-                  <a:srgbClr val="1E2761"/>
-                </a:solidFill>
-                <a:latin typeface="맑은 고딕"/>
-              </a:rPr>
-              <a:t>특기사항</a:t>
-            </a:r>
-            <a:endParaRPr sz="1300" b="1" dirty="0">
-              <a:solidFill>
-                <a:srgbClr val="1E2761"/>
-              </a:solidFill>
-              <a:latin typeface="맑은 고딕"/>
-            </a:endParaRPr>
-          </a:p>
-          <a:p>
-            <a:pPr algn="l"/>
-            <a:r>
-              <a:rPr sz="1000" b="0" dirty="0">
-                <a:solidFill>
-                  <a:srgbClr val="595959"/>
-                </a:solidFill>
-                <a:latin typeface="맑은 고딕"/>
-              </a:rPr>
-              <a:t>· </a:t>
-            </a:r>
-            <a:r>
-              <a:rPr sz="1000" b="0" dirty="0" err="1">
-                <a:solidFill>
-                  <a:srgbClr val="595959"/>
-                </a:solidFill>
-                <a:latin typeface="맑은 고딕"/>
-              </a:rPr>
-              <a:t>화물이</a:t>
-            </a:r>
-            <a:r>
-              <a:rPr sz="1000" b="0" dirty="0">
-                <a:solidFill>
-                  <a:srgbClr val="595959"/>
-                </a:solidFill>
-                <a:latin typeface="맑은 고딕"/>
-              </a:rPr>
-              <a:t> </a:t>
-            </a:r>
-            <a:r>
-              <a:rPr sz="1000" b="0" dirty="0" err="1">
-                <a:solidFill>
-                  <a:srgbClr val="595959"/>
-                </a:solidFill>
-                <a:latin typeface="맑은 고딕"/>
-              </a:rPr>
-              <a:t>있는</a:t>
-            </a:r>
-            <a:r>
-              <a:rPr sz="1000" b="0" dirty="0">
-                <a:solidFill>
-                  <a:srgbClr val="595959"/>
-                </a:solidFill>
-                <a:latin typeface="맑은 고딕"/>
-              </a:rPr>
-              <a:t> </a:t>
-            </a:r>
-            <a:r>
-              <a:rPr sz="1000" b="0" dirty="0" err="1">
-                <a:solidFill>
-                  <a:srgbClr val="595959"/>
-                </a:solidFill>
-                <a:latin typeface="맑은 고딕"/>
-              </a:rPr>
-              <a:t>위치는</a:t>
-            </a:r>
-            <a:r>
-              <a:rPr sz="1000" b="0" dirty="0">
-                <a:solidFill>
-                  <a:srgbClr val="595959"/>
-                </a:solidFill>
-                <a:latin typeface="맑은 고딕"/>
-              </a:rPr>
-              <a:t> </a:t>
-            </a:r>
-            <a:r>
-              <a:rPr sz="1000" b="0" dirty="0" err="1">
-                <a:solidFill>
-                  <a:srgbClr val="595959"/>
-                </a:solidFill>
-                <a:latin typeface="맑은 고딕"/>
-              </a:rPr>
-              <a:t>작업번호와</a:t>
-            </a:r>
-            <a:r>
-              <a:rPr sz="1000" b="0" dirty="0">
-                <a:solidFill>
-                  <a:srgbClr val="595959"/>
-                </a:solidFill>
-                <a:latin typeface="맑은 고딕"/>
-              </a:rPr>
-              <a:t> </a:t>
-            </a:r>
-            <a:r>
-              <a:rPr sz="1000" b="0" dirty="0" err="1">
-                <a:solidFill>
-                  <a:srgbClr val="595959"/>
-                </a:solidFill>
-                <a:latin typeface="맑은 고딕"/>
-              </a:rPr>
-              <a:t>작업구분</a:t>
-            </a:r>
-            <a:r>
-              <a:rPr sz="1000" b="0" dirty="0">
-                <a:solidFill>
-                  <a:srgbClr val="595959"/>
-                </a:solidFill>
-                <a:latin typeface="맑은 고딕"/>
-              </a:rPr>
-              <a:t> 색(</a:t>
-            </a:r>
-            <a:r>
-              <a:rPr sz="1000" b="0" dirty="0" err="1">
-                <a:solidFill>
-                  <a:srgbClr val="595959"/>
-                </a:solidFill>
-                <a:latin typeface="맑은 고딕"/>
-              </a:rPr>
-              <a:t>입고</a:t>
-            </a:r>
-            <a:r>
-              <a:rPr sz="1000" b="0" dirty="0">
-                <a:solidFill>
-                  <a:srgbClr val="595959"/>
-                </a:solidFill>
-                <a:latin typeface="맑은 고딕"/>
-              </a:rPr>
-              <a:t>/</a:t>
-            </a:r>
-            <a:r>
-              <a:rPr sz="1000" b="0" dirty="0" err="1">
-                <a:solidFill>
-                  <a:srgbClr val="595959"/>
-                </a:solidFill>
-                <a:latin typeface="맑은 고딕"/>
-              </a:rPr>
-              <a:t>출고</a:t>
-            </a:r>
-            <a:r>
-              <a:rPr sz="1000" b="0" dirty="0">
-                <a:solidFill>
-                  <a:srgbClr val="595959"/>
-                </a:solidFill>
-                <a:latin typeface="맑은 고딕"/>
-              </a:rPr>
-              <a:t>/</a:t>
-            </a:r>
-            <a:r>
-              <a:rPr sz="1000" b="0" dirty="0" err="1">
-                <a:solidFill>
-                  <a:srgbClr val="595959"/>
-                </a:solidFill>
-                <a:latin typeface="맑은 고딕"/>
-              </a:rPr>
-              <a:t>피킹</a:t>
-            </a:r>
-            <a:r>
-              <a:rPr sz="1000" b="0" dirty="0">
-                <a:solidFill>
-                  <a:srgbClr val="595959"/>
-                </a:solidFill>
-                <a:latin typeface="맑은 고딕"/>
-              </a:rPr>
-              <a:t>/</a:t>
-            </a:r>
-            <a:r>
-              <a:rPr sz="1000" b="0" dirty="0" err="1">
-                <a:solidFill>
-                  <a:srgbClr val="595959"/>
-                </a:solidFill>
-                <a:latin typeface="맑은 고딕"/>
-              </a:rPr>
-              <a:t>랙투랙</a:t>
-            </a:r>
-            <a:r>
-              <a:rPr sz="1000" b="0" dirty="0">
-                <a:solidFill>
-                  <a:srgbClr val="595959"/>
-                </a:solidFill>
-                <a:latin typeface="맑은 고딕"/>
-              </a:rPr>
-              <a:t>/</a:t>
-            </a:r>
-            <a:r>
-              <a:rPr sz="1000" b="0" dirty="0" err="1">
-                <a:solidFill>
-                  <a:srgbClr val="595959"/>
-                </a:solidFill>
-                <a:latin typeface="맑은 고딕"/>
-              </a:rPr>
-              <a:t>이동</a:t>
-            </a:r>
-            <a:r>
-              <a:rPr sz="1000" b="0" dirty="0">
-                <a:solidFill>
-                  <a:srgbClr val="595959"/>
-                </a:solidFill>
-                <a:latin typeface="맑은 고딕"/>
-              </a:rPr>
-              <a:t>)</a:t>
-            </a:r>
-            <a:r>
-              <a:rPr sz="1000" b="0" dirty="0" err="1">
-                <a:solidFill>
-                  <a:srgbClr val="595959"/>
-                </a:solidFill>
-                <a:latin typeface="맑은 고딕"/>
-              </a:rPr>
-              <a:t>으로</a:t>
-            </a:r>
-            <a:r>
-              <a:rPr sz="1000" b="0" dirty="0">
-                <a:solidFill>
-                  <a:srgbClr val="595959"/>
-                </a:solidFill>
-                <a:latin typeface="맑은 고딕"/>
-              </a:rPr>
-              <a:t> </a:t>
-            </a:r>
-            <a:r>
-              <a:rPr sz="1000" b="0" dirty="0" err="1">
-                <a:solidFill>
-                  <a:srgbClr val="595959"/>
-                </a:solidFill>
-                <a:latin typeface="맑은 고딕"/>
-              </a:rPr>
-              <a:t>표시된다</a:t>
-            </a:r>
-            <a:r>
-              <a:rPr sz="1000" b="0" dirty="0">
-                <a:solidFill>
-                  <a:srgbClr val="595959"/>
-                </a:solidFill>
-                <a:latin typeface="맑은 고딕"/>
-              </a:rPr>
-              <a:t>.</a:t>
-            </a:r>
-          </a:p>
-          <a:p>
-            <a:pPr algn="l"/>
-            <a:r>
-              <a:rPr sz="1000" b="0" dirty="0">
-                <a:solidFill>
-                  <a:srgbClr val="595959"/>
-                </a:solidFill>
-                <a:latin typeface="맑은 고딕"/>
-              </a:rPr>
-              <a:t>· </a:t>
-            </a:r>
-            <a:r>
-              <a:rPr sz="1000" b="0" dirty="0" err="1">
-                <a:solidFill>
-                  <a:srgbClr val="595959"/>
-                </a:solidFill>
-                <a:latin typeface="맑은 고딕"/>
-              </a:rPr>
-              <a:t>화면</a:t>
-            </a:r>
-            <a:r>
-              <a:rPr sz="1000" b="0" dirty="0">
-                <a:solidFill>
-                  <a:srgbClr val="595959"/>
-                </a:solidFill>
-                <a:latin typeface="맑은 고딕"/>
-              </a:rPr>
-              <a:t> </a:t>
-            </a:r>
-            <a:r>
-              <a:rPr sz="1000" b="0" dirty="0" err="1">
-                <a:solidFill>
-                  <a:srgbClr val="595959"/>
-                </a:solidFill>
-                <a:latin typeface="맑은 고딕"/>
-              </a:rPr>
-              <a:t>왼쪽에</a:t>
-            </a:r>
-            <a:r>
-              <a:rPr sz="1000" b="0" dirty="0">
-                <a:solidFill>
-                  <a:srgbClr val="595959"/>
-                </a:solidFill>
-                <a:latin typeface="맑은 고딕"/>
-              </a:rPr>
-              <a:t> </a:t>
-            </a:r>
-            <a:r>
-              <a:rPr sz="1000" b="0" dirty="0" err="1">
-                <a:solidFill>
-                  <a:srgbClr val="595959"/>
-                </a:solidFill>
-                <a:latin typeface="맑은 고딕"/>
-              </a:rPr>
-              <a:t>범례표가</a:t>
-            </a:r>
-            <a:r>
-              <a:rPr sz="1000" b="0" dirty="0">
-                <a:solidFill>
-                  <a:srgbClr val="595959"/>
-                </a:solidFill>
-                <a:latin typeface="맑은 고딕"/>
-              </a:rPr>
-              <a:t> </a:t>
-            </a:r>
-            <a:r>
-              <a:rPr sz="1000" b="0" dirty="0" err="1">
-                <a:solidFill>
-                  <a:srgbClr val="595959"/>
-                </a:solidFill>
-                <a:latin typeface="맑은 고딕"/>
-              </a:rPr>
-              <a:t>함께</a:t>
-            </a:r>
-            <a:r>
-              <a:rPr sz="1000" b="0" dirty="0">
-                <a:solidFill>
-                  <a:srgbClr val="595959"/>
-                </a:solidFill>
-                <a:latin typeface="맑은 고딕"/>
-              </a:rPr>
-              <a:t> </a:t>
-            </a:r>
-            <a:r>
-              <a:rPr sz="1000" b="0" dirty="0" err="1">
-                <a:solidFill>
-                  <a:srgbClr val="595959"/>
-                </a:solidFill>
-                <a:latin typeface="맑은 고딕"/>
-              </a:rPr>
-              <a:t>그려진다</a:t>
-            </a:r>
-            <a:r>
-              <a:rPr sz="1000" b="0" dirty="0">
-                <a:solidFill>
-                  <a:srgbClr val="595959"/>
-                </a:solidFill>
-                <a:latin typeface="맑은 고딕"/>
-              </a:rPr>
-              <a:t> - </a:t>
-            </a:r>
-            <a:r>
-              <a:rPr sz="1000" b="0" dirty="0" err="1">
-                <a:solidFill>
-                  <a:srgbClr val="595959"/>
-                </a:solidFill>
-                <a:latin typeface="맑은 고딕"/>
-              </a:rPr>
-              <a:t>작업</a:t>
-            </a:r>
-            <a:r>
-              <a:rPr sz="1000" b="0" dirty="0">
-                <a:solidFill>
-                  <a:srgbClr val="595959"/>
-                </a:solidFill>
-                <a:latin typeface="맑은 고딕"/>
-              </a:rPr>
-              <a:t> </a:t>
-            </a:r>
-            <a:r>
-              <a:rPr sz="1000" b="0" dirty="0" err="1">
-                <a:solidFill>
-                  <a:srgbClr val="595959"/>
-                </a:solidFill>
-                <a:latin typeface="맑은 고딕"/>
-              </a:rPr>
-              <a:t>색상</a:t>
-            </a:r>
-            <a:r>
-              <a:rPr sz="1000" b="0" dirty="0">
-                <a:solidFill>
-                  <a:srgbClr val="595959"/>
-                </a:solidFill>
-                <a:latin typeface="맑은 고딕"/>
-              </a:rPr>
-              <a:t> / C/V </a:t>
-            </a:r>
-            <a:r>
-              <a:rPr sz="1000" b="0" dirty="0" err="1">
-                <a:solidFill>
-                  <a:srgbClr val="595959"/>
-                </a:solidFill>
-                <a:latin typeface="맑은 고딕"/>
-              </a:rPr>
-              <a:t>상태</a:t>
-            </a:r>
-            <a:r>
-              <a:rPr sz="1000" b="0" dirty="0">
-                <a:solidFill>
-                  <a:srgbClr val="595959"/>
-                </a:solidFill>
-                <a:latin typeface="맑은 고딕"/>
-              </a:rPr>
-              <a:t> / S/C·RTV </a:t>
-            </a:r>
-            <a:r>
-              <a:rPr sz="1000" b="0" dirty="0" err="1">
-                <a:solidFill>
-                  <a:srgbClr val="595959"/>
-                </a:solidFill>
-                <a:latin typeface="맑은 고딕"/>
-              </a:rPr>
-              <a:t>상태</a:t>
-            </a:r>
-            <a:r>
-              <a:rPr sz="1000" b="0" dirty="0">
-                <a:solidFill>
-                  <a:srgbClr val="595959"/>
-                </a:solidFill>
-                <a:latin typeface="맑은 고딕"/>
-              </a:rPr>
-              <a:t> / S/C·RTV </a:t>
-            </a:r>
-            <a:r>
-              <a:rPr sz="1000" b="0" dirty="0" err="1">
-                <a:solidFill>
-                  <a:srgbClr val="595959"/>
-                </a:solidFill>
-                <a:latin typeface="맑은 고딕"/>
-              </a:rPr>
-              <a:t>레일</a:t>
-            </a:r>
-            <a:r>
-              <a:rPr sz="1000" b="0" dirty="0">
-                <a:solidFill>
-                  <a:srgbClr val="595959"/>
-                </a:solidFill>
-                <a:latin typeface="맑은 고딕"/>
-              </a:rPr>
-              <a:t> 4개 </a:t>
-            </a:r>
-            <a:r>
-              <a:rPr sz="1000" b="0" dirty="0" err="1">
-                <a:solidFill>
-                  <a:srgbClr val="595959"/>
-                </a:solidFill>
-                <a:latin typeface="맑은 고딕"/>
-              </a:rPr>
-              <a:t>그룹이며</a:t>
-            </a:r>
-            <a:r>
-              <a:rPr sz="1000" b="0" dirty="0">
-                <a:solidFill>
-                  <a:srgbClr val="595959"/>
-                </a:solidFill>
-                <a:latin typeface="맑은 고딕"/>
-              </a:rPr>
-              <a:t>,
-    </a:t>
-            </a:r>
-            <a:r>
-              <a:rPr sz="1000" b="0" dirty="0" err="1">
-                <a:solidFill>
-                  <a:srgbClr val="595959"/>
-                </a:solidFill>
-                <a:latin typeface="맑은 고딕"/>
-              </a:rPr>
-              <a:t>색은</a:t>
-            </a:r>
-            <a:r>
-              <a:rPr sz="1000" b="0" dirty="0">
-                <a:solidFill>
-                  <a:srgbClr val="595959"/>
-                </a:solidFill>
-                <a:latin typeface="맑은 고딕"/>
-              </a:rPr>
-              <a:t> [</a:t>
-            </a:r>
-            <a:r>
-              <a:rPr sz="1000" b="0" dirty="0" err="1">
-                <a:solidFill>
-                  <a:srgbClr val="595959"/>
-                </a:solidFill>
-                <a:latin typeface="맑은 고딕"/>
-              </a:rPr>
-              <a:t>범례</a:t>
-            </a:r>
-            <a:r>
-              <a:rPr sz="1000" b="0" dirty="0">
-                <a:solidFill>
-                  <a:srgbClr val="595959"/>
-                </a:solidFill>
-                <a:latin typeface="맑은 고딕"/>
-              </a:rPr>
-              <a:t>] </a:t>
-            </a:r>
-            <a:r>
-              <a:rPr sz="1000" b="0" dirty="0" err="1">
-                <a:solidFill>
-                  <a:srgbClr val="595959"/>
-                </a:solidFill>
-                <a:latin typeface="맑은 고딕"/>
-              </a:rPr>
-              <a:t>창에서</a:t>
-            </a:r>
-            <a:r>
-              <a:rPr sz="1000" b="0" dirty="0">
-                <a:solidFill>
-                  <a:srgbClr val="595959"/>
-                </a:solidFill>
-                <a:latin typeface="맑은 고딕"/>
-              </a:rPr>
-              <a:t> </a:t>
-            </a:r>
-            <a:r>
-              <a:rPr sz="1000" b="0" dirty="0" err="1">
-                <a:solidFill>
-                  <a:srgbClr val="595959"/>
-                </a:solidFill>
-                <a:latin typeface="맑은 고딕"/>
-              </a:rPr>
-              <a:t>바꾸면</a:t>
-            </a:r>
-            <a:r>
-              <a:rPr sz="1000" b="0" dirty="0">
-                <a:solidFill>
-                  <a:srgbClr val="595959"/>
-                </a:solidFill>
-                <a:latin typeface="맑은 고딕"/>
-              </a:rPr>
-              <a:t> 이 </a:t>
-            </a:r>
-            <a:r>
-              <a:rPr sz="1000" b="0" dirty="0" err="1">
-                <a:solidFill>
-                  <a:srgbClr val="595959"/>
-                </a:solidFill>
-                <a:latin typeface="맑은 고딕"/>
-              </a:rPr>
-              <a:t>표에도</a:t>
-            </a:r>
-            <a:r>
-              <a:rPr sz="1000" b="0" dirty="0">
-                <a:solidFill>
-                  <a:srgbClr val="595959"/>
-                </a:solidFill>
-                <a:latin typeface="맑은 고딕"/>
-              </a:rPr>
-              <a:t> </a:t>
-            </a:r>
-            <a:r>
-              <a:rPr sz="1000" b="0" dirty="0" err="1">
-                <a:solidFill>
-                  <a:srgbClr val="595959"/>
-                </a:solidFill>
-                <a:latin typeface="맑은 고딕"/>
-              </a:rPr>
-              <a:t>곧바로</a:t>
-            </a:r>
-            <a:r>
-              <a:rPr sz="1000" b="0" dirty="0">
-                <a:solidFill>
-                  <a:srgbClr val="595959"/>
-                </a:solidFill>
-                <a:latin typeface="맑은 고딕"/>
-              </a:rPr>
-              <a:t> </a:t>
-            </a:r>
-            <a:r>
-              <a:rPr sz="1000" b="0" dirty="0" err="1">
-                <a:solidFill>
-                  <a:srgbClr val="595959"/>
-                </a:solidFill>
-                <a:latin typeface="맑은 고딕"/>
-              </a:rPr>
-              <a:t>반영된다</a:t>
-            </a:r>
-            <a:r>
-              <a:rPr sz="1000" b="0" dirty="0">
-                <a:solidFill>
-                  <a:srgbClr val="595959"/>
-                </a:solidFill>
-                <a:latin typeface="맑은 고딕"/>
-              </a:rPr>
-              <a:t>.</a:t>
-            </a:r>
-          </a:p>
-          <a:p>
-            <a:pPr algn="l"/>
-            <a:r>
-              <a:rPr sz="1000" b="0" dirty="0">
-                <a:solidFill>
-                  <a:srgbClr val="595959"/>
-                </a:solidFill>
-                <a:latin typeface="맑은 고딕"/>
-              </a:rPr>
-              <a:t>· C/V#2(S/C#1 </a:t>
-            </a:r>
-            <a:r>
-              <a:rPr sz="1000" b="0" dirty="0" err="1">
-                <a:solidFill>
-                  <a:srgbClr val="595959"/>
-                </a:solidFill>
-                <a:latin typeface="맑은 고딕"/>
-              </a:rPr>
-              <a:t>통로</a:t>
-            </a:r>
-            <a:r>
-              <a:rPr sz="1000" b="0" dirty="0">
-                <a:solidFill>
-                  <a:srgbClr val="595959"/>
-                </a:solidFill>
-                <a:latin typeface="맑은 고딕"/>
-              </a:rPr>
-              <a:t>)와 C/V#11(</a:t>
-            </a:r>
-            <a:r>
-              <a:rPr sz="1000" b="0" dirty="0" err="1">
-                <a:solidFill>
-                  <a:srgbClr val="595959"/>
-                </a:solidFill>
-                <a:latin typeface="맑은 고딕"/>
-              </a:rPr>
-              <a:t>입출고</a:t>
-            </a:r>
-            <a:r>
-              <a:rPr sz="1000" b="0" dirty="0">
-                <a:solidFill>
-                  <a:srgbClr val="595959"/>
-                </a:solidFill>
-                <a:latin typeface="맑은 고딕"/>
-              </a:rPr>
-              <a:t> </a:t>
-            </a:r>
-            <a:r>
-              <a:rPr sz="1000" b="0" dirty="0" err="1">
-                <a:solidFill>
-                  <a:srgbClr val="595959"/>
-                </a:solidFill>
-                <a:latin typeface="맑은 고딕"/>
-              </a:rPr>
-              <a:t>겸용대</a:t>
-            </a:r>
-            <a:r>
-              <a:rPr sz="1000" b="0" dirty="0">
-                <a:solidFill>
-                  <a:srgbClr val="595959"/>
-                </a:solidFill>
-                <a:latin typeface="맑은 고딕"/>
-              </a:rPr>
-              <a:t>)의 </a:t>
-            </a:r>
-            <a:r>
-              <a:rPr sz="1000" b="0" dirty="0" err="1">
-                <a:solidFill>
-                  <a:srgbClr val="595959"/>
-                </a:solidFill>
-                <a:latin typeface="맑은 고딕"/>
-              </a:rPr>
-              <a:t>현재</a:t>
-            </a:r>
-            <a:r>
-              <a:rPr sz="1000" b="0" dirty="0">
-                <a:solidFill>
-                  <a:srgbClr val="595959"/>
-                </a:solidFill>
-                <a:latin typeface="맑은 고딕"/>
-              </a:rPr>
-              <a:t> </a:t>
-            </a:r>
-            <a:r>
-              <a:rPr sz="1000" b="0" dirty="0" err="1">
-                <a:solidFill>
-                  <a:srgbClr val="595959"/>
-                </a:solidFill>
-                <a:latin typeface="맑은 고딕"/>
-              </a:rPr>
-              <a:t>입출고</a:t>
-            </a:r>
-            <a:r>
-              <a:rPr sz="1000" b="0" dirty="0">
-                <a:solidFill>
-                  <a:srgbClr val="595959"/>
-                </a:solidFill>
-                <a:latin typeface="맑은 고딕"/>
-              </a:rPr>
-              <a:t> </a:t>
-            </a:r>
-            <a:r>
-              <a:rPr sz="1000" b="0" dirty="0" err="1">
-                <a:solidFill>
-                  <a:srgbClr val="595959"/>
-                </a:solidFill>
-                <a:latin typeface="맑은 고딕"/>
-              </a:rPr>
-              <a:t>모드를</a:t>
-            </a:r>
-            <a:r>
-              <a:rPr sz="1000" b="0" dirty="0">
-                <a:solidFill>
-                  <a:srgbClr val="595959"/>
-                </a:solidFill>
-                <a:latin typeface="맑은 고딕"/>
-              </a:rPr>
-              <a:t> "</a:t>
-            </a:r>
-            <a:r>
-              <a:rPr sz="1000" b="0" dirty="0" err="1">
-                <a:solidFill>
-                  <a:srgbClr val="595959"/>
-                </a:solidFill>
-                <a:latin typeface="맑은 고딕"/>
-              </a:rPr>
-              <a:t>입고</a:t>
-            </a:r>
-            <a:r>
-              <a:rPr sz="1000" b="0" dirty="0">
-                <a:solidFill>
-                  <a:srgbClr val="595959"/>
-                </a:solidFill>
-                <a:latin typeface="맑은 고딕"/>
-              </a:rPr>
-              <a:t> </a:t>
-            </a:r>
-            <a:r>
-              <a:rPr sz="1000" b="0" dirty="0" err="1">
-                <a:solidFill>
-                  <a:srgbClr val="595959"/>
-                </a:solidFill>
-                <a:latin typeface="맑은 고딕"/>
-              </a:rPr>
-              <a:t>모드</a:t>
-            </a:r>
-            <a:r>
-              <a:rPr sz="1000" b="0" dirty="0">
-                <a:solidFill>
-                  <a:srgbClr val="595959"/>
-                </a:solidFill>
-                <a:latin typeface="맑은 고딕"/>
-              </a:rPr>
-              <a:t>/</a:t>
-            </a:r>
-            <a:r>
-              <a:rPr sz="1000" b="0" dirty="0" err="1">
-                <a:solidFill>
-                  <a:srgbClr val="595959"/>
-                </a:solidFill>
-                <a:latin typeface="맑은 고딕"/>
-              </a:rPr>
-              <a:t>출고</a:t>
-            </a:r>
-            <a:r>
-              <a:rPr sz="1000" b="0" dirty="0">
-                <a:solidFill>
-                  <a:srgbClr val="595959"/>
-                </a:solidFill>
-                <a:latin typeface="맑은 고딕"/>
-              </a:rPr>
-              <a:t> </a:t>
-            </a:r>
-            <a:r>
-              <a:rPr sz="1000" b="0" dirty="0" err="1">
-                <a:solidFill>
-                  <a:srgbClr val="595959"/>
-                </a:solidFill>
-                <a:latin typeface="맑은 고딕"/>
-              </a:rPr>
-              <a:t>모드"로</a:t>
-            </a:r>
-            <a:r>
-              <a:rPr sz="1000" b="0" dirty="0">
-                <a:solidFill>
-                  <a:srgbClr val="595959"/>
-                </a:solidFill>
-                <a:latin typeface="맑은 고딕"/>
-              </a:rPr>
-              <a:t> </a:t>
-            </a:r>
-            <a:r>
-              <a:rPr sz="1000" b="0" dirty="0" err="1">
-                <a:solidFill>
-                  <a:srgbClr val="595959"/>
-                </a:solidFill>
-                <a:latin typeface="맑은 고딕"/>
-              </a:rPr>
-              <a:t>표시한다</a:t>
-            </a:r>
-            <a:r>
-              <a:rPr sz="1000" b="0" dirty="0">
-                <a:solidFill>
-                  <a:srgbClr val="595959"/>
-                </a:solidFill>
-                <a:latin typeface="맑은 고딕"/>
-              </a:rPr>
-              <a:t>.</a:t>
-            </a:r>
-          </a:p>
-          <a:p>
-            <a:pPr algn="l"/>
-            <a:r>
-              <a:rPr sz="1000" b="0" dirty="0">
-                <a:solidFill>
-                  <a:srgbClr val="595959"/>
-                </a:solidFill>
-                <a:latin typeface="맑은 고딕"/>
-              </a:rPr>
-              <a:t>· </a:t>
-            </a:r>
-            <a:r>
-              <a:rPr sz="1000" b="0" dirty="0" err="1">
-                <a:solidFill>
-                  <a:srgbClr val="595959"/>
-                </a:solidFill>
-                <a:latin typeface="맑은 고딕"/>
-              </a:rPr>
-              <a:t>작업대</a:t>
-            </a:r>
-            <a:r>
-              <a:rPr sz="1000" b="0" dirty="0">
-                <a:solidFill>
-                  <a:srgbClr val="595959"/>
-                </a:solidFill>
-                <a:latin typeface="맑은 고딕"/>
-              </a:rPr>
-              <a:t> </a:t>
-            </a:r>
-            <a:r>
-              <a:rPr sz="1000" b="0" dirty="0" err="1">
-                <a:solidFill>
-                  <a:srgbClr val="595959"/>
-                </a:solidFill>
-                <a:latin typeface="맑은 고딕"/>
-              </a:rPr>
-              <a:t>라벨은</a:t>
-            </a:r>
-            <a:r>
-              <a:rPr sz="1000" b="0" dirty="0">
-                <a:solidFill>
-                  <a:srgbClr val="595959"/>
-                </a:solidFill>
-                <a:latin typeface="맑은 고딕"/>
-              </a:rPr>
-              <a:t> IMS </a:t>
-            </a:r>
-            <a:r>
-              <a:rPr sz="1000" b="0" dirty="0" err="1">
-                <a:solidFill>
-                  <a:srgbClr val="595959"/>
-                </a:solidFill>
-                <a:latin typeface="맑은 고딕"/>
-              </a:rPr>
-              <a:t>스테이션</a:t>
-            </a:r>
-            <a:r>
-              <a:rPr sz="1000" b="0" dirty="0">
-                <a:solidFill>
-                  <a:srgbClr val="595959"/>
-                </a:solidFill>
-                <a:latin typeface="맑은 고딕"/>
-              </a:rPr>
-              <a:t> </a:t>
-            </a:r>
-            <a:r>
-              <a:rPr sz="1000" b="0" dirty="0" err="1">
-                <a:solidFill>
-                  <a:srgbClr val="595959"/>
-                </a:solidFill>
-                <a:latin typeface="맑은 고딕"/>
-              </a:rPr>
-              <a:t>코드와</a:t>
-            </a:r>
-            <a:r>
-              <a:rPr sz="1000" b="0" dirty="0">
-                <a:solidFill>
-                  <a:srgbClr val="595959"/>
-                </a:solidFill>
-                <a:latin typeface="맑은 고딕"/>
-              </a:rPr>
-              <a:t> </a:t>
-            </a:r>
-            <a:r>
-              <a:rPr sz="1000" b="0" dirty="0" err="1">
-                <a:solidFill>
-                  <a:srgbClr val="595959"/>
-                </a:solidFill>
-                <a:latin typeface="맑은 고딕"/>
-              </a:rPr>
-              <a:t>명칭을</a:t>
-            </a:r>
-            <a:r>
-              <a:rPr sz="1000" b="0" dirty="0">
-                <a:solidFill>
-                  <a:srgbClr val="595959"/>
-                </a:solidFill>
-                <a:latin typeface="맑은 고딕"/>
-              </a:rPr>
-              <a:t> </a:t>
-            </a:r>
-            <a:r>
-              <a:rPr sz="1000" b="0" dirty="0" err="1">
-                <a:solidFill>
-                  <a:srgbClr val="595959"/>
-                </a:solidFill>
-                <a:latin typeface="맑은 고딕"/>
-              </a:rPr>
-              <a:t>함께</a:t>
-            </a:r>
-            <a:r>
-              <a:rPr sz="1000" b="0" dirty="0">
-                <a:solidFill>
-                  <a:srgbClr val="595959"/>
-                </a:solidFill>
-                <a:latin typeface="맑은 고딕"/>
-              </a:rPr>
-              <a:t> </a:t>
-            </a:r>
-            <a:r>
-              <a:rPr sz="1000" b="0" dirty="0" err="1">
-                <a:solidFill>
-                  <a:srgbClr val="595959"/>
-                </a:solidFill>
-                <a:latin typeface="맑은 고딕"/>
-              </a:rPr>
-              <a:t>표기한다</a:t>
-            </a:r>
-            <a:r>
-              <a:rPr sz="1000" b="0" dirty="0">
-                <a:solidFill>
-                  <a:srgbClr val="595959"/>
-                </a:solidFill>
-                <a:latin typeface="맑은 고딕"/>
-              </a:rPr>
-              <a:t> : [101] </a:t>
-            </a:r>
-            <a:r>
-              <a:rPr sz="1000" b="0" dirty="0" err="1">
-                <a:solidFill>
-                  <a:srgbClr val="595959"/>
-                </a:solidFill>
-                <a:latin typeface="맑은 고딕"/>
-              </a:rPr>
-              <a:t>외부</a:t>
-            </a:r>
-            <a:r>
-              <a:rPr sz="1000" b="0" dirty="0">
-                <a:solidFill>
-                  <a:srgbClr val="595959"/>
-                </a:solidFill>
-                <a:latin typeface="맑은 고딕"/>
-              </a:rPr>
-              <a:t> </a:t>
-            </a:r>
-            <a:r>
-              <a:rPr sz="1000" b="0" dirty="0" err="1">
-                <a:solidFill>
-                  <a:srgbClr val="595959"/>
-                </a:solidFill>
-                <a:latin typeface="맑은 고딕"/>
-              </a:rPr>
-              <a:t>입고</a:t>
-            </a:r>
-            <a:r>
-              <a:rPr sz="1000" b="0" dirty="0">
-                <a:solidFill>
-                  <a:srgbClr val="595959"/>
-                </a:solidFill>
-                <a:latin typeface="맑은 고딕"/>
-              </a:rPr>
-              <a:t> </a:t>
-            </a:r>
-            <a:r>
-              <a:rPr sz="1000" b="0" dirty="0" err="1">
-                <a:solidFill>
-                  <a:srgbClr val="595959"/>
-                </a:solidFill>
-                <a:latin typeface="맑은 고딕"/>
-              </a:rPr>
-              <a:t>전용</a:t>
-            </a:r>
-            <a:r>
-              <a:rPr sz="1000" b="0" dirty="0">
-                <a:solidFill>
-                  <a:srgbClr val="595959"/>
-                </a:solidFill>
-                <a:latin typeface="맑은 고딕"/>
-              </a:rPr>
-              <a:t> </a:t>
-            </a:r>
-            <a:r>
-              <a:rPr sz="1000" b="0" dirty="0" err="1">
-                <a:solidFill>
-                  <a:srgbClr val="595959"/>
-                </a:solidFill>
-                <a:latin typeface="맑은 고딕"/>
-              </a:rPr>
-              <a:t>입출고대</a:t>
-            </a:r>
-            <a:r>
-              <a:rPr sz="1000" b="0" dirty="0">
-                <a:solidFill>
-                  <a:srgbClr val="595959"/>
-                </a:solidFill>
-                <a:latin typeface="맑은 고딕"/>
-              </a:rPr>
-              <a:t>, 103 </a:t>
-            </a:r>
-            <a:r>
-              <a:rPr sz="1000" b="0" dirty="0" err="1">
-                <a:solidFill>
-                  <a:srgbClr val="595959"/>
-                </a:solidFill>
-                <a:latin typeface="맑은 고딕"/>
-              </a:rPr>
-              <a:t>제품</a:t>
-            </a:r>
-            <a:r>
-              <a:rPr sz="1000" b="0" dirty="0">
-                <a:solidFill>
-                  <a:srgbClr val="595959"/>
-                </a:solidFill>
-                <a:latin typeface="맑은 고딕"/>
-              </a:rPr>
-              <a:t> </a:t>
-            </a:r>
-            <a:r>
-              <a:rPr sz="1000" b="0" dirty="0" err="1">
-                <a:solidFill>
-                  <a:srgbClr val="595959"/>
-                </a:solidFill>
-                <a:latin typeface="맑은 고딕"/>
-              </a:rPr>
-              <a:t>입고대</a:t>
-            </a:r>
-            <a:r>
-              <a:rPr sz="1000" b="0" dirty="0">
-                <a:solidFill>
-                  <a:srgbClr val="595959"/>
-                </a:solidFill>
-                <a:latin typeface="맑은 고딕"/>
-              </a:rPr>
-              <a:t>(TR#24), 104 </a:t>
-            </a:r>
-            <a:r>
-              <a:rPr sz="1000" b="0" dirty="0" err="1">
-                <a:solidFill>
-                  <a:srgbClr val="595959"/>
-                </a:solidFill>
-                <a:latin typeface="맑은 고딕"/>
-              </a:rPr>
-              <a:t>원부자재</a:t>
-            </a:r>
-            <a:r>
-              <a:rPr sz="1000" b="0" dirty="0">
-                <a:solidFill>
-                  <a:srgbClr val="595959"/>
-                </a:solidFill>
-                <a:latin typeface="맑은 고딕"/>
-              </a:rPr>
-              <a:t> </a:t>
-            </a:r>
-            <a:r>
-              <a:rPr sz="1000" b="0" dirty="0" err="1">
-                <a:solidFill>
-                  <a:srgbClr val="595959"/>
-                </a:solidFill>
-                <a:latin typeface="맑은 고딕"/>
-              </a:rPr>
-              <a:t>불출대</a:t>
-            </a:r>
-            <a:r>
-              <a:rPr sz="1000" b="0" dirty="0">
-                <a:solidFill>
-                  <a:srgbClr val="595959"/>
-                </a:solidFill>
-                <a:latin typeface="맑은 고딕"/>
-              </a:rPr>
-              <a:t>(TR#26), 102 </a:t>
-            </a:r>
-            <a:r>
-              <a:rPr sz="1000" b="0" dirty="0" err="1">
-                <a:solidFill>
-                  <a:srgbClr val="595959"/>
-                </a:solidFill>
-                <a:latin typeface="맑은 고딕"/>
-              </a:rPr>
-              <a:t>피킹</a:t>
-            </a:r>
-            <a:r>
-              <a:rPr sz="1000" b="0" dirty="0">
-                <a:solidFill>
-                  <a:srgbClr val="595959"/>
-                </a:solidFill>
-                <a:latin typeface="맑은 고딕"/>
-              </a:rPr>
-              <a:t> </a:t>
-            </a:r>
-            <a:r>
-              <a:rPr sz="1000" b="0" dirty="0" err="1">
-                <a:solidFill>
-                  <a:srgbClr val="595959"/>
-                </a:solidFill>
-                <a:latin typeface="맑은 고딕"/>
-              </a:rPr>
-              <a:t>작업대</a:t>
-            </a:r>
-            <a:r>
-              <a:rPr sz="1000" b="0" dirty="0">
-                <a:solidFill>
-                  <a:srgbClr val="595959"/>
-                </a:solidFill>
-                <a:latin typeface="맑은 고딕"/>
-              </a:rPr>
-              <a:t>(TR#29/30).</a:t>
-            </a:r>
-          </a:p>
-          <a:p>
-            <a:pPr algn="l"/>
-            <a:r>
-              <a:rPr sz="1000" b="0" dirty="0">
-                <a:solidFill>
-                  <a:srgbClr val="595959"/>
-                </a:solidFill>
-                <a:latin typeface="맑은 고딕"/>
-              </a:rPr>
-              <a:t>· </a:t>
-            </a:r>
-            <a:r>
-              <a:rPr lang="ko-KR" altLang="en-US" sz="1000" dirty="0">
-                <a:solidFill>
-                  <a:srgbClr val="595959"/>
-                </a:solidFill>
-                <a:latin typeface="맑은 고딕"/>
-              </a:rPr>
-              <a:t>상단</a:t>
-            </a:r>
-            <a:r>
-              <a:rPr sz="1000" b="0" dirty="0">
-                <a:solidFill>
-                  <a:srgbClr val="595959"/>
-                </a:solidFill>
-                <a:latin typeface="맑은 고딕"/>
-              </a:rPr>
-              <a:t> </a:t>
-            </a:r>
-            <a:r>
-              <a:rPr sz="1000" b="0" dirty="0" err="1">
-                <a:solidFill>
-                  <a:srgbClr val="595959"/>
-                </a:solidFill>
-                <a:latin typeface="맑은 고딕"/>
-              </a:rPr>
-              <a:t>상태바</a:t>
-            </a:r>
-            <a:r>
-              <a:rPr sz="1000" b="0" dirty="0">
-                <a:solidFill>
-                  <a:srgbClr val="595959"/>
-                </a:solidFill>
-                <a:latin typeface="맑은 고딕"/>
-              </a:rPr>
-              <a:t> EQUIP / HOST / SCH 는 각 </a:t>
-            </a:r>
-            <a:r>
-              <a:rPr sz="1000" b="0" dirty="0" err="1">
-                <a:solidFill>
-                  <a:srgbClr val="595959"/>
-                </a:solidFill>
-                <a:latin typeface="맑은 고딕"/>
-              </a:rPr>
-              <a:t>서버</a:t>
-            </a:r>
-            <a:r>
-              <a:rPr sz="1000" b="0" dirty="0">
-                <a:solidFill>
-                  <a:srgbClr val="595959"/>
-                </a:solidFill>
-                <a:latin typeface="맑은 고딕"/>
-              </a:rPr>
-              <a:t> </a:t>
-            </a:r>
-            <a:r>
-              <a:rPr sz="1000" b="0" dirty="0" err="1">
-                <a:solidFill>
-                  <a:srgbClr val="595959"/>
-                </a:solidFill>
-                <a:latin typeface="맑은 고딕"/>
-              </a:rPr>
-              <a:t>프로그램</a:t>
-            </a:r>
-            <a:r>
-              <a:rPr sz="1000" b="0" dirty="0">
-                <a:solidFill>
-                  <a:srgbClr val="595959"/>
-                </a:solidFill>
-                <a:latin typeface="맑은 고딕"/>
-              </a:rPr>
-              <a:t>(</a:t>
-            </a:r>
-            <a:r>
-              <a:rPr sz="1000" b="0" dirty="0" err="1">
-                <a:solidFill>
-                  <a:srgbClr val="595959"/>
-                </a:solidFill>
-                <a:latin typeface="맑은 고딕"/>
-              </a:rPr>
-              <a:t>설비</a:t>
-            </a:r>
-            <a:r>
-              <a:rPr sz="1000" b="0" dirty="0">
-                <a:solidFill>
-                  <a:srgbClr val="595959"/>
-                </a:solidFill>
-                <a:latin typeface="맑은 고딕"/>
-              </a:rPr>
-              <a:t> </a:t>
-            </a:r>
-            <a:r>
-              <a:rPr sz="1000" b="0" dirty="0" err="1">
-                <a:solidFill>
-                  <a:srgbClr val="595959"/>
-                </a:solidFill>
-                <a:latin typeface="맑은 고딕"/>
-              </a:rPr>
-              <a:t>통신</a:t>
-            </a:r>
-            <a:r>
-              <a:rPr sz="1000" b="0" dirty="0">
-                <a:solidFill>
-                  <a:srgbClr val="595959"/>
-                </a:solidFill>
-                <a:latin typeface="맑은 고딕"/>
-              </a:rPr>
-              <a:t>/</a:t>
-            </a:r>
-            <a:r>
-              <a:rPr sz="1000" b="0" dirty="0" err="1">
-                <a:solidFill>
-                  <a:srgbClr val="595959"/>
-                </a:solidFill>
-                <a:latin typeface="맑은 고딕"/>
-              </a:rPr>
-              <a:t>상위</a:t>
-            </a:r>
-            <a:r>
-              <a:rPr sz="1000" b="0" dirty="0">
-                <a:solidFill>
-                  <a:srgbClr val="595959"/>
-                </a:solidFill>
-                <a:latin typeface="맑은 고딕"/>
-              </a:rPr>
-              <a:t> </a:t>
-            </a:r>
-            <a:r>
-              <a:rPr sz="1000" b="0" dirty="0" err="1">
-                <a:solidFill>
-                  <a:srgbClr val="595959"/>
-                </a:solidFill>
-                <a:latin typeface="맑은 고딕"/>
-              </a:rPr>
-              <a:t>통신</a:t>
-            </a:r>
-            <a:r>
-              <a:rPr sz="1000" b="0" dirty="0">
-                <a:solidFill>
-                  <a:srgbClr val="595959"/>
-                </a:solidFill>
-                <a:latin typeface="맑은 고딕"/>
-              </a:rPr>
-              <a:t>/</a:t>
-            </a:r>
-            <a:r>
-              <a:rPr sz="1000" b="0" dirty="0" err="1">
-                <a:solidFill>
-                  <a:srgbClr val="595959"/>
-                </a:solidFill>
-                <a:latin typeface="맑은 고딕"/>
-              </a:rPr>
-              <a:t>스케줄러</a:t>
-            </a:r>
-            <a:r>
-              <a:rPr sz="1000" b="0" dirty="0">
-                <a:solidFill>
-                  <a:srgbClr val="595959"/>
-                </a:solidFill>
-                <a:latin typeface="맑은 고딕"/>
-              </a:rPr>
-              <a:t>)의 </a:t>
-            </a:r>
-            <a:r>
-              <a:rPr sz="1000" b="0" dirty="0" err="1">
-                <a:solidFill>
-                  <a:srgbClr val="595959"/>
-                </a:solidFill>
-                <a:latin typeface="맑은 고딕"/>
-              </a:rPr>
-              <a:t>생존</a:t>
-            </a:r>
-            <a:r>
-              <a:rPr sz="1000" b="0" dirty="0">
-                <a:solidFill>
-                  <a:srgbClr val="595959"/>
-                </a:solidFill>
-                <a:latin typeface="맑은 고딕"/>
-              </a:rPr>
-              <a:t> </a:t>
-            </a:r>
-            <a:r>
-              <a:rPr sz="1000" b="0" dirty="0" err="1">
-                <a:solidFill>
-                  <a:srgbClr val="595959"/>
-                </a:solidFill>
-                <a:latin typeface="맑은 고딕"/>
-              </a:rPr>
-              <a:t>상태</a:t>
-            </a:r>
-            <a:r>
-              <a:rPr sz="1000" b="0" dirty="0">
-                <a:solidFill>
-                  <a:srgbClr val="595959"/>
-                </a:solidFill>
-                <a:latin typeface="맑은 고딕"/>
-              </a:rPr>
-              <a:t>(</a:t>
-            </a:r>
-            <a:r>
-              <a:rPr sz="1000" b="0" dirty="0" err="1">
-                <a:solidFill>
-                  <a:srgbClr val="595959"/>
-                </a:solidFill>
-                <a:latin typeface="맑은 고딕"/>
-              </a:rPr>
-              <a:t>초록</a:t>
-            </a:r>
-            <a:r>
-              <a:rPr sz="1000" b="0" dirty="0">
-                <a:solidFill>
-                  <a:srgbClr val="595959"/>
-                </a:solidFill>
-                <a:latin typeface="맑은 고딕"/>
-              </a:rPr>
-              <a:t>=</a:t>
-            </a:r>
-            <a:r>
-              <a:rPr sz="1000" b="0" dirty="0" err="1">
-                <a:solidFill>
-                  <a:srgbClr val="595959"/>
-                </a:solidFill>
-                <a:latin typeface="맑은 고딕"/>
-              </a:rPr>
-              <a:t>정상</a:t>
-            </a:r>
-            <a:r>
-              <a:rPr sz="1000" b="0" dirty="0">
-                <a:solidFill>
-                  <a:srgbClr val="595959"/>
-                </a:solidFill>
-                <a:latin typeface="맑은 고딕"/>
-              </a:rPr>
-              <a:t>, </a:t>
-            </a:r>
-            <a:r>
-              <a:rPr sz="1000" b="0" dirty="0" err="1">
-                <a:solidFill>
-                  <a:srgbClr val="595959"/>
-                </a:solidFill>
-                <a:latin typeface="맑은 고딕"/>
-              </a:rPr>
-              <a:t>빨강</a:t>
-            </a:r>
-            <a:r>
-              <a:rPr sz="1000" b="0" dirty="0">
-                <a:solidFill>
-                  <a:srgbClr val="595959"/>
-                </a:solidFill>
-                <a:latin typeface="맑은 고딕"/>
-              </a:rPr>
-              <a:t>=</a:t>
-            </a:r>
-            <a:r>
-              <a:rPr sz="1000" b="0" dirty="0" err="1">
-                <a:solidFill>
-                  <a:srgbClr val="595959"/>
-                </a:solidFill>
-                <a:latin typeface="맑은 고딕"/>
-              </a:rPr>
-              <a:t>끊김</a:t>
-            </a:r>
-            <a:r>
-              <a:rPr sz="1000" b="0" dirty="0">
-                <a:solidFill>
-                  <a:srgbClr val="595959"/>
-                </a:solidFill>
-                <a:latin typeface="맑은 고딕"/>
-              </a:rPr>
-              <a:t>)</a:t>
-            </a:r>
-            <a:r>
-              <a:rPr sz="1000" b="0" dirty="0" err="1">
-                <a:solidFill>
-                  <a:srgbClr val="595959"/>
-                </a:solidFill>
-                <a:latin typeface="맑은 고딕"/>
-              </a:rPr>
-              <a:t>이다</a:t>
-            </a:r>
-            <a:r>
-              <a:rPr sz="1000" b="0" dirty="0">
-                <a:solidFill>
-                  <a:srgbClr val="595959"/>
-                </a:solidFill>
-                <a:latin typeface="맑은 고딕"/>
-              </a:rPr>
-              <a:t>.</a:t>
-            </a:r>
-          </a:p>
-        </p:txBody>
-      </p:sp>
-      <p:sp>
-        <p:nvSpPr>
-          <p:cNvPr id="6" name="TextBox 5"/>
-          <p:cNvSpPr txBox="1"/>
-          <p:nvPr/>
-        </p:nvSpPr>
-        <p:spPr>
-          <a:xfrm>
-            <a:off x="457200" y="6400800"/>
-            <a:ext cx="3657600" cy="320040"/>
-          </a:xfrm>
-          <a:prstGeom prst="rect">
-            <a:avLst/>
-          </a:prstGeom>
-          <a:noFill/>
-        </p:spPr>
-        <p:txBody>
-          <a:bodyPr wrap="square" lIns="45720" rIns="45720" anchor="t">
-            <a:spAutoFit/>
-          </a:bodyPr>
-          <a:lstStyle/>
-          <a:p>
-            <a:pPr algn="l"/>
-            <a:r>
-              <a:rPr sz="1000" b="0">
-                <a:solidFill>
-                  <a:srgbClr val="595959"/>
-                </a:solidFill>
-                <a:latin typeface="맑은 고딕"/>
-              </a:rPr>
-              <a:t>LG 화학 1동 ECS  |  화면설계서</a:t>
-            </a:r>
-          </a:p>
-        </p:txBody>
-      </p:sp>
-      <p:sp>
-        <p:nvSpPr>
-          <p:cNvPr id="7" name="TextBox 6"/>
-          <p:cNvSpPr txBox="1"/>
-          <p:nvPr/>
-        </p:nvSpPr>
-        <p:spPr>
-          <a:xfrm>
-            <a:off x="11155680" y="6400800"/>
-            <a:ext cx="731520" cy="320040"/>
-          </a:xfrm>
-          <a:prstGeom prst="rect">
-            <a:avLst/>
-          </a:prstGeom>
-          <a:noFill/>
-        </p:spPr>
-        <p:txBody>
-          <a:bodyPr wrap="square" lIns="45720" rIns="45720" anchor="t">
-            <a:spAutoFit/>
-          </a:bodyPr>
-          <a:lstStyle/>
-          <a:p>
-            <a:pPr algn="r"/>
-            <a:r>
-              <a:rPr sz="1000" b="0">
-                <a:solidFill>
-                  <a:srgbClr val="595959"/>
-                </a:solidFill>
-                <a:latin typeface="맑은 고딕"/>
-              </a:rPr>
-              <a:t>4</a:t>
-            </a:r>
-          </a:p>
-        </p:txBody>
-      </p:sp>
     </p:spTree>
   </p:cSld>
   <p:clrMapOvr>

--- a/docs/산출물_20260909/06_ECS_화면설계서.pptx
+++ b/docs/산출물_20260909/06_ECS_화면설계서.pptx
@@ -7479,7 +7479,7 @@
                 </a:solidFill>
                 <a:latin typeface="맑은 고딕"/>
               </a:rPr>
-              <a:t>· [</a:t>
+              <a:t>· [쓰기] 는 그 트랙의 작업번호를 새로 넣는다. 실물 화물이 있는데 시스템이 모르는 경우 작업번호를 인식시킬 때 쓴다.</a:t>
             </a:r>
             <a:r>
               <a:rPr lang="ko-KR" altLang="en-US" sz="1000" b="0" dirty="0">
@@ -7488,25 +7488,343 @@
                 </a:solidFill>
                 <a:latin typeface="맑은 고딕"/>
               </a:rPr>
-              <a:t>쓰기</a:t>
-            </a:r>
-            <a:r>
-              <a:rPr sz="1000" b="0" dirty="0">
-                <a:solidFill>
-                  <a:srgbClr val="595959"/>
-                </a:solidFill>
-                <a:latin typeface="맑은 고딕"/>
-              </a:rPr>
-              <a:t>] 는 그 </a:t>
-            </a:r>
-            <a:r>
-              <a:rPr sz="1000" b="0" dirty="0" err="1">
-                <a:solidFill>
-                  <a:srgbClr val="595959"/>
-                </a:solidFill>
-                <a:latin typeface="맑은 고딕"/>
-              </a:rPr>
-              <a:t>트랙에</a:t>
+              <a:t/>
+            </a:r>
+            <a:r>
+              <a:rPr sz="1000" b="0" dirty="0">
+                <a:solidFill>
+                  <a:srgbClr val="595959"/>
+                </a:solidFill>
+                <a:latin typeface="맑은 고딕"/>
+              </a:rPr>
+              <a:t/>
+            </a:r>
+            <a:r>
+              <a:rPr sz="1000" b="0" dirty="0" err="1">
+                <a:solidFill>
+                  <a:srgbClr val="595959"/>
+                </a:solidFill>
+                <a:latin typeface="맑은 고딕"/>
+              </a:rPr>
+              <a:t/>
+            </a:r>
+            <a:r>
+              <a:rPr sz="1000" b="0" dirty="0">
+                <a:solidFill>
+                  <a:srgbClr val="595959"/>
+                </a:solidFill>
+                <a:latin typeface="맑은 고딕"/>
+              </a:rPr>
+              <a:t/>
+            </a:r>
+            <a:r>
+              <a:rPr sz="1000" b="0" dirty="0" err="1">
+                <a:solidFill>
+                  <a:srgbClr val="595959"/>
+                </a:solidFill>
+                <a:latin typeface="맑은 고딕"/>
+              </a:rPr>
+              <a:t/>
+            </a:r>
+            <a:r>
+              <a:rPr sz="1000" b="0" dirty="0">
+                <a:solidFill>
+                  <a:srgbClr val="595959"/>
+                </a:solidFill>
+                <a:latin typeface="맑은 고딕"/>
+              </a:rPr>
+              <a:t/>
+            </a:r>
+            <a:r>
+              <a:rPr sz="1000" b="0" dirty="0" err="1">
+                <a:solidFill>
+                  <a:srgbClr val="595959"/>
+                </a:solidFill>
+                <a:latin typeface="맑은 고딕"/>
+              </a:rPr>
+              <a:t/>
+            </a:r>
+            <a:r>
+              <a:rPr sz="1000" b="0" dirty="0">
+                <a:solidFill>
+                  <a:srgbClr val="595959"/>
+                </a:solidFill>
+                <a:latin typeface="맑은 고딕"/>
+              </a:rPr>
+              <a:t/>
+            </a:r>
+            <a:r>
+              <a:rPr sz="1000" b="0" dirty="0" err="1">
+                <a:solidFill>
+                  <a:srgbClr val="595959"/>
+                </a:solidFill>
+                <a:latin typeface="맑은 고딕"/>
+              </a:rPr>
+              <a:t/>
+            </a:r>
+            <a:r>
+              <a:rPr sz="1000" b="0" dirty="0">
+                <a:solidFill>
+                  <a:srgbClr val="595959"/>
+                </a:solidFill>
+                <a:latin typeface="맑은 고딕"/>
+              </a:rPr>
+              <a:t/>
+            </a:r>
+            <a:r>
+              <a:rPr sz="1000" b="0" dirty="0" err="1">
+                <a:solidFill>
+                  <a:srgbClr val="595959"/>
+                </a:solidFill>
+                <a:latin typeface="맑은 고딕"/>
+              </a:rPr>
+              <a:t/>
+            </a:r>
+            <a:r>
+              <a:rPr sz="1000" b="0" dirty="0">
+                <a:solidFill>
+                  <a:srgbClr val="595959"/>
+                </a:solidFill>
+                <a:latin typeface="맑은 고딕"/>
+              </a:rPr>
+              <a:t/>
+            </a:r>
+            <a:r>
+              <a:rPr sz="1000" b="0" dirty="0" err="1">
+                <a:solidFill>
+                  <a:srgbClr val="595959"/>
+                </a:solidFill>
+                <a:latin typeface="맑은 고딕"/>
+              </a:rPr>
+              <a:t/>
+            </a:r>
+            <a:r>
+              <a:rPr sz="1000" b="0" dirty="0">
+                <a:solidFill>
+                  <a:srgbClr val="595959"/>
+                </a:solidFill>
+                <a:latin typeface="맑은 고딕"/>
+              </a:rPr>
+              <a:t/>
+            </a:r>
+            <a:r>
+              <a:rPr sz="1000" b="0" dirty="0" err="1">
+                <a:solidFill>
+                  <a:srgbClr val="595959"/>
+                </a:solidFill>
+                <a:latin typeface="맑은 고딕"/>
+              </a:rPr>
+              <a:t/>
+            </a:r>
+            <a:r>
+              <a:rPr sz="1000" b="0" dirty="0">
+                <a:solidFill>
+                  <a:srgbClr val="595959"/>
+                </a:solidFill>
+                <a:latin typeface="맑은 고딕"/>
+              </a:rPr>
+              <a:t/>
+            </a:r>
+            <a:r>
+              <a:rPr sz="1000" b="0" dirty="0" err="1">
+                <a:solidFill>
+                  <a:srgbClr val="595959"/>
+                </a:solidFill>
+                <a:latin typeface="맑은 고딕"/>
+              </a:rPr>
+              <a:t/>
+            </a:r>
+            <a:r>
+              <a:rPr sz="1000" b="0" dirty="0">
+                <a:solidFill>
+                  <a:srgbClr val="595959"/>
+                </a:solidFill>
+                <a:latin typeface="맑은 고딕"/>
+              </a:rPr>
+              <a:t/>
+            </a:r>
+            <a:r>
+              <a:rPr sz="1000" b="0" dirty="0" err="1">
+                <a:solidFill>
+                  <a:srgbClr val="595959"/>
+                </a:solidFill>
+                <a:latin typeface="맑은 고딕"/>
+              </a:rPr>
+              <a:t/>
+            </a:r>
+            <a:r>
+              <a:rPr sz="1000" b="0" dirty="0">
+                <a:solidFill>
+                  <a:srgbClr val="595959"/>
+                </a:solidFill>
+                <a:latin typeface="맑은 고딕"/>
+              </a:rPr>
+              <a:t/>
+            </a:r>
+            <a:r>
+              <a:rPr sz="1000" b="0" dirty="0" err="1">
+                <a:solidFill>
+                  <a:srgbClr val="595959"/>
+                </a:solidFill>
+                <a:latin typeface="맑은 고딕"/>
+              </a:rPr>
+              <a:t/>
+            </a:r>
+            <a:r>
+              <a:rPr sz="1000" b="0" dirty="0">
+                <a:solidFill>
+                  <a:srgbClr val="595959"/>
+                </a:solidFill>
+                <a:latin typeface="맑은 고딕"/>
+              </a:rPr>
+              <a:t/>
+            </a:r>
+            <a:r>
+              <a:rPr sz="1000" b="0" dirty="0" err="1">
+                <a:solidFill>
+                  <a:srgbClr val="595959"/>
+                </a:solidFill>
+                <a:latin typeface="맑은 고딕"/>
+              </a:rPr>
+              <a:t/>
+            </a:r>
+            <a:r>
+              <a:rPr sz="1000" b="0" dirty="0">
+                <a:solidFill>
+                  <a:srgbClr val="595959"/>
+                </a:solidFill>
+                <a:latin typeface="맑은 고딕"/>
+              </a:rPr>
+              <a:t/>
+            </a:r>
+            <a:r>
+              <a:rPr sz="1000" b="0" dirty="0" err="1">
+                <a:solidFill>
+                  <a:srgbClr val="595959"/>
+                </a:solidFill>
+                <a:latin typeface="맑은 고딕"/>
+              </a:rPr>
+              <a:t/>
+            </a:r>
+            <a:r>
+              <a:rPr sz="1000" b="0" dirty="0">
+                <a:solidFill>
+                  <a:srgbClr val="595959"/>
+                </a:solidFill>
+                <a:latin typeface="맑은 고딕"/>
+              </a:rPr>
+              <a:t/>
+            </a:r>
+            <a:r>
+              <a:rPr sz="1000" b="0" dirty="0" err="1">
+                <a:solidFill>
+                  <a:srgbClr val="595959"/>
+                </a:solidFill>
+                <a:latin typeface="맑은 고딕"/>
+              </a:rPr>
+              <a:t/>
+            </a:r>
+            <a:r>
+              <a:rPr sz="1000" b="0" dirty="0">
+                <a:solidFill>
+                  <a:srgbClr val="595959"/>
+                </a:solidFill>
+                <a:latin typeface="맑은 고딕"/>
+              </a:rPr>
+              <a:t/>
+            </a:r>
+            <a:r>
+              <a:rPr sz="1000" b="0" dirty="0" err="1">
+                <a:solidFill>
+                  <a:srgbClr val="595959"/>
+                </a:solidFill>
+                <a:latin typeface="맑은 고딕"/>
+              </a:rPr>
+              <a:t/>
+            </a:r>
+            <a:r>
+              <a:rPr sz="1000" b="0" dirty="0">
+                <a:solidFill>
+                  <a:srgbClr val="595959"/>
+                </a:solidFill>
+                <a:latin typeface="맑은 고딕"/>
+              </a:rPr>
+              <a:t/>
+            </a:r>
+            <a:r>
+              <a:rPr sz="1000" b="0" dirty="0" err="1">
+                <a:solidFill>
+                  <a:srgbClr val="595959"/>
+                </a:solidFill>
+                <a:latin typeface="맑은 고딕"/>
+              </a:rPr>
+              <a:t/>
+            </a:r>
+            <a:r>
+              <a:rPr sz="1000" b="0" dirty="0">
+                <a:solidFill>
+                  <a:srgbClr val="595959"/>
+                </a:solidFill>
+                <a:latin typeface="맑은 고딕"/>
+              </a:rPr>
+              <a:t/>
+            </a:r>
+            <a:r>
+              <a:rPr sz="1000" b="0" dirty="0" err="1">
+                <a:solidFill>
+                  <a:srgbClr val="595959"/>
+                </a:solidFill>
+                <a:latin typeface="맑은 고딕"/>
+              </a:rPr>
+              <a:t/>
+            </a:r>
+            <a:r>
+              <a:rPr sz="1000" b="0" dirty="0">
+                <a:solidFill>
+                  <a:srgbClr val="595959"/>
+                </a:solidFill>
+                <a:latin typeface="맑은 고딕"/>
+              </a:rPr>
+              <a:t/>
+            </a:r>
+            <a:r>
+              <a:rPr sz="1000" b="0" dirty="0" err="1">
+                <a:solidFill>
+                  <a:srgbClr val="595959"/>
+                </a:solidFill>
+                <a:latin typeface="맑은 고딕"/>
+              </a:rPr>
+              <a:t/>
+            </a:r>
+            <a:r>
+              <a:rPr sz="1000" b="0" dirty="0">
+                <a:solidFill>
+                  <a:srgbClr val="595959"/>
+                </a:solidFill>
+                <a:latin typeface="맑은 고딕"/>
+              </a:rPr>
+              <a:t/>
+            </a:r>
+          </a:p>
+          <a:p>
+            <a:pPr algn="l"/>
+            <a:r>
+              <a:rPr sz="1000" b="0" dirty="0">
+                <a:solidFill>
+                  <a:srgbClr val="595959"/>
+                </a:solidFill>
+                <a:latin typeface="맑은 고딕"/>
+              </a:rPr>
+              <a:t>· </a:t>
+            </a:r>
+            <a:r>
+              <a:rPr sz="1000" b="0" dirty="0" err="1">
+                <a:solidFill>
+                  <a:srgbClr val="595959"/>
+                </a:solidFill>
+                <a:latin typeface="맑은 고딕"/>
+              </a:rPr>
+              <a:t>예외</a:t>
             </a:r>
             <a:r>
               <a:rPr sz="1000" b="0" dirty="0">
@@ -7524,25 +7842,169 @@
                 </a:solidFill>
                 <a:latin typeface="맑은 고딕"/>
               </a:rPr>
-              <a:t>작업번호·도착지를</a:t>
-            </a:r>
-            <a:r>
-              <a:rPr sz="1000" b="0" dirty="0">
-                <a:solidFill>
-                  <a:srgbClr val="595959"/>
-                </a:solidFill>
-                <a:latin typeface="맑은 고딕"/>
-              </a:rPr>
-              <a:t> 써 </a:t>
-            </a:r>
-            <a:r>
-              <a:rPr sz="1000" b="0" dirty="0" err="1">
-                <a:solidFill>
-                  <a:srgbClr val="595959"/>
-                </a:solidFill>
-                <a:latin typeface="맑은 고딕"/>
-              </a:rPr>
-              <a:t>넣는다</a:t>
+              <a:t>처리</a:t>
+            </a:r>
+            <a:r>
+              <a:rPr sz="1000" b="0" dirty="0">
+                <a:solidFill>
+                  <a:srgbClr val="595959"/>
+                </a:solidFill>
+                <a:latin typeface="맑은 고딕"/>
+              </a:rPr>
+              <a:t> </a:t>
+            </a:r>
+            <a:r>
+              <a:rPr sz="1000" b="0" dirty="0" err="1">
+                <a:solidFill>
+                  <a:srgbClr val="595959"/>
+                </a:solidFill>
+                <a:latin typeface="맑은 고딕"/>
+              </a:rPr>
+              <a:t>그룹의</a:t>
+            </a:r>
+            <a:r>
+              <a:rPr sz="1000" b="0" dirty="0">
+                <a:solidFill>
+                  <a:srgbClr val="595959"/>
+                </a:solidFill>
+                <a:latin typeface="맑은 고딕"/>
+              </a:rPr>
+              <a:t> [H/S </a:t>
+            </a:r>
+            <a:r>
+              <a:rPr sz="1000" b="0" dirty="0" err="1">
+                <a:solidFill>
+                  <a:srgbClr val="595959"/>
+                </a:solidFill>
+                <a:latin typeface="맑은 고딕"/>
+              </a:rPr>
+              <a:t>배출</a:t>
+            </a:r>
+            <a:r>
+              <a:rPr sz="1000" b="0" dirty="0">
+                <a:solidFill>
+                  <a:srgbClr val="595959"/>
+                </a:solidFill>
+                <a:latin typeface="맑은 고딕"/>
+              </a:rPr>
+              <a:t>] 은 </a:t>
+            </a:r>
+            <a:r>
+              <a:rPr sz="1000" b="0" dirty="0" err="1">
+                <a:solidFill>
+                  <a:srgbClr val="595959"/>
+                </a:solidFill>
+                <a:latin typeface="맑은 고딕"/>
+              </a:rPr>
+              <a:t>출고</a:t>
+            </a:r>
+            <a:r>
+              <a:rPr sz="1000" b="0" dirty="0">
+                <a:solidFill>
+                  <a:srgbClr val="595959"/>
+                </a:solidFill>
+                <a:latin typeface="맑은 고딕"/>
+              </a:rPr>
+              <a:t> H/S 에 </a:t>
+            </a:r>
+            <a:r>
+              <a:rPr sz="1000" b="0" dirty="0" err="1">
+                <a:solidFill>
+                  <a:srgbClr val="595959"/>
+                </a:solidFill>
+                <a:latin typeface="맑은 고딕"/>
+              </a:rPr>
+              <a:t>놓인</a:t>
+            </a:r>
+            <a:r>
+              <a:rPr sz="1000" b="0" dirty="0">
+                <a:solidFill>
+                  <a:srgbClr val="595959"/>
+                </a:solidFill>
+                <a:latin typeface="맑은 고딕"/>
+              </a:rPr>
+              <a:t> </a:t>
+            </a:r>
+            <a:r>
+              <a:rPr sz="1000" b="0" dirty="0" err="1">
+                <a:solidFill>
+                  <a:srgbClr val="595959"/>
+                </a:solidFill>
+                <a:latin typeface="맑은 고딕"/>
+              </a:rPr>
+              <a:t>작업</a:t>
+            </a:r>
+            <a:r>
+              <a:rPr sz="1000" b="0" dirty="0">
+                <a:solidFill>
+                  <a:srgbClr val="595959"/>
+                </a:solidFill>
+                <a:latin typeface="맑은 고딕"/>
+              </a:rPr>
+              <a:t> </a:t>
+            </a:r>
+            <a:r>
+              <a:rPr sz="1000" b="0" dirty="0" err="1">
+                <a:solidFill>
+                  <a:srgbClr val="595959"/>
+                </a:solidFill>
+                <a:latin typeface="맑은 고딕"/>
+              </a:rPr>
+              <a:t>없는</a:t>
+            </a:r>
+            <a:r>
+              <a:rPr sz="1000" b="0" dirty="0">
+                <a:solidFill>
+                  <a:srgbClr val="595959"/>
+                </a:solidFill>
+                <a:latin typeface="맑은 고딕"/>
+              </a:rPr>
+              <a:t> </a:t>
+            </a:r>
+            <a:r>
+              <a:rPr sz="1000" b="0" dirty="0" err="1">
+                <a:solidFill>
+                  <a:srgbClr val="595959"/>
+                </a:solidFill>
+                <a:latin typeface="맑은 고딕"/>
+              </a:rPr>
+              <a:t>화물을</a:t>
+            </a:r>
+            <a:r>
+              <a:rPr sz="1000" b="0" dirty="0">
+                <a:solidFill>
+                  <a:srgbClr val="595959"/>
+                </a:solidFill>
+                <a:latin typeface="맑은 고딕"/>
+              </a:rPr>
+              <a:t> </a:t>
+            </a:r>
+            <a:r>
+              <a:rPr sz="1000" b="0" dirty="0" err="1">
+                <a:solidFill>
+                  <a:srgbClr val="595959"/>
+                </a:solidFill>
+                <a:latin typeface="맑은 고딕"/>
+              </a:rPr>
+              <a:t>출고대로</a:t>
+            </a:r>
+            <a:r>
+              <a:rPr sz="1000" b="0" dirty="0">
+                <a:solidFill>
+                  <a:srgbClr val="595959"/>
+                </a:solidFill>
+                <a:latin typeface="맑은 고딕"/>
+              </a:rPr>
+              <a:t> </a:t>
+            </a:r>
+            <a:r>
+              <a:rPr sz="1000" b="0" dirty="0" err="1">
+                <a:solidFill>
+                  <a:srgbClr val="595959"/>
+                </a:solidFill>
+                <a:latin typeface="맑은 고딕"/>
+              </a:rPr>
+              <a:t>내보낸다</a:t>
             </a:r>
             <a:r>
               <a:rPr sz="1000" b="0" dirty="0">
@@ -7560,25 +8022,187 @@
                 </a:solidFill>
                 <a:latin typeface="맑은 고딕"/>
               </a:rPr>
-              <a:t>설비의</a:t>
-            </a:r>
-            <a:r>
-              <a:rPr sz="1000" b="0" dirty="0">
-                <a:solidFill>
-                  <a:srgbClr val="595959"/>
-                </a:solidFill>
-                <a:latin typeface="맑은 고딕"/>
-              </a:rPr>
-              <a:t> PLC </a:t>
-            </a:r>
-            <a:r>
-              <a:rPr sz="1000" b="0" dirty="0" err="1">
-                <a:solidFill>
-                  <a:srgbClr val="595959"/>
-                </a:solidFill>
-                <a:latin typeface="맑은 고딕"/>
-              </a:rPr>
-              <a:t>트래킹</a:t>
+              <a:t>비상</a:t>
+            </a:r>
+            <a:r>
+              <a:rPr sz="1000" b="0" dirty="0">
+                <a:solidFill>
+                  <a:srgbClr val="595959"/>
+                </a:solidFill>
+                <a:latin typeface="맑은 고딕"/>
+              </a:rPr>
+              <a:t> </a:t>
+            </a:r>
+            <a:r>
+              <a:rPr sz="1000" b="0" dirty="0" err="1">
+                <a:solidFill>
+                  <a:srgbClr val="595959"/>
+                </a:solidFill>
+                <a:latin typeface="맑은 고딕"/>
+              </a:rPr>
+              <a:t>확인창이</a:t>
+            </a:r>
+            <a:r>
+              <a:rPr sz="1000" b="0" dirty="0">
+                <a:solidFill>
+                  <a:srgbClr val="595959"/>
+                </a:solidFill>
+                <a:latin typeface="맑은 고딕"/>
+              </a:rPr>
+              <a:t> </a:t>
+            </a:r>
+            <a:r>
+              <a:rPr sz="1000" b="0" dirty="0" err="1">
+                <a:solidFill>
+                  <a:srgbClr val="595959"/>
+                </a:solidFill>
+                <a:latin typeface="맑은 고딕"/>
+              </a:rPr>
+              <a:t>뜨며</a:t>
+            </a:r>
+            <a:r>
+              <a:rPr sz="1000" b="0" dirty="0">
+                <a:solidFill>
+                  <a:srgbClr val="595959"/>
+                </a:solidFill>
+                <a:latin typeface="맑은 고딕"/>
+              </a:rPr>
+              <a:t>, </a:t>
+            </a:r>
+            <a:r>
+              <a:rPr sz="1000" b="0" dirty="0" err="1">
+                <a:solidFill>
+                  <a:srgbClr val="595959"/>
+                </a:solidFill>
+                <a:latin typeface="맑은 고딕"/>
+              </a:rPr>
+              <a:t>반자동</a:t>
+            </a:r>
+            <a:r>
+              <a:rPr sz="1000" b="0" dirty="0">
+                <a:solidFill>
+                  <a:srgbClr val="595959"/>
+                </a:solidFill>
+                <a:latin typeface="맑은 고딕"/>
+              </a:rPr>
+              <a:t> </a:t>
+            </a:r>
+            <a:r>
+              <a:rPr sz="1000" b="0" dirty="0" err="1">
+                <a:solidFill>
+                  <a:srgbClr val="595959"/>
+                </a:solidFill>
+                <a:latin typeface="맑은 고딕"/>
+              </a:rPr>
+              <a:t>출고</a:t>
+            </a:r>
+            <a:r>
+              <a:rPr sz="1000" b="0" dirty="0">
+                <a:solidFill>
+                  <a:srgbClr val="595959"/>
+                </a:solidFill>
+                <a:latin typeface="맑은 고딕"/>
+              </a:rPr>
+              <a:t> </a:t>
+            </a:r>
+            <a:r>
+              <a:rPr sz="1000" b="0" dirty="0" err="1">
+                <a:solidFill>
+                  <a:srgbClr val="595959"/>
+                </a:solidFill>
+                <a:latin typeface="맑은 고딕"/>
+              </a:rPr>
+              <a:t>작업을</a:t>
+            </a:r>
+            <a:r>
+              <a:rPr sz="1000" b="0" dirty="0">
+                <a:solidFill>
+                  <a:srgbClr val="595959"/>
+                </a:solidFill>
+                <a:latin typeface="맑은 고딕"/>
+              </a:rPr>
+              <a:t> </a:t>
+            </a:r>
+            <a:r>
+              <a:rPr sz="1000" b="0" dirty="0" err="1">
+                <a:solidFill>
+                  <a:srgbClr val="595959"/>
+                </a:solidFill>
+                <a:latin typeface="맑은 고딕"/>
+              </a:rPr>
+              <a:t>만들어</a:t>
+            </a:r>
+            <a:r>
+              <a:rPr sz="1000" b="0" dirty="0">
+                <a:solidFill>
+                  <a:srgbClr val="595959"/>
+                </a:solidFill>
+                <a:latin typeface="맑은 고딕"/>
+              </a:rPr>
+              <a:t> </a:t>
+            </a:r>
+            <a:r>
+              <a:rPr sz="1000" b="0" dirty="0" err="1">
+                <a:solidFill>
+                  <a:srgbClr val="595959"/>
+                </a:solidFill>
+                <a:latin typeface="맑은 고딕"/>
+              </a:rPr>
+              <a:t>상위</a:t>
+            </a:r>
+            <a:r>
+              <a:rPr sz="1000" b="0" dirty="0">
+                <a:solidFill>
+                  <a:srgbClr val="595959"/>
+                </a:solidFill>
+                <a:latin typeface="맑은 고딕"/>
+              </a:rPr>
+              <a:t> </a:t>
+            </a:r>
+            <a:r>
+              <a:rPr sz="1000" b="0" dirty="0" err="1">
+                <a:solidFill>
+                  <a:srgbClr val="595959"/>
+                </a:solidFill>
+                <a:latin typeface="맑은 고딕"/>
+              </a:rPr>
+              <a:t>보고</a:t>
+            </a:r>
+            <a:r>
+              <a:rPr sz="1000" b="0" dirty="0">
+                <a:solidFill>
+                  <a:srgbClr val="595959"/>
+                </a:solidFill>
+                <a:latin typeface="맑은 고딕"/>
+              </a:rPr>
+              <a:t> </a:t>
+            </a:r>
+            <a:r>
+              <a:rPr sz="1000" b="0" dirty="0" err="1">
+                <a:solidFill>
+                  <a:srgbClr val="595959"/>
+                </a:solidFill>
+                <a:latin typeface="맑은 고딕"/>
+              </a:rPr>
+              <a:t>없이</a:t>
+            </a:r>
+            <a:r>
+              <a:rPr sz="1000" b="0" dirty="0">
+                <a:solidFill>
+                  <a:srgbClr val="595959"/>
+                </a:solidFill>
+                <a:latin typeface="맑은 고딕"/>
+              </a:rPr>
+              <a:t> </a:t>
+            </a:r>
+            <a:r>
+              <a:rPr sz="1000" b="0" dirty="0" err="1">
+                <a:solidFill>
+                  <a:srgbClr val="595959"/>
+                </a:solidFill>
+                <a:latin typeface="맑은 고딕"/>
+              </a:rPr>
+              <a:t>처리한다</a:t>
             </a:r>
             <a:r>
               <a:rPr sz="1000" b="0" dirty="0">
@@ -7596,25 +8220,7 @@
                 </a:solidFill>
                 <a:latin typeface="맑은 고딕"/>
               </a:rPr>
-              <a:t>R영역</a:t>
-            </a:r>
-            <a:r>
-              <a:rPr sz="1000" b="0" dirty="0">
-                <a:solidFill>
-                  <a:srgbClr val="595959"/>
-                </a:solidFill>
-                <a:latin typeface="맑은 고딕"/>
-              </a:rPr>
-              <a:t>)</a:t>
-            </a:r>
-            <a:r>
-              <a:rPr sz="1000" b="0" dirty="0" err="1">
-                <a:solidFill>
-                  <a:srgbClr val="595959"/>
-                </a:solidFill>
-                <a:latin typeface="맑은 고딕"/>
-              </a:rPr>
-              <a:t>에도</a:t>
+              <a:t>아래</a:t>
             </a:r>
             <a:r>
               <a:rPr sz="1000" b="0" dirty="0">
@@ -7632,7 +8238,7 @@
                 </a:solidFill>
                 <a:latin typeface="맑은 고딕"/>
               </a:rPr>
-              <a:t>함께</a:t>
+              <a:t>예외</a:t>
             </a:r>
             <a:r>
               <a:rPr sz="1000" b="0" dirty="0">
@@ -7650,25 +8256,7 @@
                 </a:solidFill>
                 <a:latin typeface="맑은 고딕"/>
               </a:rPr>
-              <a:t>기록되므로</a:t>
-            </a:r>
-            <a:r>
-              <a:rPr sz="1000" b="0" dirty="0">
-                <a:solidFill>
-                  <a:srgbClr val="595959"/>
-                </a:solidFill>
-                <a:latin typeface="맑은 고딕"/>
-              </a:rPr>
-              <a:t>, </a:t>
-            </a:r>
-            <a:r>
-              <a:rPr sz="1000" b="0" dirty="0" err="1">
-                <a:solidFill>
-                  <a:srgbClr val="595959"/>
-                </a:solidFill>
-                <a:latin typeface="맑은 고딕"/>
-              </a:rPr>
-              <a:t>설비에</a:t>
+              <a:t>처리</a:t>
             </a:r>
             <a:r>
               <a:rPr sz="1000" b="0" dirty="0">
@@ -7686,594 +8274,6 @@
                 </a:solidFill>
                 <a:latin typeface="맑은 고딕"/>
               </a:rPr>
-              <a:t>놓여</a:t>
-            </a:r>
-            <a:r>
-              <a:rPr sz="1000" b="0" dirty="0">
-                <a:solidFill>
-                  <a:srgbClr val="595959"/>
-                </a:solidFill>
-                <a:latin typeface="맑은 고딕"/>
-              </a:rPr>
-              <a:t> </a:t>
-            </a:r>
-            <a:r>
-              <a:rPr sz="1000" b="0" dirty="0" err="1">
-                <a:solidFill>
-                  <a:srgbClr val="595959"/>
-                </a:solidFill>
-                <a:latin typeface="맑은 고딕"/>
-              </a:rPr>
-              <a:t>있는데</a:t>
-            </a:r>
-            <a:r>
-              <a:rPr sz="1000" b="0" dirty="0">
-                <a:solidFill>
-                  <a:srgbClr val="595959"/>
-                </a:solidFill>
-                <a:latin typeface="맑은 고딕"/>
-              </a:rPr>
-              <a:t> </a:t>
-            </a:r>
-            <a:r>
-              <a:rPr sz="1000" b="0" dirty="0" err="1">
-                <a:solidFill>
-                  <a:srgbClr val="595959"/>
-                </a:solidFill>
-                <a:latin typeface="맑은 고딕"/>
-              </a:rPr>
-              <a:t>시스템이</a:t>
-            </a:r>
-            <a:r>
-              <a:rPr sz="1000" b="0" dirty="0">
-                <a:solidFill>
-                  <a:srgbClr val="595959"/>
-                </a:solidFill>
-                <a:latin typeface="맑은 고딕"/>
-              </a:rPr>
-              <a:t> </a:t>
-            </a:r>
-            <a:r>
-              <a:rPr sz="1000" b="0" dirty="0" err="1">
-                <a:solidFill>
-                  <a:srgbClr val="595959"/>
-                </a:solidFill>
-                <a:latin typeface="맑은 고딕"/>
-              </a:rPr>
-              <a:t>모르는</a:t>
-            </a:r>
-            <a:r>
-              <a:rPr sz="1000" b="0" dirty="0">
-                <a:solidFill>
-                  <a:srgbClr val="595959"/>
-                </a:solidFill>
-                <a:latin typeface="맑은 고딕"/>
-              </a:rPr>
-              <a:t> </a:t>
-            </a:r>
-            <a:r>
-              <a:rPr sz="1000" b="0" dirty="0" err="1">
-                <a:solidFill>
-                  <a:srgbClr val="595959"/>
-                </a:solidFill>
-                <a:latin typeface="맑은 고딕"/>
-              </a:rPr>
-              <a:t>화물을</a:t>
-            </a:r>
-            <a:r>
-              <a:rPr sz="1000" b="0" dirty="0">
-                <a:solidFill>
-                  <a:srgbClr val="595959"/>
-                </a:solidFill>
-                <a:latin typeface="맑은 고딕"/>
-              </a:rPr>
-              <a:t> </a:t>
-            </a:r>
-            <a:r>
-              <a:rPr sz="1000" b="0" dirty="0" err="1">
-                <a:solidFill>
-                  <a:srgbClr val="595959"/>
-                </a:solidFill>
-                <a:latin typeface="맑은 고딕"/>
-              </a:rPr>
-              <a:t>인수시킬</a:t>
-            </a:r>
-            <a:r>
-              <a:rPr sz="1000" b="0" dirty="0">
-                <a:solidFill>
-                  <a:srgbClr val="595959"/>
-                </a:solidFill>
-                <a:latin typeface="맑은 고딕"/>
-              </a:rPr>
-              <a:t> 때 </a:t>
-            </a:r>
-            <a:r>
-              <a:rPr sz="1000" b="0" dirty="0" err="1">
-                <a:solidFill>
-                  <a:srgbClr val="595959"/>
-                </a:solidFill>
-                <a:latin typeface="맑은 고딕"/>
-              </a:rPr>
-              <a:t>쓴다</a:t>
-            </a:r>
-            <a:r>
-              <a:rPr sz="1000" b="0" dirty="0">
-                <a:solidFill>
-                  <a:srgbClr val="595959"/>
-                </a:solidFill>
-                <a:latin typeface="맑은 고딕"/>
-              </a:rPr>
-              <a:t>.</a:t>
-            </a:r>
-          </a:p>
-          <a:p>
-            <a:pPr algn="l"/>
-            <a:r>
-              <a:rPr sz="1000" b="0" dirty="0">
-                <a:solidFill>
-                  <a:srgbClr val="595959"/>
-                </a:solidFill>
-                <a:latin typeface="맑은 고딕"/>
-              </a:rPr>
-              <a:t>· </a:t>
-            </a:r>
-            <a:r>
-              <a:rPr sz="1000" b="0" dirty="0" err="1">
-                <a:solidFill>
-                  <a:srgbClr val="595959"/>
-                </a:solidFill>
-                <a:latin typeface="맑은 고딕"/>
-              </a:rPr>
-              <a:t>예외</a:t>
-            </a:r>
-            <a:r>
-              <a:rPr sz="1000" b="0" dirty="0">
-                <a:solidFill>
-                  <a:srgbClr val="595959"/>
-                </a:solidFill>
-                <a:latin typeface="맑은 고딕"/>
-              </a:rPr>
-              <a:t> </a:t>
-            </a:r>
-            <a:r>
-              <a:rPr sz="1000" b="0" dirty="0" err="1">
-                <a:solidFill>
-                  <a:srgbClr val="595959"/>
-                </a:solidFill>
-                <a:latin typeface="맑은 고딕"/>
-              </a:rPr>
-              <a:t>처리</a:t>
-            </a:r>
-            <a:r>
-              <a:rPr sz="1000" b="0" dirty="0">
-                <a:solidFill>
-                  <a:srgbClr val="595959"/>
-                </a:solidFill>
-                <a:latin typeface="맑은 고딕"/>
-              </a:rPr>
-              <a:t> </a:t>
-            </a:r>
-            <a:r>
-              <a:rPr sz="1000" b="0" dirty="0" err="1">
-                <a:solidFill>
-                  <a:srgbClr val="595959"/>
-                </a:solidFill>
-                <a:latin typeface="맑은 고딕"/>
-              </a:rPr>
-              <a:t>그룹의</a:t>
-            </a:r>
-            <a:r>
-              <a:rPr sz="1000" b="0" dirty="0">
-                <a:solidFill>
-                  <a:srgbClr val="595959"/>
-                </a:solidFill>
-                <a:latin typeface="맑은 고딕"/>
-              </a:rPr>
-              <a:t> [H/S </a:t>
-            </a:r>
-            <a:r>
-              <a:rPr sz="1000" b="0" dirty="0" err="1">
-                <a:solidFill>
-                  <a:srgbClr val="595959"/>
-                </a:solidFill>
-                <a:latin typeface="맑은 고딕"/>
-              </a:rPr>
-              <a:t>배출</a:t>
-            </a:r>
-            <a:r>
-              <a:rPr sz="1000" b="0" dirty="0">
-                <a:solidFill>
-                  <a:srgbClr val="595959"/>
-                </a:solidFill>
-                <a:latin typeface="맑은 고딕"/>
-              </a:rPr>
-              <a:t>] 은 </a:t>
-            </a:r>
-            <a:r>
-              <a:rPr sz="1000" b="0" dirty="0" err="1">
-                <a:solidFill>
-                  <a:srgbClr val="595959"/>
-                </a:solidFill>
-                <a:latin typeface="맑은 고딕"/>
-              </a:rPr>
-              <a:t>출고</a:t>
-            </a:r>
-            <a:r>
-              <a:rPr sz="1000" b="0" dirty="0">
-                <a:solidFill>
-                  <a:srgbClr val="595959"/>
-                </a:solidFill>
-                <a:latin typeface="맑은 고딕"/>
-              </a:rPr>
-              <a:t> H/S 에 </a:t>
-            </a:r>
-            <a:r>
-              <a:rPr sz="1000" b="0" dirty="0" err="1">
-                <a:solidFill>
-                  <a:srgbClr val="595959"/>
-                </a:solidFill>
-                <a:latin typeface="맑은 고딕"/>
-              </a:rPr>
-              <a:t>놓인</a:t>
-            </a:r>
-            <a:r>
-              <a:rPr sz="1000" b="0" dirty="0">
-                <a:solidFill>
-                  <a:srgbClr val="595959"/>
-                </a:solidFill>
-                <a:latin typeface="맑은 고딕"/>
-              </a:rPr>
-              <a:t> </a:t>
-            </a:r>
-            <a:r>
-              <a:rPr sz="1000" b="0" dirty="0" err="1">
-                <a:solidFill>
-                  <a:srgbClr val="595959"/>
-                </a:solidFill>
-                <a:latin typeface="맑은 고딕"/>
-              </a:rPr>
-              <a:t>작업</a:t>
-            </a:r>
-            <a:r>
-              <a:rPr sz="1000" b="0" dirty="0">
-                <a:solidFill>
-                  <a:srgbClr val="595959"/>
-                </a:solidFill>
-                <a:latin typeface="맑은 고딕"/>
-              </a:rPr>
-              <a:t> </a:t>
-            </a:r>
-            <a:r>
-              <a:rPr sz="1000" b="0" dirty="0" err="1">
-                <a:solidFill>
-                  <a:srgbClr val="595959"/>
-                </a:solidFill>
-                <a:latin typeface="맑은 고딕"/>
-              </a:rPr>
-              <a:t>없는</a:t>
-            </a:r>
-            <a:r>
-              <a:rPr sz="1000" b="0" dirty="0">
-                <a:solidFill>
-                  <a:srgbClr val="595959"/>
-                </a:solidFill>
-                <a:latin typeface="맑은 고딕"/>
-              </a:rPr>
-              <a:t> </a:t>
-            </a:r>
-            <a:r>
-              <a:rPr sz="1000" b="0" dirty="0" err="1">
-                <a:solidFill>
-                  <a:srgbClr val="595959"/>
-                </a:solidFill>
-                <a:latin typeface="맑은 고딕"/>
-              </a:rPr>
-              <a:t>화물을</a:t>
-            </a:r>
-            <a:r>
-              <a:rPr sz="1000" b="0" dirty="0">
-                <a:solidFill>
-                  <a:srgbClr val="595959"/>
-                </a:solidFill>
-                <a:latin typeface="맑은 고딕"/>
-              </a:rPr>
-              <a:t> </a:t>
-            </a:r>
-            <a:r>
-              <a:rPr sz="1000" b="0" dirty="0" err="1">
-                <a:solidFill>
-                  <a:srgbClr val="595959"/>
-                </a:solidFill>
-                <a:latin typeface="맑은 고딕"/>
-              </a:rPr>
-              <a:t>출고대로</a:t>
-            </a:r>
-            <a:r>
-              <a:rPr sz="1000" b="0" dirty="0">
-                <a:solidFill>
-                  <a:srgbClr val="595959"/>
-                </a:solidFill>
-                <a:latin typeface="맑은 고딕"/>
-              </a:rPr>
-              <a:t> </a:t>
-            </a:r>
-            <a:r>
-              <a:rPr sz="1000" b="0" dirty="0" err="1">
-                <a:solidFill>
-                  <a:srgbClr val="595959"/>
-                </a:solidFill>
-                <a:latin typeface="맑은 고딕"/>
-              </a:rPr>
-              <a:t>내보낸다</a:t>
-            </a:r>
-            <a:r>
-              <a:rPr sz="1000" b="0" dirty="0">
-                <a:solidFill>
-                  <a:srgbClr val="595959"/>
-                </a:solidFill>
-                <a:latin typeface="맑은 고딕"/>
-              </a:rPr>
-              <a:t>. </a:t>
-            </a:r>
-            <a:r>
-              <a:rPr sz="1000" b="0" dirty="0" err="1">
-                <a:solidFill>
-                  <a:srgbClr val="595959"/>
-                </a:solidFill>
-                <a:latin typeface="맑은 고딕"/>
-              </a:rPr>
-              <a:t>비상</a:t>
-            </a:r>
-            <a:r>
-              <a:rPr sz="1000" b="0" dirty="0">
-                <a:solidFill>
-                  <a:srgbClr val="595959"/>
-                </a:solidFill>
-                <a:latin typeface="맑은 고딕"/>
-              </a:rPr>
-              <a:t> </a:t>
-            </a:r>
-            <a:r>
-              <a:rPr sz="1000" b="0" dirty="0" err="1">
-                <a:solidFill>
-                  <a:srgbClr val="595959"/>
-                </a:solidFill>
-                <a:latin typeface="맑은 고딕"/>
-              </a:rPr>
-              <a:t>확인창이</a:t>
-            </a:r>
-            <a:r>
-              <a:rPr sz="1000" b="0" dirty="0">
-                <a:solidFill>
-                  <a:srgbClr val="595959"/>
-                </a:solidFill>
-                <a:latin typeface="맑은 고딕"/>
-              </a:rPr>
-              <a:t> </a:t>
-            </a:r>
-            <a:r>
-              <a:rPr sz="1000" b="0" dirty="0" err="1">
-                <a:solidFill>
-                  <a:srgbClr val="595959"/>
-                </a:solidFill>
-                <a:latin typeface="맑은 고딕"/>
-              </a:rPr>
-              <a:t>뜨며</a:t>
-            </a:r>
-            <a:r>
-              <a:rPr sz="1000" b="0" dirty="0">
-                <a:solidFill>
-                  <a:srgbClr val="595959"/>
-                </a:solidFill>
-                <a:latin typeface="맑은 고딕"/>
-              </a:rPr>
-              <a:t>, </a:t>
-            </a:r>
-            <a:r>
-              <a:rPr sz="1000" b="0" dirty="0" err="1">
-                <a:solidFill>
-                  <a:srgbClr val="595959"/>
-                </a:solidFill>
-                <a:latin typeface="맑은 고딕"/>
-              </a:rPr>
-              <a:t>반자동</a:t>
-            </a:r>
-            <a:r>
-              <a:rPr sz="1000" b="0" dirty="0">
-                <a:solidFill>
-                  <a:srgbClr val="595959"/>
-                </a:solidFill>
-                <a:latin typeface="맑은 고딕"/>
-              </a:rPr>
-              <a:t> </a:t>
-            </a:r>
-            <a:r>
-              <a:rPr sz="1000" b="0" dirty="0" err="1">
-                <a:solidFill>
-                  <a:srgbClr val="595959"/>
-                </a:solidFill>
-                <a:latin typeface="맑은 고딕"/>
-              </a:rPr>
-              <a:t>출고</a:t>
-            </a:r>
-            <a:r>
-              <a:rPr sz="1000" b="0" dirty="0">
-                <a:solidFill>
-                  <a:srgbClr val="595959"/>
-                </a:solidFill>
-                <a:latin typeface="맑은 고딕"/>
-              </a:rPr>
-              <a:t> </a:t>
-            </a:r>
-            <a:r>
-              <a:rPr sz="1000" b="0" dirty="0" err="1">
-                <a:solidFill>
-                  <a:srgbClr val="595959"/>
-                </a:solidFill>
-                <a:latin typeface="맑은 고딕"/>
-              </a:rPr>
-              <a:t>작업을</a:t>
-            </a:r>
-            <a:r>
-              <a:rPr sz="1000" b="0" dirty="0">
-                <a:solidFill>
-                  <a:srgbClr val="595959"/>
-                </a:solidFill>
-                <a:latin typeface="맑은 고딕"/>
-              </a:rPr>
-              <a:t> </a:t>
-            </a:r>
-            <a:r>
-              <a:rPr sz="1000" b="0" dirty="0" err="1">
-                <a:solidFill>
-                  <a:srgbClr val="595959"/>
-                </a:solidFill>
-                <a:latin typeface="맑은 고딕"/>
-              </a:rPr>
-              <a:t>만들어</a:t>
-            </a:r>
-            <a:r>
-              <a:rPr sz="1000" b="0" dirty="0">
-                <a:solidFill>
-                  <a:srgbClr val="595959"/>
-                </a:solidFill>
-                <a:latin typeface="맑은 고딕"/>
-              </a:rPr>
-              <a:t> </a:t>
-            </a:r>
-            <a:r>
-              <a:rPr sz="1000" b="0" dirty="0" err="1">
-                <a:solidFill>
-                  <a:srgbClr val="595959"/>
-                </a:solidFill>
-                <a:latin typeface="맑은 고딕"/>
-              </a:rPr>
-              <a:t>상위</a:t>
-            </a:r>
-            <a:r>
-              <a:rPr sz="1000" b="0" dirty="0">
-                <a:solidFill>
-                  <a:srgbClr val="595959"/>
-                </a:solidFill>
-                <a:latin typeface="맑은 고딕"/>
-              </a:rPr>
-              <a:t> </a:t>
-            </a:r>
-            <a:r>
-              <a:rPr sz="1000" b="0" dirty="0" err="1">
-                <a:solidFill>
-                  <a:srgbClr val="595959"/>
-                </a:solidFill>
-                <a:latin typeface="맑은 고딕"/>
-              </a:rPr>
-              <a:t>보고</a:t>
-            </a:r>
-            <a:r>
-              <a:rPr sz="1000" b="0" dirty="0">
-                <a:solidFill>
-                  <a:srgbClr val="595959"/>
-                </a:solidFill>
-                <a:latin typeface="맑은 고딕"/>
-              </a:rPr>
-              <a:t> </a:t>
-            </a:r>
-            <a:r>
-              <a:rPr sz="1000" b="0" dirty="0" err="1">
-                <a:solidFill>
-                  <a:srgbClr val="595959"/>
-                </a:solidFill>
-                <a:latin typeface="맑은 고딕"/>
-              </a:rPr>
-              <a:t>없이</a:t>
-            </a:r>
-            <a:r>
-              <a:rPr sz="1000" b="0" dirty="0">
-                <a:solidFill>
-                  <a:srgbClr val="595959"/>
-                </a:solidFill>
-                <a:latin typeface="맑은 고딕"/>
-              </a:rPr>
-              <a:t> </a:t>
-            </a:r>
-            <a:r>
-              <a:rPr sz="1000" b="0" dirty="0" err="1">
-                <a:solidFill>
-                  <a:srgbClr val="595959"/>
-                </a:solidFill>
-                <a:latin typeface="맑은 고딕"/>
-              </a:rPr>
-              <a:t>처리한다</a:t>
-            </a:r>
-            <a:r>
-              <a:rPr sz="1000" b="0" dirty="0">
-                <a:solidFill>
-                  <a:srgbClr val="595959"/>
-                </a:solidFill>
-                <a:latin typeface="맑은 고딕"/>
-              </a:rPr>
-              <a:t>(</a:t>
-            </a:r>
-            <a:r>
-              <a:rPr sz="1000" b="0" dirty="0" err="1">
-                <a:solidFill>
-                  <a:srgbClr val="595959"/>
-                </a:solidFill>
-                <a:latin typeface="맑은 고딕"/>
-              </a:rPr>
-              <a:t>아래</a:t>
-            </a:r>
-            <a:r>
-              <a:rPr sz="1000" b="0" dirty="0">
-                <a:solidFill>
-                  <a:srgbClr val="595959"/>
-                </a:solidFill>
-                <a:latin typeface="맑은 고딕"/>
-              </a:rPr>
-              <a:t> </a:t>
-            </a:r>
-            <a:r>
-              <a:rPr sz="1000" b="0" dirty="0" err="1">
-                <a:solidFill>
-                  <a:srgbClr val="595959"/>
-                </a:solidFill>
-                <a:latin typeface="맑은 고딕"/>
-              </a:rPr>
-              <a:t>예외</a:t>
-            </a:r>
-            <a:r>
-              <a:rPr sz="1000" b="0" dirty="0">
-                <a:solidFill>
-                  <a:srgbClr val="595959"/>
-                </a:solidFill>
-                <a:latin typeface="맑은 고딕"/>
-              </a:rPr>
-              <a:t> </a:t>
-            </a:r>
-            <a:r>
-              <a:rPr sz="1000" b="0" dirty="0" err="1">
-                <a:solidFill>
-                  <a:srgbClr val="595959"/>
-                </a:solidFill>
-                <a:latin typeface="맑은 고딕"/>
-              </a:rPr>
-              <a:t>처리</a:t>
-            </a:r>
-            <a:r>
-              <a:rPr sz="1000" b="0" dirty="0">
-                <a:solidFill>
-                  <a:srgbClr val="595959"/>
-                </a:solidFill>
-                <a:latin typeface="맑은 고딕"/>
-              </a:rPr>
-              <a:t> </a:t>
-            </a:r>
-            <a:r>
-              <a:rPr sz="1000" b="0" dirty="0" err="1">
-                <a:solidFill>
-                  <a:srgbClr val="595959"/>
-                </a:solidFill>
-                <a:latin typeface="맑은 고딕"/>
-              </a:rPr>
               <a:t>참조</a:t>
             </a:r>
             <a:r>
@@ -8284,6 +8284,486 @@
                 <a:latin typeface="맑은 고딕"/>
               </a:rPr>
               <a:t>).</a:t>
+            </a:r>
+          </a:p>
+          <a:p>
+            <a:pPr algn="l"/>
+            <a:r>
+              <a:rPr sz="1000" b="0" dirty="0">
+                <a:solidFill>
+                  <a:srgbClr val="595959"/>
+                </a:solidFill>
+                <a:latin typeface="맑은 고딕"/>
+              </a:rPr>
+              <a:t>· 도착지·작업구분 입력란은 2026-09-10 에 뺐다. 이 현장은 컨베이어에 도착지·작업구분을 내려보내지 않는다 - PLC 로 나가는 것은 방향(D300+N-1)과 작업번호 트래킹(R영역)뿐이고, 구 트랙테이블 방식의 D(트랙×10) 지시 쓰기는 확정 주소와 충돌해 2026-09-02 부터 차단돼 있다.</a:t>
+            </a:r>
+            <a:r>
+              <a:rPr sz="1000" b="0" dirty="0" err="1">
+                <a:solidFill>
+                  <a:srgbClr val="595959"/>
+                </a:solidFill>
+                <a:latin typeface="맑은 고딕"/>
+              </a:rPr>
+              <a:t/>
+            </a:r>
+            <a:r>
+              <a:rPr sz="1000" b="0" dirty="0">
+                <a:solidFill>
+                  <a:srgbClr val="595959"/>
+                </a:solidFill>
+                <a:latin typeface="맑은 고딕"/>
+              </a:rPr>
+              <a:t/>
+            </a:r>
+            <a:r>
+              <a:rPr sz="1000" b="0" dirty="0" err="1">
+                <a:solidFill>
+                  <a:srgbClr val="595959"/>
+                </a:solidFill>
+                <a:latin typeface="맑은 고딕"/>
+              </a:rPr>
+              <a:t/>
+            </a:r>
+            <a:r>
+              <a:rPr sz="1000" b="0" dirty="0">
+                <a:solidFill>
+                  <a:srgbClr val="595959"/>
+                </a:solidFill>
+                <a:latin typeface="맑은 고딕"/>
+              </a:rPr>
+              <a:t/>
+            </a:r>
+            <a:r>
+              <a:rPr sz="1000" b="0" dirty="0" err="1">
+                <a:solidFill>
+                  <a:srgbClr val="595959"/>
+                </a:solidFill>
+                <a:latin typeface="맑은 고딕"/>
+              </a:rPr>
+              <a:t/>
+            </a:r>
+            <a:r>
+              <a:rPr sz="1000" b="0" dirty="0">
+                <a:solidFill>
+                  <a:srgbClr val="595959"/>
+                </a:solidFill>
+                <a:latin typeface="맑은 고딕"/>
+              </a:rPr>
+              <a:t/>
+            </a:r>
+            <a:r>
+              <a:rPr sz="1000" b="0" dirty="0" err="1">
+                <a:solidFill>
+                  <a:srgbClr val="595959"/>
+                </a:solidFill>
+                <a:latin typeface="맑은 고딕"/>
+              </a:rPr>
+              <a:t/>
+            </a:r>
+            <a:r>
+              <a:rPr sz="1000" b="0" dirty="0">
+                <a:solidFill>
+                  <a:srgbClr val="595959"/>
+                </a:solidFill>
+                <a:latin typeface="맑은 고딕"/>
+              </a:rPr>
+              <a:t/>
+            </a:r>
+            <a:r>
+              <a:rPr sz="1000" b="0" dirty="0" err="1">
+                <a:solidFill>
+                  <a:srgbClr val="595959"/>
+                </a:solidFill>
+                <a:latin typeface="맑은 고딕"/>
+              </a:rPr>
+              <a:t/>
+            </a:r>
+            <a:r>
+              <a:rPr sz="1000" b="0" dirty="0">
+                <a:solidFill>
+                  <a:srgbClr val="595959"/>
+                </a:solidFill>
+                <a:latin typeface="맑은 고딕"/>
+              </a:rPr>
+              <a:t/>
+            </a:r>
+            <a:r>
+              <a:rPr sz="1000" b="0" dirty="0" err="1">
+                <a:solidFill>
+                  <a:srgbClr val="595959"/>
+                </a:solidFill>
+                <a:latin typeface="맑은 고딕"/>
+              </a:rPr>
+              <a:t/>
+            </a:r>
+            <a:r>
+              <a:rPr sz="1000" b="0" dirty="0">
+                <a:solidFill>
+                  <a:srgbClr val="595959"/>
+                </a:solidFill>
+                <a:latin typeface="맑은 고딕"/>
+              </a:rPr>
+              <a:t/>
+            </a:r>
+            <a:r>
+              <a:rPr sz="1000" b="0" dirty="0" err="1">
+                <a:solidFill>
+                  <a:srgbClr val="595959"/>
+                </a:solidFill>
+                <a:latin typeface="맑은 고딕"/>
+              </a:rPr>
+              <a:t/>
+            </a:r>
+            <a:r>
+              <a:rPr sz="1000" b="0" dirty="0">
+                <a:solidFill>
+                  <a:srgbClr val="595959"/>
+                </a:solidFill>
+                <a:latin typeface="맑은 고딕"/>
+              </a:rPr>
+              <a:t/>
+            </a:r>
+            <a:r>
+              <a:rPr sz="1000" b="0" dirty="0" err="1">
+                <a:solidFill>
+                  <a:srgbClr val="595959"/>
+                </a:solidFill>
+                <a:latin typeface="맑은 고딕"/>
+              </a:rPr>
+              <a:t/>
+            </a:r>
+            <a:r>
+              <a:rPr sz="1000" b="0" dirty="0">
+                <a:solidFill>
+                  <a:srgbClr val="595959"/>
+                </a:solidFill>
+                <a:latin typeface="맑은 고딕"/>
+              </a:rPr>
+              <a:t/>
+            </a:r>
+            <a:r>
+              <a:rPr sz="1000" b="0" dirty="0" err="1">
+                <a:solidFill>
+                  <a:srgbClr val="595959"/>
+                </a:solidFill>
+                <a:latin typeface="맑은 고딕"/>
+              </a:rPr>
+              <a:t/>
+            </a:r>
+            <a:r>
+              <a:rPr sz="1000" b="0" dirty="0">
+                <a:solidFill>
+                  <a:srgbClr val="595959"/>
+                </a:solidFill>
+                <a:latin typeface="맑은 고딕"/>
+              </a:rPr>
+              <a:t/>
+            </a:r>
+            <a:r>
+              <a:rPr sz="1000" b="0" dirty="0" err="1">
+                <a:solidFill>
+                  <a:srgbClr val="595959"/>
+                </a:solidFill>
+                <a:latin typeface="맑은 고딕"/>
+              </a:rPr>
+              <a:t/>
+            </a:r>
+            <a:r>
+              <a:rPr sz="1000" b="0" dirty="0">
+                <a:solidFill>
+                  <a:srgbClr val="595959"/>
+                </a:solidFill>
+                <a:latin typeface="맑은 고딕"/>
+              </a:rPr>
+              <a:t/>
+            </a:r>
+            <a:r>
+              <a:rPr sz="1000" b="0" dirty="0" err="1">
+                <a:solidFill>
+                  <a:srgbClr val="595959"/>
+                </a:solidFill>
+                <a:latin typeface="맑은 고딕"/>
+              </a:rPr>
+              <a:t/>
+            </a:r>
+            <a:r>
+              <a:rPr sz="1000" b="0" dirty="0">
+                <a:solidFill>
+                  <a:srgbClr val="595959"/>
+                </a:solidFill>
+                <a:latin typeface="맑은 고딕"/>
+              </a:rPr>
+              <a:t/>
+            </a:r>
+            <a:r>
+              <a:rPr sz="1000" b="0" dirty="0" err="1">
+                <a:solidFill>
+                  <a:srgbClr val="595959"/>
+                </a:solidFill>
+                <a:latin typeface="맑은 고딕"/>
+              </a:rPr>
+              <a:t/>
+            </a:r>
+            <a:r>
+              <a:rPr sz="1000" b="0" dirty="0">
+                <a:solidFill>
+                  <a:srgbClr val="595959"/>
+                </a:solidFill>
+                <a:latin typeface="맑은 고딕"/>
+              </a:rPr>
+              <a:t/>
+            </a:r>
+            <a:r>
+              <a:rPr sz="1000" b="0" dirty="0" err="1">
+                <a:solidFill>
+                  <a:srgbClr val="595959"/>
+                </a:solidFill>
+                <a:latin typeface="맑은 고딕"/>
+              </a:rPr>
+              <a:t/>
+            </a:r>
+            <a:r>
+              <a:rPr sz="1000" b="0" dirty="0">
+                <a:solidFill>
+                  <a:srgbClr val="595959"/>
+                </a:solidFill>
+                <a:latin typeface="맑은 고딕"/>
+              </a:rPr>
+              <a:t/>
+            </a:r>
+            <a:r>
+              <a:rPr sz="1000" b="0" dirty="0" err="1">
+                <a:solidFill>
+                  <a:srgbClr val="595959"/>
+                </a:solidFill>
+                <a:latin typeface="맑은 고딕"/>
+              </a:rPr>
+              <a:t/>
+            </a:r>
+            <a:r>
+              <a:rPr sz="1000" b="0" dirty="0">
+                <a:solidFill>
+                  <a:srgbClr val="595959"/>
+                </a:solidFill>
+                <a:latin typeface="맑은 고딕"/>
+              </a:rPr>
+              <a:t/>
+            </a:r>
+            <a:r>
+              <a:rPr sz="1000" b="0" dirty="0" err="1">
+                <a:solidFill>
+                  <a:srgbClr val="595959"/>
+                </a:solidFill>
+                <a:latin typeface="맑은 고딕"/>
+              </a:rPr>
+              <a:t/>
+            </a:r>
+            <a:r>
+              <a:rPr sz="1000" b="0" dirty="0">
+                <a:solidFill>
+                  <a:srgbClr val="595959"/>
+                </a:solidFill>
+                <a:latin typeface="맑은 고딕"/>
+              </a:rPr>
+              <a:t/>
+            </a:r>
+            <a:r>
+              <a:rPr sz="1000" b="0" dirty="0" err="1">
+                <a:solidFill>
+                  <a:srgbClr val="595959"/>
+                </a:solidFill>
+                <a:latin typeface="맑은 고딕"/>
+              </a:rPr>
+              <a:t/>
+            </a:r>
+            <a:r>
+              <a:rPr sz="1000" b="0" dirty="0">
+                <a:solidFill>
+                  <a:srgbClr val="595959"/>
+                </a:solidFill>
+                <a:latin typeface="맑은 고딕"/>
+              </a:rPr>
+              <a:t/>
+            </a:r>
+            <a:r>
+              <a:rPr sz="1000" b="0" dirty="0" err="1">
+                <a:solidFill>
+                  <a:srgbClr val="595959"/>
+                </a:solidFill>
+                <a:latin typeface="맑은 고딕"/>
+              </a:rPr>
+              <a:t/>
+            </a:r>
+            <a:r>
+              <a:rPr sz="1000" b="0" dirty="0">
+                <a:solidFill>
+                  <a:srgbClr val="595959"/>
+                </a:solidFill>
+                <a:latin typeface="맑은 고딕"/>
+              </a:rPr>
+              <a:t/>
+            </a:r>
+            <a:r>
+              <a:rPr sz="1000" b="0" dirty="0" err="1">
+                <a:solidFill>
+                  <a:srgbClr val="595959"/>
+                </a:solidFill>
+                <a:latin typeface="맑은 고딕"/>
+              </a:rPr>
+              <a:t/>
+            </a:r>
+            <a:r>
+              <a:rPr sz="1000" b="0" dirty="0">
+                <a:solidFill>
+                  <a:srgbClr val="595959"/>
+                </a:solidFill>
+                <a:latin typeface="맑은 고딕"/>
+              </a:rPr>
+              <a:t/>
+            </a:r>
+            <a:r>
+              <a:rPr sz="1000" b="0" dirty="0" err="1">
+                <a:solidFill>
+                  <a:srgbClr val="595959"/>
+                </a:solidFill>
+                <a:latin typeface="맑은 고딕"/>
+              </a:rPr>
+              <a:t/>
+            </a:r>
+            <a:r>
+              <a:rPr sz="1000" b="0" dirty="0">
+                <a:solidFill>
+                  <a:srgbClr val="595959"/>
+                </a:solidFill>
+                <a:latin typeface="맑은 고딕"/>
+              </a:rPr>
+              <a:t/>
+            </a:r>
+            <a:r>
+              <a:rPr sz="1000" b="0" dirty="0" err="1">
+                <a:solidFill>
+                  <a:srgbClr val="595959"/>
+                </a:solidFill>
+                <a:latin typeface="맑은 고딕"/>
+              </a:rPr>
+              <a:t/>
+            </a:r>
+            <a:r>
+              <a:rPr sz="1000" b="0" dirty="0">
+                <a:solidFill>
+                  <a:srgbClr val="595959"/>
+                </a:solidFill>
+                <a:latin typeface="맑은 고딕"/>
+              </a:rPr>
+              <a:t/>
+            </a:r>
+            <a:r>
+              <a:rPr sz="1000" b="0" dirty="0" err="1">
+                <a:solidFill>
+                  <a:srgbClr val="595959"/>
+                </a:solidFill>
+                <a:latin typeface="맑은 고딕"/>
+              </a:rPr>
+              <a:t/>
+            </a:r>
+            <a:r>
+              <a:rPr sz="1000" b="0" dirty="0">
+                <a:solidFill>
+                  <a:srgbClr val="595959"/>
+                </a:solidFill>
+                <a:latin typeface="맑은 고딕"/>
+              </a:rPr>
+              <a:t/>
+            </a:r>
+            <a:r>
+              <a:rPr sz="1000" b="0" dirty="0" err="1">
+                <a:solidFill>
+                  <a:srgbClr val="595959"/>
+                </a:solidFill>
+                <a:latin typeface="맑은 고딕"/>
+              </a:rPr>
+              <a:t/>
+            </a:r>
+            <a:r>
+              <a:rPr sz="1000" b="0" dirty="0">
+                <a:solidFill>
+                  <a:srgbClr val="595959"/>
+                </a:solidFill>
+                <a:latin typeface="맑은 고딕"/>
+              </a:rPr>
+              <a:t/>
+            </a:r>
+            <a:r>
+              <a:rPr sz="1000" b="0" dirty="0" err="1">
+                <a:solidFill>
+                  <a:srgbClr val="595959"/>
+                </a:solidFill>
+                <a:latin typeface="맑은 고딕"/>
+              </a:rPr>
+              <a:t/>
+            </a:r>
+            <a:r>
+              <a:rPr sz="1000" b="0" dirty="0">
+                <a:solidFill>
+                  <a:srgbClr val="595959"/>
+                </a:solidFill>
+                <a:latin typeface="맑은 고딕"/>
+              </a:rPr>
+              <a:t/>
+            </a:r>
+            <a:r>
+              <a:rPr sz="1000" b="0" dirty="0" err="1">
+                <a:solidFill>
+                  <a:srgbClr val="595959"/>
+                </a:solidFill>
+                <a:latin typeface="맑은 고딕"/>
+              </a:rPr>
+              <a:t/>
+            </a:r>
+            <a:r>
+              <a:rPr sz="1000" b="0" dirty="0">
+                <a:solidFill>
+                  <a:srgbClr val="595959"/>
+                </a:solidFill>
+                <a:latin typeface="맑은 고딕"/>
+              </a:rPr>
+              <a:t/>
+            </a:r>
+            <a:r>
+              <a:rPr sz="1000" b="0" dirty="0" err="1">
+                <a:solidFill>
+                  <a:srgbClr val="595959"/>
+                </a:solidFill>
+                <a:latin typeface="맑은 고딕"/>
+              </a:rPr>
+              <a:t/>
+            </a:r>
+            <a:r>
+              <a:rPr sz="1000" b="0" dirty="0">
+                <a:solidFill>
+                  <a:srgbClr val="595959"/>
+                </a:solidFill>
+                <a:latin typeface="맑은 고딕"/>
+              </a:rPr>
+              <a:t/>
+            </a:r>
+            <a:r>
+              <a:rPr sz="1000" b="0" dirty="0" err="1">
+                <a:solidFill>
+                  <a:srgbClr val="595959"/>
+                </a:solidFill>
+                <a:latin typeface="맑은 고딕"/>
+              </a:rPr>
+              <a:t/>
+            </a:r>
+            <a:r>
+              <a:rPr sz="1000" b="0" dirty="0">
+                <a:solidFill>
+                  <a:srgbClr val="595959"/>
+                </a:solidFill>
+                <a:latin typeface="맑은 고딕"/>
+              </a:rPr>
+              <a:t/>
             </a:r>
           </a:p>
         </p:txBody>

--- a/docs/산출물_20260909/06_ECS_화면설계서.pptx
+++ b/docs/산출물_20260909/06_ECS_화면설계서.pptx
@@ -3181,7 +3181,7 @@
             <a:r>
               <a:rPr sz="2200" b="0">
                 <a:solidFill>
-                  <a:srgbClr val="CADCFC"/>
+                  <a:srgbClr val="000000"/>
                 </a:solidFill>
                 <a:latin typeface="맑은 고딕"/>
               </a:rPr>
@@ -3216,7 +3216,7 @@
             <a:r>
               <a:rPr sz="4800" b="1">
                 <a:solidFill>
-                  <a:srgbClr val="FFFFFF"/>
+                  <a:srgbClr val="C00000"/>
                 </a:solidFill>
                 <a:latin typeface="맑은 고딕"/>
               </a:rPr>
@@ -3251,11 +3251,11 @@
             <a:r>
               <a:rPr sz="1600" b="0">
                 <a:solidFill>
-                  <a:srgbClr val="CADCFC"/>
-                </a:solidFill>
-                <a:latin typeface="맑은 고딕"/>
-              </a:rPr>
-              <a:t>ECS Renewal   ·   Ver 1.1   ·   2026-09-09</a:t>
+                  <a:srgbClr val="C00000"/>
+                </a:solidFill>
+                <a:latin typeface="맑은 고딕"/>
+              </a:rPr>
+              <a:t>ECS Renewal   ·   Ver 1.2   ·   2026-09-10        (붉은 글씨 = 2026-09-04 판에서 바뀐 부분)</a:t>
             </a:r>
           </a:p>
         </p:txBody>
@@ -3311,7 +3311,7 @@
             <a:r>
               <a:rPr sz="2600" b="1">
                 <a:solidFill>
-                  <a:srgbClr val="1E2761"/>
+                  <a:srgbClr val="C00000"/>
                 </a:solidFill>
                 <a:latin typeface="맑은 고딕"/>
               </a:rPr>
@@ -3392,7 +3392,7 @@
             <a:r>
               <a:rPr sz="1300" b="1">
                 <a:solidFill>
-                  <a:srgbClr val="1E2761"/>
+                  <a:srgbClr val="C00000"/>
                 </a:solidFill>
                 <a:latin typeface="맑은 고딕"/>
               </a:rPr>
@@ -3404,7 +3404,7 @@
             <a:r>
               <a:rPr sz="1100" b="0">
                 <a:solidFill>
-                  <a:srgbClr val="595959"/>
+                  <a:srgbClr val="C00000"/>
                 </a:solidFill>
                 <a:latin typeface="맑은 고딕"/>
               </a:rPr>
@@ -3425,7 +3425,7 @@
             <a:r>
               <a:rPr sz="1300" b="1">
                 <a:solidFill>
-                  <a:srgbClr val="1E2761"/>
+                  <a:srgbClr val="C00000"/>
                 </a:solidFill>
                 <a:latin typeface="맑은 고딕"/>
               </a:rPr>
@@ -3437,7 +3437,7 @@
             <a:r>
               <a:rPr sz="1100" b="0">
                 <a:solidFill>
-                  <a:srgbClr val="595959"/>
+                  <a:srgbClr val="C00000"/>
                 </a:solidFill>
                 <a:latin typeface="맑은 고딕"/>
               </a:rPr>
@@ -3458,7 +3458,7 @@
             <a:r>
               <a:rPr sz="1300" b="1">
                 <a:solidFill>
-                  <a:srgbClr val="1E2761"/>
+                  <a:srgbClr val="C00000"/>
                 </a:solidFill>
                 <a:latin typeface="맑은 고딕"/>
               </a:rPr>
@@ -3470,7 +3470,7 @@
             <a:r>
               <a:rPr sz="1000" b="0">
                 <a:solidFill>
-                  <a:srgbClr val="595959"/>
+                  <a:srgbClr val="C00000"/>
                 </a:solidFill>
                 <a:latin typeface="맑은 고딕"/>
               </a:rPr>
@@ -3482,7 +3482,7 @@
             <a:r>
               <a:rPr sz="1000" b="0">
                 <a:solidFill>
-                  <a:srgbClr val="595959"/>
+                  <a:srgbClr val="C00000"/>
                 </a:solidFill>
                 <a:latin typeface="맑은 고딕"/>
               </a:rPr>
@@ -3494,7 +3494,7 @@
             <a:r>
               <a:rPr sz="1000" b="0">
                 <a:solidFill>
-                  <a:srgbClr val="595959"/>
+                  <a:srgbClr val="C00000"/>
                 </a:solidFill>
                 <a:latin typeface="맑은 고딕"/>
               </a:rPr>
@@ -3529,7 +3529,7 @@
             <a:r>
               <a:rPr sz="1000" b="0">
                 <a:solidFill>
-                  <a:srgbClr val="595959"/>
+                  <a:srgbClr val="000000"/>
                 </a:solidFill>
                 <a:latin typeface="맑은 고딕"/>
               </a:rPr>
@@ -3564,7 +3564,7 @@
             <a:r>
               <a:rPr sz="1000" b="0">
                 <a:solidFill>
-                  <a:srgbClr val="595959"/>
+                  <a:srgbClr val="000000"/>
                 </a:solidFill>
                 <a:latin typeface="맑은 고딕"/>
               </a:rPr>
@@ -3654,7 +3654,7 @@
             <a:r>
               <a:rPr sz="2600" b="1">
                 <a:solidFill>
-                  <a:srgbClr val="1E2761"/>
+                  <a:srgbClr val="000000"/>
                 </a:solidFill>
                 <a:latin typeface="맑은 고딕"/>
               </a:rPr>
@@ -3735,7 +3735,7 @@
             <a:r>
               <a:rPr sz="1300" b="1">
                 <a:solidFill>
-                  <a:srgbClr val="1E2761"/>
+                  <a:srgbClr val="000000"/>
                 </a:solidFill>
                 <a:latin typeface="맑은 고딕"/>
               </a:rPr>
@@ -3747,7 +3747,7 @@
             <a:r>
               <a:rPr sz="1100" b="0">
                 <a:solidFill>
-                  <a:srgbClr val="595959"/>
+                  <a:srgbClr val="000000"/>
                 </a:solidFill>
                 <a:latin typeface="맑은 고딕"/>
               </a:rPr>
@@ -3768,7 +3768,7 @@
             <a:r>
               <a:rPr sz="1300" b="1">
                 <a:solidFill>
-                  <a:srgbClr val="1E2761"/>
+                  <a:srgbClr val="000000"/>
                 </a:solidFill>
                 <a:latin typeface="맑은 고딕"/>
               </a:rPr>
@@ -3780,7 +3780,7 @@
             <a:r>
               <a:rPr sz="1100" b="0">
                 <a:solidFill>
-                  <a:srgbClr val="595959"/>
+                  <a:srgbClr val="000000"/>
                 </a:solidFill>
                 <a:latin typeface="맑은 고딕"/>
               </a:rPr>
@@ -3815,7 +3815,7 @@
             <a:r>
               <a:rPr sz="1000" b="0">
                 <a:solidFill>
-                  <a:srgbClr val="595959"/>
+                  <a:srgbClr val="000000"/>
                 </a:solidFill>
                 <a:latin typeface="맑은 고딕"/>
               </a:rPr>
@@ -3850,7 +3850,7 @@
             <a:r>
               <a:rPr sz="1000" b="0">
                 <a:solidFill>
-                  <a:srgbClr val="595959"/>
+                  <a:srgbClr val="000000"/>
                 </a:solidFill>
                 <a:latin typeface="맑은 고딕"/>
               </a:rPr>
@@ -3940,7 +3940,7 @@
             <a:r>
               <a:rPr sz="2600" b="1">
                 <a:solidFill>
-                  <a:srgbClr val="1E2761"/>
+                  <a:srgbClr val="000000"/>
                 </a:solidFill>
                 <a:latin typeface="맑은 고딕"/>
               </a:rPr>
@@ -4045,7 +4045,7 @@
             <a:r>
               <a:rPr sz="1300" b="1">
                 <a:solidFill>
-                  <a:srgbClr val="1E2761"/>
+                  <a:srgbClr val="000000"/>
                 </a:solidFill>
                 <a:latin typeface="맑은 고딕"/>
               </a:rPr>
@@ -4057,7 +4057,7 @@
             <a:r>
               <a:rPr sz="1100" b="0">
                 <a:solidFill>
-                  <a:srgbClr val="595959"/>
+                  <a:srgbClr val="C00000"/>
                 </a:solidFill>
                 <a:latin typeface="맑은 고딕"/>
               </a:rPr>
@@ -4078,7 +4078,7 @@
             <a:r>
               <a:rPr sz="1300" b="1">
                 <a:solidFill>
-                  <a:srgbClr val="1E2761"/>
+                  <a:srgbClr val="000000"/>
                 </a:solidFill>
                 <a:latin typeface="맑은 고딕"/>
               </a:rPr>
@@ -4090,7 +4090,7 @@
             <a:r>
               <a:rPr sz="1100" b="0">
                 <a:solidFill>
-                  <a:srgbClr val="595959"/>
+                  <a:srgbClr val="000000"/>
                 </a:solidFill>
                 <a:latin typeface="맑은 고딕"/>
               </a:rPr>
@@ -4111,7 +4111,7 @@
             <a:r>
               <a:rPr sz="1300" b="1">
                 <a:solidFill>
-                  <a:srgbClr val="1E2761"/>
+                  <a:srgbClr val="000000"/>
                 </a:solidFill>
                 <a:latin typeface="맑은 고딕"/>
               </a:rPr>
@@ -4123,7 +4123,7 @@
             <a:r>
               <a:rPr sz="1000" b="0">
                 <a:solidFill>
-                  <a:srgbClr val="595959"/>
+                  <a:srgbClr val="000000"/>
                 </a:solidFill>
                 <a:latin typeface="맑은 고딕"/>
               </a:rPr>
@@ -4135,7 +4135,7 @@
             <a:r>
               <a:rPr sz="1000" b="0">
                 <a:solidFill>
-                  <a:srgbClr val="595959"/>
+                  <a:srgbClr val="000000"/>
                 </a:solidFill>
                 <a:latin typeface="맑은 고딕"/>
               </a:rPr>
@@ -4170,7 +4170,7 @@
             <a:r>
               <a:rPr sz="1000" b="0">
                 <a:solidFill>
-                  <a:srgbClr val="595959"/>
+                  <a:srgbClr val="000000"/>
                 </a:solidFill>
                 <a:latin typeface="맑은 고딕"/>
               </a:rPr>
@@ -4205,7 +4205,7 @@
             <a:r>
               <a:rPr sz="1000" b="0">
                 <a:solidFill>
-                  <a:srgbClr val="595959"/>
+                  <a:srgbClr val="000000"/>
                 </a:solidFill>
                 <a:latin typeface="맑은 고딕"/>
               </a:rPr>
@@ -4265,7 +4265,7 @@
             <a:r>
               <a:rPr sz="2600" b="1">
                 <a:solidFill>
-                  <a:srgbClr val="1E2761"/>
+                  <a:srgbClr val="000000"/>
                 </a:solidFill>
                 <a:latin typeface="맑은 고딕"/>
               </a:rPr>
@@ -4370,7 +4370,7 @@
             <a:r>
               <a:rPr sz="1300" b="1">
                 <a:solidFill>
-                  <a:srgbClr val="1E2761"/>
+                  <a:srgbClr val="000000"/>
                 </a:solidFill>
                 <a:latin typeface="맑은 고딕"/>
               </a:rPr>
@@ -4382,7 +4382,7 @@
             <a:r>
               <a:rPr sz="1100" b="0">
                 <a:solidFill>
-                  <a:srgbClr val="595959"/>
+                  <a:srgbClr val="C00000"/>
                 </a:solidFill>
                 <a:latin typeface="맑은 고딕"/>
               </a:rPr>
@@ -4403,7 +4403,7 @@
             <a:r>
               <a:rPr sz="1300" b="1">
                 <a:solidFill>
-                  <a:srgbClr val="1E2761"/>
+                  <a:srgbClr val="000000"/>
                 </a:solidFill>
                 <a:latin typeface="맑은 고딕"/>
               </a:rPr>
@@ -4415,7 +4415,7 @@
             <a:r>
               <a:rPr sz="1100" b="0">
                 <a:solidFill>
-                  <a:srgbClr val="595959"/>
+                  <a:srgbClr val="000000"/>
                 </a:solidFill>
                 <a:latin typeface="맑은 고딕"/>
               </a:rPr>
@@ -4436,7 +4436,7 @@
             <a:r>
               <a:rPr sz="1300" b="1">
                 <a:solidFill>
-                  <a:srgbClr val="1E2761"/>
+                  <a:srgbClr val="000000"/>
                 </a:solidFill>
                 <a:latin typeface="맑은 고딕"/>
               </a:rPr>
@@ -4448,7 +4448,7 @@
             <a:r>
               <a:rPr sz="1000" b="0">
                 <a:solidFill>
-                  <a:srgbClr val="595959"/>
+                  <a:srgbClr val="000000"/>
                 </a:solidFill>
                 <a:latin typeface="맑은 고딕"/>
               </a:rPr>
@@ -4460,7 +4460,7 @@
             <a:r>
               <a:rPr sz="1000" b="0">
                 <a:solidFill>
-                  <a:srgbClr val="595959"/>
+                  <a:srgbClr val="000000"/>
                 </a:solidFill>
                 <a:latin typeface="맑은 고딕"/>
               </a:rPr>
@@ -4495,7 +4495,7 @@
             <a:r>
               <a:rPr sz="1000" b="0">
                 <a:solidFill>
-                  <a:srgbClr val="595959"/>
+                  <a:srgbClr val="000000"/>
                 </a:solidFill>
                 <a:latin typeface="맑은 고딕"/>
               </a:rPr>
@@ -4530,7 +4530,7 @@
             <a:r>
               <a:rPr sz="1000" b="0">
                 <a:solidFill>
-                  <a:srgbClr val="595959"/>
+                  <a:srgbClr val="000000"/>
                 </a:solidFill>
                 <a:latin typeface="맑은 고딕"/>
               </a:rPr>
@@ -4590,7 +4590,7 @@
             <a:r>
               <a:rPr sz="2600" b="1">
                 <a:solidFill>
-                  <a:srgbClr val="1E2761"/>
+                  <a:srgbClr val="000000"/>
                 </a:solidFill>
                 <a:latin typeface="맑은 고딕"/>
               </a:rPr>
@@ -4695,7 +4695,7 @@
             <a:r>
               <a:rPr sz="1300" b="1">
                 <a:solidFill>
-                  <a:srgbClr val="1E2761"/>
+                  <a:srgbClr val="000000"/>
                 </a:solidFill>
                 <a:latin typeface="맑은 고딕"/>
               </a:rPr>
@@ -4707,7 +4707,7 @@
             <a:r>
               <a:rPr sz="1100" b="0">
                 <a:solidFill>
-                  <a:srgbClr val="595959"/>
+                  <a:srgbClr val="C00000"/>
                 </a:solidFill>
                 <a:latin typeface="맑은 고딕"/>
               </a:rPr>
@@ -4728,7 +4728,7 @@
             <a:r>
               <a:rPr sz="1300" b="1">
                 <a:solidFill>
-                  <a:srgbClr val="1E2761"/>
+                  <a:srgbClr val="000000"/>
                 </a:solidFill>
                 <a:latin typeface="맑은 고딕"/>
               </a:rPr>
@@ -4740,7 +4740,7 @@
             <a:r>
               <a:rPr sz="1100" b="0">
                 <a:solidFill>
-                  <a:srgbClr val="595959"/>
+                  <a:srgbClr val="000000"/>
                 </a:solidFill>
                 <a:latin typeface="맑은 고딕"/>
               </a:rPr>
@@ -4761,7 +4761,7 @@
             <a:r>
               <a:rPr sz="1300" b="1">
                 <a:solidFill>
-                  <a:srgbClr val="1E2761"/>
+                  <a:srgbClr val="000000"/>
                 </a:solidFill>
                 <a:latin typeface="맑은 고딕"/>
               </a:rPr>
@@ -4773,7 +4773,7 @@
             <a:r>
               <a:rPr sz="1000" b="0">
                 <a:solidFill>
-                  <a:srgbClr val="595959"/>
+                  <a:srgbClr val="000000"/>
                 </a:solidFill>
                 <a:latin typeface="맑은 고딕"/>
               </a:rPr>
@@ -4785,7 +4785,7 @@
             <a:r>
               <a:rPr sz="1000" b="0">
                 <a:solidFill>
-                  <a:srgbClr val="595959"/>
+                  <a:srgbClr val="000000"/>
                 </a:solidFill>
                 <a:latin typeface="맑은 고딕"/>
               </a:rPr>
@@ -4820,7 +4820,7 @@
             <a:r>
               <a:rPr sz="1000" b="0">
                 <a:solidFill>
-                  <a:srgbClr val="595959"/>
+                  <a:srgbClr val="000000"/>
                 </a:solidFill>
                 <a:latin typeface="맑은 고딕"/>
               </a:rPr>
@@ -4855,7 +4855,7 @@
             <a:r>
               <a:rPr sz="1000" b="0">
                 <a:solidFill>
-                  <a:srgbClr val="595959"/>
+                  <a:srgbClr val="000000"/>
                 </a:solidFill>
                 <a:latin typeface="맑은 고딕"/>
               </a:rPr>
@@ -4915,7 +4915,7 @@
             <a:r>
               <a:rPr sz="2600" b="1">
                 <a:solidFill>
-                  <a:srgbClr val="1E2761"/>
+                  <a:srgbClr val="000000"/>
                 </a:solidFill>
                 <a:latin typeface="맑은 고딕"/>
               </a:rPr>
@@ -5020,7 +5020,7 @@
             <a:r>
               <a:rPr sz="1300" b="1">
                 <a:solidFill>
-                  <a:srgbClr val="1E2761"/>
+                  <a:srgbClr val="000000"/>
                 </a:solidFill>
                 <a:latin typeface="맑은 고딕"/>
               </a:rPr>
@@ -5032,7 +5032,7 @@
             <a:r>
               <a:rPr sz="1100" b="0">
                 <a:solidFill>
-                  <a:srgbClr val="595959"/>
+                  <a:srgbClr val="C00000"/>
                 </a:solidFill>
                 <a:latin typeface="맑은 고딕"/>
               </a:rPr>
@@ -5053,7 +5053,7 @@
             <a:r>
               <a:rPr sz="1300" b="1">
                 <a:solidFill>
-                  <a:srgbClr val="1E2761"/>
+                  <a:srgbClr val="000000"/>
                 </a:solidFill>
                 <a:latin typeface="맑은 고딕"/>
               </a:rPr>
@@ -5065,7 +5065,7 @@
             <a:r>
               <a:rPr sz="1100" b="0">
                 <a:solidFill>
-                  <a:srgbClr val="595959"/>
+                  <a:srgbClr val="000000"/>
                 </a:solidFill>
                 <a:latin typeface="맑은 고딕"/>
               </a:rPr>
@@ -5100,7 +5100,7 @@
             <a:r>
               <a:rPr sz="1000" b="0">
                 <a:solidFill>
-                  <a:srgbClr val="595959"/>
+                  <a:srgbClr val="000000"/>
                 </a:solidFill>
                 <a:latin typeface="맑은 고딕"/>
               </a:rPr>
@@ -5135,7 +5135,7 @@
             <a:r>
               <a:rPr sz="1000" b="0">
                 <a:solidFill>
-                  <a:srgbClr val="595959"/>
+                  <a:srgbClr val="000000"/>
                 </a:solidFill>
                 <a:latin typeface="맑은 고딕"/>
               </a:rPr>
@@ -5195,7 +5195,7 @@
             <a:r>
               <a:rPr sz="2600" b="1">
                 <a:solidFill>
-                  <a:srgbClr val="1E2761"/>
+                  <a:srgbClr val="000000"/>
                 </a:solidFill>
                 <a:latin typeface="맑은 고딕"/>
               </a:rPr>
@@ -5300,7 +5300,7 @@
             <a:r>
               <a:rPr sz="1300" b="1">
                 <a:solidFill>
-                  <a:srgbClr val="1E2761"/>
+                  <a:srgbClr val="000000"/>
                 </a:solidFill>
                 <a:latin typeface="맑은 고딕"/>
               </a:rPr>
@@ -5312,7 +5312,7 @@
             <a:r>
               <a:rPr sz="1100" b="0">
                 <a:solidFill>
-                  <a:srgbClr val="595959"/>
+                  <a:srgbClr val="C00000"/>
                 </a:solidFill>
                 <a:latin typeface="맑은 고딕"/>
               </a:rPr>
@@ -5333,7 +5333,7 @@
             <a:r>
               <a:rPr sz="1300" b="1">
                 <a:solidFill>
-                  <a:srgbClr val="1E2761"/>
+                  <a:srgbClr val="000000"/>
                 </a:solidFill>
                 <a:latin typeface="맑은 고딕"/>
               </a:rPr>
@@ -5345,7 +5345,7 @@
             <a:r>
               <a:rPr sz="1100" b="0">
                 <a:solidFill>
-                  <a:srgbClr val="595959"/>
+                  <a:srgbClr val="000000"/>
                 </a:solidFill>
                 <a:latin typeface="맑은 고딕"/>
               </a:rPr>
@@ -5366,7 +5366,7 @@
             <a:r>
               <a:rPr sz="1300" b="1">
                 <a:solidFill>
-                  <a:srgbClr val="1E2761"/>
+                  <a:srgbClr val="000000"/>
                 </a:solidFill>
                 <a:latin typeface="맑은 고딕"/>
               </a:rPr>
@@ -5378,7 +5378,7 @@
             <a:r>
               <a:rPr sz="1000" b="0">
                 <a:solidFill>
-                  <a:srgbClr val="595959"/>
+                  <a:srgbClr val="000000"/>
                 </a:solidFill>
                 <a:latin typeface="맑은 고딕"/>
               </a:rPr>
@@ -5413,7 +5413,7 @@
             <a:r>
               <a:rPr sz="1000" b="0">
                 <a:solidFill>
-                  <a:srgbClr val="595959"/>
+                  <a:srgbClr val="000000"/>
                 </a:solidFill>
                 <a:latin typeface="맑은 고딕"/>
               </a:rPr>
@@ -5448,7 +5448,7 @@
             <a:r>
               <a:rPr sz="1000" b="0">
                 <a:solidFill>
-                  <a:srgbClr val="595959"/>
+                  <a:srgbClr val="000000"/>
                 </a:solidFill>
                 <a:latin typeface="맑은 고딕"/>
               </a:rPr>
@@ -5508,7 +5508,7 @@
             <a:r>
               <a:rPr sz="2600" b="1">
                 <a:solidFill>
-                  <a:srgbClr val="1E2761"/>
+                  <a:srgbClr val="000000"/>
                 </a:solidFill>
                 <a:latin typeface="맑은 고딕"/>
               </a:rPr>
@@ -5613,7 +5613,7 @@
             <a:r>
               <a:rPr sz="1300" b="1">
                 <a:solidFill>
-                  <a:srgbClr val="1E2761"/>
+                  <a:srgbClr val="000000"/>
                 </a:solidFill>
                 <a:latin typeface="맑은 고딕"/>
               </a:rPr>
@@ -5625,7 +5625,7 @@
             <a:r>
               <a:rPr sz="1100" b="0">
                 <a:solidFill>
-                  <a:srgbClr val="595959"/>
+                  <a:srgbClr val="C00000"/>
                 </a:solidFill>
                 <a:latin typeface="맑은 고딕"/>
               </a:rPr>
@@ -5646,7 +5646,7 @@
             <a:r>
               <a:rPr sz="1300" b="1">
                 <a:solidFill>
-                  <a:srgbClr val="1E2761"/>
+                  <a:srgbClr val="000000"/>
                 </a:solidFill>
                 <a:latin typeface="맑은 고딕"/>
               </a:rPr>
@@ -5658,7 +5658,7 @@
             <a:r>
               <a:rPr sz="1100" b="0">
                 <a:solidFill>
-                  <a:srgbClr val="595959"/>
+                  <a:srgbClr val="000000"/>
                 </a:solidFill>
                 <a:latin typeface="맑은 고딕"/>
               </a:rPr>
@@ -5693,7 +5693,7 @@
             <a:r>
               <a:rPr sz="1000" b="0">
                 <a:solidFill>
-                  <a:srgbClr val="595959"/>
+                  <a:srgbClr val="000000"/>
                 </a:solidFill>
                 <a:latin typeface="맑은 고딕"/>
               </a:rPr>
@@ -5728,7 +5728,7 @@
             <a:r>
               <a:rPr sz="1000" b="0">
                 <a:solidFill>
-                  <a:srgbClr val="595959"/>
+                  <a:srgbClr val="000000"/>
                 </a:solidFill>
                 <a:latin typeface="맑은 고딕"/>
               </a:rPr>
@@ -5788,7 +5788,7 @@
             <a:r>
               <a:rPr sz="2600" b="1">
                 <a:solidFill>
-                  <a:srgbClr val="1E2761"/>
+                  <a:srgbClr val="000000"/>
                 </a:solidFill>
                 <a:latin typeface="맑은 고딕"/>
               </a:rPr>
@@ -5893,7 +5893,7 @@
             <a:r>
               <a:rPr sz="1300" b="1">
                 <a:solidFill>
-                  <a:srgbClr val="1E2761"/>
+                  <a:srgbClr val="000000"/>
                 </a:solidFill>
                 <a:latin typeface="맑은 고딕"/>
               </a:rPr>
@@ -5905,7 +5905,7 @@
             <a:r>
               <a:rPr sz="1100" b="0">
                 <a:solidFill>
-                  <a:srgbClr val="595959"/>
+                  <a:srgbClr val="C00000"/>
                 </a:solidFill>
                 <a:latin typeface="맑은 고딕"/>
               </a:rPr>
@@ -5926,7 +5926,7 @@
             <a:r>
               <a:rPr sz="1300" b="1">
                 <a:solidFill>
-                  <a:srgbClr val="1E2761"/>
+                  <a:srgbClr val="000000"/>
                 </a:solidFill>
                 <a:latin typeface="맑은 고딕"/>
               </a:rPr>
@@ -5938,7 +5938,7 @@
             <a:r>
               <a:rPr sz="1100" b="0">
                 <a:solidFill>
-                  <a:srgbClr val="595959"/>
+                  <a:srgbClr val="000000"/>
                 </a:solidFill>
                 <a:latin typeface="맑은 고딕"/>
               </a:rPr>
@@ -5973,7 +5973,7 @@
             <a:r>
               <a:rPr sz="1000" b="0">
                 <a:solidFill>
-                  <a:srgbClr val="595959"/>
+                  <a:srgbClr val="000000"/>
                 </a:solidFill>
                 <a:latin typeface="맑은 고딕"/>
               </a:rPr>
@@ -6008,7 +6008,7 @@
             <a:r>
               <a:rPr sz="1000" b="0">
                 <a:solidFill>
-                  <a:srgbClr val="595959"/>
+                  <a:srgbClr val="000000"/>
                 </a:solidFill>
                 <a:latin typeface="맑은 고딕"/>
               </a:rPr>
@@ -6068,7 +6068,7 @@
             <a:r>
               <a:rPr sz="2600" b="1">
                 <a:solidFill>
-                  <a:srgbClr val="1E2761"/>
+                  <a:srgbClr val="000000"/>
                 </a:solidFill>
                 <a:latin typeface="맑은 고딕"/>
               </a:rPr>
@@ -6173,7 +6173,7 @@
             <a:r>
               <a:rPr sz="1300" b="1">
                 <a:solidFill>
-                  <a:srgbClr val="1E2761"/>
+                  <a:srgbClr val="000000"/>
                 </a:solidFill>
                 <a:latin typeface="맑은 고딕"/>
               </a:rPr>
@@ -6185,7 +6185,7 @@
             <a:r>
               <a:rPr sz="1100" b="0">
                 <a:solidFill>
-                  <a:srgbClr val="595959"/>
+                  <a:srgbClr val="C00000"/>
                 </a:solidFill>
                 <a:latin typeface="맑은 고딕"/>
               </a:rPr>
@@ -6206,7 +6206,7 @@
             <a:r>
               <a:rPr sz="1300" b="1">
                 <a:solidFill>
-                  <a:srgbClr val="1E2761"/>
+                  <a:srgbClr val="000000"/>
                 </a:solidFill>
                 <a:latin typeface="맑은 고딕"/>
               </a:rPr>
@@ -6218,7 +6218,7 @@
             <a:r>
               <a:rPr sz="1100" b="0">
                 <a:solidFill>
-                  <a:srgbClr val="595959"/>
+                  <a:srgbClr val="000000"/>
                 </a:solidFill>
                 <a:latin typeface="맑은 고딕"/>
               </a:rPr>
@@ -6239,7 +6239,7 @@
             <a:r>
               <a:rPr sz="1300" b="1">
                 <a:solidFill>
-                  <a:srgbClr val="1E2761"/>
+                  <a:srgbClr val="000000"/>
                 </a:solidFill>
                 <a:latin typeface="맑은 고딕"/>
               </a:rPr>
@@ -6251,7 +6251,7 @@
             <a:r>
               <a:rPr sz="1000" b="0">
                 <a:solidFill>
-                  <a:srgbClr val="595959"/>
+                  <a:srgbClr val="000000"/>
                 </a:solidFill>
                 <a:latin typeface="맑은 고딕"/>
               </a:rPr>
@@ -6286,7 +6286,7 @@
             <a:r>
               <a:rPr sz="1000" b="0">
                 <a:solidFill>
-                  <a:srgbClr val="595959"/>
+                  <a:srgbClr val="000000"/>
                 </a:solidFill>
                 <a:latin typeface="맑은 고딕"/>
               </a:rPr>
@@ -6321,7 +6321,7 @@
             <a:r>
               <a:rPr sz="1000" b="0">
                 <a:solidFill>
-                  <a:srgbClr val="595959"/>
+                  <a:srgbClr val="000000"/>
                 </a:solidFill>
                 <a:latin typeface="맑은 고딕"/>
               </a:rPr>
@@ -6905,7 +6905,7 @@
             <a:r>
               <a:rPr sz="2600" b="1">
                 <a:solidFill>
-                  <a:srgbClr val="1E2761"/>
+                  <a:srgbClr val="000000"/>
                 </a:solidFill>
                 <a:latin typeface="맑은 고딕"/>
               </a:rPr>
@@ -6960,1884 +6960,1884 @@
           </a:p>
         </p:txBody>
       </p:sp>
+      <p:sp>
+        <p:nvSpPr>
+          <p:cNvPr id="5" name="TextBox 4"/>
+          <p:cNvSpPr txBox="1"/>
+          <p:nvPr/>
+        </p:nvSpPr>
+        <p:spPr>
+          <a:xfrm>
+            <a:off x="8503920" y="1188720"/>
+            <a:ext cx="3291840" cy="2785378"/>
+          </a:xfrm>
+          <a:prstGeom prst="rect">
+            <a:avLst/>
+          </a:prstGeom>
+          <a:noFill/>
+        </p:spPr>
+        <p:txBody>
+          <a:bodyPr wrap="square" lIns="45720" rIns="45720" anchor="t">
+            <a:spAutoFit/>
+          </a:bodyPr>
+          <a:lstStyle/>
+          <a:p>
+            <a:pPr algn="l"/>
+            <a:r>
+              <a:rPr sz="1300" b="1" dirty="0">
+                <a:solidFill>
+                  <a:srgbClr val="000000"/>
+                </a:solidFill>
+                <a:latin typeface="맑은 고딕"/>
+              </a:rPr>
+              <a:t>■ </a:t>
+            </a:r>
+            <a:r>
+              <a:rPr sz="1300" b="1" dirty="0" err="1">
+                <a:solidFill>
+                  <a:srgbClr val="000000"/>
+                </a:solidFill>
+                <a:latin typeface="맑은 고딕"/>
+              </a:rPr>
+              <a:t>메뉴</a:t>
+            </a:r>
+            <a:r>
+              <a:rPr sz="1300" b="1" dirty="0">
+                <a:solidFill>
+                  <a:srgbClr val="000000"/>
+                </a:solidFill>
+                <a:latin typeface="맑은 고딕"/>
+              </a:rPr>
+              <a:t> Path</a:t>
+            </a:r>
+          </a:p>
+          <a:p>
+            <a:pPr algn="l"/>
+            <a:r>
+              <a:rPr sz="1100" b="0" dirty="0" err="1">
+                <a:solidFill>
+                  <a:srgbClr val="000000"/>
+                </a:solidFill>
+                <a:latin typeface="맑은 고딕"/>
+              </a:rPr>
+              <a:t>메인</a:t>
+            </a:r>
+            <a:r>
+              <a:rPr sz="1100" b="0" dirty="0">
+                <a:solidFill>
+                  <a:srgbClr val="000000"/>
+                </a:solidFill>
+                <a:latin typeface="맑은 고딕"/>
+              </a:rPr>
+              <a:t> </a:t>
+            </a:r>
+            <a:r>
+              <a:rPr sz="1100" b="0" dirty="0" err="1">
+                <a:solidFill>
+                  <a:srgbClr val="000000"/>
+                </a:solidFill>
+                <a:latin typeface="맑은 고딕"/>
+              </a:rPr>
+              <a:t>화면에서</a:t>
+            </a:r>
+            <a:r>
+              <a:rPr sz="1100" b="0" dirty="0">
+                <a:solidFill>
+                  <a:srgbClr val="000000"/>
+                </a:solidFill>
+                <a:latin typeface="맑은 고딕"/>
+              </a:rPr>
+              <a:t> </a:t>
+            </a:r>
+            <a:r>
+              <a:rPr sz="1100" b="0" dirty="0" err="1">
+                <a:solidFill>
+                  <a:srgbClr val="000000"/>
+                </a:solidFill>
+                <a:latin typeface="맑은 고딕"/>
+              </a:rPr>
+              <a:t>컨베이어</a:t>
+            </a:r>
+            <a:r>
+              <a:rPr sz="1100" b="0" dirty="0">
+                <a:solidFill>
+                  <a:srgbClr val="000000"/>
+                </a:solidFill>
+                <a:latin typeface="맑은 고딕"/>
+              </a:rPr>
+              <a:t> </a:t>
+            </a:r>
+            <a:r>
+              <a:rPr sz="1100" b="0" dirty="0" err="1">
+                <a:solidFill>
+                  <a:srgbClr val="000000"/>
+                </a:solidFill>
+                <a:latin typeface="맑은 고딕"/>
+              </a:rPr>
+              <a:t>클릭</a:t>
+            </a:r>
+            <a:endParaRPr sz="1100" b="0" dirty="0">
+              <a:solidFill>
+                <a:srgbClr val="595959"/>
+              </a:solidFill>
+              <a:latin typeface="맑은 고딕"/>
+            </a:endParaRPr>
+          </a:p>
+          <a:p>
+            <a:pPr algn="l"/>
+            <a:endParaRPr sz="1100" b="0" dirty="0">
+              <a:solidFill>
+                <a:srgbClr val="595959"/>
+              </a:solidFill>
+              <a:latin typeface="맑은 고딕"/>
+            </a:endParaRPr>
+          </a:p>
+          <a:p>
+            <a:pPr algn="l"/>
+            <a:r>
+              <a:rPr sz="1300" b="1" dirty="0">
+                <a:solidFill>
+                  <a:srgbClr val="000000"/>
+                </a:solidFill>
+                <a:latin typeface="맑은 고딕"/>
+              </a:rPr>
+              <a:t>■ </a:t>
+            </a:r>
+            <a:r>
+              <a:rPr sz="1300" b="1" dirty="0" err="1">
+                <a:solidFill>
+                  <a:srgbClr val="000000"/>
+                </a:solidFill>
+                <a:latin typeface="맑은 고딕"/>
+              </a:rPr>
+              <a:t>프로그램</a:t>
+            </a:r>
+            <a:r>
+              <a:rPr sz="1300" b="1" dirty="0">
+                <a:solidFill>
+                  <a:srgbClr val="000000"/>
+                </a:solidFill>
+                <a:latin typeface="맑은 고딕"/>
+              </a:rPr>
+              <a:t> </a:t>
+            </a:r>
+            <a:r>
+              <a:rPr sz="1300" b="1" dirty="0" err="1">
+                <a:solidFill>
+                  <a:srgbClr val="000000"/>
+                </a:solidFill>
+                <a:latin typeface="맑은 고딕"/>
+              </a:rPr>
+              <a:t>개요</a:t>
+            </a:r>
+            <a:endParaRPr sz="1300" b="1" dirty="0">
+              <a:solidFill>
+                <a:srgbClr val="1E2761"/>
+              </a:solidFill>
+              <a:latin typeface="맑은 고딕"/>
+            </a:endParaRPr>
+          </a:p>
+          <a:p>
+            <a:pPr algn="l"/>
+            <a:r>
+              <a:rPr sz="1100" b="0" dirty="0" err="1">
+                <a:solidFill>
+                  <a:srgbClr val="000000"/>
+                </a:solidFill>
+                <a:latin typeface="맑은 고딕"/>
+              </a:rPr>
+              <a:t>컨베이어</a:t>
+            </a:r>
+            <a:r>
+              <a:rPr sz="1100" b="0" dirty="0">
+                <a:solidFill>
+                  <a:srgbClr val="000000"/>
+                </a:solidFill>
+                <a:latin typeface="맑은 고딕"/>
+              </a:rPr>
+              <a:t>(</a:t>
+            </a:r>
+            <a:r>
+              <a:rPr sz="1100" b="0" dirty="0" err="1">
+                <a:solidFill>
+                  <a:srgbClr val="000000"/>
+                </a:solidFill>
+                <a:latin typeface="맑은 고딕"/>
+              </a:rPr>
+              <a:t>트랙</a:t>
+            </a:r>
+            <a:r>
+              <a:rPr sz="1100" b="0" dirty="0">
+                <a:solidFill>
+                  <a:srgbClr val="000000"/>
+                </a:solidFill>
+                <a:latin typeface="맑은 고딕"/>
+              </a:rPr>
+              <a:t> 2개)의 PLC </a:t>
+            </a:r>
+            <a:r>
+              <a:rPr sz="1100" b="0" dirty="0" err="1">
+                <a:solidFill>
+                  <a:srgbClr val="000000"/>
+                </a:solidFill>
+                <a:latin typeface="맑은 고딕"/>
+              </a:rPr>
+              <a:t>신호와</a:t>
+            </a:r>
+            <a:r>
+              <a:rPr sz="1100" b="0" dirty="0">
+                <a:solidFill>
+                  <a:srgbClr val="000000"/>
+                </a:solidFill>
+                <a:latin typeface="맑은 고딕"/>
+              </a:rPr>
+              <a:t> </a:t>
+            </a:r>
+            <a:r>
+              <a:rPr sz="1100" b="0" dirty="0" err="1">
+                <a:solidFill>
+                  <a:srgbClr val="000000"/>
+                </a:solidFill>
+                <a:latin typeface="맑은 고딕"/>
+              </a:rPr>
+              <a:t>작업</a:t>
+            </a:r>
+            <a:r>
+              <a:rPr sz="1100" b="0" dirty="0">
+                <a:solidFill>
+                  <a:srgbClr val="000000"/>
+                </a:solidFill>
+                <a:latin typeface="맑은 고딕"/>
+              </a:rPr>
+              <a:t> </a:t>
+            </a:r>
+            <a:r>
+              <a:rPr sz="1100" b="0" dirty="0" err="1">
+                <a:solidFill>
+                  <a:srgbClr val="000000"/>
+                </a:solidFill>
+                <a:latin typeface="맑은 고딕"/>
+              </a:rPr>
+              <a:t>정보를</a:t>
+            </a:r>
+            <a:r>
+              <a:rPr sz="1100" b="0" dirty="0">
+                <a:solidFill>
+                  <a:srgbClr val="000000"/>
+                </a:solidFill>
+                <a:latin typeface="맑은 고딕"/>
+              </a:rPr>
+              <a:t> </a:t>
+            </a:r>
+            <a:r>
+              <a:rPr sz="1100" b="0" dirty="0" err="1">
+                <a:solidFill>
+                  <a:srgbClr val="000000"/>
+                </a:solidFill>
+                <a:latin typeface="맑은 고딕"/>
+              </a:rPr>
+              <a:t>보고</a:t>
+            </a:r>
+            <a:r>
+              <a:rPr sz="1100" b="0" dirty="0">
+                <a:solidFill>
+                  <a:srgbClr val="000000"/>
+                </a:solidFill>
+                <a:latin typeface="맑은 고딕"/>
+              </a:rPr>
+              <a:t>, </a:t>
+            </a:r>
+            <a:r>
+              <a:rPr sz="1100" b="0" dirty="0" err="1">
+                <a:solidFill>
+                  <a:srgbClr val="000000"/>
+                </a:solidFill>
+                <a:latin typeface="맑은 고딕"/>
+              </a:rPr>
+              <a:t>작업번호</a:t>
+            </a:r>
+            <a:r>
+              <a:rPr sz="1100" b="0" dirty="0">
+                <a:solidFill>
+                  <a:srgbClr val="000000"/>
+                </a:solidFill>
+                <a:latin typeface="맑은 고딕"/>
+              </a:rPr>
+              <a:t> </a:t>
+            </a:r>
+            <a:r>
+              <a:rPr sz="1100" b="0" dirty="0" err="1">
+                <a:solidFill>
+                  <a:srgbClr val="000000"/>
+                </a:solidFill>
+                <a:latin typeface="맑은 고딕"/>
+              </a:rPr>
+              <a:t>쓰기</a:t>
+            </a:r>
+            <a:r>
+              <a:rPr sz="1100" b="0" dirty="0">
+                <a:solidFill>
+                  <a:srgbClr val="000000"/>
+                </a:solidFill>
+                <a:latin typeface="맑은 고딕"/>
+              </a:rPr>
+              <a:t>/</a:t>
+            </a:r>
+            <a:r>
+              <a:rPr sz="1100" b="0" dirty="0" err="1">
+                <a:solidFill>
+                  <a:srgbClr val="000000"/>
+                </a:solidFill>
+                <a:latin typeface="맑은 고딕"/>
+              </a:rPr>
+              <a:t>삭제</a:t>
+            </a:r>
+            <a:r>
+              <a:rPr sz="1100" b="0" dirty="0">
+                <a:solidFill>
+                  <a:srgbClr val="000000"/>
+                </a:solidFill>
+                <a:latin typeface="맑은 고딕"/>
+              </a:rPr>
+              <a:t>/</a:t>
+            </a:r>
+            <a:r>
+              <a:rPr sz="1100" b="0" dirty="0" err="1">
+                <a:solidFill>
+                  <a:srgbClr val="000000"/>
+                </a:solidFill>
+                <a:latin typeface="맑은 고딕"/>
+              </a:rPr>
+              <a:t>복사</a:t>
+            </a:r>
+            <a:r>
+              <a:rPr sz="1100" b="0" dirty="0">
+                <a:solidFill>
+                  <a:srgbClr val="000000"/>
+                </a:solidFill>
+                <a:latin typeface="맑은 고딕"/>
+              </a:rPr>
+              <a:t>/</a:t>
+            </a:r>
+            <a:r>
+              <a:rPr sz="1100" b="0" dirty="0" err="1">
+                <a:solidFill>
+                  <a:srgbClr val="000000"/>
+                </a:solidFill>
+                <a:latin typeface="맑은 고딕"/>
+              </a:rPr>
+              <a:t>잘라내기</a:t>
+            </a:r>
+            <a:r>
+              <a:rPr sz="1100" b="0" dirty="0">
+                <a:solidFill>
+                  <a:srgbClr val="000000"/>
+                </a:solidFill>
+                <a:latin typeface="맑은 고딕"/>
+              </a:rPr>
+              <a:t>/</a:t>
+            </a:r>
+            <a:r>
+              <a:rPr sz="1100" b="0" dirty="0" err="1">
+                <a:solidFill>
+                  <a:srgbClr val="000000"/>
+                </a:solidFill>
+                <a:latin typeface="맑은 고딕"/>
+              </a:rPr>
+              <a:t>붙여넣기</a:t>
+            </a:r>
+            <a:r>
+              <a:rPr sz="1100" b="0" dirty="0">
+                <a:solidFill>
+                  <a:srgbClr val="000000"/>
+                </a:solidFill>
+                <a:latin typeface="맑은 고딕"/>
+              </a:rPr>
+              <a:t>/MZ </a:t>
+            </a:r>
+            <a:r>
+              <a:rPr sz="1100" b="0" dirty="0" err="1">
+                <a:solidFill>
+                  <a:srgbClr val="000000"/>
+                </a:solidFill>
+                <a:latin typeface="맑은 고딕"/>
+              </a:rPr>
+              <a:t>이동</a:t>
+            </a:r>
+            <a:r>
+              <a:rPr sz="1100" b="0" dirty="0">
+                <a:solidFill>
+                  <a:srgbClr val="000000"/>
+                </a:solidFill>
+                <a:latin typeface="맑은 고딕"/>
+              </a:rPr>
+              <a:t> </a:t>
+            </a:r>
+            <a:r>
+              <a:rPr sz="1100" b="0" dirty="0" err="1">
+                <a:solidFill>
+                  <a:srgbClr val="000000"/>
+                </a:solidFill>
+                <a:latin typeface="맑은 고딕"/>
+              </a:rPr>
+              <a:t>등을</a:t>
+            </a:r>
+            <a:r>
+              <a:rPr sz="1100" b="0" dirty="0">
+                <a:solidFill>
+                  <a:srgbClr val="000000"/>
+                </a:solidFill>
+                <a:latin typeface="맑은 고딕"/>
+              </a:rPr>
+              <a:t> </a:t>
+            </a:r>
+            <a:r>
+              <a:rPr sz="1100" b="0" dirty="0" err="1">
+                <a:solidFill>
+                  <a:srgbClr val="000000"/>
+                </a:solidFill>
+                <a:latin typeface="맑은 고딕"/>
+              </a:rPr>
+              <a:t>수행한다</a:t>
+            </a:r>
+            <a:r>
+              <a:rPr sz="1100" b="0" dirty="0">
+                <a:solidFill>
+                  <a:srgbClr val="000000"/>
+                </a:solidFill>
+                <a:latin typeface="맑은 고딕"/>
+              </a:rPr>
+              <a:t>.</a:t>
+            </a:r>
+          </a:p>
+          <a:p>
+            <a:pPr algn="l"/>
+            <a:endParaRPr sz="1100" b="0" dirty="0">
+              <a:solidFill>
+                <a:srgbClr val="595959"/>
+              </a:solidFill>
+              <a:latin typeface="맑은 고딕"/>
+            </a:endParaRPr>
+          </a:p>
+          <a:p>
+            <a:pPr algn="l"/>
+            <a:r>
+              <a:rPr sz="1300" b="1" dirty="0">
+                <a:solidFill>
+                  <a:srgbClr val="000000"/>
+                </a:solidFill>
+                <a:latin typeface="맑은 고딕"/>
+              </a:rPr>
+              <a:t>■ </a:t>
+            </a:r>
+            <a:r>
+              <a:rPr sz="1300" b="1" dirty="0" err="1">
+                <a:solidFill>
+                  <a:srgbClr val="000000"/>
+                </a:solidFill>
+                <a:latin typeface="맑은 고딕"/>
+              </a:rPr>
+              <a:t>특기사항</a:t>
+            </a:r>
+            <a:endParaRPr sz="1300" b="1" dirty="0">
+              <a:solidFill>
+                <a:srgbClr val="1E2761"/>
+              </a:solidFill>
+              <a:latin typeface="맑은 고딕"/>
+            </a:endParaRPr>
+          </a:p>
+          <a:p>
+            <a:pPr algn="l"/>
+            <a:r>
+              <a:rPr sz="1000" b="0" dirty="0">
+                <a:solidFill>
+                  <a:srgbClr val="C00000"/>
+                </a:solidFill>
+                <a:latin typeface="맑은 고딕"/>
+              </a:rPr>
+              <a:t>· [쓰기] 는 그 트랙의 작업번호를 새로 넣는다. 실물 화물이 있는데 시스템이 모르는 경우 작업번호를 인식시킬 때 쓴다.</a:t>
+            </a:r>
+            <a:r>
+              <a:rPr lang="ko-KR" altLang="en-US" sz="1000" b="0" dirty="0">
+                <a:solidFill>
+                  <a:srgbClr val="C00000"/>
+                </a:solidFill>
+                <a:latin typeface="맑은 고딕"/>
+              </a:rPr>
+              <a:t/>
+            </a:r>
+            <a:r>
+              <a:rPr sz="1000" b="0" dirty="0">
+                <a:solidFill>
+                  <a:srgbClr val="C00000"/>
+                </a:solidFill>
+                <a:latin typeface="맑은 고딕"/>
+              </a:rPr>
+              <a:t/>
+            </a:r>
+            <a:r>
+              <a:rPr sz="1000" b="0" dirty="0" err="1">
+                <a:solidFill>
+                  <a:srgbClr val="C00000"/>
+                </a:solidFill>
+                <a:latin typeface="맑은 고딕"/>
+              </a:rPr>
+              <a:t/>
+            </a:r>
+            <a:r>
+              <a:rPr sz="1000" b="0" dirty="0">
+                <a:solidFill>
+                  <a:srgbClr val="C00000"/>
+                </a:solidFill>
+                <a:latin typeface="맑은 고딕"/>
+              </a:rPr>
+              <a:t/>
+            </a:r>
+            <a:r>
+              <a:rPr sz="1000" b="0" dirty="0" err="1">
+                <a:solidFill>
+                  <a:srgbClr val="C00000"/>
+                </a:solidFill>
+                <a:latin typeface="맑은 고딕"/>
+              </a:rPr>
+              <a:t/>
+            </a:r>
+            <a:r>
+              <a:rPr sz="1000" b="0" dirty="0">
+                <a:solidFill>
+                  <a:srgbClr val="C00000"/>
+                </a:solidFill>
+                <a:latin typeface="맑은 고딕"/>
+              </a:rPr>
+              <a:t/>
+            </a:r>
+            <a:r>
+              <a:rPr sz="1000" b="0" dirty="0" err="1">
+                <a:solidFill>
+                  <a:srgbClr val="C00000"/>
+                </a:solidFill>
+                <a:latin typeface="맑은 고딕"/>
+              </a:rPr>
+              <a:t/>
+            </a:r>
+            <a:r>
+              <a:rPr sz="1000" b="0" dirty="0">
+                <a:solidFill>
+                  <a:srgbClr val="C00000"/>
+                </a:solidFill>
+                <a:latin typeface="맑은 고딕"/>
+              </a:rPr>
+              <a:t/>
+            </a:r>
+            <a:r>
+              <a:rPr sz="1000" b="0" dirty="0" err="1">
+                <a:solidFill>
+                  <a:srgbClr val="C00000"/>
+                </a:solidFill>
+                <a:latin typeface="맑은 고딕"/>
+              </a:rPr>
+              <a:t/>
+            </a:r>
+            <a:r>
+              <a:rPr sz="1000" b="0" dirty="0">
+                <a:solidFill>
+                  <a:srgbClr val="C00000"/>
+                </a:solidFill>
+                <a:latin typeface="맑은 고딕"/>
+              </a:rPr>
+              <a:t/>
+            </a:r>
+            <a:r>
+              <a:rPr sz="1000" b="0" dirty="0" err="1">
+                <a:solidFill>
+                  <a:srgbClr val="C00000"/>
+                </a:solidFill>
+                <a:latin typeface="맑은 고딕"/>
+              </a:rPr>
+              <a:t/>
+            </a:r>
+            <a:r>
+              <a:rPr sz="1000" b="0" dirty="0">
+                <a:solidFill>
+                  <a:srgbClr val="C00000"/>
+                </a:solidFill>
+                <a:latin typeface="맑은 고딕"/>
+              </a:rPr>
+              <a:t/>
+            </a:r>
+            <a:r>
+              <a:rPr sz="1000" b="0" dirty="0" err="1">
+                <a:solidFill>
+                  <a:srgbClr val="C00000"/>
+                </a:solidFill>
+                <a:latin typeface="맑은 고딕"/>
+              </a:rPr>
+              <a:t/>
+            </a:r>
+            <a:r>
+              <a:rPr sz="1000" b="0" dirty="0">
+                <a:solidFill>
+                  <a:srgbClr val="C00000"/>
+                </a:solidFill>
+                <a:latin typeface="맑은 고딕"/>
+              </a:rPr>
+              <a:t/>
+            </a:r>
+            <a:r>
+              <a:rPr sz="1000" b="0" dirty="0" err="1">
+                <a:solidFill>
+                  <a:srgbClr val="C00000"/>
+                </a:solidFill>
+                <a:latin typeface="맑은 고딕"/>
+              </a:rPr>
+              <a:t/>
+            </a:r>
+            <a:r>
+              <a:rPr sz="1000" b="0" dirty="0">
+                <a:solidFill>
+                  <a:srgbClr val="C00000"/>
+                </a:solidFill>
+                <a:latin typeface="맑은 고딕"/>
+              </a:rPr>
+              <a:t/>
+            </a:r>
+            <a:r>
+              <a:rPr sz="1000" b="0" dirty="0" err="1">
+                <a:solidFill>
+                  <a:srgbClr val="C00000"/>
+                </a:solidFill>
+                <a:latin typeface="맑은 고딕"/>
+              </a:rPr>
+              <a:t/>
+            </a:r>
+            <a:r>
+              <a:rPr sz="1000" b="0" dirty="0">
+                <a:solidFill>
+                  <a:srgbClr val="C00000"/>
+                </a:solidFill>
+                <a:latin typeface="맑은 고딕"/>
+              </a:rPr>
+              <a:t/>
+            </a:r>
+            <a:r>
+              <a:rPr sz="1000" b="0" dirty="0" err="1">
+                <a:solidFill>
+                  <a:srgbClr val="C00000"/>
+                </a:solidFill>
+                <a:latin typeface="맑은 고딕"/>
+              </a:rPr>
+              <a:t/>
+            </a:r>
+            <a:r>
+              <a:rPr sz="1000" b="0" dirty="0">
+                <a:solidFill>
+                  <a:srgbClr val="C00000"/>
+                </a:solidFill>
+                <a:latin typeface="맑은 고딕"/>
+              </a:rPr>
+              <a:t/>
+            </a:r>
+            <a:r>
+              <a:rPr sz="1000" b="0" dirty="0" err="1">
+                <a:solidFill>
+                  <a:srgbClr val="C00000"/>
+                </a:solidFill>
+                <a:latin typeface="맑은 고딕"/>
+              </a:rPr>
+              <a:t/>
+            </a:r>
+            <a:r>
+              <a:rPr sz="1000" b="0" dirty="0">
+                <a:solidFill>
+                  <a:srgbClr val="C00000"/>
+                </a:solidFill>
+                <a:latin typeface="맑은 고딕"/>
+              </a:rPr>
+              <a:t/>
+            </a:r>
+            <a:r>
+              <a:rPr sz="1000" b="0" dirty="0" err="1">
+                <a:solidFill>
+                  <a:srgbClr val="C00000"/>
+                </a:solidFill>
+                <a:latin typeface="맑은 고딕"/>
+              </a:rPr>
+              <a:t/>
+            </a:r>
+            <a:r>
+              <a:rPr sz="1000" b="0" dirty="0">
+                <a:solidFill>
+                  <a:srgbClr val="C00000"/>
+                </a:solidFill>
+                <a:latin typeface="맑은 고딕"/>
+              </a:rPr>
+              <a:t/>
+            </a:r>
+            <a:r>
+              <a:rPr sz="1000" b="0" dirty="0" err="1">
+                <a:solidFill>
+                  <a:srgbClr val="C00000"/>
+                </a:solidFill>
+                <a:latin typeface="맑은 고딕"/>
+              </a:rPr>
+              <a:t/>
+            </a:r>
+            <a:r>
+              <a:rPr sz="1000" b="0" dirty="0">
+                <a:solidFill>
+                  <a:srgbClr val="C00000"/>
+                </a:solidFill>
+                <a:latin typeface="맑은 고딕"/>
+              </a:rPr>
+              <a:t/>
+            </a:r>
+            <a:r>
+              <a:rPr sz="1000" b="0" dirty="0" err="1">
+                <a:solidFill>
+                  <a:srgbClr val="C00000"/>
+                </a:solidFill>
+                <a:latin typeface="맑은 고딕"/>
+              </a:rPr>
+              <a:t/>
+            </a:r>
+            <a:r>
+              <a:rPr sz="1000" b="0" dirty="0">
+                <a:solidFill>
+                  <a:srgbClr val="C00000"/>
+                </a:solidFill>
+                <a:latin typeface="맑은 고딕"/>
+              </a:rPr>
+              <a:t/>
+            </a:r>
+            <a:r>
+              <a:rPr sz="1000" b="0" dirty="0" err="1">
+                <a:solidFill>
+                  <a:srgbClr val="C00000"/>
+                </a:solidFill>
+                <a:latin typeface="맑은 고딕"/>
+              </a:rPr>
+              <a:t/>
+            </a:r>
+            <a:r>
+              <a:rPr sz="1000" b="0" dirty="0">
+                <a:solidFill>
+                  <a:srgbClr val="C00000"/>
+                </a:solidFill>
+                <a:latin typeface="맑은 고딕"/>
+              </a:rPr>
+              <a:t/>
+            </a:r>
+            <a:r>
+              <a:rPr sz="1000" b="0" dirty="0" err="1">
+                <a:solidFill>
+                  <a:srgbClr val="C00000"/>
+                </a:solidFill>
+                <a:latin typeface="맑은 고딕"/>
+              </a:rPr>
+              <a:t/>
+            </a:r>
+            <a:r>
+              <a:rPr sz="1000" b="0" dirty="0">
+                <a:solidFill>
+                  <a:srgbClr val="C00000"/>
+                </a:solidFill>
+                <a:latin typeface="맑은 고딕"/>
+              </a:rPr>
+              <a:t/>
+            </a:r>
+            <a:r>
+              <a:rPr sz="1000" b="0" dirty="0" err="1">
+                <a:solidFill>
+                  <a:srgbClr val="C00000"/>
+                </a:solidFill>
+                <a:latin typeface="맑은 고딕"/>
+              </a:rPr>
+              <a:t/>
+            </a:r>
+            <a:r>
+              <a:rPr sz="1000" b="0" dirty="0">
+                <a:solidFill>
+                  <a:srgbClr val="C00000"/>
+                </a:solidFill>
+                <a:latin typeface="맑은 고딕"/>
+              </a:rPr>
+              <a:t/>
+            </a:r>
+            <a:r>
+              <a:rPr sz="1000" b="0" dirty="0" err="1">
+                <a:solidFill>
+                  <a:srgbClr val="C00000"/>
+                </a:solidFill>
+                <a:latin typeface="맑은 고딕"/>
+              </a:rPr>
+              <a:t/>
+            </a:r>
+            <a:r>
+              <a:rPr sz="1000" b="0" dirty="0">
+                <a:solidFill>
+                  <a:srgbClr val="C00000"/>
+                </a:solidFill>
+                <a:latin typeface="맑은 고딕"/>
+              </a:rPr>
+              <a:t/>
+            </a:r>
+          </a:p>
+          <a:p>
+            <a:pPr algn="l"/>
+            <a:r>
+              <a:rPr sz="1000" b="0" dirty="0">
+                <a:solidFill>
+                  <a:srgbClr val="C00000"/>
+                </a:solidFill>
+                <a:latin typeface="맑은 고딕"/>
+              </a:rPr>
+              <a:t>· </a:t>
+            </a:r>
+            <a:r>
+              <a:rPr sz="1000" b="0" dirty="0" err="1">
+                <a:solidFill>
+                  <a:srgbClr val="C00000"/>
+                </a:solidFill>
+                <a:latin typeface="맑은 고딕"/>
+              </a:rPr>
+              <a:t>예외</a:t>
+            </a:r>
+            <a:r>
+              <a:rPr sz="1000" b="0" dirty="0">
+                <a:solidFill>
+                  <a:srgbClr val="C00000"/>
+                </a:solidFill>
+                <a:latin typeface="맑은 고딕"/>
+              </a:rPr>
+              <a:t> </a:t>
+            </a:r>
+            <a:r>
+              <a:rPr sz="1000" b="0" dirty="0" err="1">
+                <a:solidFill>
+                  <a:srgbClr val="C00000"/>
+                </a:solidFill>
+                <a:latin typeface="맑은 고딕"/>
+              </a:rPr>
+              <a:t>처리</a:t>
+            </a:r>
+            <a:r>
+              <a:rPr sz="1000" b="0" dirty="0">
+                <a:solidFill>
+                  <a:srgbClr val="C00000"/>
+                </a:solidFill>
+                <a:latin typeface="맑은 고딕"/>
+              </a:rPr>
+              <a:t> </a:t>
+            </a:r>
+            <a:r>
+              <a:rPr sz="1000" b="0" dirty="0" err="1">
+                <a:solidFill>
+                  <a:srgbClr val="C00000"/>
+                </a:solidFill>
+                <a:latin typeface="맑은 고딕"/>
+              </a:rPr>
+              <a:t>그룹의</a:t>
+            </a:r>
+            <a:r>
+              <a:rPr sz="1000" b="0" dirty="0">
+                <a:solidFill>
+                  <a:srgbClr val="C00000"/>
+                </a:solidFill>
+                <a:latin typeface="맑은 고딕"/>
+              </a:rPr>
+              <a:t> [H/S </a:t>
+            </a:r>
+            <a:r>
+              <a:rPr sz="1000" b="0" dirty="0" err="1">
+                <a:solidFill>
+                  <a:srgbClr val="C00000"/>
+                </a:solidFill>
+                <a:latin typeface="맑은 고딕"/>
+              </a:rPr>
+              <a:t>배출</a:t>
+            </a:r>
+            <a:r>
+              <a:rPr sz="1000" b="0" dirty="0">
+                <a:solidFill>
+                  <a:srgbClr val="C00000"/>
+                </a:solidFill>
+                <a:latin typeface="맑은 고딕"/>
+              </a:rPr>
+              <a:t>] 은 </a:t>
+            </a:r>
+            <a:r>
+              <a:rPr sz="1000" b="0" dirty="0" err="1">
+                <a:solidFill>
+                  <a:srgbClr val="C00000"/>
+                </a:solidFill>
+                <a:latin typeface="맑은 고딕"/>
+              </a:rPr>
+              <a:t>출고</a:t>
+            </a:r>
+            <a:r>
+              <a:rPr sz="1000" b="0" dirty="0">
+                <a:solidFill>
+                  <a:srgbClr val="C00000"/>
+                </a:solidFill>
+                <a:latin typeface="맑은 고딕"/>
+              </a:rPr>
+              <a:t> H/S 에 </a:t>
+            </a:r>
+            <a:r>
+              <a:rPr sz="1000" b="0" dirty="0" err="1">
+                <a:solidFill>
+                  <a:srgbClr val="C00000"/>
+                </a:solidFill>
+                <a:latin typeface="맑은 고딕"/>
+              </a:rPr>
+              <a:t>놓인</a:t>
+            </a:r>
+            <a:r>
+              <a:rPr sz="1000" b="0" dirty="0">
+                <a:solidFill>
+                  <a:srgbClr val="C00000"/>
+                </a:solidFill>
+                <a:latin typeface="맑은 고딕"/>
+              </a:rPr>
+              <a:t> </a:t>
+            </a:r>
+            <a:r>
+              <a:rPr sz="1000" b="0" dirty="0" err="1">
+                <a:solidFill>
+                  <a:srgbClr val="C00000"/>
+                </a:solidFill>
+                <a:latin typeface="맑은 고딕"/>
+              </a:rPr>
+              <a:t>작업</a:t>
+            </a:r>
+            <a:r>
+              <a:rPr sz="1000" b="0" dirty="0">
+                <a:solidFill>
+                  <a:srgbClr val="C00000"/>
+                </a:solidFill>
+                <a:latin typeface="맑은 고딕"/>
+              </a:rPr>
+              <a:t> </a:t>
+            </a:r>
+            <a:r>
+              <a:rPr sz="1000" b="0" dirty="0" err="1">
+                <a:solidFill>
+                  <a:srgbClr val="C00000"/>
+                </a:solidFill>
+                <a:latin typeface="맑은 고딕"/>
+              </a:rPr>
+              <a:t>없는</a:t>
+            </a:r>
+            <a:r>
+              <a:rPr sz="1000" b="0" dirty="0">
+                <a:solidFill>
+                  <a:srgbClr val="C00000"/>
+                </a:solidFill>
+                <a:latin typeface="맑은 고딕"/>
+              </a:rPr>
+              <a:t> </a:t>
+            </a:r>
+            <a:r>
+              <a:rPr sz="1000" b="0" dirty="0" err="1">
+                <a:solidFill>
+                  <a:srgbClr val="C00000"/>
+                </a:solidFill>
+                <a:latin typeface="맑은 고딕"/>
+              </a:rPr>
+              <a:t>화물을</a:t>
+            </a:r>
+            <a:r>
+              <a:rPr sz="1000" b="0" dirty="0">
+                <a:solidFill>
+                  <a:srgbClr val="C00000"/>
+                </a:solidFill>
+                <a:latin typeface="맑은 고딕"/>
+              </a:rPr>
+              <a:t> </a:t>
+            </a:r>
+            <a:r>
+              <a:rPr sz="1000" b="0" dirty="0" err="1">
+                <a:solidFill>
+                  <a:srgbClr val="C00000"/>
+                </a:solidFill>
+                <a:latin typeface="맑은 고딕"/>
+              </a:rPr>
+              <a:t>출고대로</a:t>
+            </a:r>
+            <a:r>
+              <a:rPr sz="1000" b="0" dirty="0">
+                <a:solidFill>
+                  <a:srgbClr val="C00000"/>
+                </a:solidFill>
+                <a:latin typeface="맑은 고딕"/>
+              </a:rPr>
+              <a:t> </a:t>
+            </a:r>
+            <a:r>
+              <a:rPr sz="1000" b="0" dirty="0" err="1">
+                <a:solidFill>
+                  <a:srgbClr val="C00000"/>
+                </a:solidFill>
+                <a:latin typeface="맑은 고딕"/>
+              </a:rPr>
+              <a:t>내보낸다</a:t>
+            </a:r>
+            <a:r>
+              <a:rPr sz="1000" b="0" dirty="0">
+                <a:solidFill>
+                  <a:srgbClr val="C00000"/>
+                </a:solidFill>
+                <a:latin typeface="맑은 고딕"/>
+              </a:rPr>
+              <a:t>. </a:t>
+            </a:r>
+            <a:r>
+              <a:rPr sz="1000" b="0" dirty="0" err="1">
+                <a:solidFill>
+                  <a:srgbClr val="C00000"/>
+                </a:solidFill>
+                <a:latin typeface="맑은 고딕"/>
+              </a:rPr>
+              <a:t>비상</a:t>
+            </a:r>
+            <a:r>
+              <a:rPr sz="1000" b="0" dirty="0">
+                <a:solidFill>
+                  <a:srgbClr val="C00000"/>
+                </a:solidFill>
+                <a:latin typeface="맑은 고딕"/>
+              </a:rPr>
+              <a:t> </a:t>
+            </a:r>
+            <a:r>
+              <a:rPr sz="1000" b="0" dirty="0" err="1">
+                <a:solidFill>
+                  <a:srgbClr val="C00000"/>
+                </a:solidFill>
+                <a:latin typeface="맑은 고딕"/>
+              </a:rPr>
+              <a:t>확인창이</a:t>
+            </a:r>
+            <a:r>
+              <a:rPr sz="1000" b="0" dirty="0">
+                <a:solidFill>
+                  <a:srgbClr val="C00000"/>
+                </a:solidFill>
+                <a:latin typeface="맑은 고딕"/>
+              </a:rPr>
+              <a:t> </a:t>
+            </a:r>
+            <a:r>
+              <a:rPr sz="1000" b="0" dirty="0" err="1">
+                <a:solidFill>
+                  <a:srgbClr val="C00000"/>
+                </a:solidFill>
+                <a:latin typeface="맑은 고딕"/>
+              </a:rPr>
+              <a:t>뜨며</a:t>
+            </a:r>
+            <a:r>
+              <a:rPr sz="1000" b="0" dirty="0">
+                <a:solidFill>
+                  <a:srgbClr val="C00000"/>
+                </a:solidFill>
+                <a:latin typeface="맑은 고딕"/>
+              </a:rPr>
+              <a:t>, </a:t>
+            </a:r>
+            <a:r>
+              <a:rPr sz="1000" b="0" dirty="0" err="1">
+                <a:solidFill>
+                  <a:srgbClr val="C00000"/>
+                </a:solidFill>
+                <a:latin typeface="맑은 고딕"/>
+              </a:rPr>
+              <a:t>반자동</a:t>
+            </a:r>
+            <a:r>
+              <a:rPr sz="1000" b="0" dirty="0">
+                <a:solidFill>
+                  <a:srgbClr val="C00000"/>
+                </a:solidFill>
+                <a:latin typeface="맑은 고딕"/>
+              </a:rPr>
+              <a:t> </a:t>
+            </a:r>
+            <a:r>
+              <a:rPr sz="1000" b="0" dirty="0" err="1">
+                <a:solidFill>
+                  <a:srgbClr val="C00000"/>
+                </a:solidFill>
+                <a:latin typeface="맑은 고딕"/>
+              </a:rPr>
+              <a:t>출고</a:t>
+            </a:r>
+            <a:r>
+              <a:rPr sz="1000" b="0" dirty="0">
+                <a:solidFill>
+                  <a:srgbClr val="C00000"/>
+                </a:solidFill>
+                <a:latin typeface="맑은 고딕"/>
+              </a:rPr>
+              <a:t> </a:t>
+            </a:r>
+            <a:r>
+              <a:rPr sz="1000" b="0" dirty="0" err="1">
+                <a:solidFill>
+                  <a:srgbClr val="C00000"/>
+                </a:solidFill>
+                <a:latin typeface="맑은 고딕"/>
+              </a:rPr>
+              <a:t>작업을</a:t>
+            </a:r>
+            <a:r>
+              <a:rPr sz="1000" b="0" dirty="0">
+                <a:solidFill>
+                  <a:srgbClr val="C00000"/>
+                </a:solidFill>
+                <a:latin typeface="맑은 고딕"/>
+              </a:rPr>
+              <a:t> </a:t>
+            </a:r>
+            <a:r>
+              <a:rPr sz="1000" b="0" dirty="0" err="1">
+                <a:solidFill>
+                  <a:srgbClr val="C00000"/>
+                </a:solidFill>
+                <a:latin typeface="맑은 고딕"/>
+              </a:rPr>
+              <a:t>만들어</a:t>
+            </a:r>
+            <a:r>
+              <a:rPr sz="1000" b="0" dirty="0">
+                <a:solidFill>
+                  <a:srgbClr val="C00000"/>
+                </a:solidFill>
+                <a:latin typeface="맑은 고딕"/>
+              </a:rPr>
+              <a:t> </a:t>
+            </a:r>
+            <a:r>
+              <a:rPr sz="1000" b="0" dirty="0" err="1">
+                <a:solidFill>
+                  <a:srgbClr val="C00000"/>
+                </a:solidFill>
+                <a:latin typeface="맑은 고딕"/>
+              </a:rPr>
+              <a:t>상위</a:t>
+            </a:r>
+            <a:r>
+              <a:rPr sz="1000" b="0" dirty="0">
+                <a:solidFill>
+                  <a:srgbClr val="C00000"/>
+                </a:solidFill>
+                <a:latin typeface="맑은 고딕"/>
+              </a:rPr>
+              <a:t> </a:t>
+            </a:r>
+            <a:r>
+              <a:rPr sz="1000" b="0" dirty="0" err="1">
+                <a:solidFill>
+                  <a:srgbClr val="C00000"/>
+                </a:solidFill>
+                <a:latin typeface="맑은 고딕"/>
+              </a:rPr>
+              <a:t>보고</a:t>
+            </a:r>
+            <a:r>
+              <a:rPr sz="1000" b="0" dirty="0">
+                <a:solidFill>
+                  <a:srgbClr val="C00000"/>
+                </a:solidFill>
+                <a:latin typeface="맑은 고딕"/>
+              </a:rPr>
+              <a:t> </a:t>
+            </a:r>
+            <a:r>
+              <a:rPr sz="1000" b="0" dirty="0" err="1">
+                <a:solidFill>
+                  <a:srgbClr val="C00000"/>
+                </a:solidFill>
+                <a:latin typeface="맑은 고딕"/>
+              </a:rPr>
+              <a:t>없이</a:t>
+            </a:r>
+            <a:r>
+              <a:rPr sz="1000" b="0" dirty="0">
+                <a:solidFill>
+                  <a:srgbClr val="C00000"/>
+                </a:solidFill>
+                <a:latin typeface="맑은 고딕"/>
+              </a:rPr>
+              <a:t> </a:t>
+            </a:r>
+            <a:r>
+              <a:rPr sz="1000" b="0" dirty="0" err="1">
+                <a:solidFill>
+                  <a:srgbClr val="C00000"/>
+                </a:solidFill>
+                <a:latin typeface="맑은 고딕"/>
+              </a:rPr>
+              <a:t>처리한다</a:t>
+            </a:r>
+            <a:r>
+              <a:rPr sz="1000" b="0" dirty="0">
+                <a:solidFill>
+                  <a:srgbClr val="C00000"/>
+                </a:solidFill>
+                <a:latin typeface="맑은 고딕"/>
+              </a:rPr>
+              <a:t>(</a:t>
+            </a:r>
+            <a:r>
+              <a:rPr sz="1000" b="0" dirty="0" err="1">
+                <a:solidFill>
+                  <a:srgbClr val="C00000"/>
+                </a:solidFill>
+                <a:latin typeface="맑은 고딕"/>
+              </a:rPr>
+              <a:t>아래</a:t>
+            </a:r>
+            <a:r>
+              <a:rPr sz="1000" b="0" dirty="0">
+                <a:solidFill>
+                  <a:srgbClr val="C00000"/>
+                </a:solidFill>
+                <a:latin typeface="맑은 고딕"/>
+              </a:rPr>
+              <a:t> </a:t>
+            </a:r>
+            <a:r>
+              <a:rPr sz="1000" b="0" dirty="0" err="1">
+                <a:solidFill>
+                  <a:srgbClr val="C00000"/>
+                </a:solidFill>
+                <a:latin typeface="맑은 고딕"/>
+              </a:rPr>
+              <a:t>예외</a:t>
+            </a:r>
+            <a:r>
+              <a:rPr sz="1000" b="0" dirty="0">
+                <a:solidFill>
+                  <a:srgbClr val="C00000"/>
+                </a:solidFill>
+                <a:latin typeface="맑은 고딕"/>
+              </a:rPr>
+              <a:t> </a:t>
+            </a:r>
+            <a:r>
+              <a:rPr sz="1000" b="0" dirty="0" err="1">
+                <a:solidFill>
+                  <a:srgbClr val="C00000"/>
+                </a:solidFill>
+                <a:latin typeface="맑은 고딕"/>
+              </a:rPr>
+              <a:t>처리</a:t>
+            </a:r>
+            <a:r>
+              <a:rPr sz="1000" b="0" dirty="0">
+                <a:solidFill>
+                  <a:srgbClr val="C00000"/>
+                </a:solidFill>
+                <a:latin typeface="맑은 고딕"/>
+              </a:rPr>
+              <a:t> </a:t>
+            </a:r>
+            <a:r>
+              <a:rPr sz="1000" b="0" dirty="0" err="1">
+                <a:solidFill>
+                  <a:srgbClr val="C00000"/>
+                </a:solidFill>
+                <a:latin typeface="맑은 고딕"/>
+              </a:rPr>
+              <a:t>참조</a:t>
+            </a:r>
+            <a:r>
+              <a:rPr sz="1000" b="0" dirty="0">
+                <a:solidFill>
+                  <a:srgbClr val="C00000"/>
+                </a:solidFill>
+                <a:latin typeface="맑은 고딕"/>
+              </a:rPr>
+              <a:t>).</a:t>
+            </a:r>
+          </a:p>
+          <a:p>
+            <a:pPr algn="l"/>
+            <a:r>
+              <a:rPr sz="1000" b="0" dirty="0">
+                <a:solidFill>
+                  <a:srgbClr val="C00000"/>
+                </a:solidFill>
+                <a:latin typeface="맑은 고딕"/>
+              </a:rPr>
+              <a:t>· 도착지·작업구분 입력란은 2026-09-10 에 뺐다. 이 현장은 컨베이어에 도착지·작업구분을 내려보내지 않는다 - PLC 로 나가는 것은 방향(D300+N-1)과 작업번호 트래킹(R영역)뿐이고, 구 트랙테이블 방식의 D(트랙×10) 지시 쓰기는 확정 주소와 충돌해 2026-09-02 부터 차단돼 있다.</a:t>
+            </a:r>
+            <a:r>
+              <a:rPr sz="1000" b="0" dirty="0" err="1">
+                <a:solidFill>
+                  <a:srgbClr val="C00000"/>
+                </a:solidFill>
+                <a:latin typeface="맑은 고딕"/>
+              </a:rPr>
+              <a:t/>
+            </a:r>
+            <a:r>
+              <a:rPr sz="1000" b="0" dirty="0">
+                <a:solidFill>
+                  <a:srgbClr val="C00000"/>
+                </a:solidFill>
+                <a:latin typeface="맑은 고딕"/>
+              </a:rPr>
+              <a:t/>
+            </a:r>
+            <a:r>
+              <a:rPr sz="1000" b="0" dirty="0" err="1">
+                <a:solidFill>
+                  <a:srgbClr val="C00000"/>
+                </a:solidFill>
+                <a:latin typeface="맑은 고딕"/>
+              </a:rPr>
+              <a:t/>
+            </a:r>
+            <a:r>
+              <a:rPr sz="1000" b="0" dirty="0">
+                <a:solidFill>
+                  <a:srgbClr val="C00000"/>
+                </a:solidFill>
+                <a:latin typeface="맑은 고딕"/>
+              </a:rPr>
+              <a:t/>
+            </a:r>
+            <a:r>
+              <a:rPr sz="1000" b="0" dirty="0" err="1">
+                <a:solidFill>
+                  <a:srgbClr val="C00000"/>
+                </a:solidFill>
+                <a:latin typeface="맑은 고딕"/>
+              </a:rPr>
+              <a:t/>
+            </a:r>
+            <a:r>
+              <a:rPr sz="1000" b="0" dirty="0">
+                <a:solidFill>
+                  <a:srgbClr val="C00000"/>
+                </a:solidFill>
+                <a:latin typeface="맑은 고딕"/>
+              </a:rPr>
+              <a:t/>
+            </a:r>
+            <a:r>
+              <a:rPr sz="1000" b="0" dirty="0" err="1">
+                <a:solidFill>
+                  <a:srgbClr val="C00000"/>
+                </a:solidFill>
+                <a:latin typeface="맑은 고딕"/>
+              </a:rPr>
+              <a:t/>
+            </a:r>
+            <a:r>
+              <a:rPr sz="1000" b="0" dirty="0">
+                <a:solidFill>
+                  <a:srgbClr val="C00000"/>
+                </a:solidFill>
+                <a:latin typeface="맑은 고딕"/>
+              </a:rPr>
+              <a:t/>
+            </a:r>
+            <a:r>
+              <a:rPr sz="1000" b="0" dirty="0" err="1">
+                <a:solidFill>
+                  <a:srgbClr val="C00000"/>
+                </a:solidFill>
+                <a:latin typeface="맑은 고딕"/>
+              </a:rPr>
+              <a:t/>
+            </a:r>
+            <a:r>
+              <a:rPr sz="1000" b="0" dirty="0">
+                <a:solidFill>
+                  <a:srgbClr val="C00000"/>
+                </a:solidFill>
+                <a:latin typeface="맑은 고딕"/>
+              </a:rPr>
+              <a:t/>
+            </a:r>
+            <a:r>
+              <a:rPr sz="1000" b="0" dirty="0" err="1">
+                <a:solidFill>
+                  <a:srgbClr val="C00000"/>
+                </a:solidFill>
+                <a:latin typeface="맑은 고딕"/>
+              </a:rPr>
+              <a:t/>
+            </a:r>
+            <a:r>
+              <a:rPr sz="1000" b="0" dirty="0">
+                <a:solidFill>
+                  <a:srgbClr val="C00000"/>
+                </a:solidFill>
+                <a:latin typeface="맑은 고딕"/>
+              </a:rPr>
+              <a:t/>
+            </a:r>
+            <a:r>
+              <a:rPr sz="1000" b="0" dirty="0" err="1">
+                <a:solidFill>
+                  <a:srgbClr val="C00000"/>
+                </a:solidFill>
+                <a:latin typeface="맑은 고딕"/>
+              </a:rPr>
+              <a:t/>
+            </a:r>
+            <a:r>
+              <a:rPr sz="1000" b="0" dirty="0">
+                <a:solidFill>
+                  <a:srgbClr val="C00000"/>
+                </a:solidFill>
+                <a:latin typeface="맑은 고딕"/>
+              </a:rPr>
+              <a:t/>
+            </a:r>
+            <a:r>
+              <a:rPr sz="1000" b="0" dirty="0" err="1">
+                <a:solidFill>
+                  <a:srgbClr val="C00000"/>
+                </a:solidFill>
+                <a:latin typeface="맑은 고딕"/>
+              </a:rPr>
+              <a:t/>
+            </a:r>
+            <a:r>
+              <a:rPr sz="1000" b="0" dirty="0">
+                <a:solidFill>
+                  <a:srgbClr val="C00000"/>
+                </a:solidFill>
+                <a:latin typeface="맑은 고딕"/>
+              </a:rPr>
+              <a:t/>
+            </a:r>
+            <a:r>
+              <a:rPr sz="1000" b="0" dirty="0" err="1">
+                <a:solidFill>
+                  <a:srgbClr val="C00000"/>
+                </a:solidFill>
+                <a:latin typeface="맑은 고딕"/>
+              </a:rPr>
+              <a:t/>
+            </a:r>
+            <a:r>
+              <a:rPr sz="1000" b="0" dirty="0">
+                <a:solidFill>
+                  <a:srgbClr val="C00000"/>
+                </a:solidFill>
+                <a:latin typeface="맑은 고딕"/>
+              </a:rPr>
+              <a:t/>
+            </a:r>
+            <a:r>
+              <a:rPr sz="1000" b="0" dirty="0" err="1">
+                <a:solidFill>
+                  <a:srgbClr val="C00000"/>
+                </a:solidFill>
+                <a:latin typeface="맑은 고딕"/>
+              </a:rPr>
+              <a:t/>
+            </a:r>
+            <a:r>
+              <a:rPr sz="1000" b="0" dirty="0">
+                <a:solidFill>
+                  <a:srgbClr val="C00000"/>
+                </a:solidFill>
+                <a:latin typeface="맑은 고딕"/>
+              </a:rPr>
+              <a:t/>
+            </a:r>
+            <a:r>
+              <a:rPr sz="1000" b="0" dirty="0" err="1">
+                <a:solidFill>
+                  <a:srgbClr val="C00000"/>
+                </a:solidFill>
+                <a:latin typeface="맑은 고딕"/>
+              </a:rPr>
+              <a:t/>
+            </a:r>
+            <a:r>
+              <a:rPr sz="1000" b="0" dirty="0">
+                <a:solidFill>
+                  <a:srgbClr val="C00000"/>
+                </a:solidFill>
+                <a:latin typeface="맑은 고딕"/>
+              </a:rPr>
+              <a:t/>
+            </a:r>
+            <a:r>
+              <a:rPr sz="1000" b="0" dirty="0" err="1">
+                <a:solidFill>
+                  <a:srgbClr val="C00000"/>
+                </a:solidFill>
+                <a:latin typeface="맑은 고딕"/>
+              </a:rPr>
+              <a:t/>
+            </a:r>
+            <a:r>
+              <a:rPr sz="1000" b="0" dirty="0">
+                <a:solidFill>
+                  <a:srgbClr val="C00000"/>
+                </a:solidFill>
+                <a:latin typeface="맑은 고딕"/>
+              </a:rPr>
+              <a:t/>
+            </a:r>
+            <a:r>
+              <a:rPr sz="1000" b="0" dirty="0" err="1">
+                <a:solidFill>
+                  <a:srgbClr val="C00000"/>
+                </a:solidFill>
+                <a:latin typeface="맑은 고딕"/>
+              </a:rPr>
+              <a:t/>
+            </a:r>
+            <a:r>
+              <a:rPr sz="1000" b="0" dirty="0">
+                <a:solidFill>
+                  <a:srgbClr val="C00000"/>
+                </a:solidFill>
+                <a:latin typeface="맑은 고딕"/>
+              </a:rPr>
+              <a:t/>
+            </a:r>
+            <a:r>
+              <a:rPr sz="1000" b="0" dirty="0" err="1">
+                <a:solidFill>
+                  <a:srgbClr val="C00000"/>
+                </a:solidFill>
+                <a:latin typeface="맑은 고딕"/>
+              </a:rPr>
+              <a:t/>
+            </a:r>
+            <a:r>
+              <a:rPr sz="1000" b="0" dirty="0">
+                <a:solidFill>
+                  <a:srgbClr val="C00000"/>
+                </a:solidFill>
+                <a:latin typeface="맑은 고딕"/>
+              </a:rPr>
+              <a:t/>
+            </a:r>
+            <a:r>
+              <a:rPr sz="1000" b="0" dirty="0" err="1">
+                <a:solidFill>
+                  <a:srgbClr val="C00000"/>
+                </a:solidFill>
+                <a:latin typeface="맑은 고딕"/>
+              </a:rPr>
+              <a:t/>
+            </a:r>
+            <a:r>
+              <a:rPr sz="1000" b="0" dirty="0">
+                <a:solidFill>
+                  <a:srgbClr val="C00000"/>
+                </a:solidFill>
+                <a:latin typeface="맑은 고딕"/>
+              </a:rPr>
+              <a:t/>
+            </a:r>
+            <a:r>
+              <a:rPr sz="1000" b="0" dirty="0" err="1">
+                <a:solidFill>
+                  <a:srgbClr val="C00000"/>
+                </a:solidFill>
+                <a:latin typeface="맑은 고딕"/>
+              </a:rPr>
+              <a:t/>
+            </a:r>
+            <a:r>
+              <a:rPr sz="1000" b="0" dirty="0">
+                <a:solidFill>
+                  <a:srgbClr val="C00000"/>
+                </a:solidFill>
+                <a:latin typeface="맑은 고딕"/>
+              </a:rPr>
+              <a:t/>
+            </a:r>
+            <a:r>
+              <a:rPr sz="1000" b="0" dirty="0" err="1">
+                <a:solidFill>
+                  <a:srgbClr val="C00000"/>
+                </a:solidFill>
+                <a:latin typeface="맑은 고딕"/>
+              </a:rPr>
+              <a:t/>
+            </a:r>
+            <a:r>
+              <a:rPr sz="1000" b="0" dirty="0">
+                <a:solidFill>
+                  <a:srgbClr val="C00000"/>
+                </a:solidFill>
+                <a:latin typeface="맑은 고딕"/>
+              </a:rPr>
+              <a:t/>
+            </a:r>
+            <a:r>
+              <a:rPr sz="1000" b="0" dirty="0" err="1">
+                <a:solidFill>
+                  <a:srgbClr val="C00000"/>
+                </a:solidFill>
+                <a:latin typeface="맑은 고딕"/>
+              </a:rPr>
+              <a:t/>
+            </a:r>
+            <a:r>
+              <a:rPr sz="1000" b="0" dirty="0">
+                <a:solidFill>
+                  <a:srgbClr val="C00000"/>
+                </a:solidFill>
+                <a:latin typeface="맑은 고딕"/>
+              </a:rPr>
+              <a:t/>
+            </a:r>
+            <a:r>
+              <a:rPr sz="1000" b="0" dirty="0" err="1">
+                <a:solidFill>
+                  <a:srgbClr val="C00000"/>
+                </a:solidFill>
+                <a:latin typeface="맑은 고딕"/>
+              </a:rPr>
+              <a:t/>
+            </a:r>
+            <a:r>
+              <a:rPr sz="1000" b="0" dirty="0">
+                <a:solidFill>
+                  <a:srgbClr val="C00000"/>
+                </a:solidFill>
+                <a:latin typeface="맑은 고딕"/>
+              </a:rPr>
+              <a:t/>
+            </a:r>
+            <a:r>
+              <a:rPr sz="1000" b="0" dirty="0" err="1">
+                <a:solidFill>
+                  <a:srgbClr val="C00000"/>
+                </a:solidFill>
+                <a:latin typeface="맑은 고딕"/>
+              </a:rPr>
+              <a:t/>
+            </a:r>
+            <a:r>
+              <a:rPr sz="1000" b="0" dirty="0">
+                <a:solidFill>
+                  <a:srgbClr val="C00000"/>
+                </a:solidFill>
+                <a:latin typeface="맑은 고딕"/>
+              </a:rPr>
+              <a:t/>
+            </a:r>
+            <a:r>
+              <a:rPr sz="1000" b="0" dirty="0" err="1">
+                <a:solidFill>
+                  <a:srgbClr val="C00000"/>
+                </a:solidFill>
+                <a:latin typeface="맑은 고딕"/>
+              </a:rPr>
+              <a:t/>
+            </a:r>
+            <a:r>
+              <a:rPr sz="1000" b="0" dirty="0">
+                <a:solidFill>
+                  <a:srgbClr val="C00000"/>
+                </a:solidFill>
+                <a:latin typeface="맑은 고딕"/>
+              </a:rPr>
+              <a:t/>
+            </a:r>
+            <a:r>
+              <a:rPr sz="1000" b="0" dirty="0" err="1">
+                <a:solidFill>
+                  <a:srgbClr val="C00000"/>
+                </a:solidFill>
+                <a:latin typeface="맑은 고딕"/>
+              </a:rPr>
+              <a:t/>
+            </a:r>
+            <a:r>
+              <a:rPr sz="1000" b="0" dirty="0">
+                <a:solidFill>
+                  <a:srgbClr val="C00000"/>
+                </a:solidFill>
+                <a:latin typeface="맑은 고딕"/>
+              </a:rPr>
+              <a:t/>
+            </a:r>
+            <a:r>
+              <a:rPr sz="1000" b="0" dirty="0" err="1">
+                <a:solidFill>
+                  <a:srgbClr val="C00000"/>
+                </a:solidFill>
+                <a:latin typeface="맑은 고딕"/>
+              </a:rPr>
+              <a:t/>
+            </a:r>
+            <a:r>
+              <a:rPr sz="1000" b="0" dirty="0">
+                <a:solidFill>
+                  <a:srgbClr val="C00000"/>
+                </a:solidFill>
+                <a:latin typeface="맑은 고딕"/>
+              </a:rPr>
+              <a:t/>
+            </a:r>
+            <a:r>
+              <a:rPr sz="1000" b="0" dirty="0" err="1">
+                <a:solidFill>
+                  <a:srgbClr val="C00000"/>
+                </a:solidFill>
+                <a:latin typeface="맑은 고딕"/>
+              </a:rPr>
+              <a:t/>
+            </a:r>
+            <a:r>
+              <a:rPr sz="1000" b="0" dirty="0">
+                <a:solidFill>
+                  <a:srgbClr val="C00000"/>
+                </a:solidFill>
+                <a:latin typeface="맑은 고딕"/>
+              </a:rPr>
+              <a:t/>
+            </a:r>
+            <a:r>
+              <a:rPr sz="1000" b="0" dirty="0" err="1">
+                <a:solidFill>
+                  <a:srgbClr val="C00000"/>
+                </a:solidFill>
+                <a:latin typeface="맑은 고딕"/>
+              </a:rPr>
+              <a:t/>
+            </a:r>
+            <a:r>
+              <a:rPr sz="1000" b="0" dirty="0">
+                <a:solidFill>
+                  <a:srgbClr val="C00000"/>
+                </a:solidFill>
+                <a:latin typeface="맑은 고딕"/>
+              </a:rPr>
+              <a:t/>
+            </a:r>
+            <a:r>
+              <a:rPr sz="1000" b="0" dirty="0" err="1">
+                <a:solidFill>
+                  <a:srgbClr val="C00000"/>
+                </a:solidFill>
+                <a:latin typeface="맑은 고딕"/>
+              </a:rPr>
+              <a:t/>
+            </a:r>
+            <a:r>
+              <a:rPr sz="1000" b="0" dirty="0">
+                <a:solidFill>
+                  <a:srgbClr val="C00000"/>
+                </a:solidFill>
+                <a:latin typeface="맑은 고딕"/>
+              </a:rPr>
+              <a:t/>
+            </a:r>
+          </a:p>
+        </p:txBody>
+      </p:sp>
+      <p:sp>
+        <p:nvSpPr>
+          <p:cNvPr id="6" name="TextBox 5"/>
+          <p:cNvSpPr txBox="1"/>
+          <p:nvPr/>
+        </p:nvSpPr>
+        <p:spPr>
+          <a:xfrm>
+            <a:off x="457200" y="6400800"/>
+            <a:ext cx="3657600" cy="320040"/>
+          </a:xfrm>
+          <a:prstGeom prst="rect">
+            <a:avLst/>
+          </a:prstGeom>
+          <a:noFill/>
+        </p:spPr>
+        <p:txBody>
+          <a:bodyPr wrap="square" lIns="45720" rIns="45720" anchor="t">
+            <a:spAutoFit/>
+          </a:bodyPr>
+          <a:lstStyle/>
+          <a:p>
+            <a:pPr algn="l"/>
+            <a:r>
+              <a:rPr sz="1000" b="0">
+                <a:solidFill>
+                  <a:srgbClr val="000000"/>
+                </a:solidFill>
+                <a:latin typeface="맑은 고딕"/>
+              </a:rPr>
+              <a:t>LG 화학 1동 ECS  |  화면설계서</a:t>
+            </a:r>
+          </a:p>
+        </p:txBody>
+      </p:sp>
+      <p:sp>
+        <p:nvSpPr>
+          <p:cNvPr id="7" name="TextBox 6"/>
+          <p:cNvSpPr txBox="1"/>
+          <p:nvPr/>
+        </p:nvSpPr>
+        <p:spPr>
+          <a:xfrm>
+            <a:off x="11155680" y="6400800"/>
+            <a:ext cx="731520" cy="320040"/>
+          </a:xfrm>
+          <a:prstGeom prst="rect">
+            <a:avLst/>
+          </a:prstGeom>
+          <a:noFill/>
+        </p:spPr>
+        <p:txBody>
+          <a:bodyPr wrap="square" lIns="45720" rIns="45720" anchor="t">
+            <a:spAutoFit/>
+          </a:bodyPr>
+          <a:lstStyle/>
+          <a:p>
+            <a:pPr algn="r"/>
+            <a:r>
+              <a:rPr sz="1000" b="0">
+                <a:solidFill>
+                  <a:srgbClr val="000000"/>
+                </a:solidFill>
+                <a:latin typeface="맑은 고딕"/>
+              </a:rPr>
+              <a:t>20</a:t>
+            </a:r>
+          </a:p>
+        </p:txBody>
+      </p:sp>
       <p:pic>
         <p:nvPicPr>
-          <p:cNvPr id="4" name="Picture 3" descr="cv2_0.png"/>
+          <p:cNvPr id="8" name="Picture 7" descr="cv2_0.png"/>
           <p:cNvPicPr>
             <a:picLocks noChangeAspect="1"/>
           </p:cNvPicPr>
           <p:nvPr/>
         </p:nvPicPr>
         <p:blipFill>
-          <a:blip r:embed="rId2"/>
+          <a:blip r:embed="rId3"/>
           <a:stretch>
             <a:fillRect/>
           </a:stretch>
         </p:blipFill>
         <p:spPr>
           <a:xfrm>
-            <a:off x="2486856" y="1280160"/>
-            <a:ext cx="3804526" cy="4846320"/>
+            <a:off x="2486856" y="1600646"/>
+            <a:ext cx="3804526" cy="4205348"/>
           </a:xfrm>
           <a:prstGeom prst="rect">
             <a:avLst/>
           </a:prstGeom>
         </p:spPr>
       </p:pic>
-      <p:sp>
-        <p:nvSpPr>
-          <p:cNvPr id="5" name="TextBox 4"/>
-          <p:cNvSpPr txBox="1"/>
-          <p:nvPr/>
-        </p:nvSpPr>
-        <p:spPr>
-          <a:xfrm>
-            <a:off x="8503920" y="1188720"/>
-            <a:ext cx="3291840" cy="2785378"/>
-          </a:xfrm>
-          <a:prstGeom prst="rect">
-            <a:avLst/>
-          </a:prstGeom>
-          <a:noFill/>
-        </p:spPr>
-        <p:txBody>
-          <a:bodyPr wrap="square" lIns="45720" rIns="45720" anchor="t">
-            <a:spAutoFit/>
-          </a:bodyPr>
-          <a:lstStyle/>
-          <a:p>
-            <a:pPr algn="l"/>
-            <a:r>
-              <a:rPr sz="1300" b="1" dirty="0">
-                <a:solidFill>
-                  <a:srgbClr val="1E2761"/>
-                </a:solidFill>
-                <a:latin typeface="맑은 고딕"/>
-              </a:rPr>
-              <a:t>■ </a:t>
-            </a:r>
-            <a:r>
-              <a:rPr sz="1300" b="1" dirty="0" err="1">
-                <a:solidFill>
-                  <a:srgbClr val="1E2761"/>
-                </a:solidFill>
-                <a:latin typeface="맑은 고딕"/>
-              </a:rPr>
-              <a:t>메뉴</a:t>
-            </a:r>
-            <a:r>
-              <a:rPr sz="1300" b="1" dirty="0">
-                <a:solidFill>
-                  <a:srgbClr val="1E2761"/>
-                </a:solidFill>
-                <a:latin typeface="맑은 고딕"/>
-              </a:rPr>
-              <a:t> Path</a:t>
-            </a:r>
-          </a:p>
-          <a:p>
-            <a:pPr algn="l"/>
-            <a:r>
-              <a:rPr sz="1100" b="0" dirty="0" err="1">
-                <a:solidFill>
-                  <a:srgbClr val="595959"/>
-                </a:solidFill>
-                <a:latin typeface="맑은 고딕"/>
-              </a:rPr>
-              <a:t>메인</a:t>
-            </a:r>
-            <a:r>
-              <a:rPr sz="1100" b="0" dirty="0">
-                <a:solidFill>
-                  <a:srgbClr val="595959"/>
-                </a:solidFill>
-                <a:latin typeface="맑은 고딕"/>
-              </a:rPr>
-              <a:t> </a:t>
-            </a:r>
-            <a:r>
-              <a:rPr sz="1100" b="0" dirty="0" err="1">
-                <a:solidFill>
-                  <a:srgbClr val="595959"/>
-                </a:solidFill>
-                <a:latin typeface="맑은 고딕"/>
-              </a:rPr>
-              <a:t>화면에서</a:t>
-            </a:r>
-            <a:r>
-              <a:rPr sz="1100" b="0" dirty="0">
-                <a:solidFill>
-                  <a:srgbClr val="595959"/>
-                </a:solidFill>
-                <a:latin typeface="맑은 고딕"/>
-              </a:rPr>
-              <a:t> </a:t>
-            </a:r>
-            <a:r>
-              <a:rPr sz="1100" b="0" dirty="0" err="1">
-                <a:solidFill>
-                  <a:srgbClr val="595959"/>
-                </a:solidFill>
-                <a:latin typeface="맑은 고딕"/>
-              </a:rPr>
-              <a:t>컨베이어</a:t>
-            </a:r>
-            <a:r>
-              <a:rPr sz="1100" b="0" dirty="0">
-                <a:solidFill>
-                  <a:srgbClr val="595959"/>
-                </a:solidFill>
-                <a:latin typeface="맑은 고딕"/>
-              </a:rPr>
-              <a:t> </a:t>
-            </a:r>
-            <a:r>
-              <a:rPr sz="1100" b="0" dirty="0" err="1">
-                <a:solidFill>
-                  <a:srgbClr val="595959"/>
-                </a:solidFill>
-                <a:latin typeface="맑은 고딕"/>
-              </a:rPr>
-              <a:t>클릭</a:t>
-            </a:r>
-            <a:endParaRPr sz="1100" b="0" dirty="0">
-              <a:solidFill>
-                <a:srgbClr val="595959"/>
-              </a:solidFill>
-              <a:latin typeface="맑은 고딕"/>
-            </a:endParaRPr>
-          </a:p>
-          <a:p>
-            <a:pPr algn="l"/>
-            <a:endParaRPr sz="1100" b="0" dirty="0">
-              <a:solidFill>
-                <a:srgbClr val="595959"/>
-              </a:solidFill>
-              <a:latin typeface="맑은 고딕"/>
-            </a:endParaRPr>
-          </a:p>
-          <a:p>
-            <a:pPr algn="l"/>
-            <a:r>
-              <a:rPr sz="1300" b="1" dirty="0">
-                <a:solidFill>
-                  <a:srgbClr val="1E2761"/>
-                </a:solidFill>
-                <a:latin typeface="맑은 고딕"/>
-              </a:rPr>
-              <a:t>■ </a:t>
-            </a:r>
-            <a:r>
-              <a:rPr sz="1300" b="1" dirty="0" err="1">
-                <a:solidFill>
-                  <a:srgbClr val="1E2761"/>
-                </a:solidFill>
-                <a:latin typeface="맑은 고딕"/>
-              </a:rPr>
-              <a:t>프로그램</a:t>
-            </a:r>
-            <a:r>
-              <a:rPr sz="1300" b="1" dirty="0">
-                <a:solidFill>
-                  <a:srgbClr val="1E2761"/>
-                </a:solidFill>
-                <a:latin typeface="맑은 고딕"/>
-              </a:rPr>
-              <a:t> </a:t>
-            </a:r>
-            <a:r>
-              <a:rPr sz="1300" b="1" dirty="0" err="1">
-                <a:solidFill>
-                  <a:srgbClr val="1E2761"/>
-                </a:solidFill>
-                <a:latin typeface="맑은 고딕"/>
-              </a:rPr>
-              <a:t>개요</a:t>
-            </a:r>
-            <a:endParaRPr sz="1300" b="1" dirty="0">
-              <a:solidFill>
-                <a:srgbClr val="1E2761"/>
-              </a:solidFill>
-              <a:latin typeface="맑은 고딕"/>
-            </a:endParaRPr>
-          </a:p>
-          <a:p>
-            <a:pPr algn="l"/>
-            <a:r>
-              <a:rPr sz="1100" b="0" dirty="0" err="1">
-                <a:solidFill>
-                  <a:srgbClr val="595959"/>
-                </a:solidFill>
-                <a:latin typeface="맑은 고딕"/>
-              </a:rPr>
-              <a:t>컨베이어</a:t>
-            </a:r>
-            <a:r>
-              <a:rPr sz="1100" b="0" dirty="0">
-                <a:solidFill>
-                  <a:srgbClr val="595959"/>
-                </a:solidFill>
-                <a:latin typeface="맑은 고딕"/>
-              </a:rPr>
-              <a:t>(</a:t>
-            </a:r>
-            <a:r>
-              <a:rPr sz="1100" b="0" dirty="0" err="1">
-                <a:solidFill>
-                  <a:srgbClr val="595959"/>
-                </a:solidFill>
-                <a:latin typeface="맑은 고딕"/>
-              </a:rPr>
-              <a:t>트랙</a:t>
-            </a:r>
-            <a:r>
-              <a:rPr sz="1100" b="0" dirty="0">
-                <a:solidFill>
-                  <a:srgbClr val="595959"/>
-                </a:solidFill>
-                <a:latin typeface="맑은 고딕"/>
-              </a:rPr>
-              <a:t> 2개)의 PLC </a:t>
-            </a:r>
-            <a:r>
-              <a:rPr sz="1100" b="0" dirty="0" err="1">
-                <a:solidFill>
-                  <a:srgbClr val="595959"/>
-                </a:solidFill>
-                <a:latin typeface="맑은 고딕"/>
-              </a:rPr>
-              <a:t>신호와</a:t>
-            </a:r>
-            <a:r>
-              <a:rPr sz="1100" b="0" dirty="0">
-                <a:solidFill>
-                  <a:srgbClr val="595959"/>
-                </a:solidFill>
-                <a:latin typeface="맑은 고딕"/>
-              </a:rPr>
-              <a:t> </a:t>
-            </a:r>
-            <a:r>
-              <a:rPr sz="1100" b="0" dirty="0" err="1">
-                <a:solidFill>
-                  <a:srgbClr val="595959"/>
-                </a:solidFill>
-                <a:latin typeface="맑은 고딕"/>
-              </a:rPr>
-              <a:t>작업</a:t>
-            </a:r>
-            <a:r>
-              <a:rPr sz="1100" b="0" dirty="0">
-                <a:solidFill>
-                  <a:srgbClr val="595959"/>
-                </a:solidFill>
-                <a:latin typeface="맑은 고딕"/>
-              </a:rPr>
-              <a:t> </a:t>
-            </a:r>
-            <a:r>
-              <a:rPr sz="1100" b="0" dirty="0" err="1">
-                <a:solidFill>
-                  <a:srgbClr val="595959"/>
-                </a:solidFill>
-                <a:latin typeface="맑은 고딕"/>
-              </a:rPr>
-              <a:t>정보를</a:t>
-            </a:r>
-            <a:r>
-              <a:rPr sz="1100" b="0" dirty="0">
-                <a:solidFill>
-                  <a:srgbClr val="595959"/>
-                </a:solidFill>
-                <a:latin typeface="맑은 고딕"/>
-              </a:rPr>
-              <a:t> </a:t>
-            </a:r>
-            <a:r>
-              <a:rPr sz="1100" b="0" dirty="0" err="1">
-                <a:solidFill>
-                  <a:srgbClr val="595959"/>
-                </a:solidFill>
-                <a:latin typeface="맑은 고딕"/>
-              </a:rPr>
-              <a:t>보고</a:t>
-            </a:r>
-            <a:r>
-              <a:rPr sz="1100" b="0" dirty="0">
-                <a:solidFill>
-                  <a:srgbClr val="595959"/>
-                </a:solidFill>
-                <a:latin typeface="맑은 고딕"/>
-              </a:rPr>
-              <a:t>, </a:t>
-            </a:r>
-            <a:r>
-              <a:rPr sz="1100" b="0" dirty="0" err="1">
-                <a:solidFill>
-                  <a:srgbClr val="595959"/>
-                </a:solidFill>
-                <a:latin typeface="맑은 고딕"/>
-              </a:rPr>
-              <a:t>작업번호</a:t>
-            </a:r>
-            <a:r>
-              <a:rPr sz="1100" b="0" dirty="0">
-                <a:solidFill>
-                  <a:srgbClr val="595959"/>
-                </a:solidFill>
-                <a:latin typeface="맑은 고딕"/>
-              </a:rPr>
-              <a:t> </a:t>
-            </a:r>
-            <a:r>
-              <a:rPr sz="1100" b="0" dirty="0" err="1">
-                <a:solidFill>
-                  <a:srgbClr val="595959"/>
-                </a:solidFill>
-                <a:latin typeface="맑은 고딕"/>
-              </a:rPr>
-              <a:t>쓰기</a:t>
-            </a:r>
-            <a:r>
-              <a:rPr sz="1100" b="0" dirty="0">
-                <a:solidFill>
-                  <a:srgbClr val="595959"/>
-                </a:solidFill>
-                <a:latin typeface="맑은 고딕"/>
-              </a:rPr>
-              <a:t>/</a:t>
-            </a:r>
-            <a:r>
-              <a:rPr sz="1100" b="0" dirty="0" err="1">
-                <a:solidFill>
-                  <a:srgbClr val="595959"/>
-                </a:solidFill>
-                <a:latin typeface="맑은 고딕"/>
-              </a:rPr>
-              <a:t>삭제</a:t>
-            </a:r>
-            <a:r>
-              <a:rPr sz="1100" b="0" dirty="0">
-                <a:solidFill>
-                  <a:srgbClr val="595959"/>
-                </a:solidFill>
-                <a:latin typeface="맑은 고딕"/>
-              </a:rPr>
-              <a:t>/</a:t>
-            </a:r>
-            <a:r>
-              <a:rPr sz="1100" b="0" dirty="0" err="1">
-                <a:solidFill>
-                  <a:srgbClr val="595959"/>
-                </a:solidFill>
-                <a:latin typeface="맑은 고딕"/>
-              </a:rPr>
-              <a:t>복사</a:t>
-            </a:r>
-            <a:r>
-              <a:rPr sz="1100" b="0" dirty="0">
-                <a:solidFill>
-                  <a:srgbClr val="595959"/>
-                </a:solidFill>
-                <a:latin typeface="맑은 고딕"/>
-              </a:rPr>
-              <a:t>/</a:t>
-            </a:r>
-            <a:r>
-              <a:rPr sz="1100" b="0" dirty="0" err="1">
-                <a:solidFill>
-                  <a:srgbClr val="595959"/>
-                </a:solidFill>
-                <a:latin typeface="맑은 고딕"/>
-              </a:rPr>
-              <a:t>잘라내기</a:t>
-            </a:r>
-            <a:r>
-              <a:rPr sz="1100" b="0" dirty="0">
-                <a:solidFill>
-                  <a:srgbClr val="595959"/>
-                </a:solidFill>
-                <a:latin typeface="맑은 고딕"/>
-              </a:rPr>
-              <a:t>/</a:t>
-            </a:r>
-            <a:r>
-              <a:rPr sz="1100" b="0" dirty="0" err="1">
-                <a:solidFill>
-                  <a:srgbClr val="595959"/>
-                </a:solidFill>
-                <a:latin typeface="맑은 고딕"/>
-              </a:rPr>
-              <a:t>붙여넣기</a:t>
-            </a:r>
-            <a:r>
-              <a:rPr sz="1100" b="0" dirty="0">
-                <a:solidFill>
-                  <a:srgbClr val="595959"/>
-                </a:solidFill>
-                <a:latin typeface="맑은 고딕"/>
-              </a:rPr>
-              <a:t>/MZ </a:t>
-            </a:r>
-            <a:r>
-              <a:rPr sz="1100" b="0" dirty="0" err="1">
-                <a:solidFill>
-                  <a:srgbClr val="595959"/>
-                </a:solidFill>
-                <a:latin typeface="맑은 고딕"/>
-              </a:rPr>
-              <a:t>이동</a:t>
-            </a:r>
-            <a:r>
-              <a:rPr sz="1100" b="0" dirty="0">
-                <a:solidFill>
-                  <a:srgbClr val="595959"/>
-                </a:solidFill>
-                <a:latin typeface="맑은 고딕"/>
-              </a:rPr>
-              <a:t> </a:t>
-            </a:r>
-            <a:r>
-              <a:rPr sz="1100" b="0" dirty="0" err="1">
-                <a:solidFill>
-                  <a:srgbClr val="595959"/>
-                </a:solidFill>
-                <a:latin typeface="맑은 고딕"/>
-              </a:rPr>
-              <a:t>등을</a:t>
-            </a:r>
-            <a:r>
-              <a:rPr sz="1100" b="0" dirty="0">
-                <a:solidFill>
-                  <a:srgbClr val="595959"/>
-                </a:solidFill>
-                <a:latin typeface="맑은 고딕"/>
-              </a:rPr>
-              <a:t> </a:t>
-            </a:r>
-            <a:r>
-              <a:rPr sz="1100" b="0" dirty="0" err="1">
-                <a:solidFill>
-                  <a:srgbClr val="595959"/>
-                </a:solidFill>
-                <a:latin typeface="맑은 고딕"/>
-              </a:rPr>
-              <a:t>수행한다</a:t>
-            </a:r>
-            <a:r>
-              <a:rPr sz="1100" b="0" dirty="0">
-                <a:solidFill>
-                  <a:srgbClr val="595959"/>
-                </a:solidFill>
-                <a:latin typeface="맑은 고딕"/>
-              </a:rPr>
-              <a:t>.</a:t>
-            </a:r>
-          </a:p>
-          <a:p>
-            <a:pPr algn="l"/>
-            <a:endParaRPr sz="1100" b="0" dirty="0">
-              <a:solidFill>
-                <a:srgbClr val="595959"/>
-              </a:solidFill>
-              <a:latin typeface="맑은 고딕"/>
-            </a:endParaRPr>
-          </a:p>
-          <a:p>
-            <a:pPr algn="l"/>
-            <a:r>
-              <a:rPr sz="1300" b="1" dirty="0">
-                <a:solidFill>
-                  <a:srgbClr val="1E2761"/>
-                </a:solidFill>
-                <a:latin typeface="맑은 고딕"/>
-              </a:rPr>
-              <a:t>■ </a:t>
-            </a:r>
-            <a:r>
-              <a:rPr sz="1300" b="1" dirty="0" err="1">
-                <a:solidFill>
-                  <a:srgbClr val="1E2761"/>
-                </a:solidFill>
-                <a:latin typeface="맑은 고딕"/>
-              </a:rPr>
-              <a:t>특기사항</a:t>
-            </a:r>
-            <a:endParaRPr sz="1300" b="1" dirty="0">
-              <a:solidFill>
-                <a:srgbClr val="1E2761"/>
-              </a:solidFill>
-              <a:latin typeface="맑은 고딕"/>
-            </a:endParaRPr>
-          </a:p>
-          <a:p>
-            <a:pPr algn="l"/>
-            <a:r>
-              <a:rPr sz="1000" b="0" dirty="0">
-                <a:solidFill>
-                  <a:srgbClr val="595959"/>
-                </a:solidFill>
-                <a:latin typeface="맑은 고딕"/>
-              </a:rPr>
-              <a:t>· [쓰기] 는 그 트랙의 작업번호를 새로 넣는다. 실물 화물이 있는데 시스템이 모르는 경우 작업번호를 인식시킬 때 쓴다.</a:t>
-            </a:r>
-            <a:r>
-              <a:rPr lang="ko-KR" altLang="en-US" sz="1000" b="0" dirty="0">
-                <a:solidFill>
-                  <a:srgbClr val="595959"/>
-                </a:solidFill>
-                <a:latin typeface="맑은 고딕"/>
-              </a:rPr>
-              <a:t/>
-            </a:r>
-            <a:r>
-              <a:rPr sz="1000" b="0" dirty="0">
-                <a:solidFill>
-                  <a:srgbClr val="595959"/>
-                </a:solidFill>
-                <a:latin typeface="맑은 고딕"/>
-              </a:rPr>
-              <a:t/>
-            </a:r>
-            <a:r>
-              <a:rPr sz="1000" b="0" dirty="0" err="1">
-                <a:solidFill>
-                  <a:srgbClr val="595959"/>
-                </a:solidFill>
-                <a:latin typeface="맑은 고딕"/>
-              </a:rPr>
-              <a:t/>
-            </a:r>
-            <a:r>
-              <a:rPr sz="1000" b="0" dirty="0">
-                <a:solidFill>
-                  <a:srgbClr val="595959"/>
-                </a:solidFill>
-                <a:latin typeface="맑은 고딕"/>
-              </a:rPr>
-              <a:t/>
-            </a:r>
-            <a:r>
-              <a:rPr sz="1000" b="0" dirty="0" err="1">
-                <a:solidFill>
-                  <a:srgbClr val="595959"/>
-                </a:solidFill>
-                <a:latin typeface="맑은 고딕"/>
-              </a:rPr>
-              <a:t/>
-            </a:r>
-            <a:r>
-              <a:rPr sz="1000" b="0" dirty="0">
-                <a:solidFill>
-                  <a:srgbClr val="595959"/>
-                </a:solidFill>
-                <a:latin typeface="맑은 고딕"/>
-              </a:rPr>
-              <a:t/>
-            </a:r>
-            <a:r>
-              <a:rPr sz="1000" b="0" dirty="0" err="1">
-                <a:solidFill>
-                  <a:srgbClr val="595959"/>
-                </a:solidFill>
-                <a:latin typeface="맑은 고딕"/>
-              </a:rPr>
-              <a:t/>
-            </a:r>
-            <a:r>
-              <a:rPr sz="1000" b="0" dirty="0">
-                <a:solidFill>
-                  <a:srgbClr val="595959"/>
-                </a:solidFill>
-                <a:latin typeface="맑은 고딕"/>
-              </a:rPr>
-              <a:t/>
-            </a:r>
-            <a:r>
-              <a:rPr sz="1000" b="0" dirty="0" err="1">
-                <a:solidFill>
-                  <a:srgbClr val="595959"/>
-                </a:solidFill>
-                <a:latin typeface="맑은 고딕"/>
-              </a:rPr>
-              <a:t/>
-            </a:r>
-            <a:r>
-              <a:rPr sz="1000" b="0" dirty="0">
-                <a:solidFill>
-                  <a:srgbClr val="595959"/>
-                </a:solidFill>
-                <a:latin typeface="맑은 고딕"/>
-              </a:rPr>
-              <a:t/>
-            </a:r>
-            <a:r>
-              <a:rPr sz="1000" b="0" dirty="0" err="1">
-                <a:solidFill>
-                  <a:srgbClr val="595959"/>
-                </a:solidFill>
-                <a:latin typeface="맑은 고딕"/>
-              </a:rPr>
-              <a:t/>
-            </a:r>
-            <a:r>
-              <a:rPr sz="1000" b="0" dirty="0">
-                <a:solidFill>
-                  <a:srgbClr val="595959"/>
-                </a:solidFill>
-                <a:latin typeface="맑은 고딕"/>
-              </a:rPr>
-              <a:t/>
-            </a:r>
-            <a:r>
-              <a:rPr sz="1000" b="0" dirty="0" err="1">
-                <a:solidFill>
-                  <a:srgbClr val="595959"/>
-                </a:solidFill>
-                <a:latin typeface="맑은 고딕"/>
-              </a:rPr>
-              <a:t/>
-            </a:r>
-            <a:r>
-              <a:rPr sz="1000" b="0" dirty="0">
-                <a:solidFill>
-                  <a:srgbClr val="595959"/>
-                </a:solidFill>
-                <a:latin typeface="맑은 고딕"/>
-              </a:rPr>
-              <a:t/>
-            </a:r>
-            <a:r>
-              <a:rPr sz="1000" b="0" dirty="0" err="1">
-                <a:solidFill>
-                  <a:srgbClr val="595959"/>
-                </a:solidFill>
-                <a:latin typeface="맑은 고딕"/>
-              </a:rPr>
-              <a:t/>
-            </a:r>
-            <a:r>
-              <a:rPr sz="1000" b="0" dirty="0">
-                <a:solidFill>
-                  <a:srgbClr val="595959"/>
-                </a:solidFill>
-                <a:latin typeface="맑은 고딕"/>
-              </a:rPr>
-              <a:t/>
-            </a:r>
-            <a:r>
-              <a:rPr sz="1000" b="0" dirty="0" err="1">
-                <a:solidFill>
-                  <a:srgbClr val="595959"/>
-                </a:solidFill>
-                <a:latin typeface="맑은 고딕"/>
-              </a:rPr>
-              <a:t/>
-            </a:r>
-            <a:r>
-              <a:rPr sz="1000" b="0" dirty="0">
-                <a:solidFill>
-                  <a:srgbClr val="595959"/>
-                </a:solidFill>
-                <a:latin typeface="맑은 고딕"/>
-              </a:rPr>
-              <a:t/>
-            </a:r>
-            <a:r>
-              <a:rPr sz="1000" b="0" dirty="0" err="1">
-                <a:solidFill>
-                  <a:srgbClr val="595959"/>
-                </a:solidFill>
-                <a:latin typeface="맑은 고딕"/>
-              </a:rPr>
-              <a:t/>
-            </a:r>
-            <a:r>
-              <a:rPr sz="1000" b="0" dirty="0">
-                <a:solidFill>
-                  <a:srgbClr val="595959"/>
-                </a:solidFill>
-                <a:latin typeface="맑은 고딕"/>
-              </a:rPr>
-              <a:t/>
-            </a:r>
-            <a:r>
-              <a:rPr sz="1000" b="0" dirty="0" err="1">
-                <a:solidFill>
-                  <a:srgbClr val="595959"/>
-                </a:solidFill>
-                <a:latin typeface="맑은 고딕"/>
-              </a:rPr>
-              <a:t/>
-            </a:r>
-            <a:r>
-              <a:rPr sz="1000" b="0" dirty="0">
-                <a:solidFill>
-                  <a:srgbClr val="595959"/>
-                </a:solidFill>
-                <a:latin typeface="맑은 고딕"/>
-              </a:rPr>
-              <a:t/>
-            </a:r>
-            <a:r>
-              <a:rPr sz="1000" b="0" dirty="0" err="1">
-                <a:solidFill>
-                  <a:srgbClr val="595959"/>
-                </a:solidFill>
-                <a:latin typeface="맑은 고딕"/>
-              </a:rPr>
-              <a:t/>
-            </a:r>
-            <a:r>
-              <a:rPr sz="1000" b="0" dirty="0">
-                <a:solidFill>
-                  <a:srgbClr val="595959"/>
-                </a:solidFill>
-                <a:latin typeface="맑은 고딕"/>
-              </a:rPr>
-              <a:t/>
-            </a:r>
-            <a:r>
-              <a:rPr sz="1000" b="0" dirty="0" err="1">
-                <a:solidFill>
-                  <a:srgbClr val="595959"/>
-                </a:solidFill>
-                <a:latin typeface="맑은 고딕"/>
-              </a:rPr>
-              <a:t/>
-            </a:r>
-            <a:r>
-              <a:rPr sz="1000" b="0" dirty="0">
-                <a:solidFill>
-                  <a:srgbClr val="595959"/>
-                </a:solidFill>
-                <a:latin typeface="맑은 고딕"/>
-              </a:rPr>
-              <a:t/>
-            </a:r>
-            <a:r>
-              <a:rPr sz="1000" b="0" dirty="0" err="1">
-                <a:solidFill>
-                  <a:srgbClr val="595959"/>
-                </a:solidFill>
-                <a:latin typeface="맑은 고딕"/>
-              </a:rPr>
-              <a:t/>
-            </a:r>
-            <a:r>
-              <a:rPr sz="1000" b="0" dirty="0">
-                <a:solidFill>
-                  <a:srgbClr val="595959"/>
-                </a:solidFill>
-                <a:latin typeface="맑은 고딕"/>
-              </a:rPr>
-              <a:t/>
-            </a:r>
-            <a:r>
-              <a:rPr sz="1000" b="0" dirty="0" err="1">
-                <a:solidFill>
-                  <a:srgbClr val="595959"/>
-                </a:solidFill>
-                <a:latin typeface="맑은 고딕"/>
-              </a:rPr>
-              <a:t/>
-            </a:r>
-            <a:r>
-              <a:rPr sz="1000" b="0" dirty="0">
-                <a:solidFill>
-                  <a:srgbClr val="595959"/>
-                </a:solidFill>
-                <a:latin typeface="맑은 고딕"/>
-              </a:rPr>
-              <a:t/>
-            </a:r>
-            <a:r>
-              <a:rPr sz="1000" b="0" dirty="0" err="1">
-                <a:solidFill>
-                  <a:srgbClr val="595959"/>
-                </a:solidFill>
-                <a:latin typeface="맑은 고딕"/>
-              </a:rPr>
-              <a:t/>
-            </a:r>
-            <a:r>
-              <a:rPr sz="1000" b="0" dirty="0">
-                <a:solidFill>
-                  <a:srgbClr val="595959"/>
-                </a:solidFill>
-                <a:latin typeface="맑은 고딕"/>
-              </a:rPr>
-              <a:t/>
-            </a:r>
-            <a:r>
-              <a:rPr sz="1000" b="0" dirty="0" err="1">
-                <a:solidFill>
-                  <a:srgbClr val="595959"/>
-                </a:solidFill>
-                <a:latin typeface="맑은 고딕"/>
-              </a:rPr>
-              <a:t/>
-            </a:r>
-            <a:r>
-              <a:rPr sz="1000" b="0" dirty="0">
-                <a:solidFill>
-                  <a:srgbClr val="595959"/>
-                </a:solidFill>
-                <a:latin typeface="맑은 고딕"/>
-              </a:rPr>
-              <a:t/>
-            </a:r>
-            <a:r>
-              <a:rPr sz="1000" b="0" dirty="0" err="1">
-                <a:solidFill>
-                  <a:srgbClr val="595959"/>
-                </a:solidFill>
-                <a:latin typeface="맑은 고딕"/>
-              </a:rPr>
-              <a:t/>
-            </a:r>
-            <a:r>
-              <a:rPr sz="1000" b="0" dirty="0">
-                <a:solidFill>
-                  <a:srgbClr val="595959"/>
-                </a:solidFill>
-                <a:latin typeface="맑은 고딕"/>
-              </a:rPr>
-              <a:t/>
-            </a:r>
-          </a:p>
-          <a:p>
-            <a:pPr algn="l"/>
-            <a:r>
-              <a:rPr sz="1000" b="0" dirty="0">
-                <a:solidFill>
-                  <a:srgbClr val="595959"/>
-                </a:solidFill>
-                <a:latin typeface="맑은 고딕"/>
-              </a:rPr>
-              <a:t>· </a:t>
-            </a:r>
-            <a:r>
-              <a:rPr sz="1000" b="0" dirty="0" err="1">
-                <a:solidFill>
-                  <a:srgbClr val="595959"/>
-                </a:solidFill>
-                <a:latin typeface="맑은 고딕"/>
-              </a:rPr>
-              <a:t>예외</a:t>
-            </a:r>
-            <a:r>
-              <a:rPr sz="1000" b="0" dirty="0">
-                <a:solidFill>
-                  <a:srgbClr val="595959"/>
-                </a:solidFill>
-                <a:latin typeface="맑은 고딕"/>
-              </a:rPr>
-              <a:t> </a:t>
-            </a:r>
-            <a:r>
-              <a:rPr sz="1000" b="0" dirty="0" err="1">
-                <a:solidFill>
-                  <a:srgbClr val="595959"/>
-                </a:solidFill>
-                <a:latin typeface="맑은 고딕"/>
-              </a:rPr>
-              <a:t>처리</a:t>
-            </a:r>
-            <a:r>
-              <a:rPr sz="1000" b="0" dirty="0">
-                <a:solidFill>
-                  <a:srgbClr val="595959"/>
-                </a:solidFill>
-                <a:latin typeface="맑은 고딕"/>
-              </a:rPr>
-              <a:t> </a:t>
-            </a:r>
-            <a:r>
-              <a:rPr sz="1000" b="0" dirty="0" err="1">
-                <a:solidFill>
-                  <a:srgbClr val="595959"/>
-                </a:solidFill>
-                <a:latin typeface="맑은 고딕"/>
-              </a:rPr>
-              <a:t>그룹의</a:t>
-            </a:r>
-            <a:r>
-              <a:rPr sz="1000" b="0" dirty="0">
-                <a:solidFill>
-                  <a:srgbClr val="595959"/>
-                </a:solidFill>
-                <a:latin typeface="맑은 고딕"/>
-              </a:rPr>
-              <a:t> [H/S </a:t>
-            </a:r>
-            <a:r>
-              <a:rPr sz="1000" b="0" dirty="0" err="1">
-                <a:solidFill>
-                  <a:srgbClr val="595959"/>
-                </a:solidFill>
-                <a:latin typeface="맑은 고딕"/>
-              </a:rPr>
-              <a:t>배출</a:t>
-            </a:r>
-            <a:r>
-              <a:rPr sz="1000" b="0" dirty="0">
-                <a:solidFill>
-                  <a:srgbClr val="595959"/>
-                </a:solidFill>
-                <a:latin typeface="맑은 고딕"/>
-              </a:rPr>
-              <a:t>] 은 </a:t>
-            </a:r>
-            <a:r>
-              <a:rPr sz="1000" b="0" dirty="0" err="1">
-                <a:solidFill>
-                  <a:srgbClr val="595959"/>
-                </a:solidFill>
-                <a:latin typeface="맑은 고딕"/>
-              </a:rPr>
-              <a:t>출고</a:t>
-            </a:r>
-            <a:r>
-              <a:rPr sz="1000" b="0" dirty="0">
-                <a:solidFill>
-                  <a:srgbClr val="595959"/>
-                </a:solidFill>
-                <a:latin typeface="맑은 고딕"/>
-              </a:rPr>
-              <a:t> H/S 에 </a:t>
-            </a:r>
-            <a:r>
-              <a:rPr sz="1000" b="0" dirty="0" err="1">
-                <a:solidFill>
-                  <a:srgbClr val="595959"/>
-                </a:solidFill>
-                <a:latin typeface="맑은 고딕"/>
-              </a:rPr>
-              <a:t>놓인</a:t>
-            </a:r>
-            <a:r>
-              <a:rPr sz="1000" b="0" dirty="0">
-                <a:solidFill>
-                  <a:srgbClr val="595959"/>
-                </a:solidFill>
-                <a:latin typeface="맑은 고딕"/>
-              </a:rPr>
-              <a:t> </a:t>
-            </a:r>
-            <a:r>
-              <a:rPr sz="1000" b="0" dirty="0" err="1">
-                <a:solidFill>
-                  <a:srgbClr val="595959"/>
-                </a:solidFill>
-                <a:latin typeface="맑은 고딕"/>
-              </a:rPr>
-              <a:t>작업</a:t>
-            </a:r>
-            <a:r>
-              <a:rPr sz="1000" b="0" dirty="0">
-                <a:solidFill>
-                  <a:srgbClr val="595959"/>
-                </a:solidFill>
-                <a:latin typeface="맑은 고딕"/>
-              </a:rPr>
-              <a:t> </a:t>
-            </a:r>
-            <a:r>
-              <a:rPr sz="1000" b="0" dirty="0" err="1">
-                <a:solidFill>
-                  <a:srgbClr val="595959"/>
-                </a:solidFill>
-                <a:latin typeface="맑은 고딕"/>
-              </a:rPr>
-              <a:t>없는</a:t>
-            </a:r>
-            <a:r>
-              <a:rPr sz="1000" b="0" dirty="0">
-                <a:solidFill>
-                  <a:srgbClr val="595959"/>
-                </a:solidFill>
-                <a:latin typeface="맑은 고딕"/>
-              </a:rPr>
-              <a:t> </a:t>
-            </a:r>
-            <a:r>
-              <a:rPr sz="1000" b="0" dirty="0" err="1">
-                <a:solidFill>
-                  <a:srgbClr val="595959"/>
-                </a:solidFill>
-                <a:latin typeface="맑은 고딕"/>
-              </a:rPr>
-              <a:t>화물을</a:t>
-            </a:r>
-            <a:r>
-              <a:rPr sz="1000" b="0" dirty="0">
-                <a:solidFill>
-                  <a:srgbClr val="595959"/>
-                </a:solidFill>
-                <a:latin typeface="맑은 고딕"/>
-              </a:rPr>
-              <a:t> </a:t>
-            </a:r>
-            <a:r>
-              <a:rPr sz="1000" b="0" dirty="0" err="1">
-                <a:solidFill>
-                  <a:srgbClr val="595959"/>
-                </a:solidFill>
-                <a:latin typeface="맑은 고딕"/>
-              </a:rPr>
-              <a:t>출고대로</a:t>
-            </a:r>
-            <a:r>
-              <a:rPr sz="1000" b="0" dirty="0">
-                <a:solidFill>
-                  <a:srgbClr val="595959"/>
-                </a:solidFill>
-                <a:latin typeface="맑은 고딕"/>
-              </a:rPr>
-              <a:t> </a:t>
-            </a:r>
-            <a:r>
-              <a:rPr sz="1000" b="0" dirty="0" err="1">
-                <a:solidFill>
-                  <a:srgbClr val="595959"/>
-                </a:solidFill>
-                <a:latin typeface="맑은 고딕"/>
-              </a:rPr>
-              <a:t>내보낸다</a:t>
-            </a:r>
-            <a:r>
-              <a:rPr sz="1000" b="0" dirty="0">
-                <a:solidFill>
-                  <a:srgbClr val="595959"/>
-                </a:solidFill>
-                <a:latin typeface="맑은 고딕"/>
-              </a:rPr>
-              <a:t>. </a:t>
-            </a:r>
-            <a:r>
-              <a:rPr sz="1000" b="0" dirty="0" err="1">
-                <a:solidFill>
-                  <a:srgbClr val="595959"/>
-                </a:solidFill>
-                <a:latin typeface="맑은 고딕"/>
-              </a:rPr>
-              <a:t>비상</a:t>
-            </a:r>
-            <a:r>
-              <a:rPr sz="1000" b="0" dirty="0">
-                <a:solidFill>
-                  <a:srgbClr val="595959"/>
-                </a:solidFill>
-                <a:latin typeface="맑은 고딕"/>
-              </a:rPr>
-              <a:t> </a:t>
-            </a:r>
-            <a:r>
-              <a:rPr sz="1000" b="0" dirty="0" err="1">
-                <a:solidFill>
-                  <a:srgbClr val="595959"/>
-                </a:solidFill>
-                <a:latin typeface="맑은 고딕"/>
-              </a:rPr>
-              <a:t>확인창이</a:t>
-            </a:r>
-            <a:r>
-              <a:rPr sz="1000" b="0" dirty="0">
-                <a:solidFill>
-                  <a:srgbClr val="595959"/>
-                </a:solidFill>
-                <a:latin typeface="맑은 고딕"/>
-              </a:rPr>
-              <a:t> </a:t>
-            </a:r>
-            <a:r>
-              <a:rPr sz="1000" b="0" dirty="0" err="1">
-                <a:solidFill>
-                  <a:srgbClr val="595959"/>
-                </a:solidFill>
-                <a:latin typeface="맑은 고딕"/>
-              </a:rPr>
-              <a:t>뜨며</a:t>
-            </a:r>
-            <a:r>
-              <a:rPr sz="1000" b="0" dirty="0">
-                <a:solidFill>
-                  <a:srgbClr val="595959"/>
-                </a:solidFill>
-                <a:latin typeface="맑은 고딕"/>
-              </a:rPr>
-              <a:t>, </a:t>
-            </a:r>
-            <a:r>
-              <a:rPr sz="1000" b="0" dirty="0" err="1">
-                <a:solidFill>
-                  <a:srgbClr val="595959"/>
-                </a:solidFill>
-                <a:latin typeface="맑은 고딕"/>
-              </a:rPr>
-              <a:t>반자동</a:t>
-            </a:r>
-            <a:r>
-              <a:rPr sz="1000" b="0" dirty="0">
-                <a:solidFill>
-                  <a:srgbClr val="595959"/>
-                </a:solidFill>
-                <a:latin typeface="맑은 고딕"/>
-              </a:rPr>
-              <a:t> </a:t>
-            </a:r>
-            <a:r>
-              <a:rPr sz="1000" b="0" dirty="0" err="1">
-                <a:solidFill>
-                  <a:srgbClr val="595959"/>
-                </a:solidFill>
-                <a:latin typeface="맑은 고딕"/>
-              </a:rPr>
-              <a:t>출고</a:t>
-            </a:r>
-            <a:r>
-              <a:rPr sz="1000" b="0" dirty="0">
-                <a:solidFill>
-                  <a:srgbClr val="595959"/>
-                </a:solidFill>
-                <a:latin typeface="맑은 고딕"/>
-              </a:rPr>
-              <a:t> </a:t>
-            </a:r>
-            <a:r>
-              <a:rPr sz="1000" b="0" dirty="0" err="1">
-                <a:solidFill>
-                  <a:srgbClr val="595959"/>
-                </a:solidFill>
-                <a:latin typeface="맑은 고딕"/>
-              </a:rPr>
-              <a:t>작업을</a:t>
-            </a:r>
-            <a:r>
-              <a:rPr sz="1000" b="0" dirty="0">
-                <a:solidFill>
-                  <a:srgbClr val="595959"/>
-                </a:solidFill>
-                <a:latin typeface="맑은 고딕"/>
-              </a:rPr>
-              <a:t> </a:t>
-            </a:r>
-            <a:r>
-              <a:rPr sz="1000" b="0" dirty="0" err="1">
-                <a:solidFill>
-                  <a:srgbClr val="595959"/>
-                </a:solidFill>
-                <a:latin typeface="맑은 고딕"/>
-              </a:rPr>
-              <a:t>만들어</a:t>
-            </a:r>
-            <a:r>
-              <a:rPr sz="1000" b="0" dirty="0">
-                <a:solidFill>
-                  <a:srgbClr val="595959"/>
-                </a:solidFill>
-                <a:latin typeface="맑은 고딕"/>
-              </a:rPr>
-              <a:t> </a:t>
-            </a:r>
-            <a:r>
-              <a:rPr sz="1000" b="0" dirty="0" err="1">
-                <a:solidFill>
-                  <a:srgbClr val="595959"/>
-                </a:solidFill>
-                <a:latin typeface="맑은 고딕"/>
-              </a:rPr>
-              <a:t>상위</a:t>
-            </a:r>
-            <a:r>
-              <a:rPr sz="1000" b="0" dirty="0">
-                <a:solidFill>
-                  <a:srgbClr val="595959"/>
-                </a:solidFill>
-                <a:latin typeface="맑은 고딕"/>
-              </a:rPr>
-              <a:t> </a:t>
-            </a:r>
-            <a:r>
-              <a:rPr sz="1000" b="0" dirty="0" err="1">
-                <a:solidFill>
-                  <a:srgbClr val="595959"/>
-                </a:solidFill>
-                <a:latin typeface="맑은 고딕"/>
-              </a:rPr>
-              <a:t>보고</a:t>
-            </a:r>
-            <a:r>
-              <a:rPr sz="1000" b="0" dirty="0">
-                <a:solidFill>
-                  <a:srgbClr val="595959"/>
-                </a:solidFill>
-                <a:latin typeface="맑은 고딕"/>
-              </a:rPr>
-              <a:t> </a:t>
-            </a:r>
-            <a:r>
-              <a:rPr sz="1000" b="0" dirty="0" err="1">
-                <a:solidFill>
-                  <a:srgbClr val="595959"/>
-                </a:solidFill>
-                <a:latin typeface="맑은 고딕"/>
-              </a:rPr>
-              <a:t>없이</a:t>
-            </a:r>
-            <a:r>
-              <a:rPr sz="1000" b="0" dirty="0">
-                <a:solidFill>
-                  <a:srgbClr val="595959"/>
-                </a:solidFill>
-                <a:latin typeface="맑은 고딕"/>
-              </a:rPr>
-              <a:t> </a:t>
-            </a:r>
-            <a:r>
-              <a:rPr sz="1000" b="0" dirty="0" err="1">
-                <a:solidFill>
-                  <a:srgbClr val="595959"/>
-                </a:solidFill>
-                <a:latin typeface="맑은 고딕"/>
-              </a:rPr>
-              <a:t>처리한다</a:t>
-            </a:r>
-            <a:r>
-              <a:rPr sz="1000" b="0" dirty="0">
-                <a:solidFill>
-                  <a:srgbClr val="595959"/>
-                </a:solidFill>
-                <a:latin typeface="맑은 고딕"/>
-              </a:rPr>
-              <a:t>(</a:t>
-            </a:r>
-            <a:r>
-              <a:rPr sz="1000" b="0" dirty="0" err="1">
-                <a:solidFill>
-                  <a:srgbClr val="595959"/>
-                </a:solidFill>
-                <a:latin typeface="맑은 고딕"/>
-              </a:rPr>
-              <a:t>아래</a:t>
-            </a:r>
-            <a:r>
-              <a:rPr sz="1000" b="0" dirty="0">
-                <a:solidFill>
-                  <a:srgbClr val="595959"/>
-                </a:solidFill>
-                <a:latin typeface="맑은 고딕"/>
-              </a:rPr>
-              <a:t> </a:t>
-            </a:r>
-            <a:r>
-              <a:rPr sz="1000" b="0" dirty="0" err="1">
-                <a:solidFill>
-                  <a:srgbClr val="595959"/>
-                </a:solidFill>
-                <a:latin typeface="맑은 고딕"/>
-              </a:rPr>
-              <a:t>예외</a:t>
-            </a:r>
-            <a:r>
-              <a:rPr sz="1000" b="0" dirty="0">
-                <a:solidFill>
-                  <a:srgbClr val="595959"/>
-                </a:solidFill>
-                <a:latin typeface="맑은 고딕"/>
-              </a:rPr>
-              <a:t> </a:t>
-            </a:r>
-            <a:r>
-              <a:rPr sz="1000" b="0" dirty="0" err="1">
-                <a:solidFill>
-                  <a:srgbClr val="595959"/>
-                </a:solidFill>
-                <a:latin typeface="맑은 고딕"/>
-              </a:rPr>
-              <a:t>처리</a:t>
-            </a:r>
-            <a:r>
-              <a:rPr sz="1000" b="0" dirty="0">
-                <a:solidFill>
-                  <a:srgbClr val="595959"/>
-                </a:solidFill>
-                <a:latin typeface="맑은 고딕"/>
-              </a:rPr>
-              <a:t> </a:t>
-            </a:r>
-            <a:r>
-              <a:rPr sz="1000" b="0" dirty="0" err="1">
-                <a:solidFill>
-                  <a:srgbClr val="595959"/>
-                </a:solidFill>
-                <a:latin typeface="맑은 고딕"/>
-              </a:rPr>
-              <a:t>참조</a:t>
-            </a:r>
-            <a:r>
-              <a:rPr sz="1000" b="0" dirty="0">
-                <a:solidFill>
-                  <a:srgbClr val="595959"/>
-                </a:solidFill>
-                <a:latin typeface="맑은 고딕"/>
-              </a:rPr>
-              <a:t>).</a:t>
-            </a:r>
-          </a:p>
-          <a:p>
-            <a:pPr algn="l"/>
-            <a:r>
-              <a:rPr sz="1000" b="0" dirty="0">
-                <a:solidFill>
-                  <a:srgbClr val="595959"/>
-                </a:solidFill>
-                <a:latin typeface="맑은 고딕"/>
-              </a:rPr>
-              <a:t>· 도착지·작업구분 입력란은 2026-09-10 에 뺐다. 이 현장은 컨베이어에 도착지·작업구분을 내려보내지 않는다 - PLC 로 나가는 것은 방향(D300+N-1)과 작업번호 트래킹(R영역)뿐이고, 구 트랙테이블 방식의 D(트랙×10) 지시 쓰기는 확정 주소와 충돌해 2026-09-02 부터 차단돼 있다.</a:t>
-            </a:r>
-            <a:r>
-              <a:rPr sz="1000" b="0" dirty="0" err="1">
-                <a:solidFill>
-                  <a:srgbClr val="595959"/>
-                </a:solidFill>
-                <a:latin typeface="맑은 고딕"/>
-              </a:rPr>
-              <a:t/>
-            </a:r>
-            <a:r>
-              <a:rPr sz="1000" b="0" dirty="0">
-                <a:solidFill>
-                  <a:srgbClr val="595959"/>
-                </a:solidFill>
-                <a:latin typeface="맑은 고딕"/>
-              </a:rPr>
-              <a:t/>
-            </a:r>
-            <a:r>
-              <a:rPr sz="1000" b="0" dirty="0" err="1">
-                <a:solidFill>
-                  <a:srgbClr val="595959"/>
-                </a:solidFill>
-                <a:latin typeface="맑은 고딕"/>
-              </a:rPr>
-              <a:t/>
-            </a:r>
-            <a:r>
-              <a:rPr sz="1000" b="0" dirty="0">
-                <a:solidFill>
-                  <a:srgbClr val="595959"/>
-                </a:solidFill>
-                <a:latin typeface="맑은 고딕"/>
-              </a:rPr>
-              <a:t/>
-            </a:r>
-            <a:r>
-              <a:rPr sz="1000" b="0" dirty="0" err="1">
-                <a:solidFill>
-                  <a:srgbClr val="595959"/>
-                </a:solidFill>
-                <a:latin typeface="맑은 고딕"/>
-              </a:rPr>
-              <a:t/>
-            </a:r>
-            <a:r>
-              <a:rPr sz="1000" b="0" dirty="0">
-                <a:solidFill>
-                  <a:srgbClr val="595959"/>
-                </a:solidFill>
-                <a:latin typeface="맑은 고딕"/>
-              </a:rPr>
-              <a:t/>
-            </a:r>
-            <a:r>
-              <a:rPr sz="1000" b="0" dirty="0" err="1">
-                <a:solidFill>
-                  <a:srgbClr val="595959"/>
-                </a:solidFill>
-                <a:latin typeface="맑은 고딕"/>
-              </a:rPr>
-              <a:t/>
-            </a:r>
-            <a:r>
-              <a:rPr sz="1000" b="0" dirty="0">
-                <a:solidFill>
-                  <a:srgbClr val="595959"/>
-                </a:solidFill>
-                <a:latin typeface="맑은 고딕"/>
-              </a:rPr>
-              <a:t/>
-            </a:r>
-            <a:r>
-              <a:rPr sz="1000" b="0" dirty="0" err="1">
-                <a:solidFill>
-                  <a:srgbClr val="595959"/>
-                </a:solidFill>
-                <a:latin typeface="맑은 고딕"/>
-              </a:rPr>
-              <a:t/>
-            </a:r>
-            <a:r>
-              <a:rPr sz="1000" b="0" dirty="0">
-                <a:solidFill>
-                  <a:srgbClr val="595959"/>
-                </a:solidFill>
-                <a:latin typeface="맑은 고딕"/>
-              </a:rPr>
-              <a:t/>
-            </a:r>
-            <a:r>
-              <a:rPr sz="1000" b="0" dirty="0" err="1">
-                <a:solidFill>
-                  <a:srgbClr val="595959"/>
-                </a:solidFill>
-                <a:latin typeface="맑은 고딕"/>
-              </a:rPr>
-              <a:t/>
-            </a:r>
-            <a:r>
-              <a:rPr sz="1000" b="0" dirty="0">
-                <a:solidFill>
-                  <a:srgbClr val="595959"/>
-                </a:solidFill>
-                <a:latin typeface="맑은 고딕"/>
-              </a:rPr>
-              <a:t/>
-            </a:r>
-            <a:r>
-              <a:rPr sz="1000" b="0" dirty="0" err="1">
-                <a:solidFill>
-                  <a:srgbClr val="595959"/>
-                </a:solidFill>
-                <a:latin typeface="맑은 고딕"/>
-              </a:rPr>
-              <a:t/>
-            </a:r>
-            <a:r>
-              <a:rPr sz="1000" b="0" dirty="0">
-                <a:solidFill>
-                  <a:srgbClr val="595959"/>
-                </a:solidFill>
-                <a:latin typeface="맑은 고딕"/>
-              </a:rPr>
-              <a:t/>
-            </a:r>
-            <a:r>
-              <a:rPr sz="1000" b="0" dirty="0" err="1">
-                <a:solidFill>
-                  <a:srgbClr val="595959"/>
-                </a:solidFill>
-                <a:latin typeface="맑은 고딕"/>
-              </a:rPr>
-              <a:t/>
-            </a:r>
-            <a:r>
-              <a:rPr sz="1000" b="0" dirty="0">
-                <a:solidFill>
-                  <a:srgbClr val="595959"/>
-                </a:solidFill>
-                <a:latin typeface="맑은 고딕"/>
-              </a:rPr>
-              <a:t/>
-            </a:r>
-            <a:r>
-              <a:rPr sz="1000" b="0" dirty="0" err="1">
-                <a:solidFill>
-                  <a:srgbClr val="595959"/>
-                </a:solidFill>
-                <a:latin typeface="맑은 고딕"/>
-              </a:rPr>
-              <a:t/>
-            </a:r>
-            <a:r>
-              <a:rPr sz="1000" b="0" dirty="0">
-                <a:solidFill>
-                  <a:srgbClr val="595959"/>
-                </a:solidFill>
-                <a:latin typeface="맑은 고딕"/>
-              </a:rPr>
-              <a:t/>
-            </a:r>
-            <a:r>
-              <a:rPr sz="1000" b="0" dirty="0" err="1">
-                <a:solidFill>
-                  <a:srgbClr val="595959"/>
-                </a:solidFill>
-                <a:latin typeface="맑은 고딕"/>
-              </a:rPr>
-              <a:t/>
-            </a:r>
-            <a:r>
-              <a:rPr sz="1000" b="0" dirty="0">
-                <a:solidFill>
-                  <a:srgbClr val="595959"/>
-                </a:solidFill>
-                <a:latin typeface="맑은 고딕"/>
-              </a:rPr>
-              <a:t/>
-            </a:r>
-            <a:r>
-              <a:rPr sz="1000" b="0" dirty="0" err="1">
-                <a:solidFill>
-                  <a:srgbClr val="595959"/>
-                </a:solidFill>
-                <a:latin typeface="맑은 고딕"/>
-              </a:rPr>
-              <a:t/>
-            </a:r>
-            <a:r>
-              <a:rPr sz="1000" b="0" dirty="0">
-                <a:solidFill>
-                  <a:srgbClr val="595959"/>
-                </a:solidFill>
-                <a:latin typeface="맑은 고딕"/>
-              </a:rPr>
-              <a:t/>
-            </a:r>
-            <a:r>
-              <a:rPr sz="1000" b="0" dirty="0" err="1">
-                <a:solidFill>
-                  <a:srgbClr val="595959"/>
-                </a:solidFill>
-                <a:latin typeface="맑은 고딕"/>
-              </a:rPr>
-              <a:t/>
-            </a:r>
-            <a:r>
-              <a:rPr sz="1000" b="0" dirty="0">
-                <a:solidFill>
-                  <a:srgbClr val="595959"/>
-                </a:solidFill>
-                <a:latin typeface="맑은 고딕"/>
-              </a:rPr>
-              <a:t/>
-            </a:r>
-            <a:r>
-              <a:rPr sz="1000" b="0" dirty="0" err="1">
-                <a:solidFill>
-                  <a:srgbClr val="595959"/>
-                </a:solidFill>
-                <a:latin typeface="맑은 고딕"/>
-              </a:rPr>
-              <a:t/>
-            </a:r>
-            <a:r>
-              <a:rPr sz="1000" b="0" dirty="0">
-                <a:solidFill>
-                  <a:srgbClr val="595959"/>
-                </a:solidFill>
-                <a:latin typeface="맑은 고딕"/>
-              </a:rPr>
-              <a:t/>
-            </a:r>
-            <a:r>
-              <a:rPr sz="1000" b="0" dirty="0" err="1">
-                <a:solidFill>
-                  <a:srgbClr val="595959"/>
-                </a:solidFill>
-                <a:latin typeface="맑은 고딕"/>
-              </a:rPr>
-              <a:t/>
-            </a:r>
-            <a:r>
-              <a:rPr sz="1000" b="0" dirty="0">
-                <a:solidFill>
-                  <a:srgbClr val="595959"/>
-                </a:solidFill>
-                <a:latin typeface="맑은 고딕"/>
-              </a:rPr>
-              <a:t/>
-            </a:r>
-            <a:r>
-              <a:rPr sz="1000" b="0" dirty="0" err="1">
-                <a:solidFill>
-                  <a:srgbClr val="595959"/>
-                </a:solidFill>
-                <a:latin typeface="맑은 고딕"/>
-              </a:rPr>
-              <a:t/>
-            </a:r>
-            <a:r>
-              <a:rPr sz="1000" b="0" dirty="0">
-                <a:solidFill>
-                  <a:srgbClr val="595959"/>
-                </a:solidFill>
-                <a:latin typeface="맑은 고딕"/>
-              </a:rPr>
-              <a:t/>
-            </a:r>
-            <a:r>
-              <a:rPr sz="1000" b="0" dirty="0" err="1">
-                <a:solidFill>
-                  <a:srgbClr val="595959"/>
-                </a:solidFill>
-                <a:latin typeface="맑은 고딕"/>
-              </a:rPr>
-              <a:t/>
-            </a:r>
-            <a:r>
-              <a:rPr sz="1000" b="0" dirty="0">
-                <a:solidFill>
-                  <a:srgbClr val="595959"/>
-                </a:solidFill>
-                <a:latin typeface="맑은 고딕"/>
-              </a:rPr>
-              <a:t/>
-            </a:r>
-            <a:r>
-              <a:rPr sz="1000" b="0" dirty="0" err="1">
-                <a:solidFill>
-                  <a:srgbClr val="595959"/>
-                </a:solidFill>
-                <a:latin typeface="맑은 고딕"/>
-              </a:rPr>
-              <a:t/>
-            </a:r>
-            <a:r>
-              <a:rPr sz="1000" b="0" dirty="0">
-                <a:solidFill>
-                  <a:srgbClr val="595959"/>
-                </a:solidFill>
-                <a:latin typeface="맑은 고딕"/>
-              </a:rPr>
-              <a:t/>
-            </a:r>
-            <a:r>
-              <a:rPr sz="1000" b="0" dirty="0" err="1">
-                <a:solidFill>
-                  <a:srgbClr val="595959"/>
-                </a:solidFill>
-                <a:latin typeface="맑은 고딕"/>
-              </a:rPr>
-              <a:t/>
-            </a:r>
-            <a:r>
-              <a:rPr sz="1000" b="0" dirty="0">
-                <a:solidFill>
-                  <a:srgbClr val="595959"/>
-                </a:solidFill>
-                <a:latin typeface="맑은 고딕"/>
-              </a:rPr>
-              <a:t/>
-            </a:r>
-            <a:r>
-              <a:rPr sz="1000" b="0" dirty="0" err="1">
-                <a:solidFill>
-                  <a:srgbClr val="595959"/>
-                </a:solidFill>
-                <a:latin typeface="맑은 고딕"/>
-              </a:rPr>
-              <a:t/>
-            </a:r>
-            <a:r>
-              <a:rPr sz="1000" b="0" dirty="0">
-                <a:solidFill>
-                  <a:srgbClr val="595959"/>
-                </a:solidFill>
-                <a:latin typeface="맑은 고딕"/>
-              </a:rPr>
-              <a:t/>
-            </a:r>
-            <a:r>
-              <a:rPr sz="1000" b="0" dirty="0" err="1">
-                <a:solidFill>
-                  <a:srgbClr val="595959"/>
-                </a:solidFill>
-                <a:latin typeface="맑은 고딕"/>
-              </a:rPr>
-              <a:t/>
-            </a:r>
-            <a:r>
-              <a:rPr sz="1000" b="0" dirty="0">
-                <a:solidFill>
-                  <a:srgbClr val="595959"/>
-                </a:solidFill>
-                <a:latin typeface="맑은 고딕"/>
-              </a:rPr>
-              <a:t/>
-            </a:r>
-            <a:r>
-              <a:rPr sz="1000" b="0" dirty="0" err="1">
-                <a:solidFill>
-                  <a:srgbClr val="595959"/>
-                </a:solidFill>
-                <a:latin typeface="맑은 고딕"/>
-              </a:rPr>
-              <a:t/>
-            </a:r>
-            <a:r>
-              <a:rPr sz="1000" b="0" dirty="0">
-                <a:solidFill>
-                  <a:srgbClr val="595959"/>
-                </a:solidFill>
-                <a:latin typeface="맑은 고딕"/>
-              </a:rPr>
-              <a:t/>
-            </a:r>
-            <a:r>
-              <a:rPr sz="1000" b="0" dirty="0" err="1">
-                <a:solidFill>
-                  <a:srgbClr val="595959"/>
-                </a:solidFill>
-                <a:latin typeface="맑은 고딕"/>
-              </a:rPr>
-              <a:t/>
-            </a:r>
-            <a:r>
-              <a:rPr sz="1000" b="0" dirty="0">
-                <a:solidFill>
-                  <a:srgbClr val="595959"/>
-                </a:solidFill>
-                <a:latin typeface="맑은 고딕"/>
-              </a:rPr>
-              <a:t/>
-            </a:r>
-            <a:r>
-              <a:rPr sz="1000" b="0" dirty="0" err="1">
-                <a:solidFill>
-                  <a:srgbClr val="595959"/>
-                </a:solidFill>
-                <a:latin typeface="맑은 고딕"/>
-              </a:rPr>
-              <a:t/>
-            </a:r>
-            <a:r>
-              <a:rPr sz="1000" b="0" dirty="0">
-                <a:solidFill>
-                  <a:srgbClr val="595959"/>
-                </a:solidFill>
-                <a:latin typeface="맑은 고딕"/>
-              </a:rPr>
-              <a:t/>
-            </a:r>
-            <a:r>
-              <a:rPr sz="1000" b="0" dirty="0" err="1">
-                <a:solidFill>
-                  <a:srgbClr val="595959"/>
-                </a:solidFill>
-                <a:latin typeface="맑은 고딕"/>
-              </a:rPr>
-              <a:t/>
-            </a:r>
-            <a:r>
-              <a:rPr sz="1000" b="0" dirty="0">
-                <a:solidFill>
-                  <a:srgbClr val="595959"/>
-                </a:solidFill>
-                <a:latin typeface="맑은 고딕"/>
-              </a:rPr>
-              <a:t/>
-            </a:r>
-            <a:r>
-              <a:rPr sz="1000" b="0" dirty="0" err="1">
-                <a:solidFill>
-                  <a:srgbClr val="595959"/>
-                </a:solidFill>
-                <a:latin typeface="맑은 고딕"/>
-              </a:rPr>
-              <a:t/>
-            </a:r>
-            <a:r>
-              <a:rPr sz="1000" b="0" dirty="0">
-                <a:solidFill>
-                  <a:srgbClr val="595959"/>
-                </a:solidFill>
-                <a:latin typeface="맑은 고딕"/>
-              </a:rPr>
-              <a:t/>
-            </a:r>
-            <a:r>
-              <a:rPr sz="1000" b="0" dirty="0" err="1">
-                <a:solidFill>
-                  <a:srgbClr val="595959"/>
-                </a:solidFill>
-                <a:latin typeface="맑은 고딕"/>
-              </a:rPr>
-              <a:t/>
-            </a:r>
-            <a:r>
-              <a:rPr sz="1000" b="0" dirty="0">
-                <a:solidFill>
-                  <a:srgbClr val="595959"/>
-                </a:solidFill>
-                <a:latin typeface="맑은 고딕"/>
-              </a:rPr>
-              <a:t/>
-            </a:r>
-          </a:p>
-        </p:txBody>
-      </p:sp>
-      <p:sp>
-        <p:nvSpPr>
-          <p:cNvPr id="6" name="TextBox 5"/>
-          <p:cNvSpPr txBox="1"/>
-          <p:nvPr/>
-        </p:nvSpPr>
-        <p:spPr>
-          <a:xfrm>
-            <a:off x="457200" y="6400800"/>
-            <a:ext cx="3657600" cy="320040"/>
-          </a:xfrm>
-          <a:prstGeom prst="rect">
-            <a:avLst/>
-          </a:prstGeom>
-          <a:noFill/>
-        </p:spPr>
-        <p:txBody>
-          <a:bodyPr wrap="square" lIns="45720" rIns="45720" anchor="t">
-            <a:spAutoFit/>
-          </a:bodyPr>
-          <a:lstStyle/>
-          <a:p>
-            <a:pPr algn="l"/>
-            <a:r>
-              <a:rPr sz="1000" b="0">
-                <a:solidFill>
-                  <a:srgbClr val="595959"/>
-                </a:solidFill>
-                <a:latin typeface="맑은 고딕"/>
-              </a:rPr>
-              <a:t>LG 화학 1동 ECS  |  화면설계서</a:t>
-            </a:r>
-          </a:p>
-        </p:txBody>
-      </p:sp>
-      <p:sp>
-        <p:nvSpPr>
-          <p:cNvPr id="7" name="TextBox 6"/>
-          <p:cNvSpPr txBox="1"/>
-          <p:nvPr/>
-        </p:nvSpPr>
-        <p:spPr>
-          <a:xfrm>
-            <a:off x="11155680" y="6400800"/>
-            <a:ext cx="731520" cy="320040"/>
-          </a:xfrm>
-          <a:prstGeom prst="rect">
-            <a:avLst/>
-          </a:prstGeom>
-          <a:noFill/>
-        </p:spPr>
-        <p:txBody>
-          <a:bodyPr wrap="square" lIns="45720" rIns="45720" anchor="t">
-            <a:spAutoFit/>
-          </a:bodyPr>
-          <a:lstStyle/>
-          <a:p>
-            <a:pPr algn="r"/>
-            <a:r>
-              <a:rPr sz="1000" b="0">
-                <a:solidFill>
-                  <a:srgbClr val="595959"/>
-                </a:solidFill>
-                <a:latin typeface="맑은 고딕"/>
-              </a:rPr>
-              <a:t>20</a:t>
-            </a:r>
-          </a:p>
-        </p:txBody>
-      </p:sp>
     </p:spTree>
   </p:cSld>
   <p:clrMapOvr>
@@ -8889,7 +8889,7 @@
             <a:r>
               <a:rPr sz="2600" b="1">
                 <a:solidFill>
-                  <a:srgbClr val="1E2761"/>
+                  <a:srgbClr val="000000"/>
                 </a:solidFill>
                 <a:latin typeface="맑은 고딕"/>
               </a:rPr>
@@ -8994,7 +8994,7 @@
             <a:r>
               <a:rPr sz="1300" b="1">
                 <a:solidFill>
-                  <a:srgbClr val="1E2761"/>
+                  <a:srgbClr val="000000"/>
                 </a:solidFill>
                 <a:latin typeface="맑은 고딕"/>
               </a:rPr>
@@ -9006,7 +9006,7 @@
             <a:r>
               <a:rPr sz="1100" b="0">
                 <a:solidFill>
-                  <a:srgbClr val="595959"/>
+                  <a:srgbClr val="000000"/>
                 </a:solidFill>
                 <a:latin typeface="맑은 고딕"/>
               </a:rPr>
@@ -9027,7 +9027,7 @@
             <a:r>
               <a:rPr sz="1300" b="1">
                 <a:solidFill>
-                  <a:srgbClr val="1E2761"/>
+                  <a:srgbClr val="000000"/>
                 </a:solidFill>
                 <a:latin typeface="맑은 고딕"/>
               </a:rPr>
@@ -9039,7 +9039,7 @@
             <a:r>
               <a:rPr sz="1100" b="0">
                 <a:solidFill>
-                  <a:srgbClr val="595959"/>
+                  <a:srgbClr val="000000"/>
                 </a:solidFill>
                 <a:latin typeface="맑은 고딕"/>
               </a:rPr>
@@ -9060,7 +9060,7 @@
             <a:r>
               <a:rPr sz="1300" b="1">
                 <a:solidFill>
-                  <a:srgbClr val="1E2761"/>
+                  <a:srgbClr val="000000"/>
                 </a:solidFill>
                 <a:latin typeface="맑은 고딕"/>
               </a:rPr>
@@ -9072,7 +9072,7 @@
             <a:r>
               <a:rPr sz="1000" b="0">
                 <a:solidFill>
-                  <a:srgbClr val="595959"/>
+                  <a:srgbClr val="000000"/>
                 </a:solidFill>
                 <a:latin typeface="맑은 고딕"/>
               </a:rPr>
@@ -9084,7 +9084,7 @@
             <a:r>
               <a:rPr sz="1000" b="0">
                 <a:solidFill>
-                  <a:srgbClr val="595959"/>
+                  <a:srgbClr val="000000"/>
                 </a:solidFill>
                 <a:latin typeface="맑은 고딕"/>
               </a:rPr>
@@ -9096,7 +9096,7 @@
             <a:r>
               <a:rPr sz="1000" b="0">
                 <a:solidFill>
-                  <a:srgbClr val="595959"/>
+                  <a:srgbClr val="000000"/>
                 </a:solidFill>
                 <a:latin typeface="맑은 고딕"/>
               </a:rPr>
@@ -9131,7 +9131,7 @@
             <a:r>
               <a:rPr sz="1000" b="0">
                 <a:solidFill>
-                  <a:srgbClr val="595959"/>
+                  <a:srgbClr val="000000"/>
                 </a:solidFill>
                 <a:latin typeface="맑은 고딕"/>
               </a:rPr>
@@ -9166,7 +9166,7 @@
             <a:r>
               <a:rPr sz="1000" b="0">
                 <a:solidFill>
-                  <a:srgbClr val="595959"/>
+                  <a:srgbClr val="000000"/>
                 </a:solidFill>
                 <a:latin typeface="맑은 고딕"/>
               </a:rPr>
@@ -9226,7 +9226,7 @@
             <a:r>
               <a:rPr sz="2600" b="1">
                 <a:solidFill>
-                  <a:srgbClr val="1E2761"/>
+                  <a:srgbClr val="000000"/>
                 </a:solidFill>
                 <a:latin typeface="맑은 고딕"/>
               </a:rPr>
@@ -9331,7 +9331,7 @@
             <a:r>
               <a:rPr sz="1300" b="1">
                 <a:solidFill>
-                  <a:srgbClr val="1E2761"/>
+                  <a:srgbClr val="000000"/>
                 </a:solidFill>
                 <a:latin typeface="맑은 고딕"/>
               </a:rPr>
@@ -9343,7 +9343,7 @@
             <a:r>
               <a:rPr sz="1100" b="0">
                 <a:solidFill>
-                  <a:srgbClr val="595959"/>
+                  <a:srgbClr val="000000"/>
                 </a:solidFill>
                 <a:latin typeface="맑은 고딕"/>
               </a:rPr>
@@ -9364,7 +9364,7 @@
             <a:r>
               <a:rPr sz="1300" b="1">
                 <a:solidFill>
-                  <a:srgbClr val="1E2761"/>
+                  <a:srgbClr val="000000"/>
                 </a:solidFill>
                 <a:latin typeface="맑은 고딕"/>
               </a:rPr>
@@ -9376,7 +9376,7 @@
             <a:r>
               <a:rPr sz="1100" b="0">
                 <a:solidFill>
-                  <a:srgbClr val="595959"/>
+                  <a:srgbClr val="000000"/>
                 </a:solidFill>
                 <a:latin typeface="맑은 고딕"/>
               </a:rPr>
@@ -9397,7 +9397,7 @@
             <a:r>
               <a:rPr sz="1300" b="1">
                 <a:solidFill>
-                  <a:srgbClr val="1E2761"/>
+                  <a:srgbClr val="000000"/>
                 </a:solidFill>
                 <a:latin typeface="맑은 고딕"/>
               </a:rPr>
@@ -9409,7 +9409,7 @@
             <a:r>
               <a:rPr sz="1000" b="0">
                 <a:solidFill>
-                  <a:srgbClr val="595959"/>
+                  <a:srgbClr val="000000"/>
                 </a:solidFill>
                 <a:latin typeface="맑은 고딕"/>
               </a:rPr>
@@ -9444,7 +9444,7 @@
             <a:r>
               <a:rPr sz="1000" b="0">
                 <a:solidFill>
-                  <a:srgbClr val="595959"/>
+                  <a:srgbClr val="000000"/>
                 </a:solidFill>
                 <a:latin typeface="맑은 고딕"/>
               </a:rPr>
@@ -9479,7 +9479,7 @@
             <a:r>
               <a:rPr sz="1000" b="0">
                 <a:solidFill>
-                  <a:srgbClr val="595959"/>
+                  <a:srgbClr val="000000"/>
                 </a:solidFill>
                 <a:latin typeface="맑은 고딕"/>
               </a:rPr>
@@ -10203,7 +10203,7 @@
             <a:r>
               <a:rPr sz="2600" b="1">
                 <a:solidFill>
-                  <a:srgbClr val="1E2761"/>
+                  <a:srgbClr val="000000"/>
                 </a:solidFill>
                 <a:latin typeface="맑은 고딕"/>
               </a:rPr>
@@ -10284,7 +10284,7 @@
             <a:r>
               <a:rPr sz="1300" b="1" dirty="0">
                 <a:solidFill>
-                  <a:srgbClr val="1E2761"/>
+                  <a:srgbClr val="000000"/>
                 </a:solidFill>
                 <a:latin typeface="맑은 고딕"/>
               </a:rPr>
@@ -10293,7 +10293,7 @@
             <a:r>
               <a:rPr sz="1300" b="1" dirty="0" err="1">
                 <a:solidFill>
-                  <a:srgbClr val="1E2761"/>
+                  <a:srgbClr val="000000"/>
                 </a:solidFill>
                 <a:latin typeface="맑은 고딕"/>
               </a:rPr>
@@ -10302,7 +10302,7 @@
             <a:r>
               <a:rPr sz="1300" b="1" dirty="0">
                 <a:solidFill>
-                  <a:srgbClr val="1E2761"/>
+                  <a:srgbClr val="000000"/>
                 </a:solidFill>
                 <a:latin typeface="맑은 고딕"/>
               </a:rPr>
@@ -10314,7 +10314,7 @@
             <a:r>
               <a:rPr sz="1100" b="0" dirty="0" err="1">
                 <a:solidFill>
-                  <a:srgbClr val="595959"/>
+                  <a:srgbClr val="000000"/>
                 </a:solidFill>
                 <a:latin typeface="맑은 고딕"/>
               </a:rPr>
@@ -10323,7 +10323,7 @@
             <a:r>
               <a:rPr sz="1100" b="0" dirty="0">
                 <a:solidFill>
-                  <a:srgbClr val="595959"/>
+                  <a:srgbClr val="000000"/>
                 </a:solidFill>
                 <a:latin typeface="맑은 고딕"/>
               </a:rPr>
@@ -10332,7 +10332,7 @@
             <a:r>
               <a:rPr sz="1100" b="0" dirty="0" err="1">
                 <a:solidFill>
-                  <a:srgbClr val="595959"/>
+                  <a:srgbClr val="000000"/>
                 </a:solidFill>
                 <a:latin typeface="맑은 고딕"/>
               </a:rPr>
@@ -10341,7 +10341,7 @@
             <a:r>
               <a:rPr sz="1100" b="0" dirty="0">
                 <a:solidFill>
-                  <a:srgbClr val="595959"/>
+                  <a:srgbClr val="000000"/>
                 </a:solidFill>
                 <a:latin typeface="맑은 고딕"/>
               </a:rPr>
@@ -10350,7 +10350,7 @@
             <a:r>
               <a:rPr sz="1100" b="0" dirty="0" err="1">
                 <a:solidFill>
-                  <a:srgbClr val="595959"/>
+                  <a:srgbClr val="000000"/>
                 </a:solidFill>
                 <a:latin typeface="맑은 고딕"/>
               </a:rPr>
@@ -10359,7 +10359,7 @@
             <a:r>
               <a:rPr sz="1100" b="0" dirty="0">
                 <a:solidFill>
-                  <a:srgbClr val="595959"/>
+                  <a:srgbClr val="000000"/>
                 </a:solidFill>
                 <a:latin typeface="맑은 고딕"/>
               </a:rPr>
@@ -10368,7 +10368,7 @@
             <a:r>
               <a:rPr sz="1100" b="0" dirty="0" err="1">
                 <a:solidFill>
-                  <a:srgbClr val="595959"/>
+                  <a:srgbClr val="000000"/>
                 </a:solidFill>
                 <a:latin typeface="맑은 고딕"/>
               </a:rPr>
@@ -10395,7 +10395,7 @@
             <a:r>
               <a:rPr sz="1300" b="1" dirty="0">
                 <a:solidFill>
-                  <a:srgbClr val="1E2761"/>
+                  <a:srgbClr val="000000"/>
                 </a:solidFill>
                 <a:latin typeface="맑은 고딕"/>
               </a:rPr>
@@ -10404,7 +10404,7 @@
             <a:r>
               <a:rPr sz="1300" b="1" dirty="0" err="1">
                 <a:solidFill>
-                  <a:srgbClr val="1E2761"/>
+                  <a:srgbClr val="000000"/>
                 </a:solidFill>
                 <a:latin typeface="맑은 고딕"/>
               </a:rPr>
@@ -10413,7 +10413,7 @@
             <a:r>
               <a:rPr sz="1300" b="1" dirty="0">
                 <a:solidFill>
-                  <a:srgbClr val="1E2761"/>
+                  <a:srgbClr val="000000"/>
                 </a:solidFill>
                 <a:latin typeface="맑은 고딕"/>
               </a:rPr>
@@ -10422,7 +10422,7 @@
             <a:r>
               <a:rPr sz="1300" b="1" dirty="0" err="1">
                 <a:solidFill>
-                  <a:srgbClr val="1E2761"/>
+                  <a:srgbClr val="000000"/>
                 </a:solidFill>
                 <a:latin typeface="맑은 고딕"/>
               </a:rPr>
@@ -10440,7 +10440,7 @@
             <a:r>
               <a:rPr sz="1100" b="0" dirty="0">
                 <a:solidFill>
-                  <a:srgbClr val="595959"/>
+                  <a:srgbClr val="000000"/>
                 </a:solidFill>
                 <a:latin typeface="맑은 고딕"/>
               </a:rPr>
@@ -10449,7 +10449,7 @@
             <a:r>
               <a:rPr sz="1100" b="0" dirty="0" err="1">
                 <a:solidFill>
-                  <a:srgbClr val="595959"/>
+                  <a:srgbClr val="000000"/>
                 </a:solidFill>
                 <a:latin typeface="맑은 고딕"/>
               </a:rPr>
@@ -10458,7 +10458,7 @@
             <a:r>
               <a:rPr sz="1100" b="0" dirty="0">
                 <a:solidFill>
-                  <a:srgbClr val="595959"/>
+                  <a:srgbClr val="000000"/>
                 </a:solidFill>
                 <a:latin typeface="맑은 고딕"/>
               </a:rPr>
@@ -10467,7 +10467,7 @@
             <a:r>
               <a:rPr sz="1100" b="0" dirty="0" err="1">
                 <a:solidFill>
-                  <a:srgbClr val="595959"/>
+                  <a:srgbClr val="000000"/>
                 </a:solidFill>
                 <a:latin typeface="맑은 고딕"/>
               </a:rPr>
@@ -10476,7 +10476,7 @@
             <a:r>
               <a:rPr sz="1100" b="0" dirty="0">
                 <a:solidFill>
-                  <a:srgbClr val="595959"/>
+                  <a:srgbClr val="000000"/>
                 </a:solidFill>
                 <a:latin typeface="맑은 고딕"/>
               </a:rPr>
@@ -10485,7 +10485,7 @@
             <a:r>
               <a:rPr sz="1100" b="0" dirty="0" err="1">
                 <a:solidFill>
-                  <a:srgbClr val="595959"/>
+                  <a:srgbClr val="000000"/>
                 </a:solidFill>
                 <a:latin typeface="맑은 고딕"/>
               </a:rPr>
@@ -10494,7 +10494,7 @@
             <a:r>
               <a:rPr sz="1100" b="0" dirty="0">
                 <a:solidFill>
-                  <a:srgbClr val="595959"/>
+                  <a:srgbClr val="000000"/>
                 </a:solidFill>
                 <a:latin typeface="맑은 고딕"/>
               </a:rPr>
@@ -10503,7 +10503,7 @@
             <a:r>
               <a:rPr sz="1100" b="0" dirty="0" err="1">
                 <a:solidFill>
-                  <a:srgbClr val="595959"/>
+                  <a:srgbClr val="000000"/>
                 </a:solidFill>
                 <a:latin typeface="맑은 고딕"/>
               </a:rPr>
@@ -10512,7 +10512,7 @@
             <a:r>
               <a:rPr sz="1100" b="0" dirty="0">
                 <a:solidFill>
-                  <a:srgbClr val="595959"/>
+                  <a:srgbClr val="000000"/>
                 </a:solidFill>
                 <a:latin typeface="맑은 고딕"/>
               </a:rPr>
@@ -10521,7 +10521,7 @@
             <a:r>
               <a:rPr sz="1100" b="0" dirty="0" err="1">
                 <a:solidFill>
-                  <a:srgbClr val="595959"/>
+                  <a:srgbClr val="000000"/>
                 </a:solidFill>
                 <a:latin typeface="맑은 고딕"/>
               </a:rPr>
@@ -10530,7 +10530,7 @@
             <a:r>
               <a:rPr sz="1100" b="0" dirty="0">
                 <a:solidFill>
-                  <a:srgbClr val="595959"/>
+                  <a:srgbClr val="000000"/>
                 </a:solidFill>
                 <a:latin typeface="맑은 고딕"/>
               </a:rPr>
@@ -10539,7 +10539,7 @@
             <a:r>
               <a:rPr sz="1100" b="0" dirty="0" err="1">
                 <a:solidFill>
-                  <a:srgbClr val="595959"/>
+                  <a:srgbClr val="000000"/>
                 </a:solidFill>
                 <a:latin typeface="맑은 고딕"/>
               </a:rPr>
@@ -10548,7 +10548,7 @@
             <a:r>
               <a:rPr sz="1100" b="0" dirty="0">
                 <a:solidFill>
-                  <a:srgbClr val="595959"/>
+                  <a:srgbClr val="000000"/>
                 </a:solidFill>
                 <a:latin typeface="맑은 고딕"/>
               </a:rPr>
@@ -10557,7 +10557,7 @@
             <a:r>
               <a:rPr sz="1100" b="0" dirty="0" err="1">
                 <a:solidFill>
-                  <a:srgbClr val="595959"/>
+                  <a:srgbClr val="000000"/>
                 </a:solidFill>
                 <a:latin typeface="맑은 고딕"/>
               </a:rPr>
@@ -10566,7 +10566,7 @@
             <a:r>
               <a:rPr sz="1100" b="0" dirty="0">
                 <a:solidFill>
-                  <a:srgbClr val="595959"/>
+                  <a:srgbClr val="000000"/>
                 </a:solidFill>
                 <a:latin typeface="맑은 고딕"/>
               </a:rPr>
@@ -10575,7 +10575,7 @@
             <a:r>
               <a:rPr sz="1100" b="0" dirty="0" err="1">
                 <a:solidFill>
-                  <a:srgbClr val="595959"/>
+                  <a:srgbClr val="000000"/>
                 </a:solidFill>
                 <a:latin typeface="맑은 고딕"/>
               </a:rPr>
@@ -10584,7 +10584,7 @@
             <a:r>
               <a:rPr sz="1100" b="0" dirty="0">
                 <a:solidFill>
-                  <a:srgbClr val="595959"/>
+                  <a:srgbClr val="000000"/>
                 </a:solidFill>
                 <a:latin typeface="맑은 고딕"/>
               </a:rPr>
@@ -10593,7 +10593,7 @@
             <a:r>
               <a:rPr sz="1100" b="0" dirty="0" err="1">
                 <a:solidFill>
-                  <a:srgbClr val="595959"/>
+                  <a:srgbClr val="000000"/>
                 </a:solidFill>
                 <a:latin typeface="맑은 고딕"/>
               </a:rPr>
@@ -10602,7 +10602,7 @@
             <a:r>
               <a:rPr sz="1100" b="0" dirty="0">
                 <a:solidFill>
-                  <a:srgbClr val="595959"/>
+                  <a:srgbClr val="000000"/>
                 </a:solidFill>
                 <a:latin typeface="맑은 고딕"/>
               </a:rPr>
@@ -10611,7 +10611,7 @@
             <a:r>
               <a:rPr sz="1100" b="0" dirty="0" err="1">
                 <a:solidFill>
-                  <a:srgbClr val="595959"/>
+                  <a:srgbClr val="000000"/>
                 </a:solidFill>
                 <a:latin typeface="맑은 고딕"/>
               </a:rPr>
@@ -10620,7 +10620,7 @@
             <a:r>
               <a:rPr sz="1100" b="0" dirty="0">
                 <a:solidFill>
-                  <a:srgbClr val="595959"/>
+                  <a:srgbClr val="000000"/>
                 </a:solidFill>
                 <a:latin typeface="맑은 고딕"/>
               </a:rPr>
@@ -10629,7 +10629,7 @@
             <a:r>
               <a:rPr sz="1100" b="0" dirty="0" err="1">
                 <a:solidFill>
-                  <a:srgbClr val="595959"/>
+                  <a:srgbClr val="000000"/>
                 </a:solidFill>
                 <a:latin typeface="맑은 고딕"/>
               </a:rPr>
@@ -10638,7 +10638,7 @@
             <a:r>
               <a:rPr sz="1100" b="0" dirty="0">
                 <a:solidFill>
-                  <a:srgbClr val="595959"/>
+                  <a:srgbClr val="000000"/>
                 </a:solidFill>
                 <a:latin typeface="맑은 고딕"/>
               </a:rPr>
@@ -10659,7 +10659,7 @@
             <a:r>
               <a:rPr sz="1300" b="1" dirty="0">
                 <a:solidFill>
-                  <a:srgbClr val="1E2761"/>
+                  <a:srgbClr val="000000"/>
                 </a:solidFill>
                 <a:latin typeface="맑은 고딕"/>
               </a:rPr>
@@ -10668,7 +10668,7 @@
             <a:r>
               <a:rPr sz="1300" b="1" dirty="0" err="1">
                 <a:solidFill>
-                  <a:srgbClr val="1E2761"/>
+                  <a:srgbClr val="000000"/>
                 </a:solidFill>
                 <a:latin typeface="맑은 고딕"/>
               </a:rPr>
@@ -10686,7 +10686,7 @@
             <a:r>
               <a:rPr sz="1000" b="0" dirty="0">
                 <a:solidFill>
-                  <a:srgbClr val="595959"/>
+                  <a:srgbClr val="000000"/>
                 </a:solidFill>
                 <a:latin typeface="맑은 고딕"/>
               </a:rPr>
@@ -10695,7 +10695,7 @@
             <a:r>
               <a:rPr sz="1000" b="0" dirty="0" err="1">
                 <a:solidFill>
-                  <a:srgbClr val="595959"/>
+                  <a:srgbClr val="000000"/>
                 </a:solidFill>
                 <a:latin typeface="맑은 고딕"/>
               </a:rPr>
@@ -10704,7 +10704,7 @@
             <a:r>
               <a:rPr sz="1000" b="0" dirty="0">
                 <a:solidFill>
-                  <a:srgbClr val="595959"/>
+                  <a:srgbClr val="000000"/>
                 </a:solidFill>
                 <a:latin typeface="맑은 고딕"/>
               </a:rPr>
@@ -10713,7 +10713,7 @@
             <a:r>
               <a:rPr sz="1000" b="0" dirty="0" err="1">
                 <a:solidFill>
-                  <a:srgbClr val="595959"/>
+                  <a:srgbClr val="000000"/>
                 </a:solidFill>
                 <a:latin typeface="맑은 고딕"/>
               </a:rPr>
@@ -10722,7 +10722,7 @@
             <a:r>
               <a:rPr sz="1000" b="0" dirty="0">
                 <a:solidFill>
-                  <a:srgbClr val="595959"/>
+                  <a:srgbClr val="000000"/>
                 </a:solidFill>
                 <a:latin typeface="맑은 고딕"/>
               </a:rPr>
@@ -10731,7 +10731,7 @@
             <a:r>
               <a:rPr sz="1000" b="0" dirty="0" err="1">
                 <a:solidFill>
-                  <a:srgbClr val="595959"/>
+                  <a:srgbClr val="000000"/>
                 </a:solidFill>
                 <a:latin typeface="맑은 고딕"/>
               </a:rPr>
@@ -10740,7 +10740,7 @@
             <a:r>
               <a:rPr sz="1000" b="0" dirty="0">
                 <a:solidFill>
-                  <a:srgbClr val="595959"/>
+                  <a:srgbClr val="000000"/>
                 </a:solidFill>
                 <a:latin typeface="맑은 고딕"/>
               </a:rPr>
@@ -10749,7 +10749,7 @@
             <a:r>
               <a:rPr sz="1000" b="0" dirty="0" err="1">
                 <a:solidFill>
-                  <a:srgbClr val="595959"/>
+                  <a:srgbClr val="000000"/>
                 </a:solidFill>
                 <a:latin typeface="맑은 고딕"/>
               </a:rPr>
@@ -10758,7 +10758,7 @@
             <a:r>
               <a:rPr sz="1000" b="0" dirty="0">
                 <a:solidFill>
-                  <a:srgbClr val="595959"/>
+                  <a:srgbClr val="000000"/>
                 </a:solidFill>
                 <a:latin typeface="맑은 고딕"/>
               </a:rPr>
@@ -10767,7 +10767,7 @@
             <a:r>
               <a:rPr sz="1000" b="0" dirty="0" err="1">
                 <a:solidFill>
-                  <a:srgbClr val="595959"/>
+                  <a:srgbClr val="000000"/>
                 </a:solidFill>
                 <a:latin typeface="맑은 고딕"/>
               </a:rPr>
@@ -10776,7 +10776,7 @@
             <a:r>
               <a:rPr sz="1000" b="0" dirty="0">
                 <a:solidFill>
-                  <a:srgbClr val="595959"/>
+                  <a:srgbClr val="000000"/>
                 </a:solidFill>
                 <a:latin typeface="맑은 고딕"/>
               </a:rPr>
@@ -10785,7 +10785,7 @@
             <a:r>
               <a:rPr sz="1000" b="0" dirty="0" err="1">
                 <a:solidFill>
-                  <a:srgbClr val="595959"/>
+                  <a:srgbClr val="000000"/>
                 </a:solidFill>
                 <a:latin typeface="맑은 고딕"/>
               </a:rPr>
@@ -10794,7 +10794,7 @@
             <a:r>
               <a:rPr sz="1000" b="0" dirty="0">
                 <a:solidFill>
-                  <a:srgbClr val="595959"/>
+                  <a:srgbClr val="000000"/>
                 </a:solidFill>
                 <a:latin typeface="맑은 고딕"/>
               </a:rPr>
@@ -10803,7 +10803,7 @@
             <a:r>
               <a:rPr sz="1000" b="0" dirty="0" err="1">
                 <a:solidFill>
-                  <a:srgbClr val="595959"/>
+                  <a:srgbClr val="000000"/>
                 </a:solidFill>
                 <a:latin typeface="맑은 고딕"/>
               </a:rPr>
@@ -10812,7 +10812,7 @@
             <a:r>
               <a:rPr sz="1000" b="0" dirty="0">
                 <a:solidFill>
-                  <a:srgbClr val="595959"/>
+                  <a:srgbClr val="000000"/>
                 </a:solidFill>
                 <a:latin typeface="맑은 고딕"/>
               </a:rPr>
@@ -10821,7 +10821,7 @@
             <a:r>
               <a:rPr sz="1000" b="0" dirty="0" err="1">
                 <a:solidFill>
-                  <a:srgbClr val="595959"/>
+                  <a:srgbClr val="000000"/>
                 </a:solidFill>
                 <a:latin typeface="맑은 고딕"/>
               </a:rPr>
@@ -10830,7 +10830,7 @@
             <a:r>
               <a:rPr sz="1000" b="0" dirty="0">
                 <a:solidFill>
-                  <a:srgbClr val="595959"/>
+                  <a:srgbClr val="000000"/>
                 </a:solidFill>
                 <a:latin typeface="맑은 고딕"/>
               </a:rPr>
@@ -10839,7 +10839,7 @@
             <a:r>
               <a:rPr sz="1000" b="0" dirty="0" err="1">
                 <a:solidFill>
-                  <a:srgbClr val="595959"/>
+                  <a:srgbClr val="000000"/>
                 </a:solidFill>
                 <a:latin typeface="맑은 고딕"/>
               </a:rPr>
@@ -10848,7 +10848,7 @@
             <a:r>
               <a:rPr sz="1000" b="0" dirty="0">
                 <a:solidFill>
-                  <a:srgbClr val="595959"/>
+                  <a:srgbClr val="000000"/>
                 </a:solidFill>
                 <a:latin typeface="맑은 고딕"/>
               </a:rPr>
@@ -10857,7 +10857,7 @@
             <a:r>
               <a:rPr sz="1000" b="0" dirty="0" err="1">
                 <a:solidFill>
-                  <a:srgbClr val="595959"/>
+                  <a:srgbClr val="000000"/>
                 </a:solidFill>
                 <a:latin typeface="맑은 고딕"/>
               </a:rPr>
@@ -10866,7 +10866,7 @@
             <a:r>
               <a:rPr sz="1000" b="0" dirty="0">
                 <a:solidFill>
-                  <a:srgbClr val="595959"/>
+                  <a:srgbClr val="000000"/>
                 </a:solidFill>
                 <a:latin typeface="맑은 고딕"/>
               </a:rPr>
@@ -10875,7 +10875,7 @@
             <a:r>
               <a:rPr sz="1000" b="0" dirty="0" err="1">
                 <a:solidFill>
-                  <a:srgbClr val="595959"/>
+                  <a:srgbClr val="000000"/>
                 </a:solidFill>
                 <a:latin typeface="맑은 고딕"/>
               </a:rPr>
@@ -10884,7 +10884,7 @@
             <a:r>
               <a:rPr sz="1000" b="0" dirty="0">
                 <a:solidFill>
-                  <a:srgbClr val="595959"/>
+                  <a:srgbClr val="000000"/>
                 </a:solidFill>
                 <a:latin typeface="맑은 고딕"/>
               </a:rPr>
@@ -10893,7 +10893,7 @@
             <a:r>
               <a:rPr sz="1000" b="0" dirty="0" err="1">
                 <a:solidFill>
-                  <a:srgbClr val="595959"/>
+                  <a:srgbClr val="000000"/>
                 </a:solidFill>
                 <a:latin typeface="맑은 고딕"/>
               </a:rPr>
@@ -10902,7 +10902,7 @@
             <a:r>
               <a:rPr sz="1000" b="0" dirty="0">
                 <a:solidFill>
-                  <a:srgbClr val="595959"/>
+                  <a:srgbClr val="000000"/>
                 </a:solidFill>
                 <a:latin typeface="맑은 고딕"/>
               </a:rPr>
@@ -10914,7 +10914,7 @@
             <a:r>
               <a:rPr sz="1000" b="0" dirty="0">
                 <a:solidFill>
-                  <a:srgbClr val="595959"/>
+                  <a:srgbClr val="C00000"/>
                 </a:solidFill>
                 <a:latin typeface="맑은 고딕"/>
               </a:rPr>
@@ -10923,7 +10923,7 @@
             <a:r>
               <a:rPr sz="1000" b="0" dirty="0" err="1">
                 <a:solidFill>
-                  <a:srgbClr val="595959"/>
+                  <a:srgbClr val="C00000"/>
                 </a:solidFill>
                 <a:latin typeface="맑은 고딕"/>
               </a:rPr>
@@ -10932,7 +10932,7 @@
             <a:r>
               <a:rPr sz="1000" b="0" dirty="0">
                 <a:solidFill>
-                  <a:srgbClr val="595959"/>
+                  <a:srgbClr val="C00000"/>
                 </a:solidFill>
                 <a:latin typeface="맑은 고딕"/>
               </a:rPr>
@@ -10941,7 +10941,7 @@
             <a:r>
               <a:rPr sz="1000" b="0" dirty="0" err="1">
                 <a:solidFill>
-                  <a:srgbClr val="595959"/>
+                  <a:srgbClr val="C00000"/>
                 </a:solidFill>
                 <a:latin typeface="맑은 고딕"/>
               </a:rPr>
@@ -10950,7 +10950,7 @@
             <a:r>
               <a:rPr sz="1000" b="0" dirty="0">
                 <a:solidFill>
-                  <a:srgbClr val="595959"/>
+                  <a:srgbClr val="C00000"/>
                 </a:solidFill>
                 <a:latin typeface="맑은 고딕"/>
               </a:rPr>
@@ -10959,7 +10959,7 @@
             <a:r>
               <a:rPr sz="1000" b="0" dirty="0" err="1">
                 <a:solidFill>
-                  <a:srgbClr val="595959"/>
+                  <a:srgbClr val="C00000"/>
                 </a:solidFill>
                 <a:latin typeface="맑은 고딕"/>
               </a:rPr>
@@ -10968,7 +10968,7 @@
             <a:r>
               <a:rPr sz="1000" b="0" dirty="0">
                 <a:solidFill>
-                  <a:srgbClr val="595959"/>
+                  <a:srgbClr val="C00000"/>
                 </a:solidFill>
                 <a:latin typeface="맑은 고딕"/>
               </a:rPr>
@@ -10977,7 +10977,7 @@
             <a:r>
               <a:rPr sz="1000" b="0" dirty="0" err="1">
                 <a:solidFill>
-                  <a:srgbClr val="595959"/>
+                  <a:srgbClr val="C00000"/>
                 </a:solidFill>
                 <a:latin typeface="맑은 고딕"/>
               </a:rPr>
@@ -10986,7 +10986,7 @@
             <a:r>
               <a:rPr sz="1000" b="0" dirty="0">
                 <a:solidFill>
-                  <a:srgbClr val="595959"/>
+                  <a:srgbClr val="C00000"/>
                 </a:solidFill>
                 <a:latin typeface="맑은 고딕"/>
               </a:rPr>
@@ -10995,7 +10995,7 @@
             <a:r>
               <a:rPr sz="1000" b="0" dirty="0" err="1">
                 <a:solidFill>
-                  <a:srgbClr val="595959"/>
+                  <a:srgbClr val="C00000"/>
                 </a:solidFill>
                 <a:latin typeface="맑은 고딕"/>
               </a:rPr>
@@ -11004,7 +11004,7 @@
             <a:r>
               <a:rPr sz="1000" b="0" dirty="0">
                 <a:solidFill>
-                  <a:srgbClr val="595959"/>
+                  <a:srgbClr val="C00000"/>
                 </a:solidFill>
                 <a:latin typeface="맑은 고딕"/>
               </a:rPr>
@@ -11013,7 +11013,7 @@
             <a:r>
               <a:rPr sz="1000" b="0" dirty="0" err="1">
                 <a:solidFill>
-                  <a:srgbClr val="595959"/>
+                  <a:srgbClr val="C00000"/>
                 </a:solidFill>
                 <a:latin typeface="맑은 고딕"/>
               </a:rPr>
@@ -11022,7 +11022,7 @@
             <a:r>
               <a:rPr sz="1000" b="0" dirty="0">
                 <a:solidFill>
-                  <a:srgbClr val="595959"/>
+                  <a:srgbClr val="C00000"/>
                 </a:solidFill>
                 <a:latin typeface="맑은 고딕"/>
               </a:rPr>
@@ -11031,7 +11031,7 @@
             <a:r>
               <a:rPr sz="1000" b="0" dirty="0" err="1">
                 <a:solidFill>
-                  <a:srgbClr val="595959"/>
+                  <a:srgbClr val="C00000"/>
                 </a:solidFill>
                 <a:latin typeface="맑은 고딕"/>
               </a:rPr>
@@ -11040,7 +11040,7 @@
             <a:r>
               <a:rPr sz="1000" b="0" dirty="0">
                 <a:solidFill>
-                  <a:srgbClr val="595959"/>
+                  <a:srgbClr val="C00000"/>
                 </a:solidFill>
                 <a:latin typeface="맑은 고딕"/>
               </a:rPr>
@@ -11049,7 +11049,7 @@
             <a:r>
               <a:rPr sz="1000" b="0" dirty="0" err="1">
                 <a:solidFill>
-                  <a:srgbClr val="595959"/>
+                  <a:srgbClr val="C00000"/>
                 </a:solidFill>
                 <a:latin typeface="맑은 고딕"/>
               </a:rPr>
@@ -11058,7 +11058,7 @@
             <a:r>
               <a:rPr sz="1000" b="0" dirty="0">
                 <a:solidFill>
-                  <a:srgbClr val="595959"/>
+                  <a:srgbClr val="C00000"/>
                 </a:solidFill>
                 <a:latin typeface="맑은 고딕"/>
               </a:rPr>
@@ -11067,7 +11067,7 @@
             <a:r>
               <a:rPr sz="1000" b="0" dirty="0" err="1">
                 <a:solidFill>
-                  <a:srgbClr val="595959"/>
+                  <a:srgbClr val="C00000"/>
                 </a:solidFill>
                 <a:latin typeface="맑은 고딕"/>
               </a:rPr>
@@ -11076,7 +11076,7 @@
             <a:r>
               <a:rPr sz="1000" b="0" dirty="0">
                 <a:solidFill>
-                  <a:srgbClr val="595959"/>
+                  <a:srgbClr val="C00000"/>
                 </a:solidFill>
                 <a:latin typeface="맑은 고딕"/>
               </a:rPr>
@@ -11085,7 +11085,7 @@
             <a:r>
               <a:rPr sz="1000" b="0" dirty="0" err="1">
                 <a:solidFill>
-                  <a:srgbClr val="595959"/>
+                  <a:srgbClr val="C00000"/>
                 </a:solidFill>
                 <a:latin typeface="맑은 고딕"/>
               </a:rPr>
@@ -11094,7 +11094,7 @@
             <a:r>
               <a:rPr sz="1000" b="0" dirty="0">
                 <a:solidFill>
-                  <a:srgbClr val="595959"/>
+                  <a:srgbClr val="C00000"/>
                 </a:solidFill>
                 <a:latin typeface="맑은 고딕"/>
               </a:rPr>
@@ -11103,7 +11103,7 @@
             <a:r>
               <a:rPr sz="1000" b="0" dirty="0" err="1">
                 <a:solidFill>
-                  <a:srgbClr val="595959"/>
+                  <a:srgbClr val="C00000"/>
                 </a:solidFill>
                 <a:latin typeface="맑은 고딕"/>
               </a:rPr>
@@ -11112,7 +11112,7 @@
             <a:r>
               <a:rPr sz="1000" b="0" dirty="0">
                 <a:solidFill>
-                  <a:srgbClr val="595959"/>
+                  <a:srgbClr val="C00000"/>
                 </a:solidFill>
                 <a:latin typeface="맑은 고딕"/>
               </a:rPr>
@@ -11122,7 +11122,7 @@
             <a:r>
               <a:rPr sz="1000" b="0" dirty="0" err="1">
                 <a:solidFill>
-                  <a:srgbClr val="595959"/>
+                  <a:srgbClr val="C00000"/>
                 </a:solidFill>
                 <a:latin typeface="맑은 고딕"/>
               </a:rPr>
@@ -11131,7 +11131,7 @@
             <a:r>
               <a:rPr sz="1000" b="0" dirty="0">
                 <a:solidFill>
-                  <a:srgbClr val="595959"/>
+                  <a:srgbClr val="C00000"/>
                 </a:solidFill>
                 <a:latin typeface="맑은 고딕"/>
               </a:rPr>
@@ -11140,7 +11140,7 @@
             <a:r>
               <a:rPr sz="1000" b="0" dirty="0" err="1">
                 <a:solidFill>
-                  <a:srgbClr val="595959"/>
+                  <a:srgbClr val="C00000"/>
                 </a:solidFill>
                 <a:latin typeface="맑은 고딕"/>
               </a:rPr>
@@ -11149,7 +11149,7 @@
             <a:r>
               <a:rPr sz="1000" b="0" dirty="0">
                 <a:solidFill>
-                  <a:srgbClr val="595959"/>
+                  <a:srgbClr val="C00000"/>
                 </a:solidFill>
                 <a:latin typeface="맑은 고딕"/>
               </a:rPr>
@@ -11158,7 +11158,7 @@
             <a:r>
               <a:rPr sz="1000" b="0" dirty="0" err="1">
                 <a:solidFill>
-                  <a:srgbClr val="595959"/>
+                  <a:srgbClr val="C00000"/>
                 </a:solidFill>
                 <a:latin typeface="맑은 고딕"/>
               </a:rPr>
@@ -11167,7 +11167,7 @@
             <a:r>
               <a:rPr sz="1000" b="0" dirty="0">
                 <a:solidFill>
-                  <a:srgbClr val="595959"/>
+                  <a:srgbClr val="C00000"/>
                 </a:solidFill>
                 <a:latin typeface="맑은 고딕"/>
               </a:rPr>
@@ -11176,7 +11176,7 @@
             <a:r>
               <a:rPr sz="1000" b="0" dirty="0" err="1">
                 <a:solidFill>
-                  <a:srgbClr val="595959"/>
+                  <a:srgbClr val="C00000"/>
                 </a:solidFill>
                 <a:latin typeface="맑은 고딕"/>
               </a:rPr>
@@ -11185,7 +11185,7 @@
             <a:r>
               <a:rPr sz="1000" b="0" dirty="0">
                 <a:solidFill>
-                  <a:srgbClr val="595959"/>
+                  <a:srgbClr val="C00000"/>
                 </a:solidFill>
                 <a:latin typeface="맑은 고딕"/>
               </a:rPr>
@@ -11194,7 +11194,7 @@
             <a:r>
               <a:rPr sz="1000" b="0" dirty="0" err="1">
                 <a:solidFill>
-                  <a:srgbClr val="595959"/>
+                  <a:srgbClr val="C00000"/>
                 </a:solidFill>
                 <a:latin typeface="맑은 고딕"/>
               </a:rPr>
@@ -11203,7 +11203,7 @@
             <a:r>
               <a:rPr sz="1000" b="0" dirty="0">
                 <a:solidFill>
-                  <a:srgbClr val="595959"/>
+                  <a:srgbClr val="C00000"/>
                 </a:solidFill>
                 <a:latin typeface="맑은 고딕"/>
               </a:rPr>
@@ -11212,7 +11212,7 @@
             <a:r>
               <a:rPr sz="1000" b="0" dirty="0" err="1">
                 <a:solidFill>
-                  <a:srgbClr val="595959"/>
+                  <a:srgbClr val="C00000"/>
                 </a:solidFill>
                 <a:latin typeface="맑은 고딕"/>
               </a:rPr>
@@ -11221,7 +11221,7 @@
             <a:r>
               <a:rPr sz="1000" b="0" dirty="0">
                 <a:solidFill>
-                  <a:srgbClr val="595959"/>
+                  <a:srgbClr val="C00000"/>
                 </a:solidFill>
                 <a:latin typeface="맑은 고딕"/>
               </a:rPr>
@@ -11230,7 +11230,7 @@
             <a:r>
               <a:rPr sz="1000" b="0" dirty="0" err="1">
                 <a:solidFill>
-                  <a:srgbClr val="595959"/>
+                  <a:srgbClr val="C00000"/>
                 </a:solidFill>
                 <a:latin typeface="맑은 고딕"/>
               </a:rPr>
@@ -11239,7 +11239,7 @@
             <a:r>
               <a:rPr sz="1000" b="0" dirty="0">
                 <a:solidFill>
-                  <a:srgbClr val="595959"/>
+                  <a:srgbClr val="C00000"/>
                 </a:solidFill>
                 <a:latin typeface="맑은 고딕"/>
               </a:rPr>
@@ -11251,7 +11251,7 @@
             <a:r>
               <a:rPr sz="1000" b="0" dirty="0">
                 <a:solidFill>
-                  <a:srgbClr val="595959"/>
+                  <a:srgbClr val="000000"/>
                 </a:solidFill>
                 <a:latin typeface="맑은 고딕"/>
               </a:rPr>
@@ -11260,7 +11260,7 @@
             <a:r>
               <a:rPr sz="1000" b="0" dirty="0" err="1">
                 <a:solidFill>
-                  <a:srgbClr val="595959"/>
+                  <a:srgbClr val="000000"/>
                 </a:solidFill>
                 <a:latin typeface="맑은 고딕"/>
               </a:rPr>
@@ -11269,7 +11269,7 @@
             <a:r>
               <a:rPr sz="1000" b="0" dirty="0">
                 <a:solidFill>
-                  <a:srgbClr val="595959"/>
+                  <a:srgbClr val="000000"/>
                 </a:solidFill>
                 <a:latin typeface="맑은 고딕"/>
               </a:rPr>
@@ -11278,7 +11278,7 @@
             <a:r>
               <a:rPr sz="1000" b="0" dirty="0" err="1">
                 <a:solidFill>
-                  <a:srgbClr val="595959"/>
+                  <a:srgbClr val="000000"/>
                 </a:solidFill>
                 <a:latin typeface="맑은 고딕"/>
               </a:rPr>
@@ -11287,7 +11287,7 @@
             <a:r>
               <a:rPr sz="1000" b="0" dirty="0">
                 <a:solidFill>
-                  <a:srgbClr val="595959"/>
+                  <a:srgbClr val="000000"/>
                 </a:solidFill>
                 <a:latin typeface="맑은 고딕"/>
               </a:rPr>
@@ -11296,7 +11296,7 @@
             <a:r>
               <a:rPr sz="1000" b="0" dirty="0" err="1">
                 <a:solidFill>
-                  <a:srgbClr val="595959"/>
+                  <a:srgbClr val="000000"/>
                 </a:solidFill>
                 <a:latin typeface="맑은 고딕"/>
               </a:rPr>
@@ -11305,7 +11305,7 @@
             <a:r>
               <a:rPr sz="1000" b="0" dirty="0">
                 <a:solidFill>
-                  <a:srgbClr val="595959"/>
+                  <a:srgbClr val="000000"/>
                 </a:solidFill>
                 <a:latin typeface="맑은 고딕"/>
               </a:rPr>
@@ -11314,7 +11314,7 @@
             <a:r>
               <a:rPr sz="1000" b="0" dirty="0" err="1">
                 <a:solidFill>
-                  <a:srgbClr val="595959"/>
+                  <a:srgbClr val="000000"/>
                 </a:solidFill>
                 <a:latin typeface="맑은 고딕"/>
               </a:rPr>
@@ -11323,7 +11323,7 @@
             <a:r>
               <a:rPr sz="1000" b="0" dirty="0">
                 <a:solidFill>
-                  <a:srgbClr val="595959"/>
+                  <a:srgbClr val="000000"/>
                 </a:solidFill>
                 <a:latin typeface="맑은 고딕"/>
               </a:rPr>
@@ -11332,7 +11332,7 @@
             <a:r>
               <a:rPr sz="1000" b="0" dirty="0" err="1">
                 <a:solidFill>
-                  <a:srgbClr val="595959"/>
+                  <a:srgbClr val="000000"/>
                 </a:solidFill>
                 <a:latin typeface="맑은 고딕"/>
               </a:rPr>
@@ -11341,7 +11341,7 @@
             <a:r>
               <a:rPr sz="1000" b="0" dirty="0">
                 <a:solidFill>
-                  <a:srgbClr val="595959"/>
+                  <a:srgbClr val="000000"/>
                 </a:solidFill>
                 <a:latin typeface="맑은 고딕"/>
               </a:rPr>
@@ -11350,7 +11350,7 @@
             <a:r>
               <a:rPr sz="1000" b="0" dirty="0" err="1">
                 <a:solidFill>
-                  <a:srgbClr val="595959"/>
+                  <a:srgbClr val="000000"/>
                 </a:solidFill>
                 <a:latin typeface="맑은 고딕"/>
               </a:rPr>
@@ -11359,7 +11359,7 @@
             <a:r>
               <a:rPr sz="1000" b="0" dirty="0">
                 <a:solidFill>
-                  <a:srgbClr val="595959"/>
+                  <a:srgbClr val="000000"/>
                 </a:solidFill>
                 <a:latin typeface="맑은 고딕"/>
               </a:rPr>
@@ -11368,7 +11368,7 @@
             <a:r>
               <a:rPr sz="1000" b="0" dirty="0" err="1">
                 <a:solidFill>
-                  <a:srgbClr val="595959"/>
+                  <a:srgbClr val="000000"/>
                 </a:solidFill>
                 <a:latin typeface="맑은 고딕"/>
               </a:rPr>
@@ -11377,7 +11377,7 @@
             <a:r>
               <a:rPr sz="1000" b="0" dirty="0">
                 <a:solidFill>
-                  <a:srgbClr val="595959"/>
+                  <a:srgbClr val="000000"/>
                 </a:solidFill>
                 <a:latin typeface="맑은 고딕"/>
               </a:rPr>
@@ -11386,7 +11386,7 @@
             <a:r>
               <a:rPr sz="1000" b="0" dirty="0" err="1">
                 <a:solidFill>
-                  <a:srgbClr val="595959"/>
+                  <a:srgbClr val="000000"/>
                 </a:solidFill>
                 <a:latin typeface="맑은 고딕"/>
               </a:rPr>
@@ -11395,7 +11395,7 @@
             <a:r>
               <a:rPr sz="1000" b="0" dirty="0">
                 <a:solidFill>
-                  <a:srgbClr val="595959"/>
+                  <a:srgbClr val="000000"/>
                 </a:solidFill>
                 <a:latin typeface="맑은 고딕"/>
               </a:rPr>
@@ -11404,7 +11404,7 @@
             <a:r>
               <a:rPr sz="1000" b="0" dirty="0" err="1">
                 <a:solidFill>
-                  <a:srgbClr val="595959"/>
+                  <a:srgbClr val="000000"/>
                 </a:solidFill>
                 <a:latin typeface="맑은 고딕"/>
               </a:rPr>
@@ -11413,7 +11413,7 @@
             <a:r>
               <a:rPr sz="1000" b="0" dirty="0">
                 <a:solidFill>
-                  <a:srgbClr val="595959"/>
+                  <a:srgbClr val="000000"/>
                 </a:solidFill>
                 <a:latin typeface="맑은 고딕"/>
               </a:rPr>
@@ -11422,7 +11422,7 @@
             <a:r>
               <a:rPr sz="1000" b="0" dirty="0" err="1">
                 <a:solidFill>
-                  <a:srgbClr val="595959"/>
+                  <a:srgbClr val="000000"/>
                 </a:solidFill>
                 <a:latin typeface="맑은 고딕"/>
               </a:rPr>
@@ -11431,7 +11431,7 @@
             <a:r>
               <a:rPr sz="1000" b="0" dirty="0">
                 <a:solidFill>
-                  <a:srgbClr val="595959"/>
+                  <a:srgbClr val="000000"/>
                 </a:solidFill>
                 <a:latin typeface="맑은 고딕"/>
               </a:rPr>
@@ -11440,7 +11440,7 @@
             <a:r>
               <a:rPr sz="1000" b="0" dirty="0" err="1">
                 <a:solidFill>
-                  <a:srgbClr val="595959"/>
+                  <a:srgbClr val="000000"/>
                 </a:solidFill>
                 <a:latin typeface="맑은 고딕"/>
               </a:rPr>
@@ -11449,7 +11449,7 @@
             <a:r>
               <a:rPr sz="1000" b="0" dirty="0">
                 <a:solidFill>
-                  <a:srgbClr val="595959"/>
+                  <a:srgbClr val="000000"/>
                 </a:solidFill>
                 <a:latin typeface="맑은 고딕"/>
               </a:rPr>
@@ -11461,7 +11461,7 @@
             <a:r>
               <a:rPr sz="1000" b="0" dirty="0">
                 <a:solidFill>
-                  <a:srgbClr val="595959"/>
+                  <a:srgbClr val="000000"/>
                 </a:solidFill>
                 <a:latin typeface="맑은 고딕"/>
               </a:rPr>
@@ -11470,7 +11470,7 @@
             <a:r>
               <a:rPr sz="1000" b="0" dirty="0" err="1">
                 <a:solidFill>
-                  <a:srgbClr val="595959"/>
+                  <a:srgbClr val="000000"/>
                 </a:solidFill>
                 <a:latin typeface="맑은 고딕"/>
               </a:rPr>
@@ -11479,7 +11479,7 @@
             <a:r>
               <a:rPr sz="1000" b="0" dirty="0">
                 <a:solidFill>
-                  <a:srgbClr val="595959"/>
+                  <a:srgbClr val="000000"/>
                 </a:solidFill>
                 <a:latin typeface="맑은 고딕"/>
               </a:rPr>
@@ -11488,7 +11488,7 @@
             <a:r>
               <a:rPr sz="1000" b="0" dirty="0" err="1">
                 <a:solidFill>
-                  <a:srgbClr val="595959"/>
+                  <a:srgbClr val="000000"/>
                 </a:solidFill>
                 <a:latin typeface="맑은 고딕"/>
               </a:rPr>
@@ -11497,7 +11497,7 @@
             <a:r>
               <a:rPr sz="1000" b="0" dirty="0">
                 <a:solidFill>
-                  <a:srgbClr val="595959"/>
+                  <a:srgbClr val="000000"/>
                 </a:solidFill>
                 <a:latin typeface="맑은 고딕"/>
               </a:rPr>
@@ -11506,7 +11506,7 @@
             <a:r>
               <a:rPr sz="1000" b="0" dirty="0" err="1">
                 <a:solidFill>
-                  <a:srgbClr val="595959"/>
+                  <a:srgbClr val="000000"/>
                 </a:solidFill>
                 <a:latin typeface="맑은 고딕"/>
               </a:rPr>
@@ -11515,7 +11515,7 @@
             <a:r>
               <a:rPr sz="1000" b="0" dirty="0">
                 <a:solidFill>
-                  <a:srgbClr val="595959"/>
+                  <a:srgbClr val="000000"/>
                 </a:solidFill>
                 <a:latin typeface="맑은 고딕"/>
               </a:rPr>
@@ -11524,7 +11524,7 @@
             <a:r>
               <a:rPr sz="1000" b="0" dirty="0" err="1">
                 <a:solidFill>
-                  <a:srgbClr val="595959"/>
+                  <a:srgbClr val="000000"/>
                 </a:solidFill>
                 <a:latin typeface="맑은 고딕"/>
               </a:rPr>
@@ -11533,7 +11533,7 @@
             <a:r>
               <a:rPr sz="1000" b="0" dirty="0">
                 <a:solidFill>
-                  <a:srgbClr val="595959"/>
+                  <a:srgbClr val="000000"/>
                 </a:solidFill>
                 <a:latin typeface="맑은 고딕"/>
               </a:rPr>
@@ -11542,7 +11542,7 @@
             <a:r>
               <a:rPr sz="1000" b="0" dirty="0" err="1">
                 <a:solidFill>
-                  <a:srgbClr val="595959"/>
+                  <a:srgbClr val="000000"/>
                 </a:solidFill>
                 <a:latin typeface="맑은 고딕"/>
               </a:rPr>
@@ -11551,7 +11551,7 @@
             <a:r>
               <a:rPr sz="1000" b="0" dirty="0">
                 <a:solidFill>
-                  <a:srgbClr val="595959"/>
+                  <a:srgbClr val="000000"/>
                 </a:solidFill>
                 <a:latin typeface="맑은 고딕"/>
               </a:rPr>
@@ -11560,7 +11560,7 @@
             <a:r>
               <a:rPr sz="1000" b="0" dirty="0" err="1">
                 <a:solidFill>
-                  <a:srgbClr val="595959"/>
+                  <a:srgbClr val="000000"/>
                 </a:solidFill>
                 <a:latin typeface="맑은 고딕"/>
               </a:rPr>
@@ -11569,7 +11569,7 @@
             <a:r>
               <a:rPr sz="1000" b="0" dirty="0">
                 <a:solidFill>
-                  <a:srgbClr val="595959"/>
+                  <a:srgbClr val="000000"/>
                 </a:solidFill>
                 <a:latin typeface="맑은 고딕"/>
               </a:rPr>
@@ -11578,7 +11578,7 @@
             <a:r>
               <a:rPr sz="1000" b="0" dirty="0" err="1">
                 <a:solidFill>
-                  <a:srgbClr val="595959"/>
+                  <a:srgbClr val="000000"/>
                 </a:solidFill>
                 <a:latin typeface="맑은 고딕"/>
               </a:rPr>
@@ -11587,7 +11587,7 @@
             <a:r>
               <a:rPr sz="1000" b="0" dirty="0">
                 <a:solidFill>
-                  <a:srgbClr val="595959"/>
+                  <a:srgbClr val="000000"/>
                 </a:solidFill>
                 <a:latin typeface="맑은 고딕"/>
               </a:rPr>
@@ -11596,7 +11596,7 @@
             <a:r>
               <a:rPr sz="1000" b="0" dirty="0" err="1">
                 <a:solidFill>
-                  <a:srgbClr val="595959"/>
+                  <a:srgbClr val="000000"/>
                 </a:solidFill>
                 <a:latin typeface="맑은 고딕"/>
               </a:rPr>
@@ -11605,7 +11605,7 @@
             <a:r>
               <a:rPr sz="1000" b="0" dirty="0">
                 <a:solidFill>
-                  <a:srgbClr val="595959"/>
+                  <a:srgbClr val="000000"/>
                 </a:solidFill>
                 <a:latin typeface="맑은 고딕"/>
               </a:rPr>
@@ -11614,7 +11614,7 @@
             <a:r>
               <a:rPr sz="1000" b="0" dirty="0" err="1">
                 <a:solidFill>
-                  <a:srgbClr val="595959"/>
+                  <a:srgbClr val="000000"/>
                 </a:solidFill>
                 <a:latin typeface="맑은 고딕"/>
               </a:rPr>
@@ -11623,7 +11623,7 @@
             <a:r>
               <a:rPr sz="1000" b="0" dirty="0">
                 <a:solidFill>
-                  <a:srgbClr val="595959"/>
+                  <a:srgbClr val="000000"/>
                 </a:solidFill>
                 <a:latin typeface="맑은 고딕"/>
               </a:rPr>
@@ -11632,7 +11632,7 @@
             <a:r>
               <a:rPr sz="1000" b="0" dirty="0" err="1">
                 <a:solidFill>
-                  <a:srgbClr val="595959"/>
+                  <a:srgbClr val="000000"/>
                 </a:solidFill>
                 <a:latin typeface="맑은 고딕"/>
               </a:rPr>
@@ -11641,7 +11641,7 @@
             <a:r>
               <a:rPr sz="1000" b="0" dirty="0">
                 <a:solidFill>
-                  <a:srgbClr val="595959"/>
+                  <a:srgbClr val="000000"/>
                 </a:solidFill>
                 <a:latin typeface="맑은 고딕"/>
               </a:rPr>
@@ -11650,7 +11650,7 @@
             <a:r>
               <a:rPr sz="1000" b="0" dirty="0" err="1">
                 <a:solidFill>
-                  <a:srgbClr val="595959"/>
+                  <a:srgbClr val="000000"/>
                 </a:solidFill>
                 <a:latin typeface="맑은 고딕"/>
               </a:rPr>
@@ -11659,7 +11659,7 @@
             <a:r>
               <a:rPr sz="1000" b="0" dirty="0">
                 <a:solidFill>
-                  <a:srgbClr val="595959"/>
+                  <a:srgbClr val="000000"/>
                 </a:solidFill>
                 <a:latin typeface="맑은 고딕"/>
               </a:rPr>
@@ -11668,7 +11668,7 @@
             <a:r>
               <a:rPr sz="1000" b="0" dirty="0" err="1">
                 <a:solidFill>
-                  <a:srgbClr val="595959"/>
+                  <a:srgbClr val="000000"/>
                 </a:solidFill>
                 <a:latin typeface="맑은 고딕"/>
               </a:rPr>
@@ -11677,7 +11677,7 @@
             <a:r>
               <a:rPr sz="1000" b="0" dirty="0">
                 <a:solidFill>
-                  <a:srgbClr val="595959"/>
+                  <a:srgbClr val="000000"/>
                 </a:solidFill>
                 <a:latin typeface="맑은 고딕"/>
               </a:rPr>
@@ -11686,7 +11686,7 @@
             <a:r>
               <a:rPr sz="1000" b="0" dirty="0" err="1">
                 <a:solidFill>
-                  <a:srgbClr val="595959"/>
+                  <a:srgbClr val="000000"/>
                 </a:solidFill>
                 <a:latin typeface="맑은 고딕"/>
               </a:rPr>
@@ -11695,7 +11695,7 @@
             <a:r>
               <a:rPr sz="1000" b="0" dirty="0">
                 <a:solidFill>
-                  <a:srgbClr val="595959"/>
+                  <a:srgbClr val="000000"/>
                 </a:solidFill>
                 <a:latin typeface="맑은 고딕"/>
               </a:rPr>
@@ -11704,7 +11704,7 @@
             <a:r>
               <a:rPr sz="1000" b="0" dirty="0" err="1">
                 <a:solidFill>
-                  <a:srgbClr val="595959"/>
+                  <a:srgbClr val="000000"/>
                 </a:solidFill>
                 <a:latin typeface="맑은 고딕"/>
               </a:rPr>
@@ -11713,7 +11713,7 @@
             <a:r>
               <a:rPr sz="1000" b="0" dirty="0">
                 <a:solidFill>
-                  <a:srgbClr val="595959"/>
+                  <a:srgbClr val="000000"/>
                 </a:solidFill>
                 <a:latin typeface="맑은 고딕"/>
               </a:rPr>
@@ -11722,7 +11722,7 @@
             <a:r>
               <a:rPr sz="1000" b="0" dirty="0" err="1">
                 <a:solidFill>
-                  <a:srgbClr val="595959"/>
+                  <a:srgbClr val="000000"/>
                 </a:solidFill>
                 <a:latin typeface="맑은 고딕"/>
               </a:rPr>
@@ -11731,7 +11731,7 @@
             <a:r>
               <a:rPr sz="1000" b="0" dirty="0">
                 <a:solidFill>
-                  <a:srgbClr val="595959"/>
+                  <a:srgbClr val="000000"/>
                 </a:solidFill>
                 <a:latin typeface="맑은 고딕"/>
               </a:rPr>
@@ -11740,7 +11740,7 @@
             <a:r>
               <a:rPr sz="1000" b="0" dirty="0" err="1">
                 <a:solidFill>
-                  <a:srgbClr val="595959"/>
+                  <a:srgbClr val="000000"/>
                 </a:solidFill>
                 <a:latin typeface="맑은 고딕"/>
               </a:rPr>
@@ -11749,7 +11749,7 @@
             <a:r>
               <a:rPr sz="1000" b="0" dirty="0">
                 <a:solidFill>
-                  <a:srgbClr val="595959"/>
+                  <a:srgbClr val="000000"/>
                 </a:solidFill>
                 <a:latin typeface="맑은 고딕"/>
               </a:rPr>
@@ -11758,7 +11758,7 @@
             <a:r>
               <a:rPr sz="1000" b="0" dirty="0" err="1">
                 <a:solidFill>
-                  <a:srgbClr val="595959"/>
+                  <a:srgbClr val="000000"/>
                 </a:solidFill>
                 <a:latin typeface="맑은 고딕"/>
               </a:rPr>
@@ -11767,7 +11767,7 @@
             <a:r>
               <a:rPr sz="1000" b="0" dirty="0">
                 <a:solidFill>
-                  <a:srgbClr val="595959"/>
+                  <a:srgbClr val="000000"/>
                 </a:solidFill>
                 <a:latin typeface="맑은 고딕"/>
               </a:rPr>
@@ -11779,7 +11779,7 @@
             <a:r>
               <a:rPr sz="1000" b="0" dirty="0">
                 <a:solidFill>
-                  <a:srgbClr val="595959"/>
+                  <a:srgbClr val="C00000"/>
                 </a:solidFill>
                 <a:latin typeface="맑은 고딕"/>
               </a:rPr>
@@ -11788,7 +11788,7 @@
             <a:r>
               <a:rPr lang="ko-KR" altLang="en-US" sz="1000" dirty="0">
                 <a:solidFill>
-                  <a:srgbClr val="595959"/>
+                  <a:srgbClr val="C00000"/>
                 </a:solidFill>
                 <a:latin typeface="맑은 고딕"/>
               </a:rPr>
@@ -11797,7 +11797,7 @@
             <a:r>
               <a:rPr sz="1000" b="0" dirty="0">
                 <a:solidFill>
-                  <a:srgbClr val="595959"/>
+                  <a:srgbClr val="C00000"/>
                 </a:solidFill>
                 <a:latin typeface="맑은 고딕"/>
               </a:rPr>
@@ -11806,7 +11806,7 @@
             <a:r>
               <a:rPr sz="1000" b="0" dirty="0" err="1">
                 <a:solidFill>
-                  <a:srgbClr val="595959"/>
+                  <a:srgbClr val="C00000"/>
                 </a:solidFill>
                 <a:latin typeface="맑은 고딕"/>
               </a:rPr>
@@ -11815,7 +11815,7 @@
             <a:r>
               <a:rPr sz="1000" b="0" dirty="0">
                 <a:solidFill>
-                  <a:srgbClr val="595959"/>
+                  <a:srgbClr val="C00000"/>
                 </a:solidFill>
                 <a:latin typeface="맑은 고딕"/>
               </a:rPr>
@@ -11824,7 +11824,7 @@
             <a:r>
               <a:rPr sz="1000" b="0" dirty="0" err="1">
                 <a:solidFill>
-                  <a:srgbClr val="595959"/>
+                  <a:srgbClr val="C00000"/>
                 </a:solidFill>
                 <a:latin typeface="맑은 고딕"/>
               </a:rPr>
@@ -11833,7 +11833,7 @@
             <a:r>
               <a:rPr sz="1000" b="0" dirty="0">
                 <a:solidFill>
-                  <a:srgbClr val="595959"/>
+                  <a:srgbClr val="C00000"/>
                 </a:solidFill>
                 <a:latin typeface="맑은 고딕"/>
               </a:rPr>
@@ -11842,7 +11842,7 @@
             <a:r>
               <a:rPr sz="1000" b="0" dirty="0" err="1">
                 <a:solidFill>
-                  <a:srgbClr val="595959"/>
+                  <a:srgbClr val="C00000"/>
                 </a:solidFill>
                 <a:latin typeface="맑은 고딕"/>
               </a:rPr>
@@ -11851,7 +11851,7 @@
             <a:r>
               <a:rPr sz="1000" b="0" dirty="0">
                 <a:solidFill>
-                  <a:srgbClr val="595959"/>
+                  <a:srgbClr val="C00000"/>
                 </a:solidFill>
                 <a:latin typeface="맑은 고딕"/>
               </a:rPr>
@@ -11860,7 +11860,7 @@
             <a:r>
               <a:rPr sz="1000" b="0" dirty="0" err="1">
                 <a:solidFill>
-                  <a:srgbClr val="595959"/>
+                  <a:srgbClr val="C00000"/>
                 </a:solidFill>
                 <a:latin typeface="맑은 고딕"/>
               </a:rPr>
@@ -11869,7 +11869,7 @@
             <a:r>
               <a:rPr sz="1000" b="0" dirty="0">
                 <a:solidFill>
-                  <a:srgbClr val="595959"/>
+                  <a:srgbClr val="C00000"/>
                 </a:solidFill>
                 <a:latin typeface="맑은 고딕"/>
               </a:rPr>
@@ -11878,7 +11878,7 @@
             <a:r>
               <a:rPr sz="1000" b="0" dirty="0" err="1">
                 <a:solidFill>
-                  <a:srgbClr val="595959"/>
+                  <a:srgbClr val="C00000"/>
                 </a:solidFill>
                 <a:latin typeface="맑은 고딕"/>
               </a:rPr>
@@ -11887,7 +11887,7 @@
             <a:r>
               <a:rPr sz="1000" b="0" dirty="0">
                 <a:solidFill>
-                  <a:srgbClr val="595959"/>
+                  <a:srgbClr val="C00000"/>
                 </a:solidFill>
                 <a:latin typeface="맑은 고딕"/>
               </a:rPr>
@@ -11896,7 +11896,7 @@
             <a:r>
               <a:rPr sz="1000" b="0" dirty="0" err="1">
                 <a:solidFill>
-                  <a:srgbClr val="595959"/>
+                  <a:srgbClr val="C00000"/>
                 </a:solidFill>
                 <a:latin typeface="맑은 고딕"/>
               </a:rPr>
@@ -11905,7 +11905,7 @@
             <a:r>
               <a:rPr sz="1000" b="0" dirty="0">
                 <a:solidFill>
-                  <a:srgbClr val="595959"/>
+                  <a:srgbClr val="C00000"/>
                 </a:solidFill>
                 <a:latin typeface="맑은 고딕"/>
               </a:rPr>
@@ -11914,7 +11914,7 @@
             <a:r>
               <a:rPr sz="1000" b="0" dirty="0" err="1">
                 <a:solidFill>
-                  <a:srgbClr val="595959"/>
+                  <a:srgbClr val="C00000"/>
                 </a:solidFill>
                 <a:latin typeface="맑은 고딕"/>
               </a:rPr>
@@ -11923,7 +11923,7 @@
             <a:r>
               <a:rPr sz="1000" b="0" dirty="0">
                 <a:solidFill>
-                  <a:srgbClr val="595959"/>
+                  <a:srgbClr val="C00000"/>
                 </a:solidFill>
                 <a:latin typeface="맑은 고딕"/>
               </a:rPr>
@@ -11932,7 +11932,7 @@
             <a:r>
               <a:rPr sz="1000" b="0" dirty="0" err="1">
                 <a:solidFill>
-                  <a:srgbClr val="595959"/>
+                  <a:srgbClr val="C00000"/>
                 </a:solidFill>
                 <a:latin typeface="맑은 고딕"/>
               </a:rPr>
@@ -11941,7 +11941,7 @@
             <a:r>
               <a:rPr sz="1000" b="0" dirty="0">
                 <a:solidFill>
-                  <a:srgbClr val="595959"/>
+                  <a:srgbClr val="C00000"/>
                 </a:solidFill>
                 <a:latin typeface="맑은 고딕"/>
               </a:rPr>
@@ -11950,7 +11950,7 @@
             <a:r>
               <a:rPr sz="1000" b="0" dirty="0" err="1">
                 <a:solidFill>
-                  <a:srgbClr val="595959"/>
+                  <a:srgbClr val="C00000"/>
                 </a:solidFill>
                 <a:latin typeface="맑은 고딕"/>
               </a:rPr>
@@ -11959,7 +11959,7 @@
             <a:r>
               <a:rPr sz="1000" b="0" dirty="0">
                 <a:solidFill>
-                  <a:srgbClr val="595959"/>
+                  <a:srgbClr val="C00000"/>
                 </a:solidFill>
                 <a:latin typeface="맑은 고딕"/>
               </a:rPr>
@@ -11968,7 +11968,7 @@
             <a:r>
               <a:rPr sz="1000" b="0" dirty="0" err="1">
                 <a:solidFill>
-                  <a:srgbClr val="595959"/>
+                  <a:srgbClr val="C00000"/>
                 </a:solidFill>
                 <a:latin typeface="맑은 고딕"/>
               </a:rPr>
@@ -11977,7 +11977,7 @@
             <a:r>
               <a:rPr sz="1000" b="0" dirty="0">
                 <a:solidFill>
-                  <a:srgbClr val="595959"/>
+                  <a:srgbClr val="C00000"/>
                 </a:solidFill>
                 <a:latin typeface="맑은 고딕"/>
               </a:rPr>
@@ -11986,7 +11986,7 @@
             <a:r>
               <a:rPr sz="1000" b="0" dirty="0" err="1">
                 <a:solidFill>
-                  <a:srgbClr val="595959"/>
+                  <a:srgbClr val="C00000"/>
                 </a:solidFill>
                 <a:latin typeface="맑은 고딕"/>
               </a:rPr>
@@ -11995,7 +11995,7 @@
             <a:r>
               <a:rPr sz="1000" b="0" dirty="0">
                 <a:solidFill>
-                  <a:srgbClr val="595959"/>
+                  <a:srgbClr val="C00000"/>
                 </a:solidFill>
                 <a:latin typeface="맑은 고딕"/>
               </a:rPr>
@@ -12004,7 +12004,7 @@
             <a:r>
               <a:rPr sz="1000" b="0" dirty="0" err="1">
                 <a:solidFill>
-                  <a:srgbClr val="595959"/>
+                  <a:srgbClr val="C00000"/>
                 </a:solidFill>
                 <a:latin typeface="맑은 고딕"/>
               </a:rPr>
@@ -12013,7 +12013,7 @@
             <a:r>
               <a:rPr sz="1000" b="0" dirty="0">
                 <a:solidFill>
-                  <a:srgbClr val="595959"/>
+                  <a:srgbClr val="C00000"/>
                 </a:solidFill>
                 <a:latin typeface="맑은 고딕"/>
               </a:rPr>
@@ -12022,7 +12022,7 @@
             <a:r>
               <a:rPr sz="1000" b="0" dirty="0" err="1">
                 <a:solidFill>
-                  <a:srgbClr val="595959"/>
+                  <a:srgbClr val="C00000"/>
                 </a:solidFill>
                 <a:latin typeface="맑은 고딕"/>
               </a:rPr>
@@ -12031,7 +12031,7 @@
             <a:r>
               <a:rPr sz="1000" b="0" dirty="0">
                 <a:solidFill>
-                  <a:srgbClr val="595959"/>
+                  <a:srgbClr val="C00000"/>
                 </a:solidFill>
                 <a:latin typeface="맑은 고딕"/>
               </a:rPr>
@@ -12040,7 +12040,7 @@
             <a:r>
               <a:rPr sz="1000" b="0" dirty="0" err="1">
                 <a:solidFill>
-                  <a:srgbClr val="595959"/>
+                  <a:srgbClr val="C00000"/>
                 </a:solidFill>
                 <a:latin typeface="맑은 고딕"/>
               </a:rPr>
@@ -12049,7 +12049,7 @@
             <a:r>
               <a:rPr sz="1000" b="0" dirty="0">
                 <a:solidFill>
-                  <a:srgbClr val="595959"/>
+                  <a:srgbClr val="C00000"/>
                 </a:solidFill>
                 <a:latin typeface="맑은 고딕"/>
               </a:rPr>
@@ -12058,7 +12058,7 @@
             <a:r>
               <a:rPr sz="1000" b="0" dirty="0" err="1">
                 <a:solidFill>
-                  <a:srgbClr val="595959"/>
+                  <a:srgbClr val="C00000"/>
                 </a:solidFill>
                 <a:latin typeface="맑은 고딕"/>
               </a:rPr>
@@ -12067,7 +12067,7 @@
             <a:r>
               <a:rPr sz="1000" b="0" dirty="0">
                 <a:solidFill>
-                  <a:srgbClr val="595959"/>
+                  <a:srgbClr val="C00000"/>
                 </a:solidFill>
                 <a:latin typeface="맑은 고딕"/>
               </a:rPr>
@@ -12102,7 +12102,7 @@
             <a:r>
               <a:rPr sz="1000" b="0">
                 <a:solidFill>
-                  <a:srgbClr val="595959"/>
+                  <a:srgbClr val="000000"/>
                 </a:solidFill>
                 <a:latin typeface="맑은 고딕"/>
               </a:rPr>
@@ -12137,7 +12137,7 @@
             <a:r>
               <a:rPr sz="1000" b="0">
                 <a:solidFill>
-                  <a:srgbClr val="595959"/>
+                  <a:srgbClr val="000000"/>
                 </a:solidFill>
                 <a:latin typeface="맑은 고딕"/>
               </a:rPr>
@@ -12148,28 +12148,22 @@
       </p:sp>
       <p:pic>
         <p:nvPicPr>
-          <p:cNvPr id="9" name="그림 8">
-            <a:extLst>
-              <a:ext uri="{FF2B5EF4-FFF2-40B4-BE49-F238E27FC236}">
-                <a16:creationId xmlns:a16="http://schemas.microsoft.com/office/drawing/2014/main" id="{DFB7B544-EF96-B7D2-5985-CB1EB489E097}"/>
-              </a:ext>
-            </a:extLst>
-          </p:cNvPr>
+          <p:cNvPr id="8" name="Picture 7" descr="main_0.png"/>
           <p:cNvPicPr>
             <a:picLocks noChangeAspect="1"/>
           </p:cNvPicPr>
           <p:nvPr/>
         </p:nvPicPr>
         <p:blipFill>
-          <a:blip r:embed="rId2"/>
+          <a:blip r:embed="rId3"/>
           <a:stretch>
             <a:fillRect/>
           </a:stretch>
         </p:blipFill>
         <p:spPr>
           <a:xfrm>
-            <a:off x="536509" y="1353127"/>
-            <a:ext cx="7705222" cy="4151746"/>
+            <a:off x="559840" y="1353127"/>
+            <a:ext cx="7658560" cy="4151746"/>
           </a:xfrm>
           <a:prstGeom prst="rect">
             <a:avLst/>
@@ -12227,7 +12221,7 @@
             <a:r>
               <a:rPr sz="2600" b="1">
                 <a:solidFill>
-                  <a:srgbClr val="1E2761"/>
+                  <a:srgbClr val="000000"/>
                 </a:solidFill>
                 <a:latin typeface="맑은 고딕"/>
               </a:rPr>
@@ -12332,7 +12326,7 @@
             <a:r>
               <a:rPr sz="1300" b="1">
                 <a:solidFill>
-                  <a:srgbClr val="1E2761"/>
+                  <a:srgbClr val="000000"/>
                 </a:solidFill>
                 <a:latin typeface="맑은 고딕"/>
               </a:rPr>
@@ -12344,7 +12338,7 @@
             <a:r>
               <a:rPr sz="1100" b="0">
                 <a:solidFill>
-                  <a:srgbClr val="595959"/>
+                  <a:srgbClr val="000000"/>
                 </a:solidFill>
                 <a:latin typeface="맑은 고딕"/>
               </a:rPr>
@@ -12365,7 +12359,7 @@
             <a:r>
               <a:rPr sz="1300" b="1">
                 <a:solidFill>
-                  <a:srgbClr val="1E2761"/>
+                  <a:srgbClr val="000000"/>
                 </a:solidFill>
                 <a:latin typeface="맑은 고딕"/>
               </a:rPr>
@@ -12377,7 +12371,7 @@
             <a:r>
               <a:rPr sz="1100" b="0">
                 <a:solidFill>
-                  <a:srgbClr val="595959"/>
+                  <a:srgbClr val="000000"/>
                 </a:solidFill>
                 <a:latin typeface="맑은 고딕"/>
               </a:rPr>
@@ -12398,7 +12392,7 @@
             <a:r>
               <a:rPr sz="1300" b="1">
                 <a:solidFill>
-                  <a:srgbClr val="1E2761"/>
+                  <a:srgbClr val="000000"/>
                 </a:solidFill>
                 <a:latin typeface="맑은 고딕"/>
               </a:rPr>
@@ -12410,7 +12404,7 @@
             <a:r>
               <a:rPr sz="1000" b="0">
                 <a:solidFill>
-                  <a:srgbClr val="595959"/>
+                  <a:srgbClr val="000000"/>
                 </a:solidFill>
                 <a:latin typeface="맑은 고딕"/>
               </a:rPr>
@@ -12422,7 +12416,7 @@
             <a:r>
               <a:rPr sz="1000" b="0">
                 <a:solidFill>
-                  <a:srgbClr val="595959"/>
+                  <a:srgbClr val="000000"/>
                 </a:solidFill>
                 <a:latin typeface="맑은 고딕"/>
               </a:rPr>
@@ -12457,7 +12451,7 @@
             <a:r>
               <a:rPr sz="1000" b="0">
                 <a:solidFill>
-                  <a:srgbClr val="595959"/>
+                  <a:srgbClr val="000000"/>
                 </a:solidFill>
                 <a:latin typeface="맑은 고딕"/>
               </a:rPr>
@@ -12492,7 +12486,7 @@
             <a:r>
               <a:rPr sz="1000" b="0">
                 <a:solidFill>
-                  <a:srgbClr val="595959"/>
+                  <a:srgbClr val="000000"/>
                 </a:solidFill>
                 <a:latin typeface="맑은 고딕"/>
               </a:rPr>
@@ -12552,7 +12546,7 @@
             <a:r>
               <a:rPr sz="2600" b="1">
                 <a:solidFill>
-                  <a:srgbClr val="1E2761"/>
+                  <a:srgbClr val="000000"/>
                 </a:solidFill>
                 <a:latin typeface="맑은 고딕"/>
               </a:rPr>
@@ -12657,7 +12651,7 @@
             <a:r>
               <a:rPr sz="1300" b="1">
                 <a:solidFill>
-                  <a:srgbClr val="1E2761"/>
+                  <a:srgbClr val="000000"/>
                 </a:solidFill>
                 <a:latin typeface="맑은 고딕"/>
               </a:rPr>
@@ -12669,7 +12663,7 @@
             <a:r>
               <a:rPr sz="1100" b="0">
                 <a:solidFill>
-                  <a:srgbClr val="595959"/>
+                  <a:srgbClr val="000000"/>
                 </a:solidFill>
                 <a:latin typeface="맑은 고딕"/>
               </a:rPr>
@@ -12690,7 +12684,7 @@
             <a:r>
               <a:rPr sz="1300" b="1">
                 <a:solidFill>
-                  <a:srgbClr val="1E2761"/>
+                  <a:srgbClr val="000000"/>
                 </a:solidFill>
                 <a:latin typeface="맑은 고딕"/>
               </a:rPr>
@@ -12702,7 +12696,7 @@
             <a:r>
               <a:rPr sz="1100" b="0">
                 <a:solidFill>
-                  <a:srgbClr val="595959"/>
+                  <a:srgbClr val="000000"/>
                 </a:solidFill>
                 <a:latin typeface="맑은 고딕"/>
               </a:rPr>
@@ -12723,7 +12717,7 @@
             <a:r>
               <a:rPr sz="1300" b="1">
                 <a:solidFill>
-                  <a:srgbClr val="1E2761"/>
+                  <a:srgbClr val="000000"/>
                 </a:solidFill>
                 <a:latin typeface="맑은 고딕"/>
               </a:rPr>
@@ -12735,7 +12729,7 @@
             <a:r>
               <a:rPr sz="1000" b="0">
                 <a:solidFill>
-                  <a:srgbClr val="595959"/>
+                  <a:srgbClr val="000000"/>
                 </a:solidFill>
                 <a:latin typeface="맑은 고딕"/>
               </a:rPr>
@@ -12747,7 +12741,7 @@
             <a:r>
               <a:rPr sz="1000" b="0">
                 <a:solidFill>
-                  <a:srgbClr val="595959"/>
+                  <a:srgbClr val="000000"/>
                 </a:solidFill>
                 <a:latin typeface="맑은 고딕"/>
               </a:rPr>
@@ -12782,7 +12776,7 @@
             <a:r>
               <a:rPr sz="1000" b="0">
                 <a:solidFill>
-                  <a:srgbClr val="595959"/>
+                  <a:srgbClr val="000000"/>
                 </a:solidFill>
                 <a:latin typeface="맑은 고딕"/>
               </a:rPr>
@@ -12817,7 +12811,7 @@
             <a:r>
               <a:rPr sz="1000" b="0">
                 <a:solidFill>
-                  <a:srgbClr val="595959"/>
+                  <a:srgbClr val="000000"/>
                 </a:solidFill>
                 <a:latin typeface="맑은 고딕"/>
               </a:rPr>
@@ -12877,7 +12871,7 @@
             <a:r>
               <a:rPr sz="2600" b="1">
                 <a:solidFill>
-                  <a:srgbClr val="1E2761"/>
+                  <a:srgbClr val="000000"/>
                 </a:solidFill>
                 <a:latin typeface="맑은 고딕"/>
               </a:rPr>
@@ -12982,7 +12976,7 @@
             <a:r>
               <a:rPr sz="1300" b="1">
                 <a:solidFill>
-                  <a:srgbClr val="1E2761"/>
+                  <a:srgbClr val="000000"/>
                 </a:solidFill>
                 <a:latin typeface="맑은 고딕"/>
               </a:rPr>
@@ -12994,7 +12988,7 @@
             <a:r>
               <a:rPr sz="1100" b="0">
                 <a:solidFill>
-                  <a:srgbClr val="595959"/>
+                  <a:srgbClr val="000000"/>
                 </a:solidFill>
                 <a:latin typeface="맑은 고딕"/>
               </a:rPr>
@@ -13015,7 +13009,7 @@
             <a:r>
               <a:rPr sz="1300" b="1">
                 <a:solidFill>
-                  <a:srgbClr val="1E2761"/>
+                  <a:srgbClr val="000000"/>
                 </a:solidFill>
                 <a:latin typeface="맑은 고딕"/>
               </a:rPr>
@@ -13027,7 +13021,7 @@
             <a:r>
               <a:rPr sz="1100" b="0">
                 <a:solidFill>
-                  <a:srgbClr val="595959"/>
+                  <a:srgbClr val="000000"/>
                 </a:solidFill>
                 <a:latin typeface="맑은 고딕"/>
               </a:rPr>
@@ -13048,7 +13042,7 @@
             <a:r>
               <a:rPr sz="1300" b="1">
                 <a:solidFill>
-                  <a:srgbClr val="1E2761"/>
+                  <a:srgbClr val="000000"/>
                 </a:solidFill>
                 <a:latin typeface="맑은 고딕"/>
               </a:rPr>
@@ -13060,7 +13054,7 @@
             <a:r>
               <a:rPr sz="1000" b="0">
                 <a:solidFill>
-                  <a:srgbClr val="595959"/>
+                  <a:srgbClr val="000000"/>
                 </a:solidFill>
                 <a:latin typeface="맑은 고딕"/>
               </a:rPr>
@@ -13072,7 +13066,7 @@
             <a:r>
               <a:rPr sz="1000" b="0">
                 <a:solidFill>
-                  <a:srgbClr val="595959"/>
+                  <a:srgbClr val="C00000"/>
                 </a:solidFill>
                 <a:latin typeface="맑은 고딕"/>
               </a:rPr>
@@ -13109,7 +13103,7 @@
             <a:r>
               <a:rPr sz="1000" b="0">
                 <a:solidFill>
-                  <a:srgbClr val="595959"/>
+                  <a:srgbClr val="000000"/>
                 </a:solidFill>
                 <a:latin typeface="맑은 고딕"/>
               </a:rPr>
@@ -13144,7 +13138,7 @@
             <a:r>
               <a:rPr sz="1000" b="0">
                 <a:solidFill>
-                  <a:srgbClr val="595959"/>
+                  <a:srgbClr val="000000"/>
                 </a:solidFill>
                 <a:latin typeface="맑은 고딕"/>
               </a:rPr>
@@ -13204,7 +13198,7 @@
             <a:r>
               <a:rPr sz="2600" b="1">
                 <a:solidFill>
-                  <a:srgbClr val="1E2761"/>
+                  <a:srgbClr val="000000"/>
                 </a:solidFill>
                 <a:latin typeface="맑은 고딕"/>
               </a:rPr>
@@ -13309,7 +13303,7 @@
             <a:r>
               <a:rPr sz="1300" b="1">
                 <a:solidFill>
-                  <a:srgbClr val="1E2761"/>
+                  <a:srgbClr val="000000"/>
                 </a:solidFill>
                 <a:latin typeface="맑은 고딕"/>
               </a:rPr>
@@ -13321,7 +13315,7 @@
             <a:r>
               <a:rPr sz="1100" b="0">
                 <a:solidFill>
-                  <a:srgbClr val="595959"/>
+                  <a:srgbClr val="000000"/>
                 </a:solidFill>
                 <a:latin typeface="맑은 고딕"/>
               </a:rPr>
@@ -13342,7 +13336,7 @@
             <a:r>
               <a:rPr sz="1300" b="1">
                 <a:solidFill>
-                  <a:srgbClr val="1E2761"/>
+                  <a:srgbClr val="000000"/>
                 </a:solidFill>
                 <a:latin typeface="맑은 고딕"/>
               </a:rPr>
@@ -13354,7 +13348,7 @@
             <a:r>
               <a:rPr sz="1100" b="0">
                 <a:solidFill>
-                  <a:srgbClr val="595959"/>
+                  <a:srgbClr val="000000"/>
                 </a:solidFill>
                 <a:latin typeface="맑은 고딕"/>
               </a:rPr>
@@ -13375,7 +13369,7 @@
             <a:r>
               <a:rPr sz="1300" b="1">
                 <a:solidFill>
-                  <a:srgbClr val="1E2761"/>
+                  <a:srgbClr val="000000"/>
                 </a:solidFill>
                 <a:latin typeface="맑은 고딕"/>
               </a:rPr>
@@ -13387,7 +13381,7 @@
             <a:r>
               <a:rPr sz="1000" b="0">
                 <a:solidFill>
-                  <a:srgbClr val="595959"/>
+                  <a:srgbClr val="000000"/>
                 </a:solidFill>
                 <a:latin typeface="맑은 고딕"/>
               </a:rPr>
@@ -13399,7 +13393,7 @@
             <a:r>
               <a:rPr sz="1000" b="0">
                 <a:solidFill>
-                  <a:srgbClr val="595959"/>
+                  <a:srgbClr val="000000"/>
                 </a:solidFill>
                 <a:latin typeface="맑은 고딕"/>
               </a:rPr>
@@ -13411,7 +13405,7 @@
             <a:r>
               <a:rPr sz="1000" b="0">
                 <a:solidFill>
-                  <a:srgbClr val="595959"/>
+                  <a:srgbClr val="000000"/>
                 </a:solidFill>
                 <a:latin typeface="맑은 고딕"/>
               </a:rPr>
@@ -13446,7 +13440,7 @@
             <a:r>
               <a:rPr sz="1000" b="0">
                 <a:solidFill>
-                  <a:srgbClr val="595959"/>
+                  <a:srgbClr val="000000"/>
                 </a:solidFill>
                 <a:latin typeface="맑은 고딕"/>
               </a:rPr>
@@ -13481,7 +13475,7 @@
             <a:r>
               <a:rPr sz="1000" b="0">
                 <a:solidFill>
-                  <a:srgbClr val="595959"/>
+                  <a:srgbClr val="000000"/>
                 </a:solidFill>
                 <a:latin typeface="맑은 고딕"/>
               </a:rPr>
@@ -13541,7 +13535,7 @@
             <a:r>
               <a:rPr sz="2600" b="1">
                 <a:solidFill>
-                  <a:srgbClr val="1E2761"/>
+                  <a:srgbClr val="000000"/>
                 </a:solidFill>
                 <a:latin typeface="맑은 고딕"/>
               </a:rPr>
@@ -13646,7 +13640,7 @@
             <a:r>
               <a:rPr sz="1300" b="1">
                 <a:solidFill>
-                  <a:srgbClr val="1E2761"/>
+                  <a:srgbClr val="000000"/>
                 </a:solidFill>
                 <a:latin typeface="맑은 고딕"/>
               </a:rPr>
@@ -13658,7 +13652,7 @@
             <a:r>
               <a:rPr sz="1100" b="0">
                 <a:solidFill>
-                  <a:srgbClr val="595959"/>
+                  <a:srgbClr val="000000"/>
                 </a:solidFill>
                 <a:latin typeface="맑은 고딕"/>
               </a:rPr>
@@ -13679,7 +13673,7 @@
             <a:r>
               <a:rPr sz="1300" b="1">
                 <a:solidFill>
-                  <a:srgbClr val="1E2761"/>
+                  <a:srgbClr val="000000"/>
                 </a:solidFill>
                 <a:latin typeface="맑은 고딕"/>
               </a:rPr>
@@ -13691,7 +13685,7 @@
             <a:r>
               <a:rPr sz="1100" b="0">
                 <a:solidFill>
-                  <a:srgbClr val="595959"/>
+                  <a:srgbClr val="000000"/>
                 </a:solidFill>
                 <a:latin typeface="맑은 고딕"/>
               </a:rPr>
@@ -13726,7 +13720,7 @@
             <a:r>
               <a:rPr sz="1000" b="0">
                 <a:solidFill>
-                  <a:srgbClr val="595959"/>
+                  <a:srgbClr val="000000"/>
                 </a:solidFill>
                 <a:latin typeface="맑은 고딕"/>
               </a:rPr>
@@ -13761,7 +13755,7 @@
             <a:r>
               <a:rPr sz="1000" b="0">
                 <a:solidFill>
-                  <a:srgbClr val="595959"/>
+                  <a:srgbClr val="000000"/>
                 </a:solidFill>
                 <a:latin typeface="맑은 고딕"/>
               </a:rPr>

--- a/docs/산출물_20260909/06_ECS_화면설계서.pptx
+++ b/docs/산출물_20260909/06_ECS_화면설계서.pptx
@@ -8823,7 +8823,7 @@
           <p:nvPr/>
         </p:nvPicPr>
         <p:blipFill>
-          <a:blip r:embed="rId3"/>
+          <a:blip r:embed="rId4"/>
           <a:stretch>
             <a:fillRect/>
           </a:stretch>
@@ -8831,7 +8831,7 @@
         <p:spPr>
           <a:xfrm>
             <a:off x="2486856" y="1600646"/>
-            <a:ext cx="3804526" cy="4205348"/>
+            <a:ext cx="3804525" cy="4205348"/>
           </a:xfrm>
           <a:prstGeom prst="rect">
             <a:avLst/>
@@ -12155,7 +12155,7 @@
           <p:nvPr/>
         </p:nvPicPr>
         <p:blipFill>
-          <a:blip r:embed="rId3"/>
+          <a:blip r:embed="rId4"/>
           <a:stretch>
             <a:fillRect/>
           </a:stretch>
@@ -12163,7 +12163,7 @@
         <p:spPr>
           <a:xfrm>
             <a:off x="559840" y="1353127"/>
-            <a:ext cx="7658560" cy="4151746"/>
+            <a:ext cx="7658560" cy="4151745"/>
           </a:xfrm>
           <a:prstGeom prst="rect">
             <a:avLst/>

--- a/docs/산출물_20260909/06_ECS_화면설계서.pptx
+++ b/docs/산출물_20260909/06_ECS_화면설계서.pptx
@@ -8823,7 +8823,7 @@
           <p:nvPr/>
         </p:nvPicPr>
         <p:blipFill>
-          <a:blip r:embed="rId4"/>
+          <a:blip r:embed="rId5"/>
           <a:stretch>
             <a:fillRect/>
           </a:stretch>
@@ -8831,7 +8831,7 @@
         <p:spPr>
           <a:xfrm>
             <a:off x="2486856" y="1600646"/>
-            <a:ext cx="3804525" cy="4205348"/>
+            <a:ext cx="3804525" cy="4205347"/>
           </a:xfrm>
           <a:prstGeom prst="rect">
             <a:avLst/>
@@ -12148,7 +12148,7 @@
       </p:sp>
       <p:pic>
         <p:nvPicPr>
-          <p:cNvPr id="8" name="Picture 7" descr="main_0.png"/>
+          <p:cNvPr id="8" name="Picture 7" descr="image.png"/>
           <p:cNvPicPr>
             <a:picLocks noChangeAspect="1"/>
           </p:cNvPicPr>
@@ -12162,8 +12162,8 @@
         </p:blipFill>
         <p:spPr>
           <a:xfrm>
-            <a:off x="559840" y="1353127"/>
-            <a:ext cx="7658560" cy="4151745"/>
+            <a:off x="559841" y="1353127"/>
+            <a:ext cx="7658558" cy="4151745"/>
           </a:xfrm>
           <a:prstGeom prst="rect">
             <a:avLst/>

--- a/docs/산출물_20260909/06_ECS_화면설계서.pptx
+++ b/docs/산출물_20260909/06_ECS_화면설계서.pptx
@@ -3164,7 +3164,7 @@
         <p:spPr>
           <a:xfrm>
             <a:off x="914400" y="2194560"/>
-            <a:ext cx="10058400" cy="731520"/>
+            <a:ext cx="10058400" cy="430887"/>
           </a:xfrm>
           <a:prstGeom prst="rect">
             <a:avLst/>
@@ -3179,14 +3179,47 @@
           <a:p>
             <a:pPr algn="l"/>
             <a:r>
-              <a:rPr sz="2200" b="0">
-                <a:solidFill>
-                  <a:srgbClr val="000000"/>
-                </a:solidFill>
-                <a:latin typeface="맑은 고딕"/>
-              </a:rPr>
-              <a:t>LG 화학 1동 자동창고</a:t>
-            </a:r>
+              <a:rPr sz="2200" b="0" dirty="0">
+                <a:solidFill>
+                  <a:srgbClr val="000000"/>
+                </a:solidFill>
+                <a:latin typeface="맑은 고딕"/>
+              </a:rPr>
+              <a:t>LG </a:t>
+            </a:r>
+            <a:r>
+              <a:rPr sz="2200" b="0" dirty="0" err="1">
+                <a:solidFill>
+                  <a:srgbClr val="000000"/>
+                </a:solidFill>
+                <a:latin typeface="맑은 고딕"/>
+              </a:rPr>
+              <a:t>화학</a:t>
+            </a:r>
+            <a:r>
+              <a:rPr sz="2200" b="0" dirty="0">
+                <a:solidFill>
+                  <a:srgbClr val="000000"/>
+                </a:solidFill>
+                <a:latin typeface="맑은 고딕"/>
+              </a:rPr>
+              <a:t> 1동 </a:t>
+            </a:r>
+            <a:r>
+              <a:rPr sz="2200" b="0" dirty="0" err="1">
+                <a:solidFill>
+                  <a:srgbClr val="000000"/>
+                </a:solidFill>
+                <a:latin typeface="맑은 고딕"/>
+              </a:rPr>
+              <a:t>자동창고</a:t>
+            </a:r>
+            <a:endParaRPr sz="2200" b="0" dirty="0">
+              <a:solidFill>
+                <a:schemeClr val="bg1"/>
+              </a:solidFill>
+              <a:latin typeface="맑은 고딕"/>
+            </a:endParaRPr>
           </a:p>
         </p:txBody>
       </p:sp>
@@ -3199,7 +3232,7 @@
         <p:spPr>
           <a:xfrm>
             <a:off x="914400" y="2926080"/>
-            <a:ext cx="10058400" cy="1097280"/>
+            <a:ext cx="10058400" cy="830997"/>
           </a:xfrm>
           <a:prstGeom prst="rect">
             <a:avLst/>
@@ -3214,14 +3247,29 @@
           <a:p>
             <a:pPr algn="l"/>
             <a:r>
-              <a:rPr sz="4800" b="1">
-                <a:solidFill>
-                  <a:srgbClr val="C00000"/>
-                </a:solidFill>
-                <a:latin typeface="맑은 고딕"/>
-              </a:rPr>
-              <a:t>ECS 화면설계서</a:t>
-            </a:r>
+              <a:rPr sz="4800" b="1" dirty="0">
+                <a:solidFill>
+                  <a:srgbClr val="C00000"/>
+                </a:solidFill>
+                <a:latin typeface="맑은 고딕"/>
+              </a:rPr>
+              <a:t>ECS </a:t>
+            </a:r>
+            <a:r>
+              <a:rPr sz="4800" b="1" dirty="0" err="1">
+                <a:solidFill>
+                  <a:srgbClr val="C00000"/>
+                </a:solidFill>
+                <a:latin typeface="맑은 고딕"/>
+              </a:rPr>
+              <a:t>화면설계서</a:t>
+            </a:r>
+            <a:endParaRPr sz="4800" b="1" dirty="0">
+              <a:solidFill>
+                <a:schemeClr val="bg1"/>
+              </a:solidFill>
+              <a:latin typeface="맑은 고딕"/>
+            </a:endParaRPr>
           </a:p>
         </p:txBody>
       </p:sp>
@@ -3234,7 +3282,7 @@
         <p:spPr>
           <a:xfrm>
             <a:off x="914400" y="4206240"/>
-            <a:ext cx="10058400" cy="548640"/>
+            <a:ext cx="10058400" cy="338554"/>
           </a:xfrm>
           <a:prstGeom prst="rect">
             <a:avLst/>
@@ -3249,13 +3297,103 @@
           <a:p>
             <a:pPr algn="l"/>
             <a:r>
-              <a:rPr sz="1600" b="0">
-                <a:solidFill>
-                  <a:srgbClr val="C00000"/>
-                </a:solidFill>
-                <a:latin typeface="맑은 고딕"/>
-              </a:rPr>
-              <a:t>ECS Renewal   ·   Ver 1.2   ·   2026-09-10        (붉은 글씨 = 2026-09-04 판에서 바뀐 부분)</a:t>
+              <a:rPr sz="1600" b="0" dirty="0">
+                <a:solidFill>
+                  <a:srgbClr val="C00000"/>
+                </a:solidFill>
+                <a:latin typeface="맑은 고딕"/>
+              </a:rPr>
+              <a:t>ECS Renewal   ·   Ver 1.2   ·   2026-09-10        (</a:t>
+            </a:r>
+            <a:r>
+              <a:rPr sz="1600" b="0" dirty="0" err="1">
+                <a:solidFill>
+                  <a:srgbClr val="C00000"/>
+                </a:solidFill>
+                <a:latin typeface="맑은 고딕"/>
+              </a:rPr>
+              <a:t>붉은</a:t>
+            </a:r>
+            <a:r>
+              <a:rPr sz="1600" b="0" dirty="0">
+                <a:solidFill>
+                  <a:srgbClr val="C00000"/>
+                </a:solidFill>
+                <a:latin typeface="맑은 고딕"/>
+              </a:rPr>
+              <a:t> </a:t>
+            </a:r>
+            <a:r>
+              <a:rPr sz="1600" b="0" dirty="0" err="1">
+                <a:solidFill>
+                  <a:srgbClr val="C00000"/>
+                </a:solidFill>
+                <a:latin typeface="맑은 고딕"/>
+              </a:rPr>
+              <a:t>글씨</a:t>
+            </a:r>
+            <a:r>
+              <a:rPr sz="1600" b="0" dirty="0">
+                <a:solidFill>
+                  <a:srgbClr val="C00000"/>
+                </a:solidFill>
+                <a:latin typeface="맑은 고딕"/>
+              </a:rPr>
+              <a:t> = 2026-09-04 </a:t>
+            </a:r>
+            <a:r>
+              <a:rPr sz="1600" b="0" dirty="0" err="1">
+                <a:solidFill>
+                  <a:srgbClr val="C00000"/>
+                </a:solidFill>
+                <a:latin typeface="맑은 고딕"/>
+              </a:rPr>
+              <a:t>판에서</a:t>
+            </a:r>
+            <a:r>
+              <a:rPr sz="1600" b="0" dirty="0">
+                <a:solidFill>
+                  <a:srgbClr val="C00000"/>
+                </a:solidFill>
+                <a:latin typeface="맑은 고딕"/>
+              </a:rPr>
+              <a:t> </a:t>
+            </a:r>
+            <a:r>
+              <a:rPr sz="1600" b="0" dirty="0" err="1">
+                <a:solidFill>
+                  <a:srgbClr val="C00000"/>
+                </a:solidFill>
+                <a:latin typeface="맑은 고딕"/>
+              </a:rPr>
+              <a:t>바뀐</a:t>
+            </a:r>
+            <a:r>
+              <a:rPr sz="1600" b="0" dirty="0">
+                <a:solidFill>
+                  <a:srgbClr val="C00000"/>
+                </a:solidFill>
+                <a:latin typeface="맑은 고딕"/>
+              </a:rPr>
+              <a:t> </a:t>
+            </a:r>
+            <a:r>
+              <a:rPr sz="1600" b="0" dirty="0" err="1">
+                <a:solidFill>
+                  <a:srgbClr val="C00000"/>
+                </a:solidFill>
+                <a:latin typeface="맑은 고딕"/>
+              </a:rPr>
+              <a:t>부분</a:t>
+            </a:r>
+            <a:r>
+              <a:rPr sz="1600" b="0" dirty="0">
+                <a:solidFill>
+                  <a:srgbClr val="C00000"/>
+                </a:solidFill>
+                <a:latin typeface="맑은 고딕"/>
+              </a:rPr>
+              <a:t>)</a:t>
             </a:r>
           </a:p>
         </p:txBody>
@@ -3441,7 +3579,7 @@
                 </a:solidFill>
                 <a:latin typeface="맑은 고딕"/>
               </a:rPr>
-              <a:t>작업 목록·설비 상세·크레인 반송 현황을 팝업 대화상자 대신 화면에 붙는 판넬로 본다. 버튼 3개를 각각 켜고 끈다.</a:t>
+              <a:t>작업 목록·설비 상세·크레인 반송 현황을 화면에 붙는 판넬로 한눈에 본다. 버튼 3개를 각각 켜고 끈다. 판넬은 보기 전용이다 - 조작은 설비 대화상자에서 한다.</a:t>
             </a:r>
           </a:p>
           <a:p>
@@ -3501,6 +3639,30 @@
               <a:t>· 메인 화면에서 설비를 클릭하면 상세정보 판넬의 해당 탭이 그 설비로 바뀌고, 설비 대화상자도 함께 뜬다. (2026-09-10 변경 - 종전에는 판넬만 바뀌고 대화상자가 뜨지 않았다)</a:t>
             </a:r>
           </a:p>
+          <a:p>
+            <a:pPr algn="l"/>
+            <a:r>
+              <a:rPr sz="1000" b="0">
+                <a:solidFill>
+                  <a:srgbClr val="C00000"/>
+                </a:solidFill>
+                <a:latin typeface="맑은 고딕"/>
+              </a:rPr>
+              <a:t>· 판넬에는 조작 버튼을 두지 않는다. 목록과 상태만 보여 준다(2026-09-10 정리).</a:t>
+            </a:r>
+          </a:p>
+          <a:p>
+            <a:pPr algn="l"/>
+            <a:r>
+              <a:rPr sz="1000" b="0">
+                <a:solidFill>
+                  <a:srgbClr val="C00000"/>
+                </a:solidFill>
+                <a:latin typeface="맑은 고딕"/>
+              </a:rPr>
+              <a:t>· 작업정보 판넬 오른쪽 위 [자동 갱신] 을 켜면 2초마다 목록을 다시 읽는다. 끄면 그 시점 목록이 그대로 멈춘다. 작업이 많고 설비가 바쁘면 목록이 계속 새로 그려져 보기 어려우므로, 살펴볼 때는 꺼 두면 된다.</a:t>
+            </a:r>
+          </a:p>
         </p:txBody>
       </p:sp>
       <p:sp>
@@ -3575,28 +3737,22 @@
       </p:sp>
       <p:pic>
         <p:nvPicPr>
-          <p:cNvPr id="9" name="그림 8">
-            <a:extLst>
-              <a:ext uri="{FF2B5EF4-FFF2-40B4-BE49-F238E27FC236}">
-                <a16:creationId xmlns:a16="http://schemas.microsoft.com/office/drawing/2014/main" id="{D639867E-39DB-F908-3AE1-218E6AE568B9}"/>
-              </a:ext>
-            </a:extLst>
-          </p:cNvPr>
+          <p:cNvPr id="8" name="Picture 7" descr="panels_0.png"/>
           <p:cNvPicPr>
             <a:picLocks noChangeAspect="1"/>
           </p:cNvPicPr>
           <p:nvPr/>
         </p:nvPicPr>
         <p:blipFill>
-          <a:blip r:embed="rId2"/>
+          <a:blip r:embed="rId4"/>
           <a:stretch>
             <a:fillRect/>
           </a:stretch>
         </p:blipFill>
         <p:spPr>
           <a:xfrm>
-            <a:off x="3622250" y="3000315"/>
-            <a:ext cx="1533739" cy="857370"/>
+            <a:off x="559842" y="1353127"/>
+            <a:ext cx="7658556" cy="4151744"/>
           </a:xfrm>
           <a:prstGeom prst="rect">
             <a:avLst/>
@@ -6969,7 +7125,7 @@
         <p:spPr>
           <a:xfrm>
             <a:off x="8503920" y="1188720"/>
-            <a:ext cx="3291840" cy="2785378"/>
+            <a:ext cx="3291840" cy="3247043"/>
           </a:xfrm>
           <a:prstGeom prst="rect">
             <a:avLst/>
@@ -7142,272 +7298,272 @@
             <a:r>
               <a:rPr sz="1100" b="0" dirty="0" err="1">
                 <a:solidFill>
-                  <a:srgbClr val="000000"/>
-                </a:solidFill>
-                <a:latin typeface="맑은 고딕"/>
-              </a:rPr>
-              <a:t>컨베이어</a:t>
+                  <a:srgbClr val="C00000"/>
+                </a:solidFill>
+                <a:latin typeface="맑은 고딕"/>
+              </a:rPr>
+              <a:t>컨베이어(트랙 2개)의 PLC 신호와 작업 정보를 보고, 작업번호 쓰기/삭제/복사/잘라내기/붙여넣기를 수행한다.</a:t>
             </a:r>
             <a:r>
               <a:rPr sz="1100" b="0" dirty="0">
                 <a:solidFill>
-                  <a:srgbClr val="000000"/>
-                </a:solidFill>
-                <a:latin typeface="맑은 고딕"/>
-              </a:rPr>
-              <a:t>(</a:t>
+                  <a:srgbClr val="C00000"/>
+                </a:solidFill>
+                <a:latin typeface="맑은 고딕"/>
+              </a:rPr>
+              <a:t/>
             </a:r>
             <a:r>
               <a:rPr sz="1100" b="0" dirty="0" err="1">
                 <a:solidFill>
-                  <a:srgbClr val="000000"/>
-                </a:solidFill>
-                <a:latin typeface="맑은 고딕"/>
-              </a:rPr>
-              <a:t>트랙</a:t>
+                  <a:srgbClr val="C00000"/>
+                </a:solidFill>
+                <a:latin typeface="맑은 고딕"/>
+              </a:rPr>
+              <a:t/>
             </a:r>
             <a:r>
               <a:rPr sz="1100" b="0" dirty="0">
                 <a:solidFill>
-                  <a:srgbClr val="000000"/>
-                </a:solidFill>
-                <a:latin typeface="맑은 고딕"/>
-              </a:rPr>
-              <a:t> 2개)의 PLC </a:t>
+                  <a:srgbClr val="C00000"/>
+                </a:solidFill>
+                <a:latin typeface="맑은 고딕"/>
+              </a:rPr>
+              <a:t/>
             </a:r>
             <a:r>
               <a:rPr sz="1100" b="0" dirty="0" err="1">
                 <a:solidFill>
-                  <a:srgbClr val="000000"/>
-                </a:solidFill>
-                <a:latin typeface="맑은 고딕"/>
-              </a:rPr>
-              <a:t>신호와</a:t>
+                  <a:srgbClr val="C00000"/>
+                </a:solidFill>
+                <a:latin typeface="맑은 고딕"/>
+              </a:rPr>
+              <a:t/>
             </a:r>
             <a:r>
               <a:rPr sz="1100" b="0" dirty="0">
                 <a:solidFill>
-                  <a:srgbClr val="000000"/>
-                </a:solidFill>
-                <a:latin typeface="맑은 고딕"/>
-              </a:rPr>
-              <a:t> </a:t>
+                  <a:srgbClr val="C00000"/>
+                </a:solidFill>
+                <a:latin typeface="맑은 고딕"/>
+              </a:rPr>
+              <a:t/>
             </a:r>
             <a:r>
               <a:rPr sz="1100" b="0" dirty="0" err="1">
                 <a:solidFill>
-                  <a:srgbClr val="000000"/>
-                </a:solidFill>
-                <a:latin typeface="맑은 고딕"/>
-              </a:rPr>
-              <a:t>작업</a:t>
+                  <a:srgbClr val="C00000"/>
+                </a:solidFill>
+                <a:latin typeface="맑은 고딕"/>
+              </a:rPr>
+              <a:t/>
             </a:r>
             <a:r>
               <a:rPr sz="1100" b="0" dirty="0">
                 <a:solidFill>
-                  <a:srgbClr val="000000"/>
-                </a:solidFill>
-                <a:latin typeface="맑은 고딕"/>
-              </a:rPr>
-              <a:t> </a:t>
+                  <a:srgbClr val="C00000"/>
+                </a:solidFill>
+                <a:latin typeface="맑은 고딕"/>
+              </a:rPr>
+              <a:t/>
             </a:r>
             <a:r>
               <a:rPr sz="1100" b="0" dirty="0" err="1">
                 <a:solidFill>
-                  <a:srgbClr val="000000"/>
-                </a:solidFill>
-                <a:latin typeface="맑은 고딕"/>
-              </a:rPr>
-              <a:t>정보를</a:t>
+                  <a:srgbClr val="C00000"/>
+                </a:solidFill>
+                <a:latin typeface="맑은 고딕"/>
+              </a:rPr>
+              <a:t/>
             </a:r>
             <a:r>
               <a:rPr sz="1100" b="0" dirty="0">
                 <a:solidFill>
-                  <a:srgbClr val="000000"/>
-                </a:solidFill>
-                <a:latin typeface="맑은 고딕"/>
-              </a:rPr>
-              <a:t> </a:t>
+                  <a:srgbClr val="C00000"/>
+                </a:solidFill>
+                <a:latin typeface="맑은 고딕"/>
+              </a:rPr>
+              <a:t/>
             </a:r>
             <a:r>
               <a:rPr sz="1100" b="0" dirty="0" err="1">
                 <a:solidFill>
-                  <a:srgbClr val="000000"/>
-                </a:solidFill>
-                <a:latin typeface="맑은 고딕"/>
-              </a:rPr>
-              <a:t>보고</a:t>
+                  <a:srgbClr val="C00000"/>
+                </a:solidFill>
+                <a:latin typeface="맑은 고딕"/>
+              </a:rPr>
+              <a:t/>
             </a:r>
             <a:r>
               <a:rPr sz="1100" b="0" dirty="0">
                 <a:solidFill>
-                  <a:srgbClr val="000000"/>
-                </a:solidFill>
-                <a:latin typeface="맑은 고딕"/>
-              </a:rPr>
-              <a:t>, </a:t>
+                  <a:srgbClr val="C00000"/>
+                </a:solidFill>
+                <a:latin typeface="맑은 고딕"/>
+              </a:rPr>
+              <a:t/>
             </a:r>
             <a:r>
               <a:rPr sz="1100" b="0" dirty="0" err="1">
                 <a:solidFill>
-                  <a:srgbClr val="000000"/>
-                </a:solidFill>
-                <a:latin typeface="맑은 고딕"/>
-              </a:rPr>
-              <a:t>작업번호</a:t>
+                  <a:srgbClr val="C00000"/>
+                </a:solidFill>
+                <a:latin typeface="맑은 고딕"/>
+              </a:rPr>
+              <a:t/>
             </a:r>
             <a:r>
               <a:rPr sz="1100" b="0" dirty="0">
                 <a:solidFill>
-                  <a:srgbClr val="000000"/>
-                </a:solidFill>
-                <a:latin typeface="맑은 고딕"/>
-              </a:rPr>
-              <a:t> </a:t>
+                  <a:srgbClr val="C00000"/>
+                </a:solidFill>
+                <a:latin typeface="맑은 고딕"/>
+              </a:rPr>
+              <a:t/>
             </a:r>
             <a:r>
               <a:rPr sz="1100" b="0" dirty="0" err="1">
                 <a:solidFill>
-                  <a:srgbClr val="000000"/>
-                </a:solidFill>
-                <a:latin typeface="맑은 고딕"/>
-              </a:rPr>
-              <a:t>쓰기</a:t>
+                  <a:srgbClr val="C00000"/>
+                </a:solidFill>
+                <a:latin typeface="맑은 고딕"/>
+              </a:rPr>
+              <a:t/>
             </a:r>
             <a:r>
               <a:rPr sz="1100" b="0" dirty="0">
                 <a:solidFill>
-                  <a:srgbClr val="000000"/>
-                </a:solidFill>
-                <a:latin typeface="맑은 고딕"/>
-              </a:rPr>
-              <a:t>/</a:t>
+                  <a:srgbClr val="C00000"/>
+                </a:solidFill>
+                <a:latin typeface="맑은 고딕"/>
+              </a:rPr>
+              <a:t/>
             </a:r>
             <a:r>
               <a:rPr sz="1100" b="0" dirty="0" err="1">
                 <a:solidFill>
-                  <a:srgbClr val="000000"/>
-                </a:solidFill>
-                <a:latin typeface="맑은 고딕"/>
-              </a:rPr>
-              <a:t>삭제</a:t>
+                  <a:srgbClr val="C00000"/>
+                </a:solidFill>
+                <a:latin typeface="맑은 고딕"/>
+              </a:rPr>
+              <a:t/>
             </a:r>
             <a:r>
               <a:rPr sz="1100" b="0" dirty="0">
                 <a:solidFill>
-                  <a:srgbClr val="000000"/>
-                </a:solidFill>
-                <a:latin typeface="맑은 고딕"/>
-              </a:rPr>
-              <a:t>/</a:t>
+                  <a:srgbClr val="C00000"/>
+                </a:solidFill>
+                <a:latin typeface="맑은 고딕"/>
+              </a:rPr>
+              <a:t/>
             </a:r>
             <a:r>
               <a:rPr sz="1100" b="0" dirty="0" err="1">
                 <a:solidFill>
-                  <a:srgbClr val="000000"/>
-                </a:solidFill>
-                <a:latin typeface="맑은 고딕"/>
-              </a:rPr>
-              <a:t>복사</a:t>
+                  <a:srgbClr val="C00000"/>
+                </a:solidFill>
+                <a:latin typeface="맑은 고딕"/>
+              </a:rPr>
+              <a:t/>
             </a:r>
             <a:r>
               <a:rPr sz="1100" b="0" dirty="0">
                 <a:solidFill>
-                  <a:srgbClr val="000000"/>
-                </a:solidFill>
-                <a:latin typeface="맑은 고딕"/>
-              </a:rPr>
-              <a:t>/</a:t>
+                  <a:srgbClr val="C00000"/>
+                </a:solidFill>
+                <a:latin typeface="맑은 고딕"/>
+              </a:rPr>
+              <a:t/>
             </a:r>
             <a:r>
               <a:rPr sz="1100" b="0" dirty="0" err="1">
                 <a:solidFill>
-                  <a:srgbClr val="000000"/>
-                </a:solidFill>
-                <a:latin typeface="맑은 고딕"/>
-              </a:rPr>
-              <a:t>잘라내기</a:t>
+                  <a:srgbClr val="C00000"/>
+                </a:solidFill>
+                <a:latin typeface="맑은 고딕"/>
+              </a:rPr>
+              <a:t/>
             </a:r>
             <a:r>
               <a:rPr sz="1100" b="0" dirty="0">
                 <a:solidFill>
-                  <a:srgbClr val="000000"/>
-                </a:solidFill>
-                <a:latin typeface="맑은 고딕"/>
-              </a:rPr>
-              <a:t>/</a:t>
+                  <a:srgbClr val="C00000"/>
+                </a:solidFill>
+                <a:latin typeface="맑은 고딕"/>
+              </a:rPr>
+              <a:t/>
             </a:r>
             <a:r>
               <a:rPr sz="1100" b="0" dirty="0" err="1">
                 <a:solidFill>
-                  <a:srgbClr val="000000"/>
-                </a:solidFill>
-                <a:latin typeface="맑은 고딕"/>
-              </a:rPr>
-              <a:t>붙여넣기</a:t>
+                  <a:srgbClr val="C00000"/>
+                </a:solidFill>
+                <a:latin typeface="맑은 고딕"/>
+              </a:rPr>
+              <a:t/>
             </a:r>
             <a:r>
               <a:rPr sz="1100" b="0" dirty="0">
                 <a:solidFill>
-                  <a:srgbClr val="000000"/>
-                </a:solidFill>
-                <a:latin typeface="맑은 고딕"/>
-              </a:rPr>
-              <a:t>/MZ </a:t>
+                  <a:srgbClr val="C00000"/>
+                </a:solidFill>
+                <a:latin typeface="맑은 고딕"/>
+              </a:rPr>
+              <a:t/>
             </a:r>
             <a:r>
               <a:rPr sz="1100" b="0" dirty="0" err="1">
                 <a:solidFill>
-                  <a:srgbClr val="000000"/>
-                </a:solidFill>
-                <a:latin typeface="맑은 고딕"/>
-              </a:rPr>
-              <a:t>이동</a:t>
+                  <a:srgbClr val="C00000"/>
+                </a:solidFill>
+                <a:latin typeface="맑은 고딕"/>
+              </a:rPr>
+              <a:t/>
             </a:r>
             <a:r>
               <a:rPr sz="1100" b="0" dirty="0">
                 <a:solidFill>
-                  <a:srgbClr val="000000"/>
-                </a:solidFill>
-                <a:latin typeface="맑은 고딕"/>
-              </a:rPr>
-              <a:t> </a:t>
+                  <a:srgbClr val="C00000"/>
+                </a:solidFill>
+                <a:latin typeface="맑은 고딕"/>
+              </a:rPr>
+              <a:t/>
             </a:r>
             <a:r>
               <a:rPr sz="1100" b="0" dirty="0" err="1">
                 <a:solidFill>
-                  <a:srgbClr val="000000"/>
-                </a:solidFill>
-                <a:latin typeface="맑은 고딕"/>
-              </a:rPr>
-              <a:t>등을</a:t>
+                  <a:srgbClr val="C00000"/>
+                </a:solidFill>
+                <a:latin typeface="맑은 고딕"/>
+              </a:rPr>
+              <a:t/>
             </a:r>
             <a:r>
               <a:rPr sz="1100" b="0" dirty="0">
                 <a:solidFill>
-                  <a:srgbClr val="000000"/>
-                </a:solidFill>
-                <a:latin typeface="맑은 고딕"/>
-              </a:rPr>
-              <a:t> </a:t>
+                  <a:srgbClr val="C00000"/>
+                </a:solidFill>
+                <a:latin typeface="맑은 고딕"/>
+              </a:rPr>
+              <a:t/>
             </a:r>
             <a:r>
               <a:rPr sz="1100" b="0" dirty="0" err="1">
                 <a:solidFill>
-                  <a:srgbClr val="000000"/>
-                </a:solidFill>
-                <a:latin typeface="맑은 고딕"/>
-              </a:rPr>
-              <a:t>수행한다</a:t>
+                  <a:srgbClr val="C00000"/>
+                </a:solidFill>
+                <a:latin typeface="맑은 고딕"/>
+              </a:rPr>
+              <a:t/>
             </a:r>
             <a:r>
               <a:rPr sz="1100" b="0" dirty="0">
                 <a:solidFill>
-                  <a:srgbClr val="000000"/>
-                </a:solidFill>
-                <a:latin typeface="맑은 고딕"/>
-              </a:rPr>
-              <a:t>.</a:t>
+                  <a:srgbClr val="C00000"/>
+                </a:solidFill>
+                <a:latin typeface="맑은 고딕"/>
+              </a:rPr>
+              <a:t/>
             </a:r>
           </a:p>
           <a:p>
@@ -7457,8 +7613,764 @@
               </a:rPr>
               <a:t>· [쓰기] 는 그 트랙의 작업번호를 새로 넣는다. 실물 화물이 있는데 시스템이 모르는 경우 작업번호를 인식시킬 때 쓴다.</a:t>
             </a:r>
-            <a:r>
-              <a:rPr lang="ko-KR" altLang="en-US" sz="1000" b="0" dirty="0">
+          </a:p>
+          <a:p>
+            <a:pPr algn="l"/>
+            <a:r>
+              <a:rPr sz="1000" b="0" dirty="0">
+                <a:solidFill>
+                  <a:srgbClr val="C00000"/>
+                </a:solidFill>
+                <a:latin typeface="맑은 고딕"/>
+              </a:rPr>
+              <a:t>· </a:t>
+            </a:r>
+            <a:r>
+              <a:rPr sz="1000" b="0" dirty="0" err="1">
+                <a:solidFill>
+                  <a:srgbClr val="C00000"/>
+                </a:solidFill>
+                <a:latin typeface="맑은 고딕"/>
+              </a:rPr>
+              <a:t>예외</a:t>
+            </a:r>
+            <a:r>
+              <a:rPr sz="1000" b="0" dirty="0">
+                <a:solidFill>
+                  <a:srgbClr val="C00000"/>
+                </a:solidFill>
+                <a:latin typeface="맑은 고딕"/>
+              </a:rPr>
+              <a:t> </a:t>
+            </a:r>
+            <a:r>
+              <a:rPr sz="1000" b="0" dirty="0" err="1">
+                <a:solidFill>
+                  <a:srgbClr val="C00000"/>
+                </a:solidFill>
+                <a:latin typeface="맑은 고딕"/>
+              </a:rPr>
+              <a:t>처리</a:t>
+            </a:r>
+            <a:r>
+              <a:rPr sz="1000" b="0" dirty="0">
+                <a:solidFill>
+                  <a:srgbClr val="C00000"/>
+                </a:solidFill>
+                <a:latin typeface="맑은 고딕"/>
+              </a:rPr>
+              <a:t> </a:t>
+            </a:r>
+            <a:r>
+              <a:rPr sz="1000" b="0" dirty="0" err="1">
+                <a:solidFill>
+                  <a:srgbClr val="C00000"/>
+                </a:solidFill>
+                <a:latin typeface="맑은 고딕"/>
+              </a:rPr>
+              <a:t>그룹의</a:t>
+            </a:r>
+            <a:r>
+              <a:rPr sz="1000" b="0" dirty="0">
+                <a:solidFill>
+                  <a:srgbClr val="C00000"/>
+                </a:solidFill>
+                <a:latin typeface="맑은 고딕"/>
+              </a:rPr>
+              <a:t> [H/S </a:t>
+            </a:r>
+            <a:r>
+              <a:rPr sz="1000" b="0" dirty="0" err="1">
+                <a:solidFill>
+                  <a:srgbClr val="C00000"/>
+                </a:solidFill>
+                <a:latin typeface="맑은 고딕"/>
+              </a:rPr>
+              <a:t>배출</a:t>
+            </a:r>
+            <a:r>
+              <a:rPr sz="1000" b="0" dirty="0">
+                <a:solidFill>
+                  <a:srgbClr val="C00000"/>
+                </a:solidFill>
+                <a:latin typeface="맑은 고딕"/>
+              </a:rPr>
+              <a:t>] 은 </a:t>
+            </a:r>
+            <a:r>
+              <a:rPr sz="1000" b="0" dirty="0" err="1">
+                <a:solidFill>
+                  <a:srgbClr val="C00000"/>
+                </a:solidFill>
+                <a:latin typeface="맑은 고딕"/>
+              </a:rPr>
+              <a:t>출고</a:t>
+            </a:r>
+            <a:r>
+              <a:rPr sz="1000" b="0" dirty="0">
+                <a:solidFill>
+                  <a:srgbClr val="C00000"/>
+                </a:solidFill>
+                <a:latin typeface="맑은 고딕"/>
+              </a:rPr>
+              <a:t> H/S 에 </a:t>
+            </a:r>
+            <a:r>
+              <a:rPr sz="1000" b="0" dirty="0" err="1">
+                <a:solidFill>
+                  <a:srgbClr val="C00000"/>
+                </a:solidFill>
+                <a:latin typeface="맑은 고딕"/>
+              </a:rPr>
+              <a:t>놓인</a:t>
+            </a:r>
+            <a:r>
+              <a:rPr sz="1000" b="0" dirty="0">
+                <a:solidFill>
+                  <a:srgbClr val="C00000"/>
+                </a:solidFill>
+                <a:latin typeface="맑은 고딕"/>
+              </a:rPr>
+              <a:t> </a:t>
+            </a:r>
+            <a:r>
+              <a:rPr sz="1000" b="0" dirty="0" err="1">
+                <a:solidFill>
+                  <a:srgbClr val="C00000"/>
+                </a:solidFill>
+                <a:latin typeface="맑은 고딕"/>
+              </a:rPr>
+              <a:t>작업</a:t>
+            </a:r>
+            <a:r>
+              <a:rPr sz="1000" b="0" dirty="0">
+                <a:solidFill>
+                  <a:srgbClr val="C00000"/>
+                </a:solidFill>
+                <a:latin typeface="맑은 고딕"/>
+              </a:rPr>
+              <a:t> </a:t>
+            </a:r>
+            <a:r>
+              <a:rPr sz="1000" b="0" dirty="0" err="1">
+                <a:solidFill>
+                  <a:srgbClr val="C00000"/>
+                </a:solidFill>
+                <a:latin typeface="맑은 고딕"/>
+              </a:rPr>
+              <a:t>없는</a:t>
+            </a:r>
+            <a:r>
+              <a:rPr sz="1000" b="0" dirty="0">
+                <a:solidFill>
+                  <a:srgbClr val="C00000"/>
+                </a:solidFill>
+                <a:latin typeface="맑은 고딕"/>
+              </a:rPr>
+              <a:t> </a:t>
+            </a:r>
+            <a:r>
+              <a:rPr sz="1000" b="0" dirty="0" err="1">
+                <a:solidFill>
+                  <a:srgbClr val="C00000"/>
+                </a:solidFill>
+                <a:latin typeface="맑은 고딕"/>
+              </a:rPr>
+              <a:t>화물을</a:t>
+            </a:r>
+            <a:r>
+              <a:rPr sz="1000" b="0" dirty="0">
+                <a:solidFill>
+                  <a:srgbClr val="C00000"/>
+                </a:solidFill>
+                <a:latin typeface="맑은 고딕"/>
+              </a:rPr>
+              <a:t> </a:t>
+            </a:r>
+            <a:r>
+              <a:rPr sz="1000" b="0" dirty="0" err="1">
+                <a:solidFill>
+                  <a:srgbClr val="C00000"/>
+                </a:solidFill>
+                <a:latin typeface="맑은 고딕"/>
+              </a:rPr>
+              <a:t>출고대로</a:t>
+            </a:r>
+            <a:r>
+              <a:rPr sz="1000" b="0" dirty="0">
+                <a:solidFill>
+                  <a:srgbClr val="C00000"/>
+                </a:solidFill>
+                <a:latin typeface="맑은 고딕"/>
+              </a:rPr>
+              <a:t> </a:t>
+            </a:r>
+            <a:r>
+              <a:rPr sz="1000" b="0" dirty="0" err="1">
+                <a:solidFill>
+                  <a:srgbClr val="C00000"/>
+                </a:solidFill>
+                <a:latin typeface="맑은 고딕"/>
+              </a:rPr>
+              <a:t>내보낸다</a:t>
+            </a:r>
+            <a:r>
+              <a:rPr sz="1000" b="0" dirty="0">
+                <a:solidFill>
+                  <a:srgbClr val="C00000"/>
+                </a:solidFill>
+                <a:latin typeface="맑은 고딕"/>
+              </a:rPr>
+              <a:t>. </a:t>
+            </a:r>
+            <a:r>
+              <a:rPr sz="1000" b="0" dirty="0" err="1">
+                <a:solidFill>
+                  <a:srgbClr val="C00000"/>
+                </a:solidFill>
+                <a:latin typeface="맑은 고딕"/>
+              </a:rPr>
+              <a:t>비상</a:t>
+            </a:r>
+            <a:r>
+              <a:rPr sz="1000" b="0" dirty="0">
+                <a:solidFill>
+                  <a:srgbClr val="C00000"/>
+                </a:solidFill>
+                <a:latin typeface="맑은 고딕"/>
+              </a:rPr>
+              <a:t> </a:t>
+            </a:r>
+            <a:r>
+              <a:rPr sz="1000" b="0" dirty="0" err="1">
+                <a:solidFill>
+                  <a:srgbClr val="C00000"/>
+                </a:solidFill>
+                <a:latin typeface="맑은 고딕"/>
+              </a:rPr>
+              <a:t>확인창이</a:t>
+            </a:r>
+            <a:r>
+              <a:rPr sz="1000" b="0" dirty="0">
+                <a:solidFill>
+                  <a:srgbClr val="C00000"/>
+                </a:solidFill>
+                <a:latin typeface="맑은 고딕"/>
+              </a:rPr>
+              <a:t> </a:t>
+            </a:r>
+            <a:r>
+              <a:rPr sz="1000" b="0" dirty="0" err="1">
+                <a:solidFill>
+                  <a:srgbClr val="C00000"/>
+                </a:solidFill>
+                <a:latin typeface="맑은 고딕"/>
+              </a:rPr>
+              <a:t>뜨며</a:t>
+            </a:r>
+            <a:r>
+              <a:rPr sz="1000" b="0" dirty="0">
+                <a:solidFill>
+                  <a:srgbClr val="C00000"/>
+                </a:solidFill>
+                <a:latin typeface="맑은 고딕"/>
+              </a:rPr>
+              <a:t>, </a:t>
+            </a:r>
+            <a:r>
+              <a:rPr sz="1000" b="0" dirty="0" err="1">
+                <a:solidFill>
+                  <a:srgbClr val="C00000"/>
+                </a:solidFill>
+                <a:latin typeface="맑은 고딕"/>
+              </a:rPr>
+              <a:t>반자동</a:t>
+            </a:r>
+            <a:r>
+              <a:rPr sz="1000" b="0" dirty="0">
+                <a:solidFill>
+                  <a:srgbClr val="C00000"/>
+                </a:solidFill>
+                <a:latin typeface="맑은 고딕"/>
+              </a:rPr>
+              <a:t> </a:t>
+            </a:r>
+            <a:r>
+              <a:rPr sz="1000" b="0" dirty="0" err="1">
+                <a:solidFill>
+                  <a:srgbClr val="C00000"/>
+                </a:solidFill>
+                <a:latin typeface="맑은 고딕"/>
+              </a:rPr>
+              <a:t>출고</a:t>
+            </a:r>
+            <a:r>
+              <a:rPr sz="1000" b="0" dirty="0">
+                <a:solidFill>
+                  <a:srgbClr val="C00000"/>
+                </a:solidFill>
+                <a:latin typeface="맑은 고딕"/>
+              </a:rPr>
+              <a:t> </a:t>
+            </a:r>
+            <a:r>
+              <a:rPr sz="1000" b="0" dirty="0" err="1">
+                <a:solidFill>
+                  <a:srgbClr val="C00000"/>
+                </a:solidFill>
+                <a:latin typeface="맑은 고딕"/>
+              </a:rPr>
+              <a:t>작업을</a:t>
+            </a:r>
+            <a:r>
+              <a:rPr sz="1000" b="0" dirty="0">
+                <a:solidFill>
+                  <a:srgbClr val="C00000"/>
+                </a:solidFill>
+                <a:latin typeface="맑은 고딕"/>
+              </a:rPr>
+              <a:t> </a:t>
+            </a:r>
+            <a:r>
+              <a:rPr sz="1000" b="0" dirty="0" err="1">
+                <a:solidFill>
+                  <a:srgbClr val="C00000"/>
+                </a:solidFill>
+                <a:latin typeface="맑은 고딕"/>
+              </a:rPr>
+              <a:t>만들어</a:t>
+            </a:r>
+            <a:r>
+              <a:rPr sz="1000" b="0" dirty="0">
+                <a:solidFill>
+                  <a:srgbClr val="C00000"/>
+                </a:solidFill>
+                <a:latin typeface="맑은 고딕"/>
+              </a:rPr>
+              <a:t> </a:t>
+            </a:r>
+            <a:r>
+              <a:rPr sz="1000" b="0" dirty="0" err="1">
+                <a:solidFill>
+                  <a:srgbClr val="C00000"/>
+                </a:solidFill>
+                <a:latin typeface="맑은 고딕"/>
+              </a:rPr>
+              <a:t>상위</a:t>
+            </a:r>
+            <a:r>
+              <a:rPr sz="1000" b="0" dirty="0">
+                <a:solidFill>
+                  <a:srgbClr val="C00000"/>
+                </a:solidFill>
+                <a:latin typeface="맑은 고딕"/>
+              </a:rPr>
+              <a:t> </a:t>
+            </a:r>
+            <a:r>
+              <a:rPr sz="1000" b="0" dirty="0" err="1">
+                <a:solidFill>
+                  <a:srgbClr val="C00000"/>
+                </a:solidFill>
+                <a:latin typeface="맑은 고딕"/>
+              </a:rPr>
+              <a:t>보고</a:t>
+            </a:r>
+            <a:r>
+              <a:rPr sz="1000" b="0" dirty="0">
+                <a:solidFill>
+                  <a:srgbClr val="C00000"/>
+                </a:solidFill>
+                <a:latin typeface="맑은 고딕"/>
+              </a:rPr>
+              <a:t> </a:t>
+            </a:r>
+            <a:r>
+              <a:rPr sz="1000" b="0" dirty="0" err="1">
+                <a:solidFill>
+                  <a:srgbClr val="C00000"/>
+                </a:solidFill>
+                <a:latin typeface="맑은 고딕"/>
+              </a:rPr>
+              <a:t>없이</a:t>
+            </a:r>
+            <a:r>
+              <a:rPr sz="1000" b="0" dirty="0">
+                <a:solidFill>
+                  <a:srgbClr val="C00000"/>
+                </a:solidFill>
+                <a:latin typeface="맑은 고딕"/>
+              </a:rPr>
+              <a:t> </a:t>
+            </a:r>
+            <a:r>
+              <a:rPr sz="1000" b="0" dirty="0" err="1">
+                <a:solidFill>
+                  <a:srgbClr val="C00000"/>
+                </a:solidFill>
+                <a:latin typeface="맑은 고딕"/>
+              </a:rPr>
+              <a:t>처리한다</a:t>
+            </a:r>
+            <a:r>
+              <a:rPr sz="1000" b="0" dirty="0">
+                <a:solidFill>
+                  <a:srgbClr val="C00000"/>
+                </a:solidFill>
+                <a:latin typeface="맑은 고딕"/>
+              </a:rPr>
+              <a:t>(</a:t>
+            </a:r>
+            <a:r>
+              <a:rPr sz="1000" b="0" dirty="0" err="1">
+                <a:solidFill>
+                  <a:srgbClr val="C00000"/>
+                </a:solidFill>
+                <a:latin typeface="맑은 고딕"/>
+              </a:rPr>
+              <a:t>아래</a:t>
+            </a:r>
+            <a:r>
+              <a:rPr sz="1000" b="0" dirty="0">
+                <a:solidFill>
+                  <a:srgbClr val="C00000"/>
+                </a:solidFill>
+                <a:latin typeface="맑은 고딕"/>
+              </a:rPr>
+              <a:t> </a:t>
+            </a:r>
+            <a:r>
+              <a:rPr sz="1000" b="0" dirty="0" err="1">
+                <a:solidFill>
+                  <a:srgbClr val="C00000"/>
+                </a:solidFill>
+                <a:latin typeface="맑은 고딕"/>
+              </a:rPr>
+              <a:t>예외</a:t>
+            </a:r>
+            <a:r>
+              <a:rPr sz="1000" b="0" dirty="0">
+                <a:solidFill>
+                  <a:srgbClr val="C00000"/>
+                </a:solidFill>
+                <a:latin typeface="맑은 고딕"/>
+              </a:rPr>
+              <a:t> </a:t>
+            </a:r>
+            <a:r>
+              <a:rPr sz="1000" b="0" dirty="0" err="1">
+                <a:solidFill>
+                  <a:srgbClr val="C00000"/>
+                </a:solidFill>
+                <a:latin typeface="맑은 고딕"/>
+              </a:rPr>
+              <a:t>처리</a:t>
+            </a:r>
+            <a:r>
+              <a:rPr sz="1000" b="0" dirty="0">
+                <a:solidFill>
+                  <a:srgbClr val="C00000"/>
+                </a:solidFill>
+                <a:latin typeface="맑은 고딕"/>
+              </a:rPr>
+              <a:t> </a:t>
+            </a:r>
+            <a:r>
+              <a:rPr sz="1000" b="0" dirty="0" err="1">
+                <a:solidFill>
+                  <a:srgbClr val="C00000"/>
+                </a:solidFill>
+                <a:latin typeface="맑은 고딕"/>
+              </a:rPr>
+              <a:t>참조</a:t>
+            </a:r>
+            <a:r>
+              <a:rPr sz="1000" b="0" dirty="0">
+                <a:solidFill>
+                  <a:srgbClr val="C00000"/>
+                </a:solidFill>
+                <a:latin typeface="맑은 고딕"/>
+              </a:rPr>
+              <a:t>).</a:t>
+            </a:r>
+          </a:p>
+          <a:p>
+            <a:pPr algn="l"/>
+            <a:r>
+              <a:rPr sz="1000" b="0" dirty="0">
+                <a:solidFill>
+                  <a:srgbClr val="C00000"/>
+                </a:solidFill>
+                <a:latin typeface="맑은 고딕"/>
+              </a:rPr>
+              <a:t>· 도착지·작업구분 </a:t>
+            </a:r>
+            <a:r>
+              <a:rPr sz="1000" b="0" dirty="0" err="1">
+                <a:solidFill>
+                  <a:srgbClr val="C00000"/>
+                </a:solidFill>
+                <a:latin typeface="맑은 고딕"/>
+              </a:rPr>
+              <a:t>입력란은</a:t>
+            </a:r>
+            <a:r>
+              <a:rPr sz="1000" b="0" dirty="0">
+                <a:solidFill>
+                  <a:srgbClr val="C00000"/>
+                </a:solidFill>
+                <a:latin typeface="맑은 고딕"/>
+              </a:rPr>
+              <a:t> </a:t>
+            </a:r>
+            <a:r>
+              <a:rPr sz="1000" dirty="0" err="1">
+                <a:solidFill>
+                  <a:srgbClr val="C00000"/>
+                </a:solidFill>
+                <a:latin typeface="맑은 고딕"/>
+              </a:rPr>
+              <a:t>뺐다</a:t>
+            </a:r>
+            <a:r>
+              <a:rPr sz="1000" dirty="0">
+                <a:solidFill>
+                  <a:srgbClr val="C00000"/>
+                </a:solidFill>
+                <a:latin typeface="맑은 고딕"/>
+              </a:rPr>
+              <a:t>. 이 </a:t>
+            </a:r>
+            <a:r>
+              <a:rPr sz="1000" dirty="0" err="1">
+                <a:solidFill>
+                  <a:srgbClr val="C00000"/>
+                </a:solidFill>
+                <a:latin typeface="맑은 고딕"/>
+              </a:rPr>
+              <a:t>현장은</a:t>
+            </a:r>
+            <a:r>
+              <a:rPr sz="1000" dirty="0">
+                <a:solidFill>
+                  <a:srgbClr val="C00000"/>
+                </a:solidFill>
+                <a:latin typeface="맑은 고딕"/>
+              </a:rPr>
+              <a:t> </a:t>
+            </a:r>
+            <a:r>
+              <a:rPr sz="1000" dirty="0" err="1">
+                <a:solidFill>
+                  <a:srgbClr val="C00000"/>
+                </a:solidFill>
+                <a:latin typeface="맑은 고딕"/>
+              </a:rPr>
+              <a:t>컨베이어에</a:t>
+            </a:r>
+            <a:r>
+              <a:rPr sz="1000" dirty="0">
+                <a:solidFill>
+                  <a:srgbClr val="C00000"/>
+                </a:solidFill>
+                <a:latin typeface="맑은 고딕"/>
+              </a:rPr>
+              <a:t> </a:t>
+            </a:r>
+            <a:r>
+              <a:rPr sz="1000" dirty="0" err="1">
+                <a:solidFill>
+                  <a:srgbClr val="C00000"/>
+                </a:solidFill>
+                <a:latin typeface="맑은 고딕"/>
+              </a:rPr>
+              <a:t>도착지·작업구분을</a:t>
+            </a:r>
+            <a:r>
+              <a:rPr sz="1000" dirty="0">
+                <a:solidFill>
+                  <a:srgbClr val="C00000"/>
+                </a:solidFill>
+                <a:latin typeface="맑은 고딕"/>
+              </a:rPr>
+              <a:t> </a:t>
+            </a:r>
+            <a:r>
+              <a:rPr sz="1000" dirty="0" err="1">
+                <a:solidFill>
+                  <a:srgbClr val="C00000"/>
+                </a:solidFill>
+                <a:latin typeface="맑은 고딕"/>
+              </a:rPr>
+              <a:t>내려보내지</a:t>
+            </a:r>
+            <a:r>
+              <a:rPr sz="1000" dirty="0">
+                <a:solidFill>
+                  <a:srgbClr val="C00000"/>
+                </a:solidFill>
+                <a:latin typeface="맑은 고딕"/>
+              </a:rPr>
+              <a:t> </a:t>
+            </a:r>
+            <a:r>
+              <a:rPr sz="1000" dirty="0" err="1">
+                <a:solidFill>
+                  <a:srgbClr val="C00000"/>
+                </a:solidFill>
+                <a:latin typeface="맑은 고딕"/>
+              </a:rPr>
+              <a:t>않는다</a:t>
+            </a:r>
+            <a:r>
+              <a:rPr sz="1000" dirty="0">
+                <a:solidFill>
+                  <a:srgbClr val="C00000"/>
+                </a:solidFill>
+                <a:latin typeface="맑은 고딕"/>
+              </a:rPr>
+              <a:t> - PLC 로 </a:t>
+            </a:r>
+            <a:r>
+              <a:rPr sz="1000" dirty="0" err="1">
+                <a:solidFill>
+                  <a:srgbClr val="C00000"/>
+                </a:solidFill>
+                <a:latin typeface="맑은 고딕"/>
+              </a:rPr>
+              <a:t>나가는</a:t>
+            </a:r>
+            <a:r>
+              <a:rPr sz="1000" dirty="0">
+                <a:solidFill>
+                  <a:srgbClr val="C00000"/>
+                </a:solidFill>
+                <a:latin typeface="맑은 고딕"/>
+              </a:rPr>
+              <a:t> </a:t>
+            </a:r>
+            <a:r>
+              <a:rPr sz="1000" dirty="0" err="1">
+                <a:solidFill>
+                  <a:srgbClr val="C00000"/>
+                </a:solidFill>
+                <a:latin typeface="맑은 고딕"/>
+              </a:rPr>
+              <a:t>것은</a:t>
+            </a:r>
+            <a:r>
+              <a:rPr sz="1000" dirty="0">
+                <a:solidFill>
+                  <a:srgbClr val="C00000"/>
+                </a:solidFill>
+                <a:latin typeface="맑은 고딕"/>
+              </a:rPr>
+              <a:t> </a:t>
+            </a:r>
+            <a:r>
+              <a:rPr sz="1000" dirty="0" err="1">
+                <a:solidFill>
+                  <a:srgbClr val="C00000"/>
+                </a:solidFill>
+                <a:latin typeface="맑은 고딕"/>
+              </a:rPr>
+              <a:t>방향</a:t>
+            </a:r>
+            <a:r>
+              <a:rPr sz="1000" dirty="0">
+                <a:solidFill>
+                  <a:srgbClr val="C00000"/>
+                </a:solidFill>
+                <a:latin typeface="맑은 고딕"/>
+              </a:rPr>
+              <a:t>(D300+N-1)과 </a:t>
+            </a:r>
+            <a:r>
+              <a:rPr sz="1000" dirty="0" err="1">
+                <a:solidFill>
+                  <a:srgbClr val="C00000"/>
+                </a:solidFill>
+                <a:latin typeface="맑은 고딕"/>
+              </a:rPr>
+              <a:t>작업번호</a:t>
+            </a:r>
+            <a:r>
+              <a:rPr sz="1000" dirty="0">
+                <a:solidFill>
+                  <a:srgbClr val="C00000"/>
+                </a:solidFill>
+                <a:latin typeface="맑은 고딕"/>
+              </a:rPr>
+              <a:t> </a:t>
+            </a:r>
+            <a:r>
+              <a:rPr sz="1000" dirty="0" err="1">
+                <a:solidFill>
+                  <a:srgbClr val="C00000"/>
+                </a:solidFill>
+                <a:latin typeface="맑은 고딕"/>
+              </a:rPr>
+              <a:t>트래킹</a:t>
+            </a:r>
+            <a:r>
+              <a:rPr sz="1000" dirty="0">
+                <a:solidFill>
+                  <a:srgbClr val="C00000"/>
+                </a:solidFill>
+                <a:latin typeface="맑은 고딕"/>
+              </a:rPr>
+              <a:t>(</a:t>
+            </a:r>
+            <a:r>
+              <a:rPr sz="1000" dirty="0" err="1">
+                <a:solidFill>
+                  <a:srgbClr val="C00000"/>
+                </a:solidFill>
+                <a:latin typeface="맑은 고딕"/>
+              </a:rPr>
+              <a:t>R영역</a:t>
+            </a:r>
+            <a:r>
+              <a:rPr sz="1000" dirty="0">
+                <a:solidFill>
+                  <a:srgbClr val="C00000"/>
+                </a:solidFill>
+                <a:latin typeface="맑은 고딕"/>
+              </a:rPr>
+              <a:t>) </a:t>
+            </a:r>
+            <a:r>
+              <a:rPr lang="ko-KR" altLang="en-US" sz="1000" dirty="0">
+                <a:solidFill>
+                  <a:srgbClr val="C00000"/>
+                </a:solidFill>
+                <a:latin typeface="맑은 고딕"/>
+              </a:rPr>
+              <a:t>이</a:t>
+            </a:r>
+            <a:r>
+              <a:rPr sz="1000" b="0" dirty="0">
+                <a:solidFill>
+                  <a:srgbClr val="C00000"/>
+                </a:solidFill>
+                <a:latin typeface="맑은 고딕"/>
+              </a:rPr>
+              <a:t>다.</a:t>
+            </a:r>
+          </a:p>
+          <a:p>
+            <a:pPr algn="l"/>
+            <a:r>
+              <a:rPr sz="1000" b="0" dirty="0">
+                <a:solidFill>
+                  <a:srgbClr val="C00000"/>
+                </a:solidFill>
+                <a:latin typeface="맑은 고딕"/>
+              </a:rPr>
+              <a:t>· [MG 이동] 버튼은 뺐다(2026-09-10). 이 현장에서 쓰지 않는 기능이다.</a:t>
+            </a:r>
+            <a:r>
+              <a:rPr sz="1000" b="0" dirty="0" err="1">
                 <a:solidFill>
                   <a:srgbClr val="C00000"/>
                 </a:solidFill>
@@ -7476,7 +8388,7 @@
               <a:t/>
             </a:r>
             <a:r>
-              <a:rPr sz="1000" b="0" dirty="0" err="1">
+              <a:rPr sz="1000" dirty="0" err="1">
                 <a:solidFill>
                   <a:srgbClr val="C00000"/>
                 </a:solidFill>
@@ -7485,7 +8397,7 @@
               <a:t/>
             </a:r>
             <a:r>
-              <a:rPr sz="1000" b="0" dirty="0">
+              <a:rPr sz="1000" dirty="0">
                 <a:solidFill>
                   <a:srgbClr val="C00000"/>
                 </a:solidFill>
@@ -7494,7 +8406,7 @@
               <a:t/>
             </a:r>
             <a:r>
-              <a:rPr sz="1000" b="0" dirty="0" err="1">
+              <a:rPr sz="1000" dirty="0" err="1">
                 <a:solidFill>
                   <a:srgbClr val="C00000"/>
                 </a:solidFill>
@@ -7503,7 +8415,7 @@
               <a:t/>
             </a:r>
             <a:r>
-              <a:rPr sz="1000" b="0" dirty="0">
+              <a:rPr sz="1000" dirty="0">
                 <a:solidFill>
                   <a:srgbClr val="C00000"/>
                 </a:solidFill>
@@ -7512,7 +8424,7 @@
               <a:t/>
             </a:r>
             <a:r>
-              <a:rPr sz="1000" b="0" dirty="0" err="1">
+              <a:rPr sz="1000" dirty="0" err="1">
                 <a:solidFill>
                   <a:srgbClr val="C00000"/>
                 </a:solidFill>
@@ -7521,7 +8433,7 @@
               <a:t/>
             </a:r>
             <a:r>
-              <a:rPr sz="1000" b="0" dirty="0">
+              <a:rPr sz="1000" dirty="0">
                 <a:solidFill>
                   <a:srgbClr val="C00000"/>
                 </a:solidFill>
@@ -7530,7 +8442,7 @@
               <a:t/>
             </a:r>
             <a:r>
-              <a:rPr sz="1000" b="0" dirty="0" err="1">
+              <a:rPr sz="1000" dirty="0" err="1">
                 <a:solidFill>
                   <a:srgbClr val="C00000"/>
                 </a:solidFill>
@@ -7539,7 +8451,7 @@
               <a:t/>
             </a:r>
             <a:r>
-              <a:rPr sz="1000" b="0" dirty="0">
+              <a:rPr sz="1000" dirty="0">
                 <a:solidFill>
                   <a:srgbClr val="C00000"/>
                 </a:solidFill>
@@ -7548,7 +8460,7 @@
               <a:t/>
             </a:r>
             <a:r>
-              <a:rPr sz="1000" b="0" dirty="0" err="1">
+              <a:rPr sz="1000" dirty="0" err="1">
                 <a:solidFill>
                   <a:srgbClr val="C00000"/>
                 </a:solidFill>
@@ -7557,7 +8469,7 @@
               <a:t/>
             </a:r>
             <a:r>
-              <a:rPr sz="1000" b="0" dirty="0">
+              <a:rPr sz="1000" dirty="0">
                 <a:solidFill>
                   <a:srgbClr val="C00000"/>
                 </a:solidFill>
@@ -7566,7 +8478,7 @@
               <a:t/>
             </a:r>
             <a:r>
-              <a:rPr sz="1000" b="0" dirty="0" err="1">
+              <a:rPr sz="1000" dirty="0" err="1">
                 <a:solidFill>
                   <a:srgbClr val="C00000"/>
                 </a:solidFill>
@@ -7575,7 +8487,7 @@
               <a:t/>
             </a:r>
             <a:r>
-              <a:rPr sz="1000" b="0" dirty="0">
+              <a:rPr sz="1000" dirty="0">
                 <a:solidFill>
                   <a:srgbClr val="C00000"/>
                 </a:solidFill>
@@ -7584,7 +8496,7 @@
               <a:t/>
             </a:r>
             <a:r>
-              <a:rPr sz="1000" b="0" dirty="0" err="1">
+              <a:rPr sz="1000" dirty="0" err="1">
                 <a:solidFill>
                   <a:srgbClr val="C00000"/>
                 </a:solidFill>
@@ -7593,7 +8505,7 @@
               <a:t/>
             </a:r>
             <a:r>
-              <a:rPr sz="1000" b="0" dirty="0">
+              <a:rPr sz="1000" dirty="0">
                 <a:solidFill>
                   <a:srgbClr val="C00000"/>
                 </a:solidFill>
@@ -7602,7 +8514,7 @@
               <a:t/>
             </a:r>
             <a:r>
-              <a:rPr sz="1000" b="0" dirty="0" err="1">
+              <a:rPr sz="1000" dirty="0" err="1">
                 <a:solidFill>
                   <a:srgbClr val="C00000"/>
                 </a:solidFill>
@@ -7611,7 +8523,7 @@
               <a:t/>
             </a:r>
             <a:r>
-              <a:rPr sz="1000" b="0" dirty="0">
+              <a:rPr sz="1000" dirty="0">
                 <a:solidFill>
                   <a:srgbClr val="C00000"/>
                 </a:solidFill>
@@ -7620,7 +8532,7 @@
               <a:t/>
             </a:r>
             <a:r>
-              <a:rPr sz="1000" b="0" dirty="0" err="1">
+              <a:rPr sz="1000" dirty="0" err="1">
                 <a:solidFill>
                   <a:srgbClr val="C00000"/>
                 </a:solidFill>
@@ -7629,7 +8541,7 @@
               <a:t/>
             </a:r>
             <a:r>
-              <a:rPr sz="1000" b="0" dirty="0">
+              <a:rPr sz="1000" dirty="0">
                 <a:solidFill>
                   <a:srgbClr val="C00000"/>
                 </a:solidFill>
@@ -7638,7 +8550,7 @@
               <a:t/>
             </a:r>
             <a:r>
-              <a:rPr sz="1000" b="0" dirty="0" err="1">
+              <a:rPr sz="1000" dirty="0" err="1">
                 <a:solidFill>
                   <a:srgbClr val="C00000"/>
                 </a:solidFill>
@@ -7647,7 +8559,7 @@
               <a:t/>
             </a:r>
             <a:r>
-              <a:rPr sz="1000" b="0" dirty="0">
+              <a:rPr sz="1000" dirty="0">
                 <a:solidFill>
                   <a:srgbClr val="C00000"/>
                 </a:solidFill>
@@ -7656,7 +8568,7 @@
               <a:t/>
             </a:r>
             <a:r>
-              <a:rPr sz="1000" b="0" dirty="0" err="1">
+              <a:rPr sz="1000" dirty="0" err="1">
                 <a:solidFill>
                   <a:srgbClr val="C00000"/>
                 </a:solidFill>
@@ -7665,7 +8577,7 @@
               <a:t/>
             </a:r>
             <a:r>
-              <a:rPr sz="1000" b="0" dirty="0">
+              <a:rPr sz="1000" dirty="0">
                 <a:solidFill>
                   <a:srgbClr val="C00000"/>
                 </a:solidFill>
@@ -7674,7 +8586,7 @@
               <a:t/>
             </a:r>
             <a:r>
-              <a:rPr sz="1000" b="0" dirty="0" err="1">
+              <a:rPr sz="1000" dirty="0" err="1">
                 <a:solidFill>
                   <a:srgbClr val="C00000"/>
                 </a:solidFill>
@@ -7683,7 +8595,7 @@
               <a:t/>
             </a:r>
             <a:r>
-              <a:rPr sz="1000" b="0" dirty="0">
+              <a:rPr sz="1000" dirty="0">
                 <a:solidFill>
                   <a:srgbClr val="C00000"/>
                 </a:solidFill>
@@ -7692,1039 +8604,7 @@
               <a:t/>
             </a:r>
             <a:r>
-              <a:rPr sz="1000" b="0" dirty="0" err="1">
-                <a:solidFill>
-                  <a:srgbClr val="C00000"/>
-                </a:solidFill>
-                <a:latin typeface="맑은 고딕"/>
-              </a:rPr>
-              <a:t/>
-            </a:r>
-            <a:r>
-              <a:rPr sz="1000" b="0" dirty="0">
-                <a:solidFill>
-                  <a:srgbClr val="C00000"/>
-                </a:solidFill>
-                <a:latin typeface="맑은 고딕"/>
-              </a:rPr>
-              <a:t/>
-            </a:r>
-            <a:r>
-              <a:rPr sz="1000" b="0" dirty="0" err="1">
-                <a:solidFill>
-                  <a:srgbClr val="C00000"/>
-                </a:solidFill>
-                <a:latin typeface="맑은 고딕"/>
-              </a:rPr>
-              <a:t/>
-            </a:r>
-            <a:r>
-              <a:rPr sz="1000" b="0" dirty="0">
-                <a:solidFill>
-                  <a:srgbClr val="C00000"/>
-                </a:solidFill>
-                <a:latin typeface="맑은 고딕"/>
-              </a:rPr>
-              <a:t/>
-            </a:r>
-            <a:r>
-              <a:rPr sz="1000" b="0" dirty="0" err="1">
-                <a:solidFill>
-                  <a:srgbClr val="C00000"/>
-                </a:solidFill>
-                <a:latin typeface="맑은 고딕"/>
-              </a:rPr>
-              <a:t/>
-            </a:r>
-            <a:r>
-              <a:rPr sz="1000" b="0" dirty="0">
-                <a:solidFill>
-                  <a:srgbClr val="C00000"/>
-                </a:solidFill>
-                <a:latin typeface="맑은 고딕"/>
-              </a:rPr>
-              <a:t/>
-            </a:r>
-            <a:r>
-              <a:rPr sz="1000" b="0" dirty="0" err="1">
-                <a:solidFill>
-                  <a:srgbClr val="C00000"/>
-                </a:solidFill>
-                <a:latin typeface="맑은 고딕"/>
-              </a:rPr>
-              <a:t/>
-            </a:r>
-            <a:r>
-              <a:rPr sz="1000" b="0" dirty="0">
-                <a:solidFill>
-                  <a:srgbClr val="C00000"/>
-                </a:solidFill>
-                <a:latin typeface="맑은 고딕"/>
-              </a:rPr>
-              <a:t/>
-            </a:r>
-            <a:r>
-              <a:rPr sz="1000" b="0" dirty="0" err="1">
-                <a:solidFill>
-                  <a:srgbClr val="C00000"/>
-                </a:solidFill>
-                <a:latin typeface="맑은 고딕"/>
-              </a:rPr>
-              <a:t/>
-            </a:r>
-            <a:r>
-              <a:rPr sz="1000" b="0" dirty="0">
-                <a:solidFill>
-                  <a:srgbClr val="C00000"/>
-                </a:solidFill>
-                <a:latin typeface="맑은 고딕"/>
-              </a:rPr>
-              <a:t/>
-            </a:r>
-          </a:p>
-          <a:p>
-            <a:pPr algn="l"/>
-            <a:r>
-              <a:rPr sz="1000" b="0" dirty="0">
-                <a:solidFill>
-                  <a:srgbClr val="C00000"/>
-                </a:solidFill>
-                <a:latin typeface="맑은 고딕"/>
-              </a:rPr>
-              <a:t>· </a:t>
-            </a:r>
-            <a:r>
-              <a:rPr sz="1000" b="0" dirty="0" err="1">
-                <a:solidFill>
-                  <a:srgbClr val="C00000"/>
-                </a:solidFill>
-                <a:latin typeface="맑은 고딕"/>
-              </a:rPr>
-              <a:t>예외</a:t>
-            </a:r>
-            <a:r>
-              <a:rPr sz="1000" b="0" dirty="0">
-                <a:solidFill>
-                  <a:srgbClr val="C00000"/>
-                </a:solidFill>
-                <a:latin typeface="맑은 고딕"/>
-              </a:rPr>
-              <a:t> </a:t>
-            </a:r>
-            <a:r>
-              <a:rPr sz="1000" b="0" dirty="0" err="1">
-                <a:solidFill>
-                  <a:srgbClr val="C00000"/>
-                </a:solidFill>
-                <a:latin typeface="맑은 고딕"/>
-              </a:rPr>
-              <a:t>처리</a:t>
-            </a:r>
-            <a:r>
-              <a:rPr sz="1000" b="0" dirty="0">
-                <a:solidFill>
-                  <a:srgbClr val="C00000"/>
-                </a:solidFill>
-                <a:latin typeface="맑은 고딕"/>
-              </a:rPr>
-              <a:t> </a:t>
-            </a:r>
-            <a:r>
-              <a:rPr sz="1000" b="0" dirty="0" err="1">
-                <a:solidFill>
-                  <a:srgbClr val="C00000"/>
-                </a:solidFill>
-                <a:latin typeface="맑은 고딕"/>
-              </a:rPr>
-              <a:t>그룹의</a:t>
-            </a:r>
-            <a:r>
-              <a:rPr sz="1000" b="0" dirty="0">
-                <a:solidFill>
-                  <a:srgbClr val="C00000"/>
-                </a:solidFill>
-                <a:latin typeface="맑은 고딕"/>
-              </a:rPr>
-              <a:t> [H/S </a:t>
-            </a:r>
-            <a:r>
-              <a:rPr sz="1000" b="0" dirty="0" err="1">
-                <a:solidFill>
-                  <a:srgbClr val="C00000"/>
-                </a:solidFill>
-                <a:latin typeface="맑은 고딕"/>
-              </a:rPr>
-              <a:t>배출</a:t>
-            </a:r>
-            <a:r>
-              <a:rPr sz="1000" b="0" dirty="0">
-                <a:solidFill>
-                  <a:srgbClr val="C00000"/>
-                </a:solidFill>
-                <a:latin typeface="맑은 고딕"/>
-              </a:rPr>
-              <a:t>] 은 </a:t>
-            </a:r>
-            <a:r>
-              <a:rPr sz="1000" b="0" dirty="0" err="1">
-                <a:solidFill>
-                  <a:srgbClr val="C00000"/>
-                </a:solidFill>
-                <a:latin typeface="맑은 고딕"/>
-              </a:rPr>
-              <a:t>출고</a:t>
-            </a:r>
-            <a:r>
-              <a:rPr sz="1000" b="0" dirty="0">
-                <a:solidFill>
-                  <a:srgbClr val="C00000"/>
-                </a:solidFill>
-                <a:latin typeface="맑은 고딕"/>
-              </a:rPr>
-              <a:t> H/S 에 </a:t>
-            </a:r>
-            <a:r>
-              <a:rPr sz="1000" b="0" dirty="0" err="1">
-                <a:solidFill>
-                  <a:srgbClr val="C00000"/>
-                </a:solidFill>
-                <a:latin typeface="맑은 고딕"/>
-              </a:rPr>
-              <a:t>놓인</a:t>
-            </a:r>
-            <a:r>
-              <a:rPr sz="1000" b="0" dirty="0">
-                <a:solidFill>
-                  <a:srgbClr val="C00000"/>
-                </a:solidFill>
-                <a:latin typeface="맑은 고딕"/>
-              </a:rPr>
-              <a:t> </a:t>
-            </a:r>
-            <a:r>
-              <a:rPr sz="1000" b="0" dirty="0" err="1">
-                <a:solidFill>
-                  <a:srgbClr val="C00000"/>
-                </a:solidFill>
-                <a:latin typeface="맑은 고딕"/>
-              </a:rPr>
-              <a:t>작업</a:t>
-            </a:r>
-            <a:r>
-              <a:rPr sz="1000" b="0" dirty="0">
-                <a:solidFill>
-                  <a:srgbClr val="C00000"/>
-                </a:solidFill>
-                <a:latin typeface="맑은 고딕"/>
-              </a:rPr>
-              <a:t> </a:t>
-            </a:r>
-            <a:r>
-              <a:rPr sz="1000" b="0" dirty="0" err="1">
-                <a:solidFill>
-                  <a:srgbClr val="C00000"/>
-                </a:solidFill>
-                <a:latin typeface="맑은 고딕"/>
-              </a:rPr>
-              <a:t>없는</a:t>
-            </a:r>
-            <a:r>
-              <a:rPr sz="1000" b="0" dirty="0">
-                <a:solidFill>
-                  <a:srgbClr val="C00000"/>
-                </a:solidFill>
-                <a:latin typeface="맑은 고딕"/>
-              </a:rPr>
-              <a:t> </a:t>
-            </a:r>
-            <a:r>
-              <a:rPr sz="1000" b="0" dirty="0" err="1">
-                <a:solidFill>
-                  <a:srgbClr val="C00000"/>
-                </a:solidFill>
-                <a:latin typeface="맑은 고딕"/>
-              </a:rPr>
-              <a:t>화물을</a:t>
-            </a:r>
-            <a:r>
-              <a:rPr sz="1000" b="0" dirty="0">
-                <a:solidFill>
-                  <a:srgbClr val="C00000"/>
-                </a:solidFill>
-                <a:latin typeface="맑은 고딕"/>
-              </a:rPr>
-              <a:t> </a:t>
-            </a:r>
-            <a:r>
-              <a:rPr sz="1000" b="0" dirty="0" err="1">
-                <a:solidFill>
-                  <a:srgbClr val="C00000"/>
-                </a:solidFill>
-                <a:latin typeface="맑은 고딕"/>
-              </a:rPr>
-              <a:t>출고대로</a:t>
-            </a:r>
-            <a:r>
-              <a:rPr sz="1000" b="0" dirty="0">
-                <a:solidFill>
-                  <a:srgbClr val="C00000"/>
-                </a:solidFill>
-                <a:latin typeface="맑은 고딕"/>
-              </a:rPr>
-              <a:t> </a:t>
-            </a:r>
-            <a:r>
-              <a:rPr sz="1000" b="0" dirty="0" err="1">
-                <a:solidFill>
-                  <a:srgbClr val="C00000"/>
-                </a:solidFill>
-                <a:latin typeface="맑은 고딕"/>
-              </a:rPr>
-              <a:t>내보낸다</a:t>
-            </a:r>
-            <a:r>
-              <a:rPr sz="1000" b="0" dirty="0">
-                <a:solidFill>
-                  <a:srgbClr val="C00000"/>
-                </a:solidFill>
-                <a:latin typeface="맑은 고딕"/>
-              </a:rPr>
-              <a:t>. </a:t>
-            </a:r>
-            <a:r>
-              <a:rPr sz="1000" b="0" dirty="0" err="1">
-                <a:solidFill>
-                  <a:srgbClr val="C00000"/>
-                </a:solidFill>
-                <a:latin typeface="맑은 고딕"/>
-              </a:rPr>
-              <a:t>비상</a:t>
-            </a:r>
-            <a:r>
-              <a:rPr sz="1000" b="0" dirty="0">
-                <a:solidFill>
-                  <a:srgbClr val="C00000"/>
-                </a:solidFill>
-                <a:latin typeface="맑은 고딕"/>
-              </a:rPr>
-              <a:t> </a:t>
-            </a:r>
-            <a:r>
-              <a:rPr sz="1000" b="0" dirty="0" err="1">
-                <a:solidFill>
-                  <a:srgbClr val="C00000"/>
-                </a:solidFill>
-                <a:latin typeface="맑은 고딕"/>
-              </a:rPr>
-              <a:t>확인창이</a:t>
-            </a:r>
-            <a:r>
-              <a:rPr sz="1000" b="0" dirty="0">
-                <a:solidFill>
-                  <a:srgbClr val="C00000"/>
-                </a:solidFill>
-                <a:latin typeface="맑은 고딕"/>
-              </a:rPr>
-              <a:t> </a:t>
-            </a:r>
-            <a:r>
-              <a:rPr sz="1000" b="0" dirty="0" err="1">
-                <a:solidFill>
-                  <a:srgbClr val="C00000"/>
-                </a:solidFill>
-                <a:latin typeface="맑은 고딕"/>
-              </a:rPr>
-              <a:t>뜨며</a:t>
-            </a:r>
-            <a:r>
-              <a:rPr sz="1000" b="0" dirty="0">
-                <a:solidFill>
-                  <a:srgbClr val="C00000"/>
-                </a:solidFill>
-                <a:latin typeface="맑은 고딕"/>
-              </a:rPr>
-              <a:t>, </a:t>
-            </a:r>
-            <a:r>
-              <a:rPr sz="1000" b="0" dirty="0" err="1">
-                <a:solidFill>
-                  <a:srgbClr val="C00000"/>
-                </a:solidFill>
-                <a:latin typeface="맑은 고딕"/>
-              </a:rPr>
-              <a:t>반자동</a:t>
-            </a:r>
-            <a:r>
-              <a:rPr sz="1000" b="0" dirty="0">
-                <a:solidFill>
-                  <a:srgbClr val="C00000"/>
-                </a:solidFill>
-                <a:latin typeface="맑은 고딕"/>
-              </a:rPr>
-              <a:t> </a:t>
-            </a:r>
-            <a:r>
-              <a:rPr sz="1000" b="0" dirty="0" err="1">
-                <a:solidFill>
-                  <a:srgbClr val="C00000"/>
-                </a:solidFill>
-                <a:latin typeface="맑은 고딕"/>
-              </a:rPr>
-              <a:t>출고</a:t>
-            </a:r>
-            <a:r>
-              <a:rPr sz="1000" b="0" dirty="0">
-                <a:solidFill>
-                  <a:srgbClr val="C00000"/>
-                </a:solidFill>
-                <a:latin typeface="맑은 고딕"/>
-              </a:rPr>
-              <a:t> </a:t>
-            </a:r>
-            <a:r>
-              <a:rPr sz="1000" b="0" dirty="0" err="1">
-                <a:solidFill>
-                  <a:srgbClr val="C00000"/>
-                </a:solidFill>
-                <a:latin typeface="맑은 고딕"/>
-              </a:rPr>
-              <a:t>작업을</a:t>
-            </a:r>
-            <a:r>
-              <a:rPr sz="1000" b="0" dirty="0">
-                <a:solidFill>
-                  <a:srgbClr val="C00000"/>
-                </a:solidFill>
-                <a:latin typeface="맑은 고딕"/>
-              </a:rPr>
-              <a:t> </a:t>
-            </a:r>
-            <a:r>
-              <a:rPr sz="1000" b="0" dirty="0" err="1">
-                <a:solidFill>
-                  <a:srgbClr val="C00000"/>
-                </a:solidFill>
-                <a:latin typeface="맑은 고딕"/>
-              </a:rPr>
-              <a:t>만들어</a:t>
-            </a:r>
-            <a:r>
-              <a:rPr sz="1000" b="0" dirty="0">
-                <a:solidFill>
-                  <a:srgbClr val="C00000"/>
-                </a:solidFill>
-                <a:latin typeface="맑은 고딕"/>
-              </a:rPr>
-              <a:t> </a:t>
-            </a:r>
-            <a:r>
-              <a:rPr sz="1000" b="0" dirty="0" err="1">
-                <a:solidFill>
-                  <a:srgbClr val="C00000"/>
-                </a:solidFill>
-                <a:latin typeface="맑은 고딕"/>
-              </a:rPr>
-              <a:t>상위</a:t>
-            </a:r>
-            <a:r>
-              <a:rPr sz="1000" b="0" dirty="0">
-                <a:solidFill>
-                  <a:srgbClr val="C00000"/>
-                </a:solidFill>
-                <a:latin typeface="맑은 고딕"/>
-              </a:rPr>
-              <a:t> </a:t>
-            </a:r>
-            <a:r>
-              <a:rPr sz="1000" b="0" dirty="0" err="1">
-                <a:solidFill>
-                  <a:srgbClr val="C00000"/>
-                </a:solidFill>
-                <a:latin typeface="맑은 고딕"/>
-              </a:rPr>
-              <a:t>보고</a:t>
-            </a:r>
-            <a:r>
-              <a:rPr sz="1000" b="0" dirty="0">
-                <a:solidFill>
-                  <a:srgbClr val="C00000"/>
-                </a:solidFill>
-                <a:latin typeface="맑은 고딕"/>
-              </a:rPr>
-              <a:t> </a:t>
-            </a:r>
-            <a:r>
-              <a:rPr sz="1000" b="0" dirty="0" err="1">
-                <a:solidFill>
-                  <a:srgbClr val="C00000"/>
-                </a:solidFill>
-                <a:latin typeface="맑은 고딕"/>
-              </a:rPr>
-              <a:t>없이</a:t>
-            </a:r>
-            <a:r>
-              <a:rPr sz="1000" b="0" dirty="0">
-                <a:solidFill>
-                  <a:srgbClr val="C00000"/>
-                </a:solidFill>
-                <a:latin typeface="맑은 고딕"/>
-              </a:rPr>
-              <a:t> </a:t>
-            </a:r>
-            <a:r>
-              <a:rPr sz="1000" b="0" dirty="0" err="1">
-                <a:solidFill>
-                  <a:srgbClr val="C00000"/>
-                </a:solidFill>
-                <a:latin typeface="맑은 고딕"/>
-              </a:rPr>
-              <a:t>처리한다</a:t>
-            </a:r>
-            <a:r>
-              <a:rPr sz="1000" b="0" dirty="0">
-                <a:solidFill>
-                  <a:srgbClr val="C00000"/>
-                </a:solidFill>
-                <a:latin typeface="맑은 고딕"/>
-              </a:rPr>
-              <a:t>(</a:t>
-            </a:r>
-            <a:r>
-              <a:rPr sz="1000" b="0" dirty="0" err="1">
-                <a:solidFill>
-                  <a:srgbClr val="C00000"/>
-                </a:solidFill>
-                <a:latin typeface="맑은 고딕"/>
-              </a:rPr>
-              <a:t>아래</a:t>
-            </a:r>
-            <a:r>
-              <a:rPr sz="1000" b="0" dirty="0">
-                <a:solidFill>
-                  <a:srgbClr val="C00000"/>
-                </a:solidFill>
-                <a:latin typeface="맑은 고딕"/>
-              </a:rPr>
-              <a:t> </a:t>
-            </a:r>
-            <a:r>
-              <a:rPr sz="1000" b="0" dirty="0" err="1">
-                <a:solidFill>
-                  <a:srgbClr val="C00000"/>
-                </a:solidFill>
-                <a:latin typeface="맑은 고딕"/>
-              </a:rPr>
-              <a:t>예외</a:t>
-            </a:r>
-            <a:r>
-              <a:rPr sz="1000" b="0" dirty="0">
-                <a:solidFill>
-                  <a:srgbClr val="C00000"/>
-                </a:solidFill>
-                <a:latin typeface="맑은 고딕"/>
-              </a:rPr>
-              <a:t> </a:t>
-            </a:r>
-            <a:r>
-              <a:rPr sz="1000" b="0" dirty="0" err="1">
-                <a:solidFill>
-                  <a:srgbClr val="C00000"/>
-                </a:solidFill>
-                <a:latin typeface="맑은 고딕"/>
-              </a:rPr>
-              <a:t>처리</a:t>
-            </a:r>
-            <a:r>
-              <a:rPr sz="1000" b="0" dirty="0">
-                <a:solidFill>
-                  <a:srgbClr val="C00000"/>
-                </a:solidFill>
-                <a:latin typeface="맑은 고딕"/>
-              </a:rPr>
-              <a:t> </a:t>
-            </a:r>
-            <a:r>
-              <a:rPr sz="1000" b="0" dirty="0" err="1">
-                <a:solidFill>
-                  <a:srgbClr val="C00000"/>
-                </a:solidFill>
-                <a:latin typeface="맑은 고딕"/>
-              </a:rPr>
-              <a:t>참조</a:t>
-            </a:r>
-            <a:r>
-              <a:rPr sz="1000" b="0" dirty="0">
-                <a:solidFill>
-                  <a:srgbClr val="C00000"/>
-                </a:solidFill>
-                <a:latin typeface="맑은 고딕"/>
-              </a:rPr>
-              <a:t>).</a:t>
-            </a:r>
-          </a:p>
-          <a:p>
-            <a:pPr algn="l"/>
-            <a:r>
-              <a:rPr sz="1000" b="0" dirty="0">
-                <a:solidFill>
-                  <a:srgbClr val="C00000"/>
-                </a:solidFill>
-                <a:latin typeface="맑은 고딕"/>
-              </a:rPr>
-              <a:t>· 도착지·작업구분 입력란은 2026-09-10 에 뺐다. 이 현장은 컨베이어에 도착지·작업구분을 내려보내지 않는다 - PLC 로 나가는 것은 방향(D300+N-1)과 작업번호 트래킹(R영역)뿐이고, 구 트랙테이블 방식의 D(트랙×10) 지시 쓰기는 확정 주소와 충돌해 2026-09-02 부터 차단돼 있다.</a:t>
-            </a:r>
-            <a:r>
-              <a:rPr sz="1000" b="0" dirty="0" err="1">
-                <a:solidFill>
-                  <a:srgbClr val="C00000"/>
-                </a:solidFill>
-                <a:latin typeface="맑은 고딕"/>
-              </a:rPr>
-              <a:t/>
-            </a:r>
-            <a:r>
-              <a:rPr sz="1000" b="0" dirty="0">
-                <a:solidFill>
-                  <a:srgbClr val="C00000"/>
-                </a:solidFill>
-                <a:latin typeface="맑은 고딕"/>
-              </a:rPr>
-              <a:t/>
-            </a:r>
-            <a:r>
-              <a:rPr sz="1000" b="0" dirty="0" err="1">
-                <a:solidFill>
-                  <a:srgbClr val="C00000"/>
-                </a:solidFill>
-                <a:latin typeface="맑은 고딕"/>
-              </a:rPr>
-              <a:t/>
-            </a:r>
-            <a:r>
-              <a:rPr sz="1000" b="0" dirty="0">
-                <a:solidFill>
-                  <a:srgbClr val="C00000"/>
-                </a:solidFill>
-                <a:latin typeface="맑은 고딕"/>
-              </a:rPr>
-              <a:t/>
-            </a:r>
-            <a:r>
-              <a:rPr sz="1000" b="0" dirty="0" err="1">
-                <a:solidFill>
-                  <a:srgbClr val="C00000"/>
-                </a:solidFill>
-                <a:latin typeface="맑은 고딕"/>
-              </a:rPr>
-              <a:t/>
-            </a:r>
-            <a:r>
-              <a:rPr sz="1000" b="0" dirty="0">
-                <a:solidFill>
-                  <a:srgbClr val="C00000"/>
-                </a:solidFill>
-                <a:latin typeface="맑은 고딕"/>
-              </a:rPr>
-              <a:t/>
-            </a:r>
-            <a:r>
-              <a:rPr sz="1000" b="0" dirty="0" err="1">
-                <a:solidFill>
-                  <a:srgbClr val="C00000"/>
-                </a:solidFill>
-                <a:latin typeface="맑은 고딕"/>
-              </a:rPr>
-              <a:t/>
-            </a:r>
-            <a:r>
-              <a:rPr sz="1000" b="0" dirty="0">
-                <a:solidFill>
-                  <a:srgbClr val="C00000"/>
-                </a:solidFill>
-                <a:latin typeface="맑은 고딕"/>
-              </a:rPr>
-              <a:t/>
-            </a:r>
-            <a:r>
-              <a:rPr sz="1000" b="0" dirty="0" err="1">
-                <a:solidFill>
-                  <a:srgbClr val="C00000"/>
-                </a:solidFill>
-                <a:latin typeface="맑은 고딕"/>
-              </a:rPr>
-              <a:t/>
-            </a:r>
-            <a:r>
-              <a:rPr sz="1000" b="0" dirty="0">
-                <a:solidFill>
-                  <a:srgbClr val="C00000"/>
-                </a:solidFill>
-                <a:latin typeface="맑은 고딕"/>
-              </a:rPr>
-              <a:t/>
-            </a:r>
-            <a:r>
-              <a:rPr sz="1000" b="0" dirty="0" err="1">
-                <a:solidFill>
-                  <a:srgbClr val="C00000"/>
-                </a:solidFill>
-                <a:latin typeface="맑은 고딕"/>
-              </a:rPr>
-              <a:t/>
-            </a:r>
-            <a:r>
-              <a:rPr sz="1000" b="0" dirty="0">
-                <a:solidFill>
-                  <a:srgbClr val="C00000"/>
-                </a:solidFill>
-                <a:latin typeface="맑은 고딕"/>
-              </a:rPr>
-              <a:t/>
-            </a:r>
-            <a:r>
-              <a:rPr sz="1000" b="0" dirty="0" err="1">
-                <a:solidFill>
-                  <a:srgbClr val="C00000"/>
-                </a:solidFill>
-                <a:latin typeface="맑은 고딕"/>
-              </a:rPr>
-              <a:t/>
-            </a:r>
-            <a:r>
-              <a:rPr sz="1000" b="0" dirty="0">
-                <a:solidFill>
-                  <a:srgbClr val="C00000"/>
-                </a:solidFill>
-                <a:latin typeface="맑은 고딕"/>
-              </a:rPr>
-              <a:t/>
-            </a:r>
-            <a:r>
-              <a:rPr sz="1000" b="0" dirty="0" err="1">
-                <a:solidFill>
-                  <a:srgbClr val="C00000"/>
-                </a:solidFill>
-                <a:latin typeface="맑은 고딕"/>
-              </a:rPr>
-              <a:t/>
-            </a:r>
-            <a:r>
-              <a:rPr sz="1000" b="0" dirty="0">
-                <a:solidFill>
-                  <a:srgbClr val="C00000"/>
-                </a:solidFill>
-                <a:latin typeface="맑은 고딕"/>
-              </a:rPr>
-              <a:t/>
-            </a:r>
-            <a:r>
-              <a:rPr sz="1000" b="0" dirty="0" err="1">
-                <a:solidFill>
-                  <a:srgbClr val="C00000"/>
-                </a:solidFill>
-                <a:latin typeface="맑은 고딕"/>
-              </a:rPr>
-              <a:t/>
-            </a:r>
-            <a:r>
-              <a:rPr sz="1000" b="0" dirty="0">
-                <a:solidFill>
-                  <a:srgbClr val="C00000"/>
-                </a:solidFill>
-                <a:latin typeface="맑은 고딕"/>
-              </a:rPr>
-              <a:t/>
-            </a:r>
-            <a:r>
-              <a:rPr sz="1000" b="0" dirty="0" err="1">
-                <a:solidFill>
-                  <a:srgbClr val="C00000"/>
-                </a:solidFill>
-                <a:latin typeface="맑은 고딕"/>
-              </a:rPr>
-              <a:t/>
-            </a:r>
-            <a:r>
-              <a:rPr sz="1000" b="0" dirty="0">
-                <a:solidFill>
-                  <a:srgbClr val="C00000"/>
-                </a:solidFill>
-                <a:latin typeface="맑은 고딕"/>
-              </a:rPr>
-              <a:t/>
-            </a:r>
-            <a:r>
-              <a:rPr sz="1000" b="0" dirty="0" err="1">
-                <a:solidFill>
-                  <a:srgbClr val="C00000"/>
-                </a:solidFill>
-                <a:latin typeface="맑은 고딕"/>
-              </a:rPr>
-              <a:t/>
-            </a:r>
-            <a:r>
-              <a:rPr sz="1000" b="0" dirty="0">
-                <a:solidFill>
-                  <a:srgbClr val="C00000"/>
-                </a:solidFill>
-                <a:latin typeface="맑은 고딕"/>
-              </a:rPr>
-              <a:t/>
-            </a:r>
-            <a:r>
-              <a:rPr sz="1000" b="0" dirty="0" err="1">
-                <a:solidFill>
-                  <a:srgbClr val="C00000"/>
-                </a:solidFill>
-                <a:latin typeface="맑은 고딕"/>
-              </a:rPr>
-              <a:t/>
-            </a:r>
-            <a:r>
-              <a:rPr sz="1000" b="0" dirty="0">
-                <a:solidFill>
-                  <a:srgbClr val="C00000"/>
-                </a:solidFill>
-                <a:latin typeface="맑은 고딕"/>
-              </a:rPr>
-              <a:t/>
-            </a:r>
-            <a:r>
-              <a:rPr sz="1000" b="0" dirty="0" err="1">
-                <a:solidFill>
-                  <a:srgbClr val="C00000"/>
-                </a:solidFill>
-                <a:latin typeface="맑은 고딕"/>
-              </a:rPr>
-              <a:t/>
-            </a:r>
-            <a:r>
-              <a:rPr sz="1000" b="0" dirty="0">
-                <a:solidFill>
-                  <a:srgbClr val="C00000"/>
-                </a:solidFill>
-                <a:latin typeface="맑은 고딕"/>
-              </a:rPr>
-              <a:t/>
-            </a:r>
-            <a:r>
-              <a:rPr sz="1000" b="0" dirty="0" err="1">
-                <a:solidFill>
-                  <a:srgbClr val="C00000"/>
-                </a:solidFill>
-                <a:latin typeface="맑은 고딕"/>
-              </a:rPr>
-              <a:t/>
-            </a:r>
-            <a:r>
-              <a:rPr sz="1000" b="0" dirty="0">
-                <a:solidFill>
-                  <a:srgbClr val="C00000"/>
-                </a:solidFill>
-                <a:latin typeface="맑은 고딕"/>
-              </a:rPr>
-              <a:t/>
-            </a:r>
-            <a:r>
-              <a:rPr sz="1000" b="0" dirty="0" err="1">
-                <a:solidFill>
-                  <a:srgbClr val="C00000"/>
-                </a:solidFill>
-                <a:latin typeface="맑은 고딕"/>
-              </a:rPr>
-              <a:t/>
-            </a:r>
-            <a:r>
-              <a:rPr sz="1000" b="0" dirty="0">
-                <a:solidFill>
-                  <a:srgbClr val="C00000"/>
-                </a:solidFill>
-                <a:latin typeface="맑은 고딕"/>
-              </a:rPr>
-              <a:t/>
-            </a:r>
-            <a:r>
-              <a:rPr sz="1000" b="0" dirty="0" err="1">
-                <a:solidFill>
-                  <a:srgbClr val="C00000"/>
-                </a:solidFill>
-                <a:latin typeface="맑은 고딕"/>
-              </a:rPr>
-              <a:t/>
-            </a:r>
-            <a:r>
-              <a:rPr sz="1000" b="0" dirty="0">
-                <a:solidFill>
-                  <a:srgbClr val="C00000"/>
-                </a:solidFill>
-                <a:latin typeface="맑은 고딕"/>
-              </a:rPr>
-              <a:t/>
-            </a:r>
-            <a:r>
-              <a:rPr sz="1000" b="0" dirty="0" err="1">
-                <a:solidFill>
-                  <a:srgbClr val="C00000"/>
-                </a:solidFill>
-                <a:latin typeface="맑은 고딕"/>
-              </a:rPr>
-              <a:t/>
-            </a:r>
-            <a:r>
-              <a:rPr sz="1000" b="0" dirty="0">
-                <a:solidFill>
-                  <a:srgbClr val="C00000"/>
-                </a:solidFill>
-                <a:latin typeface="맑은 고딕"/>
-              </a:rPr>
-              <a:t/>
-            </a:r>
-            <a:r>
-              <a:rPr sz="1000" b="0" dirty="0" err="1">
-                <a:solidFill>
-                  <a:srgbClr val="C00000"/>
-                </a:solidFill>
-                <a:latin typeface="맑은 고딕"/>
-              </a:rPr>
-              <a:t/>
-            </a:r>
-            <a:r>
-              <a:rPr sz="1000" b="0" dirty="0">
-                <a:solidFill>
-                  <a:srgbClr val="C00000"/>
-                </a:solidFill>
-                <a:latin typeface="맑은 고딕"/>
-              </a:rPr>
-              <a:t/>
-            </a:r>
-            <a:r>
-              <a:rPr sz="1000" b="0" dirty="0" err="1">
-                <a:solidFill>
-                  <a:srgbClr val="C00000"/>
-                </a:solidFill>
-                <a:latin typeface="맑은 고딕"/>
-              </a:rPr>
-              <a:t/>
-            </a:r>
-            <a:r>
-              <a:rPr sz="1000" b="0" dirty="0">
-                <a:solidFill>
-                  <a:srgbClr val="C00000"/>
-                </a:solidFill>
-                <a:latin typeface="맑은 고딕"/>
-              </a:rPr>
-              <a:t/>
-            </a:r>
-            <a:r>
-              <a:rPr sz="1000" b="0" dirty="0" err="1">
-                <a:solidFill>
-                  <a:srgbClr val="C00000"/>
-                </a:solidFill>
-                <a:latin typeface="맑은 고딕"/>
-              </a:rPr>
-              <a:t/>
-            </a:r>
-            <a:r>
-              <a:rPr sz="1000" b="0" dirty="0">
-                <a:solidFill>
-                  <a:srgbClr val="C00000"/>
-                </a:solidFill>
-                <a:latin typeface="맑은 고딕"/>
-              </a:rPr>
-              <a:t/>
-            </a:r>
-            <a:r>
-              <a:rPr sz="1000" b="0" dirty="0" err="1">
-                <a:solidFill>
-                  <a:srgbClr val="C00000"/>
-                </a:solidFill>
-                <a:latin typeface="맑은 고딕"/>
-              </a:rPr>
-              <a:t/>
-            </a:r>
-            <a:r>
-              <a:rPr sz="1000" b="0" dirty="0">
-                <a:solidFill>
-                  <a:srgbClr val="C00000"/>
-                </a:solidFill>
-                <a:latin typeface="맑은 고딕"/>
-              </a:rPr>
-              <a:t/>
-            </a:r>
-            <a:r>
-              <a:rPr sz="1000" b="0" dirty="0" err="1">
-                <a:solidFill>
-                  <a:srgbClr val="C00000"/>
-                </a:solidFill>
-                <a:latin typeface="맑은 고딕"/>
-              </a:rPr>
-              <a:t/>
-            </a:r>
-            <a:r>
-              <a:rPr sz="1000" b="0" dirty="0">
-                <a:solidFill>
-                  <a:srgbClr val="C00000"/>
-                </a:solidFill>
-                <a:latin typeface="맑은 고딕"/>
-              </a:rPr>
-              <a:t/>
-            </a:r>
-            <a:r>
-              <a:rPr sz="1000" b="0" dirty="0" err="1">
-                <a:solidFill>
-                  <a:srgbClr val="C00000"/>
-                </a:solidFill>
-                <a:latin typeface="맑은 고딕"/>
-              </a:rPr>
-              <a:t/>
-            </a:r>
-            <a:r>
-              <a:rPr sz="1000" b="0" dirty="0">
-                <a:solidFill>
-                  <a:srgbClr val="C00000"/>
-                </a:solidFill>
-                <a:latin typeface="맑은 고딕"/>
-              </a:rPr>
-              <a:t/>
-            </a:r>
-            <a:r>
-              <a:rPr sz="1000" b="0" dirty="0" err="1">
-                <a:solidFill>
-                  <a:srgbClr val="C00000"/>
-                </a:solidFill>
-                <a:latin typeface="맑은 고딕"/>
-              </a:rPr>
-              <a:t/>
-            </a:r>
-            <a:r>
-              <a:rPr sz="1000" b="0" dirty="0">
-                <a:solidFill>
-                  <a:srgbClr val="C00000"/>
-                </a:solidFill>
-                <a:latin typeface="맑은 고딕"/>
-              </a:rPr>
-              <a:t/>
-            </a:r>
-            <a:r>
-              <a:rPr sz="1000" b="0" dirty="0" err="1">
-                <a:solidFill>
-                  <a:srgbClr val="C00000"/>
-                </a:solidFill>
-                <a:latin typeface="맑은 고딕"/>
-              </a:rPr>
-              <a:t/>
-            </a:r>
-            <a:r>
-              <a:rPr sz="1000" b="0" dirty="0">
-                <a:solidFill>
-                  <a:srgbClr val="C00000"/>
-                </a:solidFill>
-                <a:latin typeface="맑은 고딕"/>
-              </a:rPr>
-              <a:t/>
-            </a:r>
-            <a:r>
-              <a:rPr sz="1000" b="0" dirty="0" err="1">
+              <a:rPr lang="ko-KR" altLang="en-US" sz="1000" dirty="0">
                 <a:solidFill>
                   <a:srgbClr val="C00000"/>
                 </a:solidFill>
@@ -8823,7 +8703,7 @@
           <p:nvPr/>
         </p:nvPicPr>
         <p:blipFill>
-          <a:blip r:embed="rId5"/>
+          <a:blip r:embed="rId3"/>
           <a:stretch>
             <a:fillRect/>
           </a:stretch>
@@ -8831,7 +8711,7 @@
         <p:spPr>
           <a:xfrm>
             <a:off x="2486856" y="1600646"/>
-            <a:ext cx="3804525" cy="4205347"/>
+            <a:ext cx="3804524" cy="4205347"/>
           </a:xfrm>
           <a:prstGeom prst="rect">
             <a:avLst/>
@@ -12155,7 +12035,7 @@
           <p:nvPr/>
         </p:nvPicPr>
         <p:blipFill>
-          <a:blip r:embed="rId4"/>
+          <a:blip r:embed="rId2"/>
           <a:stretch>
             <a:fillRect/>
           </a:stretch>
@@ -12163,7 +12043,7 @@
         <p:spPr>
           <a:xfrm>
             <a:off x="559841" y="1353127"/>
-            <a:ext cx="7658558" cy="4151745"/>
+            <a:ext cx="7658558" cy="4151744"/>
           </a:xfrm>
           <a:prstGeom prst="rect">
             <a:avLst/>

--- a/docs/산출물_20260909/06_ECS_화면설계서.pptx
+++ b/docs/산출물_20260909/06_ECS_화면설계서.pptx
@@ -15,6 +15,7 @@
     <p:sldId id="263" r:id="rId9"/>
     <p:sldId id="264" r:id="rId10"/>
     <p:sldId id="265" r:id="rId11"/>
+    <p:sldId id="278" r:id="rId28"/>
     <p:sldId id="266" r:id="rId12"/>
     <p:sldId id="267" r:id="rId13"/>
     <p:sldId id="268" r:id="rId14"/>
@@ -3768,7 +3769,7 @@
 </file>
 
 <file path=ppt/slides/slide11.xml><?xml version="1.0" encoding="utf-8"?>
-<p:sld xmlns:a="http://schemas.openxmlformats.org/drawingml/2006/main" xmlns:r="http://schemas.openxmlformats.org/officeDocument/2006/relationships" xmlns:p="http://schemas.openxmlformats.org/presentationml/2006/main">
+<p:sld xmlns:a="http://schemas.openxmlformats.org/drawingml/2006/main" xmlns:p="http://schemas.openxmlformats.org/presentationml/2006/main" xmlns:r="http://schemas.openxmlformats.org/officeDocument/2006/relationships">
   <p:cSld>
     <p:spTree>
       <p:nvGrpSpPr>
@@ -3776,14 +3777,7 @@
         <p:cNvGrpSpPr/>
         <p:nvPr/>
       </p:nvGrpSpPr>
-      <p:grpSpPr>
-        <a:xfrm>
-          <a:off x="0" y="0"/>
-          <a:ext cx="0" cy="0"/>
-          <a:chOff x="0" y="0"/>
-          <a:chExt cx="0" cy="0"/>
-        </a:xfrm>
-      </p:grpSpPr>
+      <p:grpSpPr/>
       <p:sp>
         <p:nvSpPr>
           <p:cNvPr id="2" name="TextBox 1"/>
@@ -3810,11 +3804,11 @@
             <a:r>
               <a:rPr sz="2600" b="1">
                 <a:solidFill>
-                  <a:srgbClr val="000000"/>
-                </a:solidFill>
-                <a:latin typeface="맑은 고딕"/>
-              </a:rPr>
-              <a:t>ECS&gt;창고 모니터링 - 작업번호 / 트랙번호 표시 전환</a:t>
+                  <a:srgbClr val="C00000"/>
+                </a:solidFill>
+                <a:latin typeface="맑은 고딕"/>
+              </a:rPr>
+              <a:t>ECS&gt;판넬 보기 - 판넬 3개를 모두 올린 화면</a:t>
             </a:r>
           </a:p>
         </p:txBody>
@@ -3867,7 +3861,7 @@
       </p:sp>
       <p:sp>
         <p:nvSpPr>
-          <p:cNvPr id="4" name="TextBox 3"/>
+          <p:cNvPr id="5" name="TextBox 4"/>
           <p:cNvSpPr txBox="1"/>
           <p:nvPr/>
         </p:nvSpPr>
@@ -3891,7 +3885,7 @@
             <a:r>
               <a:rPr sz="1300" b="1">
                 <a:solidFill>
-                  <a:srgbClr val="000000"/>
+                  <a:srgbClr val="C00000"/>
                 </a:solidFill>
                 <a:latin typeface="맑은 고딕"/>
               </a:rPr>
@@ -3903,11 +3897,11 @@
             <a:r>
               <a:rPr sz="1100" b="0">
                 <a:solidFill>
-                  <a:srgbClr val="000000"/>
-                </a:solidFill>
-                <a:latin typeface="맑은 고딕"/>
-              </a:rPr>
-              <a:t>ECS ▷ 창고 모니터링 ▷ 작업번호 · 트랙번호</a:t>
+                  <a:srgbClr val="C00000"/>
+                </a:solidFill>
+                <a:latin typeface="맑은 고딕"/>
+              </a:rPr>
+              <a:t>ECS ▷ 판넬 보기  (작업정보 + 상세정보 + 설비반송)</a:t>
             </a:r>
           </a:p>
           <a:p>
@@ -3924,7 +3918,7 @@
             <a:r>
               <a:rPr sz="1300" b="1">
                 <a:solidFill>
-                  <a:srgbClr val="000000"/>
+                  <a:srgbClr val="C00000"/>
                 </a:solidFill>
                 <a:latin typeface="맑은 고딕"/>
               </a:rPr>
@@ -3936,18 +3930,99 @@
             <a:r>
               <a:rPr sz="1100" b="0">
                 <a:solidFill>
-                  <a:srgbClr val="000000"/>
-                </a:solidFill>
-                <a:latin typeface="맑은 고딕"/>
-              </a:rPr>
-              <a:t>메인 화면 각 위치에 표시할 문자를 작업번호 / 트랙번호 중에서 고른다.</a:t>
-            </a:r>
-          </a:p>
-        </p:txBody>
-      </p:sp>
-      <p:sp>
-        <p:nvSpPr>
-          <p:cNvPr id="5" name="TextBox 4"/>
+                  <a:srgbClr val="C00000"/>
+                </a:solidFill>
+                <a:latin typeface="맑은 고딕"/>
+              </a:rPr>
+              <a:t>세 판넬을 모두 올렸을 때의 화면 구성. 위쪽 전폭이 작업정보, 오른쪽 위가 상세정보, 오른쪽 아래가 설비반송, 남은 왼쪽 아래가 창고 모니터링이다.</a:t>
+            </a:r>
+          </a:p>
+          <a:p>
+            <a:pPr algn="l"/>
+            <a:endParaRPr sz="1100" b="0">
+              <a:solidFill>
+                <a:srgbClr val="595959"/>
+              </a:solidFill>
+              <a:latin typeface="맑은 고딕"/>
+            </a:endParaRPr>
+          </a:p>
+          <a:p>
+            <a:pPr algn="l"/>
+            <a:r>
+              <a:rPr sz="1300" b="1">
+                <a:solidFill>
+                  <a:srgbClr val="C00000"/>
+                </a:solidFill>
+                <a:latin typeface="맑은 고딕"/>
+              </a:rPr>
+              <a:t>■ 특기사항</a:t>
+            </a:r>
+          </a:p>
+          <a:p>
+            <a:pPr algn="l"/>
+            <a:r>
+              <a:rPr sz="1000" b="0">
+                <a:solidFill>
+                  <a:srgbClr val="C00000"/>
+                </a:solidFill>
+                <a:latin typeface="맑은 고딕"/>
+              </a:rPr>
+              <a:t>· 작업정보 판넬은 열이 많아 화면 상단에 가로로 넓게 붙는다. 오른쪽 위 [자동 갱신] 으로 2초 주기 갱신을 켜고 끈다.</a:t>
+            </a:r>
+          </a:p>
+          <a:p>
+            <a:pPr algn="l"/>
+            <a:r>
+              <a:rPr sz="1000" b="0">
+                <a:solidFill>
+                  <a:srgbClr val="C00000"/>
+                </a:solidFill>
+                <a:latin typeface="맑은 고딕"/>
+              </a:rPr>
+              <a:t>· 상세정보 판넬은 메인 화면에서 클릭한 설비를 따라간다. CV / SC / RTV / 작업정보 탭으로 나뉜다.</a:t>
+            </a:r>
+          </a:p>
+          <a:p>
+            <a:pPr algn="l"/>
+            <a:r>
+              <a:rPr sz="1000" b="0">
+                <a:solidFill>
+                  <a:srgbClr val="C00000"/>
+                </a:solidFill>
+                <a:latin typeface="맑은 고딕"/>
+              </a:rPr>
+              <a:t>· 설비반송 판넬은 크레인 5대와 RGV 의 반송 현황을 한 줄씩 보여 준다.</a:t>
+            </a:r>
+          </a:p>
+          <a:p>
+            <a:pPr algn="l"/>
+            <a:r>
+              <a:rPr sz="1000" b="0">
+                <a:solidFill>
+                  <a:srgbClr val="C00000"/>
+                </a:solidFill>
+                <a:latin typeface="맑은 고딕"/>
+              </a:rPr>
+              <a:t>· 판넬은 보기 전용이다. 조작은 설비 대화상자에서 한다.</a:t>
+            </a:r>
+          </a:p>
+          <a:p>
+            <a:pPr algn="l"/>
+            <a:r>
+              <a:rPr sz="1000" b="0">
+                <a:solidFill>
+                  <a:srgbClr val="C00000"/>
+                </a:solidFill>
+                <a:latin typeface="맑은 고딕"/>
+              </a:rPr>
+              <a:t>· 판넬을 모두 끄면 창고 모니터링이 화면 전체를 쓴다.</a:t>
+            </a:r>
+          </a:p>
+        </p:txBody>
+      </p:sp>
+      <p:sp>
+        <p:nvSpPr>
+          <p:cNvPr id="6" name="TextBox 5"/>
           <p:cNvSpPr txBox="1"/>
           <p:nvPr/>
         </p:nvSpPr>
@@ -3982,7 +4057,7 @@
       </p:sp>
       <p:sp>
         <p:nvSpPr>
-          <p:cNvPr id="6" name="TextBox 5"/>
+          <p:cNvPr id="7" name="TextBox 6"/>
           <p:cNvSpPr txBox="1"/>
           <p:nvPr/>
         </p:nvSpPr>
@@ -4017,13 +4092,7 @@
       </p:sp>
       <p:pic>
         <p:nvPicPr>
-          <p:cNvPr id="8" name="그림 7">
-            <a:extLst>
-              <a:ext uri="{FF2B5EF4-FFF2-40B4-BE49-F238E27FC236}">
-                <a16:creationId xmlns:a16="http://schemas.microsoft.com/office/drawing/2014/main" id="{566B90D6-1C18-5244-4956-7D7B6D78FB5B}"/>
-              </a:ext>
-            </a:extLst>
-          </p:cNvPr>
+          <p:cNvPr id="8" name="Picture 7" descr="panels_all.png"/>
           <p:cNvPicPr>
             <a:picLocks noChangeAspect="1"/>
           </p:cNvPicPr>
@@ -4037,8 +4106,8 @@
         </p:blipFill>
         <p:spPr>
           <a:xfrm>
-            <a:off x="3865172" y="3000315"/>
-            <a:ext cx="1047896" cy="857370"/>
+            <a:off x="559842" y="1353127"/>
+            <a:ext cx="7658556" cy="4151743"/>
           </a:xfrm>
           <a:prstGeom prst="rect">
             <a:avLst/>
@@ -4100,7 +4169,7 @@
                 </a:solidFill>
                 <a:latin typeface="맑은 고딕"/>
               </a:rPr>
-              <a:t>MANUAL - JOB 수동지시</a:t>
+              <a:t>ECS&gt;창고 모니터링 - 작업번호 / 트랙번호 표시 전환</a:t>
             </a:r>
           </a:p>
         </p:txBody>
@@ -4151,9 +4220,165 @@
           </a:p>
         </p:txBody>
       </p:sp>
+      <p:sp>
+        <p:nvSpPr>
+          <p:cNvPr id="4" name="TextBox 3"/>
+          <p:cNvSpPr txBox="1"/>
+          <p:nvPr/>
+        </p:nvSpPr>
+        <p:spPr>
+          <a:xfrm>
+            <a:off x="8503920" y="1188720"/>
+            <a:ext cx="3291840" cy="5029200"/>
+          </a:xfrm>
+          <a:prstGeom prst="rect">
+            <a:avLst/>
+          </a:prstGeom>
+          <a:noFill/>
+        </p:spPr>
+        <p:txBody>
+          <a:bodyPr wrap="square" lIns="45720" rIns="45720" anchor="t">
+            <a:spAutoFit/>
+          </a:bodyPr>
+          <a:lstStyle/>
+          <a:p>
+            <a:pPr algn="l"/>
+            <a:r>
+              <a:rPr sz="1300" b="1">
+                <a:solidFill>
+                  <a:srgbClr val="000000"/>
+                </a:solidFill>
+                <a:latin typeface="맑은 고딕"/>
+              </a:rPr>
+              <a:t>■ 메뉴 Path</a:t>
+            </a:r>
+          </a:p>
+          <a:p>
+            <a:pPr algn="l"/>
+            <a:r>
+              <a:rPr sz="1100" b="0">
+                <a:solidFill>
+                  <a:srgbClr val="000000"/>
+                </a:solidFill>
+                <a:latin typeface="맑은 고딕"/>
+              </a:rPr>
+              <a:t>ECS ▷ 창고 모니터링 ▷ 작업번호 · 트랙번호</a:t>
+            </a:r>
+          </a:p>
+          <a:p>
+            <a:pPr algn="l"/>
+            <a:endParaRPr sz="1100" b="0">
+              <a:solidFill>
+                <a:srgbClr val="595959"/>
+              </a:solidFill>
+              <a:latin typeface="맑은 고딕"/>
+            </a:endParaRPr>
+          </a:p>
+          <a:p>
+            <a:pPr algn="l"/>
+            <a:r>
+              <a:rPr sz="1300" b="1">
+                <a:solidFill>
+                  <a:srgbClr val="000000"/>
+                </a:solidFill>
+                <a:latin typeface="맑은 고딕"/>
+              </a:rPr>
+              <a:t>■ 프로그램 개요</a:t>
+            </a:r>
+          </a:p>
+          <a:p>
+            <a:pPr algn="l"/>
+            <a:r>
+              <a:rPr sz="1100" b="0">
+                <a:solidFill>
+                  <a:srgbClr val="000000"/>
+                </a:solidFill>
+                <a:latin typeface="맑은 고딕"/>
+              </a:rPr>
+              <a:t>메인 화면 각 위치에 표시할 문자를 작업번호 / 트랙번호 중에서 고른다.</a:t>
+            </a:r>
+          </a:p>
+        </p:txBody>
+      </p:sp>
+      <p:sp>
+        <p:nvSpPr>
+          <p:cNvPr id="5" name="TextBox 4"/>
+          <p:cNvSpPr txBox="1"/>
+          <p:nvPr/>
+        </p:nvSpPr>
+        <p:spPr>
+          <a:xfrm>
+            <a:off x="457200" y="6400800"/>
+            <a:ext cx="3657600" cy="320040"/>
+          </a:xfrm>
+          <a:prstGeom prst="rect">
+            <a:avLst/>
+          </a:prstGeom>
+          <a:noFill/>
+        </p:spPr>
+        <p:txBody>
+          <a:bodyPr wrap="square" lIns="45720" rIns="45720" anchor="t">
+            <a:spAutoFit/>
+          </a:bodyPr>
+          <a:lstStyle/>
+          <a:p>
+            <a:pPr algn="l"/>
+            <a:r>
+              <a:rPr sz="1000" b="0">
+                <a:solidFill>
+                  <a:srgbClr val="000000"/>
+                </a:solidFill>
+                <a:latin typeface="맑은 고딕"/>
+              </a:rPr>
+              <a:t>LG 화학 1동 ECS  |  화면설계서</a:t>
+            </a:r>
+          </a:p>
+        </p:txBody>
+      </p:sp>
+      <p:sp>
+        <p:nvSpPr>
+          <p:cNvPr id="6" name="TextBox 5"/>
+          <p:cNvSpPr txBox="1"/>
+          <p:nvPr/>
+        </p:nvSpPr>
+        <p:spPr>
+          <a:xfrm>
+            <a:off x="11155680" y="6400800"/>
+            <a:ext cx="731520" cy="320040"/>
+          </a:xfrm>
+          <a:prstGeom prst="rect">
+            <a:avLst/>
+          </a:prstGeom>
+          <a:noFill/>
+        </p:spPr>
+        <p:txBody>
+          <a:bodyPr wrap="square" lIns="45720" rIns="45720" anchor="t">
+            <a:spAutoFit/>
+          </a:bodyPr>
+          <a:lstStyle/>
+          <a:p>
+            <a:pPr algn="r"/>
+            <a:r>
+              <a:rPr sz="1000" b="0">
+                <a:solidFill>
+                  <a:srgbClr val="000000"/>
+                </a:solidFill>
+                <a:latin typeface="맑은 고딕"/>
+              </a:rPr>
+              <a:t>12</a:t>
+            </a:r>
+          </a:p>
+        </p:txBody>
+      </p:sp>
       <p:pic>
         <p:nvPicPr>
-          <p:cNvPr id="4" name="Picture 3" descr="manual_job_0.png"/>
+          <p:cNvPr id="8" name="그림 7">
+            <a:extLst>
+              <a:ext uri="{FF2B5EF4-FFF2-40B4-BE49-F238E27FC236}">
+                <a16:creationId xmlns:a16="http://schemas.microsoft.com/office/drawing/2014/main" id="{566B90D6-1C18-5244-4956-7D7B6D78FB5B}"/>
+              </a:ext>
+            </a:extLst>
+          </p:cNvPr>
           <p:cNvPicPr>
             <a:picLocks noChangeAspect="1"/>
           </p:cNvPicPr>
@@ -4167,209 +4392,14 @@
         </p:blipFill>
         <p:spPr>
           <a:xfrm>
-            <a:off x="640080" y="2380714"/>
-            <a:ext cx="7498079" cy="2645211"/>
+            <a:off x="3865172" y="3000315"/>
+            <a:ext cx="1047896" cy="857370"/>
           </a:xfrm>
           <a:prstGeom prst="rect">
             <a:avLst/>
           </a:prstGeom>
         </p:spPr>
       </p:pic>
-      <p:sp>
-        <p:nvSpPr>
-          <p:cNvPr id="5" name="TextBox 4"/>
-          <p:cNvSpPr txBox="1"/>
-          <p:nvPr/>
-        </p:nvSpPr>
-        <p:spPr>
-          <a:xfrm>
-            <a:off x="8503920" y="1188720"/>
-            <a:ext cx="3291840" cy="5029200"/>
-          </a:xfrm>
-          <a:prstGeom prst="rect">
-            <a:avLst/>
-          </a:prstGeom>
-          <a:noFill/>
-        </p:spPr>
-        <p:txBody>
-          <a:bodyPr wrap="square" lIns="45720" rIns="45720" anchor="t">
-            <a:spAutoFit/>
-          </a:bodyPr>
-          <a:lstStyle/>
-          <a:p>
-            <a:pPr algn="l"/>
-            <a:r>
-              <a:rPr sz="1300" b="1">
-                <a:solidFill>
-                  <a:srgbClr val="000000"/>
-                </a:solidFill>
-                <a:latin typeface="맑은 고딕"/>
-              </a:rPr>
-              <a:t>■ 메뉴 Path</a:t>
-            </a:r>
-          </a:p>
-          <a:p>
-            <a:pPr algn="l"/>
-            <a:r>
-              <a:rPr sz="1100" b="0">
-                <a:solidFill>
-                  <a:srgbClr val="C00000"/>
-                </a:solidFill>
-                <a:latin typeface="맑은 고딕"/>
-              </a:rPr>
-              <a:t>수동조작 ▷ 작업</a:t>
-            </a:r>
-          </a:p>
-          <a:p>
-            <a:pPr algn="l"/>
-            <a:endParaRPr sz="1100" b="0">
-              <a:solidFill>
-                <a:srgbClr val="595959"/>
-              </a:solidFill>
-              <a:latin typeface="맑은 고딕"/>
-            </a:endParaRPr>
-          </a:p>
-          <a:p>
-            <a:pPr algn="l"/>
-            <a:r>
-              <a:rPr sz="1300" b="1">
-                <a:solidFill>
-                  <a:srgbClr val="000000"/>
-                </a:solidFill>
-                <a:latin typeface="맑은 고딕"/>
-              </a:rPr>
-              <a:t>■ 프로그램 개요</a:t>
-            </a:r>
-          </a:p>
-          <a:p>
-            <a:pPr algn="l"/>
-            <a:r>
-              <a:rPr sz="1100" b="0">
-                <a:solidFill>
-                  <a:srgbClr val="000000"/>
-                </a:solidFill>
-                <a:latin typeface="맑은 고딕"/>
-              </a:rPr>
-              <a:t>창고/작업구분/출발지/도착지/위치를 지정해 작업을 직접 생성한다(수동 운전용).</a:t>
-            </a:r>
-          </a:p>
-          <a:p>
-            <a:pPr algn="l"/>
-            <a:endParaRPr sz="1100" b="0">
-              <a:solidFill>
-                <a:srgbClr val="595959"/>
-              </a:solidFill>
-              <a:latin typeface="맑은 고딕"/>
-            </a:endParaRPr>
-          </a:p>
-          <a:p>
-            <a:pPr algn="l"/>
-            <a:r>
-              <a:rPr sz="1300" b="1">
-                <a:solidFill>
-                  <a:srgbClr val="000000"/>
-                </a:solidFill>
-                <a:latin typeface="맑은 고딕"/>
-              </a:rPr>
-              <a:t>■ 특기사항</a:t>
-            </a:r>
-          </a:p>
-          <a:p>
-            <a:pPr algn="l"/>
-            <a:r>
-              <a:rPr sz="1000" b="0">
-                <a:solidFill>
-                  <a:srgbClr val="000000"/>
-                </a:solidFill>
-                <a:latin typeface="맑은 고딕"/>
-              </a:rPr>
-              <a:t>· 작업개수를 지정하면 같은 조건으로 여러 건을 만든다.</a:t>
-            </a:r>
-          </a:p>
-          <a:p>
-            <a:pPr algn="l"/>
-            <a:r>
-              <a:rPr sz="1000" b="0">
-                <a:solidFill>
-                  <a:srgbClr val="000000"/>
-                </a:solidFill>
-                <a:latin typeface="맑은 고딕"/>
-              </a:rPr>
-              <a:t>· 반자동(1x) 작업은 상위에 보고하지 않고 완료 시 삭제된다.</a:t>
-            </a:r>
-          </a:p>
-        </p:txBody>
-      </p:sp>
-      <p:sp>
-        <p:nvSpPr>
-          <p:cNvPr id="6" name="TextBox 5"/>
-          <p:cNvSpPr txBox="1"/>
-          <p:nvPr/>
-        </p:nvSpPr>
-        <p:spPr>
-          <a:xfrm>
-            <a:off x="457200" y="6400800"/>
-            <a:ext cx="3657600" cy="320040"/>
-          </a:xfrm>
-          <a:prstGeom prst="rect">
-            <a:avLst/>
-          </a:prstGeom>
-          <a:noFill/>
-        </p:spPr>
-        <p:txBody>
-          <a:bodyPr wrap="square" lIns="45720" rIns="45720" anchor="t">
-            <a:spAutoFit/>
-          </a:bodyPr>
-          <a:lstStyle/>
-          <a:p>
-            <a:pPr algn="l"/>
-            <a:r>
-              <a:rPr sz="1000" b="0">
-                <a:solidFill>
-                  <a:srgbClr val="000000"/>
-                </a:solidFill>
-                <a:latin typeface="맑은 고딕"/>
-              </a:rPr>
-              <a:t>LG 화학 1동 ECS  |  화면설계서</a:t>
-            </a:r>
-          </a:p>
-        </p:txBody>
-      </p:sp>
-      <p:sp>
-        <p:nvSpPr>
-          <p:cNvPr id="7" name="TextBox 6"/>
-          <p:cNvSpPr txBox="1"/>
-          <p:nvPr/>
-        </p:nvSpPr>
-        <p:spPr>
-          <a:xfrm>
-            <a:off x="11155680" y="6400800"/>
-            <a:ext cx="731520" cy="320040"/>
-          </a:xfrm>
-          <a:prstGeom prst="rect">
-            <a:avLst/>
-          </a:prstGeom>
-          <a:noFill/>
-        </p:spPr>
-        <p:txBody>
-          <a:bodyPr wrap="square" lIns="45720" rIns="45720" anchor="t">
-            <a:spAutoFit/>
-          </a:bodyPr>
-          <a:lstStyle/>
-          <a:p>
-            <a:pPr algn="r"/>
-            <a:r>
-              <a:rPr sz="1000" b="0">
-                <a:solidFill>
-                  <a:srgbClr val="000000"/>
-                </a:solidFill>
-                <a:latin typeface="맑은 고딕"/>
-              </a:rPr>
-              <a:t>12</a:t>
-            </a:r>
-          </a:p>
-        </p:txBody>
-      </p:sp>
     </p:spTree>
   </p:cSld>
   <p:clrMapOvr>
@@ -4425,7 +4455,7 @@
                 </a:solidFill>
                 <a:latin typeface="맑은 고딕"/>
               </a:rPr>
-              <a:t>MANUAL - 크레인 수동작업</a:t>
+              <a:t>MANUAL - JOB 수동지시</a:t>
             </a:r>
           </a:p>
         </p:txBody>
@@ -4478,7 +4508,7 @@
       </p:sp>
       <p:pic>
         <p:nvPicPr>
-          <p:cNvPr id="4" name="Picture 3" descr="manual_sc_0.png"/>
+          <p:cNvPr id="4" name="Picture 3" descr="manual_job_0.png"/>
           <p:cNvPicPr>
             <a:picLocks noChangeAspect="1"/>
           </p:cNvPicPr>
@@ -4492,8 +4522,8 @@
         </p:blipFill>
         <p:spPr>
           <a:xfrm>
-            <a:off x="2066130" y="1280160"/>
-            <a:ext cx="4645980" cy="4846319"/>
+            <a:off x="640080" y="2380714"/>
+            <a:ext cx="7498079" cy="2645211"/>
           </a:xfrm>
           <a:prstGeom prst="rect">
             <a:avLst/>
@@ -4542,7 +4572,7 @@
                 </a:solidFill>
                 <a:latin typeface="맑은 고딕"/>
               </a:rPr>
-              <a:t>수동조작 ▷ 크레인</a:t>
+              <a:t>수동조작 ▷ 작업</a:t>
             </a:r>
           </a:p>
           <a:p>
@@ -4575,7 +4605,7 @@
                 </a:solidFill>
                 <a:latin typeface="맑은 고딕"/>
               </a:rPr>
-              <a:t>크레인 한 대에 H/S(트랙)·셀 위치를 지정해 직접 이송 지시를 낸다.</a:t>
+              <a:t>창고/작업구분/출발지/도착지/위치를 지정해 작업을 직접 생성한다(수동 운전용).</a:t>
             </a:r>
           </a:p>
           <a:p>
@@ -4608,7 +4638,7 @@
                 </a:solidFill>
                 <a:latin typeface="맑은 고딕"/>
               </a:rPr>
-              <a:t>· H/S 목록은 그 크레인 측 C/V 의 트랙(RGV측/S/C측)으로 채워진다.</a:t>
+              <a:t>· 작업개수를 지정하면 같은 조건으로 여러 건을 만든다.</a:t>
             </a:r>
           </a:p>
           <a:p>
@@ -4620,7 +4650,7 @@
                 </a:solidFill>
                 <a:latin typeface="맑은 고딕"/>
               </a:rPr>
-              <a:t>· 그 크레인에 진행 중인 지시가 있으면 수동 지시를 거부한다 - 먼저 SC 상태창의 [지시 삭제] 로 정리한다.</a:t>
+              <a:t>· 반자동(1x) 작업은 상위에 보고하지 않고 완료 시 삭제된다.</a:t>
             </a:r>
           </a:p>
         </p:txBody>
@@ -4750,7 +4780,7 @@
                 </a:solidFill>
                 <a:latin typeface="맑은 고딕"/>
               </a:rPr>
-              <a:t>MANUAL - RTV(RGV) 수동작업</a:t>
+              <a:t>MANUAL - 크레인 수동작업</a:t>
             </a:r>
           </a:p>
         </p:txBody>
@@ -4803,7 +4833,7 @@
       </p:sp>
       <p:pic>
         <p:nvPicPr>
-          <p:cNvPr id="4" name="Picture 3" descr="manual_rtv_0.png"/>
+          <p:cNvPr id="4" name="Picture 3" descr="manual_sc_0.png"/>
           <p:cNvPicPr>
             <a:picLocks noChangeAspect="1"/>
           </p:cNvPicPr>
@@ -4817,8 +4847,8 @@
         </p:blipFill>
         <p:spPr>
           <a:xfrm>
-            <a:off x="1143816" y="1280160"/>
-            <a:ext cx="6490607" cy="4846320"/>
+            <a:off x="2066130" y="1280160"/>
+            <a:ext cx="4645980" cy="4846319"/>
           </a:xfrm>
           <a:prstGeom prst="rect">
             <a:avLst/>
@@ -4867,7 +4897,7 @@
                 </a:solidFill>
                 <a:latin typeface="맑은 고딕"/>
               </a:rPr>
-              <a:t>수동조작 ▷ RTV</a:t>
+              <a:t>수동조작 ▷ 크레인</a:t>
             </a:r>
           </a:p>
           <a:p>
@@ -4900,7 +4930,7 @@
                 </a:solidFill>
                 <a:latin typeface="맑은 고딕"/>
               </a:rPr>
-              <a:t>RGV 에 출발지/도착지 트랙을 지정해 직접 반송 지시를 낸다.</a:t>
+              <a:t>크레인 한 대에 H/S(트랙)·셀 위치를 지정해 직접 이송 지시를 낸다.</a:t>
             </a:r>
           </a:p>
           <a:p>
@@ -4933,7 +4963,7 @@
                 </a:solidFill>
                 <a:latin typeface="맑은 고딕"/>
               </a:rPr>
-              <a:t>· 출발지·도착지는 RGV 가 정차하는 실제 트랙번호(103,105,…,131)로 표시된다.</a:t>
+              <a:t>· H/S 목록은 그 크레인 측 C/V 의 트랙(RGV측/S/C측)으로 채워진다.</a:t>
             </a:r>
           </a:p>
           <a:p>
@@ -4945,7 +4975,7 @@
                 </a:solidFill>
                 <a:latin typeface="맑은 고딕"/>
               </a:rPr>
-              <a:t>· 출발지=도착지 지시는 거부되고, 진행 중 지시가 있으면 거부된다(스케줄러 지시 덮어쓰기 방지).</a:t>
+              <a:t>· 그 크레인에 진행 중인 지시가 있으면 수동 지시를 거부한다 - 먼저 SC 상태창의 [지시 삭제] 로 정리한다.</a:t>
             </a:r>
           </a:p>
         </p:txBody>
@@ -5075,7 +5105,7 @@
                 </a:solidFill>
                 <a:latin typeface="맑은 고딕"/>
               </a:rPr>
-              <a:t>LOG - 작업 로그</a:t>
+              <a:t>MANUAL - RTV(RGV) 수동작업</a:t>
             </a:r>
           </a:p>
         </p:txBody>
@@ -5128,7 +5158,7 @@
       </p:sp>
       <p:pic>
         <p:nvPicPr>
-          <p:cNvPr id="4" name="Picture 3" descr="log_io_0.png"/>
+          <p:cNvPr id="4" name="Picture 3" descr="manual_rtv_0.png"/>
           <p:cNvPicPr>
             <a:picLocks noChangeAspect="1"/>
           </p:cNvPicPr>
@@ -5142,8 +5172,8 @@
         </p:blipFill>
         <p:spPr>
           <a:xfrm>
-            <a:off x="640080" y="1455096"/>
-            <a:ext cx="7498079" cy="4496446"/>
+            <a:off x="1143816" y="1280160"/>
+            <a:ext cx="6490607" cy="4846320"/>
           </a:xfrm>
           <a:prstGeom prst="rect">
             <a:avLst/>
@@ -5192,7 +5222,7 @@
                 </a:solidFill>
                 <a:latin typeface="맑은 고딕"/>
               </a:rPr>
-              <a:t>로그 ▷ 작업로그</a:t>
+              <a:t>수동조작 ▷ RTV</a:t>
             </a:r>
           </a:p>
           <a:p>
@@ -5225,7 +5255,52 @@
                 </a:solidFill>
                 <a:latin typeface="맑은 고딕"/>
               </a:rPr>
-              <a:t>작업 이력(JOB_MST_HIS)을 기간/작업번호/상태로 조회한다.</a:t>
+              <a:t>RGV 에 출발지/도착지 트랙을 지정해 직접 반송 지시를 낸다.</a:t>
+            </a:r>
+          </a:p>
+          <a:p>
+            <a:pPr algn="l"/>
+            <a:endParaRPr sz="1100" b="0">
+              <a:solidFill>
+                <a:srgbClr val="595959"/>
+              </a:solidFill>
+              <a:latin typeface="맑은 고딕"/>
+            </a:endParaRPr>
+          </a:p>
+          <a:p>
+            <a:pPr algn="l"/>
+            <a:r>
+              <a:rPr sz="1300" b="1">
+                <a:solidFill>
+                  <a:srgbClr val="000000"/>
+                </a:solidFill>
+                <a:latin typeface="맑은 고딕"/>
+              </a:rPr>
+              <a:t>■ 특기사항</a:t>
+            </a:r>
+          </a:p>
+          <a:p>
+            <a:pPr algn="l"/>
+            <a:r>
+              <a:rPr sz="1000" b="0">
+                <a:solidFill>
+                  <a:srgbClr val="000000"/>
+                </a:solidFill>
+                <a:latin typeface="맑은 고딕"/>
+              </a:rPr>
+              <a:t>· 출발지·도착지는 RGV 가 정차하는 실제 트랙번호(103,105,…,131)로 표시된다.</a:t>
+            </a:r>
+          </a:p>
+          <a:p>
+            <a:pPr algn="l"/>
+            <a:r>
+              <a:rPr sz="1000" b="0">
+                <a:solidFill>
+                  <a:srgbClr val="000000"/>
+                </a:solidFill>
+                <a:latin typeface="맑은 고딕"/>
+              </a:rPr>
+              <a:t>· 출발지=도착지 지시는 거부되고, 진행 중 지시가 있으면 거부된다(스케줄러 지시 덮어쓰기 방지).</a:t>
             </a:r>
           </a:p>
         </p:txBody>
@@ -5355,7 +5430,7 @@
                 </a:solidFill>
                 <a:latin typeface="맑은 고딕"/>
               </a:rPr>
-              <a:t>LOG - HOST 로그</a:t>
+              <a:t>LOG - 작업 로그</a:t>
             </a:r>
           </a:p>
         </p:txBody>
@@ -5408,7 +5483,7 @@
       </p:sp>
       <p:pic>
         <p:nvPicPr>
-          <p:cNvPr id="4" name="Picture 3" descr="log_mes_0.png"/>
+          <p:cNvPr id="4" name="Picture 3" descr="log_io_0.png"/>
           <p:cNvPicPr>
             <a:picLocks noChangeAspect="1"/>
           </p:cNvPicPr>
@@ -5422,8 +5497,8 @@
         </p:blipFill>
         <p:spPr>
           <a:xfrm>
-            <a:off x="640080" y="1503883"/>
-            <a:ext cx="7498079" cy="4398873"/>
+            <a:off x="640080" y="1455096"/>
+            <a:ext cx="7498079" cy="4496446"/>
           </a:xfrm>
           <a:prstGeom prst="rect">
             <a:avLst/>
@@ -5472,7 +5547,7 @@
                 </a:solidFill>
                 <a:latin typeface="맑은 고딕"/>
               </a:rPr>
-              <a:t>로그 ▷ HOST로그</a:t>
+              <a:t>로그 ▷ 작업로그</a:t>
             </a:r>
           </a:p>
           <a:p>
@@ -5505,40 +5580,7 @@
                 </a:solidFill>
                 <a:latin typeface="맑은 고딕"/>
               </a:rPr>
-              <a:t>상위(WMS/IMS)와 주고받은 전문 이력을 조회한다.</a:t>
-            </a:r>
-          </a:p>
-          <a:p>
-            <a:pPr algn="l"/>
-            <a:endParaRPr sz="1100" b="0">
-              <a:solidFill>
-                <a:srgbClr val="595959"/>
-              </a:solidFill>
-              <a:latin typeface="맑은 고딕"/>
-            </a:endParaRPr>
-          </a:p>
-          <a:p>
-            <a:pPr algn="l"/>
-            <a:r>
-              <a:rPr sz="1300" b="1">
-                <a:solidFill>
-                  <a:srgbClr val="000000"/>
-                </a:solidFill>
-                <a:latin typeface="맑은 고딕"/>
-              </a:rPr>
-              <a:t>■ 특기사항</a:t>
-            </a:r>
-          </a:p>
-          <a:p>
-            <a:pPr algn="l"/>
-            <a:r>
-              <a:rPr sz="1000" b="0">
-                <a:solidFill>
-                  <a:srgbClr val="000000"/>
-                </a:solidFill>
-                <a:latin typeface="맑은 고딕"/>
-              </a:rPr>
-              <a:t>· 전문 : O(작업지시) R(응답) M(모드 전환) S(상태보고) E(에러보고) F(완료)</a:t>
+              <a:t>작업 이력(JOB_MST_HIS)을 기간/작업번호/상태로 조회한다.</a:t>
             </a:r>
           </a:p>
         </p:txBody>
@@ -5668,7 +5710,7 @@
                 </a:solidFill>
                 <a:latin typeface="맑은 고딕"/>
               </a:rPr>
-              <a:t>LOG - 설비에러이력</a:t>
+              <a:t>LOG - HOST 로그</a:t>
             </a:r>
           </a:p>
         </p:txBody>
@@ -5721,7 +5763,7 @@
       </p:sp>
       <p:pic>
         <p:nvPicPr>
-          <p:cNvPr id="4" name="Picture 3" descr="log_eqp_his_0.png"/>
+          <p:cNvPr id="4" name="Picture 3" descr="log_mes_0.png"/>
           <p:cNvPicPr>
             <a:picLocks noChangeAspect="1"/>
           </p:cNvPicPr>
@@ -5735,8 +5777,8 @@
         </p:blipFill>
         <p:spPr>
           <a:xfrm>
-            <a:off x="803995" y="1280160"/>
-            <a:ext cx="7170248" cy="4846320"/>
+            <a:off x="640080" y="1503883"/>
+            <a:ext cx="7498079" cy="4398873"/>
           </a:xfrm>
           <a:prstGeom prst="rect">
             <a:avLst/>
@@ -5785,7 +5827,7 @@
                 </a:solidFill>
                 <a:latin typeface="맑은 고딕"/>
               </a:rPr>
-              <a:t>로그 ▷ 설비에러이력</a:t>
+              <a:t>로그 ▷ HOST로그</a:t>
             </a:r>
           </a:p>
           <a:p>
@@ -5818,7 +5860,40 @@
                 </a:solidFill>
                 <a:latin typeface="맑은 고딕"/>
               </a:rPr>
-              <a:t>설비(CV/SC/RTV) 에러 발생·해제 이력을 조회한다. (EQP_ERR_HIS)</a:t>
+              <a:t>상위(WMS/IMS)와 주고받은 전문 이력을 조회한다.</a:t>
+            </a:r>
+          </a:p>
+          <a:p>
+            <a:pPr algn="l"/>
+            <a:endParaRPr sz="1100" b="0">
+              <a:solidFill>
+                <a:srgbClr val="595959"/>
+              </a:solidFill>
+              <a:latin typeface="맑은 고딕"/>
+            </a:endParaRPr>
+          </a:p>
+          <a:p>
+            <a:pPr algn="l"/>
+            <a:r>
+              <a:rPr sz="1300" b="1">
+                <a:solidFill>
+                  <a:srgbClr val="000000"/>
+                </a:solidFill>
+                <a:latin typeface="맑은 고딕"/>
+              </a:rPr>
+              <a:t>■ 특기사항</a:t>
+            </a:r>
+          </a:p>
+          <a:p>
+            <a:pPr algn="l"/>
+            <a:r>
+              <a:rPr sz="1000" b="0">
+                <a:solidFill>
+                  <a:srgbClr val="000000"/>
+                </a:solidFill>
+                <a:latin typeface="맑은 고딕"/>
+              </a:rPr>
+              <a:t>· 전문 : O(작업지시) R(응답) M(모드 전환) S(상태보고) E(에러보고) F(완료)</a:t>
             </a:r>
           </a:p>
         </p:txBody>
@@ -5948,7 +6023,7 @@
                 </a:solidFill>
                 <a:latin typeface="맑은 고딕"/>
               </a:rPr>
-              <a:t>LOG - 유저사용 로그</a:t>
+              <a:t>LOG - 설비에러이력</a:t>
             </a:r>
           </a:p>
         </p:txBody>
@@ -6001,7 +6076,7 @@
       </p:sp>
       <p:pic>
         <p:nvPicPr>
-          <p:cNvPr id="4" name="Picture 3" descr="log_client_0.png"/>
+          <p:cNvPr id="4" name="Picture 3" descr="log_eqp_his_0.png"/>
           <p:cNvPicPr>
             <a:picLocks noChangeAspect="1"/>
           </p:cNvPicPr>
@@ -6015,8 +6090,8 @@
         </p:blipFill>
         <p:spPr>
           <a:xfrm>
-            <a:off x="756098" y="1280160"/>
-            <a:ext cx="7266042" cy="4846320"/>
+            <a:off x="803995" y="1280160"/>
+            <a:ext cx="7170248" cy="4846320"/>
           </a:xfrm>
           <a:prstGeom prst="rect">
             <a:avLst/>
@@ -6065,7 +6140,7 @@
                 </a:solidFill>
                 <a:latin typeface="맑은 고딕"/>
               </a:rPr>
-              <a:t>로그 ▷ 유저사용로그</a:t>
+              <a:t>로그 ▷ 설비에러이력</a:t>
             </a:r>
           </a:p>
           <a:p>
@@ -6098,7 +6173,7 @@
                 </a:solidFill>
                 <a:latin typeface="맑은 고딕"/>
               </a:rPr>
-              <a:t>운전 화면에서 사람이 수행한 조작(지시/삭제/설정 변경) 기록을 조회한다. (WCS_CLIENT_LOG)</a:t>
+              <a:t>설비(CV/SC/RTV) 에러 발생·해제 이력을 조회한다. (EQP_ERR_HIS)</a:t>
             </a:r>
           </a:p>
         </p:txBody>
@@ -6228,7 +6303,7 @@
                 </a:solidFill>
                 <a:latin typeface="맑은 고딕"/>
               </a:rPr>
-              <a:t>LOG - 알람 (ECS 프로그램 이력)</a:t>
+              <a:t>LOG - 유저사용 로그</a:t>
             </a:r>
           </a:p>
         </p:txBody>
@@ -6281,7 +6356,7 @@
       </p:sp>
       <p:pic>
         <p:nvPicPr>
-          <p:cNvPr id="4" name="Picture 3" descr="alarm_0.png"/>
+          <p:cNvPr id="4" name="Picture 3" descr="log_client_0.png"/>
           <p:cNvPicPr>
             <a:picLocks noChangeAspect="1"/>
           </p:cNvPicPr>
@@ -6295,8 +6370,8 @@
         </p:blipFill>
         <p:spPr>
           <a:xfrm>
-            <a:off x="640080" y="1766792"/>
-            <a:ext cx="7498079" cy="3873054"/>
+            <a:off x="756098" y="1280160"/>
+            <a:ext cx="7266042" cy="4846320"/>
           </a:xfrm>
           <a:prstGeom prst="rect">
             <a:avLst/>
@@ -6345,7 +6420,7 @@
                 </a:solidFill>
                 <a:latin typeface="맑은 고딕"/>
               </a:rPr>
-              <a:t>로그 ▷ 알람</a:t>
+              <a:t>로그 ▷ 유저사용로그</a:t>
             </a:r>
           </a:p>
           <a:p>
@@ -6378,40 +6453,7 @@
                 </a:solidFill>
                 <a:latin typeface="맑은 고딕"/>
               </a:rPr>
-              <a:t>서버 프로그램(스케줄러/설비 통신/상위 통신)이 남긴 운전 이력(WCS_LOG_PGR)을 프로그램·시간·작업번호로 조회한다.</a:t>
-            </a:r>
-          </a:p>
-          <a:p>
-            <a:pPr algn="l"/>
-            <a:endParaRPr sz="1100" b="0">
-              <a:solidFill>
-                <a:srgbClr val="595959"/>
-              </a:solidFill>
-              <a:latin typeface="맑은 고딕"/>
-            </a:endParaRPr>
-          </a:p>
-          <a:p>
-            <a:pPr algn="l"/>
-            <a:r>
-              <a:rPr sz="1300" b="1">
-                <a:solidFill>
-                  <a:srgbClr val="000000"/>
-                </a:solidFill>
-                <a:latin typeface="맑은 고딕"/>
-              </a:rPr>
-              <a:t>■ 특기사항</a:t>
-            </a:r>
-          </a:p>
-          <a:p>
-            <a:pPr algn="l"/>
-            <a:r>
-              <a:rPr sz="1000" b="0">
-                <a:solidFill>
-                  <a:srgbClr val="000000"/>
-                </a:solidFill>
-                <a:latin typeface="맑은 고딕"/>
-              </a:rPr>
-              <a:t>· 정체 작업 알림창도 이 이력을 근거로 뜬다(작업이 같은 상태로 오래 머물면 경고).</a:t>
+              <a:t>운전 화면에서 사람이 수행한 조작(지시/삭제/설정 변경) 기록을 조회한다. (WCS_CLIENT_LOG)</a:t>
             </a:r>
           </a:p>
         </p:txBody>
@@ -7065,7 +7107,7 @@
                 </a:solidFill>
                 <a:latin typeface="맑은 고딕"/>
               </a:rPr>
-              <a:t>설비 대화상자 - CV 상태</a:t>
+              <a:t>LOG - 알람 (ECS 프로그램 이력)</a:t>
             </a:r>
           </a:p>
         </p:txBody>
@@ -7116,1608 +7158,213 @@
           </a:p>
         </p:txBody>
       </p:sp>
-      <p:sp>
-        <p:nvSpPr>
-          <p:cNvPr id="5" name="TextBox 4"/>
-          <p:cNvSpPr txBox="1"/>
-          <p:nvPr/>
-        </p:nvSpPr>
-        <p:spPr>
-          <a:xfrm>
-            <a:off x="8503920" y="1188720"/>
-            <a:ext cx="3291840" cy="3247043"/>
-          </a:xfrm>
-          <a:prstGeom prst="rect">
-            <a:avLst/>
-          </a:prstGeom>
-          <a:noFill/>
-        </p:spPr>
-        <p:txBody>
-          <a:bodyPr wrap="square" lIns="45720" rIns="45720" anchor="t">
-            <a:spAutoFit/>
-          </a:bodyPr>
-          <a:lstStyle/>
-          <a:p>
-            <a:pPr algn="l"/>
-            <a:r>
-              <a:rPr sz="1300" b="1" dirty="0">
-                <a:solidFill>
-                  <a:srgbClr val="000000"/>
-                </a:solidFill>
-                <a:latin typeface="맑은 고딕"/>
-              </a:rPr>
-              <a:t>■ </a:t>
-            </a:r>
-            <a:r>
-              <a:rPr sz="1300" b="1" dirty="0" err="1">
-                <a:solidFill>
-                  <a:srgbClr val="000000"/>
-                </a:solidFill>
-                <a:latin typeface="맑은 고딕"/>
-              </a:rPr>
-              <a:t>메뉴</a:t>
-            </a:r>
-            <a:r>
-              <a:rPr sz="1300" b="1" dirty="0">
-                <a:solidFill>
-                  <a:srgbClr val="000000"/>
-                </a:solidFill>
-                <a:latin typeface="맑은 고딕"/>
-              </a:rPr>
-              <a:t> Path</a:t>
-            </a:r>
-          </a:p>
-          <a:p>
-            <a:pPr algn="l"/>
-            <a:r>
-              <a:rPr sz="1100" b="0" dirty="0" err="1">
-                <a:solidFill>
-                  <a:srgbClr val="000000"/>
-                </a:solidFill>
-                <a:latin typeface="맑은 고딕"/>
-              </a:rPr>
-              <a:t>메인</a:t>
-            </a:r>
-            <a:r>
-              <a:rPr sz="1100" b="0" dirty="0">
-                <a:solidFill>
-                  <a:srgbClr val="000000"/>
-                </a:solidFill>
-                <a:latin typeface="맑은 고딕"/>
-              </a:rPr>
-              <a:t> </a:t>
-            </a:r>
-            <a:r>
-              <a:rPr sz="1100" b="0" dirty="0" err="1">
-                <a:solidFill>
-                  <a:srgbClr val="000000"/>
-                </a:solidFill>
-                <a:latin typeface="맑은 고딕"/>
-              </a:rPr>
-              <a:t>화면에서</a:t>
-            </a:r>
-            <a:r>
-              <a:rPr sz="1100" b="0" dirty="0">
-                <a:solidFill>
-                  <a:srgbClr val="000000"/>
-                </a:solidFill>
-                <a:latin typeface="맑은 고딕"/>
-              </a:rPr>
-              <a:t> </a:t>
-            </a:r>
-            <a:r>
-              <a:rPr sz="1100" b="0" dirty="0" err="1">
-                <a:solidFill>
-                  <a:srgbClr val="000000"/>
-                </a:solidFill>
-                <a:latin typeface="맑은 고딕"/>
-              </a:rPr>
-              <a:t>컨베이어</a:t>
-            </a:r>
-            <a:r>
-              <a:rPr sz="1100" b="0" dirty="0">
-                <a:solidFill>
-                  <a:srgbClr val="000000"/>
-                </a:solidFill>
-                <a:latin typeface="맑은 고딕"/>
-              </a:rPr>
-              <a:t> </a:t>
-            </a:r>
-            <a:r>
-              <a:rPr sz="1100" b="0" dirty="0" err="1">
-                <a:solidFill>
-                  <a:srgbClr val="000000"/>
-                </a:solidFill>
-                <a:latin typeface="맑은 고딕"/>
-              </a:rPr>
-              <a:t>클릭</a:t>
-            </a:r>
-            <a:endParaRPr sz="1100" b="0" dirty="0">
-              <a:solidFill>
-                <a:srgbClr val="595959"/>
-              </a:solidFill>
-              <a:latin typeface="맑은 고딕"/>
-            </a:endParaRPr>
-          </a:p>
-          <a:p>
-            <a:pPr algn="l"/>
-            <a:endParaRPr sz="1100" b="0" dirty="0">
-              <a:solidFill>
-                <a:srgbClr val="595959"/>
-              </a:solidFill>
-              <a:latin typeface="맑은 고딕"/>
-            </a:endParaRPr>
-          </a:p>
-          <a:p>
-            <a:pPr algn="l"/>
-            <a:r>
-              <a:rPr sz="1300" b="1" dirty="0">
-                <a:solidFill>
-                  <a:srgbClr val="000000"/>
-                </a:solidFill>
-                <a:latin typeface="맑은 고딕"/>
-              </a:rPr>
-              <a:t>■ </a:t>
-            </a:r>
-            <a:r>
-              <a:rPr sz="1300" b="1" dirty="0" err="1">
-                <a:solidFill>
-                  <a:srgbClr val="000000"/>
-                </a:solidFill>
-                <a:latin typeface="맑은 고딕"/>
-              </a:rPr>
-              <a:t>프로그램</a:t>
-            </a:r>
-            <a:r>
-              <a:rPr sz="1300" b="1" dirty="0">
-                <a:solidFill>
-                  <a:srgbClr val="000000"/>
-                </a:solidFill>
-                <a:latin typeface="맑은 고딕"/>
-              </a:rPr>
-              <a:t> </a:t>
-            </a:r>
-            <a:r>
-              <a:rPr sz="1300" b="1" dirty="0" err="1">
-                <a:solidFill>
-                  <a:srgbClr val="000000"/>
-                </a:solidFill>
-                <a:latin typeface="맑은 고딕"/>
-              </a:rPr>
-              <a:t>개요</a:t>
-            </a:r>
-            <a:endParaRPr sz="1300" b="1" dirty="0">
-              <a:solidFill>
-                <a:srgbClr val="1E2761"/>
-              </a:solidFill>
-              <a:latin typeface="맑은 고딕"/>
-            </a:endParaRPr>
-          </a:p>
-          <a:p>
-            <a:pPr algn="l"/>
-            <a:r>
-              <a:rPr sz="1100" b="0" dirty="0" err="1">
-                <a:solidFill>
-                  <a:srgbClr val="C00000"/>
-                </a:solidFill>
-                <a:latin typeface="맑은 고딕"/>
-              </a:rPr>
-              <a:t>컨베이어(트랙 2개)의 PLC 신호와 작업 정보를 보고, 작업번호 쓰기/삭제/복사/잘라내기/붙여넣기를 수행한다.</a:t>
-            </a:r>
-            <a:r>
-              <a:rPr sz="1100" b="0" dirty="0">
-                <a:solidFill>
-                  <a:srgbClr val="C00000"/>
-                </a:solidFill>
-                <a:latin typeface="맑은 고딕"/>
-              </a:rPr>
-              <a:t/>
-            </a:r>
-            <a:r>
-              <a:rPr sz="1100" b="0" dirty="0" err="1">
-                <a:solidFill>
-                  <a:srgbClr val="C00000"/>
-                </a:solidFill>
-                <a:latin typeface="맑은 고딕"/>
-              </a:rPr>
-              <a:t/>
-            </a:r>
-            <a:r>
-              <a:rPr sz="1100" b="0" dirty="0">
-                <a:solidFill>
-                  <a:srgbClr val="C00000"/>
-                </a:solidFill>
-                <a:latin typeface="맑은 고딕"/>
-              </a:rPr>
-              <a:t/>
-            </a:r>
-            <a:r>
-              <a:rPr sz="1100" b="0" dirty="0" err="1">
-                <a:solidFill>
-                  <a:srgbClr val="C00000"/>
-                </a:solidFill>
-                <a:latin typeface="맑은 고딕"/>
-              </a:rPr>
-              <a:t/>
-            </a:r>
-            <a:r>
-              <a:rPr sz="1100" b="0" dirty="0">
-                <a:solidFill>
-                  <a:srgbClr val="C00000"/>
-                </a:solidFill>
-                <a:latin typeface="맑은 고딕"/>
-              </a:rPr>
-              <a:t/>
-            </a:r>
-            <a:r>
-              <a:rPr sz="1100" b="0" dirty="0" err="1">
-                <a:solidFill>
-                  <a:srgbClr val="C00000"/>
-                </a:solidFill>
-                <a:latin typeface="맑은 고딕"/>
-              </a:rPr>
-              <a:t/>
-            </a:r>
-            <a:r>
-              <a:rPr sz="1100" b="0" dirty="0">
-                <a:solidFill>
-                  <a:srgbClr val="C00000"/>
-                </a:solidFill>
-                <a:latin typeface="맑은 고딕"/>
-              </a:rPr>
-              <a:t/>
-            </a:r>
-            <a:r>
-              <a:rPr sz="1100" b="0" dirty="0" err="1">
-                <a:solidFill>
-                  <a:srgbClr val="C00000"/>
-                </a:solidFill>
-                <a:latin typeface="맑은 고딕"/>
-              </a:rPr>
-              <a:t/>
-            </a:r>
-            <a:r>
-              <a:rPr sz="1100" b="0" dirty="0">
-                <a:solidFill>
-                  <a:srgbClr val="C00000"/>
-                </a:solidFill>
-                <a:latin typeface="맑은 고딕"/>
-              </a:rPr>
-              <a:t/>
-            </a:r>
-            <a:r>
-              <a:rPr sz="1100" b="0" dirty="0" err="1">
-                <a:solidFill>
-                  <a:srgbClr val="C00000"/>
-                </a:solidFill>
-                <a:latin typeface="맑은 고딕"/>
-              </a:rPr>
-              <a:t/>
-            </a:r>
-            <a:r>
-              <a:rPr sz="1100" b="0" dirty="0">
-                <a:solidFill>
-                  <a:srgbClr val="C00000"/>
-                </a:solidFill>
-                <a:latin typeface="맑은 고딕"/>
-              </a:rPr>
-              <a:t/>
-            </a:r>
-            <a:r>
-              <a:rPr sz="1100" b="0" dirty="0" err="1">
-                <a:solidFill>
-                  <a:srgbClr val="C00000"/>
-                </a:solidFill>
-                <a:latin typeface="맑은 고딕"/>
-              </a:rPr>
-              <a:t/>
-            </a:r>
-            <a:r>
-              <a:rPr sz="1100" b="0" dirty="0">
-                <a:solidFill>
-                  <a:srgbClr val="C00000"/>
-                </a:solidFill>
-                <a:latin typeface="맑은 고딕"/>
-              </a:rPr>
-              <a:t/>
-            </a:r>
-            <a:r>
-              <a:rPr sz="1100" b="0" dirty="0" err="1">
-                <a:solidFill>
-                  <a:srgbClr val="C00000"/>
-                </a:solidFill>
-                <a:latin typeface="맑은 고딕"/>
-              </a:rPr>
-              <a:t/>
-            </a:r>
-            <a:r>
-              <a:rPr sz="1100" b="0" dirty="0">
-                <a:solidFill>
-                  <a:srgbClr val="C00000"/>
-                </a:solidFill>
-                <a:latin typeface="맑은 고딕"/>
-              </a:rPr>
-              <a:t/>
-            </a:r>
-            <a:r>
-              <a:rPr sz="1100" b="0" dirty="0" err="1">
-                <a:solidFill>
-                  <a:srgbClr val="C00000"/>
-                </a:solidFill>
-                <a:latin typeface="맑은 고딕"/>
-              </a:rPr>
-              <a:t/>
-            </a:r>
-            <a:r>
-              <a:rPr sz="1100" b="0" dirty="0">
-                <a:solidFill>
-                  <a:srgbClr val="C00000"/>
-                </a:solidFill>
-                <a:latin typeface="맑은 고딕"/>
-              </a:rPr>
-              <a:t/>
-            </a:r>
-            <a:r>
-              <a:rPr sz="1100" b="0" dirty="0" err="1">
-                <a:solidFill>
-                  <a:srgbClr val="C00000"/>
-                </a:solidFill>
-                <a:latin typeface="맑은 고딕"/>
-              </a:rPr>
-              <a:t/>
-            </a:r>
-            <a:r>
-              <a:rPr sz="1100" b="0" dirty="0">
-                <a:solidFill>
-                  <a:srgbClr val="C00000"/>
-                </a:solidFill>
-                <a:latin typeface="맑은 고딕"/>
-              </a:rPr>
-              <a:t/>
-            </a:r>
-            <a:r>
-              <a:rPr sz="1100" b="0" dirty="0" err="1">
-                <a:solidFill>
-                  <a:srgbClr val="C00000"/>
-                </a:solidFill>
-                <a:latin typeface="맑은 고딕"/>
-              </a:rPr>
-              <a:t/>
-            </a:r>
-            <a:r>
-              <a:rPr sz="1100" b="0" dirty="0">
-                <a:solidFill>
-                  <a:srgbClr val="C00000"/>
-                </a:solidFill>
-                <a:latin typeface="맑은 고딕"/>
-              </a:rPr>
-              <a:t/>
-            </a:r>
-            <a:r>
-              <a:rPr sz="1100" b="0" dirty="0" err="1">
-                <a:solidFill>
-                  <a:srgbClr val="C00000"/>
-                </a:solidFill>
-                <a:latin typeface="맑은 고딕"/>
-              </a:rPr>
-              <a:t/>
-            </a:r>
-            <a:r>
-              <a:rPr sz="1100" b="0" dirty="0">
-                <a:solidFill>
-                  <a:srgbClr val="C00000"/>
-                </a:solidFill>
-                <a:latin typeface="맑은 고딕"/>
-              </a:rPr>
-              <a:t/>
-            </a:r>
-            <a:r>
-              <a:rPr sz="1100" b="0" dirty="0" err="1">
-                <a:solidFill>
-                  <a:srgbClr val="C00000"/>
-                </a:solidFill>
-                <a:latin typeface="맑은 고딕"/>
-              </a:rPr>
-              <a:t/>
-            </a:r>
-            <a:r>
-              <a:rPr sz="1100" b="0" dirty="0">
-                <a:solidFill>
-                  <a:srgbClr val="C00000"/>
-                </a:solidFill>
-                <a:latin typeface="맑은 고딕"/>
-              </a:rPr>
-              <a:t/>
-            </a:r>
-            <a:r>
-              <a:rPr sz="1100" b="0" dirty="0" err="1">
-                <a:solidFill>
-                  <a:srgbClr val="C00000"/>
-                </a:solidFill>
-                <a:latin typeface="맑은 고딕"/>
-              </a:rPr>
-              <a:t/>
-            </a:r>
-            <a:r>
-              <a:rPr sz="1100" b="0" dirty="0">
-                <a:solidFill>
-                  <a:srgbClr val="C00000"/>
-                </a:solidFill>
-                <a:latin typeface="맑은 고딕"/>
-              </a:rPr>
-              <a:t/>
-            </a:r>
-            <a:r>
-              <a:rPr sz="1100" b="0" dirty="0" err="1">
-                <a:solidFill>
-                  <a:srgbClr val="C00000"/>
-                </a:solidFill>
-                <a:latin typeface="맑은 고딕"/>
-              </a:rPr>
-              <a:t/>
-            </a:r>
-            <a:r>
-              <a:rPr sz="1100" b="0" dirty="0">
-                <a:solidFill>
-                  <a:srgbClr val="C00000"/>
-                </a:solidFill>
-                <a:latin typeface="맑은 고딕"/>
-              </a:rPr>
-              <a:t/>
-            </a:r>
-          </a:p>
-          <a:p>
-            <a:pPr algn="l"/>
-            <a:endParaRPr sz="1100" b="0" dirty="0">
-              <a:solidFill>
-                <a:srgbClr val="595959"/>
-              </a:solidFill>
-              <a:latin typeface="맑은 고딕"/>
-            </a:endParaRPr>
-          </a:p>
-          <a:p>
-            <a:pPr algn="l"/>
-            <a:r>
-              <a:rPr sz="1300" b="1" dirty="0">
-                <a:solidFill>
-                  <a:srgbClr val="000000"/>
-                </a:solidFill>
-                <a:latin typeface="맑은 고딕"/>
-              </a:rPr>
-              <a:t>■ </a:t>
-            </a:r>
-            <a:r>
-              <a:rPr sz="1300" b="1" dirty="0" err="1">
-                <a:solidFill>
-                  <a:srgbClr val="000000"/>
-                </a:solidFill>
-                <a:latin typeface="맑은 고딕"/>
-              </a:rPr>
-              <a:t>특기사항</a:t>
-            </a:r>
-            <a:endParaRPr sz="1300" b="1" dirty="0">
-              <a:solidFill>
-                <a:srgbClr val="1E2761"/>
-              </a:solidFill>
-              <a:latin typeface="맑은 고딕"/>
-            </a:endParaRPr>
-          </a:p>
-          <a:p>
-            <a:pPr algn="l"/>
-            <a:r>
-              <a:rPr sz="1000" b="0" dirty="0">
-                <a:solidFill>
-                  <a:srgbClr val="C00000"/>
-                </a:solidFill>
-                <a:latin typeface="맑은 고딕"/>
-              </a:rPr>
-              <a:t>· [쓰기] 는 그 트랙의 작업번호를 새로 넣는다. 실물 화물이 있는데 시스템이 모르는 경우 작업번호를 인식시킬 때 쓴다.</a:t>
-            </a:r>
-          </a:p>
-          <a:p>
-            <a:pPr algn="l"/>
-            <a:r>
-              <a:rPr sz="1000" b="0" dirty="0">
-                <a:solidFill>
-                  <a:srgbClr val="C00000"/>
-                </a:solidFill>
-                <a:latin typeface="맑은 고딕"/>
-              </a:rPr>
-              <a:t>· </a:t>
-            </a:r>
-            <a:r>
-              <a:rPr sz="1000" b="0" dirty="0" err="1">
-                <a:solidFill>
-                  <a:srgbClr val="C00000"/>
-                </a:solidFill>
-                <a:latin typeface="맑은 고딕"/>
-              </a:rPr>
-              <a:t>예외</a:t>
-            </a:r>
-            <a:r>
-              <a:rPr sz="1000" b="0" dirty="0">
-                <a:solidFill>
-                  <a:srgbClr val="C00000"/>
-                </a:solidFill>
-                <a:latin typeface="맑은 고딕"/>
-              </a:rPr>
-              <a:t> </a:t>
-            </a:r>
-            <a:r>
-              <a:rPr sz="1000" b="0" dirty="0" err="1">
-                <a:solidFill>
-                  <a:srgbClr val="C00000"/>
-                </a:solidFill>
-                <a:latin typeface="맑은 고딕"/>
-              </a:rPr>
-              <a:t>처리</a:t>
-            </a:r>
-            <a:r>
-              <a:rPr sz="1000" b="0" dirty="0">
-                <a:solidFill>
-                  <a:srgbClr val="C00000"/>
-                </a:solidFill>
-                <a:latin typeface="맑은 고딕"/>
-              </a:rPr>
-              <a:t> </a:t>
-            </a:r>
-            <a:r>
-              <a:rPr sz="1000" b="0" dirty="0" err="1">
-                <a:solidFill>
-                  <a:srgbClr val="C00000"/>
-                </a:solidFill>
-                <a:latin typeface="맑은 고딕"/>
-              </a:rPr>
-              <a:t>그룹의</a:t>
-            </a:r>
-            <a:r>
-              <a:rPr sz="1000" b="0" dirty="0">
-                <a:solidFill>
-                  <a:srgbClr val="C00000"/>
-                </a:solidFill>
-                <a:latin typeface="맑은 고딕"/>
-              </a:rPr>
-              <a:t> [H/S </a:t>
-            </a:r>
-            <a:r>
-              <a:rPr sz="1000" b="0" dirty="0" err="1">
-                <a:solidFill>
-                  <a:srgbClr val="C00000"/>
-                </a:solidFill>
-                <a:latin typeface="맑은 고딕"/>
-              </a:rPr>
-              <a:t>배출</a:t>
-            </a:r>
-            <a:r>
-              <a:rPr sz="1000" b="0" dirty="0">
-                <a:solidFill>
-                  <a:srgbClr val="C00000"/>
-                </a:solidFill>
-                <a:latin typeface="맑은 고딕"/>
-              </a:rPr>
-              <a:t>] 은 </a:t>
-            </a:r>
-            <a:r>
-              <a:rPr sz="1000" b="0" dirty="0" err="1">
-                <a:solidFill>
-                  <a:srgbClr val="C00000"/>
-                </a:solidFill>
-                <a:latin typeface="맑은 고딕"/>
-              </a:rPr>
-              <a:t>출고</a:t>
-            </a:r>
-            <a:r>
-              <a:rPr sz="1000" b="0" dirty="0">
-                <a:solidFill>
-                  <a:srgbClr val="C00000"/>
-                </a:solidFill>
-                <a:latin typeface="맑은 고딕"/>
-              </a:rPr>
-              <a:t> H/S 에 </a:t>
-            </a:r>
-            <a:r>
-              <a:rPr sz="1000" b="0" dirty="0" err="1">
-                <a:solidFill>
-                  <a:srgbClr val="C00000"/>
-                </a:solidFill>
-                <a:latin typeface="맑은 고딕"/>
-              </a:rPr>
-              <a:t>놓인</a:t>
-            </a:r>
-            <a:r>
-              <a:rPr sz="1000" b="0" dirty="0">
-                <a:solidFill>
-                  <a:srgbClr val="C00000"/>
-                </a:solidFill>
-                <a:latin typeface="맑은 고딕"/>
-              </a:rPr>
-              <a:t> </a:t>
-            </a:r>
-            <a:r>
-              <a:rPr sz="1000" b="0" dirty="0" err="1">
-                <a:solidFill>
-                  <a:srgbClr val="C00000"/>
-                </a:solidFill>
-                <a:latin typeface="맑은 고딕"/>
-              </a:rPr>
-              <a:t>작업</a:t>
-            </a:r>
-            <a:r>
-              <a:rPr sz="1000" b="0" dirty="0">
-                <a:solidFill>
-                  <a:srgbClr val="C00000"/>
-                </a:solidFill>
-                <a:latin typeface="맑은 고딕"/>
-              </a:rPr>
-              <a:t> </a:t>
-            </a:r>
-            <a:r>
-              <a:rPr sz="1000" b="0" dirty="0" err="1">
-                <a:solidFill>
-                  <a:srgbClr val="C00000"/>
-                </a:solidFill>
-                <a:latin typeface="맑은 고딕"/>
-              </a:rPr>
-              <a:t>없는</a:t>
-            </a:r>
-            <a:r>
-              <a:rPr sz="1000" b="0" dirty="0">
-                <a:solidFill>
-                  <a:srgbClr val="C00000"/>
-                </a:solidFill>
-                <a:latin typeface="맑은 고딕"/>
-              </a:rPr>
-              <a:t> </a:t>
-            </a:r>
-            <a:r>
-              <a:rPr sz="1000" b="0" dirty="0" err="1">
-                <a:solidFill>
-                  <a:srgbClr val="C00000"/>
-                </a:solidFill>
-                <a:latin typeface="맑은 고딕"/>
-              </a:rPr>
-              <a:t>화물을</a:t>
-            </a:r>
-            <a:r>
-              <a:rPr sz="1000" b="0" dirty="0">
-                <a:solidFill>
-                  <a:srgbClr val="C00000"/>
-                </a:solidFill>
-                <a:latin typeface="맑은 고딕"/>
-              </a:rPr>
-              <a:t> </a:t>
-            </a:r>
-            <a:r>
-              <a:rPr sz="1000" b="0" dirty="0" err="1">
-                <a:solidFill>
-                  <a:srgbClr val="C00000"/>
-                </a:solidFill>
-                <a:latin typeface="맑은 고딕"/>
-              </a:rPr>
-              <a:t>출고대로</a:t>
-            </a:r>
-            <a:r>
-              <a:rPr sz="1000" b="0" dirty="0">
-                <a:solidFill>
-                  <a:srgbClr val="C00000"/>
-                </a:solidFill>
-                <a:latin typeface="맑은 고딕"/>
-              </a:rPr>
-              <a:t> </a:t>
-            </a:r>
-            <a:r>
-              <a:rPr sz="1000" b="0" dirty="0" err="1">
-                <a:solidFill>
-                  <a:srgbClr val="C00000"/>
-                </a:solidFill>
-                <a:latin typeface="맑은 고딕"/>
-              </a:rPr>
-              <a:t>내보낸다</a:t>
-            </a:r>
-            <a:r>
-              <a:rPr sz="1000" b="0" dirty="0">
-                <a:solidFill>
-                  <a:srgbClr val="C00000"/>
-                </a:solidFill>
-                <a:latin typeface="맑은 고딕"/>
-              </a:rPr>
-              <a:t>. </a:t>
-            </a:r>
-            <a:r>
-              <a:rPr sz="1000" b="0" dirty="0" err="1">
-                <a:solidFill>
-                  <a:srgbClr val="C00000"/>
-                </a:solidFill>
-                <a:latin typeface="맑은 고딕"/>
-              </a:rPr>
-              <a:t>비상</a:t>
-            </a:r>
-            <a:r>
-              <a:rPr sz="1000" b="0" dirty="0">
-                <a:solidFill>
-                  <a:srgbClr val="C00000"/>
-                </a:solidFill>
-                <a:latin typeface="맑은 고딕"/>
-              </a:rPr>
-              <a:t> </a:t>
-            </a:r>
-            <a:r>
-              <a:rPr sz="1000" b="0" dirty="0" err="1">
-                <a:solidFill>
-                  <a:srgbClr val="C00000"/>
-                </a:solidFill>
-                <a:latin typeface="맑은 고딕"/>
-              </a:rPr>
-              <a:t>확인창이</a:t>
-            </a:r>
-            <a:r>
-              <a:rPr sz="1000" b="0" dirty="0">
-                <a:solidFill>
-                  <a:srgbClr val="C00000"/>
-                </a:solidFill>
-                <a:latin typeface="맑은 고딕"/>
-              </a:rPr>
-              <a:t> </a:t>
-            </a:r>
-            <a:r>
-              <a:rPr sz="1000" b="0" dirty="0" err="1">
-                <a:solidFill>
-                  <a:srgbClr val="C00000"/>
-                </a:solidFill>
-                <a:latin typeface="맑은 고딕"/>
-              </a:rPr>
-              <a:t>뜨며</a:t>
-            </a:r>
-            <a:r>
-              <a:rPr sz="1000" b="0" dirty="0">
-                <a:solidFill>
-                  <a:srgbClr val="C00000"/>
-                </a:solidFill>
-                <a:latin typeface="맑은 고딕"/>
-              </a:rPr>
-              <a:t>, </a:t>
-            </a:r>
-            <a:r>
-              <a:rPr sz="1000" b="0" dirty="0" err="1">
-                <a:solidFill>
-                  <a:srgbClr val="C00000"/>
-                </a:solidFill>
-                <a:latin typeface="맑은 고딕"/>
-              </a:rPr>
-              <a:t>반자동</a:t>
-            </a:r>
-            <a:r>
-              <a:rPr sz="1000" b="0" dirty="0">
-                <a:solidFill>
-                  <a:srgbClr val="C00000"/>
-                </a:solidFill>
-                <a:latin typeface="맑은 고딕"/>
-              </a:rPr>
-              <a:t> </a:t>
-            </a:r>
-            <a:r>
-              <a:rPr sz="1000" b="0" dirty="0" err="1">
-                <a:solidFill>
-                  <a:srgbClr val="C00000"/>
-                </a:solidFill>
-                <a:latin typeface="맑은 고딕"/>
-              </a:rPr>
-              <a:t>출고</a:t>
-            </a:r>
-            <a:r>
-              <a:rPr sz="1000" b="0" dirty="0">
-                <a:solidFill>
-                  <a:srgbClr val="C00000"/>
-                </a:solidFill>
-                <a:latin typeface="맑은 고딕"/>
-              </a:rPr>
-              <a:t> </a:t>
-            </a:r>
-            <a:r>
-              <a:rPr sz="1000" b="0" dirty="0" err="1">
-                <a:solidFill>
-                  <a:srgbClr val="C00000"/>
-                </a:solidFill>
-                <a:latin typeface="맑은 고딕"/>
-              </a:rPr>
-              <a:t>작업을</a:t>
-            </a:r>
-            <a:r>
-              <a:rPr sz="1000" b="0" dirty="0">
-                <a:solidFill>
-                  <a:srgbClr val="C00000"/>
-                </a:solidFill>
-                <a:latin typeface="맑은 고딕"/>
-              </a:rPr>
-              <a:t> </a:t>
-            </a:r>
-            <a:r>
-              <a:rPr sz="1000" b="0" dirty="0" err="1">
-                <a:solidFill>
-                  <a:srgbClr val="C00000"/>
-                </a:solidFill>
-                <a:latin typeface="맑은 고딕"/>
-              </a:rPr>
-              <a:t>만들어</a:t>
-            </a:r>
-            <a:r>
-              <a:rPr sz="1000" b="0" dirty="0">
-                <a:solidFill>
-                  <a:srgbClr val="C00000"/>
-                </a:solidFill>
-                <a:latin typeface="맑은 고딕"/>
-              </a:rPr>
-              <a:t> </a:t>
-            </a:r>
-            <a:r>
-              <a:rPr sz="1000" b="0" dirty="0" err="1">
-                <a:solidFill>
-                  <a:srgbClr val="C00000"/>
-                </a:solidFill>
-                <a:latin typeface="맑은 고딕"/>
-              </a:rPr>
-              <a:t>상위</a:t>
-            </a:r>
-            <a:r>
-              <a:rPr sz="1000" b="0" dirty="0">
-                <a:solidFill>
-                  <a:srgbClr val="C00000"/>
-                </a:solidFill>
-                <a:latin typeface="맑은 고딕"/>
-              </a:rPr>
-              <a:t> </a:t>
-            </a:r>
-            <a:r>
-              <a:rPr sz="1000" b="0" dirty="0" err="1">
-                <a:solidFill>
-                  <a:srgbClr val="C00000"/>
-                </a:solidFill>
-                <a:latin typeface="맑은 고딕"/>
-              </a:rPr>
-              <a:t>보고</a:t>
-            </a:r>
-            <a:r>
-              <a:rPr sz="1000" b="0" dirty="0">
-                <a:solidFill>
-                  <a:srgbClr val="C00000"/>
-                </a:solidFill>
-                <a:latin typeface="맑은 고딕"/>
-              </a:rPr>
-              <a:t> </a:t>
-            </a:r>
-            <a:r>
-              <a:rPr sz="1000" b="0" dirty="0" err="1">
-                <a:solidFill>
-                  <a:srgbClr val="C00000"/>
-                </a:solidFill>
-                <a:latin typeface="맑은 고딕"/>
-              </a:rPr>
-              <a:t>없이</a:t>
-            </a:r>
-            <a:r>
-              <a:rPr sz="1000" b="0" dirty="0">
-                <a:solidFill>
-                  <a:srgbClr val="C00000"/>
-                </a:solidFill>
-                <a:latin typeface="맑은 고딕"/>
-              </a:rPr>
-              <a:t> </a:t>
-            </a:r>
-            <a:r>
-              <a:rPr sz="1000" b="0" dirty="0" err="1">
-                <a:solidFill>
-                  <a:srgbClr val="C00000"/>
-                </a:solidFill>
-                <a:latin typeface="맑은 고딕"/>
-              </a:rPr>
-              <a:t>처리한다</a:t>
-            </a:r>
-            <a:r>
-              <a:rPr sz="1000" b="0" dirty="0">
-                <a:solidFill>
-                  <a:srgbClr val="C00000"/>
-                </a:solidFill>
-                <a:latin typeface="맑은 고딕"/>
-              </a:rPr>
-              <a:t>(</a:t>
-            </a:r>
-            <a:r>
-              <a:rPr sz="1000" b="0" dirty="0" err="1">
-                <a:solidFill>
-                  <a:srgbClr val="C00000"/>
-                </a:solidFill>
-                <a:latin typeface="맑은 고딕"/>
-              </a:rPr>
-              <a:t>아래</a:t>
-            </a:r>
-            <a:r>
-              <a:rPr sz="1000" b="0" dirty="0">
-                <a:solidFill>
-                  <a:srgbClr val="C00000"/>
-                </a:solidFill>
-                <a:latin typeface="맑은 고딕"/>
-              </a:rPr>
-              <a:t> </a:t>
-            </a:r>
-            <a:r>
-              <a:rPr sz="1000" b="0" dirty="0" err="1">
-                <a:solidFill>
-                  <a:srgbClr val="C00000"/>
-                </a:solidFill>
-                <a:latin typeface="맑은 고딕"/>
-              </a:rPr>
-              <a:t>예외</a:t>
-            </a:r>
-            <a:r>
-              <a:rPr sz="1000" b="0" dirty="0">
-                <a:solidFill>
-                  <a:srgbClr val="C00000"/>
-                </a:solidFill>
-                <a:latin typeface="맑은 고딕"/>
-              </a:rPr>
-              <a:t> </a:t>
-            </a:r>
-            <a:r>
-              <a:rPr sz="1000" b="0" dirty="0" err="1">
-                <a:solidFill>
-                  <a:srgbClr val="C00000"/>
-                </a:solidFill>
-                <a:latin typeface="맑은 고딕"/>
-              </a:rPr>
-              <a:t>처리</a:t>
-            </a:r>
-            <a:r>
-              <a:rPr sz="1000" b="0" dirty="0">
-                <a:solidFill>
-                  <a:srgbClr val="C00000"/>
-                </a:solidFill>
-                <a:latin typeface="맑은 고딕"/>
-              </a:rPr>
-              <a:t> </a:t>
-            </a:r>
-            <a:r>
-              <a:rPr sz="1000" b="0" dirty="0" err="1">
-                <a:solidFill>
-                  <a:srgbClr val="C00000"/>
-                </a:solidFill>
-                <a:latin typeface="맑은 고딕"/>
-              </a:rPr>
-              <a:t>참조</a:t>
-            </a:r>
-            <a:r>
-              <a:rPr sz="1000" b="0" dirty="0">
-                <a:solidFill>
-                  <a:srgbClr val="C00000"/>
-                </a:solidFill>
-                <a:latin typeface="맑은 고딕"/>
-              </a:rPr>
-              <a:t>).</a:t>
-            </a:r>
-          </a:p>
-          <a:p>
-            <a:pPr algn="l"/>
-            <a:r>
-              <a:rPr sz="1000" b="0" dirty="0">
-                <a:solidFill>
-                  <a:srgbClr val="C00000"/>
-                </a:solidFill>
-                <a:latin typeface="맑은 고딕"/>
-              </a:rPr>
-              <a:t>· 도착지·작업구분 </a:t>
-            </a:r>
-            <a:r>
-              <a:rPr sz="1000" b="0" dirty="0" err="1">
-                <a:solidFill>
-                  <a:srgbClr val="C00000"/>
-                </a:solidFill>
-                <a:latin typeface="맑은 고딕"/>
-              </a:rPr>
-              <a:t>입력란은</a:t>
-            </a:r>
-            <a:r>
-              <a:rPr sz="1000" b="0" dirty="0">
-                <a:solidFill>
-                  <a:srgbClr val="C00000"/>
-                </a:solidFill>
-                <a:latin typeface="맑은 고딕"/>
-              </a:rPr>
-              <a:t> </a:t>
-            </a:r>
-            <a:r>
-              <a:rPr sz="1000" dirty="0" err="1">
-                <a:solidFill>
-                  <a:srgbClr val="C00000"/>
-                </a:solidFill>
-                <a:latin typeface="맑은 고딕"/>
-              </a:rPr>
-              <a:t>뺐다</a:t>
-            </a:r>
-            <a:r>
-              <a:rPr sz="1000" dirty="0">
-                <a:solidFill>
-                  <a:srgbClr val="C00000"/>
-                </a:solidFill>
-                <a:latin typeface="맑은 고딕"/>
-              </a:rPr>
-              <a:t>. 이 </a:t>
-            </a:r>
-            <a:r>
-              <a:rPr sz="1000" dirty="0" err="1">
-                <a:solidFill>
-                  <a:srgbClr val="C00000"/>
-                </a:solidFill>
-                <a:latin typeface="맑은 고딕"/>
-              </a:rPr>
-              <a:t>현장은</a:t>
-            </a:r>
-            <a:r>
-              <a:rPr sz="1000" dirty="0">
-                <a:solidFill>
-                  <a:srgbClr val="C00000"/>
-                </a:solidFill>
-                <a:latin typeface="맑은 고딕"/>
-              </a:rPr>
-              <a:t> </a:t>
-            </a:r>
-            <a:r>
-              <a:rPr sz="1000" dirty="0" err="1">
-                <a:solidFill>
-                  <a:srgbClr val="C00000"/>
-                </a:solidFill>
-                <a:latin typeface="맑은 고딕"/>
-              </a:rPr>
-              <a:t>컨베이어에</a:t>
-            </a:r>
-            <a:r>
-              <a:rPr sz="1000" dirty="0">
-                <a:solidFill>
-                  <a:srgbClr val="C00000"/>
-                </a:solidFill>
-                <a:latin typeface="맑은 고딕"/>
-              </a:rPr>
-              <a:t> </a:t>
-            </a:r>
-            <a:r>
-              <a:rPr sz="1000" dirty="0" err="1">
-                <a:solidFill>
-                  <a:srgbClr val="C00000"/>
-                </a:solidFill>
-                <a:latin typeface="맑은 고딕"/>
-              </a:rPr>
-              <a:t>도착지·작업구분을</a:t>
-            </a:r>
-            <a:r>
-              <a:rPr sz="1000" dirty="0">
-                <a:solidFill>
-                  <a:srgbClr val="C00000"/>
-                </a:solidFill>
-                <a:latin typeface="맑은 고딕"/>
-              </a:rPr>
-              <a:t> </a:t>
-            </a:r>
-            <a:r>
-              <a:rPr sz="1000" dirty="0" err="1">
-                <a:solidFill>
-                  <a:srgbClr val="C00000"/>
-                </a:solidFill>
-                <a:latin typeface="맑은 고딕"/>
-              </a:rPr>
-              <a:t>내려보내지</a:t>
-            </a:r>
-            <a:r>
-              <a:rPr sz="1000" dirty="0">
-                <a:solidFill>
-                  <a:srgbClr val="C00000"/>
-                </a:solidFill>
-                <a:latin typeface="맑은 고딕"/>
-              </a:rPr>
-              <a:t> </a:t>
-            </a:r>
-            <a:r>
-              <a:rPr sz="1000" dirty="0" err="1">
-                <a:solidFill>
-                  <a:srgbClr val="C00000"/>
-                </a:solidFill>
-                <a:latin typeface="맑은 고딕"/>
-              </a:rPr>
-              <a:t>않는다</a:t>
-            </a:r>
-            <a:r>
-              <a:rPr sz="1000" dirty="0">
-                <a:solidFill>
-                  <a:srgbClr val="C00000"/>
-                </a:solidFill>
-                <a:latin typeface="맑은 고딕"/>
-              </a:rPr>
-              <a:t> - PLC 로 </a:t>
-            </a:r>
-            <a:r>
-              <a:rPr sz="1000" dirty="0" err="1">
-                <a:solidFill>
-                  <a:srgbClr val="C00000"/>
-                </a:solidFill>
-                <a:latin typeface="맑은 고딕"/>
-              </a:rPr>
-              <a:t>나가는</a:t>
-            </a:r>
-            <a:r>
-              <a:rPr sz="1000" dirty="0">
-                <a:solidFill>
-                  <a:srgbClr val="C00000"/>
-                </a:solidFill>
-                <a:latin typeface="맑은 고딕"/>
-              </a:rPr>
-              <a:t> </a:t>
-            </a:r>
-            <a:r>
-              <a:rPr sz="1000" dirty="0" err="1">
-                <a:solidFill>
-                  <a:srgbClr val="C00000"/>
-                </a:solidFill>
-                <a:latin typeface="맑은 고딕"/>
-              </a:rPr>
-              <a:t>것은</a:t>
-            </a:r>
-            <a:r>
-              <a:rPr sz="1000" dirty="0">
-                <a:solidFill>
-                  <a:srgbClr val="C00000"/>
-                </a:solidFill>
-                <a:latin typeface="맑은 고딕"/>
-              </a:rPr>
-              <a:t> </a:t>
-            </a:r>
-            <a:r>
-              <a:rPr sz="1000" dirty="0" err="1">
-                <a:solidFill>
-                  <a:srgbClr val="C00000"/>
-                </a:solidFill>
-                <a:latin typeface="맑은 고딕"/>
-              </a:rPr>
-              <a:t>방향</a:t>
-            </a:r>
-            <a:r>
-              <a:rPr sz="1000" dirty="0">
-                <a:solidFill>
-                  <a:srgbClr val="C00000"/>
-                </a:solidFill>
-                <a:latin typeface="맑은 고딕"/>
-              </a:rPr>
-              <a:t>(D300+N-1)과 </a:t>
-            </a:r>
-            <a:r>
-              <a:rPr sz="1000" dirty="0" err="1">
-                <a:solidFill>
-                  <a:srgbClr val="C00000"/>
-                </a:solidFill>
-                <a:latin typeface="맑은 고딕"/>
-              </a:rPr>
-              <a:t>작업번호</a:t>
-            </a:r>
-            <a:r>
-              <a:rPr sz="1000" dirty="0">
-                <a:solidFill>
-                  <a:srgbClr val="C00000"/>
-                </a:solidFill>
-                <a:latin typeface="맑은 고딕"/>
-              </a:rPr>
-              <a:t> </a:t>
-            </a:r>
-            <a:r>
-              <a:rPr sz="1000" dirty="0" err="1">
-                <a:solidFill>
-                  <a:srgbClr val="C00000"/>
-                </a:solidFill>
-                <a:latin typeface="맑은 고딕"/>
-              </a:rPr>
-              <a:t>트래킹</a:t>
-            </a:r>
-            <a:r>
-              <a:rPr sz="1000" dirty="0">
-                <a:solidFill>
-                  <a:srgbClr val="C00000"/>
-                </a:solidFill>
-                <a:latin typeface="맑은 고딕"/>
-              </a:rPr>
-              <a:t>(</a:t>
-            </a:r>
-            <a:r>
-              <a:rPr sz="1000" dirty="0" err="1">
-                <a:solidFill>
-                  <a:srgbClr val="C00000"/>
-                </a:solidFill>
-                <a:latin typeface="맑은 고딕"/>
-              </a:rPr>
-              <a:t>R영역</a:t>
-            </a:r>
-            <a:r>
-              <a:rPr sz="1000" dirty="0">
-                <a:solidFill>
-                  <a:srgbClr val="C00000"/>
-                </a:solidFill>
-                <a:latin typeface="맑은 고딕"/>
-              </a:rPr>
-              <a:t>) </a:t>
-            </a:r>
-            <a:r>
-              <a:rPr lang="ko-KR" altLang="en-US" sz="1000" dirty="0">
-                <a:solidFill>
-                  <a:srgbClr val="C00000"/>
-                </a:solidFill>
-                <a:latin typeface="맑은 고딕"/>
-              </a:rPr>
-              <a:t>이</a:t>
-            </a:r>
-            <a:r>
-              <a:rPr sz="1000" b="0" dirty="0">
-                <a:solidFill>
-                  <a:srgbClr val="C00000"/>
-                </a:solidFill>
-                <a:latin typeface="맑은 고딕"/>
-              </a:rPr>
-              <a:t>다.</a:t>
-            </a:r>
-          </a:p>
-          <a:p>
-            <a:pPr algn="l"/>
-            <a:r>
-              <a:rPr sz="1000" b="0" dirty="0">
-                <a:solidFill>
-                  <a:srgbClr val="C00000"/>
-                </a:solidFill>
-                <a:latin typeface="맑은 고딕"/>
-              </a:rPr>
-              <a:t>· [MG 이동] 버튼은 뺐다(2026-09-10). 이 현장에서 쓰지 않는 기능이다.</a:t>
-            </a:r>
-            <a:r>
-              <a:rPr sz="1000" b="0" dirty="0" err="1">
-                <a:solidFill>
-                  <a:srgbClr val="C00000"/>
-                </a:solidFill>
-                <a:latin typeface="맑은 고딕"/>
-              </a:rPr>
-              <a:t/>
-            </a:r>
-            <a:r>
-              <a:rPr sz="1000" b="0" dirty="0">
-                <a:solidFill>
-                  <a:srgbClr val="C00000"/>
-                </a:solidFill>
-                <a:latin typeface="맑은 고딕"/>
-              </a:rPr>
-              <a:t/>
-            </a:r>
-            <a:r>
-              <a:rPr sz="1000" dirty="0" err="1">
-                <a:solidFill>
-                  <a:srgbClr val="C00000"/>
-                </a:solidFill>
-                <a:latin typeface="맑은 고딕"/>
-              </a:rPr>
-              <a:t/>
-            </a:r>
-            <a:r>
-              <a:rPr sz="1000" dirty="0">
-                <a:solidFill>
-                  <a:srgbClr val="C00000"/>
-                </a:solidFill>
-                <a:latin typeface="맑은 고딕"/>
-              </a:rPr>
-              <a:t/>
-            </a:r>
-            <a:r>
-              <a:rPr sz="1000" dirty="0" err="1">
-                <a:solidFill>
-                  <a:srgbClr val="C00000"/>
-                </a:solidFill>
-                <a:latin typeface="맑은 고딕"/>
-              </a:rPr>
-              <a:t/>
-            </a:r>
-            <a:r>
-              <a:rPr sz="1000" dirty="0">
-                <a:solidFill>
-                  <a:srgbClr val="C00000"/>
-                </a:solidFill>
-                <a:latin typeface="맑은 고딕"/>
-              </a:rPr>
-              <a:t/>
-            </a:r>
-            <a:r>
-              <a:rPr sz="1000" dirty="0" err="1">
-                <a:solidFill>
-                  <a:srgbClr val="C00000"/>
-                </a:solidFill>
-                <a:latin typeface="맑은 고딕"/>
-              </a:rPr>
-              <a:t/>
-            </a:r>
-            <a:r>
-              <a:rPr sz="1000" dirty="0">
-                <a:solidFill>
-                  <a:srgbClr val="C00000"/>
-                </a:solidFill>
-                <a:latin typeface="맑은 고딕"/>
-              </a:rPr>
-              <a:t/>
-            </a:r>
-            <a:r>
-              <a:rPr sz="1000" dirty="0" err="1">
-                <a:solidFill>
-                  <a:srgbClr val="C00000"/>
-                </a:solidFill>
-                <a:latin typeface="맑은 고딕"/>
-              </a:rPr>
-              <a:t/>
-            </a:r>
-            <a:r>
-              <a:rPr sz="1000" dirty="0">
-                <a:solidFill>
-                  <a:srgbClr val="C00000"/>
-                </a:solidFill>
-                <a:latin typeface="맑은 고딕"/>
-              </a:rPr>
-              <a:t/>
-            </a:r>
-            <a:r>
-              <a:rPr sz="1000" dirty="0" err="1">
-                <a:solidFill>
-                  <a:srgbClr val="C00000"/>
-                </a:solidFill>
-                <a:latin typeface="맑은 고딕"/>
-              </a:rPr>
-              <a:t/>
-            </a:r>
-            <a:r>
-              <a:rPr sz="1000" dirty="0">
-                <a:solidFill>
-                  <a:srgbClr val="C00000"/>
-                </a:solidFill>
-                <a:latin typeface="맑은 고딕"/>
-              </a:rPr>
-              <a:t/>
-            </a:r>
-            <a:r>
-              <a:rPr sz="1000" dirty="0" err="1">
-                <a:solidFill>
-                  <a:srgbClr val="C00000"/>
-                </a:solidFill>
-                <a:latin typeface="맑은 고딕"/>
-              </a:rPr>
-              <a:t/>
-            </a:r>
-            <a:r>
-              <a:rPr sz="1000" dirty="0">
-                <a:solidFill>
-                  <a:srgbClr val="C00000"/>
-                </a:solidFill>
-                <a:latin typeface="맑은 고딕"/>
-              </a:rPr>
-              <a:t/>
-            </a:r>
-            <a:r>
-              <a:rPr sz="1000" dirty="0" err="1">
-                <a:solidFill>
-                  <a:srgbClr val="C00000"/>
-                </a:solidFill>
-                <a:latin typeface="맑은 고딕"/>
-              </a:rPr>
-              <a:t/>
-            </a:r>
-            <a:r>
-              <a:rPr sz="1000" dirty="0">
-                <a:solidFill>
-                  <a:srgbClr val="C00000"/>
-                </a:solidFill>
-                <a:latin typeface="맑은 고딕"/>
-              </a:rPr>
-              <a:t/>
-            </a:r>
-            <a:r>
-              <a:rPr sz="1000" dirty="0" err="1">
-                <a:solidFill>
-                  <a:srgbClr val="C00000"/>
-                </a:solidFill>
-                <a:latin typeface="맑은 고딕"/>
-              </a:rPr>
-              <a:t/>
-            </a:r>
-            <a:r>
-              <a:rPr sz="1000" dirty="0">
-                <a:solidFill>
-                  <a:srgbClr val="C00000"/>
-                </a:solidFill>
-                <a:latin typeface="맑은 고딕"/>
-              </a:rPr>
-              <a:t/>
-            </a:r>
-            <a:r>
-              <a:rPr sz="1000" dirty="0" err="1">
-                <a:solidFill>
-                  <a:srgbClr val="C00000"/>
-                </a:solidFill>
-                <a:latin typeface="맑은 고딕"/>
-              </a:rPr>
-              <a:t/>
-            </a:r>
-            <a:r>
-              <a:rPr sz="1000" dirty="0">
-                <a:solidFill>
-                  <a:srgbClr val="C00000"/>
-                </a:solidFill>
-                <a:latin typeface="맑은 고딕"/>
-              </a:rPr>
-              <a:t/>
-            </a:r>
-            <a:r>
-              <a:rPr sz="1000" dirty="0" err="1">
-                <a:solidFill>
-                  <a:srgbClr val="C00000"/>
-                </a:solidFill>
-                <a:latin typeface="맑은 고딕"/>
-              </a:rPr>
-              <a:t/>
-            </a:r>
-            <a:r>
-              <a:rPr sz="1000" dirty="0">
-                <a:solidFill>
-                  <a:srgbClr val="C00000"/>
-                </a:solidFill>
-                <a:latin typeface="맑은 고딕"/>
-              </a:rPr>
-              <a:t/>
-            </a:r>
-            <a:r>
-              <a:rPr sz="1000" dirty="0" err="1">
-                <a:solidFill>
-                  <a:srgbClr val="C00000"/>
-                </a:solidFill>
-                <a:latin typeface="맑은 고딕"/>
-              </a:rPr>
-              <a:t/>
-            </a:r>
-            <a:r>
-              <a:rPr sz="1000" dirty="0">
-                <a:solidFill>
-                  <a:srgbClr val="C00000"/>
-                </a:solidFill>
-                <a:latin typeface="맑은 고딕"/>
-              </a:rPr>
-              <a:t/>
-            </a:r>
-            <a:r>
-              <a:rPr sz="1000" dirty="0" err="1">
-                <a:solidFill>
-                  <a:srgbClr val="C00000"/>
-                </a:solidFill>
-                <a:latin typeface="맑은 고딕"/>
-              </a:rPr>
-              <a:t/>
-            </a:r>
-            <a:r>
-              <a:rPr sz="1000" dirty="0">
-                <a:solidFill>
-                  <a:srgbClr val="C00000"/>
-                </a:solidFill>
-                <a:latin typeface="맑은 고딕"/>
-              </a:rPr>
-              <a:t/>
-            </a:r>
-            <a:r>
-              <a:rPr lang="ko-KR" altLang="en-US" sz="1000" dirty="0">
-                <a:solidFill>
-                  <a:srgbClr val="C00000"/>
-                </a:solidFill>
-                <a:latin typeface="맑은 고딕"/>
-              </a:rPr>
-              <a:t/>
-            </a:r>
-            <a:r>
-              <a:rPr sz="1000" b="0" dirty="0">
-                <a:solidFill>
-                  <a:srgbClr val="C00000"/>
-                </a:solidFill>
-                <a:latin typeface="맑은 고딕"/>
-              </a:rPr>
-              <a:t/>
-            </a:r>
-          </a:p>
-        </p:txBody>
-      </p:sp>
-      <p:sp>
-        <p:nvSpPr>
-          <p:cNvPr id="6" name="TextBox 5"/>
-          <p:cNvSpPr txBox="1"/>
-          <p:nvPr/>
-        </p:nvSpPr>
-        <p:spPr>
-          <a:xfrm>
-            <a:off x="457200" y="6400800"/>
-            <a:ext cx="3657600" cy="320040"/>
-          </a:xfrm>
-          <a:prstGeom prst="rect">
-            <a:avLst/>
-          </a:prstGeom>
-          <a:noFill/>
-        </p:spPr>
-        <p:txBody>
-          <a:bodyPr wrap="square" lIns="45720" rIns="45720" anchor="t">
-            <a:spAutoFit/>
-          </a:bodyPr>
-          <a:lstStyle/>
-          <a:p>
-            <a:pPr algn="l"/>
-            <a:r>
-              <a:rPr sz="1000" b="0">
-                <a:solidFill>
-                  <a:srgbClr val="000000"/>
-                </a:solidFill>
-                <a:latin typeface="맑은 고딕"/>
-              </a:rPr>
-              <a:t>LG 화학 1동 ECS  |  화면설계서</a:t>
-            </a:r>
-          </a:p>
-        </p:txBody>
-      </p:sp>
-      <p:sp>
-        <p:nvSpPr>
-          <p:cNvPr id="7" name="TextBox 6"/>
-          <p:cNvSpPr txBox="1"/>
-          <p:nvPr/>
-        </p:nvSpPr>
-        <p:spPr>
-          <a:xfrm>
-            <a:off x="11155680" y="6400800"/>
-            <a:ext cx="731520" cy="320040"/>
-          </a:xfrm>
-          <a:prstGeom prst="rect">
-            <a:avLst/>
-          </a:prstGeom>
-          <a:noFill/>
-        </p:spPr>
-        <p:txBody>
-          <a:bodyPr wrap="square" lIns="45720" rIns="45720" anchor="t">
-            <a:spAutoFit/>
-          </a:bodyPr>
-          <a:lstStyle/>
-          <a:p>
-            <a:pPr algn="r"/>
-            <a:r>
-              <a:rPr sz="1000" b="0">
-                <a:solidFill>
-                  <a:srgbClr val="000000"/>
-                </a:solidFill>
-                <a:latin typeface="맑은 고딕"/>
-              </a:rPr>
-              <a:t>20</a:t>
-            </a:r>
-          </a:p>
-        </p:txBody>
-      </p:sp>
       <p:pic>
         <p:nvPicPr>
-          <p:cNvPr id="8" name="Picture 7" descr="cv2_0.png"/>
+          <p:cNvPr id="4" name="Picture 3" descr="alarm_0.png"/>
           <p:cNvPicPr>
             <a:picLocks noChangeAspect="1"/>
           </p:cNvPicPr>
           <p:nvPr/>
         </p:nvPicPr>
         <p:blipFill>
-          <a:blip r:embed="rId3"/>
+          <a:blip r:embed="rId2"/>
           <a:stretch>
             <a:fillRect/>
           </a:stretch>
         </p:blipFill>
         <p:spPr>
           <a:xfrm>
-            <a:off x="2486856" y="1600646"/>
-            <a:ext cx="3804524" cy="4205347"/>
+            <a:off x="640080" y="1766792"/>
+            <a:ext cx="7498079" cy="3873054"/>
           </a:xfrm>
           <a:prstGeom prst="rect">
             <a:avLst/>
           </a:prstGeom>
         </p:spPr>
       </p:pic>
+      <p:sp>
+        <p:nvSpPr>
+          <p:cNvPr id="5" name="TextBox 4"/>
+          <p:cNvSpPr txBox="1"/>
+          <p:nvPr/>
+        </p:nvSpPr>
+        <p:spPr>
+          <a:xfrm>
+            <a:off x="8503920" y="1188720"/>
+            <a:ext cx="3291840" cy="5029200"/>
+          </a:xfrm>
+          <a:prstGeom prst="rect">
+            <a:avLst/>
+          </a:prstGeom>
+          <a:noFill/>
+        </p:spPr>
+        <p:txBody>
+          <a:bodyPr wrap="square" lIns="45720" rIns="45720" anchor="t">
+            <a:spAutoFit/>
+          </a:bodyPr>
+          <a:lstStyle/>
+          <a:p>
+            <a:pPr algn="l"/>
+            <a:r>
+              <a:rPr sz="1300" b="1">
+                <a:solidFill>
+                  <a:srgbClr val="000000"/>
+                </a:solidFill>
+                <a:latin typeface="맑은 고딕"/>
+              </a:rPr>
+              <a:t>■ 메뉴 Path</a:t>
+            </a:r>
+          </a:p>
+          <a:p>
+            <a:pPr algn="l"/>
+            <a:r>
+              <a:rPr sz="1100" b="0">
+                <a:solidFill>
+                  <a:srgbClr val="C00000"/>
+                </a:solidFill>
+                <a:latin typeface="맑은 고딕"/>
+              </a:rPr>
+              <a:t>로그 ▷ 알람</a:t>
+            </a:r>
+          </a:p>
+          <a:p>
+            <a:pPr algn="l"/>
+            <a:endParaRPr sz="1100" b="0">
+              <a:solidFill>
+                <a:srgbClr val="595959"/>
+              </a:solidFill>
+              <a:latin typeface="맑은 고딕"/>
+            </a:endParaRPr>
+          </a:p>
+          <a:p>
+            <a:pPr algn="l"/>
+            <a:r>
+              <a:rPr sz="1300" b="1">
+                <a:solidFill>
+                  <a:srgbClr val="000000"/>
+                </a:solidFill>
+                <a:latin typeface="맑은 고딕"/>
+              </a:rPr>
+              <a:t>■ 프로그램 개요</a:t>
+            </a:r>
+          </a:p>
+          <a:p>
+            <a:pPr algn="l"/>
+            <a:r>
+              <a:rPr sz="1100" b="0">
+                <a:solidFill>
+                  <a:srgbClr val="000000"/>
+                </a:solidFill>
+                <a:latin typeface="맑은 고딕"/>
+              </a:rPr>
+              <a:t>서버 프로그램(스케줄러/설비 통신/상위 통신)이 남긴 운전 이력(WCS_LOG_PGR)을 프로그램·시간·작업번호로 조회한다.</a:t>
+            </a:r>
+          </a:p>
+          <a:p>
+            <a:pPr algn="l"/>
+            <a:endParaRPr sz="1100" b="0">
+              <a:solidFill>
+                <a:srgbClr val="595959"/>
+              </a:solidFill>
+              <a:latin typeface="맑은 고딕"/>
+            </a:endParaRPr>
+          </a:p>
+          <a:p>
+            <a:pPr algn="l"/>
+            <a:r>
+              <a:rPr sz="1300" b="1">
+                <a:solidFill>
+                  <a:srgbClr val="000000"/>
+                </a:solidFill>
+                <a:latin typeface="맑은 고딕"/>
+              </a:rPr>
+              <a:t>■ 특기사항</a:t>
+            </a:r>
+          </a:p>
+          <a:p>
+            <a:pPr algn="l"/>
+            <a:r>
+              <a:rPr sz="1000" b="0">
+                <a:solidFill>
+                  <a:srgbClr val="000000"/>
+                </a:solidFill>
+                <a:latin typeface="맑은 고딕"/>
+              </a:rPr>
+              <a:t>· 정체 작업 알림창도 이 이력을 근거로 뜬다(작업이 같은 상태로 오래 머물면 경고).</a:t>
+            </a:r>
+          </a:p>
+        </p:txBody>
+      </p:sp>
+      <p:sp>
+        <p:nvSpPr>
+          <p:cNvPr id="6" name="TextBox 5"/>
+          <p:cNvSpPr txBox="1"/>
+          <p:nvPr/>
+        </p:nvSpPr>
+        <p:spPr>
+          <a:xfrm>
+            <a:off x="457200" y="6400800"/>
+            <a:ext cx="3657600" cy="320040"/>
+          </a:xfrm>
+          <a:prstGeom prst="rect">
+            <a:avLst/>
+          </a:prstGeom>
+          <a:noFill/>
+        </p:spPr>
+        <p:txBody>
+          <a:bodyPr wrap="square" lIns="45720" rIns="45720" anchor="t">
+            <a:spAutoFit/>
+          </a:bodyPr>
+          <a:lstStyle/>
+          <a:p>
+            <a:pPr algn="l"/>
+            <a:r>
+              <a:rPr sz="1000" b="0">
+                <a:solidFill>
+                  <a:srgbClr val="000000"/>
+                </a:solidFill>
+                <a:latin typeface="맑은 고딕"/>
+              </a:rPr>
+              <a:t>LG 화학 1동 ECS  |  화면설계서</a:t>
+            </a:r>
+          </a:p>
+        </p:txBody>
+      </p:sp>
+      <p:sp>
+        <p:nvSpPr>
+          <p:cNvPr id="7" name="TextBox 6"/>
+          <p:cNvSpPr txBox="1"/>
+          <p:nvPr/>
+        </p:nvSpPr>
+        <p:spPr>
+          <a:xfrm>
+            <a:off x="11155680" y="6400800"/>
+            <a:ext cx="731520" cy="320040"/>
+          </a:xfrm>
+          <a:prstGeom prst="rect">
+            <a:avLst/>
+          </a:prstGeom>
+          <a:noFill/>
+        </p:spPr>
+        <p:txBody>
+          <a:bodyPr wrap="square" lIns="45720" rIns="45720" anchor="t">
+            <a:spAutoFit/>
+          </a:bodyPr>
+          <a:lstStyle/>
+          <a:p>
+            <a:pPr algn="r"/>
+            <a:r>
+              <a:rPr sz="1000" b="0">
+                <a:solidFill>
+                  <a:srgbClr val="000000"/>
+                </a:solidFill>
+                <a:latin typeface="맑은 고딕"/>
+              </a:rPr>
+              <a:t>20</a:t>
+            </a:r>
+          </a:p>
+        </p:txBody>
+      </p:sp>
     </p:spTree>
   </p:cSld>
   <p:clrMapOvr>
@@ -8773,7 +7420,7 @@
                 </a:solidFill>
                 <a:latin typeface="맑은 고딕"/>
               </a:rPr>
-              <a:t>설비 대화상자 - SC 상태</a:t>
+              <a:t>설비 대화상자 - CV 상태</a:t>
             </a:r>
           </a:p>
         </p:txBody>
@@ -8824,237 +7471,1608 @@
           </a:p>
         </p:txBody>
       </p:sp>
+      <p:sp>
+        <p:nvSpPr>
+          <p:cNvPr id="5" name="TextBox 4"/>
+          <p:cNvSpPr txBox="1"/>
+          <p:nvPr/>
+        </p:nvSpPr>
+        <p:spPr>
+          <a:xfrm>
+            <a:off x="8503920" y="1188720"/>
+            <a:ext cx="3291840" cy="3247043"/>
+          </a:xfrm>
+          <a:prstGeom prst="rect">
+            <a:avLst/>
+          </a:prstGeom>
+          <a:noFill/>
+        </p:spPr>
+        <p:txBody>
+          <a:bodyPr wrap="square" lIns="45720" rIns="45720" anchor="t">
+            <a:spAutoFit/>
+          </a:bodyPr>
+          <a:lstStyle/>
+          <a:p>
+            <a:pPr algn="l"/>
+            <a:r>
+              <a:rPr sz="1300" b="1" dirty="0">
+                <a:solidFill>
+                  <a:srgbClr val="000000"/>
+                </a:solidFill>
+                <a:latin typeface="맑은 고딕"/>
+              </a:rPr>
+              <a:t>■ </a:t>
+            </a:r>
+            <a:r>
+              <a:rPr sz="1300" b="1" dirty="0" err="1">
+                <a:solidFill>
+                  <a:srgbClr val="000000"/>
+                </a:solidFill>
+                <a:latin typeface="맑은 고딕"/>
+              </a:rPr>
+              <a:t>메뉴</a:t>
+            </a:r>
+            <a:r>
+              <a:rPr sz="1300" b="1" dirty="0">
+                <a:solidFill>
+                  <a:srgbClr val="000000"/>
+                </a:solidFill>
+                <a:latin typeface="맑은 고딕"/>
+              </a:rPr>
+              <a:t> Path</a:t>
+            </a:r>
+          </a:p>
+          <a:p>
+            <a:pPr algn="l"/>
+            <a:r>
+              <a:rPr sz="1100" b="0" dirty="0" err="1">
+                <a:solidFill>
+                  <a:srgbClr val="000000"/>
+                </a:solidFill>
+                <a:latin typeface="맑은 고딕"/>
+              </a:rPr>
+              <a:t>메인</a:t>
+            </a:r>
+            <a:r>
+              <a:rPr sz="1100" b="0" dirty="0">
+                <a:solidFill>
+                  <a:srgbClr val="000000"/>
+                </a:solidFill>
+                <a:latin typeface="맑은 고딕"/>
+              </a:rPr>
+              <a:t> </a:t>
+            </a:r>
+            <a:r>
+              <a:rPr sz="1100" b="0" dirty="0" err="1">
+                <a:solidFill>
+                  <a:srgbClr val="000000"/>
+                </a:solidFill>
+                <a:latin typeface="맑은 고딕"/>
+              </a:rPr>
+              <a:t>화면에서</a:t>
+            </a:r>
+            <a:r>
+              <a:rPr sz="1100" b="0" dirty="0">
+                <a:solidFill>
+                  <a:srgbClr val="000000"/>
+                </a:solidFill>
+                <a:latin typeface="맑은 고딕"/>
+              </a:rPr>
+              <a:t> </a:t>
+            </a:r>
+            <a:r>
+              <a:rPr sz="1100" b="0" dirty="0" err="1">
+                <a:solidFill>
+                  <a:srgbClr val="000000"/>
+                </a:solidFill>
+                <a:latin typeface="맑은 고딕"/>
+              </a:rPr>
+              <a:t>컨베이어</a:t>
+            </a:r>
+            <a:r>
+              <a:rPr sz="1100" b="0" dirty="0">
+                <a:solidFill>
+                  <a:srgbClr val="000000"/>
+                </a:solidFill>
+                <a:latin typeface="맑은 고딕"/>
+              </a:rPr>
+              <a:t> </a:t>
+            </a:r>
+            <a:r>
+              <a:rPr sz="1100" b="0" dirty="0" err="1">
+                <a:solidFill>
+                  <a:srgbClr val="000000"/>
+                </a:solidFill>
+                <a:latin typeface="맑은 고딕"/>
+              </a:rPr>
+              <a:t>클릭</a:t>
+            </a:r>
+            <a:endParaRPr sz="1100" b="0" dirty="0">
+              <a:solidFill>
+                <a:srgbClr val="595959"/>
+              </a:solidFill>
+              <a:latin typeface="맑은 고딕"/>
+            </a:endParaRPr>
+          </a:p>
+          <a:p>
+            <a:pPr algn="l"/>
+            <a:endParaRPr sz="1100" b="0" dirty="0">
+              <a:solidFill>
+                <a:srgbClr val="595959"/>
+              </a:solidFill>
+              <a:latin typeface="맑은 고딕"/>
+            </a:endParaRPr>
+          </a:p>
+          <a:p>
+            <a:pPr algn="l"/>
+            <a:r>
+              <a:rPr sz="1300" b="1" dirty="0">
+                <a:solidFill>
+                  <a:srgbClr val="000000"/>
+                </a:solidFill>
+                <a:latin typeface="맑은 고딕"/>
+              </a:rPr>
+              <a:t>■ </a:t>
+            </a:r>
+            <a:r>
+              <a:rPr sz="1300" b="1" dirty="0" err="1">
+                <a:solidFill>
+                  <a:srgbClr val="000000"/>
+                </a:solidFill>
+                <a:latin typeface="맑은 고딕"/>
+              </a:rPr>
+              <a:t>프로그램</a:t>
+            </a:r>
+            <a:r>
+              <a:rPr sz="1300" b="1" dirty="0">
+                <a:solidFill>
+                  <a:srgbClr val="000000"/>
+                </a:solidFill>
+                <a:latin typeface="맑은 고딕"/>
+              </a:rPr>
+              <a:t> </a:t>
+            </a:r>
+            <a:r>
+              <a:rPr sz="1300" b="1" dirty="0" err="1">
+                <a:solidFill>
+                  <a:srgbClr val="000000"/>
+                </a:solidFill>
+                <a:latin typeface="맑은 고딕"/>
+              </a:rPr>
+              <a:t>개요</a:t>
+            </a:r>
+            <a:endParaRPr sz="1300" b="1" dirty="0">
+              <a:solidFill>
+                <a:srgbClr val="1E2761"/>
+              </a:solidFill>
+              <a:latin typeface="맑은 고딕"/>
+            </a:endParaRPr>
+          </a:p>
+          <a:p>
+            <a:pPr algn="l"/>
+            <a:r>
+              <a:rPr sz="1100" b="0" dirty="0" err="1">
+                <a:solidFill>
+                  <a:srgbClr val="C00000"/>
+                </a:solidFill>
+                <a:latin typeface="맑은 고딕"/>
+              </a:rPr>
+              <a:t>컨베이어(트랙 2개)의 PLC 신호와 작업 정보를 보고, 작업번호 쓰기/삭제/복사/잘라내기/붙여넣기를 수행한다.</a:t>
+            </a:r>
+            <a:r>
+              <a:rPr sz="1100" b="0" dirty="0">
+                <a:solidFill>
+                  <a:srgbClr val="C00000"/>
+                </a:solidFill>
+                <a:latin typeface="맑은 고딕"/>
+              </a:rPr>
+              <a:t/>
+            </a:r>
+            <a:r>
+              <a:rPr sz="1100" b="0" dirty="0" err="1">
+                <a:solidFill>
+                  <a:srgbClr val="C00000"/>
+                </a:solidFill>
+                <a:latin typeface="맑은 고딕"/>
+              </a:rPr>
+              <a:t/>
+            </a:r>
+            <a:r>
+              <a:rPr sz="1100" b="0" dirty="0">
+                <a:solidFill>
+                  <a:srgbClr val="C00000"/>
+                </a:solidFill>
+                <a:latin typeface="맑은 고딕"/>
+              </a:rPr>
+              <a:t/>
+            </a:r>
+            <a:r>
+              <a:rPr sz="1100" b="0" dirty="0" err="1">
+                <a:solidFill>
+                  <a:srgbClr val="C00000"/>
+                </a:solidFill>
+                <a:latin typeface="맑은 고딕"/>
+              </a:rPr>
+              <a:t/>
+            </a:r>
+            <a:r>
+              <a:rPr sz="1100" b="0" dirty="0">
+                <a:solidFill>
+                  <a:srgbClr val="C00000"/>
+                </a:solidFill>
+                <a:latin typeface="맑은 고딕"/>
+              </a:rPr>
+              <a:t/>
+            </a:r>
+            <a:r>
+              <a:rPr sz="1100" b="0" dirty="0" err="1">
+                <a:solidFill>
+                  <a:srgbClr val="C00000"/>
+                </a:solidFill>
+                <a:latin typeface="맑은 고딕"/>
+              </a:rPr>
+              <a:t/>
+            </a:r>
+            <a:r>
+              <a:rPr sz="1100" b="0" dirty="0">
+                <a:solidFill>
+                  <a:srgbClr val="C00000"/>
+                </a:solidFill>
+                <a:latin typeface="맑은 고딕"/>
+              </a:rPr>
+              <a:t/>
+            </a:r>
+            <a:r>
+              <a:rPr sz="1100" b="0" dirty="0" err="1">
+                <a:solidFill>
+                  <a:srgbClr val="C00000"/>
+                </a:solidFill>
+                <a:latin typeface="맑은 고딕"/>
+              </a:rPr>
+              <a:t/>
+            </a:r>
+            <a:r>
+              <a:rPr sz="1100" b="0" dirty="0">
+                <a:solidFill>
+                  <a:srgbClr val="C00000"/>
+                </a:solidFill>
+                <a:latin typeface="맑은 고딕"/>
+              </a:rPr>
+              <a:t/>
+            </a:r>
+            <a:r>
+              <a:rPr sz="1100" b="0" dirty="0" err="1">
+                <a:solidFill>
+                  <a:srgbClr val="C00000"/>
+                </a:solidFill>
+                <a:latin typeface="맑은 고딕"/>
+              </a:rPr>
+              <a:t/>
+            </a:r>
+            <a:r>
+              <a:rPr sz="1100" b="0" dirty="0">
+                <a:solidFill>
+                  <a:srgbClr val="C00000"/>
+                </a:solidFill>
+                <a:latin typeface="맑은 고딕"/>
+              </a:rPr>
+              <a:t/>
+            </a:r>
+            <a:r>
+              <a:rPr sz="1100" b="0" dirty="0" err="1">
+                <a:solidFill>
+                  <a:srgbClr val="C00000"/>
+                </a:solidFill>
+                <a:latin typeface="맑은 고딕"/>
+              </a:rPr>
+              <a:t/>
+            </a:r>
+            <a:r>
+              <a:rPr sz="1100" b="0" dirty="0">
+                <a:solidFill>
+                  <a:srgbClr val="C00000"/>
+                </a:solidFill>
+                <a:latin typeface="맑은 고딕"/>
+              </a:rPr>
+              <a:t/>
+            </a:r>
+            <a:r>
+              <a:rPr sz="1100" b="0" dirty="0" err="1">
+                <a:solidFill>
+                  <a:srgbClr val="C00000"/>
+                </a:solidFill>
+                <a:latin typeface="맑은 고딕"/>
+              </a:rPr>
+              <a:t/>
+            </a:r>
+            <a:r>
+              <a:rPr sz="1100" b="0" dirty="0">
+                <a:solidFill>
+                  <a:srgbClr val="C00000"/>
+                </a:solidFill>
+                <a:latin typeface="맑은 고딕"/>
+              </a:rPr>
+              <a:t/>
+            </a:r>
+            <a:r>
+              <a:rPr sz="1100" b="0" dirty="0" err="1">
+                <a:solidFill>
+                  <a:srgbClr val="C00000"/>
+                </a:solidFill>
+                <a:latin typeface="맑은 고딕"/>
+              </a:rPr>
+              <a:t/>
+            </a:r>
+            <a:r>
+              <a:rPr sz="1100" b="0" dirty="0">
+                <a:solidFill>
+                  <a:srgbClr val="C00000"/>
+                </a:solidFill>
+                <a:latin typeface="맑은 고딕"/>
+              </a:rPr>
+              <a:t/>
+            </a:r>
+            <a:r>
+              <a:rPr sz="1100" b="0" dirty="0" err="1">
+                <a:solidFill>
+                  <a:srgbClr val="C00000"/>
+                </a:solidFill>
+                <a:latin typeface="맑은 고딕"/>
+              </a:rPr>
+              <a:t/>
+            </a:r>
+            <a:r>
+              <a:rPr sz="1100" b="0" dirty="0">
+                <a:solidFill>
+                  <a:srgbClr val="C00000"/>
+                </a:solidFill>
+                <a:latin typeface="맑은 고딕"/>
+              </a:rPr>
+              <a:t/>
+            </a:r>
+            <a:r>
+              <a:rPr sz="1100" b="0" dirty="0" err="1">
+                <a:solidFill>
+                  <a:srgbClr val="C00000"/>
+                </a:solidFill>
+                <a:latin typeface="맑은 고딕"/>
+              </a:rPr>
+              <a:t/>
+            </a:r>
+            <a:r>
+              <a:rPr sz="1100" b="0" dirty="0">
+                <a:solidFill>
+                  <a:srgbClr val="C00000"/>
+                </a:solidFill>
+                <a:latin typeface="맑은 고딕"/>
+              </a:rPr>
+              <a:t/>
+            </a:r>
+            <a:r>
+              <a:rPr sz="1100" b="0" dirty="0" err="1">
+                <a:solidFill>
+                  <a:srgbClr val="C00000"/>
+                </a:solidFill>
+                <a:latin typeface="맑은 고딕"/>
+              </a:rPr>
+              <a:t/>
+            </a:r>
+            <a:r>
+              <a:rPr sz="1100" b="0" dirty="0">
+                <a:solidFill>
+                  <a:srgbClr val="C00000"/>
+                </a:solidFill>
+                <a:latin typeface="맑은 고딕"/>
+              </a:rPr>
+              <a:t/>
+            </a:r>
+            <a:r>
+              <a:rPr sz="1100" b="0" dirty="0" err="1">
+                <a:solidFill>
+                  <a:srgbClr val="C00000"/>
+                </a:solidFill>
+                <a:latin typeface="맑은 고딕"/>
+              </a:rPr>
+              <a:t/>
+            </a:r>
+            <a:r>
+              <a:rPr sz="1100" b="0" dirty="0">
+                <a:solidFill>
+                  <a:srgbClr val="C00000"/>
+                </a:solidFill>
+                <a:latin typeface="맑은 고딕"/>
+              </a:rPr>
+              <a:t/>
+            </a:r>
+            <a:r>
+              <a:rPr sz="1100" b="0" dirty="0" err="1">
+                <a:solidFill>
+                  <a:srgbClr val="C00000"/>
+                </a:solidFill>
+                <a:latin typeface="맑은 고딕"/>
+              </a:rPr>
+              <a:t/>
+            </a:r>
+            <a:r>
+              <a:rPr sz="1100" b="0" dirty="0">
+                <a:solidFill>
+                  <a:srgbClr val="C00000"/>
+                </a:solidFill>
+                <a:latin typeface="맑은 고딕"/>
+              </a:rPr>
+              <a:t/>
+            </a:r>
+            <a:r>
+              <a:rPr sz="1100" b="0" dirty="0" err="1">
+                <a:solidFill>
+                  <a:srgbClr val="C00000"/>
+                </a:solidFill>
+                <a:latin typeface="맑은 고딕"/>
+              </a:rPr>
+              <a:t/>
+            </a:r>
+            <a:r>
+              <a:rPr sz="1100" b="0" dirty="0">
+                <a:solidFill>
+                  <a:srgbClr val="C00000"/>
+                </a:solidFill>
+                <a:latin typeface="맑은 고딕"/>
+              </a:rPr>
+              <a:t/>
+            </a:r>
+          </a:p>
+          <a:p>
+            <a:pPr algn="l"/>
+            <a:endParaRPr sz="1100" b="0" dirty="0">
+              <a:solidFill>
+                <a:srgbClr val="595959"/>
+              </a:solidFill>
+              <a:latin typeface="맑은 고딕"/>
+            </a:endParaRPr>
+          </a:p>
+          <a:p>
+            <a:pPr algn="l"/>
+            <a:r>
+              <a:rPr sz="1300" b="1" dirty="0">
+                <a:solidFill>
+                  <a:srgbClr val="000000"/>
+                </a:solidFill>
+                <a:latin typeface="맑은 고딕"/>
+              </a:rPr>
+              <a:t>■ </a:t>
+            </a:r>
+            <a:r>
+              <a:rPr sz="1300" b="1" dirty="0" err="1">
+                <a:solidFill>
+                  <a:srgbClr val="000000"/>
+                </a:solidFill>
+                <a:latin typeface="맑은 고딕"/>
+              </a:rPr>
+              <a:t>특기사항</a:t>
+            </a:r>
+            <a:endParaRPr sz="1300" b="1" dirty="0">
+              <a:solidFill>
+                <a:srgbClr val="1E2761"/>
+              </a:solidFill>
+              <a:latin typeface="맑은 고딕"/>
+            </a:endParaRPr>
+          </a:p>
+          <a:p>
+            <a:pPr algn="l"/>
+            <a:r>
+              <a:rPr sz="1000" b="0" dirty="0">
+                <a:solidFill>
+                  <a:srgbClr val="C00000"/>
+                </a:solidFill>
+                <a:latin typeface="맑은 고딕"/>
+              </a:rPr>
+              <a:t>· [쓰기] 는 그 트랙의 작업번호를 새로 넣는다. 실물 화물이 있는데 시스템이 모르는 경우 작업번호를 인식시킬 때 쓴다.</a:t>
+            </a:r>
+          </a:p>
+          <a:p>
+            <a:pPr algn="l"/>
+            <a:r>
+              <a:rPr sz="1000" b="0" dirty="0">
+                <a:solidFill>
+                  <a:srgbClr val="C00000"/>
+                </a:solidFill>
+                <a:latin typeface="맑은 고딕"/>
+              </a:rPr>
+              <a:t>· </a:t>
+            </a:r>
+            <a:r>
+              <a:rPr sz="1000" b="0" dirty="0" err="1">
+                <a:solidFill>
+                  <a:srgbClr val="C00000"/>
+                </a:solidFill>
+                <a:latin typeface="맑은 고딕"/>
+              </a:rPr>
+              <a:t>예외</a:t>
+            </a:r>
+            <a:r>
+              <a:rPr sz="1000" b="0" dirty="0">
+                <a:solidFill>
+                  <a:srgbClr val="C00000"/>
+                </a:solidFill>
+                <a:latin typeface="맑은 고딕"/>
+              </a:rPr>
+              <a:t> </a:t>
+            </a:r>
+            <a:r>
+              <a:rPr sz="1000" b="0" dirty="0" err="1">
+                <a:solidFill>
+                  <a:srgbClr val="C00000"/>
+                </a:solidFill>
+                <a:latin typeface="맑은 고딕"/>
+              </a:rPr>
+              <a:t>처리</a:t>
+            </a:r>
+            <a:r>
+              <a:rPr sz="1000" b="0" dirty="0">
+                <a:solidFill>
+                  <a:srgbClr val="C00000"/>
+                </a:solidFill>
+                <a:latin typeface="맑은 고딕"/>
+              </a:rPr>
+              <a:t> </a:t>
+            </a:r>
+            <a:r>
+              <a:rPr sz="1000" b="0" dirty="0" err="1">
+                <a:solidFill>
+                  <a:srgbClr val="C00000"/>
+                </a:solidFill>
+                <a:latin typeface="맑은 고딕"/>
+              </a:rPr>
+              <a:t>그룹의</a:t>
+            </a:r>
+            <a:r>
+              <a:rPr sz="1000" b="0" dirty="0">
+                <a:solidFill>
+                  <a:srgbClr val="C00000"/>
+                </a:solidFill>
+                <a:latin typeface="맑은 고딕"/>
+              </a:rPr>
+              <a:t> [H/S </a:t>
+            </a:r>
+            <a:r>
+              <a:rPr sz="1000" b="0" dirty="0" err="1">
+                <a:solidFill>
+                  <a:srgbClr val="C00000"/>
+                </a:solidFill>
+                <a:latin typeface="맑은 고딕"/>
+              </a:rPr>
+              <a:t>배출</a:t>
+            </a:r>
+            <a:r>
+              <a:rPr sz="1000" b="0" dirty="0">
+                <a:solidFill>
+                  <a:srgbClr val="C00000"/>
+                </a:solidFill>
+                <a:latin typeface="맑은 고딕"/>
+              </a:rPr>
+              <a:t>] 은 </a:t>
+            </a:r>
+            <a:r>
+              <a:rPr sz="1000" b="0" dirty="0" err="1">
+                <a:solidFill>
+                  <a:srgbClr val="C00000"/>
+                </a:solidFill>
+                <a:latin typeface="맑은 고딕"/>
+              </a:rPr>
+              <a:t>출고</a:t>
+            </a:r>
+            <a:r>
+              <a:rPr sz="1000" b="0" dirty="0">
+                <a:solidFill>
+                  <a:srgbClr val="C00000"/>
+                </a:solidFill>
+                <a:latin typeface="맑은 고딕"/>
+              </a:rPr>
+              <a:t> H/S 에 </a:t>
+            </a:r>
+            <a:r>
+              <a:rPr sz="1000" b="0" dirty="0" err="1">
+                <a:solidFill>
+                  <a:srgbClr val="C00000"/>
+                </a:solidFill>
+                <a:latin typeface="맑은 고딕"/>
+              </a:rPr>
+              <a:t>놓인</a:t>
+            </a:r>
+            <a:r>
+              <a:rPr sz="1000" b="0" dirty="0">
+                <a:solidFill>
+                  <a:srgbClr val="C00000"/>
+                </a:solidFill>
+                <a:latin typeface="맑은 고딕"/>
+              </a:rPr>
+              <a:t> </a:t>
+            </a:r>
+            <a:r>
+              <a:rPr sz="1000" b="0" dirty="0" err="1">
+                <a:solidFill>
+                  <a:srgbClr val="C00000"/>
+                </a:solidFill>
+                <a:latin typeface="맑은 고딕"/>
+              </a:rPr>
+              <a:t>작업</a:t>
+            </a:r>
+            <a:r>
+              <a:rPr sz="1000" b="0" dirty="0">
+                <a:solidFill>
+                  <a:srgbClr val="C00000"/>
+                </a:solidFill>
+                <a:latin typeface="맑은 고딕"/>
+              </a:rPr>
+              <a:t> </a:t>
+            </a:r>
+            <a:r>
+              <a:rPr sz="1000" b="0" dirty="0" err="1">
+                <a:solidFill>
+                  <a:srgbClr val="C00000"/>
+                </a:solidFill>
+                <a:latin typeface="맑은 고딕"/>
+              </a:rPr>
+              <a:t>없는</a:t>
+            </a:r>
+            <a:r>
+              <a:rPr sz="1000" b="0" dirty="0">
+                <a:solidFill>
+                  <a:srgbClr val="C00000"/>
+                </a:solidFill>
+                <a:latin typeface="맑은 고딕"/>
+              </a:rPr>
+              <a:t> </a:t>
+            </a:r>
+            <a:r>
+              <a:rPr sz="1000" b="0" dirty="0" err="1">
+                <a:solidFill>
+                  <a:srgbClr val="C00000"/>
+                </a:solidFill>
+                <a:latin typeface="맑은 고딕"/>
+              </a:rPr>
+              <a:t>화물을</a:t>
+            </a:r>
+            <a:r>
+              <a:rPr sz="1000" b="0" dirty="0">
+                <a:solidFill>
+                  <a:srgbClr val="C00000"/>
+                </a:solidFill>
+                <a:latin typeface="맑은 고딕"/>
+              </a:rPr>
+              <a:t> </a:t>
+            </a:r>
+            <a:r>
+              <a:rPr sz="1000" b="0" dirty="0" err="1">
+                <a:solidFill>
+                  <a:srgbClr val="C00000"/>
+                </a:solidFill>
+                <a:latin typeface="맑은 고딕"/>
+              </a:rPr>
+              <a:t>출고대로</a:t>
+            </a:r>
+            <a:r>
+              <a:rPr sz="1000" b="0" dirty="0">
+                <a:solidFill>
+                  <a:srgbClr val="C00000"/>
+                </a:solidFill>
+                <a:latin typeface="맑은 고딕"/>
+              </a:rPr>
+              <a:t> </a:t>
+            </a:r>
+            <a:r>
+              <a:rPr sz="1000" b="0" dirty="0" err="1">
+                <a:solidFill>
+                  <a:srgbClr val="C00000"/>
+                </a:solidFill>
+                <a:latin typeface="맑은 고딕"/>
+              </a:rPr>
+              <a:t>내보낸다</a:t>
+            </a:r>
+            <a:r>
+              <a:rPr sz="1000" b="0" dirty="0">
+                <a:solidFill>
+                  <a:srgbClr val="C00000"/>
+                </a:solidFill>
+                <a:latin typeface="맑은 고딕"/>
+              </a:rPr>
+              <a:t>. </a:t>
+            </a:r>
+            <a:r>
+              <a:rPr sz="1000" b="0" dirty="0" err="1">
+                <a:solidFill>
+                  <a:srgbClr val="C00000"/>
+                </a:solidFill>
+                <a:latin typeface="맑은 고딕"/>
+              </a:rPr>
+              <a:t>비상</a:t>
+            </a:r>
+            <a:r>
+              <a:rPr sz="1000" b="0" dirty="0">
+                <a:solidFill>
+                  <a:srgbClr val="C00000"/>
+                </a:solidFill>
+                <a:latin typeface="맑은 고딕"/>
+              </a:rPr>
+              <a:t> </a:t>
+            </a:r>
+            <a:r>
+              <a:rPr sz="1000" b="0" dirty="0" err="1">
+                <a:solidFill>
+                  <a:srgbClr val="C00000"/>
+                </a:solidFill>
+                <a:latin typeface="맑은 고딕"/>
+              </a:rPr>
+              <a:t>확인창이</a:t>
+            </a:r>
+            <a:r>
+              <a:rPr sz="1000" b="0" dirty="0">
+                <a:solidFill>
+                  <a:srgbClr val="C00000"/>
+                </a:solidFill>
+                <a:latin typeface="맑은 고딕"/>
+              </a:rPr>
+              <a:t> </a:t>
+            </a:r>
+            <a:r>
+              <a:rPr sz="1000" b="0" dirty="0" err="1">
+                <a:solidFill>
+                  <a:srgbClr val="C00000"/>
+                </a:solidFill>
+                <a:latin typeface="맑은 고딕"/>
+              </a:rPr>
+              <a:t>뜨며</a:t>
+            </a:r>
+            <a:r>
+              <a:rPr sz="1000" b="0" dirty="0">
+                <a:solidFill>
+                  <a:srgbClr val="C00000"/>
+                </a:solidFill>
+                <a:latin typeface="맑은 고딕"/>
+              </a:rPr>
+              <a:t>, </a:t>
+            </a:r>
+            <a:r>
+              <a:rPr sz="1000" b="0" dirty="0" err="1">
+                <a:solidFill>
+                  <a:srgbClr val="C00000"/>
+                </a:solidFill>
+                <a:latin typeface="맑은 고딕"/>
+              </a:rPr>
+              <a:t>반자동</a:t>
+            </a:r>
+            <a:r>
+              <a:rPr sz="1000" b="0" dirty="0">
+                <a:solidFill>
+                  <a:srgbClr val="C00000"/>
+                </a:solidFill>
+                <a:latin typeface="맑은 고딕"/>
+              </a:rPr>
+              <a:t> </a:t>
+            </a:r>
+            <a:r>
+              <a:rPr sz="1000" b="0" dirty="0" err="1">
+                <a:solidFill>
+                  <a:srgbClr val="C00000"/>
+                </a:solidFill>
+                <a:latin typeface="맑은 고딕"/>
+              </a:rPr>
+              <a:t>출고</a:t>
+            </a:r>
+            <a:r>
+              <a:rPr sz="1000" b="0" dirty="0">
+                <a:solidFill>
+                  <a:srgbClr val="C00000"/>
+                </a:solidFill>
+                <a:latin typeface="맑은 고딕"/>
+              </a:rPr>
+              <a:t> </a:t>
+            </a:r>
+            <a:r>
+              <a:rPr sz="1000" b="0" dirty="0" err="1">
+                <a:solidFill>
+                  <a:srgbClr val="C00000"/>
+                </a:solidFill>
+                <a:latin typeface="맑은 고딕"/>
+              </a:rPr>
+              <a:t>작업을</a:t>
+            </a:r>
+            <a:r>
+              <a:rPr sz="1000" b="0" dirty="0">
+                <a:solidFill>
+                  <a:srgbClr val="C00000"/>
+                </a:solidFill>
+                <a:latin typeface="맑은 고딕"/>
+              </a:rPr>
+              <a:t> </a:t>
+            </a:r>
+            <a:r>
+              <a:rPr sz="1000" b="0" dirty="0" err="1">
+                <a:solidFill>
+                  <a:srgbClr val="C00000"/>
+                </a:solidFill>
+                <a:latin typeface="맑은 고딕"/>
+              </a:rPr>
+              <a:t>만들어</a:t>
+            </a:r>
+            <a:r>
+              <a:rPr sz="1000" b="0" dirty="0">
+                <a:solidFill>
+                  <a:srgbClr val="C00000"/>
+                </a:solidFill>
+                <a:latin typeface="맑은 고딕"/>
+              </a:rPr>
+              <a:t> </a:t>
+            </a:r>
+            <a:r>
+              <a:rPr sz="1000" b="0" dirty="0" err="1">
+                <a:solidFill>
+                  <a:srgbClr val="C00000"/>
+                </a:solidFill>
+                <a:latin typeface="맑은 고딕"/>
+              </a:rPr>
+              <a:t>상위</a:t>
+            </a:r>
+            <a:r>
+              <a:rPr sz="1000" b="0" dirty="0">
+                <a:solidFill>
+                  <a:srgbClr val="C00000"/>
+                </a:solidFill>
+                <a:latin typeface="맑은 고딕"/>
+              </a:rPr>
+              <a:t> </a:t>
+            </a:r>
+            <a:r>
+              <a:rPr sz="1000" b="0" dirty="0" err="1">
+                <a:solidFill>
+                  <a:srgbClr val="C00000"/>
+                </a:solidFill>
+                <a:latin typeface="맑은 고딕"/>
+              </a:rPr>
+              <a:t>보고</a:t>
+            </a:r>
+            <a:r>
+              <a:rPr sz="1000" b="0" dirty="0">
+                <a:solidFill>
+                  <a:srgbClr val="C00000"/>
+                </a:solidFill>
+                <a:latin typeface="맑은 고딕"/>
+              </a:rPr>
+              <a:t> </a:t>
+            </a:r>
+            <a:r>
+              <a:rPr sz="1000" b="0" dirty="0" err="1">
+                <a:solidFill>
+                  <a:srgbClr val="C00000"/>
+                </a:solidFill>
+                <a:latin typeface="맑은 고딕"/>
+              </a:rPr>
+              <a:t>없이</a:t>
+            </a:r>
+            <a:r>
+              <a:rPr sz="1000" b="0" dirty="0">
+                <a:solidFill>
+                  <a:srgbClr val="C00000"/>
+                </a:solidFill>
+                <a:latin typeface="맑은 고딕"/>
+              </a:rPr>
+              <a:t> </a:t>
+            </a:r>
+            <a:r>
+              <a:rPr sz="1000" b="0" dirty="0" err="1">
+                <a:solidFill>
+                  <a:srgbClr val="C00000"/>
+                </a:solidFill>
+                <a:latin typeface="맑은 고딕"/>
+              </a:rPr>
+              <a:t>처리한다</a:t>
+            </a:r>
+            <a:r>
+              <a:rPr sz="1000" b="0" dirty="0">
+                <a:solidFill>
+                  <a:srgbClr val="C00000"/>
+                </a:solidFill>
+                <a:latin typeface="맑은 고딕"/>
+              </a:rPr>
+              <a:t>(</a:t>
+            </a:r>
+            <a:r>
+              <a:rPr sz="1000" b="0" dirty="0" err="1">
+                <a:solidFill>
+                  <a:srgbClr val="C00000"/>
+                </a:solidFill>
+                <a:latin typeface="맑은 고딕"/>
+              </a:rPr>
+              <a:t>아래</a:t>
+            </a:r>
+            <a:r>
+              <a:rPr sz="1000" b="0" dirty="0">
+                <a:solidFill>
+                  <a:srgbClr val="C00000"/>
+                </a:solidFill>
+                <a:latin typeface="맑은 고딕"/>
+              </a:rPr>
+              <a:t> </a:t>
+            </a:r>
+            <a:r>
+              <a:rPr sz="1000" b="0" dirty="0" err="1">
+                <a:solidFill>
+                  <a:srgbClr val="C00000"/>
+                </a:solidFill>
+                <a:latin typeface="맑은 고딕"/>
+              </a:rPr>
+              <a:t>예외</a:t>
+            </a:r>
+            <a:r>
+              <a:rPr sz="1000" b="0" dirty="0">
+                <a:solidFill>
+                  <a:srgbClr val="C00000"/>
+                </a:solidFill>
+                <a:latin typeface="맑은 고딕"/>
+              </a:rPr>
+              <a:t> </a:t>
+            </a:r>
+            <a:r>
+              <a:rPr sz="1000" b="0" dirty="0" err="1">
+                <a:solidFill>
+                  <a:srgbClr val="C00000"/>
+                </a:solidFill>
+                <a:latin typeface="맑은 고딕"/>
+              </a:rPr>
+              <a:t>처리</a:t>
+            </a:r>
+            <a:r>
+              <a:rPr sz="1000" b="0" dirty="0">
+                <a:solidFill>
+                  <a:srgbClr val="C00000"/>
+                </a:solidFill>
+                <a:latin typeface="맑은 고딕"/>
+              </a:rPr>
+              <a:t> </a:t>
+            </a:r>
+            <a:r>
+              <a:rPr sz="1000" b="0" dirty="0" err="1">
+                <a:solidFill>
+                  <a:srgbClr val="C00000"/>
+                </a:solidFill>
+                <a:latin typeface="맑은 고딕"/>
+              </a:rPr>
+              <a:t>참조</a:t>
+            </a:r>
+            <a:r>
+              <a:rPr sz="1000" b="0" dirty="0">
+                <a:solidFill>
+                  <a:srgbClr val="C00000"/>
+                </a:solidFill>
+                <a:latin typeface="맑은 고딕"/>
+              </a:rPr>
+              <a:t>).</a:t>
+            </a:r>
+          </a:p>
+          <a:p>
+            <a:pPr algn="l"/>
+            <a:r>
+              <a:rPr sz="1000" b="0" dirty="0">
+                <a:solidFill>
+                  <a:srgbClr val="C00000"/>
+                </a:solidFill>
+                <a:latin typeface="맑은 고딕"/>
+              </a:rPr>
+              <a:t>· 도착지·작업구분 </a:t>
+            </a:r>
+            <a:r>
+              <a:rPr sz="1000" b="0" dirty="0" err="1">
+                <a:solidFill>
+                  <a:srgbClr val="C00000"/>
+                </a:solidFill>
+                <a:latin typeface="맑은 고딕"/>
+              </a:rPr>
+              <a:t>입력란은</a:t>
+            </a:r>
+            <a:r>
+              <a:rPr sz="1000" b="0" dirty="0">
+                <a:solidFill>
+                  <a:srgbClr val="C00000"/>
+                </a:solidFill>
+                <a:latin typeface="맑은 고딕"/>
+              </a:rPr>
+              <a:t> </a:t>
+            </a:r>
+            <a:r>
+              <a:rPr sz="1000" dirty="0" err="1">
+                <a:solidFill>
+                  <a:srgbClr val="C00000"/>
+                </a:solidFill>
+                <a:latin typeface="맑은 고딕"/>
+              </a:rPr>
+              <a:t>뺐다</a:t>
+            </a:r>
+            <a:r>
+              <a:rPr sz="1000" dirty="0">
+                <a:solidFill>
+                  <a:srgbClr val="C00000"/>
+                </a:solidFill>
+                <a:latin typeface="맑은 고딕"/>
+              </a:rPr>
+              <a:t>. 이 </a:t>
+            </a:r>
+            <a:r>
+              <a:rPr sz="1000" dirty="0" err="1">
+                <a:solidFill>
+                  <a:srgbClr val="C00000"/>
+                </a:solidFill>
+                <a:latin typeface="맑은 고딕"/>
+              </a:rPr>
+              <a:t>현장은</a:t>
+            </a:r>
+            <a:r>
+              <a:rPr sz="1000" dirty="0">
+                <a:solidFill>
+                  <a:srgbClr val="C00000"/>
+                </a:solidFill>
+                <a:latin typeface="맑은 고딕"/>
+              </a:rPr>
+              <a:t> </a:t>
+            </a:r>
+            <a:r>
+              <a:rPr sz="1000" dirty="0" err="1">
+                <a:solidFill>
+                  <a:srgbClr val="C00000"/>
+                </a:solidFill>
+                <a:latin typeface="맑은 고딕"/>
+              </a:rPr>
+              <a:t>컨베이어에</a:t>
+            </a:r>
+            <a:r>
+              <a:rPr sz="1000" dirty="0">
+                <a:solidFill>
+                  <a:srgbClr val="C00000"/>
+                </a:solidFill>
+                <a:latin typeface="맑은 고딕"/>
+              </a:rPr>
+              <a:t> </a:t>
+            </a:r>
+            <a:r>
+              <a:rPr sz="1000" dirty="0" err="1">
+                <a:solidFill>
+                  <a:srgbClr val="C00000"/>
+                </a:solidFill>
+                <a:latin typeface="맑은 고딕"/>
+              </a:rPr>
+              <a:t>도착지·작업구분을</a:t>
+            </a:r>
+            <a:r>
+              <a:rPr sz="1000" dirty="0">
+                <a:solidFill>
+                  <a:srgbClr val="C00000"/>
+                </a:solidFill>
+                <a:latin typeface="맑은 고딕"/>
+              </a:rPr>
+              <a:t> </a:t>
+            </a:r>
+            <a:r>
+              <a:rPr sz="1000" dirty="0" err="1">
+                <a:solidFill>
+                  <a:srgbClr val="C00000"/>
+                </a:solidFill>
+                <a:latin typeface="맑은 고딕"/>
+              </a:rPr>
+              <a:t>내려보내지</a:t>
+            </a:r>
+            <a:r>
+              <a:rPr sz="1000" dirty="0">
+                <a:solidFill>
+                  <a:srgbClr val="C00000"/>
+                </a:solidFill>
+                <a:latin typeface="맑은 고딕"/>
+              </a:rPr>
+              <a:t> </a:t>
+            </a:r>
+            <a:r>
+              <a:rPr sz="1000" dirty="0" err="1">
+                <a:solidFill>
+                  <a:srgbClr val="C00000"/>
+                </a:solidFill>
+                <a:latin typeface="맑은 고딕"/>
+              </a:rPr>
+              <a:t>않는다</a:t>
+            </a:r>
+            <a:r>
+              <a:rPr sz="1000" dirty="0">
+                <a:solidFill>
+                  <a:srgbClr val="C00000"/>
+                </a:solidFill>
+                <a:latin typeface="맑은 고딕"/>
+              </a:rPr>
+              <a:t> - PLC 로 </a:t>
+            </a:r>
+            <a:r>
+              <a:rPr sz="1000" dirty="0" err="1">
+                <a:solidFill>
+                  <a:srgbClr val="C00000"/>
+                </a:solidFill>
+                <a:latin typeface="맑은 고딕"/>
+              </a:rPr>
+              <a:t>나가는</a:t>
+            </a:r>
+            <a:r>
+              <a:rPr sz="1000" dirty="0">
+                <a:solidFill>
+                  <a:srgbClr val="C00000"/>
+                </a:solidFill>
+                <a:latin typeface="맑은 고딕"/>
+              </a:rPr>
+              <a:t> </a:t>
+            </a:r>
+            <a:r>
+              <a:rPr sz="1000" dirty="0" err="1">
+                <a:solidFill>
+                  <a:srgbClr val="C00000"/>
+                </a:solidFill>
+                <a:latin typeface="맑은 고딕"/>
+              </a:rPr>
+              <a:t>것은</a:t>
+            </a:r>
+            <a:r>
+              <a:rPr sz="1000" dirty="0">
+                <a:solidFill>
+                  <a:srgbClr val="C00000"/>
+                </a:solidFill>
+                <a:latin typeface="맑은 고딕"/>
+              </a:rPr>
+              <a:t> </a:t>
+            </a:r>
+            <a:r>
+              <a:rPr sz="1000" dirty="0" err="1">
+                <a:solidFill>
+                  <a:srgbClr val="C00000"/>
+                </a:solidFill>
+                <a:latin typeface="맑은 고딕"/>
+              </a:rPr>
+              <a:t>방향</a:t>
+            </a:r>
+            <a:r>
+              <a:rPr sz="1000" dirty="0">
+                <a:solidFill>
+                  <a:srgbClr val="C00000"/>
+                </a:solidFill>
+                <a:latin typeface="맑은 고딕"/>
+              </a:rPr>
+              <a:t>(D300+N-1)과 </a:t>
+            </a:r>
+            <a:r>
+              <a:rPr sz="1000" dirty="0" err="1">
+                <a:solidFill>
+                  <a:srgbClr val="C00000"/>
+                </a:solidFill>
+                <a:latin typeface="맑은 고딕"/>
+              </a:rPr>
+              <a:t>작업번호</a:t>
+            </a:r>
+            <a:r>
+              <a:rPr sz="1000" dirty="0">
+                <a:solidFill>
+                  <a:srgbClr val="C00000"/>
+                </a:solidFill>
+                <a:latin typeface="맑은 고딕"/>
+              </a:rPr>
+              <a:t> </a:t>
+            </a:r>
+            <a:r>
+              <a:rPr sz="1000" dirty="0" err="1">
+                <a:solidFill>
+                  <a:srgbClr val="C00000"/>
+                </a:solidFill>
+                <a:latin typeface="맑은 고딕"/>
+              </a:rPr>
+              <a:t>트래킹</a:t>
+            </a:r>
+            <a:r>
+              <a:rPr sz="1000" dirty="0">
+                <a:solidFill>
+                  <a:srgbClr val="C00000"/>
+                </a:solidFill>
+                <a:latin typeface="맑은 고딕"/>
+              </a:rPr>
+              <a:t>(</a:t>
+            </a:r>
+            <a:r>
+              <a:rPr sz="1000" dirty="0" err="1">
+                <a:solidFill>
+                  <a:srgbClr val="C00000"/>
+                </a:solidFill>
+                <a:latin typeface="맑은 고딕"/>
+              </a:rPr>
+              <a:t>R영역</a:t>
+            </a:r>
+            <a:r>
+              <a:rPr sz="1000" dirty="0">
+                <a:solidFill>
+                  <a:srgbClr val="C00000"/>
+                </a:solidFill>
+                <a:latin typeface="맑은 고딕"/>
+              </a:rPr>
+              <a:t>) </a:t>
+            </a:r>
+            <a:r>
+              <a:rPr lang="ko-KR" altLang="en-US" sz="1000" dirty="0">
+                <a:solidFill>
+                  <a:srgbClr val="C00000"/>
+                </a:solidFill>
+                <a:latin typeface="맑은 고딕"/>
+              </a:rPr>
+              <a:t>이</a:t>
+            </a:r>
+            <a:r>
+              <a:rPr sz="1000" b="0" dirty="0">
+                <a:solidFill>
+                  <a:srgbClr val="C00000"/>
+                </a:solidFill>
+                <a:latin typeface="맑은 고딕"/>
+              </a:rPr>
+              <a:t>다.</a:t>
+            </a:r>
+          </a:p>
+          <a:p>
+            <a:pPr algn="l"/>
+            <a:r>
+              <a:rPr sz="1000" b="0" dirty="0">
+                <a:solidFill>
+                  <a:srgbClr val="C00000"/>
+                </a:solidFill>
+                <a:latin typeface="맑은 고딕"/>
+              </a:rPr>
+              <a:t>· [MG 이동] 버튼은 뺐다(2026-09-10). 이 현장에서 쓰지 않는 기능이다.</a:t>
+            </a:r>
+            <a:r>
+              <a:rPr sz="1000" b="0" dirty="0" err="1">
+                <a:solidFill>
+                  <a:srgbClr val="C00000"/>
+                </a:solidFill>
+                <a:latin typeface="맑은 고딕"/>
+              </a:rPr>
+              <a:t/>
+            </a:r>
+            <a:r>
+              <a:rPr sz="1000" b="0" dirty="0">
+                <a:solidFill>
+                  <a:srgbClr val="C00000"/>
+                </a:solidFill>
+                <a:latin typeface="맑은 고딕"/>
+              </a:rPr>
+              <a:t/>
+            </a:r>
+            <a:r>
+              <a:rPr sz="1000" dirty="0" err="1">
+                <a:solidFill>
+                  <a:srgbClr val="C00000"/>
+                </a:solidFill>
+                <a:latin typeface="맑은 고딕"/>
+              </a:rPr>
+              <a:t/>
+            </a:r>
+            <a:r>
+              <a:rPr sz="1000" dirty="0">
+                <a:solidFill>
+                  <a:srgbClr val="C00000"/>
+                </a:solidFill>
+                <a:latin typeface="맑은 고딕"/>
+              </a:rPr>
+              <a:t/>
+            </a:r>
+            <a:r>
+              <a:rPr sz="1000" dirty="0" err="1">
+                <a:solidFill>
+                  <a:srgbClr val="C00000"/>
+                </a:solidFill>
+                <a:latin typeface="맑은 고딕"/>
+              </a:rPr>
+              <a:t/>
+            </a:r>
+            <a:r>
+              <a:rPr sz="1000" dirty="0">
+                <a:solidFill>
+                  <a:srgbClr val="C00000"/>
+                </a:solidFill>
+                <a:latin typeface="맑은 고딕"/>
+              </a:rPr>
+              <a:t/>
+            </a:r>
+            <a:r>
+              <a:rPr sz="1000" dirty="0" err="1">
+                <a:solidFill>
+                  <a:srgbClr val="C00000"/>
+                </a:solidFill>
+                <a:latin typeface="맑은 고딕"/>
+              </a:rPr>
+              <a:t/>
+            </a:r>
+            <a:r>
+              <a:rPr sz="1000" dirty="0">
+                <a:solidFill>
+                  <a:srgbClr val="C00000"/>
+                </a:solidFill>
+                <a:latin typeface="맑은 고딕"/>
+              </a:rPr>
+              <a:t/>
+            </a:r>
+            <a:r>
+              <a:rPr sz="1000" dirty="0" err="1">
+                <a:solidFill>
+                  <a:srgbClr val="C00000"/>
+                </a:solidFill>
+                <a:latin typeface="맑은 고딕"/>
+              </a:rPr>
+              <a:t/>
+            </a:r>
+            <a:r>
+              <a:rPr sz="1000" dirty="0">
+                <a:solidFill>
+                  <a:srgbClr val="C00000"/>
+                </a:solidFill>
+                <a:latin typeface="맑은 고딕"/>
+              </a:rPr>
+              <a:t/>
+            </a:r>
+            <a:r>
+              <a:rPr sz="1000" dirty="0" err="1">
+                <a:solidFill>
+                  <a:srgbClr val="C00000"/>
+                </a:solidFill>
+                <a:latin typeface="맑은 고딕"/>
+              </a:rPr>
+              <a:t/>
+            </a:r>
+            <a:r>
+              <a:rPr sz="1000" dirty="0">
+                <a:solidFill>
+                  <a:srgbClr val="C00000"/>
+                </a:solidFill>
+                <a:latin typeface="맑은 고딕"/>
+              </a:rPr>
+              <a:t/>
+            </a:r>
+            <a:r>
+              <a:rPr sz="1000" dirty="0" err="1">
+                <a:solidFill>
+                  <a:srgbClr val="C00000"/>
+                </a:solidFill>
+                <a:latin typeface="맑은 고딕"/>
+              </a:rPr>
+              <a:t/>
+            </a:r>
+            <a:r>
+              <a:rPr sz="1000" dirty="0">
+                <a:solidFill>
+                  <a:srgbClr val="C00000"/>
+                </a:solidFill>
+                <a:latin typeface="맑은 고딕"/>
+              </a:rPr>
+              <a:t/>
+            </a:r>
+            <a:r>
+              <a:rPr sz="1000" dirty="0" err="1">
+                <a:solidFill>
+                  <a:srgbClr val="C00000"/>
+                </a:solidFill>
+                <a:latin typeface="맑은 고딕"/>
+              </a:rPr>
+              <a:t/>
+            </a:r>
+            <a:r>
+              <a:rPr sz="1000" dirty="0">
+                <a:solidFill>
+                  <a:srgbClr val="C00000"/>
+                </a:solidFill>
+                <a:latin typeface="맑은 고딕"/>
+              </a:rPr>
+              <a:t/>
+            </a:r>
+            <a:r>
+              <a:rPr sz="1000" dirty="0" err="1">
+                <a:solidFill>
+                  <a:srgbClr val="C00000"/>
+                </a:solidFill>
+                <a:latin typeface="맑은 고딕"/>
+              </a:rPr>
+              <a:t/>
+            </a:r>
+            <a:r>
+              <a:rPr sz="1000" dirty="0">
+                <a:solidFill>
+                  <a:srgbClr val="C00000"/>
+                </a:solidFill>
+                <a:latin typeface="맑은 고딕"/>
+              </a:rPr>
+              <a:t/>
+            </a:r>
+            <a:r>
+              <a:rPr sz="1000" dirty="0" err="1">
+                <a:solidFill>
+                  <a:srgbClr val="C00000"/>
+                </a:solidFill>
+                <a:latin typeface="맑은 고딕"/>
+              </a:rPr>
+              <a:t/>
+            </a:r>
+            <a:r>
+              <a:rPr sz="1000" dirty="0">
+                <a:solidFill>
+                  <a:srgbClr val="C00000"/>
+                </a:solidFill>
+                <a:latin typeface="맑은 고딕"/>
+              </a:rPr>
+              <a:t/>
+            </a:r>
+            <a:r>
+              <a:rPr sz="1000" dirty="0" err="1">
+                <a:solidFill>
+                  <a:srgbClr val="C00000"/>
+                </a:solidFill>
+                <a:latin typeface="맑은 고딕"/>
+              </a:rPr>
+              <a:t/>
+            </a:r>
+            <a:r>
+              <a:rPr sz="1000" dirty="0">
+                <a:solidFill>
+                  <a:srgbClr val="C00000"/>
+                </a:solidFill>
+                <a:latin typeface="맑은 고딕"/>
+              </a:rPr>
+              <a:t/>
+            </a:r>
+            <a:r>
+              <a:rPr sz="1000" dirty="0" err="1">
+                <a:solidFill>
+                  <a:srgbClr val="C00000"/>
+                </a:solidFill>
+                <a:latin typeface="맑은 고딕"/>
+              </a:rPr>
+              <a:t/>
+            </a:r>
+            <a:r>
+              <a:rPr sz="1000" dirty="0">
+                <a:solidFill>
+                  <a:srgbClr val="C00000"/>
+                </a:solidFill>
+                <a:latin typeface="맑은 고딕"/>
+              </a:rPr>
+              <a:t/>
+            </a:r>
+            <a:r>
+              <a:rPr sz="1000" dirty="0" err="1">
+                <a:solidFill>
+                  <a:srgbClr val="C00000"/>
+                </a:solidFill>
+                <a:latin typeface="맑은 고딕"/>
+              </a:rPr>
+              <a:t/>
+            </a:r>
+            <a:r>
+              <a:rPr sz="1000" dirty="0">
+                <a:solidFill>
+                  <a:srgbClr val="C00000"/>
+                </a:solidFill>
+                <a:latin typeface="맑은 고딕"/>
+              </a:rPr>
+              <a:t/>
+            </a:r>
+            <a:r>
+              <a:rPr lang="ko-KR" altLang="en-US" sz="1000" dirty="0">
+                <a:solidFill>
+                  <a:srgbClr val="C00000"/>
+                </a:solidFill>
+                <a:latin typeface="맑은 고딕"/>
+              </a:rPr>
+              <a:t/>
+            </a:r>
+            <a:r>
+              <a:rPr sz="1000" b="0" dirty="0">
+                <a:solidFill>
+                  <a:srgbClr val="C00000"/>
+                </a:solidFill>
+                <a:latin typeface="맑은 고딕"/>
+              </a:rPr>
+              <a:t/>
+            </a:r>
+          </a:p>
+        </p:txBody>
+      </p:sp>
+      <p:sp>
+        <p:nvSpPr>
+          <p:cNvPr id="6" name="TextBox 5"/>
+          <p:cNvSpPr txBox="1"/>
+          <p:nvPr/>
+        </p:nvSpPr>
+        <p:spPr>
+          <a:xfrm>
+            <a:off x="457200" y="6400800"/>
+            <a:ext cx="3657600" cy="320040"/>
+          </a:xfrm>
+          <a:prstGeom prst="rect">
+            <a:avLst/>
+          </a:prstGeom>
+          <a:noFill/>
+        </p:spPr>
+        <p:txBody>
+          <a:bodyPr wrap="square" lIns="45720" rIns="45720" anchor="t">
+            <a:spAutoFit/>
+          </a:bodyPr>
+          <a:lstStyle/>
+          <a:p>
+            <a:pPr algn="l"/>
+            <a:r>
+              <a:rPr sz="1000" b="0">
+                <a:solidFill>
+                  <a:srgbClr val="000000"/>
+                </a:solidFill>
+                <a:latin typeface="맑은 고딕"/>
+              </a:rPr>
+              <a:t>LG 화학 1동 ECS  |  화면설계서</a:t>
+            </a:r>
+          </a:p>
+        </p:txBody>
+      </p:sp>
+      <p:sp>
+        <p:nvSpPr>
+          <p:cNvPr id="7" name="TextBox 6"/>
+          <p:cNvSpPr txBox="1"/>
+          <p:nvPr/>
+        </p:nvSpPr>
+        <p:spPr>
+          <a:xfrm>
+            <a:off x="11155680" y="6400800"/>
+            <a:ext cx="731520" cy="320040"/>
+          </a:xfrm>
+          <a:prstGeom prst="rect">
+            <a:avLst/>
+          </a:prstGeom>
+          <a:noFill/>
+        </p:spPr>
+        <p:txBody>
+          <a:bodyPr wrap="square" lIns="45720" rIns="45720" anchor="t">
+            <a:spAutoFit/>
+          </a:bodyPr>
+          <a:lstStyle/>
+          <a:p>
+            <a:pPr algn="r"/>
+            <a:r>
+              <a:rPr sz="1000" b="0">
+                <a:solidFill>
+                  <a:srgbClr val="000000"/>
+                </a:solidFill>
+                <a:latin typeface="맑은 고딕"/>
+              </a:rPr>
+              <a:t>21</a:t>
+            </a:r>
+          </a:p>
+        </p:txBody>
+      </p:sp>
       <p:pic>
         <p:nvPicPr>
-          <p:cNvPr id="4" name="Picture 3" descr="sc4_0.png"/>
+          <p:cNvPr id="8" name="Picture 7" descr="cv2_0.png"/>
           <p:cNvPicPr>
             <a:picLocks noChangeAspect="1"/>
           </p:cNvPicPr>
           <p:nvPr/>
         </p:nvPicPr>
         <p:blipFill>
-          <a:blip r:embed="rId2"/>
+          <a:blip r:embed="rId3"/>
           <a:stretch>
             <a:fillRect/>
           </a:stretch>
         </p:blipFill>
         <p:spPr>
           <a:xfrm>
-            <a:off x="2405492" y="1280160"/>
-            <a:ext cx="3967255" cy="4846320"/>
+            <a:off x="2486856" y="1600646"/>
+            <a:ext cx="3804524" cy="4205347"/>
           </a:xfrm>
           <a:prstGeom prst="rect">
             <a:avLst/>
           </a:prstGeom>
         </p:spPr>
       </p:pic>
-      <p:sp>
-        <p:nvSpPr>
-          <p:cNvPr id="5" name="TextBox 4"/>
-          <p:cNvSpPr txBox="1"/>
-          <p:nvPr/>
-        </p:nvSpPr>
-        <p:spPr>
-          <a:xfrm>
-            <a:off x="8503920" y="1188720"/>
-            <a:ext cx="3291840" cy="5029200"/>
-          </a:xfrm>
-          <a:prstGeom prst="rect">
-            <a:avLst/>
-          </a:prstGeom>
-          <a:noFill/>
-        </p:spPr>
-        <p:txBody>
-          <a:bodyPr wrap="square" lIns="45720" rIns="45720" anchor="t">
-            <a:spAutoFit/>
-          </a:bodyPr>
-          <a:lstStyle/>
-          <a:p>
-            <a:pPr algn="l"/>
-            <a:r>
-              <a:rPr sz="1300" b="1">
-                <a:solidFill>
-                  <a:srgbClr val="000000"/>
-                </a:solidFill>
-                <a:latin typeface="맑은 고딕"/>
-              </a:rPr>
-              <a:t>■ 메뉴 Path</a:t>
-            </a:r>
-          </a:p>
-          <a:p>
-            <a:pPr algn="l"/>
-            <a:r>
-              <a:rPr sz="1100" b="0">
-                <a:solidFill>
-                  <a:srgbClr val="000000"/>
-                </a:solidFill>
-                <a:latin typeface="맑은 고딕"/>
-              </a:rPr>
-              <a:t>메인 화면에서 크레인(랙 열 번호) 클릭</a:t>
-            </a:r>
-          </a:p>
-          <a:p>
-            <a:pPr algn="l"/>
-            <a:endParaRPr sz="1100" b="0">
-              <a:solidFill>
-                <a:srgbClr val="595959"/>
-              </a:solidFill>
-              <a:latin typeface="맑은 고딕"/>
-            </a:endParaRPr>
-          </a:p>
-          <a:p>
-            <a:pPr algn="l"/>
-            <a:r>
-              <a:rPr sz="1300" b="1">
-                <a:solidFill>
-                  <a:srgbClr val="000000"/>
-                </a:solidFill>
-                <a:latin typeface="맑은 고딕"/>
-              </a:rPr>
-              <a:t>■ 프로그램 개요</a:t>
-            </a:r>
-          </a:p>
-          <a:p>
-            <a:pPr algn="l"/>
-            <a:r>
-              <a:rPr sz="1100" b="0">
-                <a:solidFill>
-                  <a:srgbClr val="000000"/>
-                </a:solidFill>
-                <a:latin typeface="맑은 고딕"/>
-              </a:rPr>
-              <a:t>크레인 상태·차상 화물·좌표·에러와 작업 상태를 본다. 명령은 지시 재전송 / 삭제 / 강제완료 / 수동지시.</a:t>
-            </a:r>
-          </a:p>
-          <a:p>
-            <a:pPr algn="l"/>
-            <a:endParaRPr sz="1100" b="0">
-              <a:solidFill>
-                <a:srgbClr val="595959"/>
-              </a:solidFill>
-              <a:latin typeface="맑은 고딕"/>
-            </a:endParaRPr>
-          </a:p>
-          <a:p>
-            <a:pPr algn="l"/>
-            <a:r>
-              <a:rPr sz="1300" b="1">
-                <a:solidFill>
-                  <a:srgbClr val="000000"/>
-                </a:solidFill>
-                <a:latin typeface="맑은 고딕"/>
-              </a:rPr>
-              <a:t>■ 특기사항</a:t>
-            </a:r>
-          </a:p>
-          <a:p>
-            <a:pPr algn="l"/>
-            <a:r>
-              <a:rPr sz="1000" b="0">
-                <a:solidFill>
-                  <a:srgbClr val="000000"/>
-                </a:solidFill>
-                <a:latin typeface="맑은 고딕"/>
-              </a:rPr>
-              <a:t>· 작업상태는 두 열(왼쪽 작업번호·구분·상태·적재용기·제품정보, 오른쪽 출발지·출발위치·도착지·도착위치).</a:t>
-            </a:r>
-          </a:p>
-          <a:p>
-            <a:pPr algn="l"/>
-            <a:r>
-              <a:rPr sz="1000" b="0">
-                <a:solidFill>
-                  <a:srgbClr val="000000"/>
-                </a:solidFill>
-                <a:latin typeface="맑은 고딕"/>
-              </a:rPr>
-              <a:t>· [지시 삭제] 는 설비에 남은 지시(OD)와 요청 플래그를 함께 비운다.</a:t>
-            </a:r>
-          </a:p>
-          <a:p>
-            <a:pPr algn="l"/>
-            <a:r>
-              <a:rPr sz="1000" b="0">
-                <a:solidFill>
-                  <a:srgbClr val="000000"/>
-                </a:solidFill>
-                <a:latin typeface="맑은 고딕"/>
-              </a:rPr>
-              <a:t>· [수동지시] 는 MANUAL &gt; 크레인 창을 연다.</a:t>
-            </a:r>
-          </a:p>
-        </p:txBody>
-      </p:sp>
-      <p:sp>
-        <p:nvSpPr>
-          <p:cNvPr id="6" name="TextBox 5"/>
-          <p:cNvSpPr txBox="1"/>
-          <p:nvPr/>
-        </p:nvSpPr>
-        <p:spPr>
-          <a:xfrm>
-            <a:off x="457200" y="6400800"/>
-            <a:ext cx="3657600" cy="320040"/>
-          </a:xfrm>
-          <a:prstGeom prst="rect">
-            <a:avLst/>
-          </a:prstGeom>
-          <a:noFill/>
-        </p:spPr>
-        <p:txBody>
-          <a:bodyPr wrap="square" lIns="45720" rIns="45720" anchor="t">
-            <a:spAutoFit/>
-          </a:bodyPr>
-          <a:lstStyle/>
-          <a:p>
-            <a:pPr algn="l"/>
-            <a:r>
-              <a:rPr sz="1000" b="0">
-                <a:solidFill>
-                  <a:srgbClr val="000000"/>
-                </a:solidFill>
-                <a:latin typeface="맑은 고딕"/>
-              </a:rPr>
-              <a:t>LG 화학 1동 ECS  |  화면설계서</a:t>
-            </a:r>
-          </a:p>
-        </p:txBody>
-      </p:sp>
-      <p:sp>
-        <p:nvSpPr>
-          <p:cNvPr id="7" name="TextBox 6"/>
-          <p:cNvSpPr txBox="1"/>
-          <p:nvPr/>
-        </p:nvSpPr>
-        <p:spPr>
-          <a:xfrm>
-            <a:off x="11155680" y="6400800"/>
-            <a:ext cx="731520" cy="320040"/>
-          </a:xfrm>
-          <a:prstGeom prst="rect">
-            <a:avLst/>
-          </a:prstGeom>
-          <a:noFill/>
-        </p:spPr>
-        <p:txBody>
-          <a:bodyPr wrap="square" lIns="45720" rIns="45720" anchor="t">
-            <a:spAutoFit/>
-          </a:bodyPr>
-          <a:lstStyle/>
-          <a:p>
-            <a:pPr algn="r"/>
-            <a:r>
-              <a:rPr sz="1000" b="0">
-                <a:solidFill>
-                  <a:srgbClr val="000000"/>
-                </a:solidFill>
-                <a:latin typeface="맑은 고딕"/>
-              </a:rPr>
-              <a:t>21</a:t>
-            </a:r>
-          </a:p>
-        </p:txBody>
-      </p:sp>
     </p:spTree>
   </p:cSld>
   <p:clrMapOvr>
@@ -9110,7 +9128,7 @@
                 </a:solidFill>
                 <a:latin typeface="맑은 고딕"/>
               </a:rPr>
-              <a:t>설비 대화상자 - RTV(RGV) 상태</a:t>
+              <a:t>설비 대화상자 - SC 상태</a:t>
             </a:r>
           </a:p>
         </p:txBody>
@@ -9163,6 +9181,343 @@
       </p:sp>
       <p:pic>
         <p:nvPicPr>
+          <p:cNvPr id="4" name="Picture 3" descr="sc4_0.png"/>
+          <p:cNvPicPr>
+            <a:picLocks noChangeAspect="1"/>
+          </p:cNvPicPr>
+          <p:nvPr/>
+        </p:nvPicPr>
+        <p:blipFill>
+          <a:blip r:embed="rId2"/>
+          <a:stretch>
+            <a:fillRect/>
+          </a:stretch>
+        </p:blipFill>
+        <p:spPr>
+          <a:xfrm>
+            <a:off x="2405492" y="1280160"/>
+            <a:ext cx="3967255" cy="4846320"/>
+          </a:xfrm>
+          <a:prstGeom prst="rect">
+            <a:avLst/>
+          </a:prstGeom>
+        </p:spPr>
+      </p:pic>
+      <p:sp>
+        <p:nvSpPr>
+          <p:cNvPr id="5" name="TextBox 4"/>
+          <p:cNvSpPr txBox="1"/>
+          <p:nvPr/>
+        </p:nvSpPr>
+        <p:spPr>
+          <a:xfrm>
+            <a:off x="8503920" y="1188720"/>
+            <a:ext cx="3291840" cy="5029200"/>
+          </a:xfrm>
+          <a:prstGeom prst="rect">
+            <a:avLst/>
+          </a:prstGeom>
+          <a:noFill/>
+        </p:spPr>
+        <p:txBody>
+          <a:bodyPr wrap="square" lIns="45720" rIns="45720" anchor="t">
+            <a:spAutoFit/>
+          </a:bodyPr>
+          <a:lstStyle/>
+          <a:p>
+            <a:pPr algn="l"/>
+            <a:r>
+              <a:rPr sz="1300" b="1">
+                <a:solidFill>
+                  <a:srgbClr val="000000"/>
+                </a:solidFill>
+                <a:latin typeface="맑은 고딕"/>
+              </a:rPr>
+              <a:t>■ 메뉴 Path</a:t>
+            </a:r>
+          </a:p>
+          <a:p>
+            <a:pPr algn="l"/>
+            <a:r>
+              <a:rPr sz="1100" b="0">
+                <a:solidFill>
+                  <a:srgbClr val="000000"/>
+                </a:solidFill>
+                <a:latin typeface="맑은 고딕"/>
+              </a:rPr>
+              <a:t>메인 화면에서 크레인(랙 열 번호) 클릭</a:t>
+            </a:r>
+          </a:p>
+          <a:p>
+            <a:pPr algn="l"/>
+            <a:endParaRPr sz="1100" b="0">
+              <a:solidFill>
+                <a:srgbClr val="595959"/>
+              </a:solidFill>
+              <a:latin typeface="맑은 고딕"/>
+            </a:endParaRPr>
+          </a:p>
+          <a:p>
+            <a:pPr algn="l"/>
+            <a:r>
+              <a:rPr sz="1300" b="1">
+                <a:solidFill>
+                  <a:srgbClr val="000000"/>
+                </a:solidFill>
+                <a:latin typeface="맑은 고딕"/>
+              </a:rPr>
+              <a:t>■ 프로그램 개요</a:t>
+            </a:r>
+          </a:p>
+          <a:p>
+            <a:pPr algn="l"/>
+            <a:r>
+              <a:rPr sz="1100" b="0">
+                <a:solidFill>
+                  <a:srgbClr val="000000"/>
+                </a:solidFill>
+                <a:latin typeface="맑은 고딕"/>
+              </a:rPr>
+              <a:t>크레인 상태·차상 화물·좌표·에러와 작업 상태를 본다. 명령은 지시 재전송 / 삭제 / 강제완료 / 수동지시.</a:t>
+            </a:r>
+          </a:p>
+          <a:p>
+            <a:pPr algn="l"/>
+            <a:endParaRPr sz="1100" b="0">
+              <a:solidFill>
+                <a:srgbClr val="595959"/>
+              </a:solidFill>
+              <a:latin typeface="맑은 고딕"/>
+            </a:endParaRPr>
+          </a:p>
+          <a:p>
+            <a:pPr algn="l"/>
+            <a:r>
+              <a:rPr sz="1300" b="1">
+                <a:solidFill>
+                  <a:srgbClr val="000000"/>
+                </a:solidFill>
+                <a:latin typeface="맑은 고딕"/>
+              </a:rPr>
+              <a:t>■ 특기사항</a:t>
+            </a:r>
+          </a:p>
+          <a:p>
+            <a:pPr algn="l"/>
+            <a:r>
+              <a:rPr sz="1000" b="0">
+                <a:solidFill>
+                  <a:srgbClr val="000000"/>
+                </a:solidFill>
+                <a:latin typeface="맑은 고딕"/>
+              </a:rPr>
+              <a:t>· 작업상태는 두 열(왼쪽 작업번호·구분·상태·적재용기·제품정보, 오른쪽 출발지·출발위치·도착지·도착위치).</a:t>
+            </a:r>
+          </a:p>
+          <a:p>
+            <a:pPr algn="l"/>
+            <a:r>
+              <a:rPr sz="1000" b="0">
+                <a:solidFill>
+                  <a:srgbClr val="000000"/>
+                </a:solidFill>
+                <a:latin typeface="맑은 고딕"/>
+              </a:rPr>
+              <a:t>· [지시 삭제] 는 설비에 남은 지시(OD)와 요청 플래그를 함께 비운다.</a:t>
+            </a:r>
+          </a:p>
+          <a:p>
+            <a:pPr algn="l"/>
+            <a:r>
+              <a:rPr sz="1000" b="0">
+                <a:solidFill>
+                  <a:srgbClr val="000000"/>
+                </a:solidFill>
+                <a:latin typeface="맑은 고딕"/>
+              </a:rPr>
+              <a:t>· [수동지시] 는 MANUAL &gt; 크레인 창을 연다.</a:t>
+            </a:r>
+          </a:p>
+        </p:txBody>
+      </p:sp>
+      <p:sp>
+        <p:nvSpPr>
+          <p:cNvPr id="6" name="TextBox 5"/>
+          <p:cNvSpPr txBox="1"/>
+          <p:nvPr/>
+        </p:nvSpPr>
+        <p:spPr>
+          <a:xfrm>
+            <a:off x="457200" y="6400800"/>
+            <a:ext cx="3657600" cy="320040"/>
+          </a:xfrm>
+          <a:prstGeom prst="rect">
+            <a:avLst/>
+          </a:prstGeom>
+          <a:noFill/>
+        </p:spPr>
+        <p:txBody>
+          <a:bodyPr wrap="square" lIns="45720" rIns="45720" anchor="t">
+            <a:spAutoFit/>
+          </a:bodyPr>
+          <a:lstStyle/>
+          <a:p>
+            <a:pPr algn="l"/>
+            <a:r>
+              <a:rPr sz="1000" b="0">
+                <a:solidFill>
+                  <a:srgbClr val="000000"/>
+                </a:solidFill>
+                <a:latin typeface="맑은 고딕"/>
+              </a:rPr>
+              <a:t>LG 화학 1동 ECS  |  화면설계서</a:t>
+            </a:r>
+          </a:p>
+        </p:txBody>
+      </p:sp>
+      <p:sp>
+        <p:nvSpPr>
+          <p:cNvPr id="7" name="TextBox 6"/>
+          <p:cNvSpPr txBox="1"/>
+          <p:nvPr/>
+        </p:nvSpPr>
+        <p:spPr>
+          <a:xfrm>
+            <a:off x="11155680" y="6400800"/>
+            <a:ext cx="731520" cy="320040"/>
+          </a:xfrm>
+          <a:prstGeom prst="rect">
+            <a:avLst/>
+          </a:prstGeom>
+          <a:noFill/>
+        </p:spPr>
+        <p:txBody>
+          <a:bodyPr wrap="square" lIns="45720" rIns="45720" anchor="t">
+            <a:spAutoFit/>
+          </a:bodyPr>
+          <a:lstStyle/>
+          <a:p>
+            <a:pPr algn="r"/>
+            <a:r>
+              <a:rPr sz="1000" b="0">
+                <a:solidFill>
+                  <a:srgbClr val="000000"/>
+                </a:solidFill>
+                <a:latin typeface="맑은 고딕"/>
+              </a:rPr>
+              <a:t>22</a:t>
+            </a:r>
+          </a:p>
+        </p:txBody>
+      </p:sp>
+    </p:spTree>
+  </p:cSld>
+  <p:clrMapOvr>
+    <a:masterClrMapping/>
+  </p:clrMapOvr>
+</p:sld>
+</file>
+
+<file path=ppt/slides/slide23.xml><?xml version="1.0" encoding="utf-8"?>
+<p:sld xmlns:a="http://schemas.openxmlformats.org/drawingml/2006/main" xmlns:r="http://schemas.openxmlformats.org/officeDocument/2006/relationships" xmlns:p="http://schemas.openxmlformats.org/presentationml/2006/main">
+  <p:cSld>
+    <p:spTree>
+      <p:nvGrpSpPr>
+        <p:cNvPr id="1" name=""/>
+        <p:cNvGrpSpPr/>
+        <p:nvPr/>
+      </p:nvGrpSpPr>
+      <p:grpSpPr>
+        <a:xfrm>
+          <a:off x="0" y="0"/>
+          <a:ext cx="0" cy="0"/>
+          <a:chOff x="0" y="0"/>
+          <a:chExt cx="0" cy="0"/>
+        </a:xfrm>
+      </p:grpSpPr>
+      <p:sp>
+        <p:nvSpPr>
+          <p:cNvPr id="2" name="TextBox 1"/>
+          <p:cNvSpPr txBox="1"/>
+          <p:nvPr/>
+        </p:nvSpPr>
+        <p:spPr>
+          <a:xfrm>
+            <a:off x="457200" y="320040"/>
+            <a:ext cx="11247120" cy="640080"/>
+          </a:xfrm>
+          <a:prstGeom prst="rect">
+            <a:avLst/>
+          </a:prstGeom>
+          <a:noFill/>
+        </p:spPr>
+        <p:txBody>
+          <a:bodyPr wrap="square" lIns="45720" rIns="45720" anchor="ctr">
+            <a:spAutoFit/>
+          </a:bodyPr>
+          <a:lstStyle/>
+          <a:p>
+            <a:pPr algn="l"/>
+            <a:r>
+              <a:rPr sz="2600" b="1">
+                <a:solidFill>
+                  <a:srgbClr val="000000"/>
+                </a:solidFill>
+                <a:latin typeface="맑은 고딕"/>
+              </a:rPr>
+              <a:t>설비 대화상자 - RTV(RGV) 상태</a:t>
+            </a:r>
+          </a:p>
+        </p:txBody>
+      </p:sp>
+      <p:sp>
+        <p:nvSpPr>
+          <p:cNvPr id="3" name="Rectangle 2"/>
+          <p:cNvSpPr/>
+          <p:nvPr/>
+        </p:nvSpPr>
+        <p:spPr>
+          <a:xfrm>
+            <a:off x="548640" y="1188720"/>
+            <a:ext cx="7680960" cy="5029200"/>
+          </a:xfrm>
+          <a:prstGeom prst="rect">
+            <a:avLst/>
+          </a:prstGeom>
+          <a:solidFill>
+            <a:srgbClr val="F7F8FA"/>
+          </a:solidFill>
+          <a:ln>
+            <a:solidFill>
+              <a:srgbClr val="C8CEDA"/>
+            </a:solidFill>
+          </a:ln>
+        </p:spPr>
+        <p:style>
+          <a:lnRef idx="1">
+            <a:schemeClr val="accent1"/>
+          </a:lnRef>
+          <a:fillRef idx="3">
+            <a:schemeClr val="accent1"/>
+          </a:fillRef>
+          <a:effectRef idx="2">
+            <a:schemeClr val="accent1"/>
+          </a:effectRef>
+          <a:fontRef idx="minor">
+            <a:schemeClr val="lt1"/>
+          </a:fontRef>
+        </p:style>
+        <p:txBody>
+          <a:bodyPr rtlCol="0" anchor="ctr"/>
+          <a:lstStyle/>
+          <a:p>
+            <a:pPr algn="ctr"/>
+            <a:endParaRPr/>
+          </a:p>
+        </p:txBody>
+      </p:sp>
+      <p:pic>
+        <p:nvPicPr>
           <p:cNvPr id="4" name="Picture 3" descr="rtv_0.png"/>
           <p:cNvPicPr>
             <a:picLocks noChangeAspect="1"/>
@@ -9363,7 +9718,7 @@
                 </a:solidFill>
                 <a:latin typeface="맑은 고딕"/>
               </a:rPr>
-              <a:t>22</a:t>
+              <a:t>23</a:t>
             </a:r>
           </a:p>
         </p:txBody>

--- a/docs/산출물_20260909/06_ECS_화면설계서.pptx
+++ b/docs/산출물_20260909/06_ECS_화면설계서.pptx
@@ -15,19 +15,19 @@
     <p:sldId id="263" r:id="rId9"/>
     <p:sldId id="264" r:id="rId10"/>
     <p:sldId id="265" r:id="rId11"/>
-    <p:sldId id="278" r:id="rId28"/>
-    <p:sldId id="266" r:id="rId12"/>
-    <p:sldId id="267" r:id="rId13"/>
-    <p:sldId id="268" r:id="rId14"/>
-    <p:sldId id="269" r:id="rId15"/>
-    <p:sldId id="270" r:id="rId16"/>
-    <p:sldId id="271" r:id="rId17"/>
-    <p:sldId id="272" r:id="rId18"/>
-    <p:sldId id="273" r:id="rId19"/>
-    <p:sldId id="274" r:id="rId20"/>
-    <p:sldId id="275" r:id="rId21"/>
-    <p:sldId id="276" r:id="rId22"/>
-    <p:sldId id="277" r:id="rId23"/>
+    <p:sldId id="278" r:id="rId12"/>
+    <p:sldId id="266" r:id="rId13"/>
+    <p:sldId id="267" r:id="rId14"/>
+    <p:sldId id="268" r:id="rId15"/>
+    <p:sldId id="269" r:id="rId16"/>
+    <p:sldId id="270" r:id="rId17"/>
+    <p:sldId id="271" r:id="rId18"/>
+    <p:sldId id="272" r:id="rId19"/>
+    <p:sldId id="273" r:id="rId20"/>
+    <p:sldId id="274" r:id="rId21"/>
+    <p:sldId id="275" r:id="rId22"/>
+    <p:sldId id="276" r:id="rId23"/>
+    <p:sldId id="277" r:id="rId24"/>
   </p:sldIdLst>
   <p:sldSz cx="12192000" cy="6858000"/>
   <p:notesSz cx="6858000" cy="9144000"/>
@@ -3182,7 +3182,7 @@
             <a:r>
               <a:rPr sz="2200" b="0" dirty="0">
                 <a:solidFill>
-                  <a:srgbClr val="000000"/>
+                  <a:schemeClr val="bg1"/>
                 </a:solidFill>
                 <a:latin typeface="맑은 고딕"/>
               </a:rPr>
@@ -3191,7 +3191,7 @@
             <a:r>
               <a:rPr sz="2200" b="0" dirty="0" err="1">
                 <a:solidFill>
-                  <a:srgbClr val="000000"/>
+                  <a:schemeClr val="bg1"/>
                 </a:solidFill>
                 <a:latin typeface="맑은 고딕"/>
               </a:rPr>
@@ -3200,7 +3200,7 @@
             <a:r>
               <a:rPr sz="2200" b="0" dirty="0">
                 <a:solidFill>
-                  <a:srgbClr val="000000"/>
+                  <a:schemeClr val="bg1"/>
                 </a:solidFill>
                 <a:latin typeface="맑은 고딕"/>
               </a:rPr>
@@ -3209,7 +3209,7 @@
             <a:r>
               <a:rPr sz="2200" b="0" dirty="0" err="1">
                 <a:solidFill>
-                  <a:srgbClr val="000000"/>
+                  <a:schemeClr val="bg1"/>
                 </a:solidFill>
                 <a:latin typeface="맑은 고딕"/>
               </a:rPr>
@@ -3250,7 +3250,7 @@
             <a:r>
               <a:rPr sz="4800" b="1" dirty="0">
                 <a:solidFill>
-                  <a:srgbClr val="C00000"/>
+                  <a:schemeClr val="bg1"/>
                 </a:solidFill>
                 <a:latin typeface="맑은 고딕"/>
               </a:rPr>
@@ -3259,7 +3259,7 @@
             <a:r>
               <a:rPr sz="4800" b="1" dirty="0" err="1">
                 <a:solidFill>
-                  <a:srgbClr val="C00000"/>
+                  <a:schemeClr val="bg1"/>
                 </a:solidFill>
                 <a:latin typeface="맑은 고딕"/>
               </a:rPr>
@@ -3300,7 +3300,7 @@
             <a:r>
               <a:rPr sz="1600" b="0" dirty="0">
                 <a:solidFill>
-                  <a:srgbClr val="C00000"/>
+                  <a:schemeClr val="bg1"/>
                 </a:solidFill>
                 <a:latin typeface="맑은 고딕"/>
               </a:rPr>
@@ -3309,7 +3309,7 @@
             <a:r>
               <a:rPr sz="1600" b="0" dirty="0" err="1">
                 <a:solidFill>
-                  <a:srgbClr val="C00000"/>
+                  <a:schemeClr val="bg1"/>
                 </a:solidFill>
                 <a:latin typeface="맑은 고딕"/>
               </a:rPr>
@@ -3318,7 +3318,7 @@
             <a:r>
               <a:rPr sz="1600" b="0" dirty="0">
                 <a:solidFill>
-                  <a:srgbClr val="C00000"/>
+                  <a:schemeClr val="bg1"/>
                 </a:solidFill>
                 <a:latin typeface="맑은 고딕"/>
               </a:rPr>
@@ -3327,7 +3327,7 @@
             <a:r>
               <a:rPr sz="1600" b="0" dirty="0" err="1">
                 <a:solidFill>
-                  <a:srgbClr val="C00000"/>
+                  <a:schemeClr val="bg1"/>
                 </a:solidFill>
                 <a:latin typeface="맑은 고딕"/>
               </a:rPr>
@@ -3336,7 +3336,7 @@
             <a:r>
               <a:rPr sz="1600" b="0" dirty="0">
                 <a:solidFill>
-                  <a:srgbClr val="C00000"/>
+                  <a:schemeClr val="bg1"/>
                 </a:solidFill>
                 <a:latin typeface="맑은 고딕"/>
               </a:rPr>
@@ -3345,7 +3345,7 @@
             <a:r>
               <a:rPr sz="1600" b="0" dirty="0" err="1">
                 <a:solidFill>
-                  <a:srgbClr val="C00000"/>
+                  <a:schemeClr val="bg1"/>
                 </a:solidFill>
                 <a:latin typeface="맑은 고딕"/>
               </a:rPr>
@@ -3354,7 +3354,7 @@
             <a:r>
               <a:rPr sz="1600" b="0" dirty="0">
                 <a:solidFill>
-                  <a:srgbClr val="C00000"/>
+                  <a:schemeClr val="bg1"/>
                 </a:solidFill>
                 <a:latin typeface="맑은 고딕"/>
               </a:rPr>
@@ -3363,7 +3363,7 @@
             <a:r>
               <a:rPr sz="1600" b="0" dirty="0" err="1">
                 <a:solidFill>
-                  <a:srgbClr val="C00000"/>
+                  <a:schemeClr val="bg1"/>
                 </a:solidFill>
                 <a:latin typeface="맑은 고딕"/>
               </a:rPr>
@@ -3372,7 +3372,7 @@
             <a:r>
               <a:rPr sz="1600" b="0" dirty="0">
                 <a:solidFill>
-                  <a:srgbClr val="C00000"/>
+                  <a:schemeClr val="bg1"/>
                 </a:solidFill>
                 <a:latin typeface="맑은 고딕"/>
               </a:rPr>
@@ -3381,7 +3381,7 @@
             <a:r>
               <a:rPr sz="1600" b="0" dirty="0" err="1">
                 <a:solidFill>
-                  <a:srgbClr val="C00000"/>
+                  <a:schemeClr val="bg1"/>
                 </a:solidFill>
                 <a:latin typeface="맑은 고딕"/>
               </a:rPr>
@@ -3390,7 +3390,7 @@
             <a:r>
               <a:rPr sz="1600" b="0" dirty="0">
                 <a:solidFill>
-                  <a:srgbClr val="C00000"/>
+                  <a:schemeClr val="bg1"/>
                 </a:solidFill>
                 <a:latin typeface="맑은 고딕"/>
               </a:rPr>
@@ -3745,7 +3745,7 @@
           <p:nvPr/>
         </p:nvPicPr>
         <p:blipFill>
-          <a:blip r:embed="rId4"/>
+          <a:blip r:embed="rId2"/>
           <a:stretch>
             <a:fillRect/>
           </a:stretch>
@@ -3769,7 +3769,7 @@
 </file>
 
 <file path=ppt/slides/slide11.xml><?xml version="1.0" encoding="utf-8"?>
-<p:sld xmlns:a="http://schemas.openxmlformats.org/drawingml/2006/main" xmlns:p="http://schemas.openxmlformats.org/presentationml/2006/main" xmlns:r="http://schemas.openxmlformats.org/officeDocument/2006/relationships">
+<p:sld xmlns:a="http://schemas.openxmlformats.org/drawingml/2006/main" xmlns:r="http://schemas.openxmlformats.org/officeDocument/2006/relationships" xmlns:p="http://schemas.openxmlformats.org/presentationml/2006/main">
   <p:cSld>
     <p:spTree>
       <p:nvGrpSpPr>
@@ -3777,7 +3777,14 @@
         <p:cNvGrpSpPr/>
         <p:nvPr/>
       </p:nvGrpSpPr>
-      <p:grpSpPr/>
+      <p:grpSpPr>
+        <a:xfrm>
+          <a:off x="0" y="0"/>
+          <a:ext cx="0" cy="0"/>
+          <a:chOff x="0" y="0"/>
+          <a:chExt cx="0" cy="0"/>
+        </a:xfrm>
+      </p:grpSpPr>
       <p:sp>
         <p:nvSpPr>
           <p:cNvPr id="2" name="TextBox 1"/>
@@ -7659,267 +7666,6 @@
               </a:rPr>
               <a:t>컨베이어(트랙 2개)의 PLC 신호와 작업 정보를 보고, 작업번호 쓰기/삭제/복사/잘라내기/붙여넣기를 수행한다.</a:t>
             </a:r>
-            <a:r>
-              <a:rPr sz="1100" b="0" dirty="0">
-                <a:solidFill>
-                  <a:srgbClr val="C00000"/>
-                </a:solidFill>
-                <a:latin typeface="맑은 고딕"/>
-              </a:rPr>
-              <a:t/>
-            </a:r>
-            <a:r>
-              <a:rPr sz="1100" b="0" dirty="0" err="1">
-                <a:solidFill>
-                  <a:srgbClr val="C00000"/>
-                </a:solidFill>
-                <a:latin typeface="맑은 고딕"/>
-              </a:rPr>
-              <a:t/>
-            </a:r>
-            <a:r>
-              <a:rPr sz="1100" b="0" dirty="0">
-                <a:solidFill>
-                  <a:srgbClr val="C00000"/>
-                </a:solidFill>
-                <a:latin typeface="맑은 고딕"/>
-              </a:rPr>
-              <a:t/>
-            </a:r>
-            <a:r>
-              <a:rPr sz="1100" b="0" dirty="0" err="1">
-                <a:solidFill>
-                  <a:srgbClr val="C00000"/>
-                </a:solidFill>
-                <a:latin typeface="맑은 고딕"/>
-              </a:rPr>
-              <a:t/>
-            </a:r>
-            <a:r>
-              <a:rPr sz="1100" b="0" dirty="0">
-                <a:solidFill>
-                  <a:srgbClr val="C00000"/>
-                </a:solidFill>
-                <a:latin typeface="맑은 고딕"/>
-              </a:rPr>
-              <a:t/>
-            </a:r>
-            <a:r>
-              <a:rPr sz="1100" b="0" dirty="0" err="1">
-                <a:solidFill>
-                  <a:srgbClr val="C00000"/>
-                </a:solidFill>
-                <a:latin typeface="맑은 고딕"/>
-              </a:rPr>
-              <a:t/>
-            </a:r>
-            <a:r>
-              <a:rPr sz="1100" b="0" dirty="0">
-                <a:solidFill>
-                  <a:srgbClr val="C00000"/>
-                </a:solidFill>
-                <a:latin typeface="맑은 고딕"/>
-              </a:rPr>
-              <a:t/>
-            </a:r>
-            <a:r>
-              <a:rPr sz="1100" b="0" dirty="0" err="1">
-                <a:solidFill>
-                  <a:srgbClr val="C00000"/>
-                </a:solidFill>
-                <a:latin typeface="맑은 고딕"/>
-              </a:rPr>
-              <a:t/>
-            </a:r>
-            <a:r>
-              <a:rPr sz="1100" b="0" dirty="0">
-                <a:solidFill>
-                  <a:srgbClr val="C00000"/>
-                </a:solidFill>
-                <a:latin typeface="맑은 고딕"/>
-              </a:rPr>
-              <a:t/>
-            </a:r>
-            <a:r>
-              <a:rPr sz="1100" b="0" dirty="0" err="1">
-                <a:solidFill>
-                  <a:srgbClr val="C00000"/>
-                </a:solidFill>
-                <a:latin typeface="맑은 고딕"/>
-              </a:rPr>
-              <a:t/>
-            </a:r>
-            <a:r>
-              <a:rPr sz="1100" b="0" dirty="0">
-                <a:solidFill>
-                  <a:srgbClr val="C00000"/>
-                </a:solidFill>
-                <a:latin typeface="맑은 고딕"/>
-              </a:rPr>
-              <a:t/>
-            </a:r>
-            <a:r>
-              <a:rPr sz="1100" b="0" dirty="0" err="1">
-                <a:solidFill>
-                  <a:srgbClr val="C00000"/>
-                </a:solidFill>
-                <a:latin typeface="맑은 고딕"/>
-              </a:rPr>
-              <a:t/>
-            </a:r>
-            <a:r>
-              <a:rPr sz="1100" b="0" dirty="0">
-                <a:solidFill>
-                  <a:srgbClr val="C00000"/>
-                </a:solidFill>
-                <a:latin typeface="맑은 고딕"/>
-              </a:rPr>
-              <a:t/>
-            </a:r>
-            <a:r>
-              <a:rPr sz="1100" b="0" dirty="0" err="1">
-                <a:solidFill>
-                  <a:srgbClr val="C00000"/>
-                </a:solidFill>
-                <a:latin typeface="맑은 고딕"/>
-              </a:rPr>
-              <a:t/>
-            </a:r>
-            <a:r>
-              <a:rPr sz="1100" b="0" dirty="0">
-                <a:solidFill>
-                  <a:srgbClr val="C00000"/>
-                </a:solidFill>
-                <a:latin typeface="맑은 고딕"/>
-              </a:rPr>
-              <a:t/>
-            </a:r>
-            <a:r>
-              <a:rPr sz="1100" b="0" dirty="0" err="1">
-                <a:solidFill>
-                  <a:srgbClr val="C00000"/>
-                </a:solidFill>
-                <a:latin typeface="맑은 고딕"/>
-              </a:rPr>
-              <a:t/>
-            </a:r>
-            <a:r>
-              <a:rPr sz="1100" b="0" dirty="0">
-                <a:solidFill>
-                  <a:srgbClr val="C00000"/>
-                </a:solidFill>
-                <a:latin typeface="맑은 고딕"/>
-              </a:rPr>
-              <a:t/>
-            </a:r>
-            <a:r>
-              <a:rPr sz="1100" b="0" dirty="0" err="1">
-                <a:solidFill>
-                  <a:srgbClr val="C00000"/>
-                </a:solidFill>
-                <a:latin typeface="맑은 고딕"/>
-              </a:rPr>
-              <a:t/>
-            </a:r>
-            <a:r>
-              <a:rPr sz="1100" b="0" dirty="0">
-                <a:solidFill>
-                  <a:srgbClr val="C00000"/>
-                </a:solidFill>
-                <a:latin typeface="맑은 고딕"/>
-              </a:rPr>
-              <a:t/>
-            </a:r>
-            <a:r>
-              <a:rPr sz="1100" b="0" dirty="0" err="1">
-                <a:solidFill>
-                  <a:srgbClr val="C00000"/>
-                </a:solidFill>
-                <a:latin typeface="맑은 고딕"/>
-              </a:rPr>
-              <a:t/>
-            </a:r>
-            <a:r>
-              <a:rPr sz="1100" b="0" dirty="0">
-                <a:solidFill>
-                  <a:srgbClr val="C00000"/>
-                </a:solidFill>
-                <a:latin typeface="맑은 고딕"/>
-              </a:rPr>
-              <a:t/>
-            </a:r>
-            <a:r>
-              <a:rPr sz="1100" b="0" dirty="0" err="1">
-                <a:solidFill>
-                  <a:srgbClr val="C00000"/>
-                </a:solidFill>
-                <a:latin typeface="맑은 고딕"/>
-              </a:rPr>
-              <a:t/>
-            </a:r>
-            <a:r>
-              <a:rPr sz="1100" b="0" dirty="0">
-                <a:solidFill>
-                  <a:srgbClr val="C00000"/>
-                </a:solidFill>
-                <a:latin typeface="맑은 고딕"/>
-              </a:rPr>
-              <a:t/>
-            </a:r>
-            <a:r>
-              <a:rPr sz="1100" b="0" dirty="0" err="1">
-                <a:solidFill>
-                  <a:srgbClr val="C00000"/>
-                </a:solidFill>
-                <a:latin typeface="맑은 고딕"/>
-              </a:rPr>
-              <a:t/>
-            </a:r>
-            <a:r>
-              <a:rPr sz="1100" b="0" dirty="0">
-                <a:solidFill>
-                  <a:srgbClr val="C00000"/>
-                </a:solidFill>
-                <a:latin typeface="맑은 고딕"/>
-              </a:rPr>
-              <a:t/>
-            </a:r>
-            <a:r>
-              <a:rPr sz="1100" b="0" dirty="0" err="1">
-                <a:solidFill>
-                  <a:srgbClr val="C00000"/>
-                </a:solidFill>
-                <a:latin typeface="맑은 고딕"/>
-              </a:rPr>
-              <a:t/>
-            </a:r>
-            <a:r>
-              <a:rPr sz="1100" b="0" dirty="0">
-                <a:solidFill>
-                  <a:srgbClr val="C00000"/>
-                </a:solidFill>
-                <a:latin typeface="맑은 고딕"/>
-              </a:rPr>
-              <a:t/>
-            </a:r>
-            <a:r>
-              <a:rPr sz="1100" b="0" dirty="0" err="1">
-                <a:solidFill>
-                  <a:srgbClr val="C00000"/>
-                </a:solidFill>
-                <a:latin typeface="맑은 고딕"/>
-              </a:rPr>
-              <a:t/>
-            </a:r>
-            <a:r>
-              <a:rPr sz="1100" b="0" dirty="0">
-                <a:solidFill>
-                  <a:srgbClr val="C00000"/>
-                </a:solidFill>
-                <a:latin typeface="맑은 고딕"/>
-              </a:rPr>
-              <a:t/>
-            </a:r>
           </a:p>
           <a:p>
             <a:pPr algn="l"/>
@@ -8711,270 +8457,6 @@
                 <a:latin typeface="맑은 고딕"/>
               </a:rPr>
               <a:t>다.</a:t>
-            </a:r>
-          </a:p>
-          <a:p>
-            <a:pPr algn="l"/>
-            <a:r>
-              <a:rPr sz="1000" b="0" dirty="0">
-                <a:solidFill>
-                  <a:srgbClr val="C00000"/>
-                </a:solidFill>
-                <a:latin typeface="맑은 고딕"/>
-              </a:rPr>
-              <a:t>· [MG 이동] 버튼은 뺐다(2026-09-10). 이 현장에서 쓰지 않는 기능이다.</a:t>
-            </a:r>
-            <a:r>
-              <a:rPr sz="1000" b="0" dirty="0" err="1">
-                <a:solidFill>
-                  <a:srgbClr val="C00000"/>
-                </a:solidFill>
-                <a:latin typeface="맑은 고딕"/>
-              </a:rPr>
-              <a:t/>
-            </a:r>
-            <a:r>
-              <a:rPr sz="1000" b="0" dirty="0">
-                <a:solidFill>
-                  <a:srgbClr val="C00000"/>
-                </a:solidFill>
-                <a:latin typeface="맑은 고딕"/>
-              </a:rPr>
-              <a:t/>
-            </a:r>
-            <a:r>
-              <a:rPr sz="1000" dirty="0" err="1">
-                <a:solidFill>
-                  <a:srgbClr val="C00000"/>
-                </a:solidFill>
-                <a:latin typeface="맑은 고딕"/>
-              </a:rPr>
-              <a:t/>
-            </a:r>
-            <a:r>
-              <a:rPr sz="1000" dirty="0">
-                <a:solidFill>
-                  <a:srgbClr val="C00000"/>
-                </a:solidFill>
-                <a:latin typeface="맑은 고딕"/>
-              </a:rPr>
-              <a:t/>
-            </a:r>
-            <a:r>
-              <a:rPr sz="1000" dirty="0" err="1">
-                <a:solidFill>
-                  <a:srgbClr val="C00000"/>
-                </a:solidFill>
-                <a:latin typeface="맑은 고딕"/>
-              </a:rPr>
-              <a:t/>
-            </a:r>
-            <a:r>
-              <a:rPr sz="1000" dirty="0">
-                <a:solidFill>
-                  <a:srgbClr val="C00000"/>
-                </a:solidFill>
-                <a:latin typeface="맑은 고딕"/>
-              </a:rPr>
-              <a:t/>
-            </a:r>
-            <a:r>
-              <a:rPr sz="1000" dirty="0" err="1">
-                <a:solidFill>
-                  <a:srgbClr val="C00000"/>
-                </a:solidFill>
-                <a:latin typeface="맑은 고딕"/>
-              </a:rPr>
-              <a:t/>
-            </a:r>
-            <a:r>
-              <a:rPr sz="1000" dirty="0">
-                <a:solidFill>
-                  <a:srgbClr val="C00000"/>
-                </a:solidFill>
-                <a:latin typeface="맑은 고딕"/>
-              </a:rPr>
-              <a:t/>
-            </a:r>
-            <a:r>
-              <a:rPr sz="1000" dirty="0" err="1">
-                <a:solidFill>
-                  <a:srgbClr val="C00000"/>
-                </a:solidFill>
-                <a:latin typeface="맑은 고딕"/>
-              </a:rPr>
-              <a:t/>
-            </a:r>
-            <a:r>
-              <a:rPr sz="1000" dirty="0">
-                <a:solidFill>
-                  <a:srgbClr val="C00000"/>
-                </a:solidFill>
-                <a:latin typeface="맑은 고딕"/>
-              </a:rPr>
-              <a:t/>
-            </a:r>
-            <a:r>
-              <a:rPr sz="1000" dirty="0" err="1">
-                <a:solidFill>
-                  <a:srgbClr val="C00000"/>
-                </a:solidFill>
-                <a:latin typeface="맑은 고딕"/>
-              </a:rPr>
-              <a:t/>
-            </a:r>
-            <a:r>
-              <a:rPr sz="1000" dirty="0">
-                <a:solidFill>
-                  <a:srgbClr val="C00000"/>
-                </a:solidFill>
-                <a:latin typeface="맑은 고딕"/>
-              </a:rPr>
-              <a:t/>
-            </a:r>
-            <a:r>
-              <a:rPr sz="1000" dirty="0" err="1">
-                <a:solidFill>
-                  <a:srgbClr val="C00000"/>
-                </a:solidFill>
-                <a:latin typeface="맑은 고딕"/>
-              </a:rPr>
-              <a:t/>
-            </a:r>
-            <a:r>
-              <a:rPr sz="1000" dirty="0">
-                <a:solidFill>
-                  <a:srgbClr val="C00000"/>
-                </a:solidFill>
-                <a:latin typeface="맑은 고딕"/>
-              </a:rPr>
-              <a:t/>
-            </a:r>
-            <a:r>
-              <a:rPr sz="1000" dirty="0" err="1">
-                <a:solidFill>
-                  <a:srgbClr val="C00000"/>
-                </a:solidFill>
-                <a:latin typeface="맑은 고딕"/>
-              </a:rPr>
-              <a:t/>
-            </a:r>
-            <a:r>
-              <a:rPr sz="1000" dirty="0">
-                <a:solidFill>
-                  <a:srgbClr val="C00000"/>
-                </a:solidFill>
-                <a:latin typeface="맑은 고딕"/>
-              </a:rPr>
-              <a:t/>
-            </a:r>
-            <a:r>
-              <a:rPr sz="1000" dirty="0" err="1">
-                <a:solidFill>
-                  <a:srgbClr val="C00000"/>
-                </a:solidFill>
-                <a:latin typeface="맑은 고딕"/>
-              </a:rPr>
-              <a:t/>
-            </a:r>
-            <a:r>
-              <a:rPr sz="1000" dirty="0">
-                <a:solidFill>
-                  <a:srgbClr val="C00000"/>
-                </a:solidFill>
-                <a:latin typeface="맑은 고딕"/>
-              </a:rPr>
-              <a:t/>
-            </a:r>
-            <a:r>
-              <a:rPr sz="1000" dirty="0" err="1">
-                <a:solidFill>
-                  <a:srgbClr val="C00000"/>
-                </a:solidFill>
-                <a:latin typeface="맑은 고딕"/>
-              </a:rPr>
-              <a:t/>
-            </a:r>
-            <a:r>
-              <a:rPr sz="1000" dirty="0">
-                <a:solidFill>
-                  <a:srgbClr val="C00000"/>
-                </a:solidFill>
-                <a:latin typeface="맑은 고딕"/>
-              </a:rPr>
-              <a:t/>
-            </a:r>
-            <a:r>
-              <a:rPr sz="1000" dirty="0" err="1">
-                <a:solidFill>
-                  <a:srgbClr val="C00000"/>
-                </a:solidFill>
-                <a:latin typeface="맑은 고딕"/>
-              </a:rPr>
-              <a:t/>
-            </a:r>
-            <a:r>
-              <a:rPr sz="1000" dirty="0">
-                <a:solidFill>
-                  <a:srgbClr val="C00000"/>
-                </a:solidFill>
-                <a:latin typeface="맑은 고딕"/>
-              </a:rPr>
-              <a:t/>
-            </a:r>
-            <a:r>
-              <a:rPr sz="1000" dirty="0" err="1">
-                <a:solidFill>
-                  <a:srgbClr val="C00000"/>
-                </a:solidFill>
-                <a:latin typeface="맑은 고딕"/>
-              </a:rPr>
-              <a:t/>
-            </a:r>
-            <a:r>
-              <a:rPr sz="1000" dirty="0">
-                <a:solidFill>
-                  <a:srgbClr val="C00000"/>
-                </a:solidFill>
-                <a:latin typeface="맑은 고딕"/>
-              </a:rPr>
-              <a:t/>
-            </a:r>
-            <a:r>
-              <a:rPr sz="1000" dirty="0" err="1">
-                <a:solidFill>
-                  <a:srgbClr val="C00000"/>
-                </a:solidFill>
-                <a:latin typeface="맑은 고딕"/>
-              </a:rPr>
-              <a:t/>
-            </a:r>
-            <a:r>
-              <a:rPr sz="1000" dirty="0">
-                <a:solidFill>
-                  <a:srgbClr val="C00000"/>
-                </a:solidFill>
-                <a:latin typeface="맑은 고딕"/>
-              </a:rPr>
-              <a:t/>
-            </a:r>
-            <a:r>
-              <a:rPr lang="ko-KR" altLang="en-US" sz="1000" dirty="0">
-                <a:solidFill>
-                  <a:srgbClr val="C00000"/>
-                </a:solidFill>
-                <a:latin typeface="맑은 고딕"/>
-              </a:rPr>
-              <a:t/>
-            </a:r>
-            <a:r>
-              <a:rPr sz="1000" b="0" dirty="0">
-                <a:solidFill>
-                  <a:srgbClr val="C00000"/>
-                </a:solidFill>
-                <a:latin typeface="맑은 고딕"/>
-              </a:rPr>
-              <a:t/>
             </a:r>
           </a:p>
         </p:txBody>
@@ -9058,7 +8540,7 @@
           <p:nvPr/>
         </p:nvPicPr>
         <p:blipFill>
-          <a:blip r:embed="rId3"/>
+          <a:blip r:embed="rId2"/>
           <a:stretch>
             <a:fillRect/>
           </a:stretch>

--- a/docs/산출물_20260909/06_ECS_화면설계서.pptx
+++ b/docs/산출물_20260909/06_ECS_화면설계서.pptx
@@ -3182,7 +3182,7 @@
             <a:r>
               <a:rPr sz="2200" b="0" dirty="0">
                 <a:solidFill>
-                  <a:schemeClr val="bg1"/>
+                  <a:srgbClr val="000000"/>
                 </a:solidFill>
                 <a:latin typeface="맑은 고딕"/>
               </a:rPr>
@@ -3191,7 +3191,7 @@
             <a:r>
               <a:rPr sz="2200" b="0" dirty="0" err="1">
                 <a:solidFill>
-                  <a:schemeClr val="bg1"/>
+                  <a:srgbClr val="000000"/>
                 </a:solidFill>
                 <a:latin typeface="맑은 고딕"/>
               </a:rPr>
@@ -3200,7 +3200,7 @@
             <a:r>
               <a:rPr sz="2200" b="0" dirty="0">
                 <a:solidFill>
-                  <a:schemeClr val="bg1"/>
+                  <a:srgbClr val="000000"/>
                 </a:solidFill>
                 <a:latin typeface="맑은 고딕"/>
               </a:rPr>
@@ -3209,7 +3209,7 @@
             <a:r>
               <a:rPr sz="2200" b="0" dirty="0" err="1">
                 <a:solidFill>
-                  <a:schemeClr val="bg1"/>
+                  <a:srgbClr val="000000"/>
                 </a:solidFill>
                 <a:latin typeface="맑은 고딕"/>
               </a:rPr>
@@ -3250,7 +3250,7 @@
             <a:r>
               <a:rPr sz="4800" b="1" dirty="0">
                 <a:solidFill>
-                  <a:schemeClr val="bg1"/>
+                  <a:srgbClr val="C00000"/>
                 </a:solidFill>
                 <a:latin typeface="맑은 고딕"/>
               </a:rPr>
@@ -3259,7 +3259,7 @@
             <a:r>
               <a:rPr sz="4800" b="1" dirty="0" err="1">
                 <a:solidFill>
-                  <a:schemeClr val="bg1"/>
+                  <a:srgbClr val="C00000"/>
                 </a:solidFill>
                 <a:latin typeface="맑은 고딕"/>
               </a:rPr>
@@ -3300,7 +3300,7 @@
             <a:r>
               <a:rPr sz="1600" b="0" dirty="0">
                 <a:solidFill>
-                  <a:schemeClr val="bg1"/>
+                  <a:srgbClr val="C00000"/>
                 </a:solidFill>
                 <a:latin typeface="맑은 고딕"/>
               </a:rPr>
@@ -3309,7 +3309,7 @@
             <a:r>
               <a:rPr sz="1600" b="0" dirty="0" err="1">
                 <a:solidFill>
-                  <a:schemeClr val="bg1"/>
+                  <a:srgbClr val="C00000"/>
                 </a:solidFill>
                 <a:latin typeface="맑은 고딕"/>
               </a:rPr>
@@ -3318,7 +3318,7 @@
             <a:r>
               <a:rPr sz="1600" b="0" dirty="0">
                 <a:solidFill>
-                  <a:schemeClr val="bg1"/>
+                  <a:srgbClr val="C00000"/>
                 </a:solidFill>
                 <a:latin typeface="맑은 고딕"/>
               </a:rPr>
@@ -3327,7 +3327,7 @@
             <a:r>
               <a:rPr sz="1600" b="0" dirty="0" err="1">
                 <a:solidFill>
-                  <a:schemeClr val="bg1"/>
+                  <a:srgbClr val="C00000"/>
                 </a:solidFill>
                 <a:latin typeface="맑은 고딕"/>
               </a:rPr>
@@ -3336,7 +3336,7 @@
             <a:r>
               <a:rPr sz="1600" b="0" dirty="0">
                 <a:solidFill>
-                  <a:schemeClr val="bg1"/>
+                  <a:srgbClr val="C00000"/>
                 </a:solidFill>
                 <a:latin typeface="맑은 고딕"/>
               </a:rPr>
@@ -3345,7 +3345,7 @@
             <a:r>
               <a:rPr sz="1600" b="0" dirty="0" err="1">
                 <a:solidFill>
-                  <a:schemeClr val="bg1"/>
+                  <a:srgbClr val="C00000"/>
                 </a:solidFill>
                 <a:latin typeface="맑은 고딕"/>
               </a:rPr>
@@ -3354,7 +3354,7 @@
             <a:r>
               <a:rPr sz="1600" b="0" dirty="0">
                 <a:solidFill>
-                  <a:schemeClr val="bg1"/>
+                  <a:srgbClr val="C00000"/>
                 </a:solidFill>
                 <a:latin typeface="맑은 고딕"/>
               </a:rPr>
@@ -3363,7 +3363,7 @@
             <a:r>
               <a:rPr sz="1600" b="0" dirty="0" err="1">
                 <a:solidFill>
-                  <a:schemeClr val="bg1"/>
+                  <a:srgbClr val="C00000"/>
                 </a:solidFill>
                 <a:latin typeface="맑은 고딕"/>
               </a:rPr>
@@ -3372,7 +3372,7 @@
             <a:r>
               <a:rPr sz="1600" b="0" dirty="0">
                 <a:solidFill>
-                  <a:schemeClr val="bg1"/>
+                  <a:srgbClr val="C00000"/>
                 </a:solidFill>
                 <a:latin typeface="맑은 고딕"/>
               </a:rPr>
@@ -3381,7 +3381,7 @@
             <a:r>
               <a:rPr sz="1600" b="0" dirty="0" err="1">
                 <a:solidFill>
-                  <a:schemeClr val="bg1"/>
+                  <a:srgbClr val="C00000"/>
                 </a:solidFill>
                 <a:latin typeface="맑은 고딕"/>
               </a:rPr>
@@ -3390,7 +3390,7 @@
             <a:r>
               <a:rPr sz="1600" b="0" dirty="0">
                 <a:solidFill>
-                  <a:schemeClr val="bg1"/>
+                  <a:srgbClr val="C00000"/>
                 </a:solidFill>
                 <a:latin typeface="맑은 고딕"/>
               </a:rPr>
@@ -3745,15 +3745,15 @@
           <p:nvPr/>
         </p:nvPicPr>
         <p:blipFill>
-          <a:blip r:embed="rId2"/>
+          <a:blip r:embed="rId3"/>
           <a:stretch>
             <a:fillRect/>
           </a:stretch>
         </p:blipFill>
         <p:spPr>
           <a:xfrm>
-            <a:off x="559842" y="1353127"/>
-            <a:ext cx="7658556" cy="4151744"/>
+            <a:off x="559842" y="1356125"/>
+            <a:ext cx="7658556" cy="4145747"/>
           </a:xfrm>
           <a:prstGeom prst="rect">
             <a:avLst/>
@@ -4106,15 +4106,15 @@
           <p:nvPr/>
         </p:nvPicPr>
         <p:blipFill>
-          <a:blip r:embed="rId2"/>
+          <a:blip r:embed="rId3"/>
           <a:stretch>
             <a:fillRect/>
           </a:stretch>
         </p:blipFill>
         <p:spPr>
           <a:xfrm>
-            <a:off x="559842" y="1353127"/>
-            <a:ext cx="7658556" cy="4151743"/>
+            <a:off x="559842" y="1356125"/>
+            <a:ext cx="7658556" cy="4145747"/>
           </a:xfrm>
           <a:prstGeom prst="rect">
             <a:avLst/>
@@ -11865,22 +11865,22 @@
       </p:sp>
       <p:pic>
         <p:nvPicPr>
-          <p:cNvPr id="8" name="Picture 7" descr="image.png"/>
+          <p:cNvPr id="8" name="Picture 7" descr="main_0.png"/>
           <p:cNvPicPr>
             <a:picLocks noChangeAspect="1"/>
           </p:cNvPicPr>
           <p:nvPr/>
         </p:nvPicPr>
         <p:blipFill>
-          <a:blip r:embed="rId2"/>
+          <a:blip r:embed="rId3"/>
           <a:stretch>
             <a:fillRect/>
           </a:stretch>
         </p:blipFill>
         <p:spPr>
           <a:xfrm>
-            <a:off x="559841" y="1353127"/>
-            <a:ext cx="7658558" cy="4151744"/>
+            <a:off x="559841" y="1356125"/>
+            <a:ext cx="7658558" cy="4145748"/>
           </a:xfrm>
           <a:prstGeom prst="rect">
             <a:avLst/>

--- a/docs/산출물_20260909/06_ECS_화면설계서.pptx
+++ b/docs/산출물_20260909/06_ECS_화면설계서.pptx
@@ -3753,7 +3753,7 @@
         <p:spPr>
           <a:xfrm>
             <a:off x="559842" y="1356125"/>
-            <a:ext cx="7658556" cy="4145747"/>
+            <a:ext cx="7658555" cy="4145747"/>
           </a:xfrm>
           <a:prstGeom prst="rect">
             <a:avLst/>
@@ -4114,7 +4114,7 @@
         <p:spPr>
           <a:xfrm>
             <a:off x="559842" y="1356125"/>
-            <a:ext cx="7658556" cy="4145747"/>
+            <a:ext cx="7658555" cy="4145747"/>
           </a:xfrm>
           <a:prstGeom prst="rect">
             <a:avLst/>
@@ -11880,7 +11880,7 @@
         <p:spPr>
           <a:xfrm>
             <a:off x="559841" y="1356125"/>
-            <a:ext cx="7658558" cy="4145748"/>
+            <a:ext cx="7658557" cy="4145748"/>
           </a:xfrm>
           <a:prstGeom prst="rect">
             <a:avLst/>
